--- a/downloads/presentations/modules/anl-340.pptx
+++ b/downloads/presentations/modules/anl-340.pptx
@@ -614,7 +614,8 @@
               <a:rPr lang="en-US" dirty="0"/>
               <a:t>Public Health Example
 A local health department uses an AI model to predict which neighborhoods are likely to experience low vaccination coverage. The model may help target outreach, but it does not prove why coverage is low or which outreach strategy will work. If leaders want to know whether mobile clinics, reminder messages, school partnerships, or community health workers caused an improvement, they need an evaluation design that supports causal inference.
-This distinction prevents overclaiming. The AI model can support prioritization and hypothesis generation, while causal methods can support evaluation of the chosen intervention. Both are valuable, but they answer different questions.</a:t>
+This distinction prevents overclaiming. The AI model can support prioritization and hypothesis generation, while causal methods can support evaluation of the chosen intervention. Both are valuable, but they answer different questions.
+Application guidance: Connect the concept to public health purpose, responsible use, required safeguards, documentation, and the next action a department should take.</a:t>
             </a:r>
             <a:endParaRPr lang="en-US" dirty="0"/>
           </a:p>
@@ -705,7 +706,8 @@
               <a:t>Technical and Operational Deep Dive
 Causal inference begins with a clearly framed question. A useful structure is: among which population, what is the intervention or exposure, what is the comparison, what outcome is measured, and over what time period? Without this structure, teams may ask a model to answer a question that the available data cannot support.
 Confounding is one of the most important threats. For example, a program may appear to improve outcomes because participants were already more connected to care. Selection bias may occur when data include only people who interacted with a system. Temporal ambiguity may occur when it is unclear whether the exposure occurred before the outcome. AI can detect patterns in these data, but it does not automatically solve the causal design problem.
-Methods such as matching, regression adjustment, difference-in-differences, interrupted time series, regression discontinuity, and instrumental variables may be useful when randomization is not possible. These methods require assumptions that should be documented and reviewed. Public health staff should know when to consult epidemiologists, statisticians, or evaluators before making causal claims.</a:t>
+Methods such as matching, regression adjustment, difference-in-differences, interrupted time series, regression discontinuity, and instrumental variables may be useful when randomization is not possible. These methods require assumptions that should be documented and reviewed. Public health staff should know when to consult epidemiologists, statisticians, or evaluators before making causal claims.
+Application guidance: Connect the concept to public health purpose, responsible use, required safeguards, documentation, and the next action a department should take.</a:t>
             </a:r>
             <a:endParaRPr lang="en-US" dirty="0"/>
           </a:p>
@@ -795,7 +797,8 @@
               <a:rPr lang="en-US" dirty="0"/>
               <a:t>Risks, Failure Modes, and Guardrails
 The main failure mode is causal overreach. A dashboard or AI report may state that a program reduced disease, improved access, or changed behavior when the evidence only shows association. A guardrail is to require causal language review before results are used in reports, funding decisions, policy recommendations, or public communications.
-Another risk is inequitable inference. Data may be more complete for some groups than others, and interventions may reach groups differently. A guardrail is to examine whether assumptions hold across populations and whether subgroup effects or access barriers are hidden by aggregate results.</a:t>
+Another risk is inequitable inference. Data may be more complete for some groups than others, and interventions may reach groups differently. A guardrail is to examine whether assumptions hold across populations and whether subgroup effects or access barriers are hidden by aggregate results.
+Application guidance: Identify what could go wrong, who could be affected, what safeguards are needed, and what evidence should be reviewed before use expands.</a:t>
             </a:r>
             <a:endParaRPr lang="en-US" dirty="0"/>
           </a:p>
@@ -884,7 +887,8 @@
             <a:r>
               <a:rPr lang="en-US" dirty="0"/>
               <a:t>Application to AI-Supported Workflows
-Predictive models can identify risk, but causal inference is needed to decide what action is likely to change that risk. Generative AI may help draft evaluation questions or summarize literature, but humans must verify methods and assumptions. AI-supported decision-making should label outputs clearly as prediction, association, causal evidence, or hypothesis.</a:t>
+Predictive models can identify risk, but causal inference is needed to decide what action is likely to change that risk. Generative AI may help draft evaluation questions or summarize literature, but humans must verify methods and assumptions. AI-supported decision-making should label outputs clearly as prediction, association, causal evidence, or hypothesis.
+Application guidance: Use the concept to clarify workflow changes, dependencies, staffing, procurement requirements, training needs, and implementation checkpoints.</a:t>
             </a:r>
             <a:endParaRPr lang="en-US" dirty="0"/>
           </a:p>
@@ -975,7 +979,8 @@
               <a:t>Reflection Questions
 What AI outputs in your agency could be mistaken for causal evidence?
 Which decisions require knowing what intervention will change an outcome?
-What confounders are likely in your program area?</a:t>
+What confounders are likely in your program area?
+Application guidance: Connect the concept to public health purpose, responsible use, required safeguards, documentation, and the next action a department should take.</a:t>
             </a:r>
             <a:endParaRPr lang="en-US" dirty="0"/>
           </a:p>
@@ -1065,7 +1070,8 @@
               <a:rPr lang="en-US" dirty="0"/>
               <a:t>Reflection Questions
 What comparison group could support evaluation?
-Who should review causal claims before public release?</a:t>
+Who should review causal claims before public release?
+Application guidance: Connect the concept to public health purpose, responsible use, required safeguards, documentation, and the next action a department should take.</a:t>
             </a:r>
             <a:endParaRPr lang="en-US" dirty="0"/>
           </a:p>
@@ -1154,7 +1160,8 @@
             <a:r>
               <a:rPr lang="en-US" dirty="0"/>
               <a:t>Practical Exercise
-Create a causal question framing worksheet for an AI-supported decision. Identify the population, intervention or exposure, comparison, outcome, time period, likely confounders, data limitations, and what evidence would be needed before making a causal claim.</a:t>
+Create a causal question framing worksheet for an AI-supported decision. Identify the population, intervention or exposure, comparison, outcome, time period, likely confounders, data limitations, and what evidence would be needed before making a causal claim.
+Application guidance: Use the assignment to test whether you can explain the concept, apply it to a realistic public health situation, and identify what would need review before the work moves forward.</a:t>
             </a:r>
             <a:endParaRPr lang="en-US" dirty="0"/>
           </a:p>
@@ -1245,7 +1252,8 @@
               <a:t>Expected Artifact or Evidence
 Causal question framing worksheet
 List of assumptions and likely confounders
-Recommended evaluation design or expert consultation need</a:t>
+Recommended evaluation design or expert consultation need
+Application guidance: Connect the concept to public health purpose, responsible use, required safeguards, documentation, and the next action a department should take.</a:t>
             </a:r>
             <a:endParaRPr lang="en-US" dirty="0"/>
           </a:p>
@@ -1334,7 +1342,8 @@
             <a:r>
               <a:rPr lang="en-US" dirty="0"/>
               <a:t>Expected Artifact or Evidence
-Plain-language statement distinguishing prediction from causation</a:t>
+Plain-language statement distinguishing prediction from causation
+Application guidance: Connect the concept to public health purpose, responsible use, required safeguards, documentation, and the next action a department should take.</a:t>
             </a:r>
             <a:endParaRPr lang="en-US" dirty="0"/>
           </a:p>
@@ -1426,7 +1435,8 @@
 Causal question framing worksheet
 List of assumptions and likely confounders
 Recommended evaluation design or expert consultation need
-Plain-language statement distinguishing prediction from causation</a:t>
+Plain-language statement distinguishing prediction from causation
+Application guidance: Use the assignment to test whether you can explain the concept, apply it to a realistic public health situation, and identify what would need review before the work moves forward.</a:t>
             </a:r>
             <a:endParaRPr lang="en-US" dirty="0"/>
           </a:p>
@@ -1611,7 +1621,8 @@
 2. What is the best reason to assign an accountability owner?
 3. When should an AI-supported workflow be escalated for review?
 4. Which practice best supports public accountability?
-5. What should happen when data sources, policy, vendor configuration, or workflow use changes?</a:t>
+5. What should happen when data sources, policy, vendor configuration, or workflow use changes?
+Application guidance: Use the assignment to test whether you can explain the concept, apply it to a realistic public health situation, and identify what would need review before the work moves forward.</a:t>
             </a:r>
             <a:endParaRPr lang="en-US" dirty="0"/>
           </a:p>
@@ -1704,7 +1715,8 @@
 NIST Artificial Intelligence Risk Management Framework and NIST Generative AI Profile: https://www.nist.gov/publications/artificial-intelligence-risk-management-framework-generative-artificial-intelligence
 WHO Ethics and Governance of Artificial Intelligence for Health guidance: https://www.who.int/publications/i/item/9789240029200
 OWASP Top 10 for Large Language Model Applications: https://owasp.org/www-project-top-10-for-large-language-model-applications/
-ONC health IT, interoperability, and information blocking resources: https://www.healthit.gov/</a:t>
+ONC health IT, interoperability, and information blocking resources: https://www.healthit.gov/
+Application guidance: Connect the concept to public health purpose, responsible use, required safeguards, documentation, and the next action a department should take.</a:t>
             </a:r>
             <a:endParaRPr lang="en-US" dirty="0"/>
           </a:p>
@@ -1793,7 +1805,8 @@
             <a:r>
               <a:rPr lang="en-US" dirty="0"/>
               <a:t>References and Resources
-Agency policies for privacy, public records, cybersecurity, procurement, civil rights, accessibility, language access, and emergency communications</a:t>
+Agency policies for privacy, public records, cybersecurity, procurement, civil rights, accessibility, language access, and emergency communications
+Application guidance: Connect the concept to public health purpose, responsible use, required safeguards, documentation, and the next action a department should take.</a:t>
             </a:r>
             <a:endParaRPr lang="en-US" dirty="0"/>
           </a:p>
@@ -2072,7 +2085,8 @@
 Explain why correlation and prediction do not establish causation.
 Identify confounding, selection bias, collider bias, and temporal ambiguity in public health data.
 Recognize when a decision requires causal evidence rather than risk prediction alone.
-Identify appropriate evidence sources for evaluating interventions or policy effects.</a:t>
+Identify appropriate evidence sources for evaluating interventions or policy effects.
+Application guidance: Use the assignment to test whether you can explain the concept, apply it to a realistic public health situation, and identify what would need review before the work moves forward.</a:t>
             </a:r>
             <a:endParaRPr lang="en-US" dirty="0"/>
           </a:p>
@@ -2161,7 +2175,8 @@
             <a:r>
               <a:rPr lang="en-US" dirty="0"/>
               <a:t>Learning Objectives
-Create a causal question framing worksheet for an AI-supported decision.</a:t>
+Create a causal question framing worksheet for an AI-supported decision.
+Application guidance: Use the assignment to test whether you can explain the concept, apply it to a realistic public health situation, and identify what would need review before the work moves forward.</a:t>
             </a:r>
             <a:endParaRPr lang="en-US" dirty="0"/>
           </a:p>
@@ -2251,7 +2266,8 @@
               <a:rPr lang="en-US" dirty="0"/>
               <a:t>Module Overview
 AI models often predict what is likely to happen, but public health leaders frequently need to know what action will change an outcome. This module helps learners distinguish prediction from causal inference so AI outputs are not misused as evidence that a program, policy, or intervention caused an observed effect.
-Learners examine confounding, bias, comparison groups, counterfactual reasoning, directed acyclic graphs, and quasi-experimental designs at a practical level. The purpose is not to turn every learner into a causal methods expert. The purpose is to help public health teams recognize when causal claims require stronger evidence than a predictive model can provide.</a:t>
+Learners examine confounding, bias, comparison groups, counterfactual reasoning, directed acyclic graphs, and quasi-experimental designs at a practical level. The purpose is not to turn every learner into a causal methods expert. The purpose is to help public health teams recognize when causal claims require stronger evidence than a predictive model can provide.
+Application guidance: Connect the concept to public health purpose, responsible use, required safeguards, documentation, and the next action a department should take.</a:t>
             </a:r>
             <a:endParaRPr lang="en-US" dirty="0"/>
           </a:p>
@@ -2344,7 +2360,8 @@
 Causal inference: The process of estimating whether and how an exposure, policy, program, or intervention changes an outcome.
 Confounding: A distortion that occurs when another factor is related to both the exposure and the outcome.
 Counterfactual: The outcome that would have occurred under a different condition or intervention.
-Quasi-experimental design: An evaluation approach that estimates causal effects without random assignment.</a:t>
+Quasi-experimental design: An evaluation approach that estimates causal effects without random assignment.
+Application guidance: Connect the concept to public health purpose, responsible use, required safeguards, documentation, and the next action a department should take.</a:t>
             </a:r>
             <a:endParaRPr lang="en-US" dirty="0"/>
           </a:p>
@@ -2434,7 +2451,8 @@
               <a:rPr lang="en-US" dirty="0"/>
               <a:t>Why This Topic Matters for Public Health AI
 AI can make weak evidence appear stronger than it is. A model may predict which communities have higher hospitalization risk, but that does not prove which intervention will reduce hospitalization. A model may find that people who receive a service have better outcomes, but that pattern may reflect who was able to access the service rather than the effect of the service itself.
-Public health decisions often involve resource allocation, program design, policy evaluation, and equity tradeoffs. These decisions require clarity about whether the agency is asking a prediction question, an explanation question, or an intervention question. Causal inference helps agencies avoid treating AI-generated associations as proof of program effectiveness.</a:t>
+Public health decisions often involve resource allocation, program design, policy evaluation, and equity tradeoffs. These decisions require clarity about whether the agency is asking a prediction question, an explanation question, or an intervention question. Causal inference helps agencies avoid treating AI-generated associations as proof of program effectiveness.
+Application guidance: Connect the concept to public health purpose, responsible use, required safeguards, documentation, and the next action a department should take.</a:t>
             </a:r>
             <a:endParaRPr lang="en-US" dirty="0"/>
           </a:p>
@@ -3205,8 +3223,8 @@
         </p:nvSpPr>
         <p:spPr>
           <a:xfrm>
-            <a:off x="9966960" y="6537960"/>
-            <a:ext cx="1645920" cy="201168"/>
+            <a:off x="9646920" y="6537960"/>
+            <a:ext cx="1965960" cy="201168"/>
           </a:xfrm>
           <a:prstGeom prst="rect">
             <a:avLst/>
@@ -3230,7 +3248,7 @@
                 <a:ea typeface="Aptos" pitchFamily="34" charset="-122"/>
                 <a:cs typeface="Aptos" pitchFamily="34" charset="-120"/>
               </a:rPr>
-              <a:t>Â© Paula Soper</a:t>
+              <a:t>Copyright Paula Soper</a:t>
             </a:r>
             <a:endParaRPr lang="en-US" sz="800" dirty="0"/>
           </a:p>
@@ -3277,77 +3295,13 @@
       </p:sp>
       <p:sp>
         <p:nvSpPr>
-          <p:cNvPr id="8" name="Shape 6"/>
+          <p:cNvPr id="8" name="Text 6"/>
           <p:cNvSpPr/>
           <p:nvPr/>
         </p:nvSpPr>
         <p:spPr>
           <a:xfrm>
             <a:off x="640080" y="658368"/>
-            <a:ext cx="420624" cy="420624"/>
-          </a:xfrm>
-          <a:prstGeom prst="ellipse">
-            <a:avLst/>
-          </a:prstGeom>
-          <a:solidFill>
-            <a:srgbClr val="0068B7"/>
-          </a:solidFill>
-          <a:ln w="12700">
-            <a:solidFill>
-              <a:srgbClr val="0068B7"/>
-            </a:solidFill>
-            <a:prstDash val="solid"/>
-          </a:ln>
-        </p:spPr>
-      </p:sp>
-      <p:sp>
-        <p:nvSpPr>
-          <p:cNvPr id="9" name="Text 7"/>
-          <p:cNvSpPr/>
-          <p:nvPr/>
-        </p:nvSpPr>
-        <p:spPr>
-          <a:xfrm>
-            <a:off x="640080" y="731520"/>
-            <a:ext cx="420624" cy="164592"/>
-          </a:xfrm>
-          <a:prstGeom prst="rect">
-            <a:avLst/>
-          </a:prstGeom>
-          <a:noFill/>
-          <a:ln/>
-        </p:spPr>
-        <p:txBody>
-          <a:bodyPr wrap="square" lIns="0" tIns="0" rIns="0" bIns="0" rtlCol="0" anchor="ctr"/>
-          <a:lstStyle/>
-          <a:p>
-            <a:pPr algn="ctr" indent="0" marL="0">
-              <a:buNone/>
-            </a:pPr>
-            <a:r>
-              <a:rPr lang="en-US" sz="1100" b="1" dirty="0">
-                <a:solidFill>
-                  <a:srgbClr val="FFFFFF"/>
-                </a:solidFill>
-                <a:latin typeface="Aptos" pitchFamily="34" charset="0"/>
-                <a:ea typeface="Aptos" pitchFamily="34" charset="-122"/>
-                <a:cs typeface="Aptos" pitchFamily="34" charset="-120"/>
-              </a:rPr>
-              <a:t>5</a:t>
-            </a:r>
-            <a:endParaRPr lang="en-US" sz="1100" dirty="0"/>
-          </a:p>
-        </p:txBody>
-      </p:sp>
-      <p:sp>
-        <p:nvSpPr>
-          <p:cNvPr id="10" name="Text 8"/>
-          <p:cNvSpPr/>
-          <p:nvPr/>
-        </p:nvSpPr>
-        <p:spPr>
-          <a:xfrm>
-            <a:off x="640080" y="621792"/>
             <a:ext cx="10881360" cy="713232"/>
           </a:xfrm>
           <a:prstGeom prst="rect">
@@ -3382,14 +3336,14 @@
       </p:sp>
       <p:sp>
         <p:nvSpPr>
-          <p:cNvPr id="11" name="Text 9"/>
+          <p:cNvPr id="9" name="Text 7"/>
           <p:cNvSpPr/>
           <p:nvPr/>
         </p:nvSpPr>
         <p:spPr>
           <a:xfrm>
             <a:off x="868680" y="1508760"/>
-            <a:ext cx="6537960" cy="4160520"/>
+            <a:ext cx="6309360" cy="4160520"/>
           </a:xfrm>
           <a:prstGeom prst="rect">
             <a:avLst/>
@@ -3448,18 +3402,18 @@
       </p:sp>
       <p:sp>
         <p:nvSpPr>
-          <p:cNvPr id="12" name="Shape 10"/>
-          <p:cNvSpPr/>
-          <p:nvPr/>
-        </p:nvSpPr>
-        <p:spPr>
-          <a:xfrm>
-            <a:off x="7909560" y="1417320"/>
-            <a:ext cx="3154680" cy="1828800"/>
+          <p:cNvPr id="10" name="Shape 8"/>
+          <p:cNvSpPr/>
+          <p:nvPr/>
+        </p:nvSpPr>
+        <p:spPr>
+          <a:xfrm>
+            <a:off x="7635240" y="1325880"/>
+            <a:ext cx="3474720" cy="1325880"/>
           </a:xfrm>
           <a:prstGeom prst="roundRect">
             <a:avLst>
-              <a:gd name="adj" fmla="val 6000"/>
+              <a:gd name="adj" fmla="val 8276"/>
             </a:avLst>
           </a:prstGeom>
           <a:solidFill>
@@ -3475,14 +3429,14 @@
       </p:sp>
       <p:sp>
         <p:nvSpPr>
-          <p:cNvPr id="13" name="Text 11"/>
-          <p:cNvSpPr/>
-          <p:nvPr/>
-        </p:nvSpPr>
-        <p:spPr>
-          <a:xfrm>
-            <a:off x="8074152" y="1563624"/>
-            <a:ext cx="2825496" cy="256032"/>
+          <p:cNvPr id="11" name="Text 9"/>
+          <p:cNvSpPr/>
+          <p:nvPr/>
+        </p:nvSpPr>
+        <p:spPr>
+          <a:xfrm>
+            <a:off x="7799832" y="1472184"/>
+            <a:ext cx="3145536" cy="256032"/>
           </a:xfrm>
           <a:prstGeom prst="rect">
             <a:avLst/>
@@ -3506,7 +3460,7 @@
                 <a:ea typeface="Aptos" pitchFamily="34" charset="-122"/>
                 <a:cs typeface="Aptos" pitchFamily="34" charset="-120"/>
               </a:rPr>
-              <a:t>Key idea</a:t>
+              <a:t>Core concept</a:t>
             </a:r>
             <a:endParaRPr lang="en-US" sz="1300" dirty="0"/>
           </a:p>
@@ -3514,14 +3468,14 @@
       </p:sp>
       <p:sp>
         <p:nvSpPr>
-          <p:cNvPr id="14" name="Text 12"/>
-          <p:cNvSpPr/>
-          <p:nvPr/>
-        </p:nvSpPr>
-        <p:spPr>
-          <a:xfrm>
-            <a:off x="8074152" y="1920240"/>
-            <a:ext cx="2825496" cy="1188720"/>
+          <p:cNvPr id="12" name="Text 10"/>
+          <p:cNvSpPr/>
+          <p:nvPr/>
+        </p:nvSpPr>
+        <p:spPr>
+          <a:xfrm>
+            <a:off x="7799832" y="1828800"/>
+            <a:ext cx="3145536" cy="685800"/>
           </a:xfrm>
           <a:prstGeom prst="rect">
             <a:avLst/>
@@ -3555,18 +3509,159 @@
       </p:sp>
       <p:sp>
         <p:nvSpPr>
-          <p:cNvPr id="15" name="Shape 13"/>
-          <p:cNvSpPr/>
-          <p:nvPr/>
-        </p:nvSpPr>
-        <p:spPr>
-          <a:xfrm>
-            <a:off x="7909560" y="3520440"/>
-            <a:ext cx="3154680" cy="1737360"/>
+          <p:cNvPr id="13" name="Shape 11"/>
+          <p:cNvSpPr/>
+          <p:nvPr/>
+        </p:nvSpPr>
+        <p:spPr>
+          <a:xfrm>
+            <a:off x="7635240" y="2788920"/>
+            <a:ext cx="3474720" cy="1536192"/>
           </a:xfrm>
           <a:prstGeom prst="roundRect">
             <a:avLst>
-              <a:gd name="adj" fmla="val 6316"/>
+              <a:gd name="adj" fmla="val 7143"/>
+            </a:avLst>
+          </a:prstGeom>
+          <a:solidFill>
+            <a:srgbClr val="FFFFFF">
+              <a:alpha val="88000"/>
+            </a:srgbClr>
+          </a:solidFill>
+          <a:ln w="12700">
+            <a:solidFill>
+              <a:srgbClr val="D6E8F2"/>
+            </a:solidFill>
+            <a:prstDash val="solid"/>
+          </a:ln>
+        </p:spPr>
+      </p:sp>
+      <p:sp>
+        <p:nvSpPr>
+          <p:cNvPr id="14" name="Shape 12"/>
+          <p:cNvSpPr/>
+          <p:nvPr/>
+        </p:nvSpPr>
+        <p:spPr>
+          <a:xfrm>
+            <a:off x="8074152" y="3291840"/>
+            <a:ext cx="2596896" cy="749808"/>
+          </a:xfrm>
+          <a:prstGeom prst="rect">
+            <a:avLst/>
+          </a:prstGeom>
+          <a:solidFill>
+            <a:srgbClr val="EAF6F8"/>
+          </a:solidFill>
+          <a:ln w="12700">
+            <a:solidFill>
+              <a:srgbClr val="8ABBD8"/>
+            </a:solidFill>
+            <a:prstDash val="solid"/>
+          </a:ln>
+        </p:spPr>
+      </p:sp>
+      <p:sp>
+        <p:nvSpPr>
+          <p:cNvPr id="15" name="Shape 13"/>
+          <p:cNvSpPr/>
+          <p:nvPr/>
+        </p:nvSpPr>
+        <p:spPr>
+          <a:xfrm>
+            <a:off x="8202168" y="3721608"/>
+            <a:ext cx="2340864" cy="0"/>
+          </a:xfrm>
+          <a:prstGeom prst="line">
+            <a:avLst/>
+          </a:prstGeom>
+          <a:noFill/>
+          <a:ln w="19050">
+            <a:solidFill>
+              <a:srgbClr val="0068B7"/>
+            </a:solidFill>
+            <a:prstDash val="solid"/>
+          </a:ln>
+        </p:spPr>
+      </p:sp>
+      <p:sp>
+        <p:nvSpPr>
+          <p:cNvPr id="16" name="Shape 14"/>
+          <p:cNvSpPr/>
+          <p:nvPr/>
+        </p:nvSpPr>
+        <p:spPr>
+          <a:xfrm>
+            <a:off x="9198864" y="4206240"/>
+            <a:ext cx="347472" cy="347472"/>
+          </a:xfrm>
+          <a:prstGeom prst="ellipse">
+            <a:avLst/>
+          </a:prstGeom>
+          <a:solidFill>
+            <a:srgbClr val="2F8A28"/>
+          </a:solidFill>
+          <a:ln w="12700">
+            <a:solidFill>
+              <a:srgbClr val="2F8A28"/>
+            </a:solidFill>
+            <a:prstDash val="solid"/>
+          </a:ln>
+        </p:spPr>
+      </p:sp>
+      <p:sp>
+        <p:nvSpPr>
+          <p:cNvPr id="17" name="Text 15"/>
+          <p:cNvSpPr/>
+          <p:nvPr/>
+        </p:nvSpPr>
+        <p:spPr>
+          <a:xfrm>
+            <a:off x="7909560" y="3977640"/>
+            <a:ext cx="2926080" cy="182880"/>
+          </a:xfrm>
+          <a:prstGeom prst="rect">
+            <a:avLst/>
+          </a:prstGeom>
+          <a:noFill/>
+          <a:ln/>
+        </p:spPr>
+        <p:txBody>
+          <a:bodyPr wrap="square" lIns="0" tIns="0" rIns="0" bIns="0" rtlCol="0" anchor="ctr"/>
+          <a:lstStyle/>
+          <a:p>
+            <a:pPr algn="ctr" indent="0" marL="0">
+              <a:buNone/>
+            </a:pPr>
+            <a:r>
+              <a:rPr lang="en-US" sz="1000" dirty="0">
+                <a:solidFill>
+                  <a:srgbClr val="003A63"/>
+                </a:solidFill>
+                <a:latin typeface="Aptos" pitchFamily="34" charset="0"/>
+                <a:ea typeface="Aptos" pitchFamily="34" charset="-122"/>
+                <a:cs typeface="Aptos" pitchFamily="34" charset="-120"/>
+              </a:rPr>
+              <a:t>Concept to action</a:t>
+            </a:r>
+            <a:endParaRPr lang="en-US" sz="1000" dirty="0"/>
+          </a:p>
+        </p:txBody>
+      </p:sp>
+      <p:sp>
+        <p:nvSpPr>
+          <p:cNvPr id="18" name="Shape 16"/>
+          <p:cNvSpPr/>
+          <p:nvPr/>
+        </p:nvSpPr>
+        <p:spPr>
+          <a:xfrm>
+            <a:off x="7635240" y="4498848"/>
+            <a:ext cx="3474720" cy="1143000"/>
+          </a:xfrm>
+          <a:prstGeom prst="roundRect">
+            <a:avLst>
+              <a:gd name="adj" fmla="val 9600"/>
             </a:avLst>
           </a:prstGeom>
           <a:solidFill>
@@ -3582,14 +3677,14 @@
       </p:sp>
       <p:sp>
         <p:nvSpPr>
-          <p:cNvPr id="16" name="Text 14"/>
-          <p:cNvSpPr/>
-          <p:nvPr/>
-        </p:nvSpPr>
-        <p:spPr>
-          <a:xfrm>
-            <a:off x="8074152" y="3666744"/>
-            <a:ext cx="2825496" cy="256032"/>
+          <p:cNvPr id="19" name="Text 17"/>
+          <p:cNvSpPr/>
+          <p:nvPr/>
+        </p:nvSpPr>
+        <p:spPr>
+          <a:xfrm>
+            <a:off x="7799832" y="4645152"/>
+            <a:ext cx="3145536" cy="256032"/>
           </a:xfrm>
           <a:prstGeom prst="rect">
             <a:avLst/>
@@ -3613,7 +3708,7 @@
                 <a:ea typeface="Aptos" pitchFamily="34" charset="-122"/>
                 <a:cs typeface="Aptos" pitchFamily="34" charset="-120"/>
               </a:rPr>
-              <a:t>Use this for</a:t>
+              <a:t>Apply it</a:t>
             </a:r>
             <a:endParaRPr lang="en-US" sz="1300" dirty="0"/>
           </a:p>
@@ -3621,14 +3716,14 @@
       </p:sp>
       <p:sp>
         <p:nvSpPr>
-          <p:cNvPr id="17" name="Text 15"/>
-          <p:cNvSpPr/>
-          <p:nvPr/>
-        </p:nvSpPr>
-        <p:spPr>
-          <a:xfrm>
-            <a:off x="8074152" y="4023360"/>
-            <a:ext cx="2825496" cy="1097280"/>
+          <p:cNvPr id="20" name="Text 18"/>
+          <p:cNvSpPr/>
+          <p:nvPr/>
+        </p:nvSpPr>
+        <p:spPr>
+          <a:xfrm>
+            <a:off x="7799832" y="5001768"/>
+            <a:ext cx="3145536" cy="502920"/>
           </a:xfrm>
           <a:prstGeom prst="rect">
             <a:avLst/>
@@ -3654,7 +3749,7 @@
                 <a:ea typeface="Aptos" pitchFamily="34" charset="-122"/>
                 <a:cs typeface="Aptos" pitchFamily="34" charset="-120"/>
               </a:rPr>
-              <a:t>Connect the concept to public health decisions, safeguards, documentation, or implementation work.</a:t>
+              <a:t>Connect the concept to public health purpose, responsible use, required safeguards, documentation, and the next action a department should take.</a:t>
             </a:r>
             <a:endParaRPr lang="en-US" sz="1550" dirty="0"/>
           </a:p>
@@ -3828,8 +3923,8 @@
         </p:nvSpPr>
         <p:spPr>
           <a:xfrm>
-            <a:off x="9966960" y="6537960"/>
-            <a:ext cx="1645920" cy="201168"/>
+            <a:off x="9646920" y="6537960"/>
+            <a:ext cx="1965960" cy="201168"/>
           </a:xfrm>
           <a:prstGeom prst="rect">
             <a:avLst/>
@@ -3853,7 +3948,7 @@
                 <a:ea typeface="Aptos" pitchFamily="34" charset="-122"/>
                 <a:cs typeface="Aptos" pitchFamily="34" charset="-120"/>
               </a:rPr>
-              <a:t>Â© Paula Soper</a:t>
+              <a:t>Copyright Paula Soper</a:t>
             </a:r>
             <a:endParaRPr lang="en-US" sz="800" dirty="0"/>
           </a:p>
@@ -3900,77 +3995,13 @@
       </p:sp>
       <p:sp>
         <p:nvSpPr>
-          <p:cNvPr id="8" name="Shape 6"/>
+          <p:cNvPr id="8" name="Text 6"/>
           <p:cNvSpPr/>
           <p:nvPr/>
         </p:nvSpPr>
         <p:spPr>
           <a:xfrm>
             <a:off x="640080" y="658368"/>
-            <a:ext cx="420624" cy="420624"/>
-          </a:xfrm>
-          <a:prstGeom prst="ellipse">
-            <a:avLst/>
-          </a:prstGeom>
-          <a:solidFill>
-            <a:srgbClr val="0068B7"/>
-          </a:solidFill>
-          <a:ln w="12700">
-            <a:solidFill>
-              <a:srgbClr val="0068B7"/>
-            </a:solidFill>
-            <a:prstDash val="solid"/>
-          </a:ln>
-        </p:spPr>
-      </p:sp>
-      <p:sp>
-        <p:nvSpPr>
-          <p:cNvPr id="9" name="Text 7"/>
-          <p:cNvSpPr/>
-          <p:nvPr/>
-        </p:nvSpPr>
-        <p:spPr>
-          <a:xfrm>
-            <a:off x="640080" y="731520"/>
-            <a:ext cx="420624" cy="164592"/>
-          </a:xfrm>
-          <a:prstGeom prst="rect">
-            <a:avLst/>
-          </a:prstGeom>
-          <a:noFill/>
-          <a:ln/>
-        </p:spPr>
-        <p:txBody>
-          <a:bodyPr wrap="square" lIns="0" tIns="0" rIns="0" bIns="0" rtlCol="0" anchor="ctr"/>
-          <a:lstStyle/>
-          <a:p>
-            <a:pPr algn="ctr" indent="0" marL="0">
-              <a:buNone/>
-            </a:pPr>
-            <a:r>
-              <a:rPr lang="en-US" sz="1100" b="1" dirty="0">
-                <a:solidFill>
-                  <a:srgbClr val="FFFFFF"/>
-                </a:solidFill>
-                <a:latin typeface="Aptos" pitchFamily="34" charset="0"/>
-                <a:ea typeface="Aptos" pitchFamily="34" charset="-122"/>
-                <a:cs typeface="Aptos" pitchFamily="34" charset="-120"/>
-              </a:rPr>
-              <a:t>6</a:t>
-            </a:r>
-            <a:endParaRPr lang="en-US" sz="1100" dirty="0"/>
-          </a:p>
-        </p:txBody>
-      </p:sp>
-      <p:sp>
-        <p:nvSpPr>
-          <p:cNvPr id="10" name="Text 8"/>
-          <p:cNvSpPr/>
-          <p:nvPr/>
-        </p:nvSpPr>
-        <p:spPr>
-          <a:xfrm>
-            <a:off x="640080" y="621792"/>
             <a:ext cx="10881360" cy="713232"/>
           </a:xfrm>
           <a:prstGeom prst="rect">
@@ -4005,14 +4036,14 @@
       </p:sp>
       <p:sp>
         <p:nvSpPr>
-          <p:cNvPr id="11" name="Text 9"/>
+          <p:cNvPr id="9" name="Text 7"/>
           <p:cNvSpPr/>
           <p:nvPr/>
         </p:nvSpPr>
         <p:spPr>
           <a:xfrm>
             <a:off x="868680" y="1508760"/>
-            <a:ext cx="6537960" cy="4160520"/>
+            <a:ext cx="6309360" cy="4160520"/>
           </a:xfrm>
           <a:prstGeom prst="rect">
             <a:avLst/>
@@ -4071,18 +4102,18 @@
       </p:sp>
       <p:sp>
         <p:nvSpPr>
-          <p:cNvPr id="12" name="Shape 10"/>
-          <p:cNvSpPr/>
-          <p:nvPr/>
-        </p:nvSpPr>
-        <p:spPr>
-          <a:xfrm>
-            <a:off x="7909560" y="1417320"/>
-            <a:ext cx="3154680" cy="1828800"/>
+          <p:cNvPr id="10" name="Shape 8"/>
+          <p:cNvSpPr/>
+          <p:nvPr/>
+        </p:nvSpPr>
+        <p:spPr>
+          <a:xfrm>
+            <a:off x="7635240" y="1325880"/>
+            <a:ext cx="3474720" cy="1325880"/>
           </a:xfrm>
           <a:prstGeom prst="roundRect">
             <a:avLst>
-              <a:gd name="adj" fmla="val 6000"/>
+              <a:gd name="adj" fmla="val 8276"/>
             </a:avLst>
           </a:prstGeom>
           <a:solidFill>
@@ -4098,14 +4129,14 @@
       </p:sp>
       <p:sp>
         <p:nvSpPr>
-          <p:cNvPr id="13" name="Text 11"/>
-          <p:cNvSpPr/>
-          <p:nvPr/>
-        </p:nvSpPr>
-        <p:spPr>
-          <a:xfrm>
-            <a:off x="8074152" y="1563624"/>
-            <a:ext cx="2825496" cy="256032"/>
+          <p:cNvPr id="11" name="Text 9"/>
+          <p:cNvSpPr/>
+          <p:nvPr/>
+        </p:nvSpPr>
+        <p:spPr>
+          <a:xfrm>
+            <a:off x="7799832" y="1472184"/>
+            <a:ext cx="3145536" cy="256032"/>
           </a:xfrm>
           <a:prstGeom prst="rect">
             <a:avLst/>
@@ -4129,7 +4160,7 @@
                 <a:ea typeface="Aptos" pitchFamily="34" charset="-122"/>
                 <a:cs typeface="Aptos" pitchFamily="34" charset="-120"/>
               </a:rPr>
-              <a:t>Key idea</a:t>
+              <a:t>Core concept</a:t>
             </a:r>
             <a:endParaRPr lang="en-US" sz="1300" dirty="0"/>
           </a:p>
@@ -4137,14 +4168,14 @@
       </p:sp>
       <p:sp>
         <p:nvSpPr>
-          <p:cNvPr id="14" name="Text 12"/>
-          <p:cNvSpPr/>
-          <p:nvPr/>
-        </p:nvSpPr>
-        <p:spPr>
-          <a:xfrm>
-            <a:off x="8074152" y="1920240"/>
-            <a:ext cx="2825496" cy="1188720"/>
+          <p:cNvPr id="12" name="Text 10"/>
+          <p:cNvSpPr/>
+          <p:nvPr/>
+        </p:nvSpPr>
+        <p:spPr>
+          <a:xfrm>
+            <a:off x="7799832" y="1828800"/>
+            <a:ext cx="3145536" cy="685800"/>
           </a:xfrm>
           <a:prstGeom prst="rect">
             <a:avLst/>
@@ -4178,18 +4209,159 @@
       </p:sp>
       <p:sp>
         <p:nvSpPr>
-          <p:cNvPr id="15" name="Shape 13"/>
-          <p:cNvSpPr/>
-          <p:nvPr/>
-        </p:nvSpPr>
-        <p:spPr>
-          <a:xfrm>
-            <a:off x="7909560" y="3520440"/>
-            <a:ext cx="3154680" cy="1737360"/>
+          <p:cNvPr id="13" name="Shape 11"/>
+          <p:cNvSpPr/>
+          <p:nvPr/>
+        </p:nvSpPr>
+        <p:spPr>
+          <a:xfrm>
+            <a:off x="7635240" y="2788920"/>
+            <a:ext cx="3474720" cy="1536192"/>
           </a:xfrm>
           <a:prstGeom prst="roundRect">
             <a:avLst>
-              <a:gd name="adj" fmla="val 6316"/>
+              <a:gd name="adj" fmla="val 7143"/>
+            </a:avLst>
+          </a:prstGeom>
+          <a:solidFill>
+            <a:srgbClr val="FFFFFF">
+              <a:alpha val="88000"/>
+            </a:srgbClr>
+          </a:solidFill>
+          <a:ln w="12700">
+            <a:solidFill>
+              <a:srgbClr val="D6E8F2"/>
+            </a:solidFill>
+            <a:prstDash val="solid"/>
+          </a:ln>
+        </p:spPr>
+      </p:sp>
+      <p:sp>
+        <p:nvSpPr>
+          <p:cNvPr id="14" name="Shape 12"/>
+          <p:cNvSpPr/>
+          <p:nvPr/>
+        </p:nvSpPr>
+        <p:spPr>
+          <a:xfrm>
+            <a:off x="8074152" y="3291840"/>
+            <a:ext cx="2596896" cy="749808"/>
+          </a:xfrm>
+          <a:prstGeom prst="rect">
+            <a:avLst/>
+          </a:prstGeom>
+          <a:solidFill>
+            <a:srgbClr val="EAF6F8"/>
+          </a:solidFill>
+          <a:ln w="12700">
+            <a:solidFill>
+              <a:srgbClr val="8ABBD8"/>
+            </a:solidFill>
+            <a:prstDash val="solid"/>
+          </a:ln>
+        </p:spPr>
+      </p:sp>
+      <p:sp>
+        <p:nvSpPr>
+          <p:cNvPr id="15" name="Shape 13"/>
+          <p:cNvSpPr/>
+          <p:nvPr/>
+        </p:nvSpPr>
+        <p:spPr>
+          <a:xfrm>
+            <a:off x="8202168" y="3721608"/>
+            <a:ext cx="2340864" cy="0"/>
+          </a:xfrm>
+          <a:prstGeom prst="line">
+            <a:avLst/>
+          </a:prstGeom>
+          <a:noFill/>
+          <a:ln w="19050">
+            <a:solidFill>
+              <a:srgbClr val="0068B7"/>
+            </a:solidFill>
+            <a:prstDash val="solid"/>
+          </a:ln>
+        </p:spPr>
+      </p:sp>
+      <p:sp>
+        <p:nvSpPr>
+          <p:cNvPr id="16" name="Shape 14"/>
+          <p:cNvSpPr/>
+          <p:nvPr/>
+        </p:nvSpPr>
+        <p:spPr>
+          <a:xfrm>
+            <a:off x="9198864" y="4206240"/>
+            <a:ext cx="347472" cy="347472"/>
+          </a:xfrm>
+          <a:prstGeom prst="ellipse">
+            <a:avLst/>
+          </a:prstGeom>
+          <a:solidFill>
+            <a:srgbClr val="2F8A28"/>
+          </a:solidFill>
+          <a:ln w="12700">
+            <a:solidFill>
+              <a:srgbClr val="2F8A28"/>
+            </a:solidFill>
+            <a:prstDash val="solid"/>
+          </a:ln>
+        </p:spPr>
+      </p:sp>
+      <p:sp>
+        <p:nvSpPr>
+          <p:cNvPr id="17" name="Text 15"/>
+          <p:cNvSpPr/>
+          <p:nvPr/>
+        </p:nvSpPr>
+        <p:spPr>
+          <a:xfrm>
+            <a:off x="7909560" y="3977640"/>
+            <a:ext cx="2926080" cy="182880"/>
+          </a:xfrm>
+          <a:prstGeom prst="rect">
+            <a:avLst/>
+          </a:prstGeom>
+          <a:noFill/>
+          <a:ln/>
+        </p:spPr>
+        <p:txBody>
+          <a:bodyPr wrap="square" lIns="0" tIns="0" rIns="0" bIns="0" rtlCol="0" anchor="ctr"/>
+          <a:lstStyle/>
+          <a:p>
+            <a:pPr algn="ctr" indent="0" marL="0">
+              <a:buNone/>
+            </a:pPr>
+            <a:r>
+              <a:rPr lang="en-US" sz="1000" dirty="0">
+                <a:solidFill>
+                  <a:srgbClr val="003A63"/>
+                </a:solidFill>
+                <a:latin typeface="Aptos" pitchFamily="34" charset="0"/>
+                <a:ea typeface="Aptos" pitchFamily="34" charset="-122"/>
+                <a:cs typeface="Aptos" pitchFamily="34" charset="-120"/>
+              </a:rPr>
+              <a:t>Concept to action</a:t>
+            </a:r>
+            <a:endParaRPr lang="en-US" sz="1000" dirty="0"/>
+          </a:p>
+        </p:txBody>
+      </p:sp>
+      <p:sp>
+        <p:nvSpPr>
+          <p:cNvPr id="18" name="Shape 16"/>
+          <p:cNvSpPr/>
+          <p:nvPr/>
+        </p:nvSpPr>
+        <p:spPr>
+          <a:xfrm>
+            <a:off x="7635240" y="4498848"/>
+            <a:ext cx="3474720" cy="1143000"/>
+          </a:xfrm>
+          <a:prstGeom prst="roundRect">
+            <a:avLst>
+              <a:gd name="adj" fmla="val 9600"/>
             </a:avLst>
           </a:prstGeom>
           <a:solidFill>
@@ -4205,14 +4377,14 @@
       </p:sp>
       <p:sp>
         <p:nvSpPr>
-          <p:cNvPr id="16" name="Text 14"/>
-          <p:cNvSpPr/>
-          <p:nvPr/>
-        </p:nvSpPr>
-        <p:spPr>
-          <a:xfrm>
-            <a:off x="8074152" y="3666744"/>
-            <a:ext cx="2825496" cy="256032"/>
+          <p:cNvPr id="19" name="Text 17"/>
+          <p:cNvSpPr/>
+          <p:nvPr/>
+        </p:nvSpPr>
+        <p:spPr>
+          <a:xfrm>
+            <a:off x="7799832" y="4645152"/>
+            <a:ext cx="3145536" cy="256032"/>
           </a:xfrm>
           <a:prstGeom prst="rect">
             <a:avLst/>
@@ -4236,7 +4408,7 @@
                 <a:ea typeface="Aptos" pitchFamily="34" charset="-122"/>
                 <a:cs typeface="Aptos" pitchFamily="34" charset="-120"/>
               </a:rPr>
-              <a:t>Use this for</a:t>
+              <a:t>Apply it</a:t>
             </a:r>
             <a:endParaRPr lang="en-US" sz="1300" dirty="0"/>
           </a:p>
@@ -4244,14 +4416,14 @@
       </p:sp>
       <p:sp>
         <p:nvSpPr>
-          <p:cNvPr id="17" name="Text 15"/>
-          <p:cNvSpPr/>
-          <p:nvPr/>
-        </p:nvSpPr>
-        <p:spPr>
-          <a:xfrm>
-            <a:off x="8074152" y="4023360"/>
-            <a:ext cx="2825496" cy="1097280"/>
+          <p:cNvPr id="20" name="Text 18"/>
+          <p:cNvSpPr/>
+          <p:nvPr/>
+        </p:nvSpPr>
+        <p:spPr>
+          <a:xfrm>
+            <a:off x="7799832" y="5001768"/>
+            <a:ext cx="3145536" cy="502920"/>
           </a:xfrm>
           <a:prstGeom prst="rect">
             <a:avLst/>
@@ -4277,7 +4449,7 @@
                 <a:ea typeface="Aptos" pitchFamily="34" charset="-122"/>
                 <a:cs typeface="Aptos" pitchFamily="34" charset="-120"/>
               </a:rPr>
-              <a:t>Connect the concept to public health decisions, safeguards, documentation, or implementation work.</a:t>
+              <a:t>Connect the concept to public health purpose, responsible use, required safeguards, documentation, and the next action a department should take.</a:t>
             </a:r>
             <a:endParaRPr lang="en-US" sz="1550" dirty="0"/>
           </a:p>
@@ -4451,8 +4623,8 @@
         </p:nvSpPr>
         <p:spPr>
           <a:xfrm>
-            <a:off x="9966960" y="6537960"/>
-            <a:ext cx="1645920" cy="201168"/>
+            <a:off x="9646920" y="6537960"/>
+            <a:ext cx="1965960" cy="201168"/>
           </a:xfrm>
           <a:prstGeom prst="rect">
             <a:avLst/>
@@ -4476,7 +4648,7 @@
                 <a:ea typeface="Aptos" pitchFamily="34" charset="-122"/>
                 <a:cs typeface="Aptos" pitchFamily="34" charset="-120"/>
               </a:rPr>
-              <a:t>Â© Paula Soper</a:t>
+              <a:t>Copyright Paula Soper</a:t>
             </a:r>
             <a:endParaRPr lang="en-US" sz="800" dirty="0"/>
           </a:p>
@@ -4523,77 +4695,13 @@
       </p:sp>
       <p:sp>
         <p:nvSpPr>
-          <p:cNvPr id="8" name="Shape 6"/>
+          <p:cNvPr id="8" name="Text 6"/>
           <p:cNvSpPr/>
           <p:nvPr/>
         </p:nvSpPr>
         <p:spPr>
           <a:xfrm>
             <a:off x="640080" y="658368"/>
-            <a:ext cx="420624" cy="420624"/>
-          </a:xfrm>
-          <a:prstGeom prst="ellipse">
-            <a:avLst/>
-          </a:prstGeom>
-          <a:solidFill>
-            <a:srgbClr val="0068B7"/>
-          </a:solidFill>
-          <a:ln w="12700">
-            <a:solidFill>
-              <a:srgbClr val="0068B7"/>
-            </a:solidFill>
-            <a:prstDash val="solid"/>
-          </a:ln>
-        </p:spPr>
-      </p:sp>
-      <p:sp>
-        <p:nvSpPr>
-          <p:cNvPr id="9" name="Text 7"/>
-          <p:cNvSpPr/>
-          <p:nvPr/>
-        </p:nvSpPr>
-        <p:spPr>
-          <a:xfrm>
-            <a:off x="640080" y="731520"/>
-            <a:ext cx="420624" cy="164592"/>
-          </a:xfrm>
-          <a:prstGeom prst="rect">
-            <a:avLst/>
-          </a:prstGeom>
-          <a:noFill/>
-          <a:ln/>
-        </p:spPr>
-        <p:txBody>
-          <a:bodyPr wrap="square" lIns="0" tIns="0" rIns="0" bIns="0" rtlCol="0" anchor="ctr"/>
-          <a:lstStyle/>
-          <a:p>
-            <a:pPr algn="ctr" indent="0" marL="0">
-              <a:buNone/>
-            </a:pPr>
-            <a:r>
-              <a:rPr lang="en-US" sz="1100" b="1" dirty="0">
-                <a:solidFill>
-                  <a:srgbClr val="FFFFFF"/>
-                </a:solidFill>
-                <a:latin typeface="Aptos" pitchFamily="34" charset="0"/>
-                <a:ea typeface="Aptos" pitchFamily="34" charset="-122"/>
-                <a:cs typeface="Aptos" pitchFamily="34" charset="-120"/>
-              </a:rPr>
-              <a:t>7</a:t>
-            </a:r>
-            <a:endParaRPr lang="en-US" sz="1100" dirty="0"/>
-          </a:p>
-        </p:txBody>
-      </p:sp>
-      <p:sp>
-        <p:nvSpPr>
-          <p:cNvPr id="10" name="Text 8"/>
-          <p:cNvSpPr/>
-          <p:nvPr/>
-        </p:nvSpPr>
-        <p:spPr>
-          <a:xfrm>
-            <a:off x="640080" y="621792"/>
             <a:ext cx="10881360" cy="713232"/>
           </a:xfrm>
           <a:prstGeom prst="rect">
@@ -4628,14 +4736,14 @@
       </p:sp>
       <p:sp>
         <p:nvSpPr>
-          <p:cNvPr id="11" name="Text 9"/>
+          <p:cNvPr id="9" name="Text 7"/>
           <p:cNvSpPr/>
           <p:nvPr/>
         </p:nvSpPr>
         <p:spPr>
           <a:xfrm>
             <a:off x="868680" y="1508760"/>
-            <a:ext cx="6537960" cy="4160520"/>
+            <a:ext cx="6309360" cy="4160520"/>
           </a:xfrm>
           <a:prstGeom prst="rect">
             <a:avLst/>
@@ -4694,18 +4802,18 @@
       </p:sp>
       <p:sp>
         <p:nvSpPr>
-          <p:cNvPr id="12" name="Shape 10"/>
-          <p:cNvSpPr/>
-          <p:nvPr/>
-        </p:nvSpPr>
-        <p:spPr>
-          <a:xfrm>
-            <a:off x="7909560" y="1417320"/>
-            <a:ext cx="3154680" cy="1828800"/>
+          <p:cNvPr id="10" name="Shape 8"/>
+          <p:cNvSpPr/>
+          <p:nvPr/>
+        </p:nvSpPr>
+        <p:spPr>
+          <a:xfrm>
+            <a:off x="7635240" y="1325880"/>
+            <a:ext cx="3474720" cy="1325880"/>
           </a:xfrm>
           <a:prstGeom prst="roundRect">
             <a:avLst>
-              <a:gd name="adj" fmla="val 6000"/>
+              <a:gd name="adj" fmla="val 8276"/>
             </a:avLst>
           </a:prstGeom>
           <a:solidFill>
@@ -4721,14 +4829,14 @@
       </p:sp>
       <p:sp>
         <p:nvSpPr>
-          <p:cNvPr id="13" name="Text 11"/>
-          <p:cNvSpPr/>
-          <p:nvPr/>
-        </p:nvSpPr>
-        <p:spPr>
-          <a:xfrm>
-            <a:off x="8074152" y="1563624"/>
-            <a:ext cx="2825496" cy="256032"/>
+          <p:cNvPr id="11" name="Text 9"/>
+          <p:cNvSpPr/>
+          <p:nvPr/>
+        </p:nvSpPr>
+        <p:spPr>
+          <a:xfrm>
+            <a:off x="7799832" y="1472184"/>
+            <a:ext cx="3145536" cy="256032"/>
           </a:xfrm>
           <a:prstGeom prst="rect">
             <a:avLst/>
@@ -4752,7 +4860,7 @@
                 <a:ea typeface="Aptos" pitchFamily="34" charset="-122"/>
                 <a:cs typeface="Aptos" pitchFamily="34" charset="-120"/>
               </a:rPr>
-              <a:t>Key idea</a:t>
+              <a:t>Risk check</a:t>
             </a:r>
             <a:endParaRPr lang="en-US" sz="1300" dirty="0"/>
           </a:p>
@@ -4760,14 +4868,14 @@
       </p:sp>
       <p:sp>
         <p:nvSpPr>
-          <p:cNvPr id="14" name="Text 12"/>
-          <p:cNvSpPr/>
-          <p:nvPr/>
-        </p:nvSpPr>
-        <p:spPr>
-          <a:xfrm>
-            <a:off x="8074152" y="1920240"/>
-            <a:ext cx="2825496" cy="1188720"/>
+          <p:cNvPr id="12" name="Text 10"/>
+          <p:cNvSpPr/>
+          <p:nvPr/>
+        </p:nvSpPr>
+        <p:spPr>
+          <a:xfrm>
+            <a:off x="7799832" y="1828800"/>
+            <a:ext cx="3145536" cy="685800"/>
           </a:xfrm>
           <a:prstGeom prst="rect">
             <a:avLst/>
@@ -4801,18 +4909,171 @@
       </p:sp>
       <p:sp>
         <p:nvSpPr>
-          <p:cNvPr id="15" name="Shape 13"/>
-          <p:cNvSpPr/>
-          <p:nvPr/>
-        </p:nvSpPr>
-        <p:spPr>
-          <a:xfrm>
-            <a:off x="7909560" y="3520440"/>
-            <a:ext cx="3154680" cy="1737360"/>
+          <p:cNvPr id="13" name="Shape 11"/>
+          <p:cNvSpPr/>
+          <p:nvPr/>
+        </p:nvSpPr>
+        <p:spPr>
+          <a:xfrm>
+            <a:off x="7635240" y="2788920"/>
+            <a:ext cx="3474720" cy="1536192"/>
           </a:xfrm>
           <a:prstGeom prst="roundRect">
             <a:avLst>
-              <a:gd name="adj" fmla="val 6316"/>
+              <a:gd name="adj" fmla="val 7143"/>
+            </a:avLst>
+          </a:prstGeom>
+          <a:solidFill>
+            <a:srgbClr val="FFFFFF">
+              <a:alpha val="88000"/>
+            </a:srgbClr>
+          </a:solidFill>
+          <a:ln w="12700">
+            <a:solidFill>
+              <a:srgbClr val="D6E8F2"/>
+            </a:solidFill>
+            <a:prstDash val="solid"/>
+          </a:ln>
+        </p:spPr>
+      </p:sp>
+      <p:sp>
+        <p:nvSpPr>
+          <p:cNvPr id="14" name="Shape 12"/>
+          <p:cNvSpPr/>
+          <p:nvPr/>
+        </p:nvSpPr>
+        <p:spPr>
+          <a:xfrm>
+            <a:off x="8046720" y="3108960"/>
+            <a:ext cx="2651760" cy="896112"/>
+          </a:xfrm>
+          <a:prstGeom prst="arc">
+            <a:avLst/>
+          </a:prstGeom>
+          <a:noFill/>
+          <a:ln w="25400">
+            <a:solidFill>
+              <a:srgbClr val="0068B7"/>
+            </a:solidFill>
+            <a:prstDash val="solid"/>
+          </a:ln>
+        </p:spPr>
+      </p:sp>
+      <p:sp>
+        <p:nvSpPr>
+          <p:cNvPr id="15" name="Text 13"/>
+          <p:cNvSpPr/>
+          <p:nvPr/>
+        </p:nvSpPr>
+        <p:spPr>
+          <a:xfrm>
+            <a:off x="7909560" y="3099816"/>
+            <a:ext cx="2926080" cy="256032"/>
+          </a:xfrm>
+          <a:prstGeom prst="rect">
+            <a:avLst/>
+          </a:prstGeom>
+          <a:noFill/>
+          <a:ln/>
+        </p:spPr>
+        <p:txBody>
+          <a:bodyPr wrap="square" lIns="0" tIns="0" rIns="0" bIns="0" rtlCol="0" anchor="ctr"/>
+          <a:lstStyle/>
+          <a:p>
+            <a:pPr algn="ctr" indent="0" marL="0">
+              <a:buNone/>
+            </a:pPr>
+            <a:r>
+              <a:rPr lang="en-US" sz="1500" b="1" dirty="0">
+                <a:solidFill>
+                  <a:srgbClr val="003A63"/>
+                </a:solidFill>
+                <a:latin typeface="Aptos" pitchFamily="34" charset="0"/>
+                <a:ea typeface="Aptos" pitchFamily="34" charset="-122"/>
+                <a:cs typeface="Aptos" pitchFamily="34" charset="-120"/>
+              </a:rPr>
+              <a:t>Risk</a:t>
+            </a:r>
+            <a:endParaRPr lang="en-US" sz="1500" dirty="0"/>
+          </a:p>
+        </p:txBody>
+      </p:sp>
+      <p:sp>
+        <p:nvSpPr>
+          <p:cNvPr id="16" name="Shape 14"/>
+          <p:cNvSpPr/>
+          <p:nvPr/>
+        </p:nvSpPr>
+        <p:spPr>
+          <a:xfrm>
+            <a:off x="8366760" y="3639312"/>
+            <a:ext cx="2011680" cy="0"/>
+          </a:xfrm>
+          <a:prstGeom prst="line">
+            <a:avLst/>
+          </a:prstGeom>
+          <a:noFill/>
+          <a:ln w="63500">
+            <a:solidFill>
+              <a:srgbClr val="2F8A28"/>
+            </a:solidFill>
+            <a:prstDash val="solid"/>
+          </a:ln>
+        </p:spPr>
+      </p:sp>
+      <p:sp>
+        <p:nvSpPr>
+          <p:cNvPr id="17" name="Text 15"/>
+          <p:cNvSpPr/>
+          <p:nvPr/>
+        </p:nvSpPr>
+        <p:spPr>
+          <a:xfrm>
+            <a:off x="7909560" y="3849624"/>
+            <a:ext cx="2926080" cy="164592"/>
+          </a:xfrm>
+          <a:prstGeom prst="rect">
+            <a:avLst/>
+          </a:prstGeom>
+          <a:noFill/>
+          <a:ln/>
+        </p:spPr>
+        <p:txBody>
+          <a:bodyPr wrap="square" lIns="0" tIns="0" rIns="0" bIns="0" rtlCol="0" anchor="ctr"/>
+          <a:lstStyle/>
+          <a:p>
+            <a:pPr algn="ctr" indent="0" marL="0">
+              <a:buNone/>
+            </a:pPr>
+            <a:r>
+              <a:rPr lang="en-US" sz="900" dirty="0">
+                <a:solidFill>
+                  <a:srgbClr val="003A63"/>
+                </a:solidFill>
+                <a:latin typeface="Aptos" pitchFamily="34" charset="0"/>
+                <a:ea typeface="Aptos" pitchFamily="34" charset="-122"/>
+                <a:cs typeface="Aptos" pitchFamily="34" charset="-120"/>
+              </a:rPr>
+              <a:t>Human review</a:t>
+            </a:r>
+            <a:endParaRPr lang="en-US" sz="900" dirty="0"/>
+          </a:p>
+        </p:txBody>
+      </p:sp>
+      <p:sp>
+        <p:nvSpPr>
+          <p:cNvPr id="18" name="Shape 16"/>
+          <p:cNvSpPr/>
+          <p:nvPr/>
+        </p:nvSpPr>
+        <p:spPr>
+          <a:xfrm>
+            <a:off x="7635240" y="4498848"/>
+            <a:ext cx="3474720" cy="1143000"/>
+          </a:xfrm>
+          <a:prstGeom prst="roundRect">
+            <a:avLst>
+              <a:gd name="adj" fmla="val 9600"/>
             </a:avLst>
           </a:prstGeom>
           <a:solidFill>
@@ -4828,14 +5089,14 @@
       </p:sp>
       <p:sp>
         <p:nvSpPr>
-          <p:cNvPr id="16" name="Text 14"/>
-          <p:cNvSpPr/>
-          <p:nvPr/>
-        </p:nvSpPr>
-        <p:spPr>
-          <a:xfrm>
-            <a:off x="8074152" y="3666744"/>
-            <a:ext cx="2825496" cy="256032"/>
+          <p:cNvPr id="19" name="Text 17"/>
+          <p:cNvSpPr/>
+          <p:nvPr/>
+        </p:nvSpPr>
+        <p:spPr>
+          <a:xfrm>
+            <a:off x="7799832" y="4645152"/>
+            <a:ext cx="3145536" cy="256032"/>
           </a:xfrm>
           <a:prstGeom prst="rect">
             <a:avLst/>
@@ -4859,7 +5120,7 @@
                 <a:ea typeface="Aptos" pitchFamily="34" charset="-122"/>
                 <a:cs typeface="Aptos" pitchFamily="34" charset="-120"/>
               </a:rPr>
-              <a:t>Use this for</a:t>
+              <a:t>Safeguard to plan</a:t>
             </a:r>
             <a:endParaRPr lang="en-US" sz="1300" dirty="0"/>
           </a:p>
@@ -4867,14 +5128,14 @@
       </p:sp>
       <p:sp>
         <p:nvSpPr>
-          <p:cNvPr id="17" name="Text 15"/>
-          <p:cNvSpPr/>
-          <p:nvPr/>
-        </p:nvSpPr>
-        <p:spPr>
-          <a:xfrm>
-            <a:off x="8074152" y="4023360"/>
-            <a:ext cx="2825496" cy="1097280"/>
+          <p:cNvPr id="20" name="Text 18"/>
+          <p:cNvSpPr/>
+          <p:nvPr/>
+        </p:nvSpPr>
+        <p:spPr>
+          <a:xfrm>
+            <a:off x="7799832" y="5001768"/>
+            <a:ext cx="3145536" cy="502920"/>
           </a:xfrm>
           <a:prstGeom prst="rect">
             <a:avLst/>
@@ -4900,7 +5161,7 @@
                 <a:ea typeface="Aptos" pitchFamily="34" charset="-122"/>
                 <a:cs typeface="Aptos" pitchFamily="34" charset="-120"/>
               </a:rPr>
-              <a:t>Connect the concept to public health decisions, safeguards, documentation, or implementation work.</a:t>
+              <a:t>Identify what could go wrong, who could be affected, what safeguards are needed, and what evidence should be reviewed before use expands.</a:t>
             </a:r>
             <a:endParaRPr lang="en-US" sz="1550" dirty="0"/>
           </a:p>
@@ -5074,8 +5335,8 @@
         </p:nvSpPr>
         <p:spPr>
           <a:xfrm>
-            <a:off x="9966960" y="6537960"/>
-            <a:ext cx="1645920" cy="201168"/>
+            <a:off x="9646920" y="6537960"/>
+            <a:ext cx="1965960" cy="201168"/>
           </a:xfrm>
           <a:prstGeom prst="rect">
             <a:avLst/>
@@ -5099,7 +5360,7 @@
                 <a:ea typeface="Aptos" pitchFamily="34" charset="-122"/>
                 <a:cs typeface="Aptos" pitchFamily="34" charset="-120"/>
               </a:rPr>
-              <a:t>Â© Paula Soper</a:t>
+              <a:t>Copyright Paula Soper</a:t>
             </a:r>
             <a:endParaRPr lang="en-US" sz="800" dirty="0"/>
           </a:p>
@@ -5146,17 +5407,262 @@
       </p:sp>
       <p:sp>
         <p:nvSpPr>
-          <p:cNvPr id="8" name="Shape 6"/>
+          <p:cNvPr id="8" name="Text 6"/>
           <p:cNvSpPr/>
           <p:nvPr/>
         </p:nvSpPr>
         <p:spPr>
           <a:xfrm>
             <a:off x="640080" y="658368"/>
-            <a:ext cx="420624" cy="420624"/>
-          </a:xfrm>
-          <a:prstGeom prst="ellipse">
-            <a:avLst/>
+            <a:ext cx="10881360" cy="713232"/>
+          </a:xfrm>
+          <a:prstGeom prst="rect">
+            <a:avLst/>
+          </a:prstGeom>
+          <a:noFill/>
+          <a:ln/>
+        </p:spPr>
+        <p:txBody>
+          <a:bodyPr wrap="square" lIns="0" tIns="0" rIns="0" bIns="0" rtlCol="0" anchor="ctr">
+            <a:normAutofit/>
+          </a:bodyPr>
+          <a:lstStyle/>
+          <a:p>
+            <a:pPr indent="0" marL="0">
+              <a:buNone/>
+            </a:pPr>
+            <a:r>
+              <a:rPr lang="en-US" sz="3400" b="1" dirty="0">
+                <a:solidFill>
+                  <a:srgbClr val="003A63"/>
+                </a:solidFill>
+                <a:latin typeface="Aptos Display" pitchFamily="34" charset="0"/>
+                <a:ea typeface="Aptos Display" pitchFamily="34" charset="-122"/>
+                <a:cs typeface="Aptos Display" pitchFamily="34" charset="-120"/>
+              </a:rPr>
+              <a:t>Application to AI-Supported Workflows</a:t>
+            </a:r>
+            <a:endParaRPr lang="en-US" sz="3400" dirty="0"/>
+          </a:p>
+        </p:txBody>
+      </p:sp>
+      <p:sp>
+        <p:nvSpPr>
+          <p:cNvPr id="9" name="Text 7"/>
+          <p:cNvSpPr/>
+          <p:nvPr/>
+        </p:nvSpPr>
+        <p:spPr>
+          <a:xfrm>
+            <a:off x="868680" y="1508760"/>
+            <a:ext cx="6309360" cy="4160520"/>
+          </a:xfrm>
+          <a:prstGeom prst="rect">
+            <a:avLst/>
+          </a:prstGeom>
+          <a:noFill/>
+          <a:ln/>
+        </p:spPr>
+        <p:txBody>
+          <a:bodyPr wrap="square" lIns="635" tIns="635" rIns="635" bIns="635" rtlCol="0" anchor="t">
+            <a:normAutofit/>
+          </a:bodyPr>
+          <a:lstStyle/>
+          <a:p>
+            <a:r>
+              <a:rPr lang="en-US" sz="2100" dirty="0">
+                <a:solidFill>
+                  <a:srgbClr val="17364A"/>
+                </a:solidFill>
+                <a:latin typeface="Aptos" pitchFamily="34" charset="0"/>
+                <a:ea typeface="Aptos" pitchFamily="34" charset="-122"/>
+                <a:cs typeface="Aptos" pitchFamily="34" charset="-120"/>
+              </a:rPr>
+              <a:t>Predictive models can identify risk, but causal inference is needed to decide what action is likely to.</a:t>
+            </a:r>
+            <a:endParaRPr lang="en-US" sz="2100" dirty="0"/>
+          </a:p>
+          <a:p>
+            <a:r>
+              <a:rPr lang="en-US" sz="2100" dirty="0">
+                <a:solidFill>
+                  <a:srgbClr val="17364A"/>
+                </a:solidFill>
+                <a:latin typeface="Aptos" pitchFamily="34" charset="0"/>
+                <a:ea typeface="Aptos" pitchFamily="34" charset="-122"/>
+                <a:cs typeface="Aptos" pitchFamily="34" charset="-120"/>
+              </a:rPr>
+              <a:t>Generative AI may help draft evaluation questions or summarize literature, but humans must verify.</a:t>
+            </a:r>
+            <a:endParaRPr lang="en-US" sz="2100" dirty="0"/>
+          </a:p>
+          <a:p>
+            <a:r>
+              <a:rPr lang="en-US" sz="2100" dirty="0">
+                <a:solidFill>
+                  <a:srgbClr val="17364A"/>
+                </a:solidFill>
+                <a:latin typeface="Aptos" pitchFamily="34" charset="0"/>
+                <a:ea typeface="Aptos" pitchFamily="34" charset="-122"/>
+                <a:cs typeface="Aptos" pitchFamily="34" charset="-120"/>
+              </a:rPr>
+              <a:t>AI-supported decision-making should label outputs clearly as prediction, association, causal evidence,.</a:t>
+            </a:r>
+            <a:endParaRPr lang="en-US" sz="2100" dirty="0"/>
+          </a:p>
+        </p:txBody>
+      </p:sp>
+      <p:sp>
+        <p:nvSpPr>
+          <p:cNvPr id="10" name="Shape 8"/>
+          <p:cNvSpPr/>
+          <p:nvPr/>
+        </p:nvSpPr>
+        <p:spPr>
+          <a:xfrm>
+            <a:off x="7635240" y="1325880"/>
+            <a:ext cx="3474720" cy="1325880"/>
+          </a:xfrm>
+          <a:prstGeom prst="roundRect">
+            <a:avLst>
+              <a:gd name="adj" fmla="val 8276"/>
+            </a:avLst>
+          </a:prstGeom>
+          <a:solidFill>
+            <a:srgbClr val="EEF8ED"/>
+          </a:solidFill>
+          <a:ln w="12700">
+            <a:solidFill>
+              <a:srgbClr val="B9D7E6"/>
+            </a:solidFill>
+            <a:prstDash val="solid"/>
+          </a:ln>
+        </p:spPr>
+      </p:sp>
+      <p:sp>
+        <p:nvSpPr>
+          <p:cNvPr id="11" name="Text 9"/>
+          <p:cNvSpPr/>
+          <p:nvPr/>
+        </p:nvSpPr>
+        <p:spPr>
+          <a:xfrm>
+            <a:off x="7799832" y="1472184"/>
+            <a:ext cx="3145536" cy="256032"/>
+          </a:xfrm>
+          <a:prstGeom prst="rect">
+            <a:avLst/>
+          </a:prstGeom>
+          <a:noFill/>
+          <a:ln/>
+        </p:spPr>
+        <p:txBody>
+          <a:bodyPr wrap="square" lIns="0" tIns="0" rIns="0" bIns="0" rtlCol="0" anchor="ctr"/>
+          <a:lstStyle/>
+          <a:p>
+            <a:pPr indent="0" marL="0">
+              <a:buNone/>
+            </a:pPr>
+            <a:r>
+              <a:rPr lang="en-US" sz="1300" b="1" dirty="0">
+                <a:solidFill>
+                  <a:srgbClr val="0068B7"/>
+                </a:solidFill>
+                <a:latin typeface="Aptos" pitchFamily="34" charset="0"/>
+                <a:ea typeface="Aptos" pitchFamily="34" charset="-122"/>
+                <a:cs typeface="Aptos" pitchFamily="34" charset="-120"/>
+              </a:rPr>
+              <a:t>Implementation cue</a:t>
+            </a:r>
+            <a:endParaRPr lang="en-US" sz="1300" dirty="0"/>
+          </a:p>
+        </p:txBody>
+      </p:sp>
+      <p:sp>
+        <p:nvSpPr>
+          <p:cNvPr id="12" name="Text 10"/>
+          <p:cNvSpPr/>
+          <p:nvPr/>
+        </p:nvSpPr>
+        <p:spPr>
+          <a:xfrm>
+            <a:off x="7799832" y="1828800"/>
+            <a:ext cx="3145536" cy="685800"/>
+          </a:xfrm>
+          <a:prstGeom prst="rect">
+            <a:avLst/>
+          </a:prstGeom>
+          <a:noFill/>
+          <a:ln/>
+        </p:spPr>
+        <p:txBody>
+          <a:bodyPr wrap="square" lIns="0" tIns="0" rIns="0" bIns="0" rtlCol="0" anchor="t">
+            <a:normAutofit/>
+          </a:bodyPr>
+          <a:lstStyle/>
+          <a:p>
+            <a:pPr indent="0" marL="0">
+              <a:buNone/>
+            </a:pPr>
+            <a:r>
+              <a:rPr lang="en-US" sz="1550" dirty="0">
+                <a:solidFill>
+                  <a:srgbClr val="17364A"/>
+                </a:solidFill>
+                <a:latin typeface="Aptos" pitchFamily="34" charset="0"/>
+                <a:ea typeface="Aptos" pitchFamily="34" charset="-122"/>
+                <a:cs typeface="Aptos" pitchFamily="34" charset="-120"/>
+              </a:rPr>
+              <a:t>Predictive models can identify risk, but causal inference is needed to decide what action is likely to.</a:t>
+            </a:r>
+            <a:endParaRPr lang="en-US" sz="1550" dirty="0"/>
+          </a:p>
+        </p:txBody>
+      </p:sp>
+      <p:sp>
+        <p:nvSpPr>
+          <p:cNvPr id="13" name="Shape 11"/>
+          <p:cNvSpPr/>
+          <p:nvPr/>
+        </p:nvSpPr>
+        <p:spPr>
+          <a:xfrm>
+            <a:off x="7635240" y="2788920"/>
+            <a:ext cx="3474720" cy="1536192"/>
+          </a:xfrm>
+          <a:prstGeom prst="roundRect">
+            <a:avLst>
+              <a:gd name="adj" fmla="val 7143"/>
+            </a:avLst>
+          </a:prstGeom>
+          <a:solidFill>
+            <a:srgbClr val="FFFFFF">
+              <a:alpha val="88000"/>
+            </a:srgbClr>
+          </a:solidFill>
+          <a:ln w="12700">
+            <a:solidFill>
+              <a:srgbClr val="D6E8F2"/>
+            </a:solidFill>
+            <a:prstDash val="solid"/>
+          </a:ln>
+        </p:spPr>
+      </p:sp>
+      <p:sp>
+        <p:nvSpPr>
+          <p:cNvPr id="14" name="Shape 12"/>
+          <p:cNvSpPr/>
+          <p:nvPr/>
+        </p:nvSpPr>
+        <p:spPr>
+          <a:xfrm>
+            <a:off x="7927848" y="3319272"/>
+            <a:ext cx="792480" cy="749808"/>
+          </a:xfrm>
+          <a:prstGeom prst="roundRect">
+            <a:avLst>
+              <a:gd name="adj" fmla="val 14634"/>
+            </a:avLst>
           </a:prstGeom>
           <a:solidFill>
             <a:srgbClr val="0068B7"/>
@@ -5171,53 +5677,14 @@
       </p:sp>
       <p:sp>
         <p:nvSpPr>
-          <p:cNvPr id="9" name="Text 7"/>
-          <p:cNvSpPr/>
-          <p:nvPr/>
-        </p:nvSpPr>
-        <p:spPr>
-          <a:xfrm>
-            <a:off x="640080" y="731520"/>
-            <a:ext cx="420624" cy="164592"/>
-          </a:xfrm>
-          <a:prstGeom prst="rect">
-            <a:avLst/>
-          </a:prstGeom>
-          <a:noFill/>
-          <a:ln/>
-        </p:spPr>
-        <p:txBody>
-          <a:bodyPr wrap="square" lIns="0" tIns="0" rIns="0" bIns="0" rtlCol="0" anchor="ctr"/>
-          <a:lstStyle/>
-          <a:p>
-            <a:pPr algn="ctr" indent="0" marL="0">
-              <a:buNone/>
-            </a:pPr>
-            <a:r>
-              <a:rPr lang="en-US" sz="1100" b="1" dirty="0">
-                <a:solidFill>
-                  <a:srgbClr val="FFFFFF"/>
-                </a:solidFill>
-                <a:latin typeface="Aptos" pitchFamily="34" charset="0"/>
-                <a:ea typeface="Aptos" pitchFamily="34" charset="-122"/>
-                <a:cs typeface="Aptos" pitchFamily="34" charset="-120"/>
-              </a:rPr>
-              <a:t>8</a:t>
-            </a:r>
-            <a:endParaRPr lang="en-US" sz="1100" dirty="0"/>
-          </a:p>
-        </p:txBody>
-      </p:sp>
-      <p:sp>
-        <p:nvSpPr>
-          <p:cNvPr id="10" name="Text 8"/>
-          <p:cNvSpPr/>
-          <p:nvPr/>
-        </p:nvSpPr>
-        <p:spPr>
-          <a:xfrm>
-            <a:off x="640080" y="621792"/>
-            <a:ext cx="10881360" cy="713232"/>
+          <p:cNvPr id="15" name="Text 13"/>
+          <p:cNvSpPr/>
+          <p:nvPr/>
+        </p:nvSpPr>
+        <p:spPr>
+          <a:xfrm>
+            <a:off x="8001000" y="3511296"/>
+            <a:ext cx="646176" cy="310896"/>
           </a:xfrm>
           <a:prstGeom prst="rect">
             <a:avLst/>
@@ -5231,112 +5698,46 @@
           </a:bodyPr>
           <a:lstStyle/>
           <a:p>
-            <a:pPr indent="0" marL="0">
-              <a:buNone/>
-            </a:pPr>
-            <a:r>
-              <a:rPr lang="en-US" sz="3400" b="1" dirty="0">
-                <a:solidFill>
-                  <a:srgbClr val="003A63"/>
-                </a:solidFill>
-                <a:latin typeface="Aptos Display" pitchFamily="34" charset="0"/>
-                <a:ea typeface="Aptos Display" pitchFamily="34" charset="-122"/>
-                <a:cs typeface="Aptos Display" pitchFamily="34" charset="-120"/>
-              </a:rPr>
-              <a:t>Application to AI-Supported Workflows</a:t>
-            </a:r>
-            <a:endParaRPr lang="en-US" sz="3400" dirty="0"/>
-          </a:p>
-        </p:txBody>
-      </p:sp>
-      <p:sp>
-        <p:nvSpPr>
-          <p:cNvPr id="11" name="Text 9"/>
-          <p:cNvSpPr/>
-          <p:nvPr/>
-        </p:nvSpPr>
-        <p:spPr>
-          <a:xfrm>
-            <a:off x="868680" y="1508760"/>
-            <a:ext cx="6537960" cy="4160520"/>
-          </a:xfrm>
-          <a:prstGeom prst="rect">
-            <a:avLst/>
-          </a:prstGeom>
-          <a:noFill/>
-          <a:ln/>
-        </p:spPr>
-        <p:txBody>
-          <a:bodyPr wrap="square" lIns="635" tIns="635" rIns="635" bIns="635" rtlCol="0" anchor="t">
-            <a:normAutofit/>
-          </a:bodyPr>
-          <a:lstStyle/>
-          <a:p>
-            <a:r>
-              <a:rPr lang="en-US" sz="2100" dirty="0">
-                <a:solidFill>
-                  <a:srgbClr val="17364A"/>
-                </a:solidFill>
-                <a:latin typeface="Aptos" pitchFamily="34" charset="0"/>
-                <a:ea typeface="Aptos" pitchFamily="34" charset="-122"/>
-                <a:cs typeface="Aptos" pitchFamily="34" charset="-120"/>
-              </a:rPr>
-              <a:t>Predictive models can identify risk, but causal inference is needed to decide what action is likely to.</a:t>
-            </a:r>
-            <a:endParaRPr lang="en-US" sz="2100" dirty="0"/>
-          </a:p>
-          <a:p>
-            <a:r>
-              <a:rPr lang="en-US" sz="2100" dirty="0">
-                <a:solidFill>
-                  <a:srgbClr val="17364A"/>
-                </a:solidFill>
-                <a:latin typeface="Aptos" pitchFamily="34" charset="0"/>
-                <a:ea typeface="Aptos" pitchFamily="34" charset="-122"/>
-                <a:cs typeface="Aptos" pitchFamily="34" charset="-120"/>
-              </a:rPr>
-              <a:t>Generative AI may help draft evaluation questions or summarize literature, but humans must verify.</a:t>
-            </a:r>
-            <a:endParaRPr lang="en-US" sz="2100" dirty="0"/>
-          </a:p>
-          <a:p>
-            <a:r>
-              <a:rPr lang="en-US" sz="2100" dirty="0">
-                <a:solidFill>
-                  <a:srgbClr val="17364A"/>
-                </a:solidFill>
-                <a:latin typeface="Aptos" pitchFamily="34" charset="0"/>
-                <a:ea typeface="Aptos" pitchFamily="34" charset="-122"/>
-                <a:cs typeface="Aptos" pitchFamily="34" charset="-120"/>
-              </a:rPr>
-              <a:t>AI-supported decision-making should label outputs clearly as prediction, association, causal evidence,.</a:t>
-            </a:r>
-            <a:endParaRPr lang="en-US" sz="2100" dirty="0"/>
-          </a:p>
-        </p:txBody>
-      </p:sp>
-      <p:sp>
-        <p:nvSpPr>
-          <p:cNvPr id="12" name="Shape 10"/>
-          <p:cNvSpPr/>
-          <p:nvPr/>
-        </p:nvSpPr>
-        <p:spPr>
-          <a:xfrm>
-            <a:off x="7909560" y="1417320"/>
-            <a:ext cx="3154680" cy="1828800"/>
+            <a:pPr algn="ctr" indent="0" marL="0">
+              <a:buNone/>
+            </a:pPr>
+            <a:r>
+              <a:rPr lang="en-US" sz="1500" b="1" dirty="0">
+                <a:solidFill>
+                  <a:srgbClr val="FFFFFF"/>
+                </a:solidFill>
+                <a:latin typeface="Aptos" pitchFamily="34" charset="0"/>
+                <a:ea typeface="Aptos" pitchFamily="34" charset="-122"/>
+                <a:cs typeface="Aptos" pitchFamily="34" charset="-120"/>
+              </a:rPr>
+              <a:t>Plan</a:t>
+            </a:r>
+            <a:endParaRPr lang="en-US" sz="1500" dirty="0"/>
+          </a:p>
+        </p:txBody>
+      </p:sp>
+      <p:sp>
+        <p:nvSpPr>
+          <p:cNvPr id="16" name="Shape 14"/>
+          <p:cNvSpPr/>
+          <p:nvPr/>
+        </p:nvSpPr>
+        <p:spPr>
+          <a:xfrm>
+            <a:off x="8976360" y="3319272"/>
+            <a:ext cx="792480" cy="749808"/>
           </a:xfrm>
           <a:prstGeom prst="roundRect">
             <a:avLst>
-              <a:gd name="adj" fmla="val 6000"/>
+              <a:gd name="adj" fmla="val 14634"/>
             </a:avLst>
           </a:prstGeom>
           <a:solidFill>
-            <a:srgbClr val="EEF8ED"/>
+            <a:srgbClr val="2F8A28"/>
           </a:solidFill>
           <a:ln w="12700">
             <a:solidFill>
-              <a:srgbClr val="B9D7E6"/>
+              <a:srgbClr val="2F8A28"/>
             </a:solidFill>
             <a:prstDash val="solid"/>
           </a:ln>
@@ -5344,98 +5745,189 @@
       </p:sp>
       <p:sp>
         <p:nvSpPr>
-          <p:cNvPr id="13" name="Text 11"/>
-          <p:cNvSpPr/>
-          <p:nvPr/>
-        </p:nvSpPr>
-        <p:spPr>
-          <a:xfrm>
-            <a:off x="8074152" y="1563624"/>
-            <a:ext cx="2825496" cy="256032"/>
-          </a:xfrm>
-          <a:prstGeom prst="rect">
-            <a:avLst/>
-          </a:prstGeom>
-          <a:noFill/>
-          <a:ln/>
-        </p:spPr>
-        <p:txBody>
-          <a:bodyPr wrap="square" lIns="0" tIns="0" rIns="0" bIns="0" rtlCol="0" anchor="ctr"/>
-          <a:lstStyle/>
-          <a:p>
-            <a:pPr indent="0" marL="0">
-              <a:buNone/>
-            </a:pPr>
-            <a:r>
-              <a:rPr lang="en-US" sz="1300" b="1" dirty="0">
-                <a:solidFill>
-                  <a:srgbClr val="0068B7"/>
-                </a:solidFill>
-                <a:latin typeface="Aptos" pitchFamily="34" charset="0"/>
-                <a:ea typeface="Aptos" pitchFamily="34" charset="-122"/>
-                <a:cs typeface="Aptos" pitchFamily="34" charset="-120"/>
-              </a:rPr>
-              <a:t>Key idea</a:t>
-            </a:r>
-            <a:endParaRPr lang="en-US" sz="1300" dirty="0"/>
-          </a:p>
-        </p:txBody>
-      </p:sp>
-      <p:sp>
-        <p:nvSpPr>
-          <p:cNvPr id="14" name="Text 12"/>
-          <p:cNvSpPr/>
-          <p:nvPr/>
-        </p:nvSpPr>
-        <p:spPr>
-          <a:xfrm>
-            <a:off x="8074152" y="1920240"/>
-            <a:ext cx="2825496" cy="1188720"/>
-          </a:xfrm>
-          <a:prstGeom prst="rect">
-            <a:avLst/>
-          </a:prstGeom>
-          <a:noFill/>
-          <a:ln/>
-        </p:spPr>
-        <p:txBody>
-          <a:bodyPr wrap="square" lIns="0" tIns="0" rIns="0" bIns="0" rtlCol="0" anchor="t">
+          <p:cNvPr id="17" name="Text 15"/>
+          <p:cNvSpPr/>
+          <p:nvPr/>
+        </p:nvSpPr>
+        <p:spPr>
+          <a:xfrm>
+            <a:off x="9049512" y="3511296"/>
+            <a:ext cx="646176" cy="310896"/>
+          </a:xfrm>
+          <a:prstGeom prst="rect">
+            <a:avLst/>
+          </a:prstGeom>
+          <a:noFill/>
+          <a:ln/>
+        </p:spPr>
+        <p:txBody>
+          <a:bodyPr wrap="square" lIns="0" tIns="0" rIns="0" bIns="0" rtlCol="0" anchor="ctr">
             <a:normAutofit/>
           </a:bodyPr>
           <a:lstStyle/>
           <a:p>
-            <a:pPr indent="0" marL="0">
-              <a:buNone/>
-            </a:pPr>
-            <a:r>
-              <a:rPr lang="en-US" sz="1550" dirty="0">
-                <a:solidFill>
-                  <a:srgbClr val="17364A"/>
-                </a:solidFill>
-                <a:latin typeface="Aptos" pitchFamily="34" charset="0"/>
-                <a:ea typeface="Aptos" pitchFamily="34" charset="-122"/>
-                <a:cs typeface="Aptos" pitchFamily="34" charset="-120"/>
-              </a:rPr>
-              <a:t>Predictive models can identify risk, but causal inference is needed to decide what action is likely to.</a:t>
-            </a:r>
-            <a:endParaRPr lang="en-US" sz="1550" dirty="0"/>
-          </a:p>
-        </p:txBody>
-      </p:sp>
-      <p:sp>
-        <p:nvSpPr>
-          <p:cNvPr id="15" name="Shape 13"/>
-          <p:cNvSpPr/>
-          <p:nvPr/>
-        </p:nvSpPr>
-        <p:spPr>
-          <a:xfrm>
-            <a:off x="7909560" y="3520440"/>
-            <a:ext cx="3154680" cy="1737360"/>
+            <a:pPr algn="ctr" indent="0" marL="0">
+              <a:buNone/>
+            </a:pPr>
+            <a:r>
+              <a:rPr lang="en-US" sz="1500" b="1" dirty="0">
+                <a:solidFill>
+                  <a:srgbClr val="FFFFFF"/>
+                </a:solidFill>
+                <a:latin typeface="Aptos" pitchFamily="34" charset="0"/>
+                <a:ea typeface="Aptos" pitchFamily="34" charset="-122"/>
+                <a:cs typeface="Aptos" pitchFamily="34" charset="-120"/>
+              </a:rPr>
+              <a:t>Do</a:t>
+            </a:r>
+            <a:endParaRPr lang="en-US" sz="1500" dirty="0"/>
+          </a:p>
+        </p:txBody>
+      </p:sp>
+      <p:sp>
+        <p:nvSpPr>
+          <p:cNvPr id="18" name="Shape 16"/>
+          <p:cNvSpPr/>
+          <p:nvPr/>
+        </p:nvSpPr>
+        <p:spPr>
+          <a:xfrm>
+            <a:off x="10024872" y="3319272"/>
+            <a:ext cx="792480" cy="749808"/>
           </a:xfrm>
           <a:prstGeom prst="roundRect">
             <a:avLst>
-              <a:gd name="adj" fmla="val 6316"/>
+              <a:gd name="adj" fmla="val 14634"/>
+            </a:avLst>
+          </a:prstGeom>
+          <a:solidFill>
+            <a:srgbClr val="D69A2D"/>
+          </a:solidFill>
+          <a:ln w="12700">
+            <a:solidFill>
+              <a:srgbClr val="D69A2D"/>
+            </a:solidFill>
+            <a:prstDash val="solid"/>
+          </a:ln>
+        </p:spPr>
+      </p:sp>
+      <p:sp>
+        <p:nvSpPr>
+          <p:cNvPr id="19" name="Text 17"/>
+          <p:cNvSpPr/>
+          <p:nvPr/>
+        </p:nvSpPr>
+        <p:spPr>
+          <a:xfrm>
+            <a:off x="10098024" y="3511296"/>
+            <a:ext cx="646176" cy="310896"/>
+          </a:xfrm>
+          <a:prstGeom prst="rect">
+            <a:avLst/>
+          </a:prstGeom>
+          <a:noFill/>
+          <a:ln/>
+        </p:spPr>
+        <p:txBody>
+          <a:bodyPr wrap="square" lIns="0" tIns="0" rIns="0" bIns="0" rtlCol="0" anchor="ctr">
+            <a:normAutofit/>
+          </a:bodyPr>
+          <a:lstStyle/>
+          <a:p>
+            <a:pPr algn="ctr" indent="0" marL="0">
+              <a:buNone/>
+            </a:pPr>
+            <a:r>
+              <a:rPr lang="en-US" sz="1500" b="1" dirty="0">
+                <a:solidFill>
+                  <a:srgbClr val="FFFFFF"/>
+                </a:solidFill>
+                <a:latin typeface="Aptos" pitchFamily="34" charset="0"/>
+                <a:ea typeface="Aptos" pitchFamily="34" charset="-122"/>
+                <a:cs typeface="Aptos" pitchFamily="34" charset="-120"/>
+              </a:rPr>
+              <a:t>Review</a:t>
+            </a:r>
+            <a:endParaRPr lang="en-US" sz="1500" dirty="0"/>
+          </a:p>
+        </p:txBody>
+      </p:sp>
+      <p:sp>
+        <p:nvSpPr>
+          <p:cNvPr id="20" name="Shape 18"/>
+          <p:cNvSpPr/>
+          <p:nvPr/>
+        </p:nvSpPr>
+        <p:spPr>
+          <a:xfrm>
+            <a:off x="8293608" y="4389120"/>
+            <a:ext cx="2157984" cy="0"/>
+          </a:xfrm>
+          <a:prstGeom prst="line">
+            <a:avLst/>
+          </a:prstGeom>
+          <a:noFill/>
+          <a:ln w="25400">
+            <a:solidFill>
+              <a:srgbClr val="8ABBD8"/>
+            </a:solidFill>
+            <a:prstDash val="solid"/>
+          </a:ln>
+        </p:spPr>
+      </p:sp>
+      <p:sp>
+        <p:nvSpPr>
+          <p:cNvPr id="21" name="Text 19"/>
+          <p:cNvSpPr/>
+          <p:nvPr/>
+        </p:nvSpPr>
+        <p:spPr>
+          <a:xfrm>
+            <a:off x="7909560" y="3977640"/>
+            <a:ext cx="2926080" cy="182880"/>
+          </a:xfrm>
+          <a:prstGeom prst="rect">
+            <a:avLst/>
+          </a:prstGeom>
+          <a:noFill/>
+          <a:ln/>
+        </p:spPr>
+        <p:txBody>
+          <a:bodyPr wrap="square" lIns="0" tIns="0" rIns="0" bIns="0" rtlCol="0" anchor="ctr"/>
+          <a:lstStyle/>
+          <a:p>
+            <a:pPr algn="ctr" indent="0" marL="0">
+              <a:buNone/>
+            </a:pPr>
+            <a:r>
+              <a:rPr lang="en-US" sz="1000" dirty="0">
+                <a:solidFill>
+                  <a:srgbClr val="003A63"/>
+                </a:solidFill>
+                <a:latin typeface="Aptos" pitchFamily="34" charset="0"/>
+                <a:ea typeface="Aptos" pitchFamily="34" charset="-122"/>
+                <a:cs typeface="Aptos" pitchFamily="34" charset="-120"/>
+              </a:rPr>
+              <a:t>Dependencies visible</a:t>
+            </a:r>
+            <a:endParaRPr lang="en-US" sz="1000" dirty="0"/>
+          </a:p>
+        </p:txBody>
+      </p:sp>
+      <p:sp>
+        <p:nvSpPr>
+          <p:cNvPr id="22" name="Shape 20"/>
+          <p:cNvSpPr/>
+          <p:nvPr/>
+        </p:nvSpPr>
+        <p:spPr>
+          <a:xfrm>
+            <a:off x="7635240" y="4498848"/>
+            <a:ext cx="3474720" cy="1143000"/>
+          </a:xfrm>
+          <a:prstGeom prst="roundRect">
+            <a:avLst>
+              <a:gd name="adj" fmla="val 9600"/>
             </a:avLst>
           </a:prstGeom>
           <a:solidFill>
@@ -5451,14 +5943,14 @@
       </p:sp>
       <p:sp>
         <p:nvSpPr>
-          <p:cNvPr id="16" name="Text 14"/>
-          <p:cNvSpPr/>
-          <p:nvPr/>
-        </p:nvSpPr>
-        <p:spPr>
-          <a:xfrm>
-            <a:off x="8074152" y="3666744"/>
-            <a:ext cx="2825496" cy="256032"/>
+          <p:cNvPr id="23" name="Text 21"/>
+          <p:cNvSpPr/>
+          <p:nvPr/>
+        </p:nvSpPr>
+        <p:spPr>
+          <a:xfrm>
+            <a:off x="7799832" y="4645152"/>
+            <a:ext cx="3145536" cy="256032"/>
           </a:xfrm>
           <a:prstGeom prst="rect">
             <a:avLst/>
@@ -5482,7 +5974,7 @@
                 <a:ea typeface="Aptos" pitchFamily="34" charset="-122"/>
                 <a:cs typeface="Aptos" pitchFamily="34" charset="-120"/>
               </a:rPr>
-              <a:t>Use this for</a:t>
+              <a:t>Next action</a:t>
             </a:r>
             <a:endParaRPr lang="en-US" sz="1300" dirty="0"/>
           </a:p>
@@ -5490,14 +5982,14 @@
       </p:sp>
       <p:sp>
         <p:nvSpPr>
-          <p:cNvPr id="17" name="Text 15"/>
-          <p:cNvSpPr/>
-          <p:nvPr/>
-        </p:nvSpPr>
-        <p:spPr>
-          <a:xfrm>
-            <a:off x="8074152" y="4023360"/>
-            <a:ext cx="2825496" cy="1097280"/>
+          <p:cNvPr id="24" name="Text 22"/>
+          <p:cNvSpPr/>
+          <p:nvPr/>
+        </p:nvSpPr>
+        <p:spPr>
+          <a:xfrm>
+            <a:off x="7799832" y="5001768"/>
+            <a:ext cx="3145536" cy="502920"/>
           </a:xfrm>
           <a:prstGeom prst="rect">
             <a:avLst/>
@@ -5523,7 +6015,7 @@
                 <a:ea typeface="Aptos" pitchFamily="34" charset="-122"/>
                 <a:cs typeface="Aptos" pitchFamily="34" charset="-120"/>
               </a:rPr>
-              <a:t>Connect the concept to public health decisions, safeguards, documentation, or implementation work.</a:t>
+              <a:t>Use the concept to clarify workflow changes, dependencies, staffing, procurement requirements, training needs, and implementation checkpoints.</a:t>
             </a:r>
             <a:endParaRPr lang="en-US" sz="1550" dirty="0"/>
           </a:p>
@@ -5697,8 +6189,8 @@
         </p:nvSpPr>
         <p:spPr>
           <a:xfrm>
-            <a:off x="9966960" y="6537960"/>
-            <a:ext cx="1645920" cy="201168"/>
+            <a:off x="9646920" y="6537960"/>
+            <a:ext cx="1965960" cy="201168"/>
           </a:xfrm>
           <a:prstGeom prst="rect">
             <a:avLst/>
@@ -5722,7 +6214,7 @@
                 <a:ea typeface="Aptos" pitchFamily="34" charset="-122"/>
                 <a:cs typeface="Aptos" pitchFamily="34" charset="-120"/>
               </a:rPr>
-              <a:t>Â© Paula Soper</a:t>
+              <a:t>Copyright Paula Soper</a:t>
             </a:r>
             <a:endParaRPr lang="en-US" sz="800" dirty="0"/>
           </a:p>
@@ -5769,77 +6261,13 @@
       </p:sp>
       <p:sp>
         <p:nvSpPr>
-          <p:cNvPr id="8" name="Shape 6"/>
+          <p:cNvPr id="8" name="Text 6"/>
           <p:cNvSpPr/>
           <p:nvPr/>
         </p:nvSpPr>
         <p:spPr>
           <a:xfrm>
             <a:off x="640080" y="658368"/>
-            <a:ext cx="420624" cy="420624"/>
-          </a:xfrm>
-          <a:prstGeom prst="ellipse">
-            <a:avLst/>
-          </a:prstGeom>
-          <a:solidFill>
-            <a:srgbClr val="0068B7"/>
-          </a:solidFill>
-          <a:ln w="12700">
-            <a:solidFill>
-              <a:srgbClr val="0068B7"/>
-            </a:solidFill>
-            <a:prstDash val="solid"/>
-          </a:ln>
-        </p:spPr>
-      </p:sp>
-      <p:sp>
-        <p:nvSpPr>
-          <p:cNvPr id="9" name="Text 7"/>
-          <p:cNvSpPr/>
-          <p:nvPr/>
-        </p:nvSpPr>
-        <p:spPr>
-          <a:xfrm>
-            <a:off x="640080" y="731520"/>
-            <a:ext cx="420624" cy="164592"/>
-          </a:xfrm>
-          <a:prstGeom prst="rect">
-            <a:avLst/>
-          </a:prstGeom>
-          <a:noFill/>
-          <a:ln/>
-        </p:spPr>
-        <p:txBody>
-          <a:bodyPr wrap="square" lIns="0" tIns="0" rIns="0" bIns="0" rtlCol="0" anchor="ctr"/>
-          <a:lstStyle/>
-          <a:p>
-            <a:pPr algn="ctr" indent="0" marL="0">
-              <a:buNone/>
-            </a:pPr>
-            <a:r>
-              <a:rPr lang="en-US" sz="1100" b="1" dirty="0">
-                <a:solidFill>
-                  <a:srgbClr val="FFFFFF"/>
-                </a:solidFill>
-                <a:latin typeface="Aptos" pitchFamily="34" charset="0"/>
-                <a:ea typeface="Aptos" pitchFamily="34" charset="-122"/>
-                <a:cs typeface="Aptos" pitchFamily="34" charset="-120"/>
-              </a:rPr>
-              <a:t>9</a:t>
-            </a:r>
-            <a:endParaRPr lang="en-US" sz="1100" dirty="0"/>
-          </a:p>
-        </p:txBody>
-      </p:sp>
-      <p:sp>
-        <p:nvSpPr>
-          <p:cNvPr id="10" name="Text 8"/>
-          <p:cNvSpPr/>
-          <p:nvPr/>
-        </p:nvSpPr>
-        <p:spPr>
-          <a:xfrm>
-            <a:off x="640080" y="621792"/>
             <a:ext cx="10881360" cy="713232"/>
           </a:xfrm>
           <a:prstGeom prst="rect">
@@ -5874,14 +6302,14 @@
       </p:sp>
       <p:sp>
         <p:nvSpPr>
-          <p:cNvPr id="11" name="Text 9"/>
+          <p:cNvPr id="9" name="Text 7"/>
           <p:cNvSpPr/>
           <p:nvPr/>
         </p:nvSpPr>
         <p:spPr>
           <a:xfrm>
             <a:off x="868680" y="1508760"/>
-            <a:ext cx="6537960" cy="4160520"/>
+            <a:ext cx="6309360" cy="4160520"/>
           </a:xfrm>
           <a:prstGeom prst="rect">
             <a:avLst/>
@@ -5940,18 +6368,18 @@
       </p:sp>
       <p:sp>
         <p:nvSpPr>
-          <p:cNvPr id="12" name="Shape 10"/>
-          <p:cNvSpPr/>
-          <p:nvPr/>
-        </p:nvSpPr>
-        <p:spPr>
-          <a:xfrm>
-            <a:off x="7909560" y="1417320"/>
-            <a:ext cx="3154680" cy="1828800"/>
+          <p:cNvPr id="10" name="Shape 8"/>
+          <p:cNvSpPr/>
+          <p:nvPr/>
+        </p:nvSpPr>
+        <p:spPr>
+          <a:xfrm>
+            <a:off x="7635240" y="1325880"/>
+            <a:ext cx="3474720" cy="1325880"/>
           </a:xfrm>
           <a:prstGeom prst="roundRect">
             <a:avLst>
-              <a:gd name="adj" fmla="val 6000"/>
+              <a:gd name="adj" fmla="val 8276"/>
             </a:avLst>
           </a:prstGeom>
           <a:solidFill>
@@ -5967,14 +6395,14 @@
       </p:sp>
       <p:sp>
         <p:nvSpPr>
-          <p:cNvPr id="13" name="Text 11"/>
-          <p:cNvSpPr/>
-          <p:nvPr/>
-        </p:nvSpPr>
-        <p:spPr>
-          <a:xfrm>
-            <a:off x="8074152" y="1563624"/>
-            <a:ext cx="2825496" cy="256032"/>
+          <p:cNvPr id="11" name="Text 9"/>
+          <p:cNvSpPr/>
+          <p:nvPr/>
+        </p:nvSpPr>
+        <p:spPr>
+          <a:xfrm>
+            <a:off x="7799832" y="1472184"/>
+            <a:ext cx="3145536" cy="256032"/>
           </a:xfrm>
           <a:prstGeom prst="rect">
             <a:avLst/>
@@ -5998,7 +6426,7 @@
                 <a:ea typeface="Aptos" pitchFamily="34" charset="-122"/>
                 <a:cs typeface="Aptos" pitchFamily="34" charset="-120"/>
               </a:rPr>
-              <a:t>Key idea</a:t>
+              <a:t>Core concept</a:t>
             </a:r>
             <a:endParaRPr lang="en-US" sz="1300" dirty="0"/>
           </a:p>
@@ -6006,14 +6434,14 @@
       </p:sp>
       <p:sp>
         <p:nvSpPr>
-          <p:cNvPr id="14" name="Text 12"/>
-          <p:cNvSpPr/>
-          <p:nvPr/>
-        </p:nvSpPr>
-        <p:spPr>
-          <a:xfrm>
-            <a:off x="8074152" y="1920240"/>
-            <a:ext cx="2825496" cy="1188720"/>
+          <p:cNvPr id="12" name="Text 10"/>
+          <p:cNvSpPr/>
+          <p:nvPr/>
+        </p:nvSpPr>
+        <p:spPr>
+          <a:xfrm>
+            <a:off x="7799832" y="1828800"/>
+            <a:ext cx="3145536" cy="685800"/>
           </a:xfrm>
           <a:prstGeom prst="rect">
             <a:avLst/>
@@ -6047,18 +6475,159 @@
       </p:sp>
       <p:sp>
         <p:nvSpPr>
-          <p:cNvPr id="15" name="Shape 13"/>
-          <p:cNvSpPr/>
-          <p:nvPr/>
-        </p:nvSpPr>
-        <p:spPr>
-          <a:xfrm>
-            <a:off x="7909560" y="3520440"/>
-            <a:ext cx="3154680" cy="1737360"/>
+          <p:cNvPr id="13" name="Shape 11"/>
+          <p:cNvSpPr/>
+          <p:nvPr/>
+        </p:nvSpPr>
+        <p:spPr>
+          <a:xfrm>
+            <a:off x="7635240" y="2788920"/>
+            <a:ext cx="3474720" cy="1536192"/>
           </a:xfrm>
           <a:prstGeom prst="roundRect">
             <a:avLst>
-              <a:gd name="adj" fmla="val 6316"/>
+              <a:gd name="adj" fmla="val 7143"/>
+            </a:avLst>
+          </a:prstGeom>
+          <a:solidFill>
+            <a:srgbClr val="FFFFFF">
+              <a:alpha val="88000"/>
+            </a:srgbClr>
+          </a:solidFill>
+          <a:ln w="12700">
+            <a:solidFill>
+              <a:srgbClr val="D6E8F2"/>
+            </a:solidFill>
+            <a:prstDash val="solid"/>
+          </a:ln>
+        </p:spPr>
+      </p:sp>
+      <p:sp>
+        <p:nvSpPr>
+          <p:cNvPr id="14" name="Shape 12"/>
+          <p:cNvSpPr/>
+          <p:nvPr/>
+        </p:nvSpPr>
+        <p:spPr>
+          <a:xfrm>
+            <a:off x="8074152" y="3291840"/>
+            <a:ext cx="2596896" cy="749808"/>
+          </a:xfrm>
+          <a:prstGeom prst="rect">
+            <a:avLst/>
+          </a:prstGeom>
+          <a:solidFill>
+            <a:srgbClr val="EAF6F8"/>
+          </a:solidFill>
+          <a:ln w="12700">
+            <a:solidFill>
+              <a:srgbClr val="8ABBD8"/>
+            </a:solidFill>
+            <a:prstDash val="solid"/>
+          </a:ln>
+        </p:spPr>
+      </p:sp>
+      <p:sp>
+        <p:nvSpPr>
+          <p:cNvPr id="15" name="Shape 13"/>
+          <p:cNvSpPr/>
+          <p:nvPr/>
+        </p:nvSpPr>
+        <p:spPr>
+          <a:xfrm>
+            <a:off x="8202168" y="3721608"/>
+            <a:ext cx="2340864" cy="0"/>
+          </a:xfrm>
+          <a:prstGeom prst="line">
+            <a:avLst/>
+          </a:prstGeom>
+          <a:noFill/>
+          <a:ln w="19050">
+            <a:solidFill>
+              <a:srgbClr val="0068B7"/>
+            </a:solidFill>
+            <a:prstDash val="solid"/>
+          </a:ln>
+        </p:spPr>
+      </p:sp>
+      <p:sp>
+        <p:nvSpPr>
+          <p:cNvPr id="16" name="Shape 14"/>
+          <p:cNvSpPr/>
+          <p:nvPr/>
+        </p:nvSpPr>
+        <p:spPr>
+          <a:xfrm>
+            <a:off x="9198864" y="4206240"/>
+            <a:ext cx="347472" cy="347472"/>
+          </a:xfrm>
+          <a:prstGeom prst="ellipse">
+            <a:avLst/>
+          </a:prstGeom>
+          <a:solidFill>
+            <a:srgbClr val="2F8A28"/>
+          </a:solidFill>
+          <a:ln w="12700">
+            <a:solidFill>
+              <a:srgbClr val="2F8A28"/>
+            </a:solidFill>
+            <a:prstDash val="solid"/>
+          </a:ln>
+        </p:spPr>
+      </p:sp>
+      <p:sp>
+        <p:nvSpPr>
+          <p:cNvPr id="17" name="Text 15"/>
+          <p:cNvSpPr/>
+          <p:nvPr/>
+        </p:nvSpPr>
+        <p:spPr>
+          <a:xfrm>
+            <a:off x="7909560" y="3977640"/>
+            <a:ext cx="2926080" cy="182880"/>
+          </a:xfrm>
+          <a:prstGeom prst="rect">
+            <a:avLst/>
+          </a:prstGeom>
+          <a:noFill/>
+          <a:ln/>
+        </p:spPr>
+        <p:txBody>
+          <a:bodyPr wrap="square" lIns="0" tIns="0" rIns="0" bIns="0" rtlCol="0" anchor="ctr"/>
+          <a:lstStyle/>
+          <a:p>
+            <a:pPr algn="ctr" indent="0" marL="0">
+              <a:buNone/>
+            </a:pPr>
+            <a:r>
+              <a:rPr lang="en-US" sz="1000" dirty="0">
+                <a:solidFill>
+                  <a:srgbClr val="003A63"/>
+                </a:solidFill>
+                <a:latin typeface="Aptos" pitchFamily="34" charset="0"/>
+                <a:ea typeface="Aptos" pitchFamily="34" charset="-122"/>
+                <a:cs typeface="Aptos" pitchFamily="34" charset="-120"/>
+              </a:rPr>
+              <a:t>Concept to action</a:t>
+            </a:r>
+            <a:endParaRPr lang="en-US" sz="1000" dirty="0"/>
+          </a:p>
+        </p:txBody>
+      </p:sp>
+      <p:sp>
+        <p:nvSpPr>
+          <p:cNvPr id="18" name="Shape 16"/>
+          <p:cNvSpPr/>
+          <p:nvPr/>
+        </p:nvSpPr>
+        <p:spPr>
+          <a:xfrm>
+            <a:off x="7635240" y="4498848"/>
+            <a:ext cx="3474720" cy="1143000"/>
+          </a:xfrm>
+          <a:prstGeom prst="roundRect">
+            <a:avLst>
+              <a:gd name="adj" fmla="val 9600"/>
             </a:avLst>
           </a:prstGeom>
           <a:solidFill>
@@ -6074,14 +6643,14 @@
       </p:sp>
       <p:sp>
         <p:nvSpPr>
-          <p:cNvPr id="16" name="Text 14"/>
-          <p:cNvSpPr/>
-          <p:nvPr/>
-        </p:nvSpPr>
-        <p:spPr>
-          <a:xfrm>
-            <a:off x="8074152" y="3666744"/>
-            <a:ext cx="2825496" cy="256032"/>
+          <p:cNvPr id="19" name="Text 17"/>
+          <p:cNvSpPr/>
+          <p:nvPr/>
+        </p:nvSpPr>
+        <p:spPr>
+          <a:xfrm>
+            <a:off x="7799832" y="4645152"/>
+            <a:ext cx="3145536" cy="256032"/>
           </a:xfrm>
           <a:prstGeom prst="rect">
             <a:avLst/>
@@ -6105,7 +6674,7 @@
                 <a:ea typeface="Aptos" pitchFamily="34" charset="-122"/>
                 <a:cs typeface="Aptos" pitchFamily="34" charset="-120"/>
               </a:rPr>
-              <a:t>Use this for</a:t>
+              <a:t>Apply it</a:t>
             </a:r>
             <a:endParaRPr lang="en-US" sz="1300" dirty="0"/>
           </a:p>
@@ -6113,14 +6682,14 @@
       </p:sp>
       <p:sp>
         <p:nvSpPr>
-          <p:cNvPr id="17" name="Text 15"/>
-          <p:cNvSpPr/>
-          <p:nvPr/>
-        </p:nvSpPr>
-        <p:spPr>
-          <a:xfrm>
-            <a:off x="8074152" y="4023360"/>
-            <a:ext cx="2825496" cy="1097280"/>
+          <p:cNvPr id="20" name="Text 18"/>
+          <p:cNvSpPr/>
+          <p:nvPr/>
+        </p:nvSpPr>
+        <p:spPr>
+          <a:xfrm>
+            <a:off x="7799832" y="5001768"/>
+            <a:ext cx="3145536" cy="502920"/>
           </a:xfrm>
           <a:prstGeom prst="rect">
             <a:avLst/>
@@ -6146,7 +6715,7 @@
                 <a:ea typeface="Aptos" pitchFamily="34" charset="-122"/>
                 <a:cs typeface="Aptos" pitchFamily="34" charset="-120"/>
               </a:rPr>
-              <a:t>Connect the concept to public health decisions, safeguards, documentation, or implementation work.</a:t>
+              <a:t>Connect the concept to public health purpose, responsible use, required safeguards, documentation, and the next action a department should take.</a:t>
             </a:r>
             <a:endParaRPr lang="en-US" sz="1550" dirty="0"/>
           </a:p>
@@ -6320,8 +6889,8 @@
         </p:nvSpPr>
         <p:spPr>
           <a:xfrm>
-            <a:off x="9966960" y="6537960"/>
-            <a:ext cx="1645920" cy="201168"/>
+            <a:off x="9646920" y="6537960"/>
+            <a:ext cx="1965960" cy="201168"/>
           </a:xfrm>
           <a:prstGeom prst="rect">
             <a:avLst/>
@@ -6345,7 +6914,7 @@
                 <a:ea typeface="Aptos" pitchFamily="34" charset="-122"/>
                 <a:cs typeface="Aptos" pitchFamily="34" charset="-120"/>
               </a:rPr>
-              <a:t>Â© Paula Soper</a:t>
+              <a:t>Copyright Paula Soper</a:t>
             </a:r>
             <a:endParaRPr lang="en-US" sz="800" dirty="0"/>
           </a:p>
@@ -6440,7 +7009,7 @@
         <p:spPr>
           <a:xfrm>
             <a:off x="868680" y="1508760"/>
-            <a:ext cx="6537960" cy="4160520"/>
+            <a:ext cx="6309360" cy="4160520"/>
           </a:xfrm>
           <a:prstGeom prst="rect">
             <a:avLst/>
@@ -6491,12 +7060,12 @@
         </p:nvSpPr>
         <p:spPr>
           <a:xfrm>
-            <a:off x="7909560" y="1417320"/>
-            <a:ext cx="3154680" cy="1828800"/>
+            <a:off x="7635240" y="1325880"/>
+            <a:ext cx="3474720" cy="1325880"/>
           </a:xfrm>
           <a:prstGeom prst="roundRect">
             <a:avLst>
-              <a:gd name="adj" fmla="val 6000"/>
+              <a:gd name="adj" fmla="val 8276"/>
             </a:avLst>
           </a:prstGeom>
           <a:solidFill>
@@ -6518,8 +7087,8 @@
         </p:nvSpPr>
         <p:spPr>
           <a:xfrm>
-            <a:off x="8074152" y="1563624"/>
-            <a:ext cx="2825496" cy="256032"/>
+            <a:off x="7799832" y="1472184"/>
+            <a:ext cx="3145536" cy="256032"/>
           </a:xfrm>
           <a:prstGeom prst="rect">
             <a:avLst/>
@@ -6543,7 +7112,7 @@
                 <a:ea typeface="Aptos" pitchFamily="34" charset="-122"/>
                 <a:cs typeface="Aptos" pitchFamily="34" charset="-120"/>
               </a:rPr>
-              <a:t>Key idea</a:t>
+              <a:t>Core concept</a:t>
             </a:r>
             <a:endParaRPr lang="en-US" sz="1300" dirty="0"/>
           </a:p>
@@ -6557,8 +7126,8 @@
         </p:nvSpPr>
         <p:spPr>
           <a:xfrm>
-            <a:off x="8074152" y="1920240"/>
-            <a:ext cx="2825496" cy="1188720"/>
+            <a:off x="7799832" y="1828800"/>
+            <a:ext cx="3145536" cy="685800"/>
           </a:xfrm>
           <a:prstGeom prst="rect">
             <a:avLst/>
@@ -6598,12 +7167,153 @@
         </p:nvSpPr>
         <p:spPr>
           <a:xfrm>
-            <a:off x="7909560" y="3520440"/>
-            <a:ext cx="3154680" cy="1737360"/>
+            <a:off x="7635240" y="2788920"/>
+            <a:ext cx="3474720" cy="1536192"/>
           </a:xfrm>
           <a:prstGeom prst="roundRect">
             <a:avLst>
-              <a:gd name="adj" fmla="val 6316"/>
+              <a:gd name="adj" fmla="val 7143"/>
+            </a:avLst>
+          </a:prstGeom>
+          <a:solidFill>
+            <a:srgbClr val="FFFFFF">
+              <a:alpha val="88000"/>
+            </a:srgbClr>
+          </a:solidFill>
+          <a:ln w="12700">
+            <a:solidFill>
+              <a:srgbClr val="D6E8F2"/>
+            </a:solidFill>
+            <a:prstDash val="solid"/>
+          </a:ln>
+        </p:spPr>
+      </p:sp>
+      <p:sp>
+        <p:nvSpPr>
+          <p:cNvPr id="14" name="Shape 12"/>
+          <p:cNvSpPr/>
+          <p:nvPr/>
+        </p:nvSpPr>
+        <p:spPr>
+          <a:xfrm>
+            <a:off x="8074152" y="3291840"/>
+            <a:ext cx="2596896" cy="749808"/>
+          </a:xfrm>
+          <a:prstGeom prst="rect">
+            <a:avLst/>
+          </a:prstGeom>
+          <a:solidFill>
+            <a:srgbClr val="EAF6F8"/>
+          </a:solidFill>
+          <a:ln w="12700">
+            <a:solidFill>
+              <a:srgbClr val="8ABBD8"/>
+            </a:solidFill>
+            <a:prstDash val="solid"/>
+          </a:ln>
+        </p:spPr>
+      </p:sp>
+      <p:sp>
+        <p:nvSpPr>
+          <p:cNvPr id="15" name="Shape 13"/>
+          <p:cNvSpPr/>
+          <p:nvPr/>
+        </p:nvSpPr>
+        <p:spPr>
+          <a:xfrm>
+            <a:off x="8202168" y="3721608"/>
+            <a:ext cx="2340864" cy="0"/>
+          </a:xfrm>
+          <a:prstGeom prst="line">
+            <a:avLst/>
+          </a:prstGeom>
+          <a:noFill/>
+          <a:ln w="19050">
+            <a:solidFill>
+              <a:srgbClr val="0068B7"/>
+            </a:solidFill>
+            <a:prstDash val="solid"/>
+          </a:ln>
+        </p:spPr>
+      </p:sp>
+      <p:sp>
+        <p:nvSpPr>
+          <p:cNvPr id="16" name="Shape 14"/>
+          <p:cNvSpPr/>
+          <p:nvPr/>
+        </p:nvSpPr>
+        <p:spPr>
+          <a:xfrm>
+            <a:off x="9198864" y="4206240"/>
+            <a:ext cx="347472" cy="347472"/>
+          </a:xfrm>
+          <a:prstGeom prst="ellipse">
+            <a:avLst/>
+          </a:prstGeom>
+          <a:solidFill>
+            <a:srgbClr val="2F8A28"/>
+          </a:solidFill>
+          <a:ln w="12700">
+            <a:solidFill>
+              <a:srgbClr val="2F8A28"/>
+            </a:solidFill>
+            <a:prstDash val="solid"/>
+          </a:ln>
+        </p:spPr>
+      </p:sp>
+      <p:sp>
+        <p:nvSpPr>
+          <p:cNvPr id="17" name="Text 15"/>
+          <p:cNvSpPr/>
+          <p:nvPr/>
+        </p:nvSpPr>
+        <p:spPr>
+          <a:xfrm>
+            <a:off x="7909560" y="3977640"/>
+            <a:ext cx="2926080" cy="182880"/>
+          </a:xfrm>
+          <a:prstGeom prst="rect">
+            <a:avLst/>
+          </a:prstGeom>
+          <a:noFill/>
+          <a:ln/>
+        </p:spPr>
+        <p:txBody>
+          <a:bodyPr wrap="square" lIns="0" tIns="0" rIns="0" bIns="0" rtlCol="0" anchor="ctr"/>
+          <a:lstStyle/>
+          <a:p>
+            <a:pPr algn="ctr" indent="0" marL="0">
+              <a:buNone/>
+            </a:pPr>
+            <a:r>
+              <a:rPr lang="en-US" sz="1000" dirty="0">
+                <a:solidFill>
+                  <a:srgbClr val="003A63"/>
+                </a:solidFill>
+                <a:latin typeface="Aptos" pitchFamily="34" charset="0"/>
+                <a:ea typeface="Aptos" pitchFamily="34" charset="-122"/>
+                <a:cs typeface="Aptos" pitchFamily="34" charset="-120"/>
+              </a:rPr>
+              <a:t>Concept to action</a:t>
+            </a:r>
+            <a:endParaRPr lang="en-US" sz="1000" dirty="0"/>
+          </a:p>
+        </p:txBody>
+      </p:sp>
+      <p:sp>
+        <p:nvSpPr>
+          <p:cNvPr id="18" name="Shape 16"/>
+          <p:cNvSpPr/>
+          <p:nvPr/>
+        </p:nvSpPr>
+        <p:spPr>
+          <a:xfrm>
+            <a:off x="7635240" y="4498848"/>
+            <a:ext cx="3474720" cy="1143000"/>
+          </a:xfrm>
+          <a:prstGeom prst="roundRect">
+            <a:avLst>
+              <a:gd name="adj" fmla="val 9600"/>
             </a:avLst>
           </a:prstGeom>
           <a:solidFill>
@@ -6619,14 +7329,14 @@
       </p:sp>
       <p:sp>
         <p:nvSpPr>
-          <p:cNvPr id="14" name="Text 12"/>
-          <p:cNvSpPr/>
-          <p:nvPr/>
-        </p:nvSpPr>
-        <p:spPr>
-          <a:xfrm>
-            <a:off x="8074152" y="3666744"/>
-            <a:ext cx="2825496" cy="256032"/>
+          <p:cNvPr id="19" name="Text 17"/>
+          <p:cNvSpPr/>
+          <p:nvPr/>
+        </p:nvSpPr>
+        <p:spPr>
+          <a:xfrm>
+            <a:off x="7799832" y="4645152"/>
+            <a:ext cx="3145536" cy="256032"/>
           </a:xfrm>
           <a:prstGeom prst="rect">
             <a:avLst/>
@@ -6650,7 +7360,7 @@
                 <a:ea typeface="Aptos" pitchFamily="34" charset="-122"/>
                 <a:cs typeface="Aptos" pitchFamily="34" charset="-120"/>
               </a:rPr>
-              <a:t>Use this for</a:t>
+              <a:t>Apply it</a:t>
             </a:r>
             <a:endParaRPr lang="en-US" sz="1300" dirty="0"/>
           </a:p>
@@ -6658,14 +7368,14 @@
       </p:sp>
       <p:sp>
         <p:nvSpPr>
-          <p:cNvPr id="15" name="Text 13"/>
-          <p:cNvSpPr/>
-          <p:nvPr/>
-        </p:nvSpPr>
-        <p:spPr>
-          <a:xfrm>
-            <a:off x="8074152" y="4023360"/>
-            <a:ext cx="2825496" cy="1097280"/>
+          <p:cNvPr id="20" name="Text 18"/>
+          <p:cNvSpPr/>
+          <p:nvPr/>
+        </p:nvSpPr>
+        <p:spPr>
+          <a:xfrm>
+            <a:off x="7799832" y="5001768"/>
+            <a:ext cx="3145536" cy="502920"/>
           </a:xfrm>
           <a:prstGeom prst="rect">
             <a:avLst/>
@@ -6691,7 +7401,7 @@
                 <a:ea typeface="Aptos" pitchFamily="34" charset="-122"/>
                 <a:cs typeface="Aptos" pitchFamily="34" charset="-120"/>
               </a:rPr>
-              <a:t>Connect the concept to public health decisions, safeguards, documentation, or implementation work.</a:t>
+              <a:t>Connect the concept to public health purpose, responsible use, required safeguards, documentation, and the next action a department should take.</a:t>
             </a:r>
             <a:endParaRPr lang="en-US" sz="1550" dirty="0"/>
           </a:p>
@@ -6865,8 +7575,8 @@
         </p:nvSpPr>
         <p:spPr>
           <a:xfrm>
-            <a:off x="9966960" y="6537960"/>
-            <a:ext cx="1645920" cy="201168"/>
+            <a:off x="9646920" y="6537960"/>
+            <a:ext cx="1965960" cy="201168"/>
           </a:xfrm>
           <a:prstGeom prst="rect">
             <a:avLst/>
@@ -6890,7 +7600,7 @@
                 <a:ea typeface="Aptos" pitchFamily="34" charset="-122"/>
                 <a:cs typeface="Aptos" pitchFamily="34" charset="-120"/>
               </a:rPr>
-              <a:t>Â© Paula Soper</a:t>
+              <a:t>Copyright Paula Soper</a:t>
             </a:r>
             <a:endParaRPr lang="en-US" sz="800" dirty="0"/>
           </a:p>
@@ -6937,77 +7647,13 @@
       </p:sp>
       <p:sp>
         <p:nvSpPr>
-          <p:cNvPr id="8" name="Shape 6"/>
+          <p:cNvPr id="8" name="Text 6"/>
           <p:cNvSpPr/>
           <p:nvPr/>
         </p:nvSpPr>
         <p:spPr>
           <a:xfrm>
             <a:off x="640080" y="658368"/>
-            <a:ext cx="420624" cy="420624"/>
-          </a:xfrm>
-          <a:prstGeom prst="ellipse">
-            <a:avLst/>
-          </a:prstGeom>
-          <a:solidFill>
-            <a:srgbClr val="0068B7"/>
-          </a:solidFill>
-          <a:ln w="12700">
-            <a:solidFill>
-              <a:srgbClr val="0068B7"/>
-            </a:solidFill>
-            <a:prstDash val="solid"/>
-          </a:ln>
-        </p:spPr>
-      </p:sp>
-      <p:sp>
-        <p:nvSpPr>
-          <p:cNvPr id="9" name="Text 7"/>
-          <p:cNvSpPr/>
-          <p:nvPr/>
-        </p:nvSpPr>
-        <p:spPr>
-          <a:xfrm>
-            <a:off x="640080" y="731520"/>
-            <a:ext cx="420624" cy="164592"/>
-          </a:xfrm>
-          <a:prstGeom prst="rect">
-            <a:avLst/>
-          </a:prstGeom>
-          <a:noFill/>
-          <a:ln/>
-        </p:spPr>
-        <p:txBody>
-          <a:bodyPr wrap="square" lIns="0" tIns="0" rIns="0" bIns="0" rtlCol="0" anchor="ctr"/>
-          <a:lstStyle/>
-          <a:p>
-            <a:pPr algn="ctr" indent="0" marL="0">
-              <a:buNone/>
-            </a:pPr>
-            <a:r>
-              <a:rPr lang="en-US" sz="1100" b="1" dirty="0">
-                <a:solidFill>
-                  <a:srgbClr val="FFFFFF"/>
-                </a:solidFill>
-                <a:latin typeface="Aptos" pitchFamily="34" charset="0"/>
-                <a:ea typeface="Aptos" pitchFamily="34" charset="-122"/>
-                <a:cs typeface="Aptos" pitchFamily="34" charset="-120"/>
-              </a:rPr>
-              <a:t>10</a:t>
-            </a:r>
-            <a:endParaRPr lang="en-US" sz="1100" dirty="0"/>
-          </a:p>
-        </p:txBody>
-      </p:sp>
-      <p:sp>
-        <p:nvSpPr>
-          <p:cNvPr id="10" name="Text 8"/>
-          <p:cNvSpPr/>
-          <p:nvPr/>
-        </p:nvSpPr>
-        <p:spPr>
-          <a:xfrm>
-            <a:off x="640080" y="621792"/>
             <a:ext cx="10881360" cy="713232"/>
           </a:xfrm>
           <a:prstGeom prst="rect">
@@ -7042,14 +7688,14 @@
       </p:sp>
       <p:sp>
         <p:nvSpPr>
-          <p:cNvPr id="11" name="Text 9"/>
+          <p:cNvPr id="9" name="Text 7"/>
           <p:cNvSpPr/>
           <p:nvPr/>
         </p:nvSpPr>
         <p:spPr>
           <a:xfrm>
             <a:off x="868680" y="1508760"/>
-            <a:ext cx="6537960" cy="4160520"/>
+            <a:ext cx="6309360" cy="4160520"/>
           </a:xfrm>
           <a:prstGeom prst="rect">
             <a:avLst/>
@@ -7094,18 +7740,18 @@
       </p:sp>
       <p:sp>
         <p:nvSpPr>
-          <p:cNvPr id="12" name="Shape 10"/>
-          <p:cNvSpPr/>
-          <p:nvPr/>
-        </p:nvSpPr>
-        <p:spPr>
-          <a:xfrm>
-            <a:off x="7909560" y="1417320"/>
-            <a:ext cx="3154680" cy="1828800"/>
+          <p:cNvPr id="10" name="Shape 8"/>
+          <p:cNvSpPr/>
+          <p:nvPr/>
+        </p:nvSpPr>
+        <p:spPr>
+          <a:xfrm>
+            <a:off x="7635240" y="1325880"/>
+            <a:ext cx="3474720" cy="1325880"/>
           </a:xfrm>
           <a:prstGeom prst="roundRect">
             <a:avLst>
-              <a:gd name="adj" fmla="val 6000"/>
+              <a:gd name="adj" fmla="val 8276"/>
             </a:avLst>
           </a:prstGeom>
           <a:solidFill>
@@ -7121,14 +7767,14 @@
       </p:sp>
       <p:sp>
         <p:nvSpPr>
-          <p:cNvPr id="13" name="Text 11"/>
-          <p:cNvSpPr/>
-          <p:nvPr/>
-        </p:nvSpPr>
-        <p:spPr>
-          <a:xfrm>
-            <a:off x="8074152" y="1563624"/>
-            <a:ext cx="2825496" cy="256032"/>
+          <p:cNvPr id="11" name="Text 9"/>
+          <p:cNvSpPr/>
+          <p:nvPr/>
+        </p:nvSpPr>
+        <p:spPr>
+          <a:xfrm>
+            <a:off x="7799832" y="1472184"/>
+            <a:ext cx="3145536" cy="256032"/>
           </a:xfrm>
           <a:prstGeom prst="rect">
             <a:avLst/>
@@ -7152,7 +7798,7 @@
                 <a:ea typeface="Aptos" pitchFamily="34" charset="-122"/>
                 <a:cs typeface="Aptos" pitchFamily="34" charset="-120"/>
               </a:rPr>
-              <a:t>Key idea</a:t>
+              <a:t>Practice focus</a:t>
             </a:r>
             <a:endParaRPr lang="en-US" sz="1300" dirty="0"/>
           </a:p>
@@ -7160,14 +7806,14 @@
       </p:sp>
       <p:sp>
         <p:nvSpPr>
-          <p:cNvPr id="14" name="Text 12"/>
-          <p:cNvSpPr/>
-          <p:nvPr/>
-        </p:nvSpPr>
-        <p:spPr>
-          <a:xfrm>
-            <a:off x="8074152" y="1920240"/>
-            <a:ext cx="2825496" cy="1188720"/>
+          <p:cNvPr id="12" name="Text 10"/>
+          <p:cNvSpPr/>
+          <p:nvPr/>
+        </p:nvSpPr>
+        <p:spPr>
+          <a:xfrm>
+            <a:off x="7799832" y="1828800"/>
+            <a:ext cx="3145536" cy="685800"/>
           </a:xfrm>
           <a:prstGeom prst="rect">
             <a:avLst/>
@@ -7201,18 +7847,159 @@
       </p:sp>
       <p:sp>
         <p:nvSpPr>
-          <p:cNvPr id="15" name="Shape 13"/>
-          <p:cNvSpPr/>
-          <p:nvPr/>
-        </p:nvSpPr>
-        <p:spPr>
-          <a:xfrm>
-            <a:off x="7909560" y="3520440"/>
-            <a:ext cx="3154680" cy="1737360"/>
+          <p:cNvPr id="13" name="Shape 11"/>
+          <p:cNvSpPr/>
+          <p:nvPr/>
+        </p:nvSpPr>
+        <p:spPr>
+          <a:xfrm>
+            <a:off x="7635240" y="2788920"/>
+            <a:ext cx="3474720" cy="1536192"/>
           </a:xfrm>
           <a:prstGeom prst="roundRect">
             <a:avLst>
-              <a:gd name="adj" fmla="val 6316"/>
+              <a:gd name="adj" fmla="val 7143"/>
+            </a:avLst>
+          </a:prstGeom>
+          <a:solidFill>
+            <a:srgbClr val="FFFFFF">
+              <a:alpha val="88000"/>
+            </a:srgbClr>
+          </a:solidFill>
+          <a:ln w="12700">
+            <a:solidFill>
+              <a:srgbClr val="D6E8F2"/>
+            </a:solidFill>
+            <a:prstDash val="solid"/>
+          </a:ln>
+        </p:spPr>
+      </p:sp>
+      <p:sp>
+        <p:nvSpPr>
+          <p:cNvPr id="14" name="Shape 12"/>
+          <p:cNvSpPr/>
+          <p:nvPr/>
+        </p:nvSpPr>
+        <p:spPr>
+          <a:xfrm>
+            <a:off x="8074152" y="3291840"/>
+            <a:ext cx="2596896" cy="749808"/>
+          </a:xfrm>
+          <a:prstGeom prst="rect">
+            <a:avLst/>
+          </a:prstGeom>
+          <a:solidFill>
+            <a:srgbClr val="EAF6F8"/>
+          </a:solidFill>
+          <a:ln w="12700">
+            <a:solidFill>
+              <a:srgbClr val="8ABBD8"/>
+            </a:solidFill>
+            <a:prstDash val="solid"/>
+          </a:ln>
+        </p:spPr>
+      </p:sp>
+      <p:sp>
+        <p:nvSpPr>
+          <p:cNvPr id="15" name="Shape 13"/>
+          <p:cNvSpPr/>
+          <p:nvPr/>
+        </p:nvSpPr>
+        <p:spPr>
+          <a:xfrm>
+            <a:off x="8202168" y="3721608"/>
+            <a:ext cx="2340864" cy="0"/>
+          </a:xfrm>
+          <a:prstGeom prst="line">
+            <a:avLst/>
+          </a:prstGeom>
+          <a:noFill/>
+          <a:ln w="19050">
+            <a:solidFill>
+              <a:srgbClr val="0068B7"/>
+            </a:solidFill>
+            <a:prstDash val="solid"/>
+          </a:ln>
+        </p:spPr>
+      </p:sp>
+      <p:sp>
+        <p:nvSpPr>
+          <p:cNvPr id="16" name="Shape 14"/>
+          <p:cNvSpPr/>
+          <p:nvPr/>
+        </p:nvSpPr>
+        <p:spPr>
+          <a:xfrm>
+            <a:off x="9198864" y="4206240"/>
+            <a:ext cx="347472" cy="347472"/>
+          </a:xfrm>
+          <a:prstGeom prst="ellipse">
+            <a:avLst/>
+          </a:prstGeom>
+          <a:solidFill>
+            <a:srgbClr val="2F8A28"/>
+          </a:solidFill>
+          <a:ln w="12700">
+            <a:solidFill>
+              <a:srgbClr val="2F8A28"/>
+            </a:solidFill>
+            <a:prstDash val="solid"/>
+          </a:ln>
+        </p:spPr>
+      </p:sp>
+      <p:sp>
+        <p:nvSpPr>
+          <p:cNvPr id="17" name="Text 15"/>
+          <p:cNvSpPr/>
+          <p:nvPr/>
+        </p:nvSpPr>
+        <p:spPr>
+          <a:xfrm>
+            <a:off x="7909560" y="3977640"/>
+            <a:ext cx="2926080" cy="182880"/>
+          </a:xfrm>
+          <a:prstGeom prst="rect">
+            <a:avLst/>
+          </a:prstGeom>
+          <a:noFill/>
+          <a:ln/>
+        </p:spPr>
+        <p:txBody>
+          <a:bodyPr wrap="square" lIns="0" tIns="0" rIns="0" bIns="0" rtlCol="0" anchor="ctr"/>
+          <a:lstStyle/>
+          <a:p>
+            <a:pPr algn="ctr" indent="0" marL="0">
+              <a:buNone/>
+            </a:pPr>
+            <a:r>
+              <a:rPr lang="en-US" sz="1000" dirty="0">
+                <a:solidFill>
+                  <a:srgbClr val="003A63"/>
+                </a:solidFill>
+                <a:latin typeface="Aptos" pitchFamily="34" charset="0"/>
+                <a:ea typeface="Aptos" pitchFamily="34" charset="-122"/>
+                <a:cs typeface="Aptos" pitchFamily="34" charset="-120"/>
+              </a:rPr>
+              <a:t>Concept to action</a:t>
+            </a:r>
+            <a:endParaRPr lang="en-US" sz="1000" dirty="0"/>
+          </a:p>
+        </p:txBody>
+      </p:sp>
+      <p:sp>
+        <p:nvSpPr>
+          <p:cNvPr id="18" name="Shape 16"/>
+          <p:cNvSpPr/>
+          <p:nvPr/>
+        </p:nvSpPr>
+        <p:spPr>
+          <a:xfrm>
+            <a:off x="7635240" y="4498848"/>
+            <a:ext cx="3474720" cy="1143000"/>
+          </a:xfrm>
+          <a:prstGeom prst="roundRect">
+            <a:avLst>
+              <a:gd name="adj" fmla="val 9600"/>
             </a:avLst>
           </a:prstGeom>
           <a:solidFill>
@@ -7228,14 +8015,14 @@
       </p:sp>
       <p:sp>
         <p:nvSpPr>
-          <p:cNvPr id="16" name="Text 14"/>
-          <p:cNvSpPr/>
-          <p:nvPr/>
-        </p:nvSpPr>
-        <p:spPr>
-          <a:xfrm>
-            <a:off x="8074152" y="3666744"/>
-            <a:ext cx="2825496" cy="256032"/>
+          <p:cNvPr id="19" name="Text 17"/>
+          <p:cNvSpPr/>
+          <p:nvPr/>
+        </p:nvSpPr>
+        <p:spPr>
+          <a:xfrm>
+            <a:off x="7799832" y="4645152"/>
+            <a:ext cx="3145536" cy="256032"/>
           </a:xfrm>
           <a:prstGeom prst="rect">
             <a:avLst/>
@@ -7259,7 +8046,7 @@
                 <a:ea typeface="Aptos" pitchFamily="34" charset="-122"/>
                 <a:cs typeface="Aptos" pitchFamily="34" charset="-120"/>
               </a:rPr>
-              <a:t>Use this for</a:t>
+              <a:t>What to produce</a:t>
             </a:r>
             <a:endParaRPr lang="en-US" sz="1300" dirty="0"/>
           </a:p>
@@ -7267,14 +8054,14 @@
       </p:sp>
       <p:sp>
         <p:nvSpPr>
-          <p:cNvPr id="17" name="Text 15"/>
-          <p:cNvSpPr/>
-          <p:nvPr/>
-        </p:nvSpPr>
-        <p:spPr>
-          <a:xfrm>
-            <a:off x="8074152" y="4023360"/>
-            <a:ext cx="2825496" cy="1097280"/>
+          <p:cNvPr id="20" name="Text 18"/>
+          <p:cNvSpPr/>
+          <p:nvPr/>
+        </p:nvSpPr>
+        <p:spPr>
+          <a:xfrm>
+            <a:off x="7799832" y="5001768"/>
+            <a:ext cx="3145536" cy="502920"/>
           </a:xfrm>
           <a:prstGeom prst="rect">
             <a:avLst/>
@@ -7300,7 +8087,7 @@
                 <a:ea typeface="Aptos" pitchFamily="34" charset="-122"/>
                 <a:cs typeface="Aptos" pitchFamily="34" charset="-120"/>
               </a:rPr>
-              <a:t>Connect the concept to public health decisions, safeguards, documentation, or implementation work.</a:t>
+              <a:t>Use the assignment to test whether you can explain the concept, apply it to a realistic public health situation, and identify what would need review before the work moves forward.</a:t>
             </a:r>
             <a:endParaRPr lang="en-US" sz="1550" dirty="0"/>
           </a:p>
@@ -7474,8 +8261,8 @@
         </p:nvSpPr>
         <p:spPr>
           <a:xfrm>
-            <a:off x="9966960" y="6537960"/>
-            <a:ext cx="1645920" cy="201168"/>
+            <a:off x="9646920" y="6537960"/>
+            <a:ext cx="1965960" cy="201168"/>
           </a:xfrm>
           <a:prstGeom prst="rect">
             <a:avLst/>
@@ -7499,7 +8286,7 @@
                 <a:ea typeface="Aptos" pitchFamily="34" charset="-122"/>
                 <a:cs typeface="Aptos" pitchFamily="34" charset="-120"/>
               </a:rPr>
-              <a:t>Â© Paula Soper</a:t>
+              <a:t>Copyright Paula Soper</a:t>
             </a:r>
             <a:endParaRPr lang="en-US" sz="800" dirty="0"/>
           </a:p>
@@ -7546,77 +8333,13 @@
       </p:sp>
       <p:sp>
         <p:nvSpPr>
-          <p:cNvPr id="8" name="Shape 6"/>
+          <p:cNvPr id="8" name="Text 6"/>
           <p:cNvSpPr/>
           <p:nvPr/>
         </p:nvSpPr>
         <p:spPr>
           <a:xfrm>
             <a:off x="640080" y="658368"/>
-            <a:ext cx="420624" cy="420624"/>
-          </a:xfrm>
-          <a:prstGeom prst="ellipse">
-            <a:avLst/>
-          </a:prstGeom>
-          <a:solidFill>
-            <a:srgbClr val="0068B7"/>
-          </a:solidFill>
-          <a:ln w="12700">
-            <a:solidFill>
-              <a:srgbClr val="0068B7"/>
-            </a:solidFill>
-            <a:prstDash val="solid"/>
-          </a:ln>
-        </p:spPr>
-      </p:sp>
-      <p:sp>
-        <p:nvSpPr>
-          <p:cNvPr id="9" name="Text 7"/>
-          <p:cNvSpPr/>
-          <p:nvPr/>
-        </p:nvSpPr>
-        <p:spPr>
-          <a:xfrm>
-            <a:off x="640080" y="731520"/>
-            <a:ext cx="420624" cy="164592"/>
-          </a:xfrm>
-          <a:prstGeom prst="rect">
-            <a:avLst/>
-          </a:prstGeom>
-          <a:noFill/>
-          <a:ln/>
-        </p:spPr>
-        <p:txBody>
-          <a:bodyPr wrap="square" lIns="0" tIns="0" rIns="0" bIns="0" rtlCol="0" anchor="ctr"/>
-          <a:lstStyle/>
-          <a:p>
-            <a:pPr algn="ctr" indent="0" marL="0">
-              <a:buNone/>
-            </a:pPr>
-            <a:r>
-              <a:rPr lang="en-US" sz="1100" b="1" dirty="0">
-                <a:solidFill>
-                  <a:srgbClr val="FFFFFF"/>
-                </a:solidFill>
-                <a:latin typeface="Aptos" pitchFamily="34" charset="0"/>
-                <a:ea typeface="Aptos" pitchFamily="34" charset="-122"/>
-                <a:cs typeface="Aptos" pitchFamily="34" charset="-120"/>
-              </a:rPr>
-              <a:t>11</a:t>
-            </a:r>
-            <a:endParaRPr lang="en-US" sz="1100" dirty="0"/>
-          </a:p>
-        </p:txBody>
-      </p:sp>
-      <p:sp>
-        <p:nvSpPr>
-          <p:cNvPr id="10" name="Text 8"/>
-          <p:cNvSpPr/>
-          <p:nvPr/>
-        </p:nvSpPr>
-        <p:spPr>
-          <a:xfrm>
-            <a:off x="640080" y="621792"/>
             <a:ext cx="10881360" cy="713232"/>
           </a:xfrm>
           <a:prstGeom prst="rect">
@@ -7651,14 +8374,14 @@
       </p:sp>
       <p:sp>
         <p:nvSpPr>
-          <p:cNvPr id="11" name="Text 9"/>
+          <p:cNvPr id="9" name="Text 7"/>
           <p:cNvSpPr/>
           <p:nvPr/>
         </p:nvSpPr>
         <p:spPr>
           <a:xfrm>
             <a:off x="868680" y="1508760"/>
-            <a:ext cx="6537960" cy="4160520"/>
+            <a:ext cx="6309360" cy="4160520"/>
           </a:xfrm>
           <a:prstGeom prst="rect">
             <a:avLst/>
@@ -7717,18 +8440,18 @@
       </p:sp>
       <p:sp>
         <p:nvSpPr>
-          <p:cNvPr id="12" name="Shape 10"/>
-          <p:cNvSpPr/>
-          <p:nvPr/>
-        </p:nvSpPr>
-        <p:spPr>
-          <a:xfrm>
-            <a:off x="7909560" y="1417320"/>
-            <a:ext cx="3154680" cy="1828800"/>
+          <p:cNvPr id="10" name="Shape 8"/>
+          <p:cNvSpPr/>
+          <p:nvPr/>
+        </p:nvSpPr>
+        <p:spPr>
+          <a:xfrm>
+            <a:off x="7635240" y="1325880"/>
+            <a:ext cx="3474720" cy="1325880"/>
           </a:xfrm>
           <a:prstGeom prst="roundRect">
             <a:avLst>
-              <a:gd name="adj" fmla="val 6000"/>
+              <a:gd name="adj" fmla="val 8276"/>
             </a:avLst>
           </a:prstGeom>
           <a:solidFill>
@@ -7744,14 +8467,14 @@
       </p:sp>
       <p:sp>
         <p:nvSpPr>
-          <p:cNvPr id="13" name="Text 11"/>
-          <p:cNvSpPr/>
-          <p:nvPr/>
-        </p:nvSpPr>
-        <p:spPr>
-          <a:xfrm>
-            <a:off x="8074152" y="1563624"/>
-            <a:ext cx="2825496" cy="256032"/>
+          <p:cNvPr id="11" name="Text 9"/>
+          <p:cNvSpPr/>
+          <p:nvPr/>
+        </p:nvSpPr>
+        <p:spPr>
+          <a:xfrm>
+            <a:off x="7799832" y="1472184"/>
+            <a:ext cx="3145536" cy="256032"/>
           </a:xfrm>
           <a:prstGeom prst="rect">
             <a:avLst/>
@@ -7775,7 +8498,7 @@
                 <a:ea typeface="Aptos" pitchFamily="34" charset="-122"/>
                 <a:cs typeface="Aptos" pitchFamily="34" charset="-120"/>
               </a:rPr>
-              <a:t>Key idea</a:t>
+              <a:t>Core concept</a:t>
             </a:r>
             <a:endParaRPr lang="en-US" sz="1300" dirty="0"/>
           </a:p>
@@ -7783,14 +8506,14 @@
       </p:sp>
       <p:sp>
         <p:nvSpPr>
-          <p:cNvPr id="14" name="Text 12"/>
-          <p:cNvSpPr/>
-          <p:nvPr/>
-        </p:nvSpPr>
-        <p:spPr>
-          <a:xfrm>
-            <a:off x="8074152" y="1920240"/>
-            <a:ext cx="2825496" cy="1188720"/>
+          <p:cNvPr id="12" name="Text 10"/>
+          <p:cNvSpPr/>
+          <p:nvPr/>
+        </p:nvSpPr>
+        <p:spPr>
+          <a:xfrm>
+            <a:off x="7799832" y="1828800"/>
+            <a:ext cx="3145536" cy="685800"/>
           </a:xfrm>
           <a:prstGeom prst="rect">
             <a:avLst/>
@@ -7824,18 +8547,159 @@
       </p:sp>
       <p:sp>
         <p:nvSpPr>
-          <p:cNvPr id="15" name="Shape 13"/>
-          <p:cNvSpPr/>
-          <p:nvPr/>
-        </p:nvSpPr>
-        <p:spPr>
-          <a:xfrm>
-            <a:off x="7909560" y="3520440"/>
-            <a:ext cx="3154680" cy="1737360"/>
+          <p:cNvPr id="13" name="Shape 11"/>
+          <p:cNvSpPr/>
+          <p:nvPr/>
+        </p:nvSpPr>
+        <p:spPr>
+          <a:xfrm>
+            <a:off x="7635240" y="2788920"/>
+            <a:ext cx="3474720" cy="1536192"/>
           </a:xfrm>
           <a:prstGeom prst="roundRect">
             <a:avLst>
-              <a:gd name="adj" fmla="val 6316"/>
+              <a:gd name="adj" fmla="val 7143"/>
+            </a:avLst>
+          </a:prstGeom>
+          <a:solidFill>
+            <a:srgbClr val="FFFFFF">
+              <a:alpha val="88000"/>
+            </a:srgbClr>
+          </a:solidFill>
+          <a:ln w="12700">
+            <a:solidFill>
+              <a:srgbClr val="D6E8F2"/>
+            </a:solidFill>
+            <a:prstDash val="solid"/>
+          </a:ln>
+        </p:spPr>
+      </p:sp>
+      <p:sp>
+        <p:nvSpPr>
+          <p:cNvPr id="14" name="Shape 12"/>
+          <p:cNvSpPr/>
+          <p:nvPr/>
+        </p:nvSpPr>
+        <p:spPr>
+          <a:xfrm>
+            <a:off x="8074152" y="3291840"/>
+            <a:ext cx="2596896" cy="749808"/>
+          </a:xfrm>
+          <a:prstGeom prst="rect">
+            <a:avLst/>
+          </a:prstGeom>
+          <a:solidFill>
+            <a:srgbClr val="EAF6F8"/>
+          </a:solidFill>
+          <a:ln w="12700">
+            <a:solidFill>
+              <a:srgbClr val="8ABBD8"/>
+            </a:solidFill>
+            <a:prstDash val="solid"/>
+          </a:ln>
+        </p:spPr>
+      </p:sp>
+      <p:sp>
+        <p:nvSpPr>
+          <p:cNvPr id="15" name="Shape 13"/>
+          <p:cNvSpPr/>
+          <p:nvPr/>
+        </p:nvSpPr>
+        <p:spPr>
+          <a:xfrm>
+            <a:off x="8202168" y="3721608"/>
+            <a:ext cx="2340864" cy="0"/>
+          </a:xfrm>
+          <a:prstGeom prst="line">
+            <a:avLst/>
+          </a:prstGeom>
+          <a:noFill/>
+          <a:ln w="19050">
+            <a:solidFill>
+              <a:srgbClr val="0068B7"/>
+            </a:solidFill>
+            <a:prstDash val="solid"/>
+          </a:ln>
+        </p:spPr>
+      </p:sp>
+      <p:sp>
+        <p:nvSpPr>
+          <p:cNvPr id="16" name="Shape 14"/>
+          <p:cNvSpPr/>
+          <p:nvPr/>
+        </p:nvSpPr>
+        <p:spPr>
+          <a:xfrm>
+            <a:off x="9198864" y="4206240"/>
+            <a:ext cx="347472" cy="347472"/>
+          </a:xfrm>
+          <a:prstGeom prst="ellipse">
+            <a:avLst/>
+          </a:prstGeom>
+          <a:solidFill>
+            <a:srgbClr val="2F8A28"/>
+          </a:solidFill>
+          <a:ln w="12700">
+            <a:solidFill>
+              <a:srgbClr val="2F8A28"/>
+            </a:solidFill>
+            <a:prstDash val="solid"/>
+          </a:ln>
+        </p:spPr>
+      </p:sp>
+      <p:sp>
+        <p:nvSpPr>
+          <p:cNvPr id="17" name="Text 15"/>
+          <p:cNvSpPr/>
+          <p:nvPr/>
+        </p:nvSpPr>
+        <p:spPr>
+          <a:xfrm>
+            <a:off x="7909560" y="3977640"/>
+            <a:ext cx="2926080" cy="182880"/>
+          </a:xfrm>
+          <a:prstGeom prst="rect">
+            <a:avLst/>
+          </a:prstGeom>
+          <a:noFill/>
+          <a:ln/>
+        </p:spPr>
+        <p:txBody>
+          <a:bodyPr wrap="square" lIns="0" tIns="0" rIns="0" bIns="0" rtlCol="0" anchor="ctr"/>
+          <a:lstStyle/>
+          <a:p>
+            <a:pPr algn="ctr" indent="0" marL="0">
+              <a:buNone/>
+            </a:pPr>
+            <a:r>
+              <a:rPr lang="en-US" sz="1000" dirty="0">
+                <a:solidFill>
+                  <a:srgbClr val="003A63"/>
+                </a:solidFill>
+                <a:latin typeface="Aptos" pitchFamily="34" charset="0"/>
+                <a:ea typeface="Aptos" pitchFamily="34" charset="-122"/>
+                <a:cs typeface="Aptos" pitchFamily="34" charset="-120"/>
+              </a:rPr>
+              <a:t>Concept to action</a:t>
+            </a:r>
+            <a:endParaRPr lang="en-US" sz="1000" dirty="0"/>
+          </a:p>
+        </p:txBody>
+      </p:sp>
+      <p:sp>
+        <p:nvSpPr>
+          <p:cNvPr id="18" name="Shape 16"/>
+          <p:cNvSpPr/>
+          <p:nvPr/>
+        </p:nvSpPr>
+        <p:spPr>
+          <a:xfrm>
+            <a:off x="7635240" y="4498848"/>
+            <a:ext cx="3474720" cy="1143000"/>
+          </a:xfrm>
+          <a:prstGeom prst="roundRect">
+            <a:avLst>
+              <a:gd name="adj" fmla="val 9600"/>
             </a:avLst>
           </a:prstGeom>
           <a:solidFill>
@@ -7851,14 +8715,14 @@
       </p:sp>
       <p:sp>
         <p:nvSpPr>
-          <p:cNvPr id="16" name="Text 14"/>
-          <p:cNvSpPr/>
-          <p:nvPr/>
-        </p:nvSpPr>
-        <p:spPr>
-          <a:xfrm>
-            <a:off x="8074152" y="3666744"/>
-            <a:ext cx="2825496" cy="256032"/>
+          <p:cNvPr id="19" name="Text 17"/>
+          <p:cNvSpPr/>
+          <p:nvPr/>
+        </p:nvSpPr>
+        <p:spPr>
+          <a:xfrm>
+            <a:off x="7799832" y="4645152"/>
+            <a:ext cx="3145536" cy="256032"/>
           </a:xfrm>
           <a:prstGeom prst="rect">
             <a:avLst/>
@@ -7882,7 +8746,7 @@
                 <a:ea typeface="Aptos" pitchFamily="34" charset="-122"/>
                 <a:cs typeface="Aptos" pitchFamily="34" charset="-120"/>
               </a:rPr>
-              <a:t>Use this for</a:t>
+              <a:t>Apply it</a:t>
             </a:r>
             <a:endParaRPr lang="en-US" sz="1300" dirty="0"/>
           </a:p>
@@ -7890,14 +8754,14 @@
       </p:sp>
       <p:sp>
         <p:nvSpPr>
-          <p:cNvPr id="17" name="Text 15"/>
-          <p:cNvSpPr/>
-          <p:nvPr/>
-        </p:nvSpPr>
-        <p:spPr>
-          <a:xfrm>
-            <a:off x="8074152" y="4023360"/>
-            <a:ext cx="2825496" cy="1097280"/>
+          <p:cNvPr id="20" name="Text 18"/>
+          <p:cNvSpPr/>
+          <p:nvPr/>
+        </p:nvSpPr>
+        <p:spPr>
+          <a:xfrm>
+            <a:off x="7799832" y="5001768"/>
+            <a:ext cx="3145536" cy="502920"/>
           </a:xfrm>
           <a:prstGeom prst="rect">
             <a:avLst/>
@@ -7923,7 +8787,7 @@
                 <a:ea typeface="Aptos" pitchFamily="34" charset="-122"/>
                 <a:cs typeface="Aptos" pitchFamily="34" charset="-120"/>
               </a:rPr>
-              <a:t>Connect the concept to public health decisions, safeguards, documentation, or implementation work.</a:t>
+              <a:t>Connect the concept to public health purpose, responsible use, required safeguards, documentation, and the next action a department should take.</a:t>
             </a:r>
             <a:endParaRPr lang="en-US" sz="1550" dirty="0"/>
           </a:p>
@@ -8097,8 +8961,8 @@
         </p:nvSpPr>
         <p:spPr>
           <a:xfrm>
-            <a:off x="9966960" y="6537960"/>
-            <a:ext cx="1645920" cy="201168"/>
+            <a:off x="9646920" y="6537960"/>
+            <a:ext cx="1965960" cy="201168"/>
           </a:xfrm>
           <a:prstGeom prst="rect">
             <a:avLst/>
@@ -8122,7 +8986,7 @@
                 <a:ea typeface="Aptos" pitchFamily="34" charset="-122"/>
                 <a:cs typeface="Aptos" pitchFamily="34" charset="-120"/>
               </a:rPr>
-              <a:t>Â© Paula Soper</a:t>
+              <a:t>Copyright Paula Soper</a:t>
             </a:r>
             <a:endParaRPr lang="en-US" sz="800" dirty="0"/>
           </a:p>
@@ -8217,7 +9081,7 @@
         <p:spPr>
           <a:xfrm>
             <a:off x="868680" y="1508760"/>
-            <a:ext cx="6537960" cy="4160520"/>
+            <a:ext cx="6309360" cy="4160520"/>
           </a:xfrm>
           <a:prstGeom prst="rect">
             <a:avLst/>
@@ -8254,12 +9118,12 @@
         </p:nvSpPr>
         <p:spPr>
           <a:xfrm>
-            <a:off x="7909560" y="1417320"/>
-            <a:ext cx="3154680" cy="1828800"/>
+            <a:off x="7635240" y="1325880"/>
+            <a:ext cx="3474720" cy="1325880"/>
           </a:xfrm>
           <a:prstGeom prst="roundRect">
             <a:avLst>
-              <a:gd name="adj" fmla="val 6000"/>
+              <a:gd name="adj" fmla="val 8276"/>
             </a:avLst>
           </a:prstGeom>
           <a:solidFill>
@@ -8281,8 +9145,8 @@
         </p:nvSpPr>
         <p:spPr>
           <a:xfrm>
-            <a:off x="8074152" y="1563624"/>
-            <a:ext cx="2825496" cy="256032"/>
+            <a:off x="7799832" y="1472184"/>
+            <a:ext cx="3145536" cy="256032"/>
           </a:xfrm>
           <a:prstGeom prst="rect">
             <a:avLst/>
@@ -8306,7 +9170,7 @@
                 <a:ea typeface="Aptos" pitchFamily="34" charset="-122"/>
                 <a:cs typeface="Aptos" pitchFamily="34" charset="-120"/>
               </a:rPr>
-              <a:t>Key idea</a:t>
+              <a:t>Core concept</a:t>
             </a:r>
             <a:endParaRPr lang="en-US" sz="1300" dirty="0"/>
           </a:p>
@@ -8320,8 +9184,8 @@
         </p:nvSpPr>
         <p:spPr>
           <a:xfrm>
-            <a:off x="8074152" y="1920240"/>
-            <a:ext cx="2825496" cy="1188720"/>
+            <a:off x="7799832" y="1828800"/>
+            <a:ext cx="3145536" cy="685800"/>
           </a:xfrm>
           <a:prstGeom prst="rect">
             <a:avLst/>
@@ -8361,12 +9225,153 @@
         </p:nvSpPr>
         <p:spPr>
           <a:xfrm>
-            <a:off x="7909560" y="3520440"/>
-            <a:ext cx="3154680" cy="1737360"/>
+            <a:off x="7635240" y="2788920"/>
+            <a:ext cx="3474720" cy="1536192"/>
           </a:xfrm>
           <a:prstGeom prst="roundRect">
             <a:avLst>
-              <a:gd name="adj" fmla="val 6316"/>
+              <a:gd name="adj" fmla="val 7143"/>
+            </a:avLst>
+          </a:prstGeom>
+          <a:solidFill>
+            <a:srgbClr val="FFFFFF">
+              <a:alpha val="88000"/>
+            </a:srgbClr>
+          </a:solidFill>
+          <a:ln w="12700">
+            <a:solidFill>
+              <a:srgbClr val="D6E8F2"/>
+            </a:solidFill>
+            <a:prstDash val="solid"/>
+          </a:ln>
+        </p:spPr>
+      </p:sp>
+      <p:sp>
+        <p:nvSpPr>
+          <p:cNvPr id="14" name="Shape 12"/>
+          <p:cNvSpPr/>
+          <p:nvPr/>
+        </p:nvSpPr>
+        <p:spPr>
+          <a:xfrm>
+            <a:off x="8074152" y="3291840"/>
+            <a:ext cx="2596896" cy="749808"/>
+          </a:xfrm>
+          <a:prstGeom prst="rect">
+            <a:avLst/>
+          </a:prstGeom>
+          <a:solidFill>
+            <a:srgbClr val="EAF6F8"/>
+          </a:solidFill>
+          <a:ln w="12700">
+            <a:solidFill>
+              <a:srgbClr val="8ABBD8"/>
+            </a:solidFill>
+            <a:prstDash val="solid"/>
+          </a:ln>
+        </p:spPr>
+      </p:sp>
+      <p:sp>
+        <p:nvSpPr>
+          <p:cNvPr id="15" name="Shape 13"/>
+          <p:cNvSpPr/>
+          <p:nvPr/>
+        </p:nvSpPr>
+        <p:spPr>
+          <a:xfrm>
+            <a:off x="8202168" y="3721608"/>
+            <a:ext cx="2340864" cy="0"/>
+          </a:xfrm>
+          <a:prstGeom prst="line">
+            <a:avLst/>
+          </a:prstGeom>
+          <a:noFill/>
+          <a:ln w="19050">
+            <a:solidFill>
+              <a:srgbClr val="0068B7"/>
+            </a:solidFill>
+            <a:prstDash val="solid"/>
+          </a:ln>
+        </p:spPr>
+      </p:sp>
+      <p:sp>
+        <p:nvSpPr>
+          <p:cNvPr id="16" name="Shape 14"/>
+          <p:cNvSpPr/>
+          <p:nvPr/>
+        </p:nvSpPr>
+        <p:spPr>
+          <a:xfrm>
+            <a:off x="9198864" y="4206240"/>
+            <a:ext cx="347472" cy="347472"/>
+          </a:xfrm>
+          <a:prstGeom prst="ellipse">
+            <a:avLst/>
+          </a:prstGeom>
+          <a:solidFill>
+            <a:srgbClr val="2F8A28"/>
+          </a:solidFill>
+          <a:ln w="12700">
+            <a:solidFill>
+              <a:srgbClr val="2F8A28"/>
+            </a:solidFill>
+            <a:prstDash val="solid"/>
+          </a:ln>
+        </p:spPr>
+      </p:sp>
+      <p:sp>
+        <p:nvSpPr>
+          <p:cNvPr id="17" name="Text 15"/>
+          <p:cNvSpPr/>
+          <p:nvPr/>
+        </p:nvSpPr>
+        <p:spPr>
+          <a:xfrm>
+            <a:off x="7909560" y="3977640"/>
+            <a:ext cx="2926080" cy="182880"/>
+          </a:xfrm>
+          <a:prstGeom prst="rect">
+            <a:avLst/>
+          </a:prstGeom>
+          <a:noFill/>
+          <a:ln/>
+        </p:spPr>
+        <p:txBody>
+          <a:bodyPr wrap="square" lIns="0" tIns="0" rIns="0" bIns="0" rtlCol="0" anchor="ctr"/>
+          <a:lstStyle/>
+          <a:p>
+            <a:pPr algn="ctr" indent="0" marL="0">
+              <a:buNone/>
+            </a:pPr>
+            <a:r>
+              <a:rPr lang="en-US" sz="1000" dirty="0">
+                <a:solidFill>
+                  <a:srgbClr val="003A63"/>
+                </a:solidFill>
+                <a:latin typeface="Aptos" pitchFamily="34" charset="0"/>
+                <a:ea typeface="Aptos" pitchFamily="34" charset="-122"/>
+                <a:cs typeface="Aptos" pitchFamily="34" charset="-120"/>
+              </a:rPr>
+              <a:t>Concept to action</a:t>
+            </a:r>
+            <a:endParaRPr lang="en-US" sz="1000" dirty="0"/>
+          </a:p>
+        </p:txBody>
+      </p:sp>
+      <p:sp>
+        <p:nvSpPr>
+          <p:cNvPr id="18" name="Shape 16"/>
+          <p:cNvSpPr/>
+          <p:nvPr/>
+        </p:nvSpPr>
+        <p:spPr>
+          <a:xfrm>
+            <a:off x="7635240" y="4498848"/>
+            <a:ext cx="3474720" cy="1143000"/>
+          </a:xfrm>
+          <a:prstGeom prst="roundRect">
+            <a:avLst>
+              <a:gd name="adj" fmla="val 9600"/>
             </a:avLst>
           </a:prstGeom>
           <a:solidFill>
@@ -8382,14 +9387,14 @@
       </p:sp>
       <p:sp>
         <p:nvSpPr>
-          <p:cNvPr id="14" name="Text 12"/>
-          <p:cNvSpPr/>
-          <p:nvPr/>
-        </p:nvSpPr>
-        <p:spPr>
-          <a:xfrm>
-            <a:off x="8074152" y="3666744"/>
-            <a:ext cx="2825496" cy="256032"/>
+          <p:cNvPr id="19" name="Text 17"/>
+          <p:cNvSpPr/>
+          <p:nvPr/>
+        </p:nvSpPr>
+        <p:spPr>
+          <a:xfrm>
+            <a:off x="7799832" y="4645152"/>
+            <a:ext cx="3145536" cy="256032"/>
           </a:xfrm>
           <a:prstGeom prst="rect">
             <a:avLst/>
@@ -8413,7 +9418,7 @@
                 <a:ea typeface="Aptos" pitchFamily="34" charset="-122"/>
                 <a:cs typeface="Aptos" pitchFamily="34" charset="-120"/>
               </a:rPr>
-              <a:t>Use this for</a:t>
+              <a:t>Apply it</a:t>
             </a:r>
             <a:endParaRPr lang="en-US" sz="1300" dirty="0"/>
           </a:p>
@@ -8421,14 +9426,14 @@
       </p:sp>
       <p:sp>
         <p:nvSpPr>
-          <p:cNvPr id="15" name="Text 13"/>
-          <p:cNvSpPr/>
-          <p:nvPr/>
-        </p:nvSpPr>
-        <p:spPr>
-          <a:xfrm>
-            <a:off x="8074152" y="4023360"/>
-            <a:ext cx="2825496" cy="1097280"/>
+          <p:cNvPr id="20" name="Text 18"/>
+          <p:cNvSpPr/>
+          <p:nvPr/>
+        </p:nvSpPr>
+        <p:spPr>
+          <a:xfrm>
+            <a:off x="7799832" y="5001768"/>
+            <a:ext cx="3145536" cy="502920"/>
           </a:xfrm>
           <a:prstGeom prst="rect">
             <a:avLst/>
@@ -8454,7 +9459,7 @@
                 <a:ea typeface="Aptos" pitchFamily="34" charset="-122"/>
                 <a:cs typeface="Aptos" pitchFamily="34" charset="-120"/>
               </a:rPr>
-              <a:t>Connect the concept to public health decisions, safeguards, documentation, or implementation work.</a:t>
+              <a:t>Connect the concept to public health purpose, responsible use, required safeguards, documentation, and the next action a department should take.</a:t>
             </a:r>
             <a:endParaRPr lang="en-US" sz="1550" dirty="0"/>
           </a:p>
@@ -8628,8 +9633,8 @@
         </p:nvSpPr>
         <p:spPr>
           <a:xfrm>
-            <a:off x="9966960" y="6537960"/>
-            <a:ext cx="1645920" cy="201168"/>
+            <a:off x="9646920" y="6537960"/>
+            <a:ext cx="1965960" cy="201168"/>
           </a:xfrm>
           <a:prstGeom prst="rect">
             <a:avLst/>
@@ -8653,7 +9658,7 @@
                 <a:ea typeface="Aptos" pitchFamily="34" charset="-122"/>
                 <a:cs typeface="Aptos" pitchFamily="34" charset="-120"/>
               </a:rPr>
-              <a:t>Â© Paula Soper</a:t>
+              <a:t>Copyright Paula Soper</a:t>
             </a:r>
             <a:endParaRPr lang="en-US" sz="800" dirty="0"/>
           </a:p>
@@ -8700,77 +9705,13 @@
       </p:sp>
       <p:sp>
         <p:nvSpPr>
-          <p:cNvPr id="8" name="Shape 6"/>
+          <p:cNvPr id="8" name="Text 6"/>
           <p:cNvSpPr/>
           <p:nvPr/>
         </p:nvSpPr>
         <p:spPr>
           <a:xfrm>
             <a:off x="640080" y="658368"/>
-            <a:ext cx="420624" cy="420624"/>
-          </a:xfrm>
-          <a:prstGeom prst="ellipse">
-            <a:avLst/>
-          </a:prstGeom>
-          <a:solidFill>
-            <a:srgbClr val="0068B7"/>
-          </a:solidFill>
-          <a:ln w="12700">
-            <a:solidFill>
-              <a:srgbClr val="0068B7"/>
-            </a:solidFill>
-            <a:prstDash val="solid"/>
-          </a:ln>
-        </p:spPr>
-      </p:sp>
-      <p:sp>
-        <p:nvSpPr>
-          <p:cNvPr id="9" name="Text 7"/>
-          <p:cNvSpPr/>
-          <p:nvPr/>
-        </p:nvSpPr>
-        <p:spPr>
-          <a:xfrm>
-            <a:off x="640080" y="731520"/>
-            <a:ext cx="420624" cy="164592"/>
-          </a:xfrm>
-          <a:prstGeom prst="rect">
-            <a:avLst/>
-          </a:prstGeom>
-          <a:noFill/>
-          <a:ln/>
-        </p:spPr>
-        <p:txBody>
-          <a:bodyPr wrap="square" lIns="0" tIns="0" rIns="0" bIns="0" rtlCol="0" anchor="ctr"/>
-          <a:lstStyle/>
-          <a:p>
-            <a:pPr algn="ctr" indent="0" marL="0">
-              <a:buNone/>
-            </a:pPr>
-            <a:r>
-              <a:rPr lang="en-US" sz="1100" b="1" dirty="0">
-                <a:solidFill>
-                  <a:srgbClr val="FFFFFF"/>
-                </a:solidFill>
-                <a:latin typeface="Aptos" pitchFamily="34" charset="0"/>
-                <a:ea typeface="Aptos" pitchFamily="34" charset="-122"/>
-                <a:cs typeface="Aptos" pitchFamily="34" charset="-120"/>
-              </a:rPr>
-              <a:t>12</a:t>
-            </a:r>
-            <a:endParaRPr lang="en-US" sz="1100" dirty="0"/>
-          </a:p>
-        </p:txBody>
-      </p:sp>
-      <p:sp>
-        <p:nvSpPr>
-          <p:cNvPr id="10" name="Text 8"/>
-          <p:cNvSpPr/>
-          <p:nvPr/>
-        </p:nvSpPr>
-        <p:spPr>
-          <a:xfrm>
-            <a:off x="640080" y="621792"/>
             <a:ext cx="10881360" cy="713232"/>
           </a:xfrm>
           <a:prstGeom prst="rect">
@@ -8805,14 +9746,14 @@
       </p:sp>
       <p:sp>
         <p:nvSpPr>
-          <p:cNvPr id="11" name="Text 9"/>
+          <p:cNvPr id="9" name="Text 7"/>
           <p:cNvSpPr/>
           <p:nvPr/>
         </p:nvSpPr>
         <p:spPr>
           <a:xfrm>
             <a:off x="868680" y="1508760"/>
-            <a:ext cx="6537960" cy="4160520"/>
+            <a:ext cx="6309360" cy="4160520"/>
           </a:xfrm>
           <a:prstGeom prst="rect">
             <a:avLst/>
@@ -8871,18 +9812,18 @@
       </p:sp>
       <p:sp>
         <p:nvSpPr>
-          <p:cNvPr id="12" name="Shape 10"/>
-          <p:cNvSpPr/>
-          <p:nvPr/>
-        </p:nvSpPr>
-        <p:spPr>
-          <a:xfrm>
-            <a:off x="7909560" y="1417320"/>
-            <a:ext cx="3154680" cy="1828800"/>
+          <p:cNvPr id="10" name="Shape 8"/>
+          <p:cNvSpPr/>
+          <p:nvPr/>
+        </p:nvSpPr>
+        <p:spPr>
+          <a:xfrm>
+            <a:off x="7635240" y="1325880"/>
+            <a:ext cx="3474720" cy="1325880"/>
           </a:xfrm>
           <a:prstGeom prst="roundRect">
             <a:avLst>
-              <a:gd name="adj" fmla="val 6000"/>
+              <a:gd name="adj" fmla="val 8276"/>
             </a:avLst>
           </a:prstGeom>
           <a:solidFill>
@@ -8898,14 +9839,14 @@
       </p:sp>
       <p:sp>
         <p:nvSpPr>
-          <p:cNvPr id="13" name="Text 11"/>
-          <p:cNvSpPr/>
-          <p:nvPr/>
-        </p:nvSpPr>
-        <p:spPr>
-          <a:xfrm>
-            <a:off x="8074152" y="1563624"/>
-            <a:ext cx="2825496" cy="256032"/>
+          <p:cNvPr id="11" name="Text 9"/>
+          <p:cNvSpPr/>
+          <p:nvPr/>
+        </p:nvSpPr>
+        <p:spPr>
+          <a:xfrm>
+            <a:off x="7799832" y="1472184"/>
+            <a:ext cx="3145536" cy="256032"/>
           </a:xfrm>
           <a:prstGeom prst="rect">
             <a:avLst/>
@@ -8929,7 +9870,7 @@
                 <a:ea typeface="Aptos" pitchFamily="34" charset="-122"/>
                 <a:cs typeface="Aptos" pitchFamily="34" charset="-120"/>
               </a:rPr>
-              <a:t>Key idea</a:t>
+              <a:t>Practice focus</a:t>
             </a:r>
             <a:endParaRPr lang="en-US" sz="1300" dirty="0"/>
           </a:p>
@@ -8937,14 +9878,14 @@
       </p:sp>
       <p:sp>
         <p:nvSpPr>
-          <p:cNvPr id="14" name="Text 12"/>
-          <p:cNvSpPr/>
-          <p:nvPr/>
-        </p:nvSpPr>
-        <p:spPr>
-          <a:xfrm>
-            <a:off x="8074152" y="1920240"/>
-            <a:ext cx="2825496" cy="1188720"/>
+          <p:cNvPr id="12" name="Text 10"/>
+          <p:cNvSpPr/>
+          <p:nvPr/>
+        </p:nvSpPr>
+        <p:spPr>
+          <a:xfrm>
+            <a:off x="7799832" y="1828800"/>
+            <a:ext cx="3145536" cy="685800"/>
           </a:xfrm>
           <a:prstGeom prst="rect">
             <a:avLst/>
@@ -8978,18 +9919,159 @@
       </p:sp>
       <p:sp>
         <p:nvSpPr>
-          <p:cNvPr id="15" name="Shape 13"/>
-          <p:cNvSpPr/>
-          <p:nvPr/>
-        </p:nvSpPr>
-        <p:spPr>
-          <a:xfrm>
-            <a:off x="7909560" y="3520440"/>
-            <a:ext cx="3154680" cy="1737360"/>
+          <p:cNvPr id="13" name="Shape 11"/>
+          <p:cNvSpPr/>
+          <p:nvPr/>
+        </p:nvSpPr>
+        <p:spPr>
+          <a:xfrm>
+            <a:off x="7635240" y="2788920"/>
+            <a:ext cx="3474720" cy="1536192"/>
           </a:xfrm>
           <a:prstGeom prst="roundRect">
             <a:avLst>
-              <a:gd name="adj" fmla="val 6316"/>
+              <a:gd name="adj" fmla="val 7143"/>
+            </a:avLst>
+          </a:prstGeom>
+          <a:solidFill>
+            <a:srgbClr val="FFFFFF">
+              <a:alpha val="88000"/>
+            </a:srgbClr>
+          </a:solidFill>
+          <a:ln w="12700">
+            <a:solidFill>
+              <a:srgbClr val="D6E8F2"/>
+            </a:solidFill>
+            <a:prstDash val="solid"/>
+          </a:ln>
+        </p:spPr>
+      </p:sp>
+      <p:sp>
+        <p:nvSpPr>
+          <p:cNvPr id="14" name="Shape 12"/>
+          <p:cNvSpPr/>
+          <p:nvPr/>
+        </p:nvSpPr>
+        <p:spPr>
+          <a:xfrm>
+            <a:off x="8074152" y="3291840"/>
+            <a:ext cx="2596896" cy="749808"/>
+          </a:xfrm>
+          <a:prstGeom prst="rect">
+            <a:avLst/>
+          </a:prstGeom>
+          <a:solidFill>
+            <a:srgbClr val="EAF6F8"/>
+          </a:solidFill>
+          <a:ln w="12700">
+            <a:solidFill>
+              <a:srgbClr val="8ABBD8"/>
+            </a:solidFill>
+            <a:prstDash val="solid"/>
+          </a:ln>
+        </p:spPr>
+      </p:sp>
+      <p:sp>
+        <p:nvSpPr>
+          <p:cNvPr id="15" name="Shape 13"/>
+          <p:cNvSpPr/>
+          <p:nvPr/>
+        </p:nvSpPr>
+        <p:spPr>
+          <a:xfrm>
+            <a:off x="8202168" y="3721608"/>
+            <a:ext cx="2340864" cy="0"/>
+          </a:xfrm>
+          <a:prstGeom prst="line">
+            <a:avLst/>
+          </a:prstGeom>
+          <a:noFill/>
+          <a:ln w="19050">
+            <a:solidFill>
+              <a:srgbClr val="0068B7"/>
+            </a:solidFill>
+            <a:prstDash val="solid"/>
+          </a:ln>
+        </p:spPr>
+      </p:sp>
+      <p:sp>
+        <p:nvSpPr>
+          <p:cNvPr id="16" name="Shape 14"/>
+          <p:cNvSpPr/>
+          <p:nvPr/>
+        </p:nvSpPr>
+        <p:spPr>
+          <a:xfrm>
+            <a:off x="9198864" y="4206240"/>
+            <a:ext cx="347472" cy="347472"/>
+          </a:xfrm>
+          <a:prstGeom prst="ellipse">
+            <a:avLst/>
+          </a:prstGeom>
+          <a:solidFill>
+            <a:srgbClr val="2F8A28"/>
+          </a:solidFill>
+          <a:ln w="12700">
+            <a:solidFill>
+              <a:srgbClr val="2F8A28"/>
+            </a:solidFill>
+            <a:prstDash val="solid"/>
+          </a:ln>
+        </p:spPr>
+      </p:sp>
+      <p:sp>
+        <p:nvSpPr>
+          <p:cNvPr id="17" name="Text 15"/>
+          <p:cNvSpPr/>
+          <p:nvPr/>
+        </p:nvSpPr>
+        <p:spPr>
+          <a:xfrm>
+            <a:off x="7909560" y="3977640"/>
+            <a:ext cx="2926080" cy="182880"/>
+          </a:xfrm>
+          <a:prstGeom prst="rect">
+            <a:avLst/>
+          </a:prstGeom>
+          <a:noFill/>
+          <a:ln/>
+        </p:spPr>
+        <p:txBody>
+          <a:bodyPr wrap="square" lIns="0" tIns="0" rIns="0" bIns="0" rtlCol="0" anchor="ctr"/>
+          <a:lstStyle/>
+          <a:p>
+            <a:pPr algn="ctr" indent="0" marL="0">
+              <a:buNone/>
+            </a:pPr>
+            <a:r>
+              <a:rPr lang="en-US" sz="1000" dirty="0">
+                <a:solidFill>
+                  <a:srgbClr val="003A63"/>
+                </a:solidFill>
+                <a:latin typeface="Aptos" pitchFamily="34" charset="0"/>
+                <a:ea typeface="Aptos" pitchFamily="34" charset="-122"/>
+                <a:cs typeface="Aptos" pitchFamily="34" charset="-120"/>
+              </a:rPr>
+              <a:t>Concept to action</a:t>
+            </a:r>
+            <a:endParaRPr lang="en-US" sz="1000" dirty="0"/>
+          </a:p>
+        </p:txBody>
+      </p:sp>
+      <p:sp>
+        <p:nvSpPr>
+          <p:cNvPr id="18" name="Shape 16"/>
+          <p:cNvSpPr/>
+          <p:nvPr/>
+        </p:nvSpPr>
+        <p:spPr>
+          <a:xfrm>
+            <a:off x="7635240" y="4498848"/>
+            <a:ext cx="3474720" cy="1143000"/>
+          </a:xfrm>
+          <a:prstGeom prst="roundRect">
+            <a:avLst>
+              <a:gd name="adj" fmla="val 9600"/>
             </a:avLst>
           </a:prstGeom>
           <a:solidFill>
@@ -9005,14 +10087,14 @@
       </p:sp>
       <p:sp>
         <p:nvSpPr>
-          <p:cNvPr id="16" name="Text 14"/>
-          <p:cNvSpPr/>
-          <p:nvPr/>
-        </p:nvSpPr>
-        <p:spPr>
-          <a:xfrm>
-            <a:off x="8074152" y="3666744"/>
-            <a:ext cx="2825496" cy="256032"/>
+          <p:cNvPr id="19" name="Text 17"/>
+          <p:cNvSpPr/>
+          <p:nvPr/>
+        </p:nvSpPr>
+        <p:spPr>
+          <a:xfrm>
+            <a:off x="7799832" y="4645152"/>
+            <a:ext cx="3145536" cy="256032"/>
           </a:xfrm>
           <a:prstGeom prst="rect">
             <a:avLst/>
@@ -9036,7 +10118,7 @@
                 <a:ea typeface="Aptos" pitchFamily="34" charset="-122"/>
                 <a:cs typeface="Aptos" pitchFamily="34" charset="-120"/>
               </a:rPr>
-              <a:t>Use this for</a:t>
+              <a:t>What to produce</a:t>
             </a:r>
             <a:endParaRPr lang="en-US" sz="1300" dirty="0"/>
           </a:p>
@@ -9044,14 +10126,14 @@
       </p:sp>
       <p:sp>
         <p:nvSpPr>
-          <p:cNvPr id="17" name="Text 15"/>
-          <p:cNvSpPr/>
-          <p:nvPr/>
-        </p:nvSpPr>
-        <p:spPr>
-          <a:xfrm>
-            <a:off x="8074152" y="4023360"/>
-            <a:ext cx="2825496" cy="1097280"/>
+          <p:cNvPr id="20" name="Text 18"/>
+          <p:cNvSpPr/>
+          <p:nvPr/>
+        </p:nvSpPr>
+        <p:spPr>
+          <a:xfrm>
+            <a:off x="7799832" y="5001768"/>
+            <a:ext cx="3145536" cy="502920"/>
           </a:xfrm>
           <a:prstGeom prst="rect">
             <a:avLst/>
@@ -9077,7 +10159,7 @@
                 <a:ea typeface="Aptos" pitchFamily="34" charset="-122"/>
                 <a:cs typeface="Aptos" pitchFamily="34" charset="-120"/>
               </a:rPr>
-              <a:t>Connect the concept to public health decisions, safeguards, documentation, or implementation work.</a:t>
+              <a:t>Use the assignment to test whether you can explain the concept, apply it to a realistic public health situation, and identify what would need review before the work moves forward.</a:t>
             </a:r>
             <a:endParaRPr lang="en-US" sz="1550" dirty="0"/>
           </a:p>
@@ -9251,8 +10333,8 @@
         </p:nvSpPr>
         <p:spPr>
           <a:xfrm>
-            <a:off x="9966960" y="6537960"/>
-            <a:ext cx="1645920" cy="201168"/>
+            <a:off x="9646920" y="6537960"/>
+            <a:ext cx="1965960" cy="201168"/>
           </a:xfrm>
           <a:prstGeom prst="rect">
             <a:avLst/>
@@ -9276,7 +10358,7 @@
                 <a:ea typeface="Aptos" pitchFamily="34" charset="-122"/>
                 <a:cs typeface="Aptos" pitchFamily="34" charset="-120"/>
               </a:rPr>
-              <a:t>Â© Paula Soper</a:t>
+              <a:t>Copyright Paula Soper</a:t>
             </a:r>
             <a:endParaRPr lang="en-US" sz="800" dirty="0"/>
           </a:p>
@@ -9639,46 +10721,7 @@
       </p:sp>
       <p:sp>
         <p:nvSpPr>
-          <p:cNvPr id="15" name="Text 13"/>
-          <p:cNvSpPr/>
-          <p:nvPr/>
-        </p:nvSpPr>
-        <p:spPr>
-          <a:xfrm>
-            <a:off x="8695944" y="3941064"/>
-            <a:ext cx="201168" cy="256032"/>
-          </a:xfrm>
-          <a:prstGeom prst="rect">
-            <a:avLst/>
-          </a:prstGeom>
-          <a:noFill/>
-          <a:ln/>
-        </p:spPr>
-        <p:txBody>
-          <a:bodyPr wrap="square" lIns="0" tIns="0" rIns="0" bIns="0" rtlCol="0" anchor="ctr"/>
-          <a:lstStyle/>
-          <a:p>
-            <a:pPr algn="ctr" indent="0" marL="0">
-              <a:buNone/>
-            </a:pPr>
-            <a:r>
-              <a:rPr lang="en-US" sz="1800" b="1" dirty="0">
-                <a:solidFill>
-                  <a:srgbClr val="0068B7"/>
-                </a:solidFill>
-                <a:latin typeface="Aptos" pitchFamily="34" charset="0"/>
-                <a:ea typeface="Aptos" pitchFamily="34" charset="-122"/>
-                <a:cs typeface="Aptos" pitchFamily="34" charset="-120"/>
-              </a:rPr>
-              <a:t>â†’</a:t>
-            </a:r>
-            <a:endParaRPr lang="en-US" sz="1800" dirty="0"/>
-          </a:p>
-        </p:txBody>
-      </p:sp>
-      <p:sp>
-        <p:nvSpPr>
-          <p:cNvPr id="16" name="Shape 14"/>
+          <p:cNvPr id="15" name="Shape 13"/>
           <p:cNvSpPr/>
           <p:nvPr/>
         </p:nvSpPr>
@@ -9705,7 +10748,7 @@
       </p:sp>
       <p:sp>
         <p:nvSpPr>
-          <p:cNvPr id="17" name="Text 15"/>
+          <p:cNvPr id="16" name="Text 14"/>
           <p:cNvSpPr/>
           <p:nvPr/>
         </p:nvSpPr>
@@ -9746,46 +10789,7 @@
       </p:sp>
       <p:sp>
         <p:nvSpPr>
-          <p:cNvPr id="18" name="Text 16"/>
-          <p:cNvSpPr/>
-          <p:nvPr/>
-        </p:nvSpPr>
-        <p:spPr>
-          <a:xfrm>
-            <a:off x="9985248" y="3941064"/>
-            <a:ext cx="201168" cy="256032"/>
-          </a:xfrm>
-          <a:prstGeom prst="rect">
-            <a:avLst/>
-          </a:prstGeom>
-          <a:noFill/>
-          <a:ln/>
-        </p:spPr>
-        <p:txBody>
-          <a:bodyPr wrap="square" lIns="0" tIns="0" rIns="0" bIns="0" rtlCol="0" anchor="ctr"/>
-          <a:lstStyle/>
-          <a:p>
-            <a:pPr algn="ctr" indent="0" marL="0">
-              <a:buNone/>
-            </a:pPr>
-            <a:r>
-              <a:rPr lang="en-US" sz="1800" b="1" dirty="0">
-                <a:solidFill>
-                  <a:srgbClr val="0068B7"/>
-                </a:solidFill>
-                <a:latin typeface="Aptos" pitchFamily="34" charset="0"/>
-                <a:ea typeface="Aptos" pitchFamily="34" charset="-122"/>
-                <a:cs typeface="Aptos" pitchFamily="34" charset="-120"/>
-              </a:rPr>
-              <a:t>â†’</a:t>
-            </a:r>
-            <a:endParaRPr lang="en-US" sz="1800" dirty="0"/>
-          </a:p>
-        </p:txBody>
-      </p:sp>
-      <p:sp>
-        <p:nvSpPr>
-          <p:cNvPr id="19" name="Shape 17"/>
+          <p:cNvPr id="17" name="Shape 15"/>
           <p:cNvSpPr/>
           <p:nvPr/>
         </p:nvSpPr>
@@ -9812,7 +10816,7 @@
       </p:sp>
       <p:sp>
         <p:nvSpPr>
-          <p:cNvPr id="20" name="Text 18"/>
+          <p:cNvPr id="18" name="Text 16"/>
           <p:cNvSpPr/>
           <p:nvPr/>
         </p:nvSpPr>
@@ -10019,8 +11023,8 @@
         </p:nvSpPr>
         <p:spPr>
           <a:xfrm>
-            <a:off x="9966960" y="6537960"/>
-            <a:ext cx="1645920" cy="201168"/>
+            <a:off x="9646920" y="6537960"/>
+            <a:ext cx="1965960" cy="201168"/>
           </a:xfrm>
           <a:prstGeom prst="rect">
             <a:avLst/>
@@ -10044,7 +11048,7 @@
                 <a:ea typeface="Aptos" pitchFamily="34" charset="-122"/>
                 <a:cs typeface="Aptos" pitchFamily="34" charset="-120"/>
               </a:rPr>
-              <a:t>Â© Paula Soper</a:t>
+              <a:t>Copyright Paula Soper</a:t>
             </a:r>
             <a:endParaRPr lang="en-US" sz="800" dirty="0"/>
           </a:p>
@@ -10091,77 +11095,13 @@
       </p:sp>
       <p:sp>
         <p:nvSpPr>
-          <p:cNvPr id="8" name="Shape 6"/>
+          <p:cNvPr id="8" name="Text 6"/>
           <p:cNvSpPr/>
           <p:nvPr/>
         </p:nvSpPr>
         <p:spPr>
           <a:xfrm>
             <a:off x="640080" y="658368"/>
-            <a:ext cx="420624" cy="420624"/>
-          </a:xfrm>
-          <a:prstGeom prst="ellipse">
-            <a:avLst/>
-          </a:prstGeom>
-          <a:solidFill>
-            <a:srgbClr val="0068B7"/>
-          </a:solidFill>
-          <a:ln w="12700">
-            <a:solidFill>
-              <a:srgbClr val="0068B7"/>
-            </a:solidFill>
-            <a:prstDash val="solid"/>
-          </a:ln>
-        </p:spPr>
-      </p:sp>
-      <p:sp>
-        <p:nvSpPr>
-          <p:cNvPr id="9" name="Text 7"/>
-          <p:cNvSpPr/>
-          <p:nvPr/>
-        </p:nvSpPr>
-        <p:spPr>
-          <a:xfrm>
-            <a:off x="640080" y="731520"/>
-            <a:ext cx="420624" cy="164592"/>
-          </a:xfrm>
-          <a:prstGeom prst="rect">
-            <a:avLst/>
-          </a:prstGeom>
-          <a:noFill/>
-          <a:ln/>
-        </p:spPr>
-        <p:txBody>
-          <a:bodyPr wrap="square" lIns="0" tIns="0" rIns="0" bIns="0" rtlCol="0" anchor="ctr"/>
-          <a:lstStyle/>
-          <a:p>
-            <a:pPr algn="ctr" indent="0" marL="0">
-              <a:buNone/>
-            </a:pPr>
-            <a:r>
-              <a:rPr lang="en-US" sz="1100" b="1" dirty="0">
-                <a:solidFill>
-                  <a:srgbClr val="FFFFFF"/>
-                </a:solidFill>
-                <a:latin typeface="Aptos" pitchFamily="34" charset="0"/>
-                <a:ea typeface="Aptos" pitchFamily="34" charset="-122"/>
-                <a:cs typeface="Aptos" pitchFamily="34" charset="-120"/>
-              </a:rPr>
-              <a:t>13</a:t>
-            </a:r>
-            <a:endParaRPr lang="en-US" sz="1100" dirty="0"/>
-          </a:p>
-        </p:txBody>
-      </p:sp>
-      <p:sp>
-        <p:nvSpPr>
-          <p:cNvPr id="10" name="Text 8"/>
-          <p:cNvSpPr/>
-          <p:nvPr/>
-        </p:nvSpPr>
-        <p:spPr>
-          <a:xfrm>
-            <a:off x="640080" y="621792"/>
             <a:ext cx="10881360" cy="713232"/>
           </a:xfrm>
           <a:prstGeom prst="rect">
@@ -10196,14 +11136,14 @@
       </p:sp>
       <p:sp>
         <p:nvSpPr>
-          <p:cNvPr id="11" name="Text 9"/>
+          <p:cNvPr id="9" name="Text 7"/>
           <p:cNvSpPr/>
           <p:nvPr/>
         </p:nvSpPr>
         <p:spPr>
           <a:xfrm>
             <a:off x="868680" y="1508760"/>
-            <a:ext cx="6537960" cy="4160520"/>
+            <a:ext cx="6309360" cy="4160520"/>
           </a:xfrm>
           <a:prstGeom prst="rect">
             <a:avLst/>
@@ -10262,18 +11202,18 @@
       </p:sp>
       <p:sp>
         <p:nvSpPr>
-          <p:cNvPr id="12" name="Shape 10"/>
-          <p:cNvSpPr/>
-          <p:nvPr/>
-        </p:nvSpPr>
-        <p:spPr>
-          <a:xfrm>
-            <a:off x="7909560" y="1417320"/>
-            <a:ext cx="3154680" cy="1828800"/>
+          <p:cNvPr id="10" name="Shape 8"/>
+          <p:cNvSpPr/>
+          <p:nvPr/>
+        </p:nvSpPr>
+        <p:spPr>
+          <a:xfrm>
+            <a:off x="7635240" y="1325880"/>
+            <a:ext cx="3474720" cy="1325880"/>
           </a:xfrm>
           <a:prstGeom prst="roundRect">
             <a:avLst>
-              <a:gd name="adj" fmla="val 6000"/>
+              <a:gd name="adj" fmla="val 8276"/>
             </a:avLst>
           </a:prstGeom>
           <a:solidFill>
@@ -10289,14 +11229,14 @@
       </p:sp>
       <p:sp>
         <p:nvSpPr>
-          <p:cNvPr id="13" name="Text 11"/>
-          <p:cNvSpPr/>
-          <p:nvPr/>
-        </p:nvSpPr>
-        <p:spPr>
-          <a:xfrm>
-            <a:off x="8074152" y="1563624"/>
-            <a:ext cx="2825496" cy="256032"/>
+          <p:cNvPr id="11" name="Text 9"/>
+          <p:cNvSpPr/>
+          <p:nvPr/>
+        </p:nvSpPr>
+        <p:spPr>
+          <a:xfrm>
+            <a:off x="7799832" y="1472184"/>
+            <a:ext cx="3145536" cy="256032"/>
           </a:xfrm>
           <a:prstGeom prst="rect">
             <a:avLst/>
@@ -10320,7 +11260,7 @@
                 <a:ea typeface="Aptos" pitchFamily="34" charset="-122"/>
                 <a:cs typeface="Aptos" pitchFamily="34" charset="-120"/>
               </a:rPr>
-              <a:t>Key idea</a:t>
+              <a:t>Practice focus</a:t>
             </a:r>
             <a:endParaRPr lang="en-US" sz="1300" dirty="0"/>
           </a:p>
@@ -10328,14 +11268,14 @@
       </p:sp>
       <p:sp>
         <p:nvSpPr>
-          <p:cNvPr id="14" name="Text 12"/>
-          <p:cNvSpPr/>
-          <p:nvPr/>
-        </p:nvSpPr>
-        <p:spPr>
-          <a:xfrm>
-            <a:off x="8074152" y="1920240"/>
-            <a:ext cx="2825496" cy="1188720"/>
+          <p:cNvPr id="12" name="Text 10"/>
+          <p:cNvSpPr/>
+          <p:nvPr/>
+        </p:nvSpPr>
+        <p:spPr>
+          <a:xfrm>
+            <a:off x="7799832" y="1828800"/>
+            <a:ext cx="3145536" cy="685800"/>
           </a:xfrm>
           <a:prstGeom prst="rect">
             <a:avLst/>
@@ -10369,18 +11309,159 @@
       </p:sp>
       <p:sp>
         <p:nvSpPr>
-          <p:cNvPr id="15" name="Shape 13"/>
-          <p:cNvSpPr/>
-          <p:nvPr/>
-        </p:nvSpPr>
-        <p:spPr>
-          <a:xfrm>
-            <a:off x="7909560" y="3520440"/>
-            <a:ext cx="3154680" cy="1737360"/>
+          <p:cNvPr id="13" name="Shape 11"/>
+          <p:cNvSpPr/>
+          <p:nvPr/>
+        </p:nvSpPr>
+        <p:spPr>
+          <a:xfrm>
+            <a:off x="7635240" y="2788920"/>
+            <a:ext cx="3474720" cy="1536192"/>
           </a:xfrm>
           <a:prstGeom prst="roundRect">
             <a:avLst>
-              <a:gd name="adj" fmla="val 6316"/>
+              <a:gd name="adj" fmla="val 7143"/>
+            </a:avLst>
+          </a:prstGeom>
+          <a:solidFill>
+            <a:srgbClr val="FFFFFF">
+              <a:alpha val="88000"/>
+            </a:srgbClr>
+          </a:solidFill>
+          <a:ln w="12700">
+            <a:solidFill>
+              <a:srgbClr val="D6E8F2"/>
+            </a:solidFill>
+            <a:prstDash val="solid"/>
+          </a:ln>
+        </p:spPr>
+      </p:sp>
+      <p:sp>
+        <p:nvSpPr>
+          <p:cNvPr id="14" name="Shape 12"/>
+          <p:cNvSpPr/>
+          <p:nvPr/>
+        </p:nvSpPr>
+        <p:spPr>
+          <a:xfrm>
+            <a:off x="8074152" y="3291840"/>
+            <a:ext cx="2596896" cy="749808"/>
+          </a:xfrm>
+          <a:prstGeom prst="rect">
+            <a:avLst/>
+          </a:prstGeom>
+          <a:solidFill>
+            <a:srgbClr val="EAF6F8"/>
+          </a:solidFill>
+          <a:ln w="12700">
+            <a:solidFill>
+              <a:srgbClr val="8ABBD8"/>
+            </a:solidFill>
+            <a:prstDash val="solid"/>
+          </a:ln>
+        </p:spPr>
+      </p:sp>
+      <p:sp>
+        <p:nvSpPr>
+          <p:cNvPr id="15" name="Shape 13"/>
+          <p:cNvSpPr/>
+          <p:nvPr/>
+        </p:nvSpPr>
+        <p:spPr>
+          <a:xfrm>
+            <a:off x="8202168" y="3721608"/>
+            <a:ext cx="2340864" cy="0"/>
+          </a:xfrm>
+          <a:prstGeom prst="line">
+            <a:avLst/>
+          </a:prstGeom>
+          <a:noFill/>
+          <a:ln w="19050">
+            <a:solidFill>
+              <a:srgbClr val="0068B7"/>
+            </a:solidFill>
+            <a:prstDash val="solid"/>
+          </a:ln>
+        </p:spPr>
+      </p:sp>
+      <p:sp>
+        <p:nvSpPr>
+          <p:cNvPr id="16" name="Shape 14"/>
+          <p:cNvSpPr/>
+          <p:nvPr/>
+        </p:nvSpPr>
+        <p:spPr>
+          <a:xfrm>
+            <a:off x="9198864" y="4206240"/>
+            <a:ext cx="347472" cy="347472"/>
+          </a:xfrm>
+          <a:prstGeom prst="ellipse">
+            <a:avLst/>
+          </a:prstGeom>
+          <a:solidFill>
+            <a:srgbClr val="2F8A28"/>
+          </a:solidFill>
+          <a:ln w="12700">
+            <a:solidFill>
+              <a:srgbClr val="2F8A28"/>
+            </a:solidFill>
+            <a:prstDash val="solid"/>
+          </a:ln>
+        </p:spPr>
+      </p:sp>
+      <p:sp>
+        <p:nvSpPr>
+          <p:cNvPr id="17" name="Text 15"/>
+          <p:cNvSpPr/>
+          <p:nvPr/>
+        </p:nvSpPr>
+        <p:spPr>
+          <a:xfrm>
+            <a:off x="7909560" y="3977640"/>
+            <a:ext cx="2926080" cy="182880"/>
+          </a:xfrm>
+          <a:prstGeom prst="rect">
+            <a:avLst/>
+          </a:prstGeom>
+          <a:noFill/>
+          <a:ln/>
+        </p:spPr>
+        <p:txBody>
+          <a:bodyPr wrap="square" lIns="0" tIns="0" rIns="0" bIns="0" rtlCol="0" anchor="ctr"/>
+          <a:lstStyle/>
+          <a:p>
+            <a:pPr algn="ctr" indent="0" marL="0">
+              <a:buNone/>
+            </a:pPr>
+            <a:r>
+              <a:rPr lang="en-US" sz="1000" dirty="0">
+                <a:solidFill>
+                  <a:srgbClr val="003A63"/>
+                </a:solidFill>
+                <a:latin typeface="Aptos" pitchFamily="34" charset="0"/>
+                <a:ea typeface="Aptos" pitchFamily="34" charset="-122"/>
+                <a:cs typeface="Aptos" pitchFamily="34" charset="-120"/>
+              </a:rPr>
+              <a:t>Concept to action</a:t>
+            </a:r>
+            <a:endParaRPr lang="en-US" sz="1000" dirty="0"/>
+          </a:p>
+        </p:txBody>
+      </p:sp>
+      <p:sp>
+        <p:nvSpPr>
+          <p:cNvPr id="18" name="Shape 16"/>
+          <p:cNvSpPr/>
+          <p:nvPr/>
+        </p:nvSpPr>
+        <p:spPr>
+          <a:xfrm>
+            <a:off x="7635240" y="4498848"/>
+            <a:ext cx="3474720" cy="1143000"/>
+          </a:xfrm>
+          <a:prstGeom prst="roundRect">
+            <a:avLst>
+              <a:gd name="adj" fmla="val 9600"/>
             </a:avLst>
           </a:prstGeom>
           <a:solidFill>
@@ -10396,14 +11477,14 @@
       </p:sp>
       <p:sp>
         <p:nvSpPr>
-          <p:cNvPr id="16" name="Text 14"/>
-          <p:cNvSpPr/>
-          <p:nvPr/>
-        </p:nvSpPr>
-        <p:spPr>
-          <a:xfrm>
-            <a:off x="8074152" y="3666744"/>
-            <a:ext cx="2825496" cy="256032"/>
+          <p:cNvPr id="19" name="Text 17"/>
+          <p:cNvSpPr/>
+          <p:nvPr/>
+        </p:nvSpPr>
+        <p:spPr>
+          <a:xfrm>
+            <a:off x="7799832" y="4645152"/>
+            <a:ext cx="3145536" cy="256032"/>
           </a:xfrm>
           <a:prstGeom prst="rect">
             <a:avLst/>
@@ -10427,7 +11508,7 @@
                 <a:ea typeface="Aptos" pitchFamily="34" charset="-122"/>
                 <a:cs typeface="Aptos" pitchFamily="34" charset="-120"/>
               </a:rPr>
-              <a:t>Use this for</a:t>
+              <a:t>What to produce</a:t>
             </a:r>
             <a:endParaRPr lang="en-US" sz="1300" dirty="0"/>
           </a:p>
@@ -10435,14 +11516,14 @@
       </p:sp>
       <p:sp>
         <p:nvSpPr>
-          <p:cNvPr id="17" name="Text 15"/>
-          <p:cNvSpPr/>
-          <p:nvPr/>
-        </p:nvSpPr>
-        <p:spPr>
-          <a:xfrm>
-            <a:off x="8074152" y="4023360"/>
-            <a:ext cx="2825496" cy="1097280"/>
+          <p:cNvPr id="20" name="Text 18"/>
+          <p:cNvSpPr/>
+          <p:nvPr/>
+        </p:nvSpPr>
+        <p:spPr>
+          <a:xfrm>
+            <a:off x="7799832" y="5001768"/>
+            <a:ext cx="3145536" cy="502920"/>
           </a:xfrm>
           <a:prstGeom prst="rect">
             <a:avLst/>
@@ -10468,7 +11549,7 @@
                 <a:ea typeface="Aptos" pitchFamily="34" charset="-122"/>
                 <a:cs typeface="Aptos" pitchFamily="34" charset="-120"/>
               </a:rPr>
-              <a:t>Connect the concept to public health decisions, safeguards, documentation, or implementation work.</a:t>
+              <a:t>Use the assignment to test whether you can explain the concept, apply it to a realistic public health situation, and identify what would need review before the work moves forward.</a:t>
             </a:r>
             <a:endParaRPr lang="en-US" sz="1550" dirty="0"/>
           </a:p>
@@ -10642,8 +11723,8 @@
         </p:nvSpPr>
         <p:spPr>
           <a:xfrm>
-            <a:off x="9966960" y="6537960"/>
-            <a:ext cx="1645920" cy="201168"/>
+            <a:off x="9646920" y="6537960"/>
+            <a:ext cx="1965960" cy="201168"/>
           </a:xfrm>
           <a:prstGeom prst="rect">
             <a:avLst/>
@@ -10667,7 +11748,7 @@
                 <a:ea typeface="Aptos" pitchFamily="34" charset="-122"/>
                 <a:cs typeface="Aptos" pitchFamily="34" charset="-120"/>
               </a:rPr>
-              <a:t>Â© Paula Soper</a:t>
+              <a:t>Copyright Paula Soper</a:t>
             </a:r>
             <a:endParaRPr lang="en-US" sz="800" dirty="0"/>
           </a:p>
@@ -10714,77 +11795,13 @@
       </p:sp>
       <p:sp>
         <p:nvSpPr>
-          <p:cNvPr id="8" name="Shape 6"/>
+          <p:cNvPr id="8" name="Text 6"/>
           <p:cNvSpPr/>
           <p:nvPr/>
         </p:nvSpPr>
         <p:spPr>
           <a:xfrm>
             <a:off x="640080" y="658368"/>
-            <a:ext cx="420624" cy="420624"/>
-          </a:xfrm>
-          <a:prstGeom prst="ellipse">
-            <a:avLst/>
-          </a:prstGeom>
-          <a:solidFill>
-            <a:srgbClr val="0068B7"/>
-          </a:solidFill>
-          <a:ln w="12700">
-            <a:solidFill>
-              <a:srgbClr val="0068B7"/>
-            </a:solidFill>
-            <a:prstDash val="solid"/>
-          </a:ln>
-        </p:spPr>
-      </p:sp>
-      <p:sp>
-        <p:nvSpPr>
-          <p:cNvPr id="9" name="Text 7"/>
-          <p:cNvSpPr/>
-          <p:nvPr/>
-        </p:nvSpPr>
-        <p:spPr>
-          <a:xfrm>
-            <a:off x="640080" y="731520"/>
-            <a:ext cx="420624" cy="164592"/>
-          </a:xfrm>
-          <a:prstGeom prst="rect">
-            <a:avLst/>
-          </a:prstGeom>
-          <a:noFill/>
-          <a:ln/>
-        </p:spPr>
-        <p:txBody>
-          <a:bodyPr wrap="square" lIns="0" tIns="0" rIns="0" bIns="0" rtlCol="0" anchor="ctr"/>
-          <a:lstStyle/>
-          <a:p>
-            <a:pPr algn="ctr" indent="0" marL="0">
-              <a:buNone/>
-            </a:pPr>
-            <a:r>
-              <a:rPr lang="en-US" sz="1100" b="1" dirty="0">
-                <a:solidFill>
-                  <a:srgbClr val="FFFFFF"/>
-                </a:solidFill>
-                <a:latin typeface="Aptos" pitchFamily="34" charset="0"/>
-                <a:ea typeface="Aptos" pitchFamily="34" charset="-122"/>
-                <a:cs typeface="Aptos" pitchFamily="34" charset="-120"/>
-              </a:rPr>
-              <a:t>14</a:t>
-            </a:r>
-            <a:endParaRPr lang="en-US" sz="1100" dirty="0"/>
-          </a:p>
-        </p:txBody>
-      </p:sp>
-      <p:sp>
-        <p:nvSpPr>
-          <p:cNvPr id="10" name="Text 8"/>
-          <p:cNvSpPr/>
-          <p:nvPr/>
-        </p:nvSpPr>
-        <p:spPr>
-          <a:xfrm>
-            <a:off x="640080" y="621792"/>
             <a:ext cx="10881360" cy="713232"/>
           </a:xfrm>
           <a:prstGeom prst="rect">
@@ -10819,14 +11836,14 @@
       </p:sp>
       <p:sp>
         <p:nvSpPr>
-          <p:cNvPr id="11" name="Text 9"/>
+          <p:cNvPr id="9" name="Text 7"/>
           <p:cNvSpPr/>
           <p:nvPr/>
         </p:nvSpPr>
         <p:spPr>
           <a:xfrm>
             <a:off x="868680" y="1508760"/>
-            <a:ext cx="6537960" cy="4160520"/>
+            <a:ext cx="6309360" cy="4160520"/>
           </a:xfrm>
           <a:prstGeom prst="rect">
             <a:avLst/>
@@ -10885,18 +11902,18 @@
       </p:sp>
       <p:sp>
         <p:nvSpPr>
-          <p:cNvPr id="12" name="Shape 10"/>
-          <p:cNvSpPr/>
-          <p:nvPr/>
-        </p:nvSpPr>
-        <p:spPr>
-          <a:xfrm>
-            <a:off x="7909560" y="1417320"/>
-            <a:ext cx="3154680" cy="1828800"/>
+          <p:cNvPr id="10" name="Shape 8"/>
+          <p:cNvSpPr/>
+          <p:nvPr/>
+        </p:nvSpPr>
+        <p:spPr>
+          <a:xfrm>
+            <a:off x="7635240" y="1325880"/>
+            <a:ext cx="3474720" cy="1325880"/>
           </a:xfrm>
           <a:prstGeom prst="roundRect">
             <a:avLst>
-              <a:gd name="adj" fmla="val 6000"/>
+              <a:gd name="adj" fmla="val 8276"/>
             </a:avLst>
           </a:prstGeom>
           <a:solidFill>
@@ -10912,14 +11929,14 @@
       </p:sp>
       <p:sp>
         <p:nvSpPr>
-          <p:cNvPr id="13" name="Text 11"/>
-          <p:cNvSpPr/>
-          <p:nvPr/>
-        </p:nvSpPr>
-        <p:spPr>
-          <a:xfrm>
-            <a:off x="8074152" y="1563624"/>
-            <a:ext cx="2825496" cy="256032"/>
+          <p:cNvPr id="11" name="Text 9"/>
+          <p:cNvSpPr/>
+          <p:nvPr/>
+        </p:nvSpPr>
+        <p:spPr>
+          <a:xfrm>
+            <a:off x="7799832" y="1472184"/>
+            <a:ext cx="3145536" cy="256032"/>
           </a:xfrm>
           <a:prstGeom prst="rect">
             <a:avLst/>
@@ -10943,7 +11960,7 @@
                 <a:ea typeface="Aptos" pitchFamily="34" charset="-122"/>
                 <a:cs typeface="Aptos" pitchFamily="34" charset="-120"/>
               </a:rPr>
-              <a:t>Key idea</a:t>
+              <a:t>Core concept</a:t>
             </a:r>
             <a:endParaRPr lang="en-US" sz="1300" dirty="0"/>
           </a:p>
@@ -10951,14 +11968,14 @@
       </p:sp>
       <p:sp>
         <p:nvSpPr>
-          <p:cNvPr id="14" name="Text 12"/>
-          <p:cNvSpPr/>
-          <p:nvPr/>
-        </p:nvSpPr>
-        <p:spPr>
-          <a:xfrm>
-            <a:off x="8074152" y="1920240"/>
-            <a:ext cx="2825496" cy="1188720"/>
+          <p:cNvPr id="12" name="Text 10"/>
+          <p:cNvSpPr/>
+          <p:nvPr/>
+        </p:nvSpPr>
+        <p:spPr>
+          <a:xfrm>
+            <a:off x="7799832" y="1828800"/>
+            <a:ext cx="3145536" cy="685800"/>
           </a:xfrm>
           <a:prstGeom prst="rect">
             <a:avLst/>
@@ -10992,18 +12009,159 @@
       </p:sp>
       <p:sp>
         <p:nvSpPr>
-          <p:cNvPr id="15" name="Shape 13"/>
-          <p:cNvSpPr/>
-          <p:nvPr/>
-        </p:nvSpPr>
-        <p:spPr>
-          <a:xfrm>
-            <a:off x="7909560" y="3520440"/>
-            <a:ext cx="3154680" cy="1737360"/>
+          <p:cNvPr id="13" name="Shape 11"/>
+          <p:cNvSpPr/>
+          <p:nvPr/>
+        </p:nvSpPr>
+        <p:spPr>
+          <a:xfrm>
+            <a:off x="7635240" y="2788920"/>
+            <a:ext cx="3474720" cy="1536192"/>
           </a:xfrm>
           <a:prstGeom prst="roundRect">
             <a:avLst>
-              <a:gd name="adj" fmla="val 6316"/>
+              <a:gd name="adj" fmla="val 7143"/>
+            </a:avLst>
+          </a:prstGeom>
+          <a:solidFill>
+            <a:srgbClr val="FFFFFF">
+              <a:alpha val="88000"/>
+            </a:srgbClr>
+          </a:solidFill>
+          <a:ln w="12700">
+            <a:solidFill>
+              <a:srgbClr val="D6E8F2"/>
+            </a:solidFill>
+            <a:prstDash val="solid"/>
+          </a:ln>
+        </p:spPr>
+      </p:sp>
+      <p:sp>
+        <p:nvSpPr>
+          <p:cNvPr id="14" name="Shape 12"/>
+          <p:cNvSpPr/>
+          <p:nvPr/>
+        </p:nvSpPr>
+        <p:spPr>
+          <a:xfrm>
+            <a:off x="8074152" y="3291840"/>
+            <a:ext cx="2596896" cy="749808"/>
+          </a:xfrm>
+          <a:prstGeom prst="rect">
+            <a:avLst/>
+          </a:prstGeom>
+          <a:solidFill>
+            <a:srgbClr val="EAF6F8"/>
+          </a:solidFill>
+          <a:ln w="12700">
+            <a:solidFill>
+              <a:srgbClr val="8ABBD8"/>
+            </a:solidFill>
+            <a:prstDash val="solid"/>
+          </a:ln>
+        </p:spPr>
+      </p:sp>
+      <p:sp>
+        <p:nvSpPr>
+          <p:cNvPr id="15" name="Shape 13"/>
+          <p:cNvSpPr/>
+          <p:nvPr/>
+        </p:nvSpPr>
+        <p:spPr>
+          <a:xfrm>
+            <a:off x="8202168" y="3721608"/>
+            <a:ext cx="2340864" cy="0"/>
+          </a:xfrm>
+          <a:prstGeom prst="line">
+            <a:avLst/>
+          </a:prstGeom>
+          <a:noFill/>
+          <a:ln w="19050">
+            <a:solidFill>
+              <a:srgbClr val="0068B7"/>
+            </a:solidFill>
+            <a:prstDash val="solid"/>
+          </a:ln>
+        </p:spPr>
+      </p:sp>
+      <p:sp>
+        <p:nvSpPr>
+          <p:cNvPr id="16" name="Shape 14"/>
+          <p:cNvSpPr/>
+          <p:nvPr/>
+        </p:nvSpPr>
+        <p:spPr>
+          <a:xfrm>
+            <a:off x="9198864" y="4206240"/>
+            <a:ext cx="347472" cy="347472"/>
+          </a:xfrm>
+          <a:prstGeom prst="ellipse">
+            <a:avLst/>
+          </a:prstGeom>
+          <a:solidFill>
+            <a:srgbClr val="2F8A28"/>
+          </a:solidFill>
+          <a:ln w="12700">
+            <a:solidFill>
+              <a:srgbClr val="2F8A28"/>
+            </a:solidFill>
+            <a:prstDash val="solid"/>
+          </a:ln>
+        </p:spPr>
+      </p:sp>
+      <p:sp>
+        <p:nvSpPr>
+          <p:cNvPr id="17" name="Text 15"/>
+          <p:cNvSpPr/>
+          <p:nvPr/>
+        </p:nvSpPr>
+        <p:spPr>
+          <a:xfrm>
+            <a:off x="7909560" y="3977640"/>
+            <a:ext cx="2926080" cy="182880"/>
+          </a:xfrm>
+          <a:prstGeom prst="rect">
+            <a:avLst/>
+          </a:prstGeom>
+          <a:noFill/>
+          <a:ln/>
+        </p:spPr>
+        <p:txBody>
+          <a:bodyPr wrap="square" lIns="0" tIns="0" rIns="0" bIns="0" rtlCol="0" anchor="ctr"/>
+          <a:lstStyle/>
+          <a:p>
+            <a:pPr algn="ctr" indent="0" marL="0">
+              <a:buNone/>
+            </a:pPr>
+            <a:r>
+              <a:rPr lang="en-US" sz="1000" dirty="0">
+                <a:solidFill>
+                  <a:srgbClr val="003A63"/>
+                </a:solidFill>
+                <a:latin typeface="Aptos" pitchFamily="34" charset="0"/>
+                <a:ea typeface="Aptos" pitchFamily="34" charset="-122"/>
+                <a:cs typeface="Aptos" pitchFamily="34" charset="-120"/>
+              </a:rPr>
+              <a:t>Concept to action</a:t>
+            </a:r>
+            <a:endParaRPr lang="en-US" sz="1000" dirty="0"/>
+          </a:p>
+        </p:txBody>
+      </p:sp>
+      <p:sp>
+        <p:nvSpPr>
+          <p:cNvPr id="18" name="Shape 16"/>
+          <p:cNvSpPr/>
+          <p:nvPr/>
+        </p:nvSpPr>
+        <p:spPr>
+          <a:xfrm>
+            <a:off x="7635240" y="4498848"/>
+            <a:ext cx="3474720" cy="1143000"/>
+          </a:xfrm>
+          <a:prstGeom prst="roundRect">
+            <a:avLst>
+              <a:gd name="adj" fmla="val 9600"/>
             </a:avLst>
           </a:prstGeom>
           <a:solidFill>
@@ -11019,14 +12177,14 @@
       </p:sp>
       <p:sp>
         <p:nvSpPr>
-          <p:cNvPr id="16" name="Text 14"/>
-          <p:cNvSpPr/>
-          <p:nvPr/>
-        </p:nvSpPr>
-        <p:spPr>
-          <a:xfrm>
-            <a:off x="8074152" y="3666744"/>
-            <a:ext cx="2825496" cy="256032"/>
+          <p:cNvPr id="19" name="Text 17"/>
+          <p:cNvSpPr/>
+          <p:nvPr/>
+        </p:nvSpPr>
+        <p:spPr>
+          <a:xfrm>
+            <a:off x="7799832" y="4645152"/>
+            <a:ext cx="3145536" cy="256032"/>
           </a:xfrm>
           <a:prstGeom prst="rect">
             <a:avLst/>
@@ -11050,7 +12208,7 @@
                 <a:ea typeface="Aptos" pitchFamily="34" charset="-122"/>
                 <a:cs typeface="Aptos" pitchFamily="34" charset="-120"/>
               </a:rPr>
-              <a:t>Use this for</a:t>
+              <a:t>Apply it</a:t>
             </a:r>
             <a:endParaRPr lang="en-US" sz="1300" dirty="0"/>
           </a:p>
@@ -11058,14 +12216,14 @@
       </p:sp>
       <p:sp>
         <p:nvSpPr>
-          <p:cNvPr id="17" name="Text 15"/>
-          <p:cNvSpPr/>
-          <p:nvPr/>
-        </p:nvSpPr>
-        <p:spPr>
-          <a:xfrm>
-            <a:off x="8074152" y="4023360"/>
-            <a:ext cx="2825496" cy="1097280"/>
+          <p:cNvPr id="20" name="Text 18"/>
+          <p:cNvSpPr/>
+          <p:nvPr/>
+        </p:nvSpPr>
+        <p:spPr>
+          <a:xfrm>
+            <a:off x="7799832" y="5001768"/>
+            <a:ext cx="3145536" cy="502920"/>
           </a:xfrm>
           <a:prstGeom prst="rect">
             <a:avLst/>
@@ -11091,7 +12249,7 @@
                 <a:ea typeface="Aptos" pitchFamily="34" charset="-122"/>
                 <a:cs typeface="Aptos" pitchFamily="34" charset="-120"/>
               </a:rPr>
-              <a:t>Connect the concept to public health decisions, safeguards, documentation, or implementation work.</a:t>
+              <a:t>Connect the concept to public health purpose, responsible use, required safeguards, documentation, and the next action a department should take.</a:t>
             </a:r>
             <a:endParaRPr lang="en-US" sz="1550" dirty="0"/>
           </a:p>
@@ -11265,8 +12423,8 @@
         </p:nvSpPr>
         <p:spPr>
           <a:xfrm>
-            <a:off x="9966960" y="6537960"/>
-            <a:ext cx="1645920" cy="201168"/>
+            <a:off x="9646920" y="6537960"/>
+            <a:ext cx="1965960" cy="201168"/>
           </a:xfrm>
           <a:prstGeom prst="rect">
             <a:avLst/>
@@ -11290,7 +12448,7 @@
                 <a:ea typeface="Aptos" pitchFamily="34" charset="-122"/>
                 <a:cs typeface="Aptos" pitchFamily="34" charset="-120"/>
               </a:rPr>
-              <a:t>Â© Paula Soper</a:t>
+              <a:t>Copyright Paula Soper</a:t>
             </a:r>
             <a:endParaRPr lang="en-US" sz="800" dirty="0"/>
           </a:p>
@@ -11385,7 +12543,7 @@
         <p:spPr>
           <a:xfrm>
             <a:off x="868680" y="1508760"/>
-            <a:ext cx="6537960" cy="4160520"/>
+            <a:ext cx="6309360" cy="4160520"/>
           </a:xfrm>
           <a:prstGeom prst="rect">
             <a:avLst/>
@@ -11422,12 +12580,12 @@
         </p:nvSpPr>
         <p:spPr>
           <a:xfrm>
-            <a:off x="7909560" y="1417320"/>
-            <a:ext cx="3154680" cy="1828800"/>
+            <a:off x="7635240" y="1325880"/>
+            <a:ext cx="3474720" cy="1325880"/>
           </a:xfrm>
           <a:prstGeom prst="roundRect">
             <a:avLst>
-              <a:gd name="adj" fmla="val 6000"/>
+              <a:gd name="adj" fmla="val 8276"/>
             </a:avLst>
           </a:prstGeom>
           <a:solidFill>
@@ -11449,8 +12607,8 @@
         </p:nvSpPr>
         <p:spPr>
           <a:xfrm>
-            <a:off x="8074152" y="1563624"/>
-            <a:ext cx="2825496" cy="256032"/>
+            <a:off x="7799832" y="1472184"/>
+            <a:ext cx="3145536" cy="256032"/>
           </a:xfrm>
           <a:prstGeom prst="rect">
             <a:avLst/>
@@ -11474,7 +12632,7 @@
                 <a:ea typeface="Aptos" pitchFamily="34" charset="-122"/>
                 <a:cs typeface="Aptos" pitchFamily="34" charset="-120"/>
               </a:rPr>
-              <a:t>Key idea</a:t>
+              <a:t>Core concept</a:t>
             </a:r>
             <a:endParaRPr lang="en-US" sz="1300" dirty="0"/>
           </a:p>
@@ -11488,8 +12646,8 @@
         </p:nvSpPr>
         <p:spPr>
           <a:xfrm>
-            <a:off x="8074152" y="1920240"/>
-            <a:ext cx="2825496" cy="1188720"/>
+            <a:off x="7799832" y="1828800"/>
+            <a:ext cx="3145536" cy="685800"/>
           </a:xfrm>
           <a:prstGeom prst="rect">
             <a:avLst/>
@@ -11529,12 +12687,153 @@
         </p:nvSpPr>
         <p:spPr>
           <a:xfrm>
-            <a:off x="7909560" y="3520440"/>
-            <a:ext cx="3154680" cy="1737360"/>
+            <a:off x="7635240" y="2788920"/>
+            <a:ext cx="3474720" cy="1536192"/>
           </a:xfrm>
           <a:prstGeom prst="roundRect">
             <a:avLst>
-              <a:gd name="adj" fmla="val 6316"/>
+              <a:gd name="adj" fmla="val 7143"/>
+            </a:avLst>
+          </a:prstGeom>
+          <a:solidFill>
+            <a:srgbClr val="FFFFFF">
+              <a:alpha val="88000"/>
+            </a:srgbClr>
+          </a:solidFill>
+          <a:ln w="12700">
+            <a:solidFill>
+              <a:srgbClr val="D6E8F2"/>
+            </a:solidFill>
+            <a:prstDash val="solid"/>
+          </a:ln>
+        </p:spPr>
+      </p:sp>
+      <p:sp>
+        <p:nvSpPr>
+          <p:cNvPr id="14" name="Shape 12"/>
+          <p:cNvSpPr/>
+          <p:nvPr/>
+        </p:nvSpPr>
+        <p:spPr>
+          <a:xfrm>
+            <a:off x="8074152" y="3291840"/>
+            <a:ext cx="2596896" cy="749808"/>
+          </a:xfrm>
+          <a:prstGeom prst="rect">
+            <a:avLst/>
+          </a:prstGeom>
+          <a:solidFill>
+            <a:srgbClr val="EAF6F8"/>
+          </a:solidFill>
+          <a:ln w="12700">
+            <a:solidFill>
+              <a:srgbClr val="8ABBD8"/>
+            </a:solidFill>
+            <a:prstDash val="solid"/>
+          </a:ln>
+        </p:spPr>
+      </p:sp>
+      <p:sp>
+        <p:nvSpPr>
+          <p:cNvPr id="15" name="Shape 13"/>
+          <p:cNvSpPr/>
+          <p:nvPr/>
+        </p:nvSpPr>
+        <p:spPr>
+          <a:xfrm>
+            <a:off x="8202168" y="3721608"/>
+            <a:ext cx="2340864" cy="0"/>
+          </a:xfrm>
+          <a:prstGeom prst="line">
+            <a:avLst/>
+          </a:prstGeom>
+          <a:noFill/>
+          <a:ln w="19050">
+            <a:solidFill>
+              <a:srgbClr val="0068B7"/>
+            </a:solidFill>
+            <a:prstDash val="solid"/>
+          </a:ln>
+        </p:spPr>
+      </p:sp>
+      <p:sp>
+        <p:nvSpPr>
+          <p:cNvPr id="16" name="Shape 14"/>
+          <p:cNvSpPr/>
+          <p:nvPr/>
+        </p:nvSpPr>
+        <p:spPr>
+          <a:xfrm>
+            <a:off x="9198864" y="4206240"/>
+            <a:ext cx="347472" cy="347472"/>
+          </a:xfrm>
+          <a:prstGeom prst="ellipse">
+            <a:avLst/>
+          </a:prstGeom>
+          <a:solidFill>
+            <a:srgbClr val="2F8A28"/>
+          </a:solidFill>
+          <a:ln w="12700">
+            <a:solidFill>
+              <a:srgbClr val="2F8A28"/>
+            </a:solidFill>
+            <a:prstDash val="solid"/>
+          </a:ln>
+        </p:spPr>
+      </p:sp>
+      <p:sp>
+        <p:nvSpPr>
+          <p:cNvPr id="17" name="Text 15"/>
+          <p:cNvSpPr/>
+          <p:nvPr/>
+        </p:nvSpPr>
+        <p:spPr>
+          <a:xfrm>
+            <a:off x="7909560" y="3977640"/>
+            <a:ext cx="2926080" cy="182880"/>
+          </a:xfrm>
+          <a:prstGeom prst="rect">
+            <a:avLst/>
+          </a:prstGeom>
+          <a:noFill/>
+          <a:ln/>
+        </p:spPr>
+        <p:txBody>
+          <a:bodyPr wrap="square" lIns="0" tIns="0" rIns="0" bIns="0" rtlCol="0" anchor="ctr"/>
+          <a:lstStyle/>
+          <a:p>
+            <a:pPr algn="ctr" indent="0" marL="0">
+              <a:buNone/>
+            </a:pPr>
+            <a:r>
+              <a:rPr lang="en-US" sz="1000" dirty="0">
+                <a:solidFill>
+                  <a:srgbClr val="003A63"/>
+                </a:solidFill>
+                <a:latin typeface="Aptos" pitchFamily="34" charset="0"/>
+                <a:ea typeface="Aptos" pitchFamily="34" charset="-122"/>
+                <a:cs typeface="Aptos" pitchFamily="34" charset="-120"/>
+              </a:rPr>
+              <a:t>Concept to action</a:t>
+            </a:r>
+            <a:endParaRPr lang="en-US" sz="1000" dirty="0"/>
+          </a:p>
+        </p:txBody>
+      </p:sp>
+      <p:sp>
+        <p:nvSpPr>
+          <p:cNvPr id="18" name="Shape 16"/>
+          <p:cNvSpPr/>
+          <p:nvPr/>
+        </p:nvSpPr>
+        <p:spPr>
+          <a:xfrm>
+            <a:off x="7635240" y="4498848"/>
+            <a:ext cx="3474720" cy="1143000"/>
+          </a:xfrm>
+          <a:prstGeom prst="roundRect">
+            <a:avLst>
+              <a:gd name="adj" fmla="val 9600"/>
             </a:avLst>
           </a:prstGeom>
           <a:solidFill>
@@ -11550,14 +12849,14 @@
       </p:sp>
       <p:sp>
         <p:nvSpPr>
-          <p:cNvPr id="14" name="Text 12"/>
-          <p:cNvSpPr/>
-          <p:nvPr/>
-        </p:nvSpPr>
-        <p:spPr>
-          <a:xfrm>
-            <a:off x="8074152" y="3666744"/>
-            <a:ext cx="2825496" cy="256032"/>
+          <p:cNvPr id="19" name="Text 17"/>
+          <p:cNvSpPr/>
+          <p:nvPr/>
+        </p:nvSpPr>
+        <p:spPr>
+          <a:xfrm>
+            <a:off x="7799832" y="4645152"/>
+            <a:ext cx="3145536" cy="256032"/>
           </a:xfrm>
           <a:prstGeom prst="rect">
             <a:avLst/>
@@ -11581,7 +12880,7 @@
                 <a:ea typeface="Aptos" pitchFamily="34" charset="-122"/>
                 <a:cs typeface="Aptos" pitchFamily="34" charset="-120"/>
               </a:rPr>
-              <a:t>Use this for</a:t>
+              <a:t>Apply it</a:t>
             </a:r>
             <a:endParaRPr lang="en-US" sz="1300" dirty="0"/>
           </a:p>
@@ -11589,14 +12888,14 @@
       </p:sp>
       <p:sp>
         <p:nvSpPr>
-          <p:cNvPr id="15" name="Text 13"/>
-          <p:cNvSpPr/>
-          <p:nvPr/>
-        </p:nvSpPr>
-        <p:spPr>
-          <a:xfrm>
-            <a:off x="8074152" y="4023360"/>
-            <a:ext cx="2825496" cy="1097280"/>
+          <p:cNvPr id="20" name="Text 18"/>
+          <p:cNvSpPr/>
+          <p:nvPr/>
+        </p:nvSpPr>
+        <p:spPr>
+          <a:xfrm>
+            <a:off x="7799832" y="5001768"/>
+            <a:ext cx="3145536" cy="502920"/>
           </a:xfrm>
           <a:prstGeom prst="rect">
             <a:avLst/>
@@ -11622,7 +12921,7 @@
                 <a:ea typeface="Aptos" pitchFamily="34" charset="-122"/>
                 <a:cs typeface="Aptos" pitchFamily="34" charset="-120"/>
               </a:rPr>
-              <a:t>Connect the concept to public health decisions, safeguards, documentation, or implementation work.</a:t>
+              <a:t>Connect the concept to public health purpose, responsible use, required safeguards, documentation, and the next action a department should take.</a:t>
             </a:r>
             <a:endParaRPr lang="en-US" sz="1550" dirty="0"/>
           </a:p>
@@ -11796,8 +13095,8 @@
         </p:nvSpPr>
         <p:spPr>
           <a:xfrm>
-            <a:off x="9966960" y="6537960"/>
-            <a:ext cx="1645920" cy="201168"/>
+            <a:off x="9646920" y="6537960"/>
+            <a:ext cx="1965960" cy="201168"/>
           </a:xfrm>
           <a:prstGeom prst="rect">
             <a:avLst/>
@@ -11821,7 +13120,7 @@
                 <a:ea typeface="Aptos" pitchFamily="34" charset="-122"/>
                 <a:cs typeface="Aptos" pitchFamily="34" charset="-120"/>
               </a:rPr>
-              <a:t>Â© Paula Soper</a:t>
+              <a:t>Copyright Paula Soper</a:t>
             </a:r>
             <a:endParaRPr lang="en-US" sz="800" dirty="0"/>
           </a:p>
@@ -12164,46 +13463,7 @@
       </p:sp>
       <p:sp>
         <p:nvSpPr>
-          <p:cNvPr id="15" name="Text 13"/>
-          <p:cNvSpPr/>
-          <p:nvPr/>
-        </p:nvSpPr>
-        <p:spPr>
-          <a:xfrm>
-            <a:off x="8817864" y="4187952"/>
-            <a:ext cx="201168" cy="256032"/>
-          </a:xfrm>
-          <a:prstGeom prst="rect">
-            <a:avLst/>
-          </a:prstGeom>
-          <a:noFill/>
-          <a:ln/>
-        </p:spPr>
-        <p:txBody>
-          <a:bodyPr wrap="square" lIns="0" tIns="0" rIns="0" bIns="0" rtlCol="0" anchor="ctr"/>
-          <a:lstStyle/>
-          <a:p>
-            <a:pPr algn="ctr" indent="0" marL="0">
-              <a:buNone/>
-            </a:pPr>
-            <a:r>
-              <a:rPr lang="en-US" sz="1800" b="1" dirty="0">
-                <a:solidFill>
-                  <a:srgbClr val="0068B7"/>
-                </a:solidFill>
-                <a:latin typeface="Aptos" pitchFamily="34" charset="0"/>
-                <a:ea typeface="Aptos" pitchFamily="34" charset="-122"/>
-                <a:cs typeface="Aptos" pitchFamily="34" charset="-120"/>
-              </a:rPr>
-              <a:t>â†’</a:t>
-            </a:r>
-            <a:endParaRPr lang="en-US" sz="1800" dirty="0"/>
-          </a:p>
-        </p:txBody>
-      </p:sp>
-      <p:sp>
-        <p:nvSpPr>
-          <p:cNvPr id="16" name="Shape 14"/>
+          <p:cNvPr id="15" name="Shape 13"/>
           <p:cNvSpPr/>
           <p:nvPr/>
         </p:nvSpPr>
@@ -12230,7 +13490,7 @@
       </p:sp>
       <p:sp>
         <p:nvSpPr>
-          <p:cNvPr id="17" name="Text 15"/>
+          <p:cNvPr id="16" name="Text 14"/>
           <p:cNvSpPr/>
           <p:nvPr/>
         </p:nvSpPr>
@@ -12271,46 +13531,7 @@
       </p:sp>
       <p:sp>
         <p:nvSpPr>
-          <p:cNvPr id="18" name="Text 16"/>
-          <p:cNvSpPr/>
-          <p:nvPr/>
-        </p:nvSpPr>
-        <p:spPr>
-          <a:xfrm>
-            <a:off x="10046208" y="4187952"/>
-            <a:ext cx="201168" cy="256032"/>
-          </a:xfrm>
-          <a:prstGeom prst="rect">
-            <a:avLst/>
-          </a:prstGeom>
-          <a:noFill/>
-          <a:ln/>
-        </p:spPr>
-        <p:txBody>
-          <a:bodyPr wrap="square" lIns="0" tIns="0" rIns="0" bIns="0" rtlCol="0" anchor="ctr"/>
-          <a:lstStyle/>
-          <a:p>
-            <a:pPr algn="ctr" indent="0" marL="0">
-              <a:buNone/>
-            </a:pPr>
-            <a:r>
-              <a:rPr lang="en-US" sz="1800" b="1" dirty="0">
-                <a:solidFill>
-                  <a:srgbClr val="0068B7"/>
-                </a:solidFill>
-                <a:latin typeface="Aptos" pitchFamily="34" charset="0"/>
-                <a:ea typeface="Aptos" pitchFamily="34" charset="-122"/>
-                <a:cs typeface="Aptos" pitchFamily="34" charset="-120"/>
-              </a:rPr>
-              <a:t>â†’</a:t>
-            </a:r>
-            <a:endParaRPr lang="en-US" sz="1800" dirty="0"/>
-          </a:p>
-        </p:txBody>
-      </p:sp>
-      <p:sp>
-        <p:nvSpPr>
-          <p:cNvPr id="19" name="Shape 17"/>
+          <p:cNvPr id="17" name="Shape 15"/>
           <p:cNvSpPr/>
           <p:nvPr/>
         </p:nvSpPr>
@@ -12337,7 +13558,7 @@
       </p:sp>
       <p:sp>
         <p:nvSpPr>
-          <p:cNvPr id="20" name="Text 18"/>
+          <p:cNvPr id="18" name="Text 16"/>
           <p:cNvSpPr/>
           <p:nvPr/>
         </p:nvSpPr>
@@ -12544,8 +13765,8 @@
         </p:nvSpPr>
         <p:spPr>
           <a:xfrm>
-            <a:off x="9966960" y="6537960"/>
-            <a:ext cx="1645920" cy="201168"/>
+            <a:off x="9646920" y="6537960"/>
+            <a:ext cx="1965960" cy="201168"/>
           </a:xfrm>
           <a:prstGeom prst="rect">
             <a:avLst/>
@@ -12569,7 +13790,7 @@
                 <a:ea typeface="Aptos" pitchFamily="34" charset="-122"/>
                 <a:cs typeface="Aptos" pitchFamily="34" charset="-120"/>
               </a:rPr>
-              <a:t>Â© Paula Soper</a:t>
+              <a:t>Copyright Paula Soper</a:t>
             </a:r>
             <a:endParaRPr lang="en-US" sz="800" dirty="0"/>
           </a:p>
@@ -12912,46 +14133,7 @@
       </p:sp>
       <p:sp>
         <p:nvSpPr>
-          <p:cNvPr id="15" name="Text 13"/>
-          <p:cNvSpPr/>
-          <p:nvPr/>
-        </p:nvSpPr>
-        <p:spPr>
-          <a:xfrm>
-            <a:off x="8817864" y="4187952"/>
-            <a:ext cx="201168" cy="256032"/>
-          </a:xfrm>
-          <a:prstGeom prst="rect">
-            <a:avLst/>
-          </a:prstGeom>
-          <a:noFill/>
-          <a:ln/>
-        </p:spPr>
-        <p:txBody>
-          <a:bodyPr wrap="square" lIns="0" tIns="0" rIns="0" bIns="0" rtlCol="0" anchor="ctr"/>
-          <a:lstStyle/>
-          <a:p>
-            <a:pPr algn="ctr" indent="0" marL="0">
-              <a:buNone/>
-            </a:pPr>
-            <a:r>
-              <a:rPr lang="en-US" sz="1800" b="1" dirty="0">
-                <a:solidFill>
-                  <a:srgbClr val="0068B7"/>
-                </a:solidFill>
-                <a:latin typeface="Aptos" pitchFamily="34" charset="0"/>
-                <a:ea typeface="Aptos" pitchFamily="34" charset="-122"/>
-                <a:cs typeface="Aptos" pitchFamily="34" charset="-120"/>
-              </a:rPr>
-              <a:t>â†’</a:t>
-            </a:r>
-            <a:endParaRPr lang="en-US" sz="1800" dirty="0"/>
-          </a:p>
-        </p:txBody>
-      </p:sp>
-      <p:sp>
-        <p:nvSpPr>
-          <p:cNvPr id="16" name="Shape 14"/>
+          <p:cNvPr id="15" name="Shape 13"/>
           <p:cNvSpPr/>
           <p:nvPr/>
         </p:nvSpPr>
@@ -12978,7 +14160,7 @@
       </p:sp>
       <p:sp>
         <p:nvSpPr>
-          <p:cNvPr id="17" name="Text 15"/>
+          <p:cNvPr id="16" name="Text 14"/>
           <p:cNvSpPr/>
           <p:nvPr/>
         </p:nvSpPr>
@@ -13019,46 +14201,7 @@
       </p:sp>
       <p:sp>
         <p:nvSpPr>
-          <p:cNvPr id="18" name="Text 16"/>
-          <p:cNvSpPr/>
-          <p:nvPr/>
-        </p:nvSpPr>
-        <p:spPr>
-          <a:xfrm>
-            <a:off x="10046208" y="4187952"/>
-            <a:ext cx="201168" cy="256032"/>
-          </a:xfrm>
-          <a:prstGeom prst="rect">
-            <a:avLst/>
-          </a:prstGeom>
-          <a:noFill/>
-          <a:ln/>
-        </p:spPr>
-        <p:txBody>
-          <a:bodyPr wrap="square" lIns="0" tIns="0" rIns="0" bIns="0" rtlCol="0" anchor="ctr"/>
-          <a:lstStyle/>
-          <a:p>
-            <a:pPr algn="ctr" indent="0" marL="0">
-              <a:buNone/>
-            </a:pPr>
-            <a:r>
-              <a:rPr lang="en-US" sz="1800" b="1" dirty="0">
-                <a:solidFill>
-                  <a:srgbClr val="0068B7"/>
-                </a:solidFill>
-                <a:latin typeface="Aptos" pitchFamily="34" charset="0"/>
-                <a:ea typeface="Aptos" pitchFamily="34" charset="-122"/>
-                <a:cs typeface="Aptos" pitchFamily="34" charset="-120"/>
-              </a:rPr>
-              <a:t>â†’</a:t>
-            </a:r>
-            <a:endParaRPr lang="en-US" sz="1800" dirty="0"/>
-          </a:p>
-        </p:txBody>
-      </p:sp>
-      <p:sp>
-        <p:nvSpPr>
-          <p:cNvPr id="19" name="Shape 17"/>
+          <p:cNvPr id="17" name="Shape 15"/>
           <p:cNvSpPr/>
           <p:nvPr/>
         </p:nvSpPr>
@@ -13085,7 +14228,7 @@
       </p:sp>
       <p:sp>
         <p:nvSpPr>
-          <p:cNvPr id="20" name="Text 18"/>
+          <p:cNvPr id="18" name="Text 16"/>
           <p:cNvSpPr/>
           <p:nvPr/>
         </p:nvSpPr>
@@ -13292,8 +14435,8 @@
         </p:nvSpPr>
         <p:spPr>
           <a:xfrm>
-            <a:off x="9966960" y="6537960"/>
-            <a:ext cx="1645920" cy="201168"/>
+            <a:off x="9646920" y="6537960"/>
+            <a:ext cx="1965960" cy="201168"/>
           </a:xfrm>
           <a:prstGeom prst="rect">
             <a:avLst/>
@@ -13317,7 +14460,7 @@
                 <a:ea typeface="Aptos" pitchFamily="34" charset="-122"/>
                 <a:cs typeface="Aptos" pitchFamily="34" charset="-120"/>
               </a:rPr>
-              <a:t>Â© Paula Soper</a:t>
+              <a:t>Copyright Paula Soper</a:t>
             </a:r>
             <a:endParaRPr lang="en-US" sz="800" dirty="0"/>
           </a:p>
@@ -13364,77 +14507,13 @@
       </p:sp>
       <p:sp>
         <p:nvSpPr>
-          <p:cNvPr id="8" name="Shape 6"/>
+          <p:cNvPr id="8" name="Text 6"/>
           <p:cNvSpPr/>
           <p:nvPr/>
         </p:nvSpPr>
         <p:spPr>
           <a:xfrm>
             <a:off x="640080" y="658368"/>
-            <a:ext cx="420624" cy="420624"/>
-          </a:xfrm>
-          <a:prstGeom prst="ellipse">
-            <a:avLst/>
-          </a:prstGeom>
-          <a:solidFill>
-            <a:srgbClr val="0068B7"/>
-          </a:solidFill>
-          <a:ln w="12700">
-            <a:solidFill>
-              <a:srgbClr val="0068B7"/>
-            </a:solidFill>
-            <a:prstDash val="solid"/>
-          </a:ln>
-        </p:spPr>
-      </p:sp>
-      <p:sp>
-        <p:nvSpPr>
-          <p:cNvPr id="9" name="Text 7"/>
-          <p:cNvSpPr/>
-          <p:nvPr/>
-        </p:nvSpPr>
-        <p:spPr>
-          <a:xfrm>
-            <a:off x="640080" y="731520"/>
-            <a:ext cx="420624" cy="164592"/>
-          </a:xfrm>
-          <a:prstGeom prst="rect">
-            <a:avLst/>
-          </a:prstGeom>
-          <a:noFill/>
-          <a:ln/>
-        </p:spPr>
-        <p:txBody>
-          <a:bodyPr wrap="square" lIns="0" tIns="0" rIns="0" bIns="0" rtlCol="0" anchor="ctr"/>
-          <a:lstStyle/>
-          <a:p>
-            <a:pPr algn="ctr" indent="0" marL="0">
-              <a:buNone/>
-            </a:pPr>
-            <a:r>
-              <a:rPr lang="en-US" sz="1100" b="1" dirty="0">
-                <a:solidFill>
-                  <a:srgbClr val="FFFFFF"/>
-                </a:solidFill>
-                <a:latin typeface="Aptos" pitchFamily="34" charset="0"/>
-                <a:ea typeface="Aptos" pitchFamily="34" charset="-122"/>
-                <a:cs typeface="Aptos" pitchFamily="34" charset="-120"/>
-              </a:rPr>
-              <a:t>1</a:t>
-            </a:r>
-            <a:endParaRPr lang="en-US" sz="1100" dirty="0"/>
-          </a:p>
-        </p:txBody>
-      </p:sp>
-      <p:sp>
-        <p:nvSpPr>
-          <p:cNvPr id="10" name="Text 8"/>
-          <p:cNvSpPr/>
-          <p:nvPr/>
-        </p:nvSpPr>
-        <p:spPr>
-          <a:xfrm>
-            <a:off x="640080" y="621792"/>
             <a:ext cx="10881360" cy="713232"/>
           </a:xfrm>
           <a:prstGeom prst="rect">
@@ -13469,14 +14548,14 @@
       </p:sp>
       <p:sp>
         <p:nvSpPr>
-          <p:cNvPr id="11" name="Text 9"/>
+          <p:cNvPr id="9" name="Text 7"/>
           <p:cNvSpPr/>
           <p:nvPr/>
         </p:nvSpPr>
         <p:spPr>
           <a:xfrm>
             <a:off x="868680" y="1508760"/>
-            <a:ext cx="6537960" cy="4160520"/>
+            <a:ext cx="6309360" cy="4160520"/>
           </a:xfrm>
           <a:prstGeom prst="rect">
             <a:avLst/>
@@ -13535,18 +14614,18 @@
       </p:sp>
       <p:sp>
         <p:nvSpPr>
-          <p:cNvPr id="12" name="Shape 10"/>
-          <p:cNvSpPr/>
-          <p:nvPr/>
-        </p:nvSpPr>
-        <p:spPr>
-          <a:xfrm>
-            <a:off x="7909560" y="1417320"/>
-            <a:ext cx="3154680" cy="1828800"/>
+          <p:cNvPr id="10" name="Shape 8"/>
+          <p:cNvSpPr/>
+          <p:nvPr/>
+        </p:nvSpPr>
+        <p:spPr>
+          <a:xfrm>
+            <a:off x="7635240" y="1325880"/>
+            <a:ext cx="3474720" cy="1325880"/>
           </a:xfrm>
           <a:prstGeom prst="roundRect">
             <a:avLst>
-              <a:gd name="adj" fmla="val 6000"/>
+              <a:gd name="adj" fmla="val 8276"/>
             </a:avLst>
           </a:prstGeom>
           <a:solidFill>
@@ -13562,14 +14641,14 @@
       </p:sp>
       <p:sp>
         <p:nvSpPr>
-          <p:cNvPr id="13" name="Text 11"/>
-          <p:cNvSpPr/>
-          <p:nvPr/>
-        </p:nvSpPr>
-        <p:spPr>
-          <a:xfrm>
-            <a:off x="8074152" y="1563624"/>
-            <a:ext cx="2825496" cy="256032"/>
+          <p:cNvPr id="11" name="Text 9"/>
+          <p:cNvSpPr/>
+          <p:nvPr/>
+        </p:nvSpPr>
+        <p:spPr>
+          <a:xfrm>
+            <a:off x="7799832" y="1472184"/>
+            <a:ext cx="3145536" cy="256032"/>
           </a:xfrm>
           <a:prstGeom prst="rect">
             <a:avLst/>
@@ -13593,7 +14672,7 @@
                 <a:ea typeface="Aptos" pitchFamily="34" charset="-122"/>
                 <a:cs typeface="Aptos" pitchFamily="34" charset="-120"/>
               </a:rPr>
-              <a:t>Key idea</a:t>
+              <a:t>Practice focus</a:t>
             </a:r>
             <a:endParaRPr lang="en-US" sz="1300" dirty="0"/>
           </a:p>
@@ -13601,14 +14680,14 @@
       </p:sp>
       <p:sp>
         <p:nvSpPr>
-          <p:cNvPr id="14" name="Text 12"/>
-          <p:cNvSpPr/>
-          <p:nvPr/>
-        </p:nvSpPr>
-        <p:spPr>
-          <a:xfrm>
-            <a:off x="8074152" y="1920240"/>
-            <a:ext cx="2825496" cy="1188720"/>
+          <p:cNvPr id="12" name="Text 10"/>
+          <p:cNvSpPr/>
+          <p:nvPr/>
+        </p:nvSpPr>
+        <p:spPr>
+          <a:xfrm>
+            <a:off x="7799832" y="1828800"/>
+            <a:ext cx="3145536" cy="685800"/>
           </a:xfrm>
           <a:prstGeom prst="rect">
             <a:avLst/>
@@ -13642,18 +14721,159 @@
       </p:sp>
       <p:sp>
         <p:nvSpPr>
-          <p:cNvPr id="15" name="Shape 13"/>
-          <p:cNvSpPr/>
-          <p:nvPr/>
-        </p:nvSpPr>
-        <p:spPr>
-          <a:xfrm>
-            <a:off x="7909560" y="3520440"/>
-            <a:ext cx="3154680" cy="1737360"/>
+          <p:cNvPr id="13" name="Shape 11"/>
+          <p:cNvSpPr/>
+          <p:nvPr/>
+        </p:nvSpPr>
+        <p:spPr>
+          <a:xfrm>
+            <a:off x="7635240" y="2788920"/>
+            <a:ext cx="3474720" cy="1536192"/>
           </a:xfrm>
           <a:prstGeom prst="roundRect">
             <a:avLst>
-              <a:gd name="adj" fmla="val 6316"/>
+              <a:gd name="adj" fmla="val 7143"/>
+            </a:avLst>
+          </a:prstGeom>
+          <a:solidFill>
+            <a:srgbClr val="FFFFFF">
+              <a:alpha val="88000"/>
+            </a:srgbClr>
+          </a:solidFill>
+          <a:ln w="12700">
+            <a:solidFill>
+              <a:srgbClr val="D6E8F2"/>
+            </a:solidFill>
+            <a:prstDash val="solid"/>
+          </a:ln>
+        </p:spPr>
+      </p:sp>
+      <p:sp>
+        <p:nvSpPr>
+          <p:cNvPr id="14" name="Shape 12"/>
+          <p:cNvSpPr/>
+          <p:nvPr/>
+        </p:nvSpPr>
+        <p:spPr>
+          <a:xfrm>
+            <a:off x="8074152" y="3291840"/>
+            <a:ext cx="2596896" cy="749808"/>
+          </a:xfrm>
+          <a:prstGeom prst="rect">
+            <a:avLst/>
+          </a:prstGeom>
+          <a:solidFill>
+            <a:srgbClr val="EAF6F8"/>
+          </a:solidFill>
+          <a:ln w="12700">
+            <a:solidFill>
+              <a:srgbClr val="8ABBD8"/>
+            </a:solidFill>
+            <a:prstDash val="solid"/>
+          </a:ln>
+        </p:spPr>
+      </p:sp>
+      <p:sp>
+        <p:nvSpPr>
+          <p:cNvPr id="15" name="Shape 13"/>
+          <p:cNvSpPr/>
+          <p:nvPr/>
+        </p:nvSpPr>
+        <p:spPr>
+          <a:xfrm>
+            <a:off x="8202168" y="3721608"/>
+            <a:ext cx="2340864" cy="0"/>
+          </a:xfrm>
+          <a:prstGeom prst="line">
+            <a:avLst/>
+          </a:prstGeom>
+          <a:noFill/>
+          <a:ln w="19050">
+            <a:solidFill>
+              <a:srgbClr val="0068B7"/>
+            </a:solidFill>
+            <a:prstDash val="solid"/>
+          </a:ln>
+        </p:spPr>
+      </p:sp>
+      <p:sp>
+        <p:nvSpPr>
+          <p:cNvPr id="16" name="Shape 14"/>
+          <p:cNvSpPr/>
+          <p:nvPr/>
+        </p:nvSpPr>
+        <p:spPr>
+          <a:xfrm>
+            <a:off x="9198864" y="4206240"/>
+            <a:ext cx="347472" cy="347472"/>
+          </a:xfrm>
+          <a:prstGeom prst="ellipse">
+            <a:avLst/>
+          </a:prstGeom>
+          <a:solidFill>
+            <a:srgbClr val="2F8A28"/>
+          </a:solidFill>
+          <a:ln w="12700">
+            <a:solidFill>
+              <a:srgbClr val="2F8A28"/>
+            </a:solidFill>
+            <a:prstDash val="solid"/>
+          </a:ln>
+        </p:spPr>
+      </p:sp>
+      <p:sp>
+        <p:nvSpPr>
+          <p:cNvPr id="17" name="Text 15"/>
+          <p:cNvSpPr/>
+          <p:nvPr/>
+        </p:nvSpPr>
+        <p:spPr>
+          <a:xfrm>
+            <a:off x="7909560" y="3977640"/>
+            <a:ext cx="2926080" cy="182880"/>
+          </a:xfrm>
+          <a:prstGeom prst="rect">
+            <a:avLst/>
+          </a:prstGeom>
+          <a:noFill/>
+          <a:ln/>
+        </p:spPr>
+        <p:txBody>
+          <a:bodyPr wrap="square" lIns="0" tIns="0" rIns="0" bIns="0" rtlCol="0" anchor="ctr"/>
+          <a:lstStyle/>
+          <a:p>
+            <a:pPr algn="ctr" indent="0" marL="0">
+              <a:buNone/>
+            </a:pPr>
+            <a:r>
+              <a:rPr lang="en-US" sz="1000" dirty="0">
+                <a:solidFill>
+                  <a:srgbClr val="003A63"/>
+                </a:solidFill>
+                <a:latin typeface="Aptos" pitchFamily="34" charset="0"/>
+                <a:ea typeface="Aptos" pitchFamily="34" charset="-122"/>
+                <a:cs typeface="Aptos" pitchFamily="34" charset="-120"/>
+              </a:rPr>
+              <a:t>Concept to action</a:t>
+            </a:r>
+            <a:endParaRPr lang="en-US" sz="1000" dirty="0"/>
+          </a:p>
+        </p:txBody>
+      </p:sp>
+      <p:sp>
+        <p:nvSpPr>
+          <p:cNvPr id="18" name="Shape 16"/>
+          <p:cNvSpPr/>
+          <p:nvPr/>
+        </p:nvSpPr>
+        <p:spPr>
+          <a:xfrm>
+            <a:off x="7635240" y="4498848"/>
+            <a:ext cx="3474720" cy="1143000"/>
+          </a:xfrm>
+          <a:prstGeom prst="roundRect">
+            <a:avLst>
+              <a:gd name="adj" fmla="val 9600"/>
             </a:avLst>
           </a:prstGeom>
           <a:solidFill>
@@ -13669,14 +14889,14 @@
       </p:sp>
       <p:sp>
         <p:nvSpPr>
-          <p:cNvPr id="16" name="Text 14"/>
-          <p:cNvSpPr/>
-          <p:nvPr/>
-        </p:nvSpPr>
-        <p:spPr>
-          <a:xfrm>
-            <a:off x="8074152" y="3666744"/>
-            <a:ext cx="2825496" cy="256032"/>
+          <p:cNvPr id="19" name="Text 17"/>
+          <p:cNvSpPr/>
+          <p:nvPr/>
+        </p:nvSpPr>
+        <p:spPr>
+          <a:xfrm>
+            <a:off x="7799832" y="4645152"/>
+            <a:ext cx="3145536" cy="256032"/>
           </a:xfrm>
           <a:prstGeom prst="rect">
             <a:avLst/>
@@ -13700,7 +14920,7 @@
                 <a:ea typeface="Aptos" pitchFamily="34" charset="-122"/>
                 <a:cs typeface="Aptos" pitchFamily="34" charset="-120"/>
               </a:rPr>
-              <a:t>Use this for</a:t>
+              <a:t>What to produce</a:t>
             </a:r>
             <a:endParaRPr lang="en-US" sz="1300" dirty="0"/>
           </a:p>
@@ -13708,14 +14928,14 @@
       </p:sp>
       <p:sp>
         <p:nvSpPr>
-          <p:cNvPr id="17" name="Text 15"/>
-          <p:cNvSpPr/>
-          <p:nvPr/>
-        </p:nvSpPr>
-        <p:spPr>
-          <a:xfrm>
-            <a:off x="8074152" y="4023360"/>
-            <a:ext cx="2825496" cy="1097280"/>
+          <p:cNvPr id="20" name="Text 18"/>
+          <p:cNvSpPr/>
+          <p:nvPr/>
+        </p:nvSpPr>
+        <p:spPr>
+          <a:xfrm>
+            <a:off x="7799832" y="5001768"/>
+            <a:ext cx="3145536" cy="502920"/>
           </a:xfrm>
           <a:prstGeom prst="rect">
             <a:avLst/>
@@ -13741,7 +14961,7 @@
                 <a:ea typeface="Aptos" pitchFamily="34" charset="-122"/>
                 <a:cs typeface="Aptos" pitchFamily="34" charset="-120"/>
               </a:rPr>
-              <a:t>Connect the concept to public health decisions, safeguards, documentation, or implementation work.</a:t>
+              <a:t>Use the assignment to test whether you can explain the concept, apply it to a realistic public health situation, and identify what would need review before the work moves forward.</a:t>
             </a:r>
             <a:endParaRPr lang="en-US" sz="1550" dirty="0"/>
           </a:p>
@@ -13915,8 +15135,8 @@
         </p:nvSpPr>
         <p:spPr>
           <a:xfrm>
-            <a:off x="9966960" y="6537960"/>
-            <a:ext cx="1645920" cy="201168"/>
+            <a:off x="9646920" y="6537960"/>
+            <a:ext cx="1965960" cy="201168"/>
           </a:xfrm>
           <a:prstGeom prst="rect">
             <a:avLst/>
@@ -13940,7 +15160,7 @@
                 <a:ea typeface="Aptos" pitchFamily="34" charset="-122"/>
                 <a:cs typeface="Aptos" pitchFamily="34" charset="-120"/>
               </a:rPr>
-              <a:t>Â© Paula Soper</a:t>
+              <a:t>Copyright Paula Soper</a:t>
             </a:r>
             <a:endParaRPr lang="en-US" sz="800" dirty="0"/>
           </a:p>
@@ -14035,7 +15255,7 @@
         <p:spPr>
           <a:xfrm>
             <a:off x="868680" y="1508760"/>
-            <a:ext cx="6537960" cy="4160520"/>
+            <a:ext cx="6309360" cy="4160520"/>
           </a:xfrm>
           <a:prstGeom prst="rect">
             <a:avLst/>
@@ -14072,12 +15292,12 @@
         </p:nvSpPr>
         <p:spPr>
           <a:xfrm>
-            <a:off x="7909560" y="1417320"/>
-            <a:ext cx="3154680" cy="1828800"/>
+            <a:off x="7635240" y="1325880"/>
+            <a:ext cx="3474720" cy="1325880"/>
           </a:xfrm>
           <a:prstGeom prst="roundRect">
             <a:avLst>
-              <a:gd name="adj" fmla="val 6000"/>
+              <a:gd name="adj" fmla="val 8276"/>
             </a:avLst>
           </a:prstGeom>
           <a:solidFill>
@@ -14099,8 +15319,8 @@
         </p:nvSpPr>
         <p:spPr>
           <a:xfrm>
-            <a:off x="8074152" y="1563624"/>
-            <a:ext cx="2825496" cy="256032"/>
+            <a:off x="7799832" y="1472184"/>
+            <a:ext cx="3145536" cy="256032"/>
           </a:xfrm>
           <a:prstGeom prst="rect">
             <a:avLst/>
@@ -14124,7 +15344,7 @@
                 <a:ea typeface="Aptos" pitchFamily="34" charset="-122"/>
                 <a:cs typeface="Aptos" pitchFamily="34" charset="-120"/>
               </a:rPr>
-              <a:t>Key idea</a:t>
+              <a:t>Practice focus</a:t>
             </a:r>
             <a:endParaRPr lang="en-US" sz="1300" dirty="0"/>
           </a:p>
@@ -14138,8 +15358,8 @@
         </p:nvSpPr>
         <p:spPr>
           <a:xfrm>
-            <a:off x="8074152" y="1920240"/>
-            <a:ext cx="2825496" cy="1188720"/>
+            <a:off x="7799832" y="1828800"/>
+            <a:ext cx="3145536" cy="685800"/>
           </a:xfrm>
           <a:prstGeom prst="rect">
             <a:avLst/>
@@ -14179,12 +15399,153 @@
         </p:nvSpPr>
         <p:spPr>
           <a:xfrm>
-            <a:off x="7909560" y="3520440"/>
-            <a:ext cx="3154680" cy="1737360"/>
+            <a:off x="7635240" y="2788920"/>
+            <a:ext cx="3474720" cy="1536192"/>
           </a:xfrm>
           <a:prstGeom prst="roundRect">
             <a:avLst>
-              <a:gd name="adj" fmla="val 6316"/>
+              <a:gd name="adj" fmla="val 7143"/>
+            </a:avLst>
+          </a:prstGeom>
+          <a:solidFill>
+            <a:srgbClr val="FFFFFF">
+              <a:alpha val="88000"/>
+            </a:srgbClr>
+          </a:solidFill>
+          <a:ln w="12700">
+            <a:solidFill>
+              <a:srgbClr val="D6E8F2"/>
+            </a:solidFill>
+            <a:prstDash val="solid"/>
+          </a:ln>
+        </p:spPr>
+      </p:sp>
+      <p:sp>
+        <p:nvSpPr>
+          <p:cNvPr id="14" name="Shape 12"/>
+          <p:cNvSpPr/>
+          <p:nvPr/>
+        </p:nvSpPr>
+        <p:spPr>
+          <a:xfrm>
+            <a:off x="8074152" y="3291840"/>
+            <a:ext cx="2596896" cy="749808"/>
+          </a:xfrm>
+          <a:prstGeom prst="rect">
+            <a:avLst/>
+          </a:prstGeom>
+          <a:solidFill>
+            <a:srgbClr val="EAF6F8"/>
+          </a:solidFill>
+          <a:ln w="12700">
+            <a:solidFill>
+              <a:srgbClr val="8ABBD8"/>
+            </a:solidFill>
+            <a:prstDash val="solid"/>
+          </a:ln>
+        </p:spPr>
+      </p:sp>
+      <p:sp>
+        <p:nvSpPr>
+          <p:cNvPr id="15" name="Shape 13"/>
+          <p:cNvSpPr/>
+          <p:nvPr/>
+        </p:nvSpPr>
+        <p:spPr>
+          <a:xfrm>
+            <a:off x="8202168" y="3721608"/>
+            <a:ext cx="2340864" cy="0"/>
+          </a:xfrm>
+          <a:prstGeom prst="line">
+            <a:avLst/>
+          </a:prstGeom>
+          <a:noFill/>
+          <a:ln w="19050">
+            <a:solidFill>
+              <a:srgbClr val="0068B7"/>
+            </a:solidFill>
+            <a:prstDash val="solid"/>
+          </a:ln>
+        </p:spPr>
+      </p:sp>
+      <p:sp>
+        <p:nvSpPr>
+          <p:cNvPr id="16" name="Shape 14"/>
+          <p:cNvSpPr/>
+          <p:nvPr/>
+        </p:nvSpPr>
+        <p:spPr>
+          <a:xfrm>
+            <a:off x="9198864" y="4206240"/>
+            <a:ext cx="347472" cy="347472"/>
+          </a:xfrm>
+          <a:prstGeom prst="ellipse">
+            <a:avLst/>
+          </a:prstGeom>
+          <a:solidFill>
+            <a:srgbClr val="2F8A28"/>
+          </a:solidFill>
+          <a:ln w="12700">
+            <a:solidFill>
+              <a:srgbClr val="2F8A28"/>
+            </a:solidFill>
+            <a:prstDash val="solid"/>
+          </a:ln>
+        </p:spPr>
+      </p:sp>
+      <p:sp>
+        <p:nvSpPr>
+          <p:cNvPr id="17" name="Text 15"/>
+          <p:cNvSpPr/>
+          <p:nvPr/>
+        </p:nvSpPr>
+        <p:spPr>
+          <a:xfrm>
+            <a:off x="7909560" y="3977640"/>
+            <a:ext cx="2926080" cy="182880"/>
+          </a:xfrm>
+          <a:prstGeom prst="rect">
+            <a:avLst/>
+          </a:prstGeom>
+          <a:noFill/>
+          <a:ln/>
+        </p:spPr>
+        <p:txBody>
+          <a:bodyPr wrap="square" lIns="0" tIns="0" rIns="0" bIns="0" rtlCol="0" anchor="ctr"/>
+          <a:lstStyle/>
+          <a:p>
+            <a:pPr algn="ctr" indent="0" marL="0">
+              <a:buNone/>
+            </a:pPr>
+            <a:r>
+              <a:rPr lang="en-US" sz="1000" dirty="0">
+                <a:solidFill>
+                  <a:srgbClr val="003A63"/>
+                </a:solidFill>
+                <a:latin typeface="Aptos" pitchFamily="34" charset="0"/>
+                <a:ea typeface="Aptos" pitchFamily="34" charset="-122"/>
+                <a:cs typeface="Aptos" pitchFamily="34" charset="-120"/>
+              </a:rPr>
+              <a:t>Concept to action</a:t>
+            </a:r>
+            <a:endParaRPr lang="en-US" sz="1000" dirty="0"/>
+          </a:p>
+        </p:txBody>
+      </p:sp>
+      <p:sp>
+        <p:nvSpPr>
+          <p:cNvPr id="18" name="Shape 16"/>
+          <p:cNvSpPr/>
+          <p:nvPr/>
+        </p:nvSpPr>
+        <p:spPr>
+          <a:xfrm>
+            <a:off x="7635240" y="4498848"/>
+            <a:ext cx="3474720" cy="1143000"/>
+          </a:xfrm>
+          <a:prstGeom prst="roundRect">
+            <a:avLst>
+              <a:gd name="adj" fmla="val 9600"/>
             </a:avLst>
           </a:prstGeom>
           <a:solidFill>
@@ -14200,14 +15561,14 @@
       </p:sp>
       <p:sp>
         <p:nvSpPr>
-          <p:cNvPr id="14" name="Text 12"/>
-          <p:cNvSpPr/>
-          <p:nvPr/>
-        </p:nvSpPr>
-        <p:spPr>
-          <a:xfrm>
-            <a:off x="8074152" y="3666744"/>
-            <a:ext cx="2825496" cy="256032"/>
+          <p:cNvPr id="19" name="Text 17"/>
+          <p:cNvSpPr/>
+          <p:nvPr/>
+        </p:nvSpPr>
+        <p:spPr>
+          <a:xfrm>
+            <a:off x="7799832" y="4645152"/>
+            <a:ext cx="3145536" cy="256032"/>
           </a:xfrm>
           <a:prstGeom prst="rect">
             <a:avLst/>
@@ -14231,7 +15592,7 @@
                 <a:ea typeface="Aptos" pitchFamily="34" charset="-122"/>
                 <a:cs typeface="Aptos" pitchFamily="34" charset="-120"/>
               </a:rPr>
-              <a:t>Use this for</a:t>
+              <a:t>What to produce</a:t>
             </a:r>
             <a:endParaRPr lang="en-US" sz="1300" dirty="0"/>
           </a:p>
@@ -14239,14 +15600,14 @@
       </p:sp>
       <p:sp>
         <p:nvSpPr>
-          <p:cNvPr id="15" name="Text 13"/>
-          <p:cNvSpPr/>
-          <p:nvPr/>
-        </p:nvSpPr>
-        <p:spPr>
-          <a:xfrm>
-            <a:off x="8074152" y="4023360"/>
-            <a:ext cx="2825496" cy="1097280"/>
+          <p:cNvPr id="20" name="Text 18"/>
+          <p:cNvSpPr/>
+          <p:nvPr/>
+        </p:nvSpPr>
+        <p:spPr>
+          <a:xfrm>
+            <a:off x="7799832" y="5001768"/>
+            <a:ext cx="3145536" cy="502920"/>
           </a:xfrm>
           <a:prstGeom prst="rect">
             <a:avLst/>
@@ -14272,7 +15633,7 @@
                 <a:ea typeface="Aptos" pitchFamily="34" charset="-122"/>
                 <a:cs typeface="Aptos" pitchFamily="34" charset="-120"/>
               </a:rPr>
-              <a:t>Connect the concept to public health decisions, safeguards, documentation, or implementation work.</a:t>
+              <a:t>Use the assignment to test whether you can explain the concept, apply it to a realistic public health situation, and identify what would need review before the work moves forward.</a:t>
             </a:r>
             <a:endParaRPr lang="en-US" sz="1550" dirty="0"/>
           </a:p>
@@ -14446,8 +15807,8 @@
         </p:nvSpPr>
         <p:spPr>
           <a:xfrm>
-            <a:off x="9966960" y="6537960"/>
-            <a:ext cx="1645920" cy="201168"/>
+            <a:off x="9646920" y="6537960"/>
+            <a:ext cx="1965960" cy="201168"/>
           </a:xfrm>
           <a:prstGeom prst="rect">
             <a:avLst/>
@@ -14471,7 +15832,7 @@
                 <a:ea typeface="Aptos" pitchFamily="34" charset="-122"/>
                 <a:cs typeface="Aptos" pitchFamily="34" charset="-120"/>
               </a:rPr>
-              <a:t>Â© Paula Soper</a:t>
+              <a:t>Copyright Paula Soper</a:t>
             </a:r>
             <a:endParaRPr lang="en-US" sz="800" dirty="0"/>
           </a:p>
@@ -14518,77 +15879,13 @@
       </p:sp>
       <p:sp>
         <p:nvSpPr>
-          <p:cNvPr id="8" name="Shape 6"/>
+          <p:cNvPr id="8" name="Text 6"/>
           <p:cNvSpPr/>
           <p:nvPr/>
         </p:nvSpPr>
         <p:spPr>
           <a:xfrm>
             <a:off x="640080" y="658368"/>
-            <a:ext cx="420624" cy="420624"/>
-          </a:xfrm>
-          <a:prstGeom prst="ellipse">
-            <a:avLst/>
-          </a:prstGeom>
-          <a:solidFill>
-            <a:srgbClr val="0068B7"/>
-          </a:solidFill>
-          <a:ln w="12700">
-            <a:solidFill>
-              <a:srgbClr val="0068B7"/>
-            </a:solidFill>
-            <a:prstDash val="solid"/>
-          </a:ln>
-        </p:spPr>
-      </p:sp>
-      <p:sp>
-        <p:nvSpPr>
-          <p:cNvPr id="9" name="Text 7"/>
-          <p:cNvSpPr/>
-          <p:nvPr/>
-        </p:nvSpPr>
-        <p:spPr>
-          <a:xfrm>
-            <a:off x="640080" y="731520"/>
-            <a:ext cx="420624" cy="164592"/>
-          </a:xfrm>
-          <a:prstGeom prst="rect">
-            <a:avLst/>
-          </a:prstGeom>
-          <a:noFill/>
-          <a:ln/>
-        </p:spPr>
-        <p:txBody>
-          <a:bodyPr wrap="square" lIns="0" tIns="0" rIns="0" bIns="0" rtlCol="0" anchor="ctr"/>
-          <a:lstStyle/>
-          <a:p>
-            <a:pPr algn="ctr" indent="0" marL="0">
-              <a:buNone/>
-            </a:pPr>
-            <a:r>
-              <a:rPr lang="en-US" sz="1100" b="1" dirty="0">
-                <a:solidFill>
-                  <a:srgbClr val="FFFFFF"/>
-                </a:solidFill>
-                <a:latin typeface="Aptos" pitchFamily="34" charset="0"/>
-                <a:ea typeface="Aptos" pitchFamily="34" charset="-122"/>
-                <a:cs typeface="Aptos" pitchFamily="34" charset="-120"/>
-              </a:rPr>
-              <a:t>2</a:t>
-            </a:r>
-            <a:endParaRPr lang="en-US" sz="1100" dirty="0"/>
-          </a:p>
-        </p:txBody>
-      </p:sp>
-      <p:sp>
-        <p:nvSpPr>
-          <p:cNvPr id="10" name="Text 8"/>
-          <p:cNvSpPr/>
-          <p:nvPr/>
-        </p:nvSpPr>
-        <p:spPr>
-          <a:xfrm>
-            <a:off x="640080" y="621792"/>
             <a:ext cx="10881360" cy="713232"/>
           </a:xfrm>
           <a:prstGeom prst="rect">
@@ -14623,14 +15920,14 @@
       </p:sp>
       <p:sp>
         <p:nvSpPr>
-          <p:cNvPr id="11" name="Text 9"/>
+          <p:cNvPr id="9" name="Text 7"/>
           <p:cNvSpPr/>
           <p:nvPr/>
         </p:nvSpPr>
         <p:spPr>
           <a:xfrm>
             <a:off x="868680" y="1508760"/>
-            <a:ext cx="6537960" cy="4160520"/>
+            <a:ext cx="6309360" cy="4160520"/>
           </a:xfrm>
           <a:prstGeom prst="rect">
             <a:avLst/>
@@ -14689,18 +15986,18 @@
       </p:sp>
       <p:sp>
         <p:nvSpPr>
-          <p:cNvPr id="12" name="Shape 10"/>
-          <p:cNvSpPr/>
-          <p:nvPr/>
-        </p:nvSpPr>
-        <p:spPr>
-          <a:xfrm>
-            <a:off x="7909560" y="1417320"/>
-            <a:ext cx="3154680" cy="1828800"/>
+          <p:cNvPr id="10" name="Shape 8"/>
+          <p:cNvSpPr/>
+          <p:nvPr/>
+        </p:nvSpPr>
+        <p:spPr>
+          <a:xfrm>
+            <a:off x="7635240" y="1325880"/>
+            <a:ext cx="3474720" cy="1325880"/>
           </a:xfrm>
           <a:prstGeom prst="roundRect">
             <a:avLst>
-              <a:gd name="adj" fmla="val 6000"/>
+              <a:gd name="adj" fmla="val 8276"/>
             </a:avLst>
           </a:prstGeom>
           <a:solidFill>
@@ -14716,14 +16013,14 @@
       </p:sp>
       <p:sp>
         <p:nvSpPr>
-          <p:cNvPr id="13" name="Text 11"/>
-          <p:cNvSpPr/>
-          <p:nvPr/>
-        </p:nvSpPr>
-        <p:spPr>
-          <a:xfrm>
-            <a:off x="8074152" y="1563624"/>
-            <a:ext cx="2825496" cy="256032"/>
+          <p:cNvPr id="11" name="Text 9"/>
+          <p:cNvSpPr/>
+          <p:nvPr/>
+        </p:nvSpPr>
+        <p:spPr>
+          <a:xfrm>
+            <a:off x="7799832" y="1472184"/>
+            <a:ext cx="3145536" cy="256032"/>
           </a:xfrm>
           <a:prstGeom prst="rect">
             <a:avLst/>
@@ -14747,7 +16044,7 @@
                 <a:ea typeface="Aptos" pitchFamily="34" charset="-122"/>
                 <a:cs typeface="Aptos" pitchFamily="34" charset="-120"/>
               </a:rPr>
-              <a:t>Key idea</a:t>
+              <a:t>Core concept</a:t>
             </a:r>
             <a:endParaRPr lang="en-US" sz="1300" dirty="0"/>
           </a:p>
@@ -14755,14 +16052,14 @@
       </p:sp>
       <p:sp>
         <p:nvSpPr>
-          <p:cNvPr id="14" name="Text 12"/>
-          <p:cNvSpPr/>
-          <p:nvPr/>
-        </p:nvSpPr>
-        <p:spPr>
-          <a:xfrm>
-            <a:off x="8074152" y="1920240"/>
-            <a:ext cx="2825496" cy="1188720"/>
+          <p:cNvPr id="12" name="Text 10"/>
+          <p:cNvSpPr/>
+          <p:nvPr/>
+        </p:nvSpPr>
+        <p:spPr>
+          <a:xfrm>
+            <a:off x="7799832" y="1828800"/>
+            <a:ext cx="3145536" cy="685800"/>
           </a:xfrm>
           <a:prstGeom prst="rect">
             <a:avLst/>
@@ -14796,18 +16093,159 @@
       </p:sp>
       <p:sp>
         <p:nvSpPr>
-          <p:cNvPr id="15" name="Shape 13"/>
-          <p:cNvSpPr/>
-          <p:nvPr/>
-        </p:nvSpPr>
-        <p:spPr>
-          <a:xfrm>
-            <a:off x="7909560" y="3520440"/>
-            <a:ext cx="3154680" cy="1737360"/>
+          <p:cNvPr id="13" name="Shape 11"/>
+          <p:cNvSpPr/>
+          <p:nvPr/>
+        </p:nvSpPr>
+        <p:spPr>
+          <a:xfrm>
+            <a:off x="7635240" y="2788920"/>
+            <a:ext cx="3474720" cy="1536192"/>
           </a:xfrm>
           <a:prstGeom prst="roundRect">
             <a:avLst>
-              <a:gd name="adj" fmla="val 6316"/>
+              <a:gd name="adj" fmla="val 7143"/>
+            </a:avLst>
+          </a:prstGeom>
+          <a:solidFill>
+            <a:srgbClr val="FFFFFF">
+              <a:alpha val="88000"/>
+            </a:srgbClr>
+          </a:solidFill>
+          <a:ln w="12700">
+            <a:solidFill>
+              <a:srgbClr val="D6E8F2"/>
+            </a:solidFill>
+            <a:prstDash val="solid"/>
+          </a:ln>
+        </p:spPr>
+      </p:sp>
+      <p:sp>
+        <p:nvSpPr>
+          <p:cNvPr id="14" name="Shape 12"/>
+          <p:cNvSpPr/>
+          <p:nvPr/>
+        </p:nvSpPr>
+        <p:spPr>
+          <a:xfrm>
+            <a:off x="8074152" y="3291840"/>
+            <a:ext cx="2596896" cy="749808"/>
+          </a:xfrm>
+          <a:prstGeom prst="rect">
+            <a:avLst/>
+          </a:prstGeom>
+          <a:solidFill>
+            <a:srgbClr val="EAF6F8"/>
+          </a:solidFill>
+          <a:ln w="12700">
+            <a:solidFill>
+              <a:srgbClr val="8ABBD8"/>
+            </a:solidFill>
+            <a:prstDash val="solid"/>
+          </a:ln>
+        </p:spPr>
+      </p:sp>
+      <p:sp>
+        <p:nvSpPr>
+          <p:cNvPr id="15" name="Shape 13"/>
+          <p:cNvSpPr/>
+          <p:nvPr/>
+        </p:nvSpPr>
+        <p:spPr>
+          <a:xfrm>
+            <a:off x="8202168" y="3721608"/>
+            <a:ext cx="2340864" cy="0"/>
+          </a:xfrm>
+          <a:prstGeom prst="line">
+            <a:avLst/>
+          </a:prstGeom>
+          <a:noFill/>
+          <a:ln w="19050">
+            <a:solidFill>
+              <a:srgbClr val="0068B7"/>
+            </a:solidFill>
+            <a:prstDash val="solid"/>
+          </a:ln>
+        </p:spPr>
+      </p:sp>
+      <p:sp>
+        <p:nvSpPr>
+          <p:cNvPr id="16" name="Shape 14"/>
+          <p:cNvSpPr/>
+          <p:nvPr/>
+        </p:nvSpPr>
+        <p:spPr>
+          <a:xfrm>
+            <a:off x="9198864" y="4206240"/>
+            <a:ext cx="347472" cy="347472"/>
+          </a:xfrm>
+          <a:prstGeom prst="ellipse">
+            <a:avLst/>
+          </a:prstGeom>
+          <a:solidFill>
+            <a:srgbClr val="2F8A28"/>
+          </a:solidFill>
+          <a:ln w="12700">
+            <a:solidFill>
+              <a:srgbClr val="2F8A28"/>
+            </a:solidFill>
+            <a:prstDash val="solid"/>
+          </a:ln>
+        </p:spPr>
+      </p:sp>
+      <p:sp>
+        <p:nvSpPr>
+          <p:cNvPr id="17" name="Text 15"/>
+          <p:cNvSpPr/>
+          <p:nvPr/>
+        </p:nvSpPr>
+        <p:spPr>
+          <a:xfrm>
+            <a:off x="7909560" y="3977640"/>
+            <a:ext cx="2926080" cy="182880"/>
+          </a:xfrm>
+          <a:prstGeom prst="rect">
+            <a:avLst/>
+          </a:prstGeom>
+          <a:noFill/>
+          <a:ln/>
+        </p:spPr>
+        <p:txBody>
+          <a:bodyPr wrap="square" lIns="0" tIns="0" rIns="0" bIns="0" rtlCol="0" anchor="ctr"/>
+          <a:lstStyle/>
+          <a:p>
+            <a:pPr algn="ctr" indent="0" marL="0">
+              <a:buNone/>
+            </a:pPr>
+            <a:r>
+              <a:rPr lang="en-US" sz="1000" dirty="0">
+                <a:solidFill>
+                  <a:srgbClr val="003A63"/>
+                </a:solidFill>
+                <a:latin typeface="Aptos" pitchFamily="34" charset="0"/>
+                <a:ea typeface="Aptos" pitchFamily="34" charset="-122"/>
+                <a:cs typeface="Aptos" pitchFamily="34" charset="-120"/>
+              </a:rPr>
+              <a:t>Concept to action</a:t>
+            </a:r>
+            <a:endParaRPr lang="en-US" sz="1000" dirty="0"/>
+          </a:p>
+        </p:txBody>
+      </p:sp>
+      <p:sp>
+        <p:nvSpPr>
+          <p:cNvPr id="18" name="Shape 16"/>
+          <p:cNvSpPr/>
+          <p:nvPr/>
+        </p:nvSpPr>
+        <p:spPr>
+          <a:xfrm>
+            <a:off x="7635240" y="4498848"/>
+            <a:ext cx="3474720" cy="1143000"/>
+          </a:xfrm>
+          <a:prstGeom prst="roundRect">
+            <a:avLst>
+              <a:gd name="adj" fmla="val 9600"/>
             </a:avLst>
           </a:prstGeom>
           <a:solidFill>
@@ -14823,14 +16261,14 @@
       </p:sp>
       <p:sp>
         <p:nvSpPr>
-          <p:cNvPr id="16" name="Text 14"/>
-          <p:cNvSpPr/>
-          <p:nvPr/>
-        </p:nvSpPr>
-        <p:spPr>
-          <a:xfrm>
-            <a:off x="8074152" y="3666744"/>
-            <a:ext cx="2825496" cy="256032"/>
+          <p:cNvPr id="19" name="Text 17"/>
+          <p:cNvSpPr/>
+          <p:nvPr/>
+        </p:nvSpPr>
+        <p:spPr>
+          <a:xfrm>
+            <a:off x="7799832" y="4645152"/>
+            <a:ext cx="3145536" cy="256032"/>
           </a:xfrm>
           <a:prstGeom prst="rect">
             <a:avLst/>
@@ -14854,7 +16292,7 @@
                 <a:ea typeface="Aptos" pitchFamily="34" charset="-122"/>
                 <a:cs typeface="Aptos" pitchFamily="34" charset="-120"/>
               </a:rPr>
-              <a:t>Use this for</a:t>
+              <a:t>Apply it</a:t>
             </a:r>
             <a:endParaRPr lang="en-US" sz="1300" dirty="0"/>
           </a:p>
@@ -14862,14 +16300,14 @@
       </p:sp>
       <p:sp>
         <p:nvSpPr>
-          <p:cNvPr id="17" name="Text 15"/>
-          <p:cNvSpPr/>
-          <p:nvPr/>
-        </p:nvSpPr>
-        <p:spPr>
-          <a:xfrm>
-            <a:off x="8074152" y="4023360"/>
-            <a:ext cx="2825496" cy="1097280"/>
+          <p:cNvPr id="20" name="Text 18"/>
+          <p:cNvSpPr/>
+          <p:nvPr/>
+        </p:nvSpPr>
+        <p:spPr>
+          <a:xfrm>
+            <a:off x="7799832" y="5001768"/>
+            <a:ext cx="3145536" cy="502920"/>
           </a:xfrm>
           <a:prstGeom prst="rect">
             <a:avLst/>
@@ -14895,7 +16333,7 @@
                 <a:ea typeface="Aptos" pitchFamily="34" charset="-122"/>
                 <a:cs typeface="Aptos" pitchFamily="34" charset="-120"/>
               </a:rPr>
-              <a:t>Connect the concept to public health decisions, safeguards, documentation, or implementation work.</a:t>
+              <a:t>Connect the concept to public health purpose, responsible use, required safeguards, documentation, and the next action a department should take.</a:t>
             </a:r>
             <a:endParaRPr lang="en-US" sz="1550" dirty="0"/>
           </a:p>
@@ -15069,8 +16507,8 @@
         </p:nvSpPr>
         <p:spPr>
           <a:xfrm>
-            <a:off x="9966960" y="6537960"/>
-            <a:ext cx="1645920" cy="201168"/>
+            <a:off x="9646920" y="6537960"/>
+            <a:ext cx="1965960" cy="201168"/>
           </a:xfrm>
           <a:prstGeom prst="rect">
             <a:avLst/>
@@ -15094,7 +16532,7 @@
                 <a:ea typeface="Aptos" pitchFamily="34" charset="-122"/>
                 <a:cs typeface="Aptos" pitchFamily="34" charset="-120"/>
               </a:rPr>
-              <a:t>Â© Paula Soper</a:t>
+              <a:t>Copyright Paula Soper</a:t>
             </a:r>
             <a:endParaRPr lang="en-US" sz="800" dirty="0"/>
           </a:p>
@@ -15141,77 +16579,13 @@
       </p:sp>
       <p:sp>
         <p:nvSpPr>
-          <p:cNvPr id="8" name="Shape 6"/>
+          <p:cNvPr id="8" name="Text 6"/>
           <p:cNvSpPr/>
           <p:nvPr/>
         </p:nvSpPr>
         <p:spPr>
           <a:xfrm>
             <a:off x="640080" y="658368"/>
-            <a:ext cx="420624" cy="420624"/>
-          </a:xfrm>
-          <a:prstGeom prst="ellipse">
-            <a:avLst/>
-          </a:prstGeom>
-          <a:solidFill>
-            <a:srgbClr val="0068B7"/>
-          </a:solidFill>
-          <a:ln w="12700">
-            <a:solidFill>
-              <a:srgbClr val="0068B7"/>
-            </a:solidFill>
-            <a:prstDash val="solid"/>
-          </a:ln>
-        </p:spPr>
-      </p:sp>
-      <p:sp>
-        <p:nvSpPr>
-          <p:cNvPr id="9" name="Text 7"/>
-          <p:cNvSpPr/>
-          <p:nvPr/>
-        </p:nvSpPr>
-        <p:spPr>
-          <a:xfrm>
-            <a:off x="640080" y="731520"/>
-            <a:ext cx="420624" cy="164592"/>
-          </a:xfrm>
-          <a:prstGeom prst="rect">
-            <a:avLst/>
-          </a:prstGeom>
-          <a:noFill/>
-          <a:ln/>
-        </p:spPr>
-        <p:txBody>
-          <a:bodyPr wrap="square" lIns="0" tIns="0" rIns="0" bIns="0" rtlCol="0" anchor="ctr"/>
-          <a:lstStyle/>
-          <a:p>
-            <a:pPr algn="ctr" indent="0" marL="0">
-              <a:buNone/>
-            </a:pPr>
-            <a:r>
-              <a:rPr lang="en-US" sz="1100" b="1" dirty="0">
-                <a:solidFill>
-                  <a:srgbClr val="FFFFFF"/>
-                </a:solidFill>
-                <a:latin typeface="Aptos" pitchFamily="34" charset="0"/>
-                <a:ea typeface="Aptos" pitchFamily="34" charset="-122"/>
-                <a:cs typeface="Aptos" pitchFamily="34" charset="-120"/>
-              </a:rPr>
-              <a:t>3</a:t>
-            </a:r>
-            <a:endParaRPr lang="en-US" sz="1100" dirty="0"/>
-          </a:p>
-        </p:txBody>
-      </p:sp>
-      <p:sp>
-        <p:nvSpPr>
-          <p:cNvPr id="10" name="Text 8"/>
-          <p:cNvSpPr/>
-          <p:nvPr/>
-        </p:nvSpPr>
-        <p:spPr>
-          <a:xfrm>
-            <a:off x="640080" y="621792"/>
             <a:ext cx="10881360" cy="713232"/>
           </a:xfrm>
           <a:prstGeom prst="rect">
@@ -15246,14 +16620,14 @@
       </p:sp>
       <p:sp>
         <p:nvSpPr>
-          <p:cNvPr id="11" name="Text 9"/>
+          <p:cNvPr id="9" name="Text 7"/>
           <p:cNvSpPr/>
           <p:nvPr/>
         </p:nvSpPr>
         <p:spPr>
           <a:xfrm>
             <a:off x="868680" y="1508760"/>
-            <a:ext cx="6537960" cy="4160520"/>
+            <a:ext cx="6309360" cy="4160520"/>
           </a:xfrm>
           <a:prstGeom prst="rect">
             <a:avLst/>
@@ -15312,18 +16686,18 @@
       </p:sp>
       <p:sp>
         <p:nvSpPr>
-          <p:cNvPr id="12" name="Shape 10"/>
-          <p:cNvSpPr/>
-          <p:nvPr/>
-        </p:nvSpPr>
-        <p:spPr>
-          <a:xfrm>
-            <a:off x="7909560" y="1417320"/>
-            <a:ext cx="3154680" cy="1828800"/>
+          <p:cNvPr id="10" name="Shape 8"/>
+          <p:cNvSpPr/>
+          <p:nvPr/>
+        </p:nvSpPr>
+        <p:spPr>
+          <a:xfrm>
+            <a:off x="7635240" y="1325880"/>
+            <a:ext cx="3474720" cy="1325880"/>
           </a:xfrm>
           <a:prstGeom prst="roundRect">
             <a:avLst>
-              <a:gd name="adj" fmla="val 6000"/>
+              <a:gd name="adj" fmla="val 8276"/>
             </a:avLst>
           </a:prstGeom>
           <a:solidFill>
@@ -15339,14 +16713,14 @@
       </p:sp>
       <p:sp>
         <p:nvSpPr>
-          <p:cNvPr id="13" name="Text 11"/>
-          <p:cNvSpPr/>
-          <p:nvPr/>
-        </p:nvSpPr>
-        <p:spPr>
-          <a:xfrm>
-            <a:off x="8074152" y="1563624"/>
-            <a:ext cx="2825496" cy="256032"/>
+          <p:cNvPr id="11" name="Text 9"/>
+          <p:cNvSpPr/>
+          <p:nvPr/>
+        </p:nvSpPr>
+        <p:spPr>
+          <a:xfrm>
+            <a:off x="7799832" y="1472184"/>
+            <a:ext cx="3145536" cy="256032"/>
           </a:xfrm>
           <a:prstGeom prst="rect">
             <a:avLst/>
@@ -15370,7 +16744,7 @@
                 <a:ea typeface="Aptos" pitchFamily="34" charset="-122"/>
                 <a:cs typeface="Aptos" pitchFamily="34" charset="-120"/>
               </a:rPr>
-              <a:t>Key idea</a:t>
+              <a:t>Core concept</a:t>
             </a:r>
             <a:endParaRPr lang="en-US" sz="1300" dirty="0"/>
           </a:p>
@@ -15378,14 +16752,14 @@
       </p:sp>
       <p:sp>
         <p:nvSpPr>
-          <p:cNvPr id="14" name="Text 12"/>
-          <p:cNvSpPr/>
-          <p:nvPr/>
-        </p:nvSpPr>
-        <p:spPr>
-          <a:xfrm>
-            <a:off x="8074152" y="1920240"/>
-            <a:ext cx="2825496" cy="1188720"/>
+          <p:cNvPr id="12" name="Text 10"/>
+          <p:cNvSpPr/>
+          <p:nvPr/>
+        </p:nvSpPr>
+        <p:spPr>
+          <a:xfrm>
+            <a:off x="7799832" y="1828800"/>
+            <a:ext cx="3145536" cy="685800"/>
           </a:xfrm>
           <a:prstGeom prst="rect">
             <a:avLst/>
@@ -15419,18 +16793,159 @@
       </p:sp>
       <p:sp>
         <p:nvSpPr>
-          <p:cNvPr id="15" name="Shape 13"/>
-          <p:cNvSpPr/>
-          <p:nvPr/>
-        </p:nvSpPr>
-        <p:spPr>
-          <a:xfrm>
-            <a:off x="7909560" y="3520440"/>
-            <a:ext cx="3154680" cy="1737360"/>
+          <p:cNvPr id="13" name="Shape 11"/>
+          <p:cNvSpPr/>
+          <p:nvPr/>
+        </p:nvSpPr>
+        <p:spPr>
+          <a:xfrm>
+            <a:off x="7635240" y="2788920"/>
+            <a:ext cx="3474720" cy="1536192"/>
           </a:xfrm>
           <a:prstGeom prst="roundRect">
             <a:avLst>
-              <a:gd name="adj" fmla="val 6316"/>
+              <a:gd name="adj" fmla="val 7143"/>
+            </a:avLst>
+          </a:prstGeom>
+          <a:solidFill>
+            <a:srgbClr val="FFFFFF">
+              <a:alpha val="88000"/>
+            </a:srgbClr>
+          </a:solidFill>
+          <a:ln w="12700">
+            <a:solidFill>
+              <a:srgbClr val="D6E8F2"/>
+            </a:solidFill>
+            <a:prstDash val="solid"/>
+          </a:ln>
+        </p:spPr>
+      </p:sp>
+      <p:sp>
+        <p:nvSpPr>
+          <p:cNvPr id="14" name="Shape 12"/>
+          <p:cNvSpPr/>
+          <p:nvPr/>
+        </p:nvSpPr>
+        <p:spPr>
+          <a:xfrm>
+            <a:off x="8074152" y="3291840"/>
+            <a:ext cx="2596896" cy="749808"/>
+          </a:xfrm>
+          <a:prstGeom prst="rect">
+            <a:avLst/>
+          </a:prstGeom>
+          <a:solidFill>
+            <a:srgbClr val="EAF6F8"/>
+          </a:solidFill>
+          <a:ln w="12700">
+            <a:solidFill>
+              <a:srgbClr val="8ABBD8"/>
+            </a:solidFill>
+            <a:prstDash val="solid"/>
+          </a:ln>
+        </p:spPr>
+      </p:sp>
+      <p:sp>
+        <p:nvSpPr>
+          <p:cNvPr id="15" name="Shape 13"/>
+          <p:cNvSpPr/>
+          <p:nvPr/>
+        </p:nvSpPr>
+        <p:spPr>
+          <a:xfrm>
+            <a:off x="8202168" y="3721608"/>
+            <a:ext cx="2340864" cy="0"/>
+          </a:xfrm>
+          <a:prstGeom prst="line">
+            <a:avLst/>
+          </a:prstGeom>
+          <a:noFill/>
+          <a:ln w="19050">
+            <a:solidFill>
+              <a:srgbClr val="0068B7"/>
+            </a:solidFill>
+            <a:prstDash val="solid"/>
+          </a:ln>
+        </p:spPr>
+      </p:sp>
+      <p:sp>
+        <p:nvSpPr>
+          <p:cNvPr id="16" name="Shape 14"/>
+          <p:cNvSpPr/>
+          <p:nvPr/>
+        </p:nvSpPr>
+        <p:spPr>
+          <a:xfrm>
+            <a:off x="9198864" y="4206240"/>
+            <a:ext cx="347472" cy="347472"/>
+          </a:xfrm>
+          <a:prstGeom prst="ellipse">
+            <a:avLst/>
+          </a:prstGeom>
+          <a:solidFill>
+            <a:srgbClr val="2F8A28"/>
+          </a:solidFill>
+          <a:ln w="12700">
+            <a:solidFill>
+              <a:srgbClr val="2F8A28"/>
+            </a:solidFill>
+            <a:prstDash val="solid"/>
+          </a:ln>
+        </p:spPr>
+      </p:sp>
+      <p:sp>
+        <p:nvSpPr>
+          <p:cNvPr id="17" name="Text 15"/>
+          <p:cNvSpPr/>
+          <p:nvPr/>
+        </p:nvSpPr>
+        <p:spPr>
+          <a:xfrm>
+            <a:off x="7909560" y="3977640"/>
+            <a:ext cx="2926080" cy="182880"/>
+          </a:xfrm>
+          <a:prstGeom prst="rect">
+            <a:avLst/>
+          </a:prstGeom>
+          <a:noFill/>
+          <a:ln/>
+        </p:spPr>
+        <p:txBody>
+          <a:bodyPr wrap="square" lIns="0" tIns="0" rIns="0" bIns="0" rtlCol="0" anchor="ctr"/>
+          <a:lstStyle/>
+          <a:p>
+            <a:pPr algn="ctr" indent="0" marL="0">
+              <a:buNone/>
+            </a:pPr>
+            <a:r>
+              <a:rPr lang="en-US" sz="1000" dirty="0">
+                <a:solidFill>
+                  <a:srgbClr val="003A63"/>
+                </a:solidFill>
+                <a:latin typeface="Aptos" pitchFamily="34" charset="0"/>
+                <a:ea typeface="Aptos" pitchFamily="34" charset="-122"/>
+                <a:cs typeface="Aptos" pitchFamily="34" charset="-120"/>
+              </a:rPr>
+              <a:t>Concept to action</a:t>
+            </a:r>
+            <a:endParaRPr lang="en-US" sz="1000" dirty="0"/>
+          </a:p>
+        </p:txBody>
+      </p:sp>
+      <p:sp>
+        <p:nvSpPr>
+          <p:cNvPr id="18" name="Shape 16"/>
+          <p:cNvSpPr/>
+          <p:nvPr/>
+        </p:nvSpPr>
+        <p:spPr>
+          <a:xfrm>
+            <a:off x="7635240" y="4498848"/>
+            <a:ext cx="3474720" cy="1143000"/>
+          </a:xfrm>
+          <a:prstGeom prst="roundRect">
+            <a:avLst>
+              <a:gd name="adj" fmla="val 9600"/>
             </a:avLst>
           </a:prstGeom>
           <a:solidFill>
@@ -15446,14 +16961,14 @@
       </p:sp>
       <p:sp>
         <p:nvSpPr>
-          <p:cNvPr id="16" name="Text 14"/>
-          <p:cNvSpPr/>
-          <p:nvPr/>
-        </p:nvSpPr>
-        <p:spPr>
-          <a:xfrm>
-            <a:off x="8074152" y="3666744"/>
-            <a:ext cx="2825496" cy="256032"/>
+          <p:cNvPr id="19" name="Text 17"/>
+          <p:cNvSpPr/>
+          <p:nvPr/>
+        </p:nvSpPr>
+        <p:spPr>
+          <a:xfrm>
+            <a:off x="7799832" y="4645152"/>
+            <a:ext cx="3145536" cy="256032"/>
           </a:xfrm>
           <a:prstGeom prst="rect">
             <a:avLst/>
@@ -15477,7 +16992,7 @@
                 <a:ea typeface="Aptos" pitchFamily="34" charset="-122"/>
                 <a:cs typeface="Aptos" pitchFamily="34" charset="-120"/>
               </a:rPr>
-              <a:t>Use this for</a:t>
+              <a:t>Apply it</a:t>
             </a:r>
             <a:endParaRPr lang="en-US" sz="1300" dirty="0"/>
           </a:p>
@@ -15485,14 +17000,14 @@
       </p:sp>
       <p:sp>
         <p:nvSpPr>
-          <p:cNvPr id="17" name="Text 15"/>
-          <p:cNvSpPr/>
-          <p:nvPr/>
-        </p:nvSpPr>
-        <p:spPr>
-          <a:xfrm>
-            <a:off x="8074152" y="4023360"/>
-            <a:ext cx="2825496" cy="1097280"/>
+          <p:cNvPr id="20" name="Text 18"/>
+          <p:cNvSpPr/>
+          <p:nvPr/>
+        </p:nvSpPr>
+        <p:spPr>
+          <a:xfrm>
+            <a:off x="7799832" y="5001768"/>
+            <a:ext cx="3145536" cy="502920"/>
           </a:xfrm>
           <a:prstGeom prst="rect">
             <a:avLst/>
@@ -15518,7 +17033,7 @@
                 <a:ea typeface="Aptos" pitchFamily="34" charset="-122"/>
                 <a:cs typeface="Aptos" pitchFamily="34" charset="-120"/>
               </a:rPr>
-              <a:t>Connect the concept to public health decisions, safeguards, documentation, or implementation work.</a:t>
+              <a:t>Connect the concept to public health purpose, responsible use, required safeguards, documentation, and the next action a department should take.</a:t>
             </a:r>
             <a:endParaRPr lang="en-US" sz="1550" dirty="0"/>
           </a:p>
@@ -15692,8 +17207,8 @@
         </p:nvSpPr>
         <p:spPr>
           <a:xfrm>
-            <a:off x="9966960" y="6537960"/>
-            <a:ext cx="1645920" cy="201168"/>
+            <a:off x="9646920" y="6537960"/>
+            <a:ext cx="1965960" cy="201168"/>
           </a:xfrm>
           <a:prstGeom prst="rect">
             <a:avLst/>
@@ -15717,7 +17232,7 @@
                 <a:ea typeface="Aptos" pitchFamily="34" charset="-122"/>
                 <a:cs typeface="Aptos" pitchFamily="34" charset="-120"/>
               </a:rPr>
-              <a:t>Â© Paula Soper</a:t>
+              <a:t>Copyright Paula Soper</a:t>
             </a:r>
             <a:endParaRPr lang="en-US" sz="800" dirty="0"/>
           </a:p>
@@ -15764,77 +17279,13 @@
       </p:sp>
       <p:sp>
         <p:nvSpPr>
-          <p:cNvPr id="8" name="Shape 6"/>
+          <p:cNvPr id="8" name="Text 6"/>
           <p:cNvSpPr/>
           <p:nvPr/>
         </p:nvSpPr>
         <p:spPr>
           <a:xfrm>
             <a:off x="640080" y="658368"/>
-            <a:ext cx="420624" cy="420624"/>
-          </a:xfrm>
-          <a:prstGeom prst="ellipse">
-            <a:avLst/>
-          </a:prstGeom>
-          <a:solidFill>
-            <a:srgbClr val="0068B7"/>
-          </a:solidFill>
-          <a:ln w="12700">
-            <a:solidFill>
-              <a:srgbClr val="0068B7"/>
-            </a:solidFill>
-            <a:prstDash val="solid"/>
-          </a:ln>
-        </p:spPr>
-      </p:sp>
-      <p:sp>
-        <p:nvSpPr>
-          <p:cNvPr id="9" name="Text 7"/>
-          <p:cNvSpPr/>
-          <p:nvPr/>
-        </p:nvSpPr>
-        <p:spPr>
-          <a:xfrm>
-            <a:off x="640080" y="731520"/>
-            <a:ext cx="420624" cy="164592"/>
-          </a:xfrm>
-          <a:prstGeom prst="rect">
-            <a:avLst/>
-          </a:prstGeom>
-          <a:noFill/>
-          <a:ln/>
-        </p:spPr>
-        <p:txBody>
-          <a:bodyPr wrap="square" lIns="0" tIns="0" rIns="0" bIns="0" rtlCol="0" anchor="ctr"/>
-          <a:lstStyle/>
-          <a:p>
-            <a:pPr algn="ctr" indent="0" marL="0">
-              <a:buNone/>
-            </a:pPr>
-            <a:r>
-              <a:rPr lang="en-US" sz="1100" b="1" dirty="0">
-                <a:solidFill>
-                  <a:srgbClr val="FFFFFF"/>
-                </a:solidFill>
-                <a:latin typeface="Aptos" pitchFamily="34" charset="0"/>
-                <a:ea typeface="Aptos" pitchFamily="34" charset="-122"/>
-                <a:cs typeface="Aptos" pitchFamily="34" charset="-120"/>
-              </a:rPr>
-              <a:t>4</a:t>
-            </a:r>
-            <a:endParaRPr lang="en-US" sz="1100" dirty="0"/>
-          </a:p>
-        </p:txBody>
-      </p:sp>
-      <p:sp>
-        <p:nvSpPr>
-          <p:cNvPr id="10" name="Text 8"/>
-          <p:cNvSpPr/>
-          <p:nvPr/>
-        </p:nvSpPr>
-        <p:spPr>
-          <a:xfrm>
-            <a:off x="640080" y="621792"/>
             <a:ext cx="10881360" cy="713232"/>
           </a:xfrm>
           <a:prstGeom prst="rect">
@@ -15869,14 +17320,14 @@
       </p:sp>
       <p:sp>
         <p:nvSpPr>
-          <p:cNvPr id="11" name="Text 9"/>
+          <p:cNvPr id="9" name="Text 7"/>
           <p:cNvSpPr/>
           <p:nvPr/>
         </p:nvSpPr>
         <p:spPr>
           <a:xfrm>
             <a:off x="868680" y="1508760"/>
-            <a:ext cx="6537960" cy="4160520"/>
+            <a:ext cx="6309360" cy="4160520"/>
           </a:xfrm>
           <a:prstGeom prst="rect">
             <a:avLst/>
@@ -15935,18 +17386,18 @@
       </p:sp>
       <p:sp>
         <p:nvSpPr>
-          <p:cNvPr id="12" name="Shape 10"/>
-          <p:cNvSpPr/>
-          <p:nvPr/>
-        </p:nvSpPr>
-        <p:spPr>
-          <a:xfrm>
-            <a:off x="7909560" y="1417320"/>
-            <a:ext cx="3154680" cy="1828800"/>
+          <p:cNvPr id="10" name="Shape 8"/>
+          <p:cNvSpPr/>
+          <p:nvPr/>
+        </p:nvSpPr>
+        <p:spPr>
+          <a:xfrm>
+            <a:off x="7635240" y="1325880"/>
+            <a:ext cx="3474720" cy="1325880"/>
           </a:xfrm>
           <a:prstGeom prst="roundRect">
             <a:avLst>
-              <a:gd name="adj" fmla="val 6000"/>
+              <a:gd name="adj" fmla="val 8276"/>
             </a:avLst>
           </a:prstGeom>
           <a:solidFill>
@@ -15962,14 +17413,14 @@
       </p:sp>
       <p:sp>
         <p:nvSpPr>
-          <p:cNvPr id="13" name="Text 11"/>
-          <p:cNvSpPr/>
-          <p:nvPr/>
-        </p:nvSpPr>
-        <p:spPr>
-          <a:xfrm>
-            <a:off x="8074152" y="1563624"/>
-            <a:ext cx="2825496" cy="256032"/>
+          <p:cNvPr id="11" name="Text 9"/>
+          <p:cNvSpPr/>
+          <p:nvPr/>
+        </p:nvSpPr>
+        <p:spPr>
+          <a:xfrm>
+            <a:off x="7799832" y="1472184"/>
+            <a:ext cx="3145536" cy="256032"/>
           </a:xfrm>
           <a:prstGeom prst="rect">
             <a:avLst/>
@@ -15993,7 +17444,7 @@
                 <a:ea typeface="Aptos" pitchFamily="34" charset="-122"/>
                 <a:cs typeface="Aptos" pitchFamily="34" charset="-120"/>
               </a:rPr>
-              <a:t>Key idea</a:t>
+              <a:t>Core concept</a:t>
             </a:r>
             <a:endParaRPr lang="en-US" sz="1300" dirty="0"/>
           </a:p>
@@ -16001,14 +17452,14 @@
       </p:sp>
       <p:sp>
         <p:nvSpPr>
-          <p:cNvPr id="14" name="Text 12"/>
-          <p:cNvSpPr/>
-          <p:nvPr/>
-        </p:nvSpPr>
-        <p:spPr>
-          <a:xfrm>
-            <a:off x="8074152" y="1920240"/>
-            <a:ext cx="2825496" cy="1188720"/>
+          <p:cNvPr id="12" name="Text 10"/>
+          <p:cNvSpPr/>
+          <p:nvPr/>
+        </p:nvSpPr>
+        <p:spPr>
+          <a:xfrm>
+            <a:off x="7799832" y="1828800"/>
+            <a:ext cx="3145536" cy="685800"/>
           </a:xfrm>
           <a:prstGeom prst="rect">
             <a:avLst/>
@@ -16042,18 +17493,159 @@
       </p:sp>
       <p:sp>
         <p:nvSpPr>
-          <p:cNvPr id="15" name="Shape 13"/>
-          <p:cNvSpPr/>
-          <p:nvPr/>
-        </p:nvSpPr>
-        <p:spPr>
-          <a:xfrm>
-            <a:off x="7909560" y="3520440"/>
-            <a:ext cx="3154680" cy="1737360"/>
+          <p:cNvPr id="13" name="Shape 11"/>
+          <p:cNvSpPr/>
+          <p:nvPr/>
+        </p:nvSpPr>
+        <p:spPr>
+          <a:xfrm>
+            <a:off x="7635240" y="2788920"/>
+            <a:ext cx="3474720" cy="1536192"/>
           </a:xfrm>
           <a:prstGeom prst="roundRect">
             <a:avLst>
-              <a:gd name="adj" fmla="val 6316"/>
+              <a:gd name="adj" fmla="val 7143"/>
+            </a:avLst>
+          </a:prstGeom>
+          <a:solidFill>
+            <a:srgbClr val="FFFFFF">
+              <a:alpha val="88000"/>
+            </a:srgbClr>
+          </a:solidFill>
+          <a:ln w="12700">
+            <a:solidFill>
+              <a:srgbClr val="D6E8F2"/>
+            </a:solidFill>
+            <a:prstDash val="solid"/>
+          </a:ln>
+        </p:spPr>
+      </p:sp>
+      <p:sp>
+        <p:nvSpPr>
+          <p:cNvPr id="14" name="Shape 12"/>
+          <p:cNvSpPr/>
+          <p:nvPr/>
+        </p:nvSpPr>
+        <p:spPr>
+          <a:xfrm>
+            <a:off x="8074152" y="3291840"/>
+            <a:ext cx="2596896" cy="749808"/>
+          </a:xfrm>
+          <a:prstGeom prst="rect">
+            <a:avLst/>
+          </a:prstGeom>
+          <a:solidFill>
+            <a:srgbClr val="EAF6F8"/>
+          </a:solidFill>
+          <a:ln w="12700">
+            <a:solidFill>
+              <a:srgbClr val="8ABBD8"/>
+            </a:solidFill>
+            <a:prstDash val="solid"/>
+          </a:ln>
+        </p:spPr>
+      </p:sp>
+      <p:sp>
+        <p:nvSpPr>
+          <p:cNvPr id="15" name="Shape 13"/>
+          <p:cNvSpPr/>
+          <p:nvPr/>
+        </p:nvSpPr>
+        <p:spPr>
+          <a:xfrm>
+            <a:off x="8202168" y="3721608"/>
+            <a:ext cx="2340864" cy="0"/>
+          </a:xfrm>
+          <a:prstGeom prst="line">
+            <a:avLst/>
+          </a:prstGeom>
+          <a:noFill/>
+          <a:ln w="19050">
+            <a:solidFill>
+              <a:srgbClr val="0068B7"/>
+            </a:solidFill>
+            <a:prstDash val="solid"/>
+          </a:ln>
+        </p:spPr>
+      </p:sp>
+      <p:sp>
+        <p:nvSpPr>
+          <p:cNvPr id="16" name="Shape 14"/>
+          <p:cNvSpPr/>
+          <p:nvPr/>
+        </p:nvSpPr>
+        <p:spPr>
+          <a:xfrm>
+            <a:off x="9198864" y="4206240"/>
+            <a:ext cx="347472" cy="347472"/>
+          </a:xfrm>
+          <a:prstGeom prst="ellipse">
+            <a:avLst/>
+          </a:prstGeom>
+          <a:solidFill>
+            <a:srgbClr val="2F8A28"/>
+          </a:solidFill>
+          <a:ln w="12700">
+            <a:solidFill>
+              <a:srgbClr val="2F8A28"/>
+            </a:solidFill>
+            <a:prstDash val="solid"/>
+          </a:ln>
+        </p:spPr>
+      </p:sp>
+      <p:sp>
+        <p:nvSpPr>
+          <p:cNvPr id="17" name="Text 15"/>
+          <p:cNvSpPr/>
+          <p:nvPr/>
+        </p:nvSpPr>
+        <p:spPr>
+          <a:xfrm>
+            <a:off x="7909560" y="3977640"/>
+            <a:ext cx="2926080" cy="182880"/>
+          </a:xfrm>
+          <a:prstGeom prst="rect">
+            <a:avLst/>
+          </a:prstGeom>
+          <a:noFill/>
+          <a:ln/>
+        </p:spPr>
+        <p:txBody>
+          <a:bodyPr wrap="square" lIns="0" tIns="0" rIns="0" bIns="0" rtlCol="0" anchor="ctr"/>
+          <a:lstStyle/>
+          <a:p>
+            <a:pPr algn="ctr" indent="0" marL="0">
+              <a:buNone/>
+            </a:pPr>
+            <a:r>
+              <a:rPr lang="en-US" sz="1000" dirty="0">
+                <a:solidFill>
+                  <a:srgbClr val="003A63"/>
+                </a:solidFill>
+                <a:latin typeface="Aptos" pitchFamily="34" charset="0"/>
+                <a:ea typeface="Aptos" pitchFamily="34" charset="-122"/>
+                <a:cs typeface="Aptos" pitchFamily="34" charset="-120"/>
+              </a:rPr>
+              <a:t>Concept to action</a:t>
+            </a:r>
+            <a:endParaRPr lang="en-US" sz="1000" dirty="0"/>
+          </a:p>
+        </p:txBody>
+      </p:sp>
+      <p:sp>
+        <p:nvSpPr>
+          <p:cNvPr id="18" name="Shape 16"/>
+          <p:cNvSpPr/>
+          <p:nvPr/>
+        </p:nvSpPr>
+        <p:spPr>
+          <a:xfrm>
+            <a:off x="7635240" y="4498848"/>
+            <a:ext cx="3474720" cy="1143000"/>
+          </a:xfrm>
+          <a:prstGeom prst="roundRect">
+            <a:avLst>
+              <a:gd name="adj" fmla="val 9600"/>
             </a:avLst>
           </a:prstGeom>
           <a:solidFill>
@@ -16069,14 +17661,14 @@
       </p:sp>
       <p:sp>
         <p:nvSpPr>
-          <p:cNvPr id="16" name="Text 14"/>
-          <p:cNvSpPr/>
-          <p:nvPr/>
-        </p:nvSpPr>
-        <p:spPr>
-          <a:xfrm>
-            <a:off x="8074152" y="3666744"/>
-            <a:ext cx="2825496" cy="256032"/>
+          <p:cNvPr id="19" name="Text 17"/>
+          <p:cNvSpPr/>
+          <p:nvPr/>
+        </p:nvSpPr>
+        <p:spPr>
+          <a:xfrm>
+            <a:off x="7799832" y="4645152"/>
+            <a:ext cx="3145536" cy="256032"/>
           </a:xfrm>
           <a:prstGeom prst="rect">
             <a:avLst/>
@@ -16100,7 +17692,7 @@
                 <a:ea typeface="Aptos" pitchFamily="34" charset="-122"/>
                 <a:cs typeface="Aptos" pitchFamily="34" charset="-120"/>
               </a:rPr>
-              <a:t>Use this for</a:t>
+              <a:t>Apply it</a:t>
             </a:r>
             <a:endParaRPr lang="en-US" sz="1300" dirty="0"/>
           </a:p>
@@ -16108,14 +17700,14 @@
       </p:sp>
       <p:sp>
         <p:nvSpPr>
-          <p:cNvPr id="17" name="Text 15"/>
-          <p:cNvSpPr/>
-          <p:nvPr/>
-        </p:nvSpPr>
-        <p:spPr>
-          <a:xfrm>
-            <a:off x="8074152" y="4023360"/>
-            <a:ext cx="2825496" cy="1097280"/>
+          <p:cNvPr id="20" name="Text 18"/>
+          <p:cNvSpPr/>
+          <p:nvPr/>
+        </p:nvSpPr>
+        <p:spPr>
+          <a:xfrm>
+            <a:off x="7799832" y="5001768"/>
+            <a:ext cx="3145536" cy="502920"/>
           </a:xfrm>
           <a:prstGeom prst="rect">
             <a:avLst/>
@@ -16141,7 +17733,7 @@
                 <a:ea typeface="Aptos" pitchFamily="34" charset="-122"/>
                 <a:cs typeface="Aptos" pitchFamily="34" charset="-120"/>
               </a:rPr>
-              <a:t>Connect the concept to public health decisions, safeguards, documentation, or implementation work.</a:t>
+              <a:t>Connect the concept to public health purpose, responsible use, required safeguards, documentation, and the next action a department should take.</a:t>
             </a:r>
             <a:endParaRPr lang="en-US" sz="1550" dirty="0"/>
           </a:p>

--- a/downloads/presentations/modules/anl-340.pptx
+++ b/downloads/presentations/modules/anl-340.pptx
@@ -3524,13 +3524,11 @@
             </a:avLst>
           </a:prstGeom>
           <a:solidFill>
-            <a:srgbClr val="FFFFFF">
-              <a:alpha val="88000"/>
-            </a:srgbClr>
+            <a:srgbClr val="FFFFFF"/>
           </a:solidFill>
           <a:ln w="12700">
             <a:solidFill>
-              <a:srgbClr val="D6E8F2"/>
+              <a:srgbClr val="B9D7E6"/>
             </a:solidFill>
             <a:prstDash val="solid"/>
           </a:ln>
@@ -3538,119 +3536,112 @@
       </p:sp>
       <p:sp>
         <p:nvSpPr>
-          <p:cNvPr id="14" name="Shape 12"/>
-          <p:cNvSpPr/>
-          <p:nvPr/>
-        </p:nvSpPr>
-        <p:spPr>
-          <a:xfrm>
-            <a:off x="8074152" y="3291840"/>
-            <a:ext cx="2596896" cy="749808"/>
-          </a:xfrm>
-          <a:prstGeom prst="rect">
-            <a:avLst/>
-          </a:prstGeom>
-          <a:solidFill>
-            <a:srgbClr val="EAF6F8"/>
-          </a:solidFill>
-          <a:ln w="12700">
-            <a:solidFill>
-              <a:srgbClr val="8ABBD8"/>
-            </a:solidFill>
-            <a:prstDash val="solid"/>
-          </a:ln>
-        </p:spPr>
-      </p:sp>
-      <p:sp>
-        <p:nvSpPr>
-          <p:cNvPr id="15" name="Shape 13"/>
-          <p:cNvSpPr/>
-          <p:nvPr/>
-        </p:nvSpPr>
-        <p:spPr>
-          <a:xfrm>
-            <a:off x="8202168" y="3721608"/>
-            <a:ext cx="2340864" cy="0"/>
-          </a:xfrm>
-          <a:prstGeom prst="line">
-            <a:avLst/>
-          </a:prstGeom>
-          <a:noFill/>
-          <a:ln w="19050">
-            <a:solidFill>
-              <a:srgbClr val="0068B7"/>
-            </a:solidFill>
-            <a:prstDash val="solid"/>
-          </a:ln>
-        </p:spPr>
+          <p:cNvPr id="14" name="Text 12"/>
+          <p:cNvSpPr/>
+          <p:nvPr/>
+        </p:nvSpPr>
+        <p:spPr>
+          <a:xfrm>
+            <a:off x="7799832" y="2935224"/>
+            <a:ext cx="3145536" cy="256032"/>
+          </a:xfrm>
+          <a:prstGeom prst="rect">
+            <a:avLst/>
+          </a:prstGeom>
+          <a:noFill/>
+          <a:ln/>
+        </p:spPr>
+        <p:txBody>
+          <a:bodyPr wrap="square" lIns="0" tIns="0" rIns="0" bIns="0" rtlCol="0" anchor="ctr"/>
+          <a:lstStyle/>
+          <a:p>
+            <a:pPr indent="0" marL="0">
+              <a:buNone/>
+            </a:pPr>
+            <a:r>
+              <a:rPr lang="en-US" sz="1300" b="1" dirty="0">
+                <a:solidFill>
+                  <a:srgbClr val="0068B7"/>
+                </a:solidFill>
+                <a:latin typeface="Aptos" pitchFamily="34" charset="0"/>
+                <a:ea typeface="Aptos" pitchFamily="34" charset="-122"/>
+                <a:cs typeface="Aptos" pitchFamily="34" charset="-120"/>
+              </a:rPr>
+              <a:t>Concept checkpoints</a:t>
+            </a:r>
+            <a:endParaRPr lang="en-US" sz="1300" dirty="0"/>
+          </a:p>
+        </p:txBody>
+      </p:sp>
+      <p:sp>
+        <p:nvSpPr>
+          <p:cNvPr id="15" name="Text 13"/>
+          <p:cNvSpPr/>
+          <p:nvPr/>
+        </p:nvSpPr>
+        <p:spPr>
+          <a:xfrm>
+            <a:off x="7818120" y="3300984"/>
+            <a:ext cx="3090672" cy="877824"/>
+          </a:xfrm>
+          <a:prstGeom prst="rect">
+            <a:avLst/>
+          </a:prstGeom>
+          <a:noFill/>
+          <a:ln/>
+        </p:spPr>
+        <p:txBody>
+          <a:bodyPr wrap="square" lIns="254" tIns="254" rIns="254" bIns="254" rtlCol="0" anchor="t">
+            <a:normAutofit/>
+          </a:bodyPr>
+          <a:lstStyle/>
+          <a:p>
+            <a:r>
+              <a:rPr lang="en-US" sz="1380" dirty="0">
+                <a:solidFill>
+                  <a:srgbClr val="17364A"/>
+                </a:solidFill>
+                <a:latin typeface="Aptos" pitchFamily="34" charset="0"/>
+                <a:ea typeface="Aptos" pitchFamily="34" charset="-122"/>
+                <a:cs typeface="Aptos" pitchFamily="34" charset="-120"/>
+              </a:rPr>
+              <a:t>A local health department uses an AI model to predict which neighborhoods are likely to.</a:t>
+            </a:r>
+            <a:endParaRPr lang="en-US" sz="1380" dirty="0"/>
+          </a:p>
+          <a:p>
+            <a:r>
+              <a:rPr lang="en-US" sz="1380" dirty="0">
+                <a:solidFill>
+                  <a:srgbClr val="17364A"/>
+                </a:solidFill>
+                <a:latin typeface="Aptos" pitchFamily="34" charset="0"/>
+                <a:ea typeface="Aptos" pitchFamily="34" charset="-122"/>
+                <a:cs typeface="Aptos" pitchFamily="34" charset="-120"/>
+              </a:rPr>
+              <a:t>The model may help target outreach, but it does not prove why coverage is low or which.</a:t>
+            </a:r>
+            <a:endParaRPr lang="en-US" sz="1380" dirty="0"/>
+          </a:p>
+          <a:p>
+            <a:r>
+              <a:rPr lang="en-US" sz="1380" dirty="0">
+                <a:solidFill>
+                  <a:srgbClr val="17364A"/>
+                </a:solidFill>
+                <a:latin typeface="Aptos" pitchFamily="34" charset="0"/>
+                <a:ea typeface="Aptos" pitchFamily="34" charset="-122"/>
+                <a:cs typeface="Aptos" pitchFamily="34" charset="-120"/>
+              </a:rPr>
+              <a:t>If leaders want to know whether mobile clinics, reminder messages, school partnerships, or.</a:t>
+            </a:r>
+            <a:endParaRPr lang="en-US" sz="1380" dirty="0"/>
+          </a:p>
+        </p:txBody>
       </p:sp>
       <p:sp>
         <p:nvSpPr>
           <p:cNvPr id="16" name="Shape 14"/>
-          <p:cNvSpPr/>
-          <p:nvPr/>
-        </p:nvSpPr>
-        <p:spPr>
-          <a:xfrm>
-            <a:off x="9198864" y="4206240"/>
-            <a:ext cx="347472" cy="347472"/>
-          </a:xfrm>
-          <a:prstGeom prst="ellipse">
-            <a:avLst/>
-          </a:prstGeom>
-          <a:solidFill>
-            <a:srgbClr val="2F8A28"/>
-          </a:solidFill>
-          <a:ln w="12700">
-            <a:solidFill>
-              <a:srgbClr val="2F8A28"/>
-            </a:solidFill>
-            <a:prstDash val="solid"/>
-          </a:ln>
-        </p:spPr>
-      </p:sp>
-      <p:sp>
-        <p:nvSpPr>
-          <p:cNvPr id="17" name="Text 15"/>
-          <p:cNvSpPr/>
-          <p:nvPr/>
-        </p:nvSpPr>
-        <p:spPr>
-          <a:xfrm>
-            <a:off x="7909560" y="3977640"/>
-            <a:ext cx="2926080" cy="182880"/>
-          </a:xfrm>
-          <a:prstGeom prst="rect">
-            <a:avLst/>
-          </a:prstGeom>
-          <a:noFill/>
-          <a:ln/>
-        </p:spPr>
-        <p:txBody>
-          <a:bodyPr wrap="square" lIns="0" tIns="0" rIns="0" bIns="0" rtlCol="0" anchor="ctr"/>
-          <a:lstStyle/>
-          <a:p>
-            <a:pPr algn="ctr" indent="0" marL="0">
-              <a:buNone/>
-            </a:pPr>
-            <a:r>
-              <a:rPr lang="en-US" sz="1000" dirty="0">
-                <a:solidFill>
-                  <a:srgbClr val="003A63"/>
-                </a:solidFill>
-                <a:latin typeface="Aptos" pitchFamily="34" charset="0"/>
-                <a:ea typeface="Aptos" pitchFamily="34" charset="-122"/>
-                <a:cs typeface="Aptos" pitchFamily="34" charset="-120"/>
-              </a:rPr>
-              <a:t>Concept to action</a:t>
-            </a:r>
-            <a:endParaRPr lang="en-US" sz="1000" dirty="0"/>
-          </a:p>
-        </p:txBody>
-      </p:sp>
-      <p:sp>
-        <p:nvSpPr>
-          <p:cNvPr id="18" name="Shape 16"/>
           <p:cNvSpPr/>
           <p:nvPr/>
         </p:nvSpPr>
@@ -3677,7 +3668,7 @@
       </p:sp>
       <p:sp>
         <p:nvSpPr>
-          <p:cNvPr id="19" name="Text 17"/>
+          <p:cNvPr id="17" name="Text 15"/>
           <p:cNvSpPr/>
           <p:nvPr/>
         </p:nvSpPr>
@@ -3716,7 +3707,7 @@
       </p:sp>
       <p:sp>
         <p:nvSpPr>
-          <p:cNvPr id="20" name="Text 18"/>
+          <p:cNvPr id="18" name="Text 16"/>
           <p:cNvSpPr/>
           <p:nvPr/>
         </p:nvSpPr>
@@ -4224,13 +4215,11 @@
             </a:avLst>
           </a:prstGeom>
           <a:solidFill>
-            <a:srgbClr val="FFFFFF">
-              <a:alpha val="88000"/>
-            </a:srgbClr>
+            <a:srgbClr val="FFFFFF"/>
           </a:solidFill>
           <a:ln w="12700">
             <a:solidFill>
-              <a:srgbClr val="D6E8F2"/>
+              <a:srgbClr val="B9D7E6"/>
             </a:solidFill>
             <a:prstDash val="solid"/>
           </a:ln>
@@ -4238,119 +4227,112 @@
       </p:sp>
       <p:sp>
         <p:nvSpPr>
-          <p:cNvPr id="14" name="Shape 12"/>
-          <p:cNvSpPr/>
-          <p:nvPr/>
-        </p:nvSpPr>
-        <p:spPr>
-          <a:xfrm>
-            <a:off x="8074152" y="3291840"/>
-            <a:ext cx="2596896" cy="749808"/>
-          </a:xfrm>
-          <a:prstGeom prst="rect">
-            <a:avLst/>
-          </a:prstGeom>
-          <a:solidFill>
-            <a:srgbClr val="EAF6F8"/>
-          </a:solidFill>
-          <a:ln w="12700">
-            <a:solidFill>
-              <a:srgbClr val="8ABBD8"/>
-            </a:solidFill>
-            <a:prstDash val="solid"/>
-          </a:ln>
-        </p:spPr>
-      </p:sp>
-      <p:sp>
-        <p:nvSpPr>
-          <p:cNvPr id="15" name="Shape 13"/>
-          <p:cNvSpPr/>
-          <p:nvPr/>
-        </p:nvSpPr>
-        <p:spPr>
-          <a:xfrm>
-            <a:off x="8202168" y="3721608"/>
-            <a:ext cx="2340864" cy="0"/>
-          </a:xfrm>
-          <a:prstGeom prst="line">
-            <a:avLst/>
-          </a:prstGeom>
-          <a:noFill/>
-          <a:ln w="19050">
-            <a:solidFill>
-              <a:srgbClr val="0068B7"/>
-            </a:solidFill>
-            <a:prstDash val="solid"/>
-          </a:ln>
-        </p:spPr>
+          <p:cNvPr id="14" name="Text 12"/>
+          <p:cNvSpPr/>
+          <p:nvPr/>
+        </p:nvSpPr>
+        <p:spPr>
+          <a:xfrm>
+            <a:off x="7799832" y="2935224"/>
+            <a:ext cx="3145536" cy="256032"/>
+          </a:xfrm>
+          <a:prstGeom prst="rect">
+            <a:avLst/>
+          </a:prstGeom>
+          <a:noFill/>
+          <a:ln/>
+        </p:spPr>
+        <p:txBody>
+          <a:bodyPr wrap="square" lIns="0" tIns="0" rIns="0" bIns="0" rtlCol="0" anchor="ctr"/>
+          <a:lstStyle/>
+          <a:p>
+            <a:pPr indent="0" marL="0">
+              <a:buNone/>
+            </a:pPr>
+            <a:r>
+              <a:rPr lang="en-US" sz="1300" b="1" dirty="0">
+                <a:solidFill>
+                  <a:srgbClr val="0068B7"/>
+                </a:solidFill>
+                <a:latin typeface="Aptos" pitchFamily="34" charset="0"/>
+                <a:ea typeface="Aptos" pitchFamily="34" charset="-122"/>
+                <a:cs typeface="Aptos" pitchFamily="34" charset="-120"/>
+              </a:rPr>
+              <a:t>Concept checkpoints</a:t>
+            </a:r>
+            <a:endParaRPr lang="en-US" sz="1300" dirty="0"/>
+          </a:p>
+        </p:txBody>
+      </p:sp>
+      <p:sp>
+        <p:nvSpPr>
+          <p:cNvPr id="15" name="Text 13"/>
+          <p:cNvSpPr/>
+          <p:nvPr/>
+        </p:nvSpPr>
+        <p:spPr>
+          <a:xfrm>
+            <a:off x="7818120" y="3300984"/>
+            <a:ext cx="3090672" cy="877824"/>
+          </a:xfrm>
+          <a:prstGeom prst="rect">
+            <a:avLst/>
+          </a:prstGeom>
+          <a:noFill/>
+          <a:ln/>
+        </p:spPr>
+        <p:txBody>
+          <a:bodyPr wrap="square" lIns="254" tIns="254" rIns="254" bIns="254" rtlCol="0" anchor="t">
+            <a:normAutofit/>
+          </a:bodyPr>
+          <a:lstStyle/>
+          <a:p>
+            <a:r>
+              <a:rPr lang="en-US" sz="1380" dirty="0">
+                <a:solidFill>
+                  <a:srgbClr val="17364A"/>
+                </a:solidFill>
+                <a:latin typeface="Aptos" pitchFamily="34" charset="0"/>
+                <a:ea typeface="Aptos" pitchFamily="34" charset="-122"/>
+                <a:cs typeface="Aptos" pitchFamily="34" charset="-120"/>
+              </a:rPr>
+              <a:t>A useful structure is: among which population, what is the intervention or exposure, what.</a:t>
+            </a:r>
+            <a:endParaRPr lang="en-US" sz="1380" dirty="0"/>
+          </a:p>
+          <a:p>
+            <a:r>
+              <a:rPr lang="en-US" sz="1380" dirty="0">
+                <a:solidFill>
+                  <a:srgbClr val="17364A"/>
+                </a:solidFill>
+                <a:latin typeface="Aptos" pitchFamily="34" charset="0"/>
+                <a:ea typeface="Aptos" pitchFamily="34" charset="-122"/>
+                <a:cs typeface="Aptos" pitchFamily="34" charset="-120"/>
+              </a:rPr>
+              <a:t>Without this structure, teams may ask a model to answer a question that the available data.</a:t>
+            </a:r>
+            <a:endParaRPr lang="en-US" sz="1380" dirty="0"/>
+          </a:p>
+          <a:p>
+            <a:r>
+              <a:rPr lang="en-US" sz="1380" dirty="0">
+                <a:solidFill>
+                  <a:srgbClr val="17364A"/>
+                </a:solidFill>
+                <a:latin typeface="Aptos" pitchFamily="34" charset="0"/>
+                <a:ea typeface="Aptos" pitchFamily="34" charset="-122"/>
+                <a:cs typeface="Aptos" pitchFamily="34" charset="-120"/>
+              </a:rPr>
+              <a:t>Confounding is one of the most important threats.</a:t>
+            </a:r>
+            <a:endParaRPr lang="en-US" sz="1380" dirty="0"/>
+          </a:p>
+        </p:txBody>
       </p:sp>
       <p:sp>
         <p:nvSpPr>
           <p:cNvPr id="16" name="Shape 14"/>
-          <p:cNvSpPr/>
-          <p:nvPr/>
-        </p:nvSpPr>
-        <p:spPr>
-          <a:xfrm>
-            <a:off x="9198864" y="4206240"/>
-            <a:ext cx="347472" cy="347472"/>
-          </a:xfrm>
-          <a:prstGeom prst="ellipse">
-            <a:avLst/>
-          </a:prstGeom>
-          <a:solidFill>
-            <a:srgbClr val="2F8A28"/>
-          </a:solidFill>
-          <a:ln w="12700">
-            <a:solidFill>
-              <a:srgbClr val="2F8A28"/>
-            </a:solidFill>
-            <a:prstDash val="solid"/>
-          </a:ln>
-        </p:spPr>
-      </p:sp>
-      <p:sp>
-        <p:nvSpPr>
-          <p:cNvPr id="17" name="Text 15"/>
-          <p:cNvSpPr/>
-          <p:nvPr/>
-        </p:nvSpPr>
-        <p:spPr>
-          <a:xfrm>
-            <a:off x="7909560" y="3977640"/>
-            <a:ext cx="2926080" cy="182880"/>
-          </a:xfrm>
-          <a:prstGeom prst="rect">
-            <a:avLst/>
-          </a:prstGeom>
-          <a:noFill/>
-          <a:ln/>
-        </p:spPr>
-        <p:txBody>
-          <a:bodyPr wrap="square" lIns="0" tIns="0" rIns="0" bIns="0" rtlCol="0" anchor="ctr"/>
-          <a:lstStyle/>
-          <a:p>
-            <a:pPr algn="ctr" indent="0" marL="0">
-              <a:buNone/>
-            </a:pPr>
-            <a:r>
-              <a:rPr lang="en-US" sz="1000" dirty="0">
-                <a:solidFill>
-                  <a:srgbClr val="003A63"/>
-                </a:solidFill>
-                <a:latin typeface="Aptos" pitchFamily="34" charset="0"/>
-                <a:ea typeface="Aptos" pitchFamily="34" charset="-122"/>
-                <a:cs typeface="Aptos" pitchFamily="34" charset="-120"/>
-              </a:rPr>
-              <a:t>Concept to action</a:t>
-            </a:r>
-            <a:endParaRPr lang="en-US" sz="1000" dirty="0"/>
-          </a:p>
-        </p:txBody>
-      </p:sp>
-      <p:sp>
-        <p:nvSpPr>
-          <p:cNvPr id="18" name="Shape 16"/>
           <p:cNvSpPr/>
           <p:nvPr/>
         </p:nvSpPr>
@@ -4377,7 +4359,7 @@
       </p:sp>
       <p:sp>
         <p:nvSpPr>
-          <p:cNvPr id="19" name="Text 17"/>
+          <p:cNvPr id="17" name="Text 15"/>
           <p:cNvSpPr/>
           <p:nvPr/>
         </p:nvSpPr>
@@ -4416,7 +4398,7 @@
       </p:sp>
       <p:sp>
         <p:nvSpPr>
-          <p:cNvPr id="20" name="Text 18"/>
+          <p:cNvPr id="18" name="Text 16"/>
           <p:cNvSpPr/>
           <p:nvPr/>
         </p:nvSpPr>
@@ -4924,13 +4906,11 @@
             </a:avLst>
           </a:prstGeom>
           <a:solidFill>
-            <a:srgbClr val="FFFFFF">
-              <a:alpha val="88000"/>
-            </a:srgbClr>
+            <a:srgbClr val="FFFFFF"/>
           </a:solidFill>
           <a:ln w="12700">
             <a:solidFill>
-              <a:srgbClr val="D6E8F2"/>
+              <a:srgbClr val="B9D7E6"/>
             </a:solidFill>
             <a:prstDash val="solid"/>
           </a:ln>
@@ -4938,26 +4918,42 @@
       </p:sp>
       <p:sp>
         <p:nvSpPr>
-          <p:cNvPr id="14" name="Shape 12"/>
-          <p:cNvSpPr/>
-          <p:nvPr/>
-        </p:nvSpPr>
-        <p:spPr>
-          <a:xfrm>
-            <a:off x="8046720" y="3108960"/>
-            <a:ext cx="2651760" cy="896112"/>
-          </a:xfrm>
-          <a:prstGeom prst="arc">
-            <a:avLst/>
-          </a:prstGeom>
-          <a:noFill/>
-          <a:ln w="25400">
-            <a:solidFill>
-              <a:srgbClr val="0068B7"/>
-            </a:solidFill>
-            <a:prstDash val="solid"/>
-          </a:ln>
-        </p:spPr>
+          <p:cNvPr id="14" name="Text 12"/>
+          <p:cNvSpPr/>
+          <p:nvPr/>
+        </p:nvSpPr>
+        <p:spPr>
+          <a:xfrm>
+            <a:off x="7799832" y="2935224"/>
+            <a:ext cx="3145536" cy="256032"/>
+          </a:xfrm>
+          <a:prstGeom prst="rect">
+            <a:avLst/>
+          </a:prstGeom>
+          <a:noFill/>
+          <a:ln/>
+        </p:spPr>
+        <p:txBody>
+          <a:bodyPr wrap="square" lIns="0" tIns="0" rIns="0" bIns="0" rtlCol="0" anchor="ctr"/>
+          <a:lstStyle/>
+          <a:p>
+            <a:pPr indent="0" marL="0">
+              <a:buNone/>
+            </a:pPr>
+            <a:r>
+              <a:rPr lang="en-US" sz="1300" b="1" dirty="0">
+                <a:solidFill>
+                  <a:srgbClr val="0068B7"/>
+                </a:solidFill>
+                <a:latin typeface="Aptos" pitchFamily="34" charset="0"/>
+                <a:ea typeface="Aptos" pitchFamily="34" charset="-122"/>
+                <a:cs typeface="Aptos" pitchFamily="34" charset="-120"/>
+              </a:rPr>
+              <a:t>Concept checkpoints</a:t>
+            </a:r>
+            <a:endParaRPr lang="en-US" sz="1300" dirty="0"/>
+          </a:p>
+        </p:txBody>
       </p:sp>
       <p:sp>
         <p:nvSpPr>
@@ -4967,102 +4963,67 @@
         </p:nvSpPr>
         <p:spPr>
           <a:xfrm>
-            <a:off x="7909560" y="3099816"/>
-            <a:ext cx="2926080" cy="256032"/>
-          </a:xfrm>
-          <a:prstGeom prst="rect">
-            <a:avLst/>
-          </a:prstGeom>
-          <a:noFill/>
-          <a:ln/>
-        </p:spPr>
-        <p:txBody>
-          <a:bodyPr wrap="square" lIns="0" tIns="0" rIns="0" bIns="0" rtlCol="0" anchor="ctr"/>
-          <a:lstStyle/>
-          <a:p>
-            <a:pPr algn="ctr" indent="0" marL="0">
-              <a:buNone/>
-            </a:pPr>
-            <a:r>
-              <a:rPr lang="en-US" sz="1500" b="1" dirty="0">
-                <a:solidFill>
-                  <a:srgbClr val="003A63"/>
-                </a:solidFill>
-                <a:latin typeface="Aptos" pitchFamily="34" charset="0"/>
-                <a:ea typeface="Aptos" pitchFamily="34" charset="-122"/>
-                <a:cs typeface="Aptos" pitchFamily="34" charset="-120"/>
-              </a:rPr>
-              <a:t>Risk</a:t>
-            </a:r>
-            <a:endParaRPr lang="en-US" sz="1500" dirty="0"/>
+            <a:off x="7818120" y="3300984"/>
+            <a:ext cx="3090672" cy="877824"/>
+          </a:xfrm>
+          <a:prstGeom prst="rect">
+            <a:avLst/>
+          </a:prstGeom>
+          <a:noFill/>
+          <a:ln/>
+        </p:spPr>
+        <p:txBody>
+          <a:bodyPr wrap="square" lIns="254" tIns="254" rIns="254" bIns="254" rtlCol="0" anchor="t">
+            <a:normAutofit/>
+          </a:bodyPr>
+          <a:lstStyle/>
+          <a:p>
+            <a:r>
+              <a:rPr lang="en-US" sz="1380" dirty="0">
+                <a:solidFill>
+                  <a:srgbClr val="17364A"/>
+                </a:solidFill>
+                <a:latin typeface="Aptos" pitchFamily="34" charset="0"/>
+                <a:ea typeface="Aptos" pitchFamily="34" charset="-122"/>
+                <a:cs typeface="Aptos" pitchFamily="34" charset="-120"/>
+              </a:rPr>
+              <a:t>A dashboard or AI report may state that a program reduced disease, improved access, or.</a:t>
+            </a:r>
+            <a:endParaRPr lang="en-US" sz="1380" dirty="0"/>
+          </a:p>
+          <a:p>
+            <a:r>
+              <a:rPr lang="en-US" sz="1380" dirty="0">
+                <a:solidFill>
+                  <a:srgbClr val="17364A"/>
+                </a:solidFill>
+                <a:latin typeface="Aptos" pitchFamily="34" charset="0"/>
+                <a:ea typeface="Aptos" pitchFamily="34" charset="-122"/>
+                <a:cs typeface="Aptos" pitchFamily="34" charset="-120"/>
+              </a:rPr>
+              <a:t>A guardrail is to require causal language review before results are used in reports,.</a:t>
+            </a:r>
+            <a:endParaRPr lang="en-US" sz="1380" dirty="0"/>
+          </a:p>
+          <a:p>
+            <a:r>
+              <a:rPr lang="en-US" sz="1380" dirty="0">
+                <a:solidFill>
+                  <a:srgbClr val="17364A"/>
+                </a:solidFill>
+                <a:latin typeface="Aptos" pitchFamily="34" charset="0"/>
+                <a:ea typeface="Aptos" pitchFamily="34" charset="-122"/>
+                <a:cs typeface="Aptos" pitchFamily="34" charset="-120"/>
+              </a:rPr>
+              <a:t>Another risk is inequitable inference.</a:t>
+            </a:r>
+            <a:endParaRPr lang="en-US" sz="1380" dirty="0"/>
           </a:p>
         </p:txBody>
       </p:sp>
       <p:sp>
         <p:nvSpPr>
           <p:cNvPr id="16" name="Shape 14"/>
-          <p:cNvSpPr/>
-          <p:nvPr/>
-        </p:nvSpPr>
-        <p:spPr>
-          <a:xfrm>
-            <a:off x="8366760" y="3639312"/>
-            <a:ext cx="2011680" cy="0"/>
-          </a:xfrm>
-          <a:prstGeom prst="line">
-            <a:avLst/>
-          </a:prstGeom>
-          <a:noFill/>
-          <a:ln w="63500">
-            <a:solidFill>
-              <a:srgbClr val="2F8A28"/>
-            </a:solidFill>
-            <a:prstDash val="solid"/>
-          </a:ln>
-        </p:spPr>
-      </p:sp>
-      <p:sp>
-        <p:nvSpPr>
-          <p:cNvPr id="17" name="Text 15"/>
-          <p:cNvSpPr/>
-          <p:nvPr/>
-        </p:nvSpPr>
-        <p:spPr>
-          <a:xfrm>
-            <a:off x="7909560" y="3849624"/>
-            <a:ext cx="2926080" cy="164592"/>
-          </a:xfrm>
-          <a:prstGeom prst="rect">
-            <a:avLst/>
-          </a:prstGeom>
-          <a:noFill/>
-          <a:ln/>
-        </p:spPr>
-        <p:txBody>
-          <a:bodyPr wrap="square" lIns="0" tIns="0" rIns="0" bIns="0" rtlCol="0" anchor="ctr"/>
-          <a:lstStyle/>
-          <a:p>
-            <a:pPr algn="ctr" indent="0" marL="0">
-              <a:buNone/>
-            </a:pPr>
-            <a:r>
-              <a:rPr lang="en-US" sz="900" dirty="0">
-                <a:solidFill>
-                  <a:srgbClr val="003A63"/>
-                </a:solidFill>
-                <a:latin typeface="Aptos" pitchFamily="34" charset="0"/>
-                <a:ea typeface="Aptos" pitchFamily="34" charset="-122"/>
-                <a:cs typeface="Aptos" pitchFamily="34" charset="-120"/>
-              </a:rPr>
-              <a:t>Human review</a:t>
-            </a:r>
-            <a:endParaRPr lang="en-US" sz="900" dirty="0"/>
-          </a:p>
-        </p:txBody>
-      </p:sp>
-      <p:sp>
-        <p:nvSpPr>
-          <p:cNvPr id="18" name="Shape 16"/>
           <p:cNvSpPr/>
           <p:nvPr/>
         </p:nvSpPr>
@@ -5089,7 +5050,7 @@
       </p:sp>
       <p:sp>
         <p:nvSpPr>
-          <p:cNvPr id="19" name="Text 17"/>
+          <p:cNvPr id="17" name="Text 15"/>
           <p:cNvSpPr/>
           <p:nvPr/>
         </p:nvSpPr>
@@ -5128,7 +5089,7 @@
       </p:sp>
       <p:sp>
         <p:nvSpPr>
-          <p:cNvPr id="20" name="Text 18"/>
+          <p:cNvPr id="18" name="Text 16"/>
           <p:cNvSpPr/>
           <p:nvPr/>
         </p:nvSpPr>
@@ -5636,13 +5597,11 @@
             </a:avLst>
           </a:prstGeom>
           <a:solidFill>
-            <a:srgbClr val="FFFFFF">
-              <a:alpha val="88000"/>
-            </a:srgbClr>
+            <a:srgbClr val="FFFFFF"/>
           </a:solidFill>
           <a:ln w="12700">
             <a:solidFill>
-              <a:srgbClr val="D6E8F2"/>
+              <a:srgbClr val="B9D7E6"/>
             </a:solidFill>
             <a:prstDash val="solid"/>
           </a:ln>
@@ -5650,30 +5609,42 @@
       </p:sp>
       <p:sp>
         <p:nvSpPr>
-          <p:cNvPr id="14" name="Shape 12"/>
-          <p:cNvSpPr/>
-          <p:nvPr/>
-        </p:nvSpPr>
-        <p:spPr>
-          <a:xfrm>
-            <a:off x="7927848" y="3319272"/>
-            <a:ext cx="792480" cy="749808"/>
-          </a:xfrm>
-          <a:prstGeom prst="roundRect">
-            <a:avLst>
-              <a:gd name="adj" fmla="val 14634"/>
-            </a:avLst>
-          </a:prstGeom>
-          <a:solidFill>
-            <a:srgbClr val="0068B7"/>
-          </a:solidFill>
-          <a:ln w="12700">
-            <a:solidFill>
-              <a:srgbClr val="0068B7"/>
-            </a:solidFill>
-            <a:prstDash val="solid"/>
-          </a:ln>
-        </p:spPr>
+          <p:cNvPr id="14" name="Text 12"/>
+          <p:cNvSpPr/>
+          <p:nvPr/>
+        </p:nvSpPr>
+        <p:spPr>
+          <a:xfrm>
+            <a:off x="7799832" y="2935224"/>
+            <a:ext cx="3145536" cy="256032"/>
+          </a:xfrm>
+          <a:prstGeom prst="rect">
+            <a:avLst/>
+          </a:prstGeom>
+          <a:noFill/>
+          <a:ln/>
+        </p:spPr>
+        <p:txBody>
+          <a:bodyPr wrap="square" lIns="0" tIns="0" rIns="0" bIns="0" rtlCol="0" anchor="ctr"/>
+          <a:lstStyle/>
+          <a:p>
+            <a:pPr indent="0" marL="0">
+              <a:buNone/>
+            </a:pPr>
+            <a:r>
+              <a:rPr lang="en-US" sz="1300" b="1" dirty="0">
+                <a:solidFill>
+                  <a:srgbClr val="0068B7"/>
+                </a:solidFill>
+                <a:latin typeface="Aptos" pitchFamily="34" charset="0"/>
+                <a:ea typeface="Aptos" pitchFamily="34" charset="-122"/>
+                <a:cs typeface="Aptos" pitchFamily="34" charset="-120"/>
+              </a:rPr>
+              <a:t>Concept checkpoints</a:t>
+            </a:r>
+            <a:endParaRPr lang="en-US" sz="1300" dirty="0"/>
+          </a:p>
+        </p:txBody>
       </p:sp>
       <p:sp>
         <p:nvSpPr>
@@ -5683,240 +5654,67 @@
         </p:nvSpPr>
         <p:spPr>
           <a:xfrm>
-            <a:off x="8001000" y="3511296"/>
-            <a:ext cx="646176" cy="310896"/>
-          </a:xfrm>
-          <a:prstGeom prst="rect">
-            <a:avLst/>
-          </a:prstGeom>
-          <a:noFill/>
-          <a:ln/>
-        </p:spPr>
-        <p:txBody>
-          <a:bodyPr wrap="square" lIns="0" tIns="0" rIns="0" bIns="0" rtlCol="0" anchor="ctr">
+            <a:off x="7818120" y="3300984"/>
+            <a:ext cx="3090672" cy="877824"/>
+          </a:xfrm>
+          <a:prstGeom prst="rect">
+            <a:avLst/>
+          </a:prstGeom>
+          <a:noFill/>
+          <a:ln/>
+        </p:spPr>
+        <p:txBody>
+          <a:bodyPr wrap="square" lIns="254" tIns="254" rIns="254" bIns="254" rtlCol="0" anchor="t">
             <a:normAutofit/>
           </a:bodyPr>
           <a:lstStyle/>
           <a:p>
-            <a:pPr algn="ctr" indent="0" marL="0">
-              <a:buNone/>
-            </a:pPr>
-            <a:r>
-              <a:rPr lang="en-US" sz="1500" b="1" dirty="0">
-                <a:solidFill>
-                  <a:srgbClr val="FFFFFF"/>
-                </a:solidFill>
-                <a:latin typeface="Aptos" pitchFamily="34" charset="0"/>
-                <a:ea typeface="Aptos" pitchFamily="34" charset="-122"/>
-                <a:cs typeface="Aptos" pitchFamily="34" charset="-120"/>
-              </a:rPr>
-              <a:t>Plan</a:t>
-            </a:r>
-            <a:endParaRPr lang="en-US" sz="1500" dirty="0"/>
+            <a:r>
+              <a:rPr lang="en-US" sz="1380" dirty="0">
+                <a:solidFill>
+                  <a:srgbClr val="17364A"/>
+                </a:solidFill>
+                <a:latin typeface="Aptos" pitchFamily="34" charset="0"/>
+                <a:ea typeface="Aptos" pitchFamily="34" charset="-122"/>
+                <a:cs typeface="Aptos" pitchFamily="34" charset="-120"/>
+              </a:rPr>
+              <a:t>Predictive models can identify risk, but causal inference is needed to decide what action.</a:t>
+            </a:r>
+            <a:endParaRPr lang="en-US" sz="1380" dirty="0"/>
+          </a:p>
+          <a:p>
+            <a:r>
+              <a:rPr lang="en-US" sz="1380" dirty="0">
+                <a:solidFill>
+                  <a:srgbClr val="17364A"/>
+                </a:solidFill>
+                <a:latin typeface="Aptos" pitchFamily="34" charset="0"/>
+                <a:ea typeface="Aptos" pitchFamily="34" charset="-122"/>
+                <a:cs typeface="Aptos" pitchFamily="34" charset="-120"/>
+              </a:rPr>
+              <a:t>Generative AI may help draft evaluation questions or summarize literature, but humans must.</a:t>
+            </a:r>
+            <a:endParaRPr lang="en-US" sz="1380" dirty="0"/>
+          </a:p>
+          <a:p>
+            <a:r>
+              <a:rPr lang="en-US" sz="1380" dirty="0">
+                <a:solidFill>
+                  <a:srgbClr val="17364A"/>
+                </a:solidFill>
+                <a:latin typeface="Aptos" pitchFamily="34" charset="0"/>
+                <a:ea typeface="Aptos" pitchFamily="34" charset="-122"/>
+                <a:cs typeface="Aptos" pitchFamily="34" charset="-120"/>
+              </a:rPr>
+              <a:t>AI-supported decision-making should label outputs clearly as prediction, association,.</a:t>
+            </a:r>
+            <a:endParaRPr lang="en-US" sz="1380" dirty="0"/>
           </a:p>
         </p:txBody>
       </p:sp>
       <p:sp>
         <p:nvSpPr>
           <p:cNvPr id="16" name="Shape 14"/>
-          <p:cNvSpPr/>
-          <p:nvPr/>
-        </p:nvSpPr>
-        <p:spPr>
-          <a:xfrm>
-            <a:off x="8976360" y="3319272"/>
-            <a:ext cx="792480" cy="749808"/>
-          </a:xfrm>
-          <a:prstGeom prst="roundRect">
-            <a:avLst>
-              <a:gd name="adj" fmla="val 14634"/>
-            </a:avLst>
-          </a:prstGeom>
-          <a:solidFill>
-            <a:srgbClr val="2F8A28"/>
-          </a:solidFill>
-          <a:ln w="12700">
-            <a:solidFill>
-              <a:srgbClr val="2F8A28"/>
-            </a:solidFill>
-            <a:prstDash val="solid"/>
-          </a:ln>
-        </p:spPr>
-      </p:sp>
-      <p:sp>
-        <p:nvSpPr>
-          <p:cNvPr id="17" name="Text 15"/>
-          <p:cNvSpPr/>
-          <p:nvPr/>
-        </p:nvSpPr>
-        <p:spPr>
-          <a:xfrm>
-            <a:off x="9049512" y="3511296"/>
-            <a:ext cx="646176" cy="310896"/>
-          </a:xfrm>
-          <a:prstGeom prst="rect">
-            <a:avLst/>
-          </a:prstGeom>
-          <a:noFill/>
-          <a:ln/>
-        </p:spPr>
-        <p:txBody>
-          <a:bodyPr wrap="square" lIns="0" tIns="0" rIns="0" bIns="0" rtlCol="0" anchor="ctr">
-            <a:normAutofit/>
-          </a:bodyPr>
-          <a:lstStyle/>
-          <a:p>
-            <a:pPr algn="ctr" indent="0" marL="0">
-              <a:buNone/>
-            </a:pPr>
-            <a:r>
-              <a:rPr lang="en-US" sz="1500" b="1" dirty="0">
-                <a:solidFill>
-                  <a:srgbClr val="FFFFFF"/>
-                </a:solidFill>
-                <a:latin typeface="Aptos" pitchFamily="34" charset="0"/>
-                <a:ea typeface="Aptos" pitchFamily="34" charset="-122"/>
-                <a:cs typeface="Aptos" pitchFamily="34" charset="-120"/>
-              </a:rPr>
-              <a:t>Do</a:t>
-            </a:r>
-            <a:endParaRPr lang="en-US" sz="1500" dirty="0"/>
-          </a:p>
-        </p:txBody>
-      </p:sp>
-      <p:sp>
-        <p:nvSpPr>
-          <p:cNvPr id="18" name="Shape 16"/>
-          <p:cNvSpPr/>
-          <p:nvPr/>
-        </p:nvSpPr>
-        <p:spPr>
-          <a:xfrm>
-            <a:off x="10024872" y="3319272"/>
-            <a:ext cx="792480" cy="749808"/>
-          </a:xfrm>
-          <a:prstGeom prst="roundRect">
-            <a:avLst>
-              <a:gd name="adj" fmla="val 14634"/>
-            </a:avLst>
-          </a:prstGeom>
-          <a:solidFill>
-            <a:srgbClr val="D69A2D"/>
-          </a:solidFill>
-          <a:ln w="12700">
-            <a:solidFill>
-              <a:srgbClr val="D69A2D"/>
-            </a:solidFill>
-            <a:prstDash val="solid"/>
-          </a:ln>
-        </p:spPr>
-      </p:sp>
-      <p:sp>
-        <p:nvSpPr>
-          <p:cNvPr id="19" name="Text 17"/>
-          <p:cNvSpPr/>
-          <p:nvPr/>
-        </p:nvSpPr>
-        <p:spPr>
-          <a:xfrm>
-            <a:off x="10098024" y="3511296"/>
-            <a:ext cx="646176" cy="310896"/>
-          </a:xfrm>
-          <a:prstGeom prst="rect">
-            <a:avLst/>
-          </a:prstGeom>
-          <a:noFill/>
-          <a:ln/>
-        </p:spPr>
-        <p:txBody>
-          <a:bodyPr wrap="square" lIns="0" tIns="0" rIns="0" bIns="0" rtlCol="0" anchor="ctr">
-            <a:normAutofit/>
-          </a:bodyPr>
-          <a:lstStyle/>
-          <a:p>
-            <a:pPr algn="ctr" indent="0" marL="0">
-              <a:buNone/>
-            </a:pPr>
-            <a:r>
-              <a:rPr lang="en-US" sz="1500" b="1" dirty="0">
-                <a:solidFill>
-                  <a:srgbClr val="FFFFFF"/>
-                </a:solidFill>
-                <a:latin typeface="Aptos" pitchFamily="34" charset="0"/>
-                <a:ea typeface="Aptos" pitchFamily="34" charset="-122"/>
-                <a:cs typeface="Aptos" pitchFamily="34" charset="-120"/>
-              </a:rPr>
-              <a:t>Review</a:t>
-            </a:r>
-            <a:endParaRPr lang="en-US" sz="1500" dirty="0"/>
-          </a:p>
-        </p:txBody>
-      </p:sp>
-      <p:sp>
-        <p:nvSpPr>
-          <p:cNvPr id="20" name="Shape 18"/>
-          <p:cNvSpPr/>
-          <p:nvPr/>
-        </p:nvSpPr>
-        <p:spPr>
-          <a:xfrm>
-            <a:off x="8293608" y="4389120"/>
-            <a:ext cx="2157984" cy="0"/>
-          </a:xfrm>
-          <a:prstGeom prst="line">
-            <a:avLst/>
-          </a:prstGeom>
-          <a:noFill/>
-          <a:ln w="25400">
-            <a:solidFill>
-              <a:srgbClr val="8ABBD8"/>
-            </a:solidFill>
-            <a:prstDash val="solid"/>
-          </a:ln>
-        </p:spPr>
-      </p:sp>
-      <p:sp>
-        <p:nvSpPr>
-          <p:cNvPr id="21" name="Text 19"/>
-          <p:cNvSpPr/>
-          <p:nvPr/>
-        </p:nvSpPr>
-        <p:spPr>
-          <a:xfrm>
-            <a:off x="7909560" y="3977640"/>
-            <a:ext cx="2926080" cy="182880"/>
-          </a:xfrm>
-          <a:prstGeom prst="rect">
-            <a:avLst/>
-          </a:prstGeom>
-          <a:noFill/>
-          <a:ln/>
-        </p:spPr>
-        <p:txBody>
-          <a:bodyPr wrap="square" lIns="0" tIns="0" rIns="0" bIns="0" rtlCol="0" anchor="ctr"/>
-          <a:lstStyle/>
-          <a:p>
-            <a:pPr algn="ctr" indent="0" marL="0">
-              <a:buNone/>
-            </a:pPr>
-            <a:r>
-              <a:rPr lang="en-US" sz="1000" dirty="0">
-                <a:solidFill>
-                  <a:srgbClr val="003A63"/>
-                </a:solidFill>
-                <a:latin typeface="Aptos" pitchFamily="34" charset="0"/>
-                <a:ea typeface="Aptos" pitchFamily="34" charset="-122"/>
-                <a:cs typeface="Aptos" pitchFamily="34" charset="-120"/>
-              </a:rPr>
-              <a:t>Dependencies visible</a:t>
-            </a:r>
-            <a:endParaRPr lang="en-US" sz="1000" dirty="0"/>
-          </a:p>
-        </p:txBody>
-      </p:sp>
-      <p:sp>
-        <p:nvSpPr>
-          <p:cNvPr id="22" name="Shape 20"/>
           <p:cNvSpPr/>
           <p:nvPr/>
         </p:nvSpPr>
@@ -5943,7 +5741,7 @@
       </p:sp>
       <p:sp>
         <p:nvSpPr>
-          <p:cNvPr id="23" name="Text 21"/>
+          <p:cNvPr id="17" name="Text 15"/>
           <p:cNvSpPr/>
           <p:nvPr/>
         </p:nvSpPr>
@@ -5982,7 +5780,7 @@
       </p:sp>
       <p:sp>
         <p:nvSpPr>
-          <p:cNvPr id="24" name="Text 22"/>
+          <p:cNvPr id="18" name="Text 16"/>
           <p:cNvSpPr/>
           <p:nvPr/>
         </p:nvSpPr>
@@ -6490,13 +6288,11 @@
             </a:avLst>
           </a:prstGeom>
           <a:solidFill>
-            <a:srgbClr val="FFFFFF">
-              <a:alpha val="88000"/>
-            </a:srgbClr>
+            <a:srgbClr val="FFFFFF"/>
           </a:solidFill>
           <a:ln w="12700">
             <a:solidFill>
-              <a:srgbClr val="D6E8F2"/>
+              <a:srgbClr val="B9D7E6"/>
             </a:solidFill>
             <a:prstDash val="solid"/>
           </a:ln>
@@ -6504,119 +6300,112 @@
       </p:sp>
       <p:sp>
         <p:nvSpPr>
-          <p:cNvPr id="14" name="Shape 12"/>
-          <p:cNvSpPr/>
-          <p:nvPr/>
-        </p:nvSpPr>
-        <p:spPr>
-          <a:xfrm>
-            <a:off x="8074152" y="3291840"/>
-            <a:ext cx="2596896" cy="749808"/>
-          </a:xfrm>
-          <a:prstGeom prst="rect">
-            <a:avLst/>
-          </a:prstGeom>
-          <a:solidFill>
-            <a:srgbClr val="EAF6F8"/>
-          </a:solidFill>
-          <a:ln w="12700">
-            <a:solidFill>
-              <a:srgbClr val="8ABBD8"/>
-            </a:solidFill>
-            <a:prstDash val="solid"/>
-          </a:ln>
-        </p:spPr>
-      </p:sp>
-      <p:sp>
-        <p:nvSpPr>
-          <p:cNvPr id="15" name="Shape 13"/>
-          <p:cNvSpPr/>
-          <p:nvPr/>
-        </p:nvSpPr>
-        <p:spPr>
-          <a:xfrm>
-            <a:off x="8202168" y="3721608"/>
-            <a:ext cx="2340864" cy="0"/>
-          </a:xfrm>
-          <a:prstGeom prst="line">
-            <a:avLst/>
-          </a:prstGeom>
-          <a:noFill/>
-          <a:ln w="19050">
-            <a:solidFill>
-              <a:srgbClr val="0068B7"/>
-            </a:solidFill>
-            <a:prstDash val="solid"/>
-          </a:ln>
-        </p:spPr>
+          <p:cNvPr id="14" name="Text 12"/>
+          <p:cNvSpPr/>
+          <p:nvPr/>
+        </p:nvSpPr>
+        <p:spPr>
+          <a:xfrm>
+            <a:off x="7799832" y="2935224"/>
+            <a:ext cx="3145536" cy="256032"/>
+          </a:xfrm>
+          <a:prstGeom prst="rect">
+            <a:avLst/>
+          </a:prstGeom>
+          <a:noFill/>
+          <a:ln/>
+        </p:spPr>
+        <p:txBody>
+          <a:bodyPr wrap="square" lIns="0" tIns="0" rIns="0" bIns="0" rtlCol="0" anchor="ctr"/>
+          <a:lstStyle/>
+          <a:p>
+            <a:pPr indent="0" marL="0">
+              <a:buNone/>
+            </a:pPr>
+            <a:r>
+              <a:rPr lang="en-US" sz="1300" b="1" dirty="0">
+                <a:solidFill>
+                  <a:srgbClr val="0068B7"/>
+                </a:solidFill>
+                <a:latin typeface="Aptos" pitchFamily="34" charset="0"/>
+                <a:ea typeface="Aptos" pitchFamily="34" charset="-122"/>
+                <a:cs typeface="Aptos" pitchFamily="34" charset="-120"/>
+              </a:rPr>
+              <a:t>Concept checkpoints</a:t>
+            </a:r>
+            <a:endParaRPr lang="en-US" sz="1300" dirty="0"/>
+          </a:p>
+        </p:txBody>
+      </p:sp>
+      <p:sp>
+        <p:nvSpPr>
+          <p:cNvPr id="15" name="Text 13"/>
+          <p:cNvSpPr/>
+          <p:nvPr/>
+        </p:nvSpPr>
+        <p:spPr>
+          <a:xfrm>
+            <a:off x="7818120" y="3300984"/>
+            <a:ext cx="3090672" cy="877824"/>
+          </a:xfrm>
+          <a:prstGeom prst="rect">
+            <a:avLst/>
+          </a:prstGeom>
+          <a:noFill/>
+          <a:ln/>
+        </p:spPr>
+        <p:txBody>
+          <a:bodyPr wrap="square" lIns="254" tIns="254" rIns="254" bIns="254" rtlCol="0" anchor="t">
+            <a:normAutofit/>
+          </a:bodyPr>
+          <a:lstStyle/>
+          <a:p>
+            <a:r>
+              <a:rPr lang="en-US" sz="1380" dirty="0">
+                <a:solidFill>
+                  <a:srgbClr val="17364A"/>
+                </a:solidFill>
+                <a:latin typeface="Aptos" pitchFamily="34" charset="0"/>
+                <a:ea typeface="Aptos" pitchFamily="34" charset="-122"/>
+                <a:cs typeface="Aptos" pitchFamily="34" charset="-120"/>
+              </a:rPr>
+              <a:t>What AI outputs in your agency could be mistaken for causal evidence?</a:t>
+            </a:r>
+            <a:endParaRPr lang="en-US" sz="1380" dirty="0"/>
+          </a:p>
+          <a:p>
+            <a:r>
+              <a:rPr lang="en-US" sz="1380" dirty="0">
+                <a:solidFill>
+                  <a:srgbClr val="17364A"/>
+                </a:solidFill>
+                <a:latin typeface="Aptos" pitchFamily="34" charset="0"/>
+                <a:ea typeface="Aptos" pitchFamily="34" charset="-122"/>
+                <a:cs typeface="Aptos" pitchFamily="34" charset="-120"/>
+              </a:rPr>
+              <a:t>Which decisions require knowing what intervention will change an outcome?</a:t>
+            </a:r>
+            <a:endParaRPr lang="en-US" sz="1380" dirty="0"/>
+          </a:p>
+          <a:p>
+            <a:r>
+              <a:rPr lang="en-US" sz="1380" dirty="0">
+                <a:solidFill>
+                  <a:srgbClr val="17364A"/>
+                </a:solidFill>
+                <a:latin typeface="Aptos" pitchFamily="34" charset="0"/>
+                <a:ea typeface="Aptos" pitchFamily="34" charset="-122"/>
+                <a:cs typeface="Aptos" pitchFamily="34" charset="-120"/>
+              </a:rPr>
+              <a:t>What confounders are likely in your program area?</a:t>
+            </a:r>
+            <a:endParaRPr lang="en-US" sz="1380" dirty="0"/>
+          </a:p>
+        </p:txBody>
       </p:sp>
       <p:sp>
         <p:nvSpPr>
           <p:cNvPr id="16" name="Shape 14"/>
-          <p:cNvSpPr/>
-          <p:nvPr/>
-        </p:nvSpPr>
-        <p:spPr>
-          <a:xfrm>
-            <a:off x="9198864" y="4206240"/>
-            <a:ext cx="347472" cy="347472"/>
-          </a:xfrm>
-          <a:prstGeom prst="ellipse">
-            <a:avLst/>
-          </a:prstGeom>
-          <a:solidFill>
-            <a:srgbClr val="2F8A28"/>
-          </a:solidFill>
-          <a:ln w="12700">
-            <a:solidFill>
-              <a:srgbClr val="2F8A28"/>
-            </a:solidFill>
-            <a:prstDash val="solid"/>
-          </a:ln>
-        </p:spPr>
-      </p:sp>
-      <p:sp>
-        <p:nvSpPr>
-          <p:cNvPr id="17" name="Text 15"/>
-          <p:cNvSpPr/>
-          <p:nvPr/>
-        </p:nvSpPr>
-        <p:spPr>
-          <a:xfrm>
-            <a:off x="7909560" y="3977640"/>
-            <a:ext cx="2926080" cy="182880"/>
-          </a:xfrm>
-          <a:prstGeom prst="rect">
-            <a:avLst/>
-          </a:prstGeom>
-          <a:noFill/>
-          <a:ln/>
-        </p:spPr>
-        <p:txBody>
-          <a:bodyPr wrap="square" lIns="0" tIns="0" rIns="0" bIns="0" rtlCol="0" anchor="ctr"/>
-          <a:lstStyle/>
-          <a:p>
-            <a:pPr algn="ctr" indent="0" marL="0">
-              <a:buNone/>
-            </a:pPr>
-            <a:r>
-              <a:rPr lang="en-US" sz="1000" dirty="0">
-                <a:solidFill>
-                  <a:srgbClr val="003A63"/>
-                </a:solidFill>
-                <a:latin typeface="Aptos" pitchFamily="34" charset="0"/>
-                <a:ea typeface="Aptos" pitchFamily="34" charset="-122"/>
-                <a:cs typeface="Aptos" pitchFamily="34" charset="-120"/>
-              </a:rPr>
-              <a:t>Concept to action</a:t>
-            </a:r>
-            <a:endParaRPr lang="en-US" sz="1000" dirty="0"/>
-          </a:p>
-        </p:txBody>
-      </p:sp>
-      <p:sp>
-        <p:nvSpPr>
-          <p:cNvPr id="18" name="Shape 16"/>
           <p:cNvSpPr/>
           <p:nvPr/>
         </p:nvSpPr>
@@ -6643,7 +6432,7 @@
       </p:sp>
       <p:sp>
         <p:nvSpPr>
-          <p:cNvPr id="19" name="Text 17"/>
+          <p:cNvPr id="17" name="Text 15"/>
           <p:cNvSpPr/>
           <p:nvPr/>
         </p:nvSpPr>
@@ -6682,7 +6471,7 @@
       </p:sp>
       <p:sp>
         <p:nvSpPr>
-          <p:cNvPr id="20" name="Text 18"/>
+          <p:cNvPr id="18" name="Text 16"/>
           <p:cNvSpPr/>
           <p:nvPr/>
         </p:nvSpPr>
@@ -7176,13 +6965,11 @@
             </a:avLst>
           </a:prstGeom>
           <a:solidFill>
-            <a:srgbClr val="FFFFFF">
-              <a:alpha val="88000"/>
-            </a:srgbClr>
+            <a:srgbClr val="FFFFFF"/>
           </a:solidFill>
           <a:ln w="12700">
             <a:solidFill>
-              <a:srgbClr val="D6E8F2"/>
+              <a:srgbClr val="B9D7E6"/>
             </a:solidFill>
             <a:prstDash val="solid"/>
           </a:ln>
@@ -7190,119 +6977,98 @@
       </p:sp>
       <p:sp>
         <p:nvSpPr>
-          <p:cNvPr id="14" name="Shape 12"/>
-          <p:cNvSpPr/>
-          <p:nvPr/>
-        </p:nvSpPr>
-        <p:spPr>
-          <a:xfrm>
-            <a:off x="8074152" y="3291840"/>
-            <a:ext cx="2596896" cy="749808"/>
-          </a:xfrm>
-          <a:prstGeom prst="rect">
-            <a:avLst/>
-          </a:prstGeom>
-          <a:solidFill>
-            <a:srgbClr val="EAF6F8"/>
-          </a:solidFill>
-          <a:ln w="12700">
-            <a:solidFill>
-              <a:srgbClr val="8ABBD8"/>
-            </a:solidFill>
-            <a:prstDash val="solid"/>
-          </a:ln>
-        </p:spPr>
-      </p:sp>
-      <p:sp>
-        <p:nvSpPr>
-          <p:cNvPr id="15" name="Shape 13"/>
-          <p:cNvSpPr/>
-          <p:nvPr/>
-        </p:nvSpPr>
-        <p:spPr>
-          <a:xfrm>
-            <a:off x="8202168" y="3721608"/>
-            <a:ext cx="2340864" cy="0"/>
-          </a:xfrm>
-          <a:prstGeom prst="line">
-            <a:avLst/>
-          </a:prstGeom>
-          <a:noFill/>
-          <a:ln w="19050">
-            <a:solidFill>
-              <a:srgbClr val="0068B7"/>
-            </a:solidFill>
-            <a:prstDash val="solid"/>
-          </a:ln>
-        </p:spPr>
+          <p:cNvPr id="14" name="Text 12"/>
+          <p:cNvSpPr/>
+          <p:nvPr/>
+        </p:nvSpPr>
+        <p:spPr>
+          <a:xfrm>
+            <a:off x="7799832" y="2935224"/>
+            <a:ext cx="3145536" cy="256032"/>
+          </a:xfrm>
+          <a:prstGeom prst="rect">
+            <a:avLst/>
+          </a:prstGeom>
+          <a:noFill/>
+          <a:ln/>
+        </p:spPr>
+        <p:txBody>
+          <a:bodyPr wrap="square" lIns="0" tIns="0" rIns="0" bIns="0" rtlCol="0" anchor="ctr"/>
+          <a:lstStyle/>
+          <a:p>
+            <a:pPr indent="0" marL="0">
+              <a:buNone/>
+            </a:pPr>
+            <a:r>
+              <a:rPr lang="en-US" sz="1300" b="1" dirty="0">
+                <a:solidFill>
+                  <a:srgbClr val="0068B7"/>
+                </a:solidFill>
+                <a:latin typeface="Aptos" pitchFamily="34" charset="0"/>
+                <a:ea typeface="Aptos" pitchFamily="34" charset="-122"/>
+                <a:cs typeface="Aptos" pitchFamily="34" charset="-120"/>
+              </a:rPr>
+              <a:t>Concept checkpoints</a:t>
+            </a:r>
+            <a:endParaRPr lang="en-US" sz="1300" dirty="0"/>
+          </a:p>
+        </p:txBody>
+      </p:sp>
+      <p:sp>
+        <p:nvSpPr>
+          <p:cNvPr id="15" name="Text 13"/>
+          <p:cNvSpPr/>
+          <p:nvPr/>
+        </p:nvSpPr>
+        <p:spPr>
+          <a:xfrm>
+            <a:off x="7818120" y="3300984"/>
+            <a:ext cx="3090672" cy="877824"/>
+          </a:xfrm>
+          <a:prstGeom prst="rect">
+            <a:avLst/>
+          </a:prstGeom>
+          <a:noFill/>
+          <a:ln/>
+        </p:spPr>
+        <p:txBody>
+          <a:bodyPr wrap="square" lIns="254" tIns="254" rIns="254" bIns="254" rtlCol="0" anchor="t">
+            <a:normAutofit/>
+          </a:bodyPr>
+          <a:lstStyle/>
+          <a:p>
+            <a:r>
+              <a:rPr lang="en-US" sz="1380" dirty="0">
+                <a:solidFill>
+                  <a:srgbClr val="17364A"/>
+                </a:solidFill>
+                <a:latin typeface="Aptos" pitchFamily="34" charset="0"/>
+                <a:ea typeface="Aptos" pitchFamily="34" charset="-122"/>
+                <a:cs typeface="Aptos" pitchFamily="34" charset="-120"/>
+              </a:rPr>
+              <a:t>What comparison group could support evaluation?</a:t>
+            </a:r>
+            <a:endParaRPr lang="en-US" sz="1380" dirty="0"/>
+          </a:p>
+          <a:p>
+            <a:r>
+              <a:rPr lang="en-US" sz="1380" dirty="0">
+                <a:solidFill>
+                  <a:srgbClr val="17364A"/>
+                </a:solidFill>
+                <a:latin typeface="Aptos" pitchFamily="34" charset="0"/>
+                <a:ea typeface="Aptos" pitchFamily="34" charset="-122"/>
+                <a:cs typeface="Aptos" pitchFamily="34" charset="-120"/>
+              </a:rPr>
+              <a:t>Who should review causal claims before public release?</a:t>
+            </a:r>
+            <a:endParaRPr lang="en-US" sz="1380" dirty="0"/>
+          </a:p>
+        </p:txBody>
       </p:sp>
       <p:sp>
         <p:nvSpPr>
           <p:cNvPr id="16" name="Shape 14"/>
-          <p:cNvSpPr/>
-          <p:nvPr/>
-        </p:nvSpPr>
-        <p:spPr>
-          <a:xfrm>
-            <a:off x="9198864" y="4206240"/>
-            <a:ext cx="347472" cy="347472"/>
-          </a:xfrm>
-          <a:prstGeom prst="ellipse">
-            <a:avLst/>
-          </a:prstGeom>
-          <a:solidFill>
-            <a:srgbClr val="2F8A28"/>
-          </a:solidFill>
-          <a:ln w="12700">
-            <a:solidFill>
-              <a:srgbClr val="2F8A28"/>
-            </a:solidFill>
-            <a:prstDash val="solid"/>
-          </a:ln>
-        </p:spPr>
-      </p:sp>
-      <p:sp>
-        <p:nvSpPr>
-          <p:cNvPr id="17" name="Text 15"/>
-          <p:cNvSpPr/>
-          <p:nvPr/>
-        </p:nvSpPr>
-        <p:spPr>
-          <a:xfrm>
-            <a:off x="7909560" y="3977640"/>
-            <a:ext cx="2926080" cy="182880"/>
-          </a:xfrm>
-          <a:prstGeom prst="rect">
-            <a:avLst/>
-          </a:prstGeom>
-          <a:noFill/>
-          <a:ln/>
-        </p:spPr>
-        <p:txBody>
-          <a:bodyPr wrap="square" lIns="0" tIns="0" rIns="0" bIns="0" rtlCol="0" anchor="ctr"/>
-          <a:lstStyle/>
-          <a:p>
-            <a:pPr algn="ctr" indent="0" marL="0">
-              <a:buNone/>
-            </a:pPr>
-            <a:r>
-              <a:rPr lang="en-US" sz="1000" dirty="0">
-                <a:solidFill>
-                  <a:srgbClr val="003A63"/>
-                </a:solidFill>
-                <a:latin typeface="Aptos" pitchFamily="34" charset="0"/>
-                <a:ea typeface="Aptos" pitchFamily="34" charset="-122"/>
-                <a:cs typeface="Aptos" pitchFamily="34" charset="-120"/>
-              </a:rPr>
-              <a:t>Concept to action</a:t>
-            </a:r>
-            <a:endParaRPr lang="en-US" sz="1000" dirty="0"/>
-          </a:p>
-        </p:txBody>
-      </p:sp>
-      <p:sp>
-        <p:nvSpPr>
-          <p:cNvPr id="18" name="Shape 16"/>
           <p:cNvSpPr/>
           <p:nvPr/>
         </p:nvSpPr>
@@ -7329,7 +7095,7 @@
       </p:sp>
       <p:sp>
         <p:nvSpPr>
-          <p:cNvPr id="19" name="Text 17"/>
+          <p:cNvPr id="17" name="Text 15"/>
           <p:cNvSpPr/>
           <p:nvPr/>
         </p:nvSpPr>
@@ -7368,7 +7134,7 @@
       </p:sp>
       <p:sp>
         <p:nvSpPr>
-          <p:cNvPr id="20" name="Text 18"/>
+          <p:cNvPr id="18" name="Text 16"/>
           <p:cNvSpPr/>
           <p:nvPr/>
         </p:nvSpPr>
@@ -7862,13 +7628,11 @@
             </a:avLst>
           </a:prstGeom>
           <a:solidFill>
-            <a:srgbClr val="FFFFFF">
-              <a:alpha val="88000"/>
-            </a:srgbClr>
+            <a:srgbClr val="FFFFFF"/>
           </a:solidFill>
           <a:ln w="12700">
             <a:solidFill>
-              <a:srgbClr val="D6E8F2"/>
+              <a:srgbClr val="B9D7E6"/>
             </a:solidFill>
             <a:prstDash val="solid"/>
           </a:ln>
@@ -7876,119 +7640,98 @@
       </p:sp>
       <p:sp>
         <p:nvSpPr>
-          <p:cNvPr id="14" name="Shape 12"/>
-          <p:cNvSpPr/>
-          <p:nvPr/>
-        </p:nvSpPr>
-        <p:spPr>
-          <a:xfrm>
-            <a:off x="8074152" y="3291840"/>
-            <a:ext cx="2596896" cy="749808"/>
-          </a:xfrm>
-          <a:prstGeom prst="rect">
-            <a:avLst/>
-          </a:prstGeom>
-          <a:solidFill>
-            <a:srgbClr val="EAF6F8"/>
-          </a:solidFill>
-          <a:ln w="12700">
-            <a:solidFill>
-              <a:srgbClr val="8ABBD8"/>
-            </a:solidFill>
-            <a:prstDash val="solid"/>
-          </a:ln>
-        </p:spPr>
-      </p:sp>
-      <p:sp>
-        <p:nvSpPr>
-          <p:cNvPr id="15" name="Shape 13"/>
-          <p:cNvSpPr/>
-          <p:nvPr/>
-        </p:nvSpPr>
-        <p:spPr>
-          <a:xfrm>
-            <a:off x="8202168" y="3721608"/>
-            <a:ext cx="2340864" cy="0"/>
-          </a:xfrm>
-          <a:prstGeom prst="line">
-            <a:avLst/>
-          </a:prstGeom>
-          <a:noFill/>
-          <a:ln w="19050">
-            <a:solidFill>
-              <a:srgbClr val="0068B7"/>
-            </a:solidFill>
-            <a:prstDash val="solid"/>
-          </a:ln>
-        </p:spPr>
+          <p:cNvPr id="14" name="Text 12"/>
+          <p:cNvSpPr/>
+          <p:nvPr/>
+        </p:nvSpPr>
+        <p:spPr>
+          <a:xfrm>
+            <a:off x="7799832" y="2935224"/>
+            <a:ext cx="3145536" cy="256032"/>
+          </a:xfrm>
+          <a:prstGeom prst="rect">
+            <a:avLst/>
+          </a:prstGeom>
+          <a:noFill/>
+          <a:ln/>
+        </p:spPr>
+        <p:txBody>
+          <a:bodyPr wrap="square" lIns="0" tIns="0" rIns="0" bIns="0" rtlCol="0" anchor="ctr"/>
+          <a:lstStyle/>
+          <a:p>
+            <a:pPr indent="0" marL="0">
+              <a:buNone/>
+            </a:pPr>
+            <a:r>
+              <a:rPr lang="en-US" sz="1300" b="1" dirty="0">
+                <a:solidFill>
+                  <a:srgbClr val="0068B7"/>
+                </a:solidFill>
+                <a:latin typeface="Aptos" pitchFamily="34" charset="0"/>
+                <a:ea typeface="Aptos" pitchFamily="34" charset="-122"/>
+                <a:cs typeface="Aptos" pitchFamily="34" charset="-120"/>
+              </a:rPr>
+              <a:t>Concept checkpoints</a:t>
+            </a:r>
+            <a:endParaRPr lang="en-US" sz="1300" dirty="0"/>
+          </a:p>
+        </p:txBody>
+      </p:sp>
+      <p:sp>
+        <p:nvSpPr>
+          <p:cNvPr id="15" name="Text 13"/>
+          <p:cNvSpPr/>
+          <p:nvPr/>
+        </p:nvSpPr>
+        <p:spPr>
+          <a:xfrm>
+            <a:off x="7818120" y="3300984"/>
+            <a:ext cx="3090672" cy="877824"/>
+          </a:xfrm>
+          <a:prstGeom prst="rect">
+            <a:avLst/>
+          </a:prstGeom>
+          <a:noFill/>
+          <a:ln/>
+        </p:spPr>
+        <p:txBody>
+          <a:bodyPr wrap="square" lIns="254" tIns="254" rIns="254" bIns="254" rtlCol="0" anchor="t">
+            <a:normAutofit/>
+          </a:bodyPr>
+          <a:lstStyle/>
+          <a:p>
+            <a:r>
+              <a:rPr lang="en-US" sz="1380" dirty="0">
+                <a:solidFill>
+                  <a:srgbClr val="17364A"/>
+                </a:solidFill>
+                <a:latin typeface="Aptos" pitchFamily="34" charset="0"/>
+                <a:ea typeface="Aptos" pitchFamily="34" charset="-122"/>
+                <a:cs typeface="Aptos" pitchFamily="34" charset="-120"/>
+              </a:rPr>
+              <a:t>Create a causal question framing worksheet for an AI-supported decision.</a:t>
+            </a:r>
+            <a:endParaRPr lang="en-US" sz="1380" dirty="0"/>
+          </a:p>
+          <a:p>
+            <a:r>
+              <a:rPr lang="en-US" sz="1380" dirty="0">
+                <a:solidFill>
+                  <a:srgbClr val="17364A"/>
+                </a:solidFill>
+                <a:latin typeface="Aptos" pitchFamily="34" charset="0"/>
+                <a:ea typeface="Aptos" pitchFamily="34" charset="-122"/>
+                <a:cs typeface="Aptos" pitchFamily="34" charset="-120"/>
+              </a:rPr>
+              <a:t>Identify the population, intervention or exposure, comparison, outcome, time period, likely.</a:t>
+            </a:r>
+            <a:endParaRPr lang="en-US" sz="1380" dirty="0"/>
+          </a:p>
+        </p:txBody>
       </p:sp>
       <p:sp>
         <p:nvSpPr>
           <p:cNvPr id="16" name="Shape 14"/>
-          <p:cNvSpPr/>
-          <p:nvPr/>
-        </p:nvSpPr>
-        <p:spPr>
-          <a:xfrm>
-            <a:off x="9198864" y="4206240"/>
-            <a:ext cx="347472" cy="347472"/>
-          </a:xfrm>
-          <a:prstGeom prst="ellipse">
-            <a:avLst/>
-          </a:prstGeom>
-          <a:solidFill>
-            <a:srgbClr val="2F8A28"/>
-          </a:solidFill>
-          <a:ln w="12700">
-            <a:solidFill>
-              <a:srgbClr val="2F8A28"/>
-            </a:solidFill>
-            <a:prstDash val="solid"/>
-          </a:ln>
-        </p:spPr>
-      </p:sp>
-      <p:sp>
-        <p:nvSpPr>
-          <p:cNvPr id="17" name="Text 15"/>
-          <p:cNvSpPr/>
-          <p:nvPr/>
-        </p:nvSpPr>
-        <p:spPr>
-          <a:xfrm>
-            <a:off x="7909560" y="3977640"/>
-            <a:ext cx="2926080" cy="182880"/>
-          </a:xfrm>
-          <a:prstGeom prst="rect">
-            <a:avLst/>
-          </a:prstGeom>
-          <a:noFill/>
-          <a:ln/>
-        </p:spPr>
-        <p:txBody>
-          <a:bodyPr wrap="square" lIns="0" tIns="0" rIns="0" bIns="0" rtlCol="0" anchor="ctr"/>
-          <a:lstStyle/>
-          <a:p>
-            <a:pPr algn="ctr" indent="0" marL="0">
-              <a:buNone/>
-            </a:pPr>
-            <a:r>
-              <a:rPr lang="en-US" sz="1000" dirty="0">
-                <a:solidFill>
-                  <a:srgbClr val="003A63"/>
-                </a:solidFill>
-                <a:latin typeface="Aptos" pitchFamily="34" charset="0"/>
-                <a:ea typeface="Aptos" pitchFamily="34" charset="-122"/>
-                <a:cs typeface="Aptos" pitchFamily="34" charset="-120"/>
-              </a:rPr>
-              <a:t>Concept to action</a:t>
-            </a:r>
-            <a:endParaRPr lang="en-US" sz="1000" dirty="0"/>
-          </a:p>
-        </p:txBody>
-      </p:sp>
-      <p:sp>
-        <p:nvSpPr>
-          <p:cNvPr id="18" name="Shape 16"/>
           <p:cNvSpPr/>
           <p:nvPr/>
         </p:nvSpPr>
@@ -8015,7 +7758,7 @@
       </p:sp>
       <p:sp>
         <p:nvSpPr>
-          <p:cNvPr id="19" name="Text 17"/>
+          <p:cNvPr id="17" name="Text 15"/>
           <p:cNvSpPr/>
           <p:nvPr/>
         </p:nvSpPr>
@@ -8054,7 +7797,7 @@
       </p:sp>
       <p:sp>
         <p:nvSpPr>
-          <p:cNvPr id="20" name="Text 18"/>
+          <p:cNvPr id="18" name="Text 16"/>
           <p:cNvSpPr/>
           <p:nvPr/>
         </p:nvSpPr>
@@ -8562,13 +8305,11 @@
             </a:avLst>
           </a:prstGeom>
           <a:solidFill>
-            <a:srgbClr val="FFFFFF">
-              <a:alpha val="88000"/>
-            </a:srgbClr>
+            <a:srgbClr val="FFFFFF"/>
           </a:solidFill>
           <a:ln w="12700">
             <a:solidFill>
-              <a:srgbClr val="D6E8F2"/>
+              <a:srgbClr val="B9D7E6"/>
             </a:solidFill>
             <a:prstDash val="solid"/>
           </a:ln>
@@ -8576,119 +8317,112 @@
       </p:sp>
       <p:sp>
         <p:nvSpPr>
-          <p:cNvPr id="14" name="Shape 12"/>
-          <p:cNvSpPr/>
-          <p:nvPr/>
-        </p:nvSpPr>
-        <p:spPr>
-          <a:xfrm>
-            <a:off x="8074152" y="3291840"/>
-            <a:ext cx="2596896" cy="749808"/>
-          </a:xfrm>
-          <a:prstGeom prst="rect">
-            <a:avLst/>
-          </a:prstGeom>
-          <a:solidFill>
-            <a:srgbClr val="EAF6F8"/>
-          </a:solidFill>
-          <a:ln w="12700">
-            <a:solidFill>
-              <a:srgbClr val="8ABBD8"/>
-            </a:solidFill>
-            <a:prstDash val="solid"/>
-          </a:ln>
-        </p:spPr>
-      </p:sp>
-      <p:sp>
-        <p:nvSpPr>
-          <p:cNvPr id="15" name="Shape 13"/>
-          <p:cNvSpPr/>
-          <p:nvPr/>
-        </p:nvSpPr>
-        <p:spPr>
-          <a:xfrm>
-            <a:off x="8202168" y="3721608"/>
-            <a:ext cx="2340864" cy="0"/>
-          </a:xfrm>
-          <a:prstGeom prst="line">
-            <a:avLst/>
-          </a:prstGeom>
-          <a:noFill/>
-          <a:ln w="19050">
-            <a:solidFill>
-              <a:srgbClr val="0068B7"/>
-            </a:solidFill>
-            <a:prstDash val="solid"/>
-          </a:ln>
-        </p:spPr>
+          <p:cNvPr id="14" name="Text 12"/>
+          <p:cNvSpPr/>
+          <p:nvPr/>
+        </p:nvSpPr>
+        <p:spPr>
+          <a:xfrm>
+            <a:off x="7799832" y="2935224"/>
+            <a:ext cx="3145536" cy="256032"/>
+          </a:xfrm>
+          <a:prstGeom prst="rect">
+            <a:avLst/>
+          </a:prstGeom>
+          <a:noFill/>
+          <a:ln/>
+        </p:spPr>
+        <p:txBody>
+          <a:bodyPr wrap="square" lIns="0" tIns="0" rIns="0" bIns="0" rtlCol="0" anchor="ctr"/>
+          <a:lstStyle/>
+          <a:p>
+            <a:pPr indent="0" marL="0">
+              <a:buNone/>
+            </a:pPr>
+            <a:r>
+              <a:rPr lang="en-US" sz="1300" b="1" dirty="0">
+                <a:solidFill>
+                  <a:srgbClr val="0068B7"/>
+                </a:solidFill>
+                <a:latin typeface="Aptos" pitchFamily="34" charset="0"/>
+                <a:ea typeface="Aptos" pitchFamily="34" charset="-122"/>
+                <a:cs typeface="Aptos" pitchFamily="34" charset="-120"/>
+              </a:rPr>
+              <a:t>Concept checkpoints</a:t>
+            </a:r>
+            <a:endParaRPr lang="en-US" sz="1300" dirty="0"/>
+          </a:p>
+        </p:txBody>
+      </p:sp>
+      <p:sp>
+        <p:nvSpPr>
+          <p:cNvPr id="15" name="Text 13"/>
+          <p:cNvSpPr/>
+          <p:nvPr/>
+        </p:nvSpPr>
+        <p:spPr>
+          <a:xfrm>
+            <a:off x="7818120" y="3300984"/>
+            <a:ext cx="3090672" cy="877824"/>
+          </a:xfrm>
+          <a:prstGeom prst="rect">
+            <a:avLst/>
+          </a:prstGeom>
+          <a:noFill/>
+          <a:ln/>
+        </p:spPr>
+        <p:txBody>
+          <a:bodyPr wrap="square" lIns="254" tIns="254" rIns="254" bIns="254" rtlCol="0" anchor="t">
+            <a:normAutofit/>
+          </a:bodyPr>
+          <a:lstStyle/>
+          <a:p>
+            <a:r>
+              <a:rPr lang="en-US" sz="1380" dirty="0">
+                <a:solidFill>
+                  <a:srgbClr val="17364A"/>
+                </a:solidFill>
+                <a:latin typeface="Aptos" pitchFamily="34" charset="0"/>
+                <a:ea typeface="Aptos" pitchFamily="34" charset="-122"/>
+                <a:cs typeface="Aptos" pitchFamily="34" charset="-120"/>
+              </a:rPr>
+              <a:t>Causal question framing worksheet</a:t>
+            </a:r>
+            <a:endParaRPr lang="en-US" sz="1380" dirty="0"/>
+          </a:p>
+          <a:p>
+            <a:r>
+              <a:rPr lang="en-US" sz="1380" dirty="0">
+                <a:solidFill>
+                  <a:srgbClr val="17364A"/>
+                </a:solidFill>
+                <a:latin typeface="Aptos" pitchFamily="34" charset="0"/>
+                <a:ea typeface="Aptos" pitchFamily="34" charset="-122"/>
+                <a:cs typeface="Aptos" pitchFamily="34" charset="-120"/>
+              </a:rPr>
+              <a:t>List of assumptions and likely confounders</a:t>
+            </a:r>
+            <a:endParaRPr lang="en-US" sz="1380" dirty="0"/>
+          </a:p>
+          <a:p>
+            <a:r>
+              <a:rPr lang="en-US" sz="1380" dirty="0">
+                <a:solidFill>
+                  <a:srgbClr val="17364A"/>
+                </a:solidFill>
+                <a:latin typeface="Aptos" pitchFamily="34" charset="0"/>
+                <a:ea typeface="Aptos" pitchFamily="34" charset="-122"/>
+                <a:cs typeface="Aptos" pitchFamily="34" charset="-120"/>
+              </a:rPr>
+              <a:t>Recommended evaluation design or expert consultation need</a:t>
+            </a:r>
+            <a:endParaRPr lang="en-US" sz="1380" dirty="0"/>
+          </a:p>
+        </p:txBody>
       </p:sp>
       <p:sp>
         <p:nvSpPr>
           <p:cNvPr id="16" name="Shape 14"/>
-          <p:cNvSpPr/>
-          <p:nvPr/>
-        </p:nvSpPr>
-        <p:spPr>
-          <a:xfrm>
-            <a:off x="9198864" y="4206240"/>
-            <a:ext cx="347472" cy="347472"/>
-          </a:xfrm>
-          <a:prstGeom prst="ellipse">
-            <a:avLst/>
-          </a:prstGeom>
-          <a:solidFill>
-            <a:srgbClr val="2F8A28"/>
-          </a:solidFill>
-          <a:ln w="12700">
-            <a:solidFill>
-              <a:srgbClr val="2F8A28"/>
-            </a:solidFill>
-            <a:prstDash val="solid"/>
-          </a:ln>
-        </p:spPr>
-      </p:sp>
-      <p:sp>
-        <p:nvSpPr>
-          <p:cNvPr id="17" name="Text 15"/>
-          <p:cNvSpPr/>
-          <p:nvPr/>
-        </p:nvSpPr>
-        <p:spPr>
-          <a:xfrm>
-            <a:off x="7909560" y="3977640"/>
-            <a:ext cx="2926080" cy="182880"/>
-          </a:xfrm>
-          <a:prstGeom prst="rect">
-            <a:avLst/>
-          </a:prstGeom>
-          <a:noFill/>
-          <a:ln/>
-        </p:spPr>
-        <p:txBody>
-          <a:bodyPr wrap="square" lIns="0" tIns="0" rIns="0" bIns="0" rtlCol="0" anchor="ctr"/>
-          <a:lstStyle/>
-          <a:p>
-            <a:pPr algn="ctr" indent="0" marL="0">
-              <a:buNone/>
-            </a:pPr>
-            <a:r>
-              <a:rPr lang="en-US" sz="1000" dirty="0">
-                <a:solidFill>
-                  <a:srgbClr val="003A63"/>
-                </a:solidFill>
-                <a:latin typeface="Aptos" pitchFamily="34" charset="0"/>
-                <a:ea typeface="Aptos" pitchFamily="34" charset="-122"/>
-                <a:cs typeface="Aptos" pitchFamily="34" charset="-120"/>
-              </a:rPr>
-              <a:t>Concept to action</a:t>
-            </a:r>
-            <a:endParaRPr lang="en-US" sz="1000" dirty="0"/>
-          </a:p>
-        </p:txBody>
-      </p:sp>
-      <p:sp>
-        <p:nvSpPr>
-          <p:cNvPr id="18" name="Shape 16"/>
           <p:cNvSpPr/>
           <p:nvPr/>
         </p:nvSpPr>
@@ -8715,7 +8449,7 @@
       </p:sp>
       <p:sp>
         <p:nvSpPr>
-          <p:cNvPr id="19" name="Text 17"/>
+          <p:cNvPr id="17" name="Text 15"/>
           <p:cNvSpPr/>
           <p:nvPr/>
         </p:nvSpPr>
@@ -8754,7 +8488,7 @@
       </p:sp>
       <p:sp>
         <p:nvSpPr>
-          <p:cNvPr id="20" name="Text 18"/>
+          <p:cNvPr id="18" name="Text 16"/>
           <p:cNvSpPr/>
           <p:nvPr/>
         </p:nvSpPr>
@@ -9234,13 +8968,11 @@
             </a:avLst>
           </a:prstGeom>
           <a:solidFill>
-            <a:srgbClr val="FFFFFF">
-              <a:alpha val="88000"/>
-            </a:srgbClr>
+            <a:srgbClr val="FFFFFF"/>
           </a:solidFill>
           <a:ln w="12700">
             <a:solidFill>
-              <a:srgbClr val="D6E8F2"/>
+              <a:srgbClr val="B9D7E6"/>
             </a:solidFill>
             <a:prstDash val="solid"/>
           </a:ln>
@@ -9248,119 +8980,84 @@
       </p:sp>
       <p:sp>
         <p:nvSpPr>
-          <p:cNvPr id="14" name="Shape 12"/>
-          <p:cNvSpPr/>
-          <p:nvPr/>
-        </p:nvSpPr>
-        <p:spPr>
-          <a:xfrm>
-            <a:off x="8074152" y="3291840"/>
-            <a:ext cx="2596896" cy="749808"/>
-          </a:xfrm>
-          <a:prstGeom prst="rect">
-            <a:avLst/>
-          </a:prstGeom>
-          <a:solidFill>
-            <a:srgbClr val="EAF6F8"/>
-          </a:solidFill>
-          <a:ln w="12700">
-            <a:solidFill>
-              <a:srgbClr val="8ABBD8"/>
-            </a:solidFill>
-            <a:prstDash val="solid"/>
-          </a:ln>
-        </p:spPr>
-      </p:sp>
-      <p:sp>
-        <p:nvSpPr>
-          <p:cNvPr id="15" name="Shape 13"/>
-          <p:cNvSpPr/>
-          <p:nvPr/>
-        </p:nvSpPr>
-        <p:spPr>
-          <a:xfrm>
-            <a:off x="8202168" y="3721608"/>
-            <a:ext cx="2340864" cy="0"/>
-          </a:xfrm>
-          <a:prstGeom prst="line">
-            <a:avLst/>
-          </a:prstGeom>
-          <a:noFill/>
-          <a:ln w="19050">
-            <a:solidFill>
-              <a:srgbClr val="0068B7"/>
-            </a:solidFill>
-            <a:prstDash val="solid"/>
-          </a:ln>
-        </p:spPr>
+          <p:cNvPr id="14" name="Text 12"/>
+          <p:cNvSpPr/>
+          <p:nvPr/>
+        </p:nvSpPr>
+        <p:spPr>
+          <a:xfrm>
+            <a:off x="7799832" y="2935224"/>
+            <a:ext cx="3145536" cy="256032"/>
+          </a:xfrm>
+          <a:prstGeom prst="rect">
+            <a:avLst/>
+          </a:prstGeom>
+          <a:noFill/>
+          <a:ln/>
+        </p:spPr>
+        <p:txBody>
+          <a:bodyPr wrap="square" lIns="0" tIns="0" rIns="0" bIns="0" rtlCol="0" anchor="ctr"/>
+          <a:lstStyle/>
+          <a:p>
+            <a:pPr indent="0" marL="0">
+              <a:buNone/>
+            </a:pPr>
+            <a:r>
+              <a:rPr lang="en-US" sz="1300" b="1" dirty="0">
+                <a:solidFill>
+                  <a:srgbClr val="0068B7"/>
+                </a:solidFill>
+                <a:latin typeface="Aptos" pitchFamily="34" charset="0"/>
+                <a:ea typeface="Aptos" pitchFamily="34" charset="-122"/>
+                <a:cs typeface="Aptos" pitchFamily="34" charset="-120"/>
+              </a:rPr>
+              <a:t>Concept checkpoints</a:t>
+            </a:r>
+            <a:endParaRPr lang="en-US" sz="1300" dirty="0"/>
+          </a:p>
+        </p:txBody>
+      </p:sp>
+      <p:sp>
+        <p:nvSpPr>
+          <p:cNvPr id="15" name="Text 13"/>
+          <p:cNvSpPr/>
+          <p:nvPr/>
+        </p:nvSpPr>
+        <p:spPr>
+          <a:xfrm>
+            <a:off x="7818120" y="3300984"/>
+            <a:ext cx="3090672" cy="877824"/>
+          </a:xfrm>
+          <a:prstGeom prst="rect">
+            <a:avLst/>
+          </a:prstGeom>
+          <a:noFill/>
+          <a:ln/>
+        </p:spPr>
+        <p:txBody>
+          <a:bodyPr wrap="square" lIns="254" tIns="254" rIns="254" bIns="254" rtlCol="0" anchor="t">
+            <a:normAutofit/>
+          </a:bodyPr>
+          <a:lstStyle/>
+          <a:p>
+            <a:r>
+              <a:rPr lang="en-US" sz="1380" dirty="0">
+                <a:solidFill>
+                  <a:srgbClr val="17364A"/>
+                </a:solidFill>
+                <a:latin typeface="Aptos" pitchFamily="34" charset="0"/>
+                <a:ea typeface="Aptos" pitchFamily="34" charset="-122"/>
+                <a:cs typeface="Aptos" pitchFamily="34" charset="-120"/>
+              </a:rPr>
+              <a:t>Plain-language statement distinguishing prediction from causation</a:t>
+            </a:r>
+            <a:endParaRPr lang="en-US" sz="1380" dirty="0"/>
+          </a:p>
+        </p:txBody>
       </p:sp>
       <p:sp>
         <p:nvSpPr>
           <p:cNvPr id="16" name="Shape 14"/>
-          <p:cNvSpPr/>
-          <p:nvPr/>
-        </p:nvSpPr>
-        <p:spPr>
-          <a:xfrm>
-            <a:off x="9198864" y="4206240"/>
-            <a:ext cx="347472" cy="347472"/>
-          </a:xfrm>
-          <a:prstGeom prst="ellipse">
-            <a:avLst/>
-          </a:prstGeom>
-          <a:solidFill>
-            <a:srgbClr val="2F8A28"/>
-          </a:solidFill>
-          <a:ln w="12700">
-            <a:solidFill>
-              <a:srgbClr val="2F8A28"/>
-            </a:solidFill>
-            <a:prstDash val="solid"/>
-          </a:ln>
-        </p:spPr>
-      </p:sp>
-      <p:sp>
-        <p:nvSpPr>
-          <p:cNvPr id="17" name="Text 15"/>
-          <p:cNvSpPr/>
-          <p:nvPr/>
-        </p:nvSpPr>
-        <p:spPr>
-          <a:xfrm>
-            <a:off x="7909560" y="3977640"/>
-            <a:ext cx="2926080" cy="182880"/>
-          </a:xfrm>
-          <a:prstGeom prst="rect">
-            <a:avLst/>
-          </a:prstGeom>
-          <a:noFill/>
-          <a:ln/>
-        </p:spPr>
-        <p:txBody>
-          <a:bodyPr wrap="square" lIns="0" tIns="0" rIns="0" bIns="0" rtlCol="0" anchor="ctr"/>
-          <a:lstStyle/>
-          <a:p>
-            <a:pPr algn="ctr" indent="0" marL="0">
-              <a:buNone/>
-            </a:pPr>
-            <a:r>
-              <a:rPr lang="en-US" sz="1000" dirty="0">
-                <a:solidFill>
-                  <a:srgbClr val="003A63"/>
-                </a:solidFill>
-                <a:latin typeface="Aptos" pitchFamily="34" charset="0"/>
-                <a:ea typeface="Aptos" pitchFamily="34" charset="-122"/>
-                <a:cs typeface="Aptos" pitchFamily="34" charset="-120"/>
-              </a:rPr>
-              <a:t>Concept to action</a:t>
-            </a:r>
-            <a:endParaRPr lang="en-US" sz="1000" dirty="0"/>
-          </a:p>
-        </p:txBody>
-      </p:sp>
-      <p:sp>
-        <p:nvSpPr>
-          <p:cNvPr id="18" name="Shape 16"/>
           <p:cNvSpPr/>
           <p:nvPr/>
         </p:nvSpPr>
@@ -9387,7 +9084,7 @@
       </p:sp>
       <p:sp>
         <p:nvSpPr>
-          <p:cNvPr id="19" name="Text 17"/>
+          <p:cNvPr id="17" name="Text 15"/>
           <p:cNvSpPr/>
           <p:nvPr/>
         </p:nvSpPr>
@@ -9426,7 +9123,7 @@
       </p:sp>
       <p:sp>
         <p:nvSpPr>
-          <p:cNvPr id="20" name="Text 18"/>
+          <p:cNvPr id="18" name="Text 16"/>
           <p:cNvSpPr/>
           <p:nvPr/>
         </p:nvSpPr>
@@ -9934,13 +9631,11 @@
             </a:avLst>
           </a:prstGeom>
           <a:solidFill>
-            <a:srgbClr val="FFFFFF">
-              <a:alpha val="88000"/>
-            </a:srgbClr>
+            <a:srgbClr val="FFFFFF"/>
           </a:solidFill>
           <a:ln w="12700">
             <a:solidFill>
-              <a:srgbClr val="D6E8F2"/>
+              <a:srgbClr val="B9D7E6"/>
             </a:solidFill>
             <a:prstDash val="solid"/>
           </a:ln>
@@ -9948,119 +9643,112 @@
       </p:sp>
       <p:sp>
         <p:nvSpPr>
-          <p:cNvPr id="14" name="Shape 12"/>
-          <p:cNvSpPr/>
-          <p:nvPr/>
-        </p:nvSpPr>
-        <p:spPr>
-          <a:xfrm>
-            <a:off x="8074152" y="3291840"/>
-            <a:ext cx="2596896" cy="749808"/>
-          </a:xfrm>
-          <a:prstGeom prst="rect">
-            <a:avLst/>
-          </a:prstGeom>
-          <a:solidFill>
-            <a:srgbClr val="EAF6F8"/>
-          </a:solidFill>
-          <a:ln w="12700">
-            <a:solidFill>
-              <a:srgbClr val="8ABBD8"/>
-            </a:solidFill>
-            <a:prstDash val="solid"/>
-          </a:ln>
-        </p:spPr>
-      </p:sp>
-      <p:sp>
-        <p:nvSpPr>
-          <p:cNvPr id="15" name="Shape 13"/>
-          <p:cNvSpPr/>
-          <p:nvPr/>
-        </p:nvSpPr>
-        <p:spPr>
-          <a:xfrm>
-            <a:off x="8202168" y="3721608"/>
-            <a:ext cx="2340864" cy="0"/>
-          </a:xfrm>
-          <a:prstGeom prst="line">
-            <a:avLst/>
-          </a:prstGeom>
-          <a:noFill/>
-          <a:ln w="19050">
-            <a:solidFill>
-              <a:srgbClr val="0068B7"/>
-            </a:solidFill>
-            <a:prstDash val="solid"/>
-          </a:ln>
-        </p:spPr>
+          <p:cNvPr id="14" name="Text 12"/>
+          <p:cNvSpPr/>
+          <p:nvPr/>
+        </p:nvSpPr>
+        <p:spPr>
+          <a:xfrm>
+            <a:off x="7799832" y="2935224"/>
+            <a:ext cx="3145536" cy="256032"/>
+          </a:xfrm>
+          <a:prstGeom prst="rect">
+            <a:avLst/>
+          </a:prstGeom>
+          <a:noFill/>
+          <a:ln/>
+        </p:spPr>
+        <p:txBody>
+          <a:bodyPr wrap="square" lIns="0" tIns="0" rIns="0" bIns="0" rtlCol="0" anchor="ctr"/>
+          <a:lstStyle/>
+          <a:p>
+            <a:pPr indent="0" marL="0">
+              <a:buNone/>
+            </a:pPr>
+            <a:r>
+              <a:rPr lang="en-US" sz="1300" b="1" dirty="0">
+                <a:solidFill>
+                  <a:srgbClr val="0068B7"/>
+                </a:solidFill>
+                <a:latin typeface="Aptos" pitchFamily="34" charset="0"/>
+                <a:ea typeface="Aptos" pitchFamily="34" charset="-122"/>
+                <a:cs typeface="Aptos" pitchFamily="34" charset="-120"/>
+              </a:rPr>
+              <a:t>Concept checkpoints</a:t>
+            </a:r>
+            <a:endParaRPr lang="en-US" sz="1300" dirty="0"/>
+          </a:p>
+        </p:txBody>
+      </p:sp>
+      <p:sp>
+        <p:nvSpPr>
+          <p:cNvPr id="15" name="Text 13"/>
+          <p:cNvSpPr/>
+          <p:nvPr/>
+        </p:nvSpPr>
+        <p:spPr>
+          <a:xfrm>
+            <a:off x="7818120" y="3300984"/>
+            <a:ext cx="3090672" cy="877824"/>
+          </a:xfrm>
+          <a:prstGeom prst="rect">
+            <a:avLst/>
+          </a:prstGeom>
+          <a:noFill/>
+          <a:ln/>
+        </p:spPr>
+        <p:txBody>
+          <a:bodyPr wrap="square" lIns="254" tIns="254" rIns="254" bIns="254" rtlCol="0" anchor="t">
+            <a:normAutofit/>
+          </a:bodyPr>
+          <a:lstStyle/>
+          <a:p>
+            <a:r>
+              <a:rPr lang="en-US" sz="1380" dirty="0">
+                <a:solidFill>
+                  <a:srgbClr val="17364A"/>
+                </a:solidFill>
+                <a:latin typeface="Aptos" pitchFamily="34" charset="0"/>
+                <a:ea typeface="Aptos" pitchFamily="34" charset="-122"/>
+                <a:cs typeface="Aptos" pitchFamily="34" charset="-120"/>
+              </a:rPr>
+              <a:t>Causal question framing worksheet</a:t>
+            </a:r>
+            <a:endParaRPr lang="en-US" sz="1380" dirty="0"/>
+          </a:p>
+          <a:p>
+            <a:r>
+              <a:rPr lang="en-US" sz="1380" dirty="0">
+                <a:solidFill>
+                  <a:srgbClr val="17364A"/>
+                </a:solidFill>
+                <a:latin typeface="Aptos" pitchFamily="34" charset="0"/>
+                <a:ea typeface="Aptos" pitchFamily="34" charset="-122"/>
+                <a:cs typeface="Aptos" pitchFamily="34" charset="-120"/>
+              </a:rPr>
+              <a:t>List of assumptions and likely confounders</a:t>
+            </a:r>
+            <a:endParaRPr lang="en-US" sz="1380" dirty="0"/>
+          </a:p>
+          <a:p>
+            <a:r>
+              <a:rPr lang="en-US" sz="1380" dirty="0">
+                <a:solidFill>
+                  <a:srgbClr val="17364A"/>
+                </a:solidFill>
+                <a:latin typeface="Aptos" pitchFamily="34" charset="0"/>
+                <a:ea typeface="Aptos" pitchFamily="34" charset="-122"/>
+                <a:cs typeface="Aptos" pitchFamily="34" charset="-120"/>
+              </a:rPr>
+              <a:t>Recommended evaluation design or expert consultation need</a:t>
+            </a:r>
+            <a:endParaRPr lang="en-US" sz="1380" dirty="0"/>
+          </a:p>
+        </p:txBody>
       </p:sp>
       <p:sp>
         <p:nvSpPr>
           <p:cNvPr id="16" name="Shape 14"/>
-          <p:cNvSpPr/>
-          <p:nvPr/>
-        </p:nvSpPr>
-        <p:spPr>
-          <a:xfrm>
-            <a:off x="9198864" y="4206240"/>
-            <a:ext cx="347472" cy="347472"/>
-          </a:xfrm>
-          <a:prstGeom prst="ellipse">
-            <a:avLst/>
-          </a:prstGeom>
-          <a:solidFill>
-            <a:srgbClr val="2F8A28"/>
-          </a:solidFill>
-          <a:ln w="12700">
-            <a:solidFill>
-              <a:srgbClr val="2F8A28"/>
-            </a:solidFill>
-            <a:prstDash val="solid"/>
-          </a:ln>
-        </p:spPr>
-      </p:sp>
-      <p:sp>
-        <p:nvSpPr>
-          <p:cNvPr id="17" name="Text 15"/>
-          <p:cNvSpPr/>
-          <p:nvPr/>
-        </p:nvSpPr>
-        <p:spPr>
-          <a:xfrm>
-            <a:off x="7909560" y="3977640"/>
-            <a:ext cx="2926080" cy="182880"/>
-          </a:xfrm>
-          <a:prstGeom prst="rect">
-            <a:avLst/>
-          </a:prstGeom>
-          <a:noFill/>
-          <a:ln/>
-        </p:spPr>
-        <p:txBody>
-          <a:bodyPr wrap="square" lIns="0" tIns="0" rIns="0" bIns="0" rtlCol="0" anchor="ctr"/>
-          <a:lstStyle/>
-          <a:p>
-            <a:pPr algn="ctr" indent="0" marL="0">
-              <a:buNone/>
-            </a:pPr>
-            <a:r>
-              <a:rPr lang="en-US" sz="1000" dirty="0">
-                <a:solidFill>
-                  <a:srgbClr val="003A63"/>
-                </a:solidFill>
-                <a:latin typeface="Aptos" pitchFamily="34" charset="0"/>
-                <a:ea typeface="Aptos" pitchFamily="34" charset="-122"/>
-                <a:cs typeface="Aptos" pitchFamily="34" charset="-120"/>
-              </a:rPr>
-              <a:t>Concept to action</a:t>
-            </a:r>
-            <a:endParaRPr lang="en-US" sz="1000" dirty="0"/>
-          </a:p>
-        </p:txBody>
-      </p:sp>
-      <p:sp>
-        <p:nvSpPr>
-          <p:cNvPr id="18" name="Shape 16"/>
           <p:cNvSpPr/>
           <p:nvPr/>
         </p:nvSpPr>
@@ -10087,7 +9775,7 @@
       </p:sp>
       <p:sp>
         <p:nvSpPr>
-          <p:cNvPr id="19" name="Text 17"/>
+          <p:cNvPr id="17" name="Text 15"/>
           <p:cNvSpPr/>
           <p:nvPr/>
         </p:nvSpPr>
@@ -10126,7 +9814,7 @@
       </p:sp>
       <p:sp>
         <p:nvSpPr>
-          <p:cNvPr id="20" name="Text 18"/>
+          <p:cNvPr id="18" name="Text 16"/>
           <p:cNvSpPr/>
           <p:nvPr/>
         </p:nvSpPr>
@@ -10659,20 +10347,20 @@
         </p:nvSpPr>
         <p:spPr>
           <a:xfrm>
-            <a:off x="7635240" y="3730752"/>
-            <a:ext cx="1033272" cy="749808"/>
+            <a:off x="7909560" y="3675888"/>
+            <a:ext cx="3154680" cy="1691640"/>
           </a:xfrm>
           <a:prstGeom prst="roundRect">
             <a:avLst>
-              <a:gd name="adj" fmla="val 14634"/>
+              <a:gd name="adj" fmla="val 6486"/>
             </a:avLst>
           </a:prstGeom>
           <a:solidFill>
-            <a:srgbClr val="0068B7"/>
+            <a:srgbClr val="FFFFFF"/>
           </a:solidFill>
           <a:ln w="12700">
             <a:solidFill>
-              <a:srgbClr val="0068B7"/>
+              <a:srgbClr val="B9D7E6"/>
             </a:solidFill>
             <a:prstDash val="solid"/>
           </a:ln>
@@ -10686,172 +10374,100 @@
         </p:nvSpPr>
         <p:spPr>
           <a:xfrm>
-            <a:off x="7708392" y="3922776"/>
-            <a:ext cx="886968" cy="310896"/>
-          </a:xfrm>
-          <a:prstGeom prst="rect">
-            <a:avLst/>
-          </a:prstGeom>
-          <a:noFill/>
-          <a:ln/>
-        </p:spPr>
-        <p:txBody>
-          <a:bodyPr wrap="square" lIns="0" tIns="0" rIns="0" bIns="0" rtlCol="0" anchor="ctr">
+            <a:off x="8074152" y="3822192"/>
+            <a:ext cx="2825496" cy="256032"/>
+          </a:xfrm>
+          <a:prstGeom prst="rect">
+            <a:avLst/>
+          </a:prstGeom>
+          <a:noFill/>
+          <a:ln/>
+        </p:spPr>
+        <p:txBody>
+          <a:bodyPr wrap="square" lIns="0" tIns="0" rIns="0" bIns="0" rtlCol="0" anchor="ctr"/>
+          <a:lstStyle/>
+          <a:p>
+            <a:pPr indent="0" marL="0">
+              <a:buNone/>
+            </a:pPr>
+            <a:r>
+              <a:rPr lang="en-US" sz="1300" b="1" dirty="0">
+                <a:solidFill>
+                  <a:srgbClr val="0068B7"/>
+                </a:solidFill>
+                <a:latin typeface="Aptos" pitchFamily="34" charset="0"/>
+                <a:ea typeface="Aptos" pitchFamily="34" charset="-122"/>
+                <a:cs typeface="Aptos" pitchFamily="34" charset="-120"/>
+              </a:rPr>
+              <a:t>Learning sequence</a:t>
+            </a:r>
+            <a:endParaRPr lang="en-US" sz="1300" dirty="0"/>
+          </a:p>
+        </p:txBody>
+      </p:sp>
+      <p:sp>
+        <p:nvSpPr>
+          <p:cNvPr id="15" name="Text 13"/>
+          <p:cNvSpPr/>
+          <p:nvPr/>
+        </p:nvSpPr>
+        <p:spPr>
+          <a:xfrm>
+            <a:off x="8092440" y="4187952"/>
+            <a:ext cx="2770632" cy="1033272"/>
+          </a:xfrm>
+          <a:prstGeom prst="rect">
+            <a:avLst/>
+          </a:prstGeom>
+          <a:noFill/>
+          <a:ln/>
+        </p:spPr>
+        <p:txBody>
+          <a:bodyPr wrap="square" lIns="254" tIns="254" rIns="254" bIns="254" rtlCol="0" anchor="t">
             <a:normAutofit/>
           </a:bodyPr>
           <a:lstStyle/>
           <a:p>
-            <a:pPr algn="ctr" indent="0" marL="0">
-              <a:buNone/>
-            </a:pPr>
-            <a:r>
-              <a:rPr lang="en-US" sz="1500" b="1" dirty="0">
-                <a:solidFill>
-                  <a:srgbClr val="FFFFFF"/>
-                </a:solidFill>
-                <a:latin typeface="Aptos" pitchFamily="34" charset="0"/>
-                <a:ea typeface="Aptos" pitchFamily="34" charset="-122"/>
-                <a:cs typeface="Aptos" pitchFamily="34" charset="-120"/>
-              </a:rPr>
-              <a:t>Learn</a:t>
-            </a:r>
-            <a:endParaRPr lang="en-US" sz="1500" dirty="0"/>
-          </a:p>
-        </p:txBody>
-      </p:sp>
-      <p:sp>
-        <p:nvSpPr>
-          <p:cNvPr id="15" name="Shape 13"/>
-          <p:cNvSpPr/>
-          <p:nvPr/>
-        </p:nvSpPr>
-        <p:spPr>
-          <a:xfrm>
-            <a:off x="8924544" y="3730752"/>
-            <a:ext cx="1033272" cy="749808"/>
-          </a:xfrm>
-          <a:prstGeom prst="roundRect">
-            <a:avLst>
-              <a:gd name="adj" fmla="val 14634"/>
-            </a:avLst>
-          </a:prstGeom>
-          <a:solidFill>
-            <a:srgbClr val="2F8A28"/>
-          </a:solidFill>
-          <a:ln w="12700">
-            <a:solidFill>
-              <a:srgbClr val="2F8A28"/>
-            </a:solidFill>
-            <a:prstDash val="solid"/>
-          </a:ln>
-        </p:spPr>
-      </p:sp>
-      <p:sp>
-        <p:nvSpPr>
-          <p:cNvPr id="16" name="Text 14"/>
-          <p:cNvSpPr/>
-          <p:nvPr/>
-        </p:nvSpPr>
-        <p:spPr>
-          <a:xfrm>
-            <a:off x="8997696" y="3922776"/>
-            <a:ext cx="886968" cy="310896"/>
-          </a:xfrm>
-          <a:prstGeom prst="rect">
-            <a:avLst/>
-          </a:prstGeom>
-          <a:noFill/>
-          <a:ln/>
-        </p:spPr>
-        <p:txBody>
-          <a:bodyPr wrap="square" lIns="0" tIns="0" rIns="0" bIns="0" rtlCol="0" anchor="ctr">
-            <a:normAutofit/>
-          </a:bodyPr>
-          <a:lstStyle/>
-          <a:p>
-            <a:pPr algn="ctr" indent="0" marL="0">
-              <a:buNone/>
-            </a:pPr>
-            <a:r>
-              <a:rPr lang="en-US" sz="1500" b="1" dirty="0">
-                <a:solidFill>
-                  <a:srgbClr val="FFFFFF"/>
-                </a:solidFill>
-                <a:latin typeface="Aptos" pitchFamily="34" charset="0"/>
-                <a:ea typeface="Aptos" pitchFamily="34" charset="-122"/>
-                <a:cs typeface="Aptos" pitchFamily="34" charset="-120"/>
-              </a:rPr>
-              <a:t>Apply</a:t>
-            </a:r>
-            <a:endParaRPr lang="en-US" sz="1500" dirty="0"/>
-          </a:p>
-        </p:txBody>
-      </p:sp>
-      <p:sp>
-        <p:nvSpPr>
-          <p:cNvPr id="17" name="Shape 15"/>
-          <p:cNvSpPr/>
-          <p:nvPr/>
-        </p:nvSpPr>
-        <p:spPr>
-          <a:xfrm>
-            <a:off x="10213848" y="3730752"/>
-            <a:ext cx="1033272" cy="749808"/>
-          </a:xfrm>
-          <a:prstGeom prst="roundRect">
-            <a:avLst>
-              <a:gd name="adj" fmla="val 14634"/>
-            </a:avLst>
-          </a:prstGeom>
-          <a:solidFill>
-            <a:srgbClr val="6A4CA3"/>
-          </a:solidFill>
-          <a:ln w="12700">
-            <a:solidFill>
-              <a:srgbClr val="6A4CA3"/>
-            </a:solidFill>
-            <a:prstDash val="solid"/>
-          </a:ln>
-        </p:spPr>
-      </p:sp>
-      <p:sp>
-        <p:nvSpPr>
-          <p:cNvPr id="18" name="Text 16"/>
-          <p:cNvSpPr/>
-          <p:nvPr/>
-        </p:nvSpPr>
-        <p:spPr>
-          <a:xfrm>
-            <a:off x="10287000" y="3922776"/>
-            <a:ext cx="886968" cy="310896"/>
-          </a:xfrm>
-          <a:prstGeom prst="rect">
-            <a:avLst/>
-          </a:prstGeom>
-          <a:noFill/>
-          <a:ln/>
-        </p:spPr>
-        <p:txBody>
-          <a:bodyPr wrap="square" lIns="0" tIns="0" rIns="0" bIns="0" rtlCol="0" anchor="ctr">
-            <a:normAutofit/>
-          </a:bodyPr>
-          <a:lstStyle/>
-          <a:p>
-            <a:pPr algn="ctr" indent="0" marL="0">
-              <a:buNone/>
-            </a:pPr>
-            <a:r>
-              <a:rPr lang="en-US" sz="1500" b="1" dirty="0">
-                <a:solidFill>
-                  <a:srgbClr val="FFFFFF"/>
-                </a:solidFill>
-                <a:latin typeface="Aptos" pitchFamily="34" charset="0"/>
-                <a:ea typeface="Aptos" pitchFamily="34" charset="-122"/>
-                <a:cs typeface="Aptos" pitchFamily="34" charset="-120"/>
-              </a:rPr>
-              <a:t>Document</a:t>
-            </a:r>
-            <a:endParaRPr lang="en-US" sz="1500" dirty="0"/>
+            <a:r>
+              <a:rPr lang="en-US" sz="1380" dirty="0">
+                <a:solidFill>
+                  <a:srgbClr val="17364A"/>
+                </a:solidFill>
+                <a:latin typeface="Aptos" pitchFamily="34" charset="0"/>
+                <a:ea typeface="Aptos" pitchFamily="34" charset="-122"/>
+                <a:cs typeface="Aptos" pitchFamily="34" charset="-120"/>
+              </a:rPr>
+              <a:t>Read the module for shared vocabulary and context.</a:t>
+            </a:r>
+            <a:endParaRPr lang="en-US" sz="1380" dirty="0"/>
+          </a:p>
+          <a:p>
+            <a:r>
+              <a:rPr lang="en-US" sz="1380" dirty="0">
+                <a:solidFill>
+                  <a:srgbClr val="17364A"/>
+                </a:solidFill>
+                <a:latin typeface="Aptos" pitchFamily="34" charset="0"/>
+                <a:ea typeface="Aptos" pitchFamily="34" charset="-122"/>
+                <a:cs typeface="Aptos" pitchFamily="34" charset="-120"/>
+              </a:rPr>
+              <a:t>Complete the practical exercise to apply the concept.</a:t>
+            </a:r>
+            <a:endParaRPr lang="en-US" sz="1380" dirty="0"/>
+          </a:p>
+          <a:p>
+            <a:r>
+              <a:rPr lang="en-US" sz="1380" dirty="0">
+                <a:solidFill>
+                  <a:srgbClr val="17364A"/>
+                </a:solidFill>
+                <a:latin typeface="Aptos" pitchFamily="34" charset="0"/>
+                <a:ea typeface="Aptos" pitchFamily="34" charset="-122"/>
+                <a:cs typeface="Aptos" pitchFamily="34" charset="-120"/>
+              </a:rPr>
+              <a:t>Use the notes and references for deeper review.</a:t>
+            </a:r>
+            <a:endParaRPr lang="en-US" sz="1380" dirty="0"/>
           </a:p>
         </p:txBody>
       </p:sp>
@@ -11324,13 +10940,11 @@
             </a:avLst>
           </a:prstGeom>
           <a:solidFill>
-            <a:srgbClr val="FFFFFF">
-              <a:alpha val="88000"/>
-            </a:srgbClr>
+            <a:srgbClr val="FFFFFF"/>
           </a:solidFill>
           <a:ln w="12700">
             <a:solidFill>
-              <a:srgbClr val="D6E8F2"/>
+              <a:srgbClr val="B9D7E6"/>
             </a:solidFill>
             <a:prstDash val="solid"/>
           </a:ln>
@@ -11338,119 +10952,112 @@
       </p:sp>
       <p:sp>
         <p:nvSpPr>
-          <p:cNvPr id="14" name="Shape 12"/>
-          <p:cNvSpPr/>
-          <p:nvPr/>
-        </p:nvSpPr>
-        <p:spPr>
-          <a:xfrm>
-            <a:off x="8074152" y="3291840"/>
-            <a:ext cx="2596896" cy="749808"/>
-          </a:xfrm>
-          <a:prstGeom prst="rect">
-            <a:avLst/>
-          </a:prstGeom>
-          <a:solidFill>
-            <a:srgbClr val="EAF6F8"/>
-          </a:solidFill>
-          <a:ln w="12700">
-            <a:solidFill>
-              <a:srgbClr val="8ABBD8"/>
-            </a:solidFill>
-            <a:prstDash val="solid"/>
-          </a:ln>
-        </p:spPr>
-      </p:sp>
-      <p:sp>
-        <p:nvSpPr>
-          <p:cNvPr id="15" name="Shape 13"/>
-          <p:cNvSpPr/>
-          <p:nvPr/>
-        </p:nvSpPr>
-        <p:spPr>
-          <a:xfrm>
-            <a:off x="8202168" y="3721608"/>
-            <a:ext cx="2340864" cy="0"/>
-          </a:xfrm>
-          <a:prstGeom prst="line">
-            <a:avLst/>
-          </a:prstGeom>
-          <a:noFill/>
-          <a:ln w="19050">
-            <a:solidFill>
-              <a:srgbClr val="0068B7"/>
-            </a:solidFill>
-            <a:prstDash val="solid"/>
-          </a:ln>
-        </p:spPr>
+          <p:cNvPr id="14" name="Text 12"/>
+          <p:cNvSpPr/>
+          <p:nvPr/>
+        </p:nvSpPr>
+        <p:spPr>
+          <a:xfrm>
+            <a:off x="7799832" y="2935224"/>
+            <a:ext cx="3145536" cy="256032"/>
+          </a:xfrm>
+          <a:prstGeom prst="rect">
+            <a:avLst/>
+          </a:prstGeom>
+          <a:noFill/>
+          <a:ln/>
+        </p:spPr>
+        <p:txBody>
+          <a:bodyPr wrap="square" lIns="0" tIns="0" rIns="0" bIns="0" rtlCol="0" anchor="ctr"/>
+          <a:lstStyle/>
+          <a:p>
+            <a:pPr indent="0" marL="0">
+              <a:buNone/>
+            </a:pPr>
+            <a:r>
+              <a:rPr lang="en-US" sz="1300" b="1" dirty="0">
+                <a:solidFill>
+                  <a:srgbClr val="0068B7"/>
+                </a:solidFill>
+                <a:latin typeface="Aptos" pitchFamily="34" charset="0"/>
+                <a:ea typeface="Aptos" pitchFamily="34" charset="-122"/>
+                <a:cs typeface="Aptos" pitchFamily="34" charset="-120"/>
+              </a:rPr>
+              <a:t>Concept checkpoints</a:t>
+            </a:r>
+            <a:endParaRPr lang="en-US" sz="1300" dirty="0"/>
+          </a:p>
+        </p:txBody>
+      </p:sp>
+      <p:sp>
+        <p:nvSpPr>
+          <p:cNvPr id="15" name="Text 13"/>
+          <p:cNvSpPr/>
+          <p:nvPr/>
+        </p:nvSpPr>
+        <p:spPr>
+          <a:xfrm>
+            <a:off x="7818120" y="3300984"/>
+            <a:ext cx="3090672" cy="877824"/>
+          </a:xfrm>
+          <a:prstGeom prst="rect">
+            <a:avLst/>
+          </a:prstGeom>
+          <a:noFill/>
+          <a:ln/>
+        </p:spPr>
+        <p:txBody>
+          <a:bodyPr wrap="square" lIns="254" tIns="254" rIns="254" bIns="254" rtlCol="0" anchor="t">
+            <a:normAutofit/>
+          </a:bodyPr>
+          <a:lstStyle/>
+          <a:p>
+            <a:r>
+              <a:rPr lang="en-US" sz="1380" dirty="0">
+                <a:solidFill>
+                  <a:srgbClr val="17364A"/>
+                </a:solidFill>
+                <a:latin typeface="Aptos" pitchFamily="34" charset="0"/>
+                <a:ea typeface="Aptos" pitchFamily="34" charset="-122"/>
+                <a:cs typeface="Aptos" pitchFamily="34" charset="-120"/>
+              </a:rPr>
+              <a:t>1.</a:t>
+            </a:r>
+            <a:endParaRPr lang="en-US" sz="1380" dirty="0"/>
+          </a:p>
+          <a:p>
+            <a:r>
+              <a:rPr lang="en-US" sz="1380" dirty="0">
+                <a:solidFill>
+                  <a:srgbClr val="17364A"/>
+                </a:solidFill>
+                <a:latin typeface="Aptos" pitchFamily="34" charset="0"/>
+                <a:ea typeface="Aptos" pitchFamily="34" charset="-122"/>
+                <a:cs typeface="Aptos" pitchFamily="34" charset="-120"/>
+              </a:rPr>
+              <a:t>Which statement best distinguishes prediction from causal inference?</a:t>
+            </a:r>
+            <a:endParaRPr lang="en-US" sz="1380" dirty="0"/>
+          </a:p>
+          <a:p>
+            <a:r>
+              <a:rPr lang="en-US" sz="1380" dirty="0">
+                <a:solidFill>
+                  <a:srgbClr val="17364A"/>
+                </a:solidFill>
+                <a:latin typeface="Aptos" pitchFamily="34" charset="0"/>
+                <a:ea typeface="Aptos" pitchFamily="34" charset="-122"/>
+                <a:cs typeface="Aptos" pitchFamily="34" charset="-120"/>
+              </a:rPr>
+              <a:t>2.</a:t>
+            </a:r>
+            <a:endParaRPr lang="en-US" sz="1380" dirty="0"/>
+          </a:p>
+        </p:txBody>
       </p:sp>
       <p:sp>
         <p:nvSpPr>
           <p:cNvPr id="16" name="Shape 14"/>
-          <p:cNvSpPr/>
-          <p:nvPr/>
-        </p:nvSpPr>
-        <p:spPr>
-          <a:xfrm>
-            <a:off x="9198864" y="4206240"/>
-            <a:ext cx="347472" cy="347472"/>
-          </a:xfrm>
-          <a:prstGeom prst="ellipse">
-            <a:avLst/>
-          </a:prstGeom>
-          <a:solidFill>
-            <a:srgbClr val="2F8A28"/>
-          </a:solidFill>
-          <a:ln w="12700">
-            <a:solidFill>
-              <a:srgbClr val="2F8A28"/>
-            </a:solidFill>
-            <a:prstDash val="solid"/>
-          </a:ln>
-        </p:spPr>
-      </p:sp>
-      <p:sp>
-        <p:nvSpPr>
-          <p:cNvPr id="17" name="Text 15"/>
-          <p:cNvSpPr/>
-          <p:nvPr/>
-        </p:nvSpPr>
-        <p:spPr>
-          <a:xfrm>
-            <a:off x="7909560" y="3977640"/>
-            <a:ext cx="2926080" cy="182880"/>
-          </a:xfrm>
-          <a:prstGeom prst="rect">
-            <a:avLst/>
-          </a:prstGeom>
-          <a:noFill/>
-          <a:ln/>
-        </p:spPr>
-        <p:txBody>
-          <a:bodyPr wrap="square" lIns="0" tIns="0" rIns="0" bIns="0" rtlCol="0" anchor="ctr"/>
-          <a:lstStyle/>
-          <a:p>
-            <a:pPr algn="ctr" indent="0" marL="0">
-              <a:buNone/>
-            </a:pPr>
-            <a:r>
-              <a:rPr lang="en-US" sz="1000" dirty="0">
-                <a:solidFill>
-                  <a:srgbClr val="003A63"/>
-                </a:solidFill>
-                <a:latin typeface="Aptos" pitchFamily="34" charset="0"/>
-                <a:ea typeface="Aptos" pitchFamily="34" charset="-122"/>
-                <a:cs typeface="Aptos" pitchFamily="34" charset="-120"/>
-              </a:rPr>
-              <a:t>Concept to action</a:t>
-            </a:r>
-            <a:endParaRPr lang="en-US" sz="1000" dirty="0"/>
-          </a:p>
-        </p:txBody>
-      </p:sp>
-      <p:sp>
-        <p:nvSpPr>
-          <p:cNvPr id="18" name="Shape 16"/>
           <p:cNvSpPr/>
           <p:nvPr/>
         </p:nvSpPr>
@@ -11477,7 +11084,7 @@
       </p:sp>
       <p:sp>
         <p:nvSpPr>
-          <p:cNvPr id="19" name="Text 17"/>
+          <p:cNvPr id="17" name="Text 15"/>
           <p:cNvSpPr/>
           <p:nvPr/>
         </p:nvSpPr>
@@ -11516,7 +11123,7 @@
       </p:sp>
       <p:sp>
         <p:nvSpPr>
-          <p:cNvPr id="20" name="Text 18"/>
+          <p:cNvPr id="18" name="Text 16"/>
           <p:cNvSpPr/>
           <p:nvPr/>
         </p:nvSpPr>
@@ -12024,13 +11631,11 @@
             </a:avLst>
           </a:prstGeom>
           <a:solidFill>
-            <a:srgbClr val="FFFFFF">
-              <a:alpha val="88000"/>
-            </a:srgbClr>
+            <a:srgbClr val="FFFFFF"/>
           </a:solidFill>
           <a:ln w="12700">
             <a:solidFill>
-              <a:srgbClr val="D6E8F2"/>
+              <a:srgbClr val="B9D7E6"/>
             </a:solidFill>
             <a:prstDash val="solid"/>
           </a:ln>
@@ -12038,119 +11643,98 @@
       </p:sp>
       <p:sp>
         <p:nvSpPr>
-          <p:cNvPr id="14" name="Shape 12"/>
-          <p:cNvSpPr/>
-          <p:nvPr/>
-        </p:nvSpPr>
-        <p:spPr>
-          <a:xfrm>
-            <a:off x="8074152" y="3291840"/>
-            <a:ext cx="2596896" cy="749808"/>
-          </a:xfrm>
-          <a:prstGeom prst="rect">
-            <a:avLst/>
-          </a:prstGeom>
-          <a:solidFill>
-            <a:srgbClr val="EAF6F8"/>
-          </a:solidFill>
-          <a:ln w="12700">
-            <a:solidFill>
-              <a:srgbClr val="8ABBD8"/>
-            </a:solidFill>
-            <a:prstDash val="solid"/>
-          </a:ln>
-        </p:spPr>
-      </p:sp>
-      <p:sp>
-        <p:nvSpPr>
-          <p:cNvPr id="15" name="Shape 13"/>
-          <p:cNvSpPr/>
-          <p:nvPr/>
-        </p:nvSpPr>
-        <p:spPr>
-          <a:xfrm>
-            <a:off x="8202168" y="3721608"/>
-            <a:ext cx="2340864" cy="0"/>
-          </a:xfrm>
-          <a:prstGeom prst="line">
-            <a:avLst/>
-          </a:prstGeom>
-          <a:noFill/>
-          <a:ln w="19050">
-            <a:solidFill>
-              <a:srgbClr val="0068B7"/>
-            </a:solidFill>
-            <a:prstDash val="solid"/>
-          </a:ln>
-        </p:spPr>
+          <p:cNvPr id="14" name="Text 12"/>
+          <p:cNvSpPr/>
+          <p:nvPr/>
+        </p:nvSpPr>
+        <p:spPr>
+          <a:xfrm>
+            <a:off x="7799832" y="2935224"/>
+            <a:ext cx="3145536" cy="256032"/>
+          </a:xfrm>
+          <a:prstGeom prst="rect">
+            <a:avLst/>
+          </a:prstGeom>
+          <a:noFill/>
+          <a:ln/>
+        </p:spPr>
+        <p:txBody>
+          <a:bodyPr wrap="square" lIns="0" tIns="0" rIns="0" bIns="0" rtlCol="0" anchor="ctr"/>
+          <a:lstStyle/>
+          <a:p>
+            <a:pPr indent="0" marL="0">
+              <a:buNone/>
+            </a:pPr>
+            <a:r>
+              <a:rPr lang="en-US" sz="1300" b="1" dirty="0">
+                <a:solidFill>
+                  <a:srgbClr val="0068B7"/>
+                </a:solidFill>
+                <a:latin typeface="Aptos" pitchFamily="34" charset="0"/>
+                <a:ea typeface="Aptos" pitchFamily="34" charset="-122"/>
+                <a:cs typeface="Aptos" pitchFamily="34" charset="-120"/>
+              </a:rPr>
+              <a:t>Concept checkpoints</a:t>
+            </a:r>
+            <a:endParaRPr lang="en-US" sz="1300" dirty="0"/>
+          </a:p>
+        </p:txBody>
+      </p:sp>
+      <p:sp>
+        <p:nvSpPr>
+          <p:cNvPr id="15" name="Text 13"/>
+          <p:cNvSpPr/>
+          <p:nvPr/>
+        </p:nvSpPr>
+        <p:spPr>
+          <a:xfrm>
+            <a:off x="7818120" y="3300984"/>
+            <a:ext cx="3090672" cy="877824"/>
+          </a:xfrm>
+          <a:prstGeom prst="rect">
+            <a:avLst/>
+          </a:prstGeom>
+          <a:noFill/>
+          <a:ln/>
+        </p:spPr>
+        <p:txBody>
+          <a:bodyPr wrap="square" lIns="254" tIns="254" rIns="254" bIns="254" rtlCol="0" anchor="t">
+            <a:normAutofit/>
+          </a:bodyPr>
+          <a:lstStyle/>
+          <a:p>
+            <a:r>
+              <a:rPr lang="en-US" sz="1380" dirty="0">
+                <a:solidFill>
+                  <a:srgbClr val="17364A"/>
+                </a:solidFill>
+                <a:latin typeface="Aptos" pitchFamily="34" charset="0"/>
+                <a:ea typeface="Aptos" pitchFamily="34" charset="-122"/>
+                <a:cs typeface="Aptos" pitchFamily="34" charset="-120"/>
+              </a:rPr>
+              <a:t>OWASP Top 10 for Large Language Model Applications:.</a:t>
+            </a:r>
+            <a:endParaRPr lang="en-US" sz="1380" dirty="0"/>
+          </a:p>
+          <a:p>
+            <a:r>
+              <a:rPr lang="en-US" sz="1380" dirty="0">
+                <a:solidFill>
+                  <a:srgbClr val="17364A"/>
+                </a:solidFill>
+                <a:latin typeface="Aptos" pitchFamily="34" charset="0"/>
+                <a:ea typeface="Aptos" pitchFamily="34" charset="-122"/>
+                <a:cs typeface="Aptos" pitchFamily="34" charset="-120"/>
+              </a:rPr>
+              <a:t>ONC health IT, interoperability, and information blocking resources:.</a:t>
+            </a:r>
+            <a:endParaRPr lang="en-US" sz="1380" dirty="0"/>
+          </a:p>
+        </p:txBody>
       </p:sp>
       <p:sp>
         <p:nvSpPr>
           <p:cNvPr id="16" name="Shape 14"/>
-          <p:cNvSpPr/>
-          <p:nvPr/>
-        </p:nvSpPr>
-        <p:spPr>
-          <a:xfrm>
-            <a:off x="9198864" y="4206240"/>
-            <a:ext cx="347472" cy="347472"/>
-          </a:xfrm>
-          <a:prstGeom prst="ellipse">
-            <a:avLst/>
-          </a:prstGeom>
-          <a:solidFill>
-            <a:srgbClr val="2F8A28"/>
-          </a:solidFill>
-          <a:ln w="12700">
-            <a:solidFill>
-              <a:srgbClr val="2F8A28"/>
-            </a:solidFill>
-            <a:prstDash val="solid"/>
-          </a:ln>
-        </p:spPr>
-      </p:sp>
-      <p:sp>
-        <p:nvSpPr>
-          <p:cNvPr id="17" name="Text 15"/>
-          <p:cNvSpPr/>
-          <p:nvPr/>
-        </p:nvSpPr>
-        <p:spPr>
-          <a:xfrm>
-            <a:off x="7909560" y="3977640"/>
-            <a:ext cx="2926080" cy="182880"/>
-          </a:xfrm>
-          <a:prstGeom prst="rect">
-            <a:avLst/>
-          </a:prstGeom>
-          <a:noFill/>
-          <a:ln/>
-        </p:spPr>
-        <p:txBody>
-          <a:bodyPr wrap="square" lIns="0" tIns="0" rIns="0" bIns="0" rtlCol="0" anchor="ctr"/>
-          <a:lstStyle/>
-          <a:p>
-            <a:pPr algn="ctr" indent="0" marL="0">
-              <a:buNone/>
-            </a:pPr>
-            <a:r>
-              <a:rPr lang="en-US" sz="1000" dirty="0">
-                <a:solidFill>
-                  <a:srgbClr val="003A63"/>
-                </a:solidFill>
-                <a:latin typeface="Aptos" pitchFamily="34" charset="0"/>
-                <a:ea typeface="Aptos" pitchFamily="34" charset="-122"/>
-                <a:cs typeface="Aptos" pitchFamily="34" charset="-120"/>
-              </a:rPr>
-              <a:t>Concept to action</a:t>
-            </a:r>
-            <a:endParaRPr lang="en-US" sz="1000" dirty="0"/>
-          </a:p>
-        </p:txBody>
-      </p:sp>
-      <p:sp>
-        <p:nvSpPr>
-          <p:cNvPr id="18" name="Shape 16"/>
           <p:cNvSpPr/>
           <p:nvPr/>
         </p:nvSpPr>
@@ -12177,7 +11761,7 @@
       </p:sp>
       <p:sp>
         <p:nvSpPr>
-          <p:cNvPr id="19" name="Text 17"/>
+          <p:cNvPr id="17" name="Text 15"/>
           <p:cNvSpPr/>
           <p:nvPr/>
         </p:nvSpPr>
@@ -12216,7 +11800,7 @@
       </p:sp>
       <p:sp>
         <p:nvSpPr>
-          <p:cNvPr id="20" name="Text 18"/>
+          <p:cNvPr id="18" name="Text 16"/>
           <p:cNvSpPr/>
           <p:nvPr/>
         </p:nvSpPr>
@@ -12696,13 +12280,11 @@
             </a:avLst>
           </a:prstGeom>
           <a:solidFill>
-            <a:srgbClr val="FFFFFF">
-              <a:alpha val="88000"/>
-            </a:srgbClr>
+            <a:srgbClr val="FFFFFF"/>
           </a:solidFill>
           <a:ln w="12700">
             <a:solidFill>
-              <a:srgbClr val="D6E8F2"/>
+              <a:srgbClr val="B9D7E6"/>
             </a:solidFill>
             <a:prstDash val="solid"/>
           </a:ln>
@@ -12710,119 +12292,84 @@
       </p:sp>
       <p:sp>
         <p:nvSpPr>
-          <p:cNvPr id="14" name="Shape 12"/>
-          <p:cNvSpPr/>
-          <p:nvPr/>
-        </p:nvSpPr>
-        <p:spPr>
-          <a:xfrm>
-            <a:off x="8074152" y="3291840"/>
-            <a:ext cx="2596896" cy="749808"/>
-          </a:xfrm>
-          <a:prstGeom prst="rect">
-            <a:avLst/>
-          </a:prstGeom>
-          <a:solidFill>
-            <a:srgbClr val="EAF6F8"/>
-          </a:solidFill>
-          <a:ln w="12700">
-            <a:solidFill>
-              <a:srgbClr val="8ABBD8"/>
-            </a:solidFill>
-            <a:prstDash val="solid"/>
-          </a:ln>
-        </p:spPr>
-      </p:sp>
-      <p:sp>
-        <p:nvSpPr>
-          <p:cNvPr id="15" name="Shape 13"/>
-          <p:cNvSpPr/>
-          <p:nvPr/>
-        </p:nvSpPr>
-        <p:spPr>
-          <a:xfrm>
-            <a:off x="8202168" y="3721608"/>
-            <a:ext cx="2340864" cy="0"/>
-          </a:xfrm>
-          <a:prstGeom prst="line">
-            <a:avLst/>
-          </a:prstGeom>
-          <a:noFill/>
-          <a:ln w="19050">
-            <a:solidFill>
-              <a:srgbClr val="0068B7"/>
-            </a:solidFill>
-            <a:prstDash val="solid"/>
-          </a:ln>
-        </p:spPr>
+          <p:cNvPr id="14" name="Text 12"/>
+          <p:cNvSpPr/>
+          <p:nvPr/>
+        </p:nvSpPr>
+        <p:spPr>
+          <a:xfrm>
+            <a:off x="7799832" y="2935224"/>
+            <a:ext cx="3145536" cy="256032"/>
+          </a:xfrm>
+          <a:prstGeom prst="rect">
+            <a:avLst/>
+          </a:prstGeom>
+          <a:noFill/>
+          <a:ln/>
+        </p:spPr>
+        <p:txBody>
+          <a:bodyPr wrap="square" lIns="0" tIns="0" rIns="0" bIns="0" rtlCol="0" anchor="ctr"/>
+          <a:lstStyle/>
+          <a:p>
+            <a:pPr indent="0" marL="0">
+              <a:buNone/>
+            </a:pPr>
+            <a:r>
+              <a:rPr lang="en-US" sz="1300" b="1" dirty="0">
+                <a:solidFill>
+                  <a:srgbClr val="0068B7"/>
+                </a:solidFill>
+                <a:latin typeface="Aptos" pitchFamily="34" charset="0"/>
+                <a:ea typeface="Aptos" pitchFamily="34" charset="-122"/>
+                <a:cs typeface="Aptos" pitchFamily="34" charset="-120"/>
+              </a:rPr>
+              <a:t>Concept checkpoints</a:t>
+            </a:r>
+            <a:endParaRPr lang="en-US" sz="1300" dirty="0"/>
+          </a:p>
+        </p:txBody>
+      </p:sp>
+      <p:sp>
+        <p:nvSpPr>
+          <p:cNvPr id="15" name="Text 13"/>
+          <p:cNvSpPr/>
+          <p:nvPr/>
+        </p:nvSpPr>
+        <p:spPr>
+          <a:xfrm>
+            <a:off x="7818120" y="3300984"/>
+            <a:ext cx="3090672" cy="877824"/>
+          </a:xfrm>
+          <a:prstGeom prst="rect">
+            <a:avLst/>
+          </a:prstGeom>
+          <a:noFill/>
+          <a:ln/>
+        </p:spPr>
+        <p:txBody>
+          <a:bodyPr wrap="square" lIns="254" tIns="254" rIns="254" bIns="254" rtlCol="0" anchor="t">
+            <a:normAutofit/>
+          </a:bodyPr>
+          <a:lstStyle/>
+          <a:p>
+            <a:r>
+              <a:rPr lang="en-US" sz="1380" dirty="0">
+                <a:solidFill>
+                  <a:srgbClr val="17364A"/>
+                </a:solidFill>
+                <a:latin typeface="Aptos" pitchFamily="34" charset="0"/>
+                <a:ea typeface="Aptos" pitchFamily="34" charset="-122"/>
+                <a:cs typeface="Aptos" pitchFamily="34" charset="-120"/>
+              </a:rPr>
+              <a:t>Agency policies for privacy, public records, cybersecurity, procurement, civil rights,.</a:t>
+            </a:r>
+            <a:endParaRPr lang="en-US" sz="1380" dirty="0"/>
+          </a:p>
+        </p:txBody>
       </p:sp>
       <p:sp>
         <p:nvSpPr>
           <p:cNvPr id="16" name="Shape 14"/>
-          <p:cNvSpPr/>
-          <p:nvPr/>
-        </p:nvSpPr>
-        <p:spPr>
-          <a:xfrm>
-            <a:off x="9198864" y="4206240"/>
-            <a:ext cx="347472" cy="347472"/>
-          </a:xfrm>
-          <a:prstGeom prst="ellipse">
-            <a:avLst/>
-          </a:prstGeom>
-          <a:solidFill>
-            <a:srgbClr val="2F8A28"/>
-          </a:solidFill>
-          <a:ln w="12700">
-            <a:solidFill>
-              <a:srgbClr val="2F8A28"/>
-            </a:solidFill>
-            <a:prstDash val="solid"/>
-          </a:ln>
-        </p:spPr>
-      </p:sp>
-      <p:sp>
-        <p:nvSpPr>
-          <p:cNvPr id="17" name="Text 15"/>
-          <p:cNvSpPr/>
-          <p:nvPr/>
-        </p:nvSpPr>
-        <p:spPr>
-          <a:xfrm>
-            <a:off x="7909560" y="3977640"/>
-            <a:ext cx="2926080" cy="182880"/>
-          </a:xfrm>
-          <a:prstGeom prst="rect">
-            <a:avLst/>
-          </a:prstGeom>
-          <a:noFill/>
-          <a:ln/>
-        </p:spPr>
-        <p:txBody>
-          <a:bodyPr wrap="square" lIns="0" tIns="0" rIns="0" bIns="0" rtlCol="0" anchor="ctr"/>
-          <a:lstStyle/>
-          <a:p>
-            <a:pPr algn="ctr" indent="0" marL="0">
-              <a:buNone/>
-            </a:pPr>
-            <a:r>
-              <a:rPr lang="en-US" sz="1000" dirty="0">
-                <a:solidFill>
-                  <a:srgbClr val="003A63"/>
-                </a:solidFill>
-                <a:latin typeface="Aptos" pitchFamily="34" charset="0"/>
-                <a:ea typeface="Aptos" pitchFamily="34" charset="-122"/>
-                <a:cs typeface="Aptos" pitchFamily="34" charset="-120"/>
-              </a:rPr>
-              <a:t>Concept to action</a:t>
-            </a:r>
-            <a:endParaRPr lang="en-US" sz="1000" dirty="0"/>
-          </a:p>
-        </p:txBody>
-      </p:sp>
-      <p:sp>
-        <p:nvSpPr>
-          <p:cNvPr id="18" name="Shape 16"/>
           <p:cNvSpPr/>
           <p:nvPr/>
         </p:nvSpPr>
@@ -12849,7 +12396,7 @@
       </p:sp>
       <p:sp>
         <p:nvSpPr>
-          <p:cNvPr id="19" name="Text 17"/>
+          <p:cNvPr id="17" name="Text 15"/>
           <p:cNvSpPr/>
           <p:nvPr/>
         </p:nvSpPr>
@@ -12888,7 +12435,7 @@
       </p:sp>
       <p:sp>
         <p:nvSpPr>
-          <p:cNvPr id="20" name="Text 18"/>
+          <p:cNvPr id="18" name="Text 16"/>
           <p:cNvSpPr/>
           <p:nvPr/>
         </p:nvSpPr>
@@ -13401,20 +12948,20 @@
         </p:nvSpPr>
         <p:spPr>
           <a:xfrm>
-            <a:off x="7818120" y="3977640"/>
-            <a:ext cx="972312" cy="749808"/>
+            <a:off x="8046720" y="3794760"/>
+            <a:ext cx="3063240" cy="1600200"/>
           </a:xfrm>
           <a:prstGeom prst="roundRect">
             <a:avLst>
-              <a:gd name="adj" fmla="val 14634"/>
+              <a:gd name="adj" fmla="val 6857"/>
             </a:avLst>
           </a:prstGeom>
           <a:solidFill>
-            <a:srgbClr val="0068B7"/>
+            <a:srgbClr val="FFFFFF"/>
           </a:solidFill>
           <a:ln w="12700">
             <a:solidFill>
-              <a:srgbClr val="0068B7"/>
+              <a:srgbClr val="B9D7E6"/>
             </a:solidFill>
             <a:prstDash val="solid"/>
           </a:ln>
@@ -13428,172 +12975,100 @@
         </p:nvSpPr>
         <p:spPr>
           <a:xfrm>
-            <a:off x="7891272" y="4169664"/>
-            <a:ext cx="826008" cy="310896"/>
-          </a:xfrm>
-          <a:prstGeom prst="rect">
-            <a:avLst/>
-          </a:prstGeom>
-          <a:noFill/>
-          <a:ln/>
-        </p:spPr>
-        <p:txBody>
-          <a:bodyPr wrap="square" lIns="0" tIns="0" rIns="0" bIns="0" rtlCol="0" anchor="ctr">
+            <a:off x="8211312" y="3941064"/>
+            <a:ext cx="2734056" cy="256032"/>
+          </a:xfrm>
+          <a:prstGeom prst="rect">
+            <a:avLst/>
+          </a:prstGeom>
+          <a:noFill/>
+          <a:ln/>
+        </p:spPr>
+        <p:txBody>
+          <a:bodyPr wrap="square" lIns="0" tIns="0" rIns="0" bIns="0" rtlCol="0" anchor="ctr"/>
+          <a:lstStyle/>
+          <a:p>
+            <a:pPr indent="0" marL="0">
+              <a:buNone/>
+            </a:pPr>
+            <a:r>
+              <a:rPr lang="en-US" sz="1300" b="1" dirty="0">
+                <a:solidFill>
+                  <a:srgbClr val="0068B7"/>
+                </a:solidFill>
+                <a:latin typeface="Aptos" pitchFamily="34" charset="0"/>
+                <a:ea typeface="Aptos" pitchFamily="34" charset="-122"/>
+                <a:cs typeface="Aptos" pitchFamily="34" charset="-120"/>
+              </a:rPr>
+              <a:t>Use the play links to</a:t>
+            </a:r>
+            <a:endParaRPr lang="en-US" sz="1300" dirty="0"/>
+          </a:p>
+        </p:txBody>
+      </p:sp>
+      <p:sp>
+        <p:nvSpPr>
+          <p:cNvPr id="15" name="Text 13"/>
+          <p:cNvSpPr/>
+          <p:nvPr/>
+        </p:nvSpPr>
+        <p:spPr>
+          <a:xfrm>
+            <a:off x="8229600" y="4306824"/>
+            <a:ext cx="2679192" cy="941832"/>
+          </a:xfrm>
+          <a:prstGeom prst="rect">
+            <a:avLst/>
+          </a:prstGeom>
+          <a:noFill/>
+          <a:ln/>
+        </p:spPr>
+        <p:txBody>
+          <a:bodyPr wrap="square" lIns="254" tIns="254" rIns="254" bIns="254" rtlCol="0" anchor="t">
             <a:normAutofit/>
           </a:bodyPr>
           <a:lstStyle/>
           <a:p>
-            <a:pPr algn="ctr" indent="0" marL="0">
-              <a:buNone/>
-            </a:pPr>
-            <a:r>
-              <a:rPr lang="en-US" sz="1500" b="1" dirty="0">
-                <a:solidFill>
-                  <a:srgbClr val="FFFFFF"/>
-                </a:solidFill>
-                <a:latin typeface="Aptos" pitchFamily="34" charset="0"/>
-                <a:ea typeface="Aptos" pitchFamily="34" charset="-122"/>
-                <a:cs typeface="Aptos" pitchFamily="34" charset="-120"/>
-              </a:rPr>
-              <a:t>Lesson</a:t>
-            </a:r>
-            <a:endParaRPr lang="en-US" sz="1500" dirty="0"/>
-          </a:p>
-        </p:txBody>
-      </p:sp>
-      <p:sp>
-        <p:nvSpPr>
-          <p:cNvPr id="15" name="Shape 13"/>
-          <p:cNvSpPr/>
-          <p:nvPr/>
-        </p:nvSpPr>
-        <p:spPr>
-          <a:xfrm>
-            <a:off x="9046464" y="3977640"/>
-            <a:ext cx="972312" cy="749808"/>
-          </a:xfrm>
-          <a:prstGeom prst="roundRect">
-            <a:avLst>
-              <a:gd name="adj" fmla="val 14634"/>
-            </a:avLst>
-          </a:prstGeom>
-          <a:solidFill>
-            <a:srgbClr val="2F8A28"/>
-          </a:solidFill>
-          <a:ln w="12700">
-            <a:solidFill>
-              <a:srgbClr val="2F8A28"/>
-            </a:solidFill>
-            <a:prstDash val="solid"/>
-          </a:ln>
-        </p:spPr>
-      </p:sp>
-      <p:sp>
-        <p:nvSpPr>
-          <p:cNvPr id="16" name="Text 14"/>
-          <p:cNvSpPr/>
-          <p:nvPr/>
-        </p:nvSpPr>
-        <p:spPr>
-          <a:xfrm>
-            <a:off x="9119616" y="4169664"/>
-            <a:ext cx="826008" cy="310896"/>
-          </a:xfrm>
-          <a:prstGeom prst="rect">
-            <a:avLst/>
-          </a:prstGeom>
-          <a:noFill/>
-          <a:ln/>
-        </p:spPr>
-        <p:txBody>
-          <a:bodyPr wrap="square" lIns="0" tIns="0" rIns="0" bIns="0" rtlCol="0" anchor="ctr">
-            <a:normAutofit/>
-          </a:bodyPr>
-          <a:lstStyle/>
-          <a:p>
-            <a:pPr algn="ctr" indent="0" marL="0">
-              <a:buNone/>
-            </a:pPr>
-            <a:r>
-              <a:rPr lang="en-US" sz="1500" b="1" dirty="0">
-                <a:solidFill>
-                  <a:srgbClr val="FFFFFF"/>
-                </a:solidFill>
-                <a:latin typeface="Aptos" pitchFamily="34" charset="0"/>
-                <a:ea typeface="Aptos" pitchFamily="34" charset="-122"/>
-                <a:cs typeface="Aptos" pitchFamily="34" charset="-120"/>
-              </a:rPr>
-              <a:t>Plays</a:t>
-            </a:r>
-            <a:endParaRPr lang="en-US" sz="1500" dirty="0"/>
-          </a:p>
-        </p:txBody>
-      </p:sp>
-      <p:sp>
-        <p:nvSpPr>
-          <p:cNvPr id="17" name="Shape 15"/>
-          <p:cNvSpPr/>
-          <p:nvPr/>
-        </p:nvSpPr>
-        <p:spPr>
-          <a:xfrm>
-            <a:off x="10274808" y="3977640"/>
-            <a:ext cx="972312" cy="749808"/>
-          </a:xfrm>
-          <a:prstGeom prst="roundRect">
-            <a:avLst>
-              <a:gd name="adj" fmla="val 14634"/>
-            </a:avLst>
-          </a:prstGeom>
-          <a:solidFill>
-            <a:srgbClr val="6A4CA3"/>
-          </a:solidFill>
-          <a:ln w="12700">
-            <a:solidFill>
-              <a:srgbClr val="6A4CA3"/>
-            </a:solidFill>
-            <a:prstDash val="solid"/>
-          </a:ln>
-        </p:spPr>
-      </p:sp>
-      <p:sp>
-        <p:nvSpPr>
-          <p:cNvPr id="18" name="Text 16"/>
-          <p:cNvSpPr/>
-          <p:nvPr/>
-        </p:nvSpPr>
-        <p:spPr>
-          <a:xfrm>
-            <a:off x="10347960" y="4169664"/>
-            <a:ext cx="826008" cy="310896"/>
-          </a:xfrm>
-          <a:prstGeom prst="rect">
-            <a:avLst/>
-          </a:prstGeom>
-          <a:noFill/>
-          <a:ln/>
-        </p:spPr>
-        <p:txBody>
-          <a:bodyPr wrap="square" lIns="0" tIns="0" rIns="0" bIns="0" rtlCol="0" anchor="ctr">
-            <a:normAutofit/>
-          </a:bodyPr>
-          <a:lstStyle/>
-          <a:p>
-            <a:pPr algn="ctr" indent="0" marL="0">
-              <a:buNone/>
-            </a:pPr>
-            <a:r>
-              <a:rPr lang="en-US" sz="1500" b="1" dirty="0">
-                <a:solidFill>
-                  <a:srgbClr val="FFFFFF"/>
-                </a:solidFill>
-                <a:latin typeface="Aptos" pitchFamily="34" charset="0"/>
-                <a:ea typeface="Aptos" pitchFamily="34" charset="-122"/>
-                <a:cs typeface="Aptos" pitchFamily="34" charset="-120"/>
-              </a:rPr>
-              <a:t>Action</a:t>
-            </a:r>
-            <a:endParaRPr lang="en-US" sz="1500" dirty="0"/>
+            <a:r>
+              <a:rPr lang="en-US" sz="1380" dirty="0">
+                <a:solidFill>
+                  <a:srgbClr val="17364A"/>
+                </a:solidFill>
+                <a:latin typeface="Aptos" pitchFamily="34" charset="0"/>
+                <a:ea typeface="Aptos" pitchFamily="34" charset="-122"/>
+                <a:cs typeface="Aptos" pitchFamily="34" charset="-120"/>
+              </a:rPr>
+              <a:t>Locate the decision point in the playbook sequence.</a:t>
+            </a:r>
+            <a:endParaRPr lang="en-US" sz="1380" dirty="0"/>
+          </a:p>
+          <a:p>
+            <a:r>
+              <a:rPr lang="en-US" sz="1380" dirty="0">
+                <a:solidFill>
+                  <a:srgbClr val="17364A"/>
+                </a:solidFill>
+                <a:latin typeface="Aptos" pitchFamily="34" charset="0"/>
+                <a:ea typeface="Aptos" pitchFamily="34" charset="-122"/>
+                <a:cs typeface="Aptos" pitchFamily="34" charset="-120"/>
+              </a:rPr>
+              <a:t>Identify who should participate in the work.</a:t>
+            </a:r>
+            <a:endParaRPr lang="en-US" sz="1380" dirty="0"/>
+          </a:p>
+          <a:p>
+            <a:r>
+              <a:rPr lang="en-US" sz="1380" dirty="0">
+                <a:solidFill>
+                  <a:srgbClr val="17364A"/>
+                </a:solidFill>
+                <a:latin typeface="Aptos" pitchFamily="34" charset="0"/>
+                <a:ea typeface="Aptos" pitchFamily="34" charset="-122"/>
+                <a:cs typeface="Aptos" pitchFamily="34" charset="-120"/>
+              </a:rPr>
+              <a:t>Document the review, approval, or implementation step.</a:t>
+            </a:r>
+            <a:endParaRPr lang="en-US" sz="1380" dirty="0"/>
           </a:p>
         </p:txBody>
       </p:sp>
@@ -14071,20 +13546,20 @@
         </p:nvSpPr>
         <p:spPr>
           <a:xfrm>
-            <a:off x="7818120" y="3977640"/>
-            <a:ext cx="972312" cy="749808"/>
+            <a:off x="8046720" y="3794760"/>
+            <a:ext cx="3063240" cy="1600200"/>
           </a:xfrm>
           <a:prstGeom prst="roundRect">
             <a:avLst>
-              <a:gd name="adj" fmla="val 14634"/>
+              <a:gd name="adj" fmla="val 6857"/>
             </a:avLst>
           </a:prstGeom>
           <a:solidFill>
-            <a:srgbClr val="0068B7"/>
+            <a:srgbClr val="FFFFFF"/>
           </a:solidFill>
           <a:ln w="12700">
             <a:solidFill>
-              <a:srgbClr val="0068B7"/>
+              <a:srgbClr val="B9D7E6"/>
             </a:solidFill>
             <a:prstDash val="solid"/>
           </a:ln>
@@ -14098,172 +13573,100 @@
         </p:nvSpPr>
         <p:spPr>
           <a:xfrm>
-            <a:off x="7891272" y="4169664"/>
-            <a:ext cx="826008" cy="310896"/>
-          </a:xfrm>
-          <a:prstGeom prst="rect">
-            <a:avLst/>
-          </a:prstGeom>
-          <a:noFill/>
-          <a:ln/>
-        </p:spPr>
-        <p:txBody>
-          <a:bodyPr wrap="square" lIns="0" tIns="0" rIns="0" bIns="0" rtlCol="0" anchor="ctr">
+            <a:off x="8211312" y="3941064"/>
+            <a:ext cx="2734056" cy="256032"/>
+          </a:xfrm>
+          <a:prstGeom prst="rect">
+            <a:avLst/>
+          </a:prstGeom>
+          <a:noFill/>
+          <a:ln/>
+        </p:spPr>
+        <p:txBody>
+          <a:bodyPr wrap="square" lIns="0" tIns="0" rIns="0" bIns="0" rtlCol="0" anchor="ctr"/>
+          <a:lstStyle/>
+          <a:p>
+            <a:pPr indent="0" marL="0">
+              <a:buNone/>
+            </a:pPr>
+            <a:r>
+              <a:rPr lang="en-US" sz="1300" b="1" dirty="0">
+                <a:solidFill>
+                  <a:srgbClr val="0068B7"/>
+                </a:solidFill>
+                <a:latin typeface="Aptos" pitchFamily="34" charset="0"/>
+                <a:ea typeface="Aptos" pitchFamily="34" charset="-122"/>
+                <a:cs typeface="Aptos" pitchFamily="34" charset="-120"/>
+              </a:rPr>
+              <a:t>Tool selection cues</a:t>
+            </a:r>
+            <a:endParaRPr lang="en-US" sz="1300" dirty="0"/>
+          </a:p>
+        </p:txBody>
+      </p:sp>
+      <p:sp>
+        <p:nvSpPr>
+          <p:cNvPr id="15" name="Text 13"/>
+          <p:cNvSpPr/>
+          <p:nvPr/>
+        </p:nvSpPr>
+        <p:spPr>
+          <a:xfrm>
+            <a:off x="8229600" y="4306824"/>
+            <a:ext cx="2679192" cy="941832"/>
+          </a:xfrm>
+          <a:prstGeom prst="rect">
+            <a:avLst/>
+          </a:prstGeom>
+          <a:noFill/>
+          <a:ln/>
+        </p:spPr>
+        <p:txBody>
+          <a:bodyPr wrap="square" lIns="254" tIns="254" rIns="254" bIns="254" rtlCol="0" anchor="t">
             <a:normAutofit/>
           </a:bodyPr>
           <a:lstStyle/>
           <a:p>
-            <a:pPr algn="ctr" indent="0" marL="0">
-              <a:buNone/>
-            </a:pPr>
-            <a:r>
-              <a:rPr lang="en-US" sz="1500" b="1" dirty="0">
-                <a:solidFill>
-                  <a:srgbClr val="FFFFFF"/>
-                </a:solidFill>
-                <a:latin typeface="Aptos" pitchFamily="34" charset="0"/>
-                <a:ea typeface="Aptos" pitchFamily="34" charset="-122"/>
-                <a:cs typeface="Aptos" pitchFamily="34" charset="-120"/>
-              </a:rPr>
-              <a:t>Concept</a:t>
-            </a:r>
-            <a:endParaRPr lang="en-US" sz="1500" dirty="0"/>
-          </a:p>
-        </p:txBody>
-      </p:sp>
-      <p:sp>
-        <p:nvSpPr>
-          <p:cNvPr id="15" name="Shape 13"/>
-          <p:cNvSpPr/>
-          <p:nvPr/>
-        </p:nvSpPr>
-        <p:spPr>
-          <a:xfrm>
-            <a:off x="9046464" y="3977640"/>
-            <a:ext cx="972312" cy="749808"/>
-          </a:xfrm>
-          <a:prstGeom prst="roundRect">
-            <a:avLst>
-              <a:gd name="adj" fmla="val 14634"/>
-            </a:avLst>
-          </a:prstGeom>
-          <a:solidFill>
-            <a:srgbClr val="2F8A28"/>
-          </a:solidFill>
-          <a:ln w="12700">
-            <a:solidFill>
-              <a:srgbClr val="2F8A28"/>
-            </a:solidFill>
-            <a:prstDash val="solid"/>
-          </a:ln>
-        </p:spPr>
-      </p:sp>
-      <p:sp>
-        <p:nvSpPr>
-          <p:cNvPr id="16" name="Text 14"/>
-          <p:cNvSpPr/>
-          <p:nvPr/>
-        </p:nvSpPr>
-        <p:spPr>
-          <a:xfrm>
-            <a:off x="9119616" y="4169664"/>
-            <a:ext cx="826008" cy="310896"/>
-          </a:xfrm>
-          <a:prstGeom prst="rect">
-            <a:avLst/>
-          </a:prstGeom>
-          <a:noFill/>
-          <a:ln/>
-        </p:spPr>
-        <p:txBody>
-          <a:bodyPr wrap="square" lIns="0" tIns="0" rIns="0" bIns="0" rtlCol="0" anchor="ctr">
-            <a:normAutofit/>
-          </a:bodyPr>
-          <a:lstStyle/>
-          <a:p>
-            <a:pPr algn="ctr" indent="0" marL="0">
-              <a:buNone/>
-            </a:pPr>
-            <a:r>
-              <a:rPr lang="en-US" sz="1500" b="1" dirty="0">
-                <a:solidFill>
-                  <a:srgbClr val="FFFFFF"/>
-                </a:solidFill>
-                <a:latin typeface="Aptos" pitchFamily="34" charset="0"/>
-                <a:ea typeface="Aptos" pitchFamily="34" charset="-122"/>
-                <a:cs typeface="Aptos" pitchFamily="34" charset="-120"/>
-              </a:rPr>
-              <a:t>Tool</a:t>
-            </a:r>
-            <a:endParaRPr lang="en-US" sz="1500" dirty="0"/>
-          </a:p>
-        </p:txBody>
-      </p:sp>
-      <p:sp>
-        <p:nvSpPr>
-          <p:cNvPr id="17" name="Shape 15"/>
-          <p:cNvSpPr/>
-          <p:nvPr/>
-        </p:nvSpPr>
-        <p:spPr>
-          <a:xfrm>
-            <a:off x="10274808" y="3977640"/>
-            <a:ext cx="972312" cy="749808"/>
-          </a:xfrm>
-          <a:prstGeom prst="roundRect">
-            <a:avLst>
-              <a:gd name="adj" fmla="val 14634"/>
-            </a:avLst>
-          </a:prstGeom>
-          <a:solidFill>
-            <a:srgbClr val="D69A2D"/>
-          </a:solidFill>
-          <a:ln w="12700">
-            <a:solidFill>
-              <a:srgbClr val="D69A2D"/>
-            </a:solidFill>
-            <a:prstDash val="solid"/>
-          </a:ln>
-        </p:spPr>
-      </p:sp>
-      <p:sp>
-        <p:nvSpPr>
-          <p:cNvPr id="18" name="Text 16"/>
-          <p:cNvSpPr/>
-          <p:nvPr/>
-        </p:nvSpPr>
-        <p:spPr>
-          <a:xfrm>
-            <a:off x="10347960" y="4169664"/>
-            <a:ext cx="826008" cy="310896"/>
-          </a:xfrm>
-          <a:prstGeom prst="rect">
-            <a:avLst/>
-          </a:prstGeom>
-          <a:noFill/>
-          <a:ln/>
-        </p:spPr>
-        <p:txBody>
-          <a:bodyPr wrap="square" lIns="0" tIns="0" rIns="0" bIns="0" rtlCol="0" anchor="ctr">
-            <a:normAutofit/>
-          </a:bodyPr>
-          <a:lstStyle/>
-          <a:p>
-            <a:pPr algn="ctr" indent="0" marL="0">
-              <a:buNone/>
-            </a:pPr>
-            <a:r>
-              <a:rPr lang="en-US" sz="1500" b="1" dirty="0">
-                <a:solidFill>
-                  <a:srgbClr val="FFFFFF"/>
-                </a:solidFill>
-                <a:latin typeface="Aptos" pitchFamily="34" charset="0"/>
-                <a:ea typeface="Aptos" pitchFamily="34" charset="-122"/>
-                <a:cs typeface="Aptos" pitchFamily="34" charset="-120"/>
-              </a:rPr>
-              <a:t>Artifact</a:t>
-            </a:r>
-            <a:endParaRPr lang="en-US" sz="1500" dirty="0"/>
+            <a:r>
+              <a:rPr lang="en-US" sz="1380" dirty="0">
+                <a:solidFill>
+                  <a:srgbClr val="17364A"/>
+                </a:solidFill>
+                <a:latin typeface="Aptos" pitchFamily="34" charset="0"/>
+                <a:ea typeface="Aptos" pitchFamily="34" charset="-122"/>
+                <a:cs typeface="Aptos" pitchFamily="34" charset="-120"/>
+              </a:rPr>
+              <a:t>Use a tool when no comparable local process exists.</a:t>
+            </a:r>
+            <a:endParaRPr lang="en-US" sz="1380" dirty="0"/>
+          </a:p>
+          <a:p>
+            <a:r>
+              <a:rPr lang="en-US" sz="1380" dirty="0">
+                <a:solidFill>
+                  <a:srgbClr val="17364A"/>
+                </a:solidFill>
+                <a:latin typeface="Aptos" pitchFamily="34" charset="0"/>
+                <a:ea typeface="Aptos" pitchFamily="34" charset="-122"/>
+                <a:cs typeface="Aptos" pitchFamily="34" charset="-120"/>
+              </a:rPr>
+              <a:t>Adapt existing department templates when they already fit the purpose.</a:t>
+            </a:r>
+            <a:endParaRPr lang="en-US" sz="1380" dirty="0"/>
+          </a:p>
+          <a:p>
+            <a:r>
+              <a:rPr lang="en-US" sz="1380" dirty="0">
+                <a:solidFill>
+                  <a:srgbClr val="17364A"/>
+                </a:solidFill>
+                <a:latin typeface="Aptos" pitchFamily="34" charset="0"/>
+                <a:ea typeface="Aptos" pitchFamily="34" charset="-122"/>
+                <a:cs typeface="Aptos" pitchFamily="34" charset="-120"/>
+              </a:rPr>
+              <a:t>Save the completed artifact as evidence of the decision.</a:t>
+            </a:r>
+            <a:endParaRPr lang="en-US" sz="1380" dirty="0"/>
           </a:p>
         </p:txBody>
       </p:sp>
@@ -14736,13 +14139,11 @@
             </a:avLst>
           </a:prstGeom>
           <a:solidFill>
-            <a:srgbClr val="FFFFFF">
-              <a:alpha val="88000"/>
-            </a:srgbClr>
+            <a:srgbClr val="FFFFFF"/>
           </a:solidFill>
           <a:ln w="12700">
             <a:solidFill>
-              <a:srgbClr val="D6E8F2"/>
+              <a:srgbClr val="B9D7E6"/>
             </a:solidFill>
             <a:prstDash val="solid"/>
           </a:ln>
@@ -14750,119 +14151,98 @@
       </p:sp>
       <p:sp>
         <p:nvSpPr>
-          <p:cNvPr id="14" name="Shape 12"/>
-          <p:cNvSpPr/>
-          <p:nvPr/>
-        </p:nvSpPr>
-        <p:spPr>
-          <a:xfrm>
-            <a:off x="8074152" y="3291840"/>
-            <a:ext cx="2596896" cy="749808"/>
-          </a:xfrm>
-          <a:prstGeom prst="rect">
-            <a:avLst/>
-          </a:prstGeom>
-          <a:solidFill>
-            <a:srgbClr val="EAF6F8"/>
-          </a:solidFill>
-          <a:ln w="12700">
-            <a:solidFill>
-              <a:srgbClr val="8ABBD8"/>
-            </a:solidFill>
-            <a:prstDash val="solid"/>
-          </a:ln>
-        </p:spPr>
-      </p:sp>
-      <p:sp>
-        <p:nvSpPr>
-          <p:cNvPr id="15" name="Shape 13"/>
-          <p:cNvSpPr/>
-          <p:nvPr/>
-        </p:nvSpPr>
-        <p:spPr>
-          <a:xfrm>
-            <a:off x="8202168" y="3721608"/>
-            <a:ext cx="2340864" cy="0"/>
-          </a:xfrm>
-          <a:prstGeom prst="line">
-            <a:avLst/>
-          </a:prstGeom>
-          <a:noFill/>
-          <a:ln w="19050">
-            <a:solidFill>
-              <a:srgbClr val="0068B7"/>
-            </a:solidFill>
-            <a:prstDash val="solid"/>
-          </a:ln>
-        </p:spPr>
+          <p:cNvPr id="14" name="Text 12"/>
+          <p:cNvSpPr/>
+          <p:nvPr/>
+        </p:nvSpPr>
+        <p:spPr>
+          <a:xfrm>
+            <a:off x="7799832" y="2935224"/>
+            <a:ext cx="3145536" cy="256032"/>
+          </a:xfrm>
+          <a:prstGeom prst="rect">
+            <a:avLst/>
+          </a:prstGeom>
+          <a:noFill/>
+          <a:ln/>
+        </p:spPr>
+        <p:txBody>
+          <a:bodyPr wrap="square" lIns="0" tIns="0" rIns="0" bIns="0" rtlCol="0" anchor="ctr"/>
+          <a:lstStyle/>
+          <a:p>
+            <a:pPr indent="0" marL="0">
+              <a:buNone/>
+            </a:pPr>
+            <a:r>
+              <a:rPr lang="en-US" sz="1300" b="1" dirty="0">
+                <a:solidFill>
+                  <a:srgbClr val="0068B7"/>
+                </a:solidFill>
+                <a:latin typeface="Aptos" pitchFamily="34" charset="0"/>
+                <a:ea typeface="Aptos" pitchFamily="34" charset="-122"/>
+                <a:cs typeface="Aptos" pitchFamily="34" charset="-120"/>
+              </a:rPr>
+              <a:t>Concept checkpoints</a:t>
+            </a:r>
+            <a:endParaRPr lang="en-US" sz="1300" dirty="0"/>
+          </a:p>
+        </p:txBody>
+      </p:sp>
+      <p:sp>
+        <p:nvSpPr>
+          <p:cNvPr id="15" name="Text 13"/>
+          <p:cNvSpPr/>
+          <p:nvPr/>
+        </p:nvSpPr>
+        <p:spPr>
+          <a:xfrm>
+            <a:off x="7818120" y="3300984"/>
+            <a:ext cx="3090672" cy="877824"/>
+          </a:xfrm>
+          <a:prstGeom prst="rect">
+            <a:avLst/>
+          </a:prstGeom>
+          <a:noFill/>
+          <a:ln/>
+        </p:spPr>
+        <p:txBody>
+          <a:bodyPr wrap="square" lIns="254" tIns="254" rIns="254" bIns="254" rtlCol="0" anchor="t">
+            <a:normAutofit/>
+          </a:bodyPr>
+          <a:lstStyle/>
+          <a:p>
+            <a:r>
+              <a:rPr lang="en-US" sz="1380" dirty="0">
+                <a:solidFill>
+                  <a:srgbClr val="17364A"/>
+                </a:solidFill>
+                <a:latin typeface="Aptos" pitchFamily="34" charset="0"/>
+                <a:ea typeface="Aptos" pitchFamily="34" charset="-122"/>
+                <a:cs typeface="Aptos" pitchFamily="34" charset="-120"/>
+              </a:rPr>
+              <a:t>Recognize when a decision requires causal evidence rather than risk prediction alone.</a:t>
+            </a:r>
+            <a:endParaRPr lang="en-US" sz="1380" dirty="0"/>
+          </a:p>
+          <a:p>
+            <a:r>
+              <a:rPr lang="en-US" sz="1380" dirty="0">
+                <a:solidFill>
+                  <a:srgbClr val="17364A"/>
+                </a:solidFill>
+                <a:latin typeface="Aptos" pitchFamily="34" charset="0"/>
+                <a:ea typeface="Aptos" pitchFamily="34" charset="-122"/>
+                <a:cs typeface="Aptos" pitchFamily="34" charset="-120"/>
+              </a:rPr>
+              <a:t>Identify appropriate evidence sources for evaluating interventions or policy effects.</a:t>
+            </a:r>
+            <a:endParaRPr lang="en-US" sz="1380" dirty="0"/>
+          </a:p>
+        </p:txBody>
       </p:sp>
       <p:sp>
         <p:nvSpPr>
           <p:cNvPr id="16" name="Shape 14"/>
-          <p:cNvSpPr/>
-          <p:nvPr/>
-        </p:nvSpPr>
-        <p:spPr>
-          <a:xfrm>
-            <a:off x="9198864" y="4206240"/>
-            <a:ext cx="347472" cy="347472"/>
-          </a:xfrm>
-          <a:prstGeom prst="ellipse">
-            <a:avLst/>
-          </a:prstGeom>
-          <a:solidFill>
-            <a:srgbClr val="2F8A28"/>
-          </a:solidFill>
-          <a:ln w="12700">
-            <a:solidFill>
-              <a:srgbClr val="2F8A28"/>
-            </a:solidFill>
-            <a:prstDash val="solid"/>
-          </a:ln>
-        </p:spPr>
-      </p:sp>
-      <p:sp>
-        <p:nvSpPr>
-          <p:cNvPr id="17" name="Text 15"/>
-          <p:cNvSpPr/>
-          <p:nvPr/>
-        </p:nvSpPr>
-        <p:spPr>
-          <a:xfrm>
-            <a:off x="7909560" y="3977640"/>
-            <a:ext cx="2926080" cy="182880"/>
-          </a:xfrm>
-          <a:prstGeom prst="rect">
-            <a:avLst/>
-          </a:prstGeom>
-          <a:noFill/>
-          <a:ln/>
-        </p:spPr>
-        <p:txBody>
-          <a:bodyPr wrap="square" lIns="0" tIns="0" rIns="0" bIns="0" rtlCol="0" anchor="ctr"/>
-          <a:lstStyle/>
-          <a:p>
-            <a:pPr algn="ctr" indent="0" marL="0">
-              <a:buNone/>
-            </a:pPr>
-            <a:r>
-              <a:rPr lang="en-US" sz="1000" dirty="0">
-                <a:solidFill>
-                  <a:srgbClr val="003A63"/>
-                </a:solidFill>
-                <a:latin typeface="Aptos" pitchFamily="34" charset="0"/>
-                <a:ea typeface="Aptos" pitchFamily="34" charset="-122"/>
-                <a:cs typeface="Aptos" pitchFamily="34" charset="-120"/>
-              </a:rPr>
-              <a:t>Concept to action</a:t>
-            </a:r>
-            <a:endParaRPr lang="en-US" sz="1000" dirty="0"/>
-          </a:p>
-        </p:txBody>
-      </p:sp>
-      <p:sp>
-        <p:nvSpPr>
-          <p:cNvPr id="18" name="Shape 16"/>
           <p:cNvSpPr/>
           <p:nvPr/>
         </p:nvSpPr>
@@ -14889,7 +14269,7 @@
       </p:sp>
       <p:sp>
         <p:nvSpPr>
-          <p:cNvPr id="19" name="Text 17"/>
+          <p:cNvPr id="17" name="Text 15"/>
           <p:cNvSpPr/>
           <p:nvPr/>
         </p:nvSpPr>
@@ -14928,7 +14308,7 @@
       </p:sp>
       <p:sp>
         <p:nvSpPr>
-          <p:cNvPr id="20" name="Text 18"/>
+          <p:cNvPr id="18" name="Text 16"/>
           <p:cNvSpPr/>
           <p:nvPr/>
         </p:nvSpPr>
@@ -15408,13 +14788,11 @@
             </a:avLst>
           </a:prstGeom>
           <a:solidFill>
-            <a:srgbClr val="FFFFFF">
-              <a:alpha val="88000"/>
-            </a:srgbClr>
+            <a:srgbClr val="FFFFFF"/>
           </a:solidFill>
           <a:ln w="12700">
             <a:solidFill>
-              <a:srgbClr val="D6E8F2"/>
+              <a:srgbClr val="B9D7E6"/>
             </a:solidFill>
             <a:prstDash val="solid"/>
           </a:ln>
@@ -15422,119 +14800,84 @@
       </p:sp>
       <p:sp>
         <p:nvSpPr>
-          <p:cNvPr id="14" name="Shape 12"/>
-          <p:cNvSpPr/>
-          <p:nvPr/>
-        </p:nvSpPr>
-        <p:spPr>
-          <a:xfrm>
-            <a:off x="8074152" y="3291840"/>
-            <a:ext cx="2596896" cy="749808"/>
-          </a:xfrm>
-          <a:prstGeom prst="rect">
-            <a:avLst/>
-          </a:prstGeom>
-          <a:solidFill>
-            <a:srgbClr val="EAF6F8"/>
-          </a:solidFill>
-          <a:ln w="12700">
-            <a:solidFill>
-              <a:srgbClr val="8ABBD8"/>
-            </a:solidFill>
-            <a:prstDash val="solid"/>
-          </a:ln>
-        </p:spPr>
-      </p:sp>
-      <p:sp>
-        <p:nvSpPr>
-          <p:cNvPr id="15" name="Shape 13"/>
-          <p:cNvSpPr/>
-          <p:nvPr/>
-        </p:nvSpPr>
-        <p:spPr>
-          <a:xfrm>
-            <a:off x="8202168" y="3721608"/>
-            <a:ext cx="2340864" cy="0"/>
-          </a:xfrm>
-          <a:prstGeom prst="line">
-            <a:avLst/>
-          </a:prstGeom>
-          <a:noFill/>
-          <a:ln w="19050">
-            <a:solidFill>
-              <a:srgbClr val="0068B7"/>
-            </a:solidFill>
-            <a:prstDash val="solid"/>
-          </a:ln>
-        </p:spPr>
+          <p:cNvPr id="14" name="Text 12"/>
+          <p:cNvSpPr/>
+          <p:nvPr/>
+        </p:nvSpPr>
+        <p:spPr>
+          <a:xfrm>
+            <a:off x="7799832" y="2935224"/>
+            <a:ext cx="3145536" cy="256032"/>
+          </a:xfrm>
+          <a:prstGeom prst="rect">
+            <a:avLst/>
+          </a:prstGeom>
+          <a:noFill/>
+          <a:ln/>
+        </p:spPr>
+        <p:txBody>
+          <a:bodyPr wrap="square" lIns="0" tIns="0" rIns="0" bIns="0" rtlCol="0" anchor="ctr"/>
+          <a:lstStyle/>
+          <a:p>
+            <a:pPr indent="0" marL="0">
+              <a:buNone/>
+            </a:pPr>
+            <a:r>
+              <a:rPr lang="en-US" sz="1300" b="1" dirty="0">
+                <a:solidFill>
+                  <a:srgbClr val="0068B7"/>
+                </a:solidFill>
+                <a:latin typeface="Aptos" pitchFamily="34" charset="0"/>
+                <a:ea typeface="Aptos" pitchFamily="34" charset="-122"/>
+                <a:cs typeface="Aptos" pitchFamily="34" charset="-120"/>
+              </a:rPr>
+              <a:t>Concept checkpoints</a:t>
+            </a:r>
+            <a:endParaRPr lang="en-US" sz="1300" dirty="0"/>
+          </a:p>
+        </p:txBody>
+      </p:sp>
+      <p:sp>
+        <p:nvSpPr>
+          <p:cNvPr id="15" name="Text 13"/>
+          <p:cNvSpPr/>
+          <p:nvPr/>
+        </p:nvSpPr>
+        <p:spPr>
+          <a:xfrm>
+            <a:off x="7818120" y="3300984"/>
+            <a:ext cx="3090672" cy="877824"/>
+          </a:xfrm>
+          <a:prstGeom prst="rect">
+            <a:avLst/>
+          </a:prstGeom>
+          <a:noFill/>
+          <a:ln/>
+        </p:spPr>
+        <p:txBody>
+          <a:bodyPr wrap="square" lIns="254" tIns="254" rIns="254" bIns="254" rtlCol="0" anchor="t">
+            <a:normAutofit/>
+          </a:bodyPr>
+          <a:lstStyle/>
+          <a:p>
+            <a:r>
+              <a:rPr lang="en-US" sz="1380" dirty="0">
+                <a:solidFill>
+                  <a:srgbClr val="17364A"/>
+                </a:solidFill>
+                <a:latin typeface="Aptos" pitchFamily="34" charset="0"/>
+                <a:ea typeface="Aptos" pitchFamily="34" charset="-122"/>
+                <a:cs typeface="Aptos" pitchFamily="34" charset="-120"/>
+              </a:rPr>
+              <a:t>Create a causal question framing worksheet for an AI-supported decision.</a:t>
+            </a:r>
+            <a:endParaRPr lang="en-US" sz="1380" dirty="0"/>
+          </a:p>
+        </p:txBody>
       </p:sp>
       <p:sp>
         <p:nvSpPr>
           <p:cNvPr id="16" name="Shape 14"/>
-          <p:cNvSpPr/>
-          <p:nvPr/>
-        </p:nvSpPr>
-        <p:spPr>
-          <a:xfrm>
-            <a:off x="9198864" y="4206240"/>
-            <a:ext cx="347472" cy="347472"/>
-          </a:xfrm>
-          <a:prstGeom prst="ellipse">
-            <a:avLst/>
-          </a:prstGeom>
-          <a:solidFill>
-            <a:srgbClr val="2F8A28"/>
-          </a:solidFill>
-          <a:ln w="12700">
-            <a:solidFill>
-              <a:srgbClr val="2F8A28"/>
-            </a:solidFill>
-            <a:prstDash val="solid"/>
-          </a:ln>
-        </p:spPr>
-      </p:sp>
-      <p:sp>
-        <p:nvSpPr>
-          <p:cNvPr id="17" name="Text 15"/>
-          <p:cNvSpPr/>
-          <p:nvPr/>
-        </p:nvSpPr>
-        <p:spPr>
-          <a:xfrm>
-            <a:off x="7909560" y="3977640"/>
-            <a:ext cx="2926080" cy="182880"/>
-          </a:xfrm>
-          <a:prstGeom prst="rect">
-            <a:avLst/>
-          </a:prstGeom>
-          <a:noFill/>
-          <a:ln/>
-        </p:spPr>
-        <p:txBody>
-          <a:bodyPr wrap="square" lIns="0" tIns="0" rIns="0" bIns="0" rtlCol="0" anchor="ctr"/>
-          <a:lstStyle/>
-          <a:p>
-            <a:pPr algn="ctr" indent="0" marL="0">
-              <a:buNone/>
-            </a:pPr>
-            <a:r>
-              <a:rPr lang="en-US" sz="1000" dirty="0">
-                <a:solidFill>
-                  <a:srgbClr val="003A63"/>
-                </a:solidFill>
-                <a:latin typeface="Aptos" pitchFamily="34" charset="0"/>
-                <a:ea typeface="Aptos" pitchFamily="34" charset="-122"/>
-                <a:cs typeface="Aptos" pitchFamily="34" charset="-120"/>
-              </a:rPr>
-              <a:t>Concept to action</a:t>
-            </a:r>
-            <a:endParaRPr lang="en-US" sz="1000" dirty="0"/>
-          </a:p>
-        </p:txBody>
-      </p:sp>
-      <p:sp>
-        <p:nvSpPr>
-          <p:cNvPr id="18" name="Shape 16"/>
           <p:cNvSpPr/>
           <p:nvPr/>
         </p:nvSpPr>
@@ -15561,7 +14904,7 @@
       </p:sp>
       <p:sp>
         <p:nvSpPr>
-          <p:cNvPr id="19" name="Text 17"/>
+          <p:cNvPr id="17" name="Text 15"/>
           <p:cNvSpPr/>
           <p:nvPr/>
         </p:nvSpPr>
@@ -15600,7 +14943,7 @@
       </p:sp>
       <p:sp>
         <p:nvSpPr>
-          <p:cNvPr id="20" name="Text 18"/>
+          <p:cNvPr id="18" name="Text 16"/>
           <p:cNvSpPr/>
           <p:nvPr/>
         </p:nvSpPr>
@@ -16108,13 +15451,11 @@
             </a:avLst>
           </a:prstGeom>
           <a:solidFill>
-            <a:srgbClr val="FFFFFF">
-              <a:alpha val="88000"/>
-            </a:srgbClr>
+            <a:srgbClr val="FFFFFF"/>
           </a:solidFill>
           <a:ln w="12700">
             <a:solidFill>
-              <a:srgbClr val="D6E8F2"/>
+              <a:srgbClr val="B9D7E6"/>
             </a:solidFill>
             <a:prstDash val="solid"/>
           </a:ln>
@@ -16122,119 +15463,112 @@
       </p:sp>
       <p:sp>
         <p:nvSpPr>
-          <p:cNvPr id="14" name="Shape 12"/>
-          <p:cNvSpPr/>
-          <p:nvPr/>
-        </p:nvSpPr>
-        <p:spPr>
-          <a:xfrm>
-            <a:off x="8074152" y="3291840"/>
-            <a:ext cx="2596896" cy="749808"/>
-          </a:xfrm>
-          <a:prstGeom prst="rect">
-            <a:avLst/>
-          </a:prstGeom>
-          <a:solidFill>
-            <a:srgbClr val="EAF6F8"/>
-          </a:solidFill>
-          <a:ln w="12700">
-            <a:solidFill>
-              <a:srgbClr val="8ABBD8"/>
-            </a:solidFill>
-            <a:prstDash val="solid"/>
-          </a:ln>
-        </p:spPr>
-      </p:sp>
-      <p:sp>
-        <p:nvSpPr>
-          <p:cNvPr id="15" name="Shape 13"/>
-          <p:cNvSpPr/>
-          <p:nvPr/>
-        </p:nvSpPr>
-        <p:spPr>
-          <a:xfrm>
-            <a:off x="8202168" y="3721608"/>
-            <a:ext cx="2340864" cy="0"/>
-          </a:xfrm>
-          <a:prstGeom prst="line">
-            <a:avLst/>
-          </a:prstGeom>
-          <a:noFill/>
-          <a:ln w="19050">
-            <a:solidFill>
-              <a:srgbClr val="0068B7"/>
-            </a:solidFill>
-            <a:prstDash val="solid"/>
-          </a:ln>
-        </p:spPr>
+          <p:cNvPr id="14" name="Text 12"/>
+          <p:cNvSpPr/>
+          <p:nvPr/>
+        </p:nvSpPr>
+        <p:spPr>
+          <a:xfrm>
+            <a:off x="7799832" y="2935224"/>
+            <a:ext cx="3145536" cy="256032"/>
+          </a:xfrm>
+          <a:prstGeom prst="rect">
+            <a:avLst/>
+          </a:prstGeom>
+          <a:noFill/>
+          <a:ln/>
+        </p:spPr>
+        <p:txBody>
+          <a:bodyPr wrap="square" lIns="0" tIns="0" rIns="0" bIns="0" rtlCol="0" anchor="ctr"/>
+          <a:lstStyle/>
+          <a:p>
+            <a:pPr indent="0" marL="0">
+              <a:buNone/>
+            </a:pPr>
+            <a:r>
+              <a:rPr lang="en-US" sz="1300" b="1" dirty="0">
+                <a:solidFill>
+                  <a:srgbClr val="0068B7"/>
+                </a:solidFill>
+                <a:latin typeface="Aptos" pitchFamily="34" charset="0"/>
+                <a:ea typeface="Aptos" pitchFamily="34" charset="-122"/>
+                <a:cs typeface="Aptos" pitchFamily="34" charset="-120"/>
+              </a:rPr>
+              <a:t>Concept checkpoints</a:t>
+            </a:r>
+            <a:endParaRPr lang="en-US" sz="1300" dirty="0"/>
+          </a:p>
+        </p:txBody>
+      </p:sp>
+      <p:sp>
+        <p:nvSpPr>
+          <p:cNvPr id="15" name="Text 13"/>
+          <p:cNvSpPr/>
+          <p:nvPr/>
+        </p:nvSpPr>
+        <p:spPr>
+          <a:xfrm>
+            <a:off x="7818120" y="3300984"/>
+            <a:ext cx="3090672" cy="877824"/>
+          </a:xfrm>
+          <a:prstGeom prst="rect">
+            <a:avLst/>
+          </a:prstGeom>
+          <a:noFill/>
+          <a:ln/>
+        </p:spPr>
+        <p:txBody>
+          <a:bodyPr wrap="square" lIns="254" tIns="254" rIns="254" bIns="254" rtlCol="0" anchor="t">
+            <a:normAutofit/>
+          </a:bodyPr>
+          <a:lstStyle/>
+          <a:p>
+            <a:r>
+              <a:rPr lang="en-US" sz="1380" dirty="0">
+                <a:solidFill>
+                  <a:srgbClr val="17364A"/>
+                </a:solidFill>
+                <a:latin typeface="Aptos" pitchFamily="34" charset="0"/>
+                <a:ea typeface="Aptos" pitchFamily="34" charset="-122"/>
+                <a:cs typeface="Aptos" pitchFamily="34" charset="-120"/>
+              </a:rPr>
+              <a:t>AI models often predict what is likely to happen, but public health leaders frequently.</a:t>
+            </a:r>
+            <a:endParaRPr lang="en-US" sz="1380" dirty="0"/>
+          </a:p>
+          <a:p>
+            <a:r>
+              <a:rPr lang="en-US" sz="1380" dirty="0">
+                <a:solidFill>
+                  <a:srgbClr val="17364A"/>
+                </a:solidFill>
+                <a:latin typeface="Aptos" pitchFamily="34" charset="0"/>
+                <a:ea typeface="Aptos" pitchFamily="34" charset="-122"/>
+                <a:cs typeface="Aptos" pitchFamily="34" charset="-120"/>
+              </a:rPr>
+              <a:t>This module helps learners distinguish prediction from causal inference so AI outputs are.</a:t>
+            </a:r>
+            <a:endParaRPr lang="en-US" sz="1380" dirty="0"/>
+          </a:p>
+          <a:p>
+            <a:r>
+              <a:rPr lang="en-US" sz="1380" dirty="0">
+                <a:solidFill>
+                  <a:srgbClr val="17364A"/>
+                </a:solidFill>
+                <a:latin typeface="Aptos" pitchFamily="34" charset="0"/>
+                <a:ea typeface="Aptos" pitchFamily="34" charset="-122"/>
+                <a:cs typeface="Aptos" pitchFamily="34" charset="-120"/>
+              </a:rPr>
+              <a:t>Learners examine confounding, bias, comparison groups, counterfactual reasoning, directed.</a:t>
+            </a:r>
+            <a:endParaRPr lang="en-US" sz="1380" dirty="0"/>
+          </a:p>
+        </p:txBody>
       </p:sp>
       <p:sp>
         <p:nvSpPr>
           <p:cNvPr id="16" name="Shape 14"/>
-          <p:cNvSpPr/>
-          <p:nvPr/>
-        </p:nvSpPr>
-        <p:spPr>
-          <a:xfrm>
-            <a:off x="9198864" y="4206240"/>
-            <a:ext cx="347472" cy="347472"/>
-          </a:xfrm>
-          <a:prstGeom prst="ellipse">
-            <a:avLst/>
-          </a:prstGeom>
-          <a:solidFill>
-            <a:srgbClr val="2F8A28"/>
-          </a:solidFill>
-          <a:ln w="12700">
-            <a:solidFill>
-              <a:srgbClr val="2F8A28"/>
-            </a:solidFill>
-            <a:prstDash val="solid"/>
-          </a:ln>
-        </p:spPr>
-      </p:sp>
-      <p:sp>
-        <p:nvSpPr>
-          <p:cNvPr id="17" name="Text 15"/>
-          <p:cNvSpPr/>
-          <p:nvPr/>
-        </p:nvSpPr>
-        <p:spPr>
-          <a:xfrm>
-            <a:off x="7909560" y="3977640"/>
-            <a:ext cx="2926080" cy="182880"/>
-          </a:xfrm>
-          <a:prstGeom prst="rect">
-            <a:avLst/>
-          </a:prstGeom>
-          <a:noFill/>
-          <a:ln/>
-        </p:spPr>
-        <p:txBody>
-          <a:bodyPr wrap="square" lIns="0" tIns="0" rIns="0" bIns="0" rtlCol="0" anchor="ctr"/>
-          <a:lstStyle/>
-          <a:p>
-            <a:pPr algn="ctr" indent="0" marL="0">
-              <a:buNone/>
-            </a:pPr>
-            <a:r>
-              <a:rPr lang="en-US" sz="1000" dirty="0">
-                <a:solidFill>
-                  <a:srgbClr val="003A63"/>
-                </a:solidFill>
-                <a:latin typeface="Aptos" pitchFamily="34" charset="0"/>
-                <a:ea typeface="Aptos" pitchFamily="34" charset="-122"/>
-                <a:cs typeface="Aptos" pitchFamily="34" charset="-120"/>
-              </a:rPr>
-              <a:t>Concept to action</a:t>
-            </a:r>
-            <a:endParaRPr lang="en-US" sz="1000" dirty="0"/>
-          </a:p>
-        </p:txBody>
-      </p:sp>
-      <p:sp>
-        <p:nvSpPr>
-          <p:cNvPr id="18" name="Shape 16"/>
           <p:cNvSpPr/>
           <p:nvPr/>
         </p:nvSpPr>
@@ -16261,7 +15595,7 @@
       </p:sp>
       <p:sp>
         <p:nvSpPr>
-          <p:cNvPr id="19" name="Text 17"/>
+          <p:cNvPr id="17" name="Text 15"/>
           <p:cNvSpPr/>
           <p:nvPr/>
         </p:nvSpPr>
@@ -16300,7 +15634,7 @@
       </p:sp>
       <p:sp>
         <p:nvSpPr>
-          <p:cNvPr id="20" name="Text 18"/>
+          <p:cNvPr id="18" name="Text 16"/>
           <p:cNvSpPr/>
           <p:nvPr/>
         </p:nvSpPr>
@@ -16808,13 +16142,11 @@
             </a:avLst>
           </a:prstGeom>
           <a:solidFill>
-            <a:srgbClr val="FFFFFF">
-              <a:alpha val="88000"/>
-            </a:srgbClr>
+            <a:srgbClr val="FFFFFF"/>
           </a:solidFill>
           <a:ln w="12700">
             <a:solidFill>
-              <a:srgbClr val="D6E8F2"/>
+              <a:srgbClr val="B9D7E6"/>
             </a:solidFill>
             <a:prstDash val="solid"/>
           </a:ln>
@@ -16822,119 +16154,112 @@
       </p:sp>
       <p:sp>
         <p:nvSpPr>
-          <p:cNvPr id="14" name="Shape 12"/>
-          <p:cNvSpPr/>
-          <p:nvPr/>
-        </p:nvSpPr>
-        <p:spPr>
-          <a:xfrm>
-            <a:off x="8074152" y="3291840"/>
-            <a:ext cx="2596896" cy="749808"/>
-          </a:xfrm>
-          <a:prstGeom prst="rect">
-            <a:avLst/>
-          </a:prstGeom>
-          <a:solidFill>
-            <a:srgbClr val="EAF6F8"/>
-          </a:solidFill>
-          <a:ln w="12700">
-            <a:solidFill>
-              <a:srgbClr val="8ABBD8"/>
-            </a:solidFill>
-            <a:prstDash val="solid"/>
-          </a:ln>
-        </p:spPr>
-      </p:sp>
-      <p:sp>
-        <p:nvSpPr>
-          <p:cNvPr id="15" name="Shape 13"/>
-          <p:cNvSpPr/>
-          <p:nvPr/>
-        </p:nvSpPr>
-        <p:spPr>
-          <a:xfrm>
-            <a:off x="8202168" y="3721608"/>
-            <a:ext cx="2340864" cy="0"/>
-          </a:xfrm>
-          <a:prstGeom prst="line">
-            <a:avLst/>
-          </a:prstGeom>
-          <a:noFill/>
-          <a:ln w="19050">
-            <a:solidFill>
-              <a:srgbClr val="0068B7"/>
-            </a:solidFill>
-            <a:prstDash val="solid"/>
-          </a:ln>
-        </p:spPr>
+          <p:cNvPr id="14" name="Text 12"/>
+          <p:cNvSpPr/>
+          <p:nvPr/>
+        </p:nvSpPr>
+        <p:spPr>
+          <a:xfrm>
+            <a:off x="7799832" y="2935224"/>
+            <a:ext cx="3145536" cy="256032"/>
+          </a:xfrm>
+          <a:prstGeom prst="rect">
+            <a:avLst/>
+          </a:prstGeom>
+          <a:noFill/>
+          <a:ln/>
+        </p:spPr>
+        <p:txBody>
+          <a:bodyPr wrap="square" lIns="0" tIns="0" rIns="0" bIns="0" rtlCol="0" anchor="ctr"/>
+          <a:lstStyle/>
+          <a:p>
+            <a:pPr indent="0" marL="0">
+              <a:buNone/>
+            </a:pPr>
+            <a:r>
+              <a:rPr lang="en-US" sz="1300" b="1" dirty="0">
+                <a:solidFill>
+                  <a:srgbClr val="0068B7"/>
+                </a:solidFill>
+                <a:latin typeface="Aptos" pitchFamily="34" charset="0"/>
+                <a:ea typeface="Aptos" pitchFamily="34" charset="-122"/>
+                <a:cs typeface="Aptos" pitchFamily="34" charset="-120"/>
+              </a:rPr>
+              <a:t>Concept checkpoints</a:t>
+            </a:r>
+            <a:endParaRPr lang="en-US" sz="1300" dirty="0"/>
+          </a:p>
+        </p:txBody>
+      </p:sp>
+      <p:sp>
+        <p:nvSpPr>
+          <p:cNvPr id="15" name="Text 13"/>
+          <p:cNvSpPr/>
+          <p:nvPr/>
+        </p:nvSpPr>
+        <p:spPr>
+          <a:xfrm>
+            <a:off x="7818120" y="3300984"/>
+            <a:ext cx="3090672" cy="877824"/>
+          </a:xfrm>
+          <a:prstGeom prst="rect">
+            <a:avLst/>
+          </a:prstGeom>
+          <a:noFill/>
+          <a:ln/>
+        </p:spPr>
+        <p:txBody>
+          <a:bodyPr wrap="square" lIns="254" tIns="254" rIns="254" bIns="254" rtlCol="0" anchor="t">
+            <a:normAutofit/>
+          </a:bodyPr>
+          <a:lstStyle/>
+          <a:p>
+            <a:r>
+              <a:rPr lang="en-US" sz="1380" dirty="0">
+                <a:solidFill>
+                  <a:srgbClr val="17364A"/>
+                </a:solidFill>
+                <a:latin typeface="Aptos" pitchFamily="34" charset="0"/>
+                <a:ea typeface="Aptos" pitchFamily="34" charset="-122"/>
+                <a:cs typeface="Aptos" pitchFamily="34" charset="-120"/>
+              </a:rPr>
+              <a:t>Causal inference: The process of estimating whether and how an exposure, policy, program,.</a:t>
+            </a:r>
+            <a:endParaRPr lang="en-US" sz="1380" dirty="0"/>
+          </a:p>
+          <a:p>
+            <a:r>
+              <a:rPr lang="en-US" sz="1380" dirty="0">
+                <a:solidFill>
+                  <a:srgbClr val="17364A"/>
+                </a:solidFill>
+                <a:latin typeface="Aptos" pitchFamily="34" charset="0"/>
+                <a:ea typeface="Aptos" pitchFamily="34" charset="-122"/>
+                <a:cs typeface="Aptos" pitchFamily="34" charset="-120"/>
+              </a:rPr>
+              <a:t>Confounding: A distortion that occurs when another factor is related to both the exposure.</a:t>
+            </a:r>
+            <a:endParaRPr lang="en-US" sz="1380" dirty="0"/>
+          </a:p>
+          <a:p>
+            <a:r>
+              <a:rPr lang="en-US" sz="1380" dirty="0">
+                <a:solidFill>
+                  <a:srgbClr val="17364A"/>
+                </a:solidFill>
+                <a:latin typeface="Aptos" pitchFamily="34" charset="0"/>
+                <a:ea typeface="Aptos" pitchFamily="34" charset="-122"/>
+                <a:cs typeface="Aptos" pitchFamily="34" charset="-120"/>
+              </a:rPr>
+              <a:t>Counterfactual: The outcome that would have occurred under a different condition or.</a:t>
+            </a:r>
+            <a:endParaRPr lang="en-US" sz="1380" dirty="0"/>
+          </a:p>
+        </p:txBody>
       </p:sp>
       <p:sp>
         <p:nvSpPr>
           <p:cNvPr id="16" name="Shape 14"/>
-          <p:cNvSpPr/>
-          <p:nvPr/>
-        </p:nvSpPr>
-        <p:spPr>
-          <a:xfrm>
-            <a:off x="9198864" y="4206240"/>
-            <a:ext cx="347472" cy="347472"/>
-          </a:xfrm>
-          <a:prstGeom prst="ellipse">
-            <a:avLst/>
-          </a:prstGeom>
-          <a:solidFill>
-            <a:srgbClr val="2F8A28"/>
-          </a:solidFill>
-          <a:ln w="12700">
-            <a:solidFill>
-              <a:srgbClr val="2F8A28"/>
-            </a:solidFill>
-            <a:prstDash val="solid"/>
-          </a:ln>
-        </p:spPr>
-      </p:sp>
-      <p:sp>
-        <p:nvSpPr>
-          <p:cNvPr id="17" name="Text 15"/>
-          <p:cNvSpPr/>
-          <p:nvPr/>
-        </p:nvSpPr>
-        <p:spPr>
-          <a:xfrm>
-            <a:off x="7909560" y="3977640"/>
-            <a:ext cx="2926080" cy="182880"/>
-          </a:xfrm>
-          <a:prstGeom prst="rect">
-            <a:avLst/>
-          </a:prstGeom>
-          <a:noFill/>
-          <a:ln/>
-        </p:spPr>
-        <p:txBody>
-          <a:bodyPr wrap="square" lIns="0" tIns="0" rIns="0" bIns="0" rtlCol="0" anchor="ctr"/>
-          <a:lstStyle/>
-          <a:p>
-            <a:pPr algn="ctr" indent="0" marL="0">
-              <a:buNone/>
-            </a:pPr>
-            <a:r>
-              <a:rPr lang="en-US" sz="1000" dirty="0">
-                <a:solidFill>
-                  <a:srgbClr val="003A63"/>
-                </a:solidFill>
-                <a:latin typeface="Aptos" pitchFamily="34" charset="0"/>
-                <a:ea typeface="Aptos" pitchFamily="34" charset="-122"/>
-                <a:cs typeface="Aptos" pitchFamily="34" charset="-120"/>
-              </a:rPr>
-              <a:t>Concept to action</a:t>
-            </a:r>
-            <a:endParaRPr lang="en-US" sz="1000" dirty="0"/>
-          </a:p>
-        </p:txBody>
-      </p:sp>
-      <p:sp>
-        <p:nvSpPr>
-          <p:cNvPr id="18" name="Shape 16"/>
           <p:cNvSpPr/>
           <p:nvPr/>
         </p:nvSpPr>
@@ -16961,7 +16286,7 @@
       </p:sp>
       <p:sp>
         <p:nvSpPr>
-          <p:cNvPr id="19" name="Text 17"/>
+          <p:cNvPr id="17" name="Text 15"/>
           <p:cNvSpPr/>
           <p:nvPr/>
         </p:nvSpPr>
@@ -17000,7 +16325,7 @@
       </p:sp>
       <p:sp>
         <p:nvSpPr>
-          <p:cNvPr id="20" name="Text 18"/>
+          <p:cNvPr id="18" name="Text 16"/>
           <p:cNvSpPr/>
           <p:nvPr/>
         </p:nvSpPr>
@@ -17508,13 +16833,11 @@
             </a:avLst>
           </a:prstGeom>
           <a:solidFill>
-            <a:srgbClr val="FFFFFF">
-              <a:alpha val="88000"/>
-            </a:srgbClr>
+            <a:srgbClr val="FFFFFF"/>
           </a:solidFill>
           <a:ln w="12700">
             <a:solidFill>
-              <a:srgbClr val="D6E8F2"/>
+              <a:srgbClr val="B9D7E6"/>
             </a:solidFill>
             <a:prstDash val="solid"/>
           </a:ln>
@@ -17522,119 +16845,112 @@
       </p:sp>
       <p:sp>
         <p:nvSpPr>
-          <p:cNvPr id="14" name="Shape 12"/>
-          <p:cNvSpPr/>
-          <p:nvPr/>
-        </p:nvSpPr>
-        <p:spPr>
-          <a:xfrm>
-            <a:off x="8074152" y="3291840"/>
-            <a:ext cx="2596896" cy="749808"/>
-          </a:xfrm>
-          <a:prstGeom prst="rect">
-            <a:avLst/>
-          </a:prstGeom>
-          <a:solidFill>
-            <a:srgbClr val="EAF6F8"/>
-          </a:solidFill>
-          <a:ln w="12700">
-            <a:solidFill>
-              <a:srgbClr val="8ABBD8"/>
-            </a:solidFill>
-            <a:prstDash val="solid"/>
-          </a:ln>
-        </p:spPr>
-      </p:sp>
-      <p:sp>
-        <p:nvSpPr>
-          <p:cNvPr id="15" name="Shape 13"/>
-          <p:cNvSpPr/>
-          <p:nvPr/>
-        </p:nvSpPr>
-        <p:spPr>
-          <a:xfrm>
-            <a:off x="8202168" y="3721608"/>
-            <a:ext cx="2340864" cy="0"/>
-          </a:xfrm>
-          <a:prstGeom prst="line">
-            <a:avLst/>
-          </a:prstGeom>
-          <a:noFill/>
-          <a:ln w="19050">
-            <a:solidFill>
-              <a:srgbClr val="0068B7"/>
-            </a:solidFill>
-            <a:prstDash val="solid"/>
-          </a:ln>
-        </p:spPr>
+          <p:cNvPr id="14" name="Text 12"/>
+          <p:cNvSpPr/>
+          <p:nvPr/>
+        </p:nvSpPr>
+        <p:spPr>
+          <a:xfrm>
+            <a:off x="7799832" y="2935224"/>
+            <a:ext cx="3145536" cy="256032"/>
+          </a:xfrm>
+          <a:prstGeom prst="rect">
+            <a:avLst/>
+          </a:prstGeom>
+          <a:noFill/>
+          <a:ln/>
+        </p:spPr>
+        <p:txBody>
+          <a:bodyPr wrap="square" lIns="0" tIns="0" rIns="0" bIns="0" rtlCol="0" anchor="ctr"/>
+          <a:lstStyle/>
+          <a:p>
+            <a:pPr indent="0" marL="0">
+              <a:buNone/>
+            </a:pPr>
+            <a:r>
+              <a:rPr lang="en-US" sz="1300" b="1" dirty="0">
+                <a:solidFill>
+                  <a:srgbClr val="0068B7"/>
+                </a:solidFill>
+                <a:latin typeface="Aptos" pitchFamily="34" charset="0"/>
+                <a:ea typeface="Aptos" pitchFamily="34" charset="-122"/>
+                <a:cs typeface="Aptos" pitchFamily="34" charset="-120"/>
+              </a:rPr>
+              <a:t>Concept checkpoints</a:t>
+            </a:r>
+            <a:endParaRPr lang="en-US" sz="1300" dirty="0"/>
+          </a:p>
+        </p:txBody>
+      </p:sp>
+      <p:sp>
+        <p:nvSpPr>
+          <p:cNvPr id="15" name="Text 13"/>
+          <p:cNvSpPr/>
+          <p:nvPr/>
+        </p:nvSpPr>
+        <p:spPr>
+          <a:xfrm>
+            <a:off x="7818120" y="3300984"/>
+            <a:ext cx="3090672" cy="877824"/>
+          </a:xfrm>
+          <a:prstGeom prst="rect">
+            <a:avLst/>
+          </a:prstGeom>
+          <a:noFill/>
+          <a:ln/>
+        </p:spPr>
+        <p:txBody>
+          <a:bodyPr wrap="square" lIns="254" tIns="254" rIns="254" bIns="254" rtlCol="0" anchor="t">
+            <a:normAutofit/>
+          </a:bodyPr>
+          <a:lstStyle/>
+          <a:p>
+            <a:r>
+              <a:rPr lang="en-US" sz="1380" dirty="0">
+                <a:solidFill>
+                  <a:srgbClr val="17364A"/>
+                </a:solidFill>
+                <a:latin typeface="Aptos" pitchFamily="34" charset="0"/>
+                <a:ea typeface="Aptos" pitchFamily="34" charset="-122"/>
+                <a:cs typeface="Aptos" pitchFamily="34" charset="-120"/>
+              </a:rPr>
+              <a:t>A model may predict which communities have higher hospitalization risk, but that does not.</a:t>
+            </a:r>
+            <a:endParaRPr lang="en-US" sz="1380" dirty="0"/>
+          </a:p>
+          <a:p>
+            <a:r>
+              <a:rPr lang="en-US" sz="1380" dirty="0">
+                <a:solidFill>
+                  <a:srgbClr val="17364A"/>
+                </a:solidFill>
+                <a:latin typeface="Aptos" pitchFamily="34" charset="0"/>
+                <a:ea typeface="Aptos" pitchFamily="34" charset="-122"/>
+                <a:cs typeface="Aptos" pitchFamily="34" charset="-120"/>
+              </a:rPr>
+              <a:t>A model may find that people who receive a service have better outcomes, but that pattern.</a:t>
+            </a:r>
+            <a:endParaRPr lang="en-US" sz="1380" dirty="0"/>
+          </a:p>
+          <a:p>
+            <a:r>
+              <a:rPr lang="en-US" sz="1380" dirty="0">
+                <a:solidFill>
+                  <a:srgbClr val="17364A"/>
+                </a:solidFill>
+                <a:latin typeface="Aptos" pitchFamily="34" charset="0"/>
+                <a:ea typeface="Aptos" pitchFamily="34" charset="-122"/>
+                <a:cs typeface="Aptos" pitchFamily="34" charset="-120"/>
+              </a:rPr>
+              <a:t>Public health decisions often involve resource allocation, program design, policy.</a:t>
+            </a:r>
+            <a:endParaRPr lang="en-US" sz="1380" dirty="0"/>
+          </a:p>
+        </p:txBody>
       </p:sp>
       <p:sp>
         <p:nvSpPr>
           <p:cNvPr id="16" name="Shape 14"/>
-          <p:cNvSpPr/>
-          <p:nvPr/>
-        </p:nvSpPr>
-        <p:spPr>
-          <a:xfrm>
-            <a:off x="9198864" y="4206240"/>
-            <a:ext cx="347472" cy="347472"/>
-          </a:xfrm>
-          <a:prstGeom prst="ellipse">
-            <a:avLst/>
-          </a:prstGeom>
-          <a:solidFill>
-            <a:srgbClr val="2F8A28"/>
-          </a:solidFill>
-          <a:ln w="12700">
-            <a:solidFill>
-              <a:srgbClr val="2F8A28"/>
-            </a:solidFill>
-            <a:prstDash val="solid"/>
-          </a:ln>
-        </p:spPr>
-      </p:sp>
-      <p:sp>
-        <p:nvSpPr>
-          <p:cNvPr id="17" name="Text 15"/>
-          <p:cNvSpPr/>
-          <p:nvPr/>
-        </p:nvSpPr>
-        <p:spPr>
-          <a:xfrm>
-            <a:off x="7909560" y="3977640"/>
-            <a:ext cx="2926080" cy="182880"/>
-          </a:xfrm>
-          <a:prstGeom prst="rect">
-            <a:avLst/>
-          </a:prstGeom>
-          <a:noFill/>
-          <a:ln/>
-        </p:spPr>
-        <p:txBody>
-          <a:bodyPr wrap="square" lIns="0" tIns="0" rIns="0" bIns="0" rtlCol="0" anchor="ctr"/>
-          <a:lstStyle/>
-          <a:p>
-            <a:pPr algn="ctr" indent="0" marL="0">
-              <a:buNone/>
-            </a:pPr>
-            <a:r>
-              <a:rPr lang="en-US" sz="1000" dirty="0">
-                <a:solidFill>
-                  <a:srgbClr val="003A63"/>
-                </a:solidFill>
-                <a:latin typeface="Aptos" pitchFamily="34" charset="0"/>
-                <a:ea typeface="Aptos" pitchFamily="34" charset="-122"/>
-                <a:cs typeface="Aptos" pitchFamily="34" charset="-120"/>
-              </a:rPr>
-              <a:t>Concept to action</a:t>
-            </a:r>
-            <a:endParaRPr lang="en-US" sz="1000" dirty="0"/>
-          </a:p>
-        </p:txBody>
-      </p:sp>
-      <p:sp>
-        <p:nvSpPr>
-          <p:cNvPr id="18" name="Shape 16"/>
           <p:cNvSpPr/>
           <p:nvPr/>
         </p:nvSpPr>
@@ -17661,7 +16977,7 @@
       </p:sp>
       <p:sp>
         <p:nvSpPr>
-          <p:cNvPr id="19" name="Text 17"/>
+          <p:cNvPr id="17" name="Text 15"/>
           <p:cNvSpPr/>
           <p:nvPr/>
         </p:nvSpPr>
@@ -17700,7 +17016,7 @@
       </p:sp>
       <p:sp>
         <p:nvSpPr>
-          <p:cNvPr id="20" name="Text 18"/>
+          <p:cNvPr id="18" name="Text 16"/>
           <p:cNvSpPr/>
           <p:nvPr/>
         </p:nvSpPr>

--- a/downloads/presentations/modules/anl-340.pptx
+++ b/downloads/presentations/modules/anl-340.pptx
@@ -3352,49 +3352,58 @@
           <a:ln/>
         </p:spPr>
         <p:txBody>
-          <a:bodyPr wrap="square" lIns="635" tIns="635" rIns="635" bIns="635" rtlCol="0" anchor="t">
+          <a:bodyPr wrap="square" lIns="1016" tIns="1016" rIns="1016" bIns="1016" rtlCol="0" anchor="t">
             <a:normAutofit/>
           </a:bodyPr>
           <a:lstStyle/>
           <a:p>
+            <a:pPr indent="0" marL="0">
+              <a:buNone/>
+            </a:pPr>
             <a:r>
               <a:rPr lang="en-US" sz="2100" dirty="0">
                 <a:solidFill>
-                  <a:srgbClr val="17364A"/>
-                </a:solidFill>
-                <a:latin typeface="Aptos" pitchFamily="34" charset="0"/>
-                <a:ea typeface="Aptos" pitchFamily="34" charset="-122"/>
-                <a:cs typeface="Aptos" pitchFamily="34" charset="-120"/>
-              </a:rPr>
-              <a:t>A local health department uses an AI model to predict which neighborhoods are likely to experience low.</a:t>
+                  <a:srgbClr val="003A63"/>
+                </a:solidFill>
+                <a:latin typeface="Aptos" pitchFamily="34" charset="0"/>
+                <a:ea typeface="Aptos" pitchFamily="34" charset="-122"/>
+                <a:cs typeface="Aptos" pitchFamily="34" charset="-120"/>
+              </a:rPr>
+              <a:t>• A local health department uses an AI model to predict which neighborhoods are likely to.</a:t>
             </a:r>
             <a:endParaRPr lang="en-US" sz="2100" dirty="0"/>
           </a:p>
           <a:p>
+            <a:pPr indent="0" marL="0">
+              <a:buNone/>
+            </a:pPr>
             <a:r>
               <a:rPr lang="en-US" sz="2100" dirty="0">
                 <a:solidFill>
-                  <a:srgbClr val="17364A"/>
-                </a:solidFill>
-                <a:latin typeface="Aptos" pitchFamily="34" charset="0"/>
-                <a:ea typeface="Aptos" pitchFamily="34" charset="-122"/>
-                <a:cs typeface="Aptos" pitchFamily="34" charset="-120"/>
-              </a:rPr>
-              <a:t>The model may help target outreach, but it does not prove why coverage is low or which outreach.</a:t>
+                  <a:srgbClr val="003A63"/>
+                </a:solidFill>
+                <a:latin typeface="Aptos" pitchFamily="34" charset="0"/>
+                <a:ea typeface="Aptos" pitchFamily="34" charset="-122"/>
+                <a:cs typeface="Aptos" pitchFamily="34" charset="-120"/>
+              </a:rPr>
+              <a:t>• The model may help target outreach, but it does not prove why coverage is low or which outreach.</a:t>
             </a:r>
             <a:endParaRPr lang="en-US" sz="2100" dirty="0"/>
           </a:p>
           <a:p>
+            <a:pPr indent="0" marL="0">
+              <a:buNone/>
+            </a:pPr>
             <a:r>
               <a:rPr lang="en-US" sz="2100" dirty="0">
                 <a:solidFill>
-                  <a:srgbClr val="17364A"/>
-                </a:solidFill>
-                <a:latin typeface="Aptos" pitchFamily="34" charset="0"/>
-                <a:ea typeface="Aptos" pitchFamily="34" charset="-122"/>
-                <a:cs typeface="Aptos" pitchFamily="34" charset="-120"/>
-              </a:rPr>
-              <a:t>If leaders want to know whether mobile clinics, reminder messages, school partnerships, or community.</a:t>
+                  <a:srgbClr val="003A63"/>
+                </a:solidFill>
+                <a:latin typeface="Aptos" pitchFamily="34" charset="0"/>
+                <a:ea typeface="Aptos" pitchFamily="34" charset="-122"/>
+                <a:cs typeface="Aptos" pitchFamily="34" charset="-120"/>
+              </a:rPr>
+              <a:t>• If leaders want to know whether mobile clinics, reminder messages, school partnerships, or.</a:t>
             </a:r>
             <a:endParaRPr lang="en-US" sz="2100" dirty="0"/>
           </a:p>
@@ -3474,17 +3483,17 @@
         </p:nvSpPr>
         <p:spPr>
           <a:xfrm>
-            <a:off x="7799832" y="1828800"/>
-            <a:ext cx="3145536" cy="685800"/>
-          </a:xfrm>
-          <a:prstGeom prst="rect">
-            <a:avLst/>
-          </a:prstGeom>
-          <a:noFill/>
-          <a:ln/>
-        </p:spPr>
-        <p:txBody>
-          <a:bodyPr wrap="square" lIns="0" tIns="0" rIns="0" bIns="0" rtlCol="0" anchor="t">
+            <a:off x="7799832" y="1801368"/>
+            <a:ext cx="3145536" cy="758952"/>
+          </a:xfrm>
+          <a:prstGeom prst="rect">
+            <a:avLst/>
+          </a:prstGeom>
+          <a:noFill/>
+          <a:ln/>
+        </p:spPr>
+        <p:txBody>
+          <a:bodyPr wrap="square" lIns="254" tIns="254" rIns="254" bIns="254" rtlCol="0" anchor="t">
             <a:normAutofit/>
           </a:bodyPr>
           <a:lstStyle/>
@@ -3493,7 +3502,7 @@
               <a:buNone/>
             </a:pPr>
             <a:r>
-              <a:rPr lang="en-US" sz="1550" dirty="0">
+              <a:rPr lang="en-US" sz="1320" dirty="0">
                 <a:solidFill>
                   <a:srgbClr val="17364A"/>
                 </a:solidFill>
@@ -3503,7 +3512,7 @@
               </a:rPr>
               <a:t>A local health department uses an AI model to predict which neighborhoods are likely to experience low.</a:t>
             </a:r>
-            <a:endParaRPr lang="en-US" sz="1550" dirty="0"/>
+            <a:endParaRPr lang="en-US" sz="1320" dirty="0"/>
           </a:p>
         </p:txBody>
       </p:sp>
@@ -3591,13 +3600,16 @@
           <a:ln/>
         </p:spPr>
         <p:txBody>
-          <a:bodyPr wrap="square" lIns="254" tIns="254" rIns="254" bIns="254" rtlCol="0" anchor="t">
+          <a:bodyPr wrap="square" lIns="508" tIns="508" rIns="508" bIns="508" rtlCol="0" anchor="t">
             <a:normAutofit/>
           </a:bodyPr>
           <a:lstStyle/>
           <a:p>
-            <a:r>
-              <a:rPr lang="en-US" sz="1380" dirty="0">
+            <a:pPr indent="0" marL="0">
+              <a:buNone/>
+            </a:pPr>
+            <a:r>
+              <a:rPr lang="en-US" sz="1220" dirty="0">
                 <a:solidFill>
                   <a:srgbClr val="17364A"/>
                 </a:solidFill>
@@ -3605,13 +3617,16 @@
                 <a:ea typeface="Aptos" pitchFamily="34" charset="-122"/>
                 <a:cs typeface="Aptos" pitchFamily="34" charset="-120"/>
               </a:rPr>
-              <a:t>A local health department uses an AI model to predict which neighborhoods are likely to.</a:t>
-            </a:r>
-            <a:endParaRPr lang="en-US" sz="1380" dirty="0"/>
-          </a:p>
-          <a:p>
-            <a:r>
-              <a:rPr lang="en-US" sz="1380" dirty="0">
+              <a:t>A local health department uses an AI model to predict which.</a:t>
+            </a:r>
+            <a:endParaRPr lang="en-US" sz="1220" dirty="0"/>
+          </a:p>
+          <a:p>
+            <a:pPr indent="0" marL="0">
+              <a:buNone/>
+            </a:pPr>
+            <a:r>
+              <a:rPr lang="en-US" sz="1220" dirty="0">
                 <a:solidFill>
                   <a:srgbClr val="17364A"/>
                 </a:solidFill>
@@ -3619,13 +3634,16 @@
                 <a:ea typeface="Aptos" pitchFamily="34" charset="-122"/>
                 <a:cs typeface="Aptos" pitchFamily="34" charset="-120"/>
               </a:rPr>
-              <a:t>The model may help target outreach, but it does not prove why coverage is low or which.</a:t>
-            </a:r>
-            <a:endParaRPr lang="en-US" sz="1380" dirty="0"/>
-          </a:p>
-          <a:p>
-            <a:r>
-              <a:rPr lang="en-US" sz="1380" dirty="0">
+              <a:t>The model may help target outreach, but it does not prove why.</a:t>
+            </a:r>
+            <a:endParaRPr lang="en-US" sz="1220" dirty="0"/>
+          </a:p>
+          <a:p>
+            <a:pPr indent="0" marL="0">
+              <a:buNone/>
+            </a:pPr>
+            <a:r>
+              <a:rPr lang="en-US" sz="1220" dirty="0">
                 <a:solidFill>
                   <a:srgbClr val="17364A"/>
                 </a:solidFill>
@@ -3633,9 +3651,9 @@
                 <a:ea typeface="Aptos" pitchFamily="34" charset="-122"/>
                 <a:cs typeface="Aptos" pitchFamily="34" charset="-120"/>
               </a:rPr>
-              <a:t>If leaders want to know whether mobile clinics, reminder messages, school partnerships, or.</a:t>
-            </a:r>
-            <a:endParaRPr lang="en-US" sz="1380" dirty="0"/>
+              <a:t>If leaders want to know whether mobile clinics, reminder messages,.</a:t>
+            </a:r>
+            <a:endParaRPr lang="en-US" sz="1220" dirty="0"/>
           </a:p>
         </p:txBody>
       </p:sp>
@@ -3713,17 +3731,17 @@
         </p:nvSpPr>
         <p:spPr>
           <a:xfrm>
-            <a:off x="7799832" y="5001768"/>
-            <a:ext cx="3145536" cy="502920"/>
-          </a:xfrm>
-          <a:prstGeom prst="rect">
-            <a:avLst/>
-          </a:prstGeom>
-          <a:noFill/>
-          <a:ln/>
-        </p:spPr>
-        <p:txBody>
-          <a:bodyPr wrap="square" lIns="0" tIns="0" rIns="0" bIns="0" rtlCol="0" anchor="t">
+            <a:off x="7799832" y="4974336"/>
+            <a:ext cx="3145536" cy="576072"/>
+          </a:xfrm>
+          <a:prstGeom prst="rect">
+            <a:avLst/>
+          </a:prstGeom>
+          <a:noFill/>
+          <a:ln/>
+        </p:spPr>
+        <p:txBody>
+          <a:bodyPr wrap="square" lIns="254" tIns="254" rIns="254" bIns="254" rtlCol="0" anchor="t">
             <a:normAutofit/>
           </a:bodyPr>
           <a:lstStyle/>
@@ -3732,7 +3750,7 @@
               <a:buNone/>
             </a:pPr>
             <a:r>
-              <a:rPr lang="en-US" sz="1550" dirty="0">
+              <a:rPr lang="en-US" sz="1320" dirty="0">
                 <a:solidFill>
                   <a:srgbClr val="17364A"/>
                 </a:solidFill>
@@ -3740,9 +3758,9 @@
                 <a:ea typeface="Aptos" pitchFamily="34" charset="-122"/>
                 <a:cs typeface="Aptos" pitchFamily="34" charset="-120"/>
               </a:rPr>
-              <a:t>Connect the concept to public health purpose, responsible use, required safeguards, documentation, and the next action a department should take.</a:t>
-            </a:r>
-            <a:endParaRPr lang="en-US" sz="1550" dirty="0"/>
+              <a:t>Connect the concept to public health purpose, responsible use, required safeguards, documentation, and the next action a.</a:t>
+            </a:r>
+            <a:endParaRPr lang="en-US" sz="1320" dirty="0"/>
           </a:p>
         </p:txBody>
       </p:sp>
@@ -4043,49 +4061,58 @@
           <a:ln/>
         </p:spPr>
         <p:txBody>
-          <a:bodyPr wrap="square" lIns="635" tIns="635" rIns="635" bIns="635" rtlCol="0" anchor="t">
+          <a:bodyPr wrap="square" lIns="1016" tIns="1016" rIns="1016" bIns="1016" rtlCol="0" anchor="t">
             <a:normAutofit/>
           </a:bodyPr>
           <a:lstStyle/>
           <a:p>
+            <a:pPr indent="0" marL="0">
+              <a:buNone/>
+            </a:pPr>
             <a:r>
               <a:rPr lang="en-US" sz="2100" dirty="0">
                 <a:solidFill>
-                  <a:srgbClr val="17364A"/>
-                </a:solidFill>
-                <a:latin typeface="Aptos" pitchFamily="34" charset="0"/>
-                <a:ea typeface="Aptos" pitchFamily="34" charset="-122"/>
-                <a:cs typeface="Aptos" pitchFamily="34" charset="-120"/>
-              </a:rPr>
-              <a:t>Causal inference begins with a clearly framed question.</a:t>
+                  <a:srgbClr val="003A63"/>
+                </a:solidFill>
+                <a:latin typeface="Aptos" pitchFamily="34" charset="0"/>
+                <a:ea typeface="Aptos" pitchFamily="34" charset="-122"/>
+                <a:cs typeface="Aptos" pitchFamily="34" charset="-120"/>
+              </a:rPr>
+              <a:t>• Causal inference begins with a clearly framed question.</a:t>
             </a:r>
             <a:endParaRPr lang="en-US" sz="2100" dirty="0"/>
           </a:p>
           <a:p>
+            <a:pPr indent="0" marL="0">
+              <a:buNone/>
+            </a:pPr>
             <a:r>
               <a:rPr lang="en-US" sz="2100" dirty="0">
                 <a:solidFill>
-                  <a:srgbClr val="17364A"/>
-                </a:solidFill>
-                <a:latin typeface="Aptos" pitchFamily="34" charset="0"/>
-                <a:ea typeface="Aptos" pitchFamily="34" charset="-122"/>
-                <a:cs typeface="Aptos" pitchFamily="34" charset="-120"/>
-              </a:rPr>
-              <a:t>A useful structure is: among which population, what is the intervention or exposure, what is the.</a:t>
+                  <a:srgbClr val="003A63"/>
+                </a:solidFill>
+                <a:latin typeface="Aptos" pitchFamily="34" charset="0"/>
+                <a:ea typeface="Aptos" pitchFamily="34" charset="-122"/>
+                <a:cs typeface="Aptos" pitchFamily="34" charset="-120"/>
+              </a:rPr>
+              <a:t>• A useful structure is: among which population, what is the intervention or exposure, what is.</a:t>
             </a:r>
             <a:endParaRPr lang="en-US" sz="2100" dirty="0"/>
           </a:p>
           <a:p>
+            <a:pPr indent="0" marL="0">
+              <a:buNone/>
+            </a:pPr>
             <a:r>
               <a:rPr lang="en-US" sz="2100" dirty="0">
                 <a:solidFill>
-                  <a:srgbClr val="17364A"/>
-                </a:solidFill>
-                <a:latin typeface="Aptos" pitchFamily="34" charset="0"/>
-                <a:ea typeface="Aptos" pitchFamily="34" charset="-122"/>
-                <a:cs typeface="Aptos" pitchFamily="34" charset="-120"/>
-              </a:rPr>
-              <a:t>Without this structure, teams may ask a model to answer a question that the available data cannot.</a:t>
+                  <a:srgbClr val="003A63"/>
+                </a:solidFill>
+                <a:latin typeface="Aptos" pitchFamily="34" charset="0"/>
+                <a:ea typeface="Aptos" pitchFamily="34" charset="-122"/>
+                <a:cs typeface="Aptos" pitchFamily="34" charset="-120"/>
+              </a:rPr>
+              <a:t>• Without this structure, teams may ask a model to answer a question that the available data.</a:t>
             </a:r>
             <a:endParaRPr lang="en-US" sz="2100" dirty="0"/>
           </a:p>
@@ -4165,17 +4192,17 @@
         </p:nvSpPr>
         <p:spPr>
           <a:xfrm>
-            <a:off x="7799832" y="1828800"/>
-            <a:ext cx="3145536" cy="685800"/>
-          </a:xfrm>
-          <a:prstGeom prst="rect">
-            <a:avLst/>
-          </a:prstGeom>
-          <a:noFill/>
-          <a:ln/>
-        </p:spPr>
-        <p:txBody>
-          <a:bodyPr wrap="square" lIns="0" tIns="0" rIns="0" bIns="0" rtlCol="0" anchor="t">
+            <a:off x="7799832" y="1801368"/>
+            <a:ext cx="3145536" cy="758952"/>
+          </a:xfrm>
+          <a:prstGeom prst="rect">
+            <a:avLst/>
+          </a:prstGeom>
+          <a:noFill/>
+          <a:ln/>
+        </p:spPr>
+        <p:txBody>
+          <a:bodyPr wrap="square" lIns="254" tIns="254" rIns="254" bIns="254" rtlCol="0" anchor="t">
             <a:normAutofit/>
           </a:bodyPr>
           <a:lstStyle/>
@@ -4184,7 +4211,7 @@
               <a:buNone/>
             </a:pPr>
             <a:r>
-              <a:rPr lang="en-US" sz="1550" dirty="0">
+              <a:rPr lang="en-US" sz="1320" dirty="0">
                 <a:solidFill>
                   <a:srgbClr val="17364A"/>
                 </a:solidFill>
@@ -4194,7 +4221,7 @@
               </a:rPr>
               <a:t>Causal inference begins with a clearly framed question.</a:t>
             </a:r>
-            <a:endParaRPr lang="en-US" sz="1550" dirty="0"/>
+            <a:endParaRPr lang="en-US" sz="1320" dirty="0"/>
           </a:p>
         </p:txBody>
       </p:sp>
@@ -4282,13 +4309,16 @@
           <a:ln/>
         </p:spPr>
         <p:txBody>
-          <a:bodyPr wrap="square" lIns="254" tIns="254" rIns="254" bIns="254" rtlCol="0" anchor="t">
+          <a:bodyPr wrap="square" lIns="508" tIns="508" rIns="508" bIns="508" rtlCol="0" anchor="t">
             <a:normAutofit/>
           </a:bodyPr>
           <a:lstStyle/>
           <a:p>
-            <a:r>
-              <a:rPr lang="en-US" sz="1380" dirty="0">
+            <a:pPr indent="0" marL="0">
+              <a:buNone/>
+            </a:pPr>
+            <a:r>
+              <a:rPr lang="en-US" sz="1220" dirty="0">
                 <a:solidFill>
                   <a:srgbClr val="17364A"/>
                 </a:solidFill>
@@ -4296,13 +4326,16 @@
                 <a:ea typeface="Aptos" pitchFamily="34" charset="-122"/>
                 <a:cs typeface="Aptos" pitchFamily="34" charset="-120"/>
               </a:rPr>
-              <a:t>A useful structure is: among which population, what is the intervention or exposure, what.</a:t>
-            </a:r>
-            <a:endParaRPr lang="en-US" sz="1380" dirty="0"/>
-          </a:p>
-          <a:p>
-            <a:r>
-              <a:rPr lang="en-US" sz="1380" dirty="0">
+              <a:t>A useful structure is: among which population, what is the.</a:t>
+            </a:r>
+            <a:endParaRPr lang="en-US" sz="1220" dirty="0"/>
+          </a:p>
+          <a:p>
+            <a:pPr indent="0" marL="0">
+              <a:buNone/>
+            </a:pPr>
+            <a:r>
+              <a:rPr lang="en-US" sz="1220" dirty="0">
                 <a:solidFill>
                   <a:srgbClr val="17364A"/>
                 </a:solidFill>
@@ -4310,13 +4343,16 @@
                 <a:ea typeface="Aptos" pitchFamily="34" charset="-122"/>
                 <a:cs typeface="Aptos" pitchFamily="34" charset="-120"/>
               </a:rPr>
-              <a:t>Without this structure, teams may ask a model to answer a question that the available data.</a:t>
-            </a:r>
-            <a:endParaRPr lang="en-US" sz="1380" dirty="0"/>
-          </a:p>
-          <a:p>
-            <a:r>
-              <a:rPr lang="en-US" sz="1380" dirty="0">
+              <a:t>Without this structure, teams may ask a model to answer a question.</a:t>
+            </a:r>
+            <a:endParaRPr lang="en-US" sz="1220" dirty="0"/>
+          </a:p>
+          <a:p>
+            <a:pPr indent="0" marL="0">
+              <a:buNone/>
+            </a:pPr>
+            <a:r>
+              <a:rPr lang="en-US" sz="1220" dirty="0">
                 <a:solidFill>
                   <a:srgbClr val="17364A"/>
                 </a:solidFill>
@@ -4326,7 +4362,7 @@
               </a:rPr>
               <a:t>Confounding is one of the most important threats.</a:t>
             </a:r>
-            <a:endParaRPr lang="en-US" sz="1380" dirty="0"/>
+            <a:endParaRPr lang="en-US" sz="1220" dirty="0"/>
           </a:p>
         </p:txBody>
       </p:sp>
@@ -4404,17 +4440,17 @@
         </p:nvSpPr>
         <p:spPr>
           <a:xfrm>
-            <a:off x="7799832" y="5001768"/>
-            <a:ext cx="3145536" cy="502920"/>
-          </a:xfrm>
-          <a:prstGeom prst="rect">
-            <a:avLst/>
-          </a:prstGeom>
-          <a:noFill/>
-          <a:ln/>
-        </p:spPr>
-        <p:txBody>
-          <a:bodyPr wrap="square" lIns="0" tIns="0" rIns="0" bIns="0" rtlCol="0" anchor="t">
+            <a:off x="7799832" y="4974336"/>
+            <a:ext cx="3145536" cy="576072"/>
+          </a:xfrm>
+          <a:prstGeom prst="rect">
+            <a:avLst/>
+          </a:prstGeom>
+          <a:noFill/>
+          <a:ln/>
+        </p:spPr>
+        <p:txBody>
+          <a:bodyPr wrap="square" lIns="254" tIns="254" rIns="254" bIns="254" rtlCol="0" anchor="t">
             <a:normAutofit/>
           </a:bodyPr>
           <a:lstStyle/>
@@ -4423,7 +4459,7 @@
               <a:buNone/>
             </a:pPr>
             <a:r>
-              <a:rPr lang="en-US" sz="1550" dirty="0">
+              <a:rPr lang="en-US" sz="1320" dirty="0">
                 <a:solidFill>
                   <a:srgbClr val="17364A"/>
                 </a:solidFill>
@@ -4431,9 +4467,9 @@
                 <a:ea typeface="Aptos" pitchFamily="34" charset="-122"/>
                 <a:cs typeface="Aptos" pitchFamily="34" charset="-120"/>
               </a:rPr>
-              <a:t>Connect the concept to public health purpose, responsible use, required safeguards, documentation, and the next action a department should take.</a:t>
-            </a:r>
-            <a:endParaRPr lang="en-US" sz="1550" dirty="0"/>
+              <a:t>Connect the concept to public health purpose, responsible use, required safeguards, documentation, and the next action a.</a:t>
+            </a:r>
+            <a:endParaRPr lang="en-US" sz="1320" dirty="0"/>
           </a:p>
         </p:txBody>
       </p:sp>
@@ -4734,49 +4770,58 @@
           <a:ln/>
         </p:spPr>
         <p:txBody>
-          <a:bodyPr wrap="square" lIns="635" tIns="635" rIns="635" bIns="635" rtlCol="0" anchor="t">
+          <a:bodyPr wrap="square" lIns="1016" tIns="1016" rIns="1016" bIns="1016" rtlCol="0" anchor="t">
             <a:normAutofit/>
           </a:bodyPr>
           <a:lstStyle/>
           <a:p>
+            <a:pPr indent="0" marL="0">
+              <a:buNone/>
+            </a:pPr>
             <a:r>
               <a:rPr lang="en-US" sz="2100" dirty="0">
                 <a:solidFill>
-                  <a:srgbClr val="17364A"/>
-                </a:solidFill>
-                <a:latin typeface="Aptos" pitchFamily="34" charset="0"/>
-                <a:ea typeface="Aptos" pitchFamily="34" charset="-122"/>
-                <a:cs typeface="Aptos" pitchFamily="34" charset="-120"/>
-              </a:rPr>
-              <a:t>The main failure mode is causal overreach.</a:t>
+                  <a:srgbClr val="003A63"/>
+                </a:solidFill>
+                <a:latin typeface="Aptos" pitchFamily="34" charset="0"/>
+                <a:ea typeface="Aptos" pitchFamily="34" charset="-122"/>
+                <a:cs typeface="Aptos" pitchFamily="34" charset="-120"/>
+              </a:rPr>
+              <a:t>• The main failure mode is causal overreach.</a:t>
             </a:r>
             <a:endParaRPr lang="en-US" sz="2100" dirty="0"/>
           </a:p>
           <a:p>
+            <a:pPr indent="0" marL="0">
+              <a:buNone/>
+            </a:pPr>
             <a:r>
               <a:rPr lang="en-US" sz="2100" dirty="0">
                 <a:solidFill>
-                  <a:srgbClr val="17364A"/>
-                </a:solidFill>
-                <a:latin typeface="Aptos" pitchFamily="34" charset="0"/>
-                <a:ea typeface="Aptos" pitchFamily="34" charset="-122"/>
-                <a:cs typeface="Aptos" pitchFamily="34" charset="-120"/>
-              </a:rPr>
-              <a:t>A dashboard or AI report may state that a program reduced disease, improved access, or changed behavior.</a:t>
+                  <a:srgbClr val="003A63"/>
+                </a:solidFill>
+                <a:latin typeface="Aptos" pitchFamily="34" charset="0"/>
+                <a:ea typeface="Aptos" pitchFamily="34" charset="-122"/>
+                <a:cs typeface="Aptos" pitchFamily="34" charset="-120"/>
+              </a:rPr>
+              <a:t>• A dashboard or AI report may state that a program reduced disease, improved access, or changed.</a:t>
             </a:r>
             <a:endParaRPr lang="en-US" sz="2100" dirty="0"/>
           </a:p>
           <a:p>
+            <a:pPr indent="0" marL="0">
+              <a:buNone/>
+            </a:pPr>
             <a:r>
               <a:rPr lang="en-US" sz="2100" dirty="0">
                 <a:solidFill>
-                  <a:srgbClr val="17364A"/>
-                </a:solidFill>
-                <a:latin typeface="Aptos" pitchFamily="34" charset="0"/>
-                <a:ea typeface="Aptos" pitchFamily="34" charset="-122"/>
-                <a:cs typeface="Aptos" pitchFamily="34" charset="-120"/>
-              </a:rPr>
-              <a:t>A guardrail is to require causal language review before results are used in reports, funding decisions,.</a:t>
+                  <a:srgbClr val="003A63"/>
+                </a:solidFill>
+                <a:latin typeface="Aptos" pitchFamily="34" charset="0"/>
+                <a:ea typeface="Aptos" pitchFamily="34" charset="-122"/>
+                <a:cs typeface="Aptos" pitchFamily="34" charset="-120"/>
+              </a:rPr>
+              <a:t>• A guardrail is to require causal language review before results are used in reports, funding.</a:t>
             </a:r>
             <a:endParaRPr lang="en-US" sz="2100" dirty="0"/>
           </a:p>
@@ -4856,17 +4901,17 @@
         </p:nvSpPr>
         <p:spPr>
           <a:xfrm>
-            <a:off x="7799832" y="1828800"/>
-            <a:ext cx="3145536" cy="685800"/>
-          </a:xfrm>
-          <a:prstGeom prst="rect">
-            <a:avLst/>
-          </a:prstGeom>
-          <a:noFill/>
-          <a:ln/>
-        </p:spPr>
-        <p:txBody>
-          <a:bodyPr wrap="square" lIns="0" tIns="0" rIns="0" bIns="0" rtlCol="0" anchor="t">
+            <a:off x="7799832" y="1801368"/>
+            <a:ext cx="3145536" cy="758952"/>
+          </a:xfrm>
+          <a:prstGeom prst="rect">
+            <a:avLst/>
+          </a:prstGeom>
+          <a:noFill/>
+          <a:ln/>
+        </p:spPr>
+        <p:txBody>
+          <a:bodyPr wrap="square" lIns="254" tIns="254" rIns="254" bIns="254" rtlCol="0" anchor="t">
             <a:normAutofit/>
           </a:bodyPr>
           <a:lstStyle/>
@@ -4875,7 +4920,7 @@
               <a:buNone/>
             </a:pPr>
             <a:r>
-              <a:rPr lang="en-US" sz="1550" dirty="0">
+              <a:rPr lang="en-US" sz="1320" dirty="0">
                 <a:solidFill>
                   <a:srgbClr val="17364A"/>
                 </a:solidFill>
@@ -4885,7 +4930,7 @@
               </a:rPr>
               <a:t>The main failure mode is causal overreach.</a:t>
             </a:r>
-            <a:endParaRPr lang="en-US" sz="1550" dirty="0"/>
+            <a:endParaRPr lang="en-US" sz="1320" dirty="0"/>
           </a:p>
         </p:txBody>
       </p:sp>
@@ -4973,13 +5018,16 @@
           <a:ln/>
         </p:spPr>
         <p:txBody>
-          <a:bodyPr wrap="square" lIns="254" tIns="254" rIns="254" bIns="254" rtlCol="0" anchor="t">
+          <a:bodyPr wrap="square" lIns="508" tIns="508" rIns="508" bIns="508" rtlCol="0" anchor="t">
             <a:normAutofit/>
           </a:bodyPr>
           <a:lstStyle/>
           <a:p>
-            <a:r>
-              <a:rPr lang="en-US" sz="1380" dirty="0">
+            <a:pPr indent="0" marL="0">
+              <a:buNone/>
+            </a:pPr>
+            <a:r>
+              <a:rPr lang="en-US" sz="1220" dirty="0">
                 <a:solidFill>
                   <a:srgbClr val="17364A"/>
                 </a:solidFill>
@@ -4987,13 +5035,16 @@
                 <a:ea typeface="Aptos" pitchFamily="34" charset="-122"/>
                 <a:cs typeface="Aptos" pitchFamily="34" charset="-120"/>
               </a:rPr>
-              <a:t>A dashboard or AI report may state that a program reduced disease, improved access, or.</a:t>
-            </a:r>
-            <a:endParaRPr lang="en-US" sz="1380" dirty="0"/>
-          </a:p>
-          <a:p>
-            <a:r>
-              <a:rPr lang="en-US" sz="1380" dirty="0">
+              <a:t>A dashboard or AI report may state that a program reduced disease,.</a:t>
+            </a:r>
+            <a:endParaRPr lang="en-US" sz="1220" dirty="0"/>
+          </a:p>
+          <a:p>
+            <a:pPr indent="0" marL="0">
+              <a:buNone/>
+            </a:pPr>
+            <a:r>
+              <a:rPr lang="en-US" sz="1220" dirty="0">
                 <a:solidFill>
                   <a:srgbClr val="17364A"/>
                 </a:solidFill>
@@ -5001,13 +5052,16 @@
                 <a:ea typeface="Aptos" pitchFamily="34" charset="-122"/>
                 <a:cs typeface="Aptos" pitchFamily="34" charset="-120"/>
               </a:rPr>
-              <a:t>A guardrail is to require causal language review before results are used in reports,.</a:t>
-            </a:r>
-            <a:endParaRPr lang="en-US" sz="1380" dirty="0"/>
-          </a:p>
-          <a:p>
-            <a:r>
-              <a:rPr lang="en-US" sz="1380" dirty="0">
+              <a:t>A guardrail is to require causal language review before results.</a:t>
+            </a:r>
+            <a:endParaRPr lang="en-US" sz="1220" dirty="0"/>
+          </a:p>
+          <a:p>
+            <a:pPr indent="0" marL="0">
+              <a:buNone/>
+            </a:pPr>
+            <a:r>
+              <a:rPr lang="en-US" sz="1220" dirty="0">
                 <a:solidFill>
                   <a:srgbClr val="17364A"/>
                 </a:solidFill>
@@ -5017,7 +5071,7 @@
               </a:rPr>
               <a:t>Another risk is inequitable inference.</a:t>
             </a:r>
-            <a:endParaRPr lang="en-US" sz="1380" dirty="0"/>
+            <a:endParaRPr lang="en-US" sz="1220" dirty="0"/>
           </a:p>
         </p:txBody>
       </p:sp>
@@ -5095,17 +5149,17 @@
         </p:nvSpPr>
         <p:spPr>
           <a:xfrm>
-            <a:off x="7799832" y="5001768"/>
-            <a:ext cx="3145536" cy="502920"/>
-          </a:xfrm>
-          <a:prstGeom prst="rect">
-            <a:avLst/>
-          </a:prstGeom>
-          <a:noFill/>
-          <a:ln/>
-        </p:spPr>
-        <p:txBody>
-          <a:bodyPr wrap="square" lIns="0" tIns="0" rIns="0" bIns="0" rtlCol="0" anchor="t">
+            <a:off x="7799832" y="4974336"/>
+            <a:ext cx="3145536" cy="576072"/>
+          </a:xfrm>
+          <a:prstGeom prst="rect">
+            <a:avLst/>
+          </a:prstGeom>
+          <a:noFill/>
+          <a:ln/>
+        </p:spPr>
+        <p:txBody>
+          <a:bodyPr wrap="square" lIns="254" tIns="254" rIns="254" bIns="254" rtlCol="0" anchor="t">
             <a:normAutofit/>
           </a:bodyPr>
           <a:lstStyle/>
@@ -5114,7 +5168,7 @@
               <a:buNone/>
             </a:pPr>
             <a:r>
-              <a:rPr lang="en-US" sz="1550" dirty="0">
+              <a:rPr lang="en-US" sz="1320" dirty="0">
                 <a:solidFill>
                   <a:srgbClr val="17364A"/>
                 </a:solidFill>
@@ -5122,9 +5176,9 @@
                 <a:ea typeface="Aptos" pitchFamily="34" charset="-122"/>
                 <a:cs typeface="Aptos" pitchFamily="34" charset="-120"/>
               </a:rPr>
-              <a:t>Identify what could go wrong, who could be affected, what safeguards are needed, and what evidence should be reviewed before use expands.</a:t>
-            </a:r>
-            <a:endParaRPr lang="en-US" sz="1550" dirty="0"/>
+              <a:t>Identify what could go wrong, who could be affected, what safeguards are needed, and what evidence should be reviewed.</a:t>
+            </a:r>
+            <a:endParaRPr lang="en-US" sz="1320" dirty="0"/>
           </a:p>
         </p:txBody>
       </p:sp>
@@ -5425,49 +5479,58 @@
           <a:ln/>
         </p:spPr>
         <p:txBody>
-          <a:bodyPr wrap="square" lIns="635" tIns="635" rIns="635" bIns="635" rtlCol="0" anchor="t">
+          <a:bodyPr wrap="square" lIns="1016" tIns="1016" rIns="1016" bIns="1016" rtlCol="0" anchor="t">
             <a:normAutofit/>
           </a:bodyPr>
           <a:lstStyle/>
           <a:p>
+            <a:pPr indent="0" marL="0">
+              <a:buNone/>
+            </a:pPr>
             <a:r>
               <a:rPr lang="en-US" sz="2100" dirty="0">
                 <a:solidFill>
-                  <a:srgbClr val="17364A"/>
-                </a:solidFill>
-                <a:latin typeface="Aptos" pitchFamily="34" charset="0"/>
-                <a:ea typeface="Aptos" pitchFamily="34" charset="-122"/>
-                <a:cs typeface="Aptos" pitchFamily="34" charset="-120"/>
-              </a:rPr>
-              <a:t>Predictive models can identify risk, but causal inference is needed to decide what action is likely to.</a:t>
+                  <a:srgbClr val="003A63"/>
+                </a:solidFill>
+                <a:latin typeface="Aptos" pitchFamily="34" charset="0"/>
+                <a:ea typeface="Aptos" pitchFamily="34" charset="-122"/>
+                <a:cs typeface="Aptos" pitchFamily="34" charset="-120"/>
+              </a:rPr>
+              <a:t>• Predictive models can identify risk, but causal inference is needed to decide what action is.</a:t>
             </a:r>
             <a:endParaRPr lang="en-US" sz="2100" dirty="0"/>
           </a:p>
           <a:p>
+            <a:pPr indent="0" marL="0">
+              <a:buNone/>
+            </a:pPr>
             <a:r>
               <a:rPr lang="en-US" sz="2100" dirty="0">
                 <a:solidFill>
-                  <a:srgbClr val="17364A"/>
-                </a:solidFill>
-                <a:latin typeface="Aptos" pitchFamily="34" charset="0"/>
-                <a:ea typeface="Aptos" pitchFamily="34" charset="-122"/>
-                <a:cs typeface="Aptos" pitchFamily="34" charset="-120"/>
-              </a:rPr>
-              <a:t>Generative AI may help draft evaluation questions or summarize literature, but humans must verify.</a:t>
+                  <a:srgbClr val="003A63"/>
+                </a:solidFill>
+                <a:latin typeface="Aptos" pitchFamily="34" charset="0"/>
+                <a:ea typeface="Aptos" pitchFamily="34" charset="-122"/>
+                <a:cs typeface="Aptos" pitchFamily="34" charset="-120"/>
+              </a:rPr>
+              <a:t>• Generative AI may help draft evaluation questions or summarize literature, but humans must.</a:t>
             </a:r>
             <a:endParaRPr lang="en-US" sz="2100" dirty="0"/>
           </a:p>
           <a:p>
+            <a:pPr indent="0" marL="0">
+              <a:buNone/>
+            </a:pPr>
             <a:r>
               <a:rPr lang="en-US" sz="2100" dirty="0">
                 <a:solidFill>
-                  <a:srgbClr val="17364A"/>
-                </a:solidFill>
-                <a:latin typeface="Aptos" pitchFamily="34" charset="0"/>
-                <a:ea typeface="Aptos" pitchFamily="34" charset="-122"/>
-                <a:cs typeface="Aptos" pitchFamily="34" charset="-120"/>
-              </a:rPr>
-              <a:t>AI-supported decision-making should label outputs clearly as prediction, association, causal evidence,.</a:t>
+                  <a:srgbClr val="003A63"/>
+                </a:solidFill>
+                <a:latin typeface="Aptos" pitchFamily="34" charset="0"/>
+                <a:ea typeface="Aptos" pitchFamily="34" charset="-122"/>
+                <a:cs typeface="Aptos" pitchFamily="34" charset="-120"/>
+              </a:rPr>
+              <a:t>• AI-supported decision-making should label outputs clearly as prediction, association, causal.</a:t>
             </a:r>
             <a:endParaRPr lang="en-US" sz="2100" dirty="0"/>
           </a:p>
@@ -5547,17 +5610,17 @@
         </p:nvSpPr>
         <p:spPr>
           <a:xfrm>
-            <a:off x="7799832" y="1828800"/>
-            <a:ext cx="3145536" cy="685800"/>
-          </a:xfrm>
-          <a:prstGeom prst="rect">
-            <a:avLst/>
-          </a:prstGeom>
-          <a:noFill/>
-          <a:ln/>
-        </p:spPr>
-        <p:txBody>
-          <a:bodyPr wrap="square" lIns="0" tIns="0" rIns="0" bIns="0" rtlCol="0" anchor="t">
+            <a:off x="7799832" y="1801368"/>
+            <a:ext cx="3145536" cy="758952"/>
+          </a:xfrm>
+          <a:prstGeom prst="rect">
+            <a:avLst/>
+          </a:prstGeom>
+          <a:noFill/>
+          <a:ln/>
+        </p:spPr>
+        <p:txBody>
+          <a:bodyPr wrap="square" lIns="254" tIns="254" rIns="254" bIns="254" rtlCol="0" anchor="t">
             <a:normAutofit/>
           </a:bodyPr>
           <a:lstStyle/>
@@ -5566,7 +5629,7 @@
               <a:buNone/>
             </a:pPr>
             <a:r>
-              <a:rPr lang="en-US" sz="1550" dirty="0">
+              <a:rPr lang="en-US" sz="1320" dirty="0">
                 <a:solidFill>
                   <a:srgbClr val="17364A"/>
                 </a:solidFill>
@@ -5576,7 +5639,7 @@
               </a:rPr>
               <a:t>Predictive models can identify risk, but causal inference is needed to decide what action is likely to.</a:t>
             </a:r>
-            <a:endParaRPr lang="en-US" sz="1550" dirty="0"/>
+            <a:endParaRPr lang="en-US" sz="1320" dirty="0"/>
           </a:p>
         </p:txBody>
       </p:sp>
@@ -5664,13 +5727,16 @@
           <a:ln/>
         </p:spPr>
         <p:txBody>
-          <a:bodyPr wrap="square" lIns="254" tIns="254" rIns="254" bIns="254" rtlCol="0" anchor="t">
+          <a:bodyPr wrap="square" lIns="508" tIns="508" rIns="508" bIns="508" rtlCol="0" anchor="t">
             <a:normAutofit/>
           </a:bodyPr>
           <a:lstStyle/>
           <a:p>
-            <a:r>
-              <a:rPr lang="en-US" sz="1380" dirty="0">
+            <a:pPr indent="0" marL="0">
+              <a:buNone/>
+            </a:pPr>
+            <a:r>
+              <a:rPr lang="en-US" sz="1220" dirty="0">
                 <a:solidFill>
                   <a:srgbClr val="17364A"/>
                 </a:solidFill>
@@ -5678,13 +5744,16 @@
                 <a:ea typeface="Aptos" pitchFamily="34" charset="-122"/>
                 <a:cs typeface="Aptos" pitchFamily="34" charset="-120"/>
               </a:rPr>
-              <a:t>Predictive models can identify risk, but causal inference is needed to decide what action.</a:t>
-            </a:r>
-            <a:endParaRPr lang="en-US" sz="1380" dirty="0"/>
-          </a:p>
-          <a:p>
-            <a:r>
-              <a:rPr lang="en-US" sz="1380" dirty="0">
+              <a:t>Predictive models can identify risk, but causal inference is.</a:t>
+            </a:r>
+            <a:endParaRPr lang="en-US" sz="1220" dirty="0"/>
+          </a:p>
+          <a:p>
+            <a:pPr indent="0" marL="0">
+              <a:buNone/>
+            </a:pPr>
+            <a:r>
+              <a:rPr lang="en-US" sz="1220" dirty="0">
                 <a:solidFill>
                   <a:srgbClr val="17364A"/>
                 </a:solidFill>
@@ -5692,13 +5761,16 @@
                 <a:ea typeface="Aptos" pitchFamily="34" charset="-122"/>
                 <a:cs typeface="Aptos" pitchFamily="34" charset="-120"/>
               </a:rPr>
-              <a:t>Generative AI may help draft evaluation questions or summarize literature, but humans must.</a:t>
-            </a:r>
-            <a:endParaRPr lang="en-US" sz="1380" dirty="0"/>
-          </a:p>
-          <a:p>
-            <a:r>
-              <a:rPr lang="en-US" sz="1380" dirty="0">
+              <a:t>Generative AI may help draft evaluation questions or summarize.</a:t>
+            </a:r>
+            <a:endParaRPr lang="en-US" sz="1220" dirty="0"/>
+          </a:p>
+          <a:p>
+            <a:pPr indent="0" marL="0">
+              <a:buNone/>
+            </a:pPr>
+            <a:r>
+              <a:rPr lang="en-US" sz="1220" dirty="0">
                 <a:solidFill>
                   <a:srgbClr val="17364A"/>
                 </a:solidFill>
@@ -5706,9 +5778,9 @@
                 <a:ea typeface="Aptos" pitchFamily="34" charset="-122"/>
                 <a:cs typeface="Aptos" pitchFamily="34" charset="-120"/>
               </a:rPr>
-              <a:t>AI-supported decision-making should label outputs clearly as prediction, association,.</a:t>
-            </a:r>
-            <a:endParaRPr lang="en-US" sz="1380" dirty="0"/>
+              <a:t>AI-supported decision-making should label outputs clearly as.</a:t>
+            </a:r>
+            <a:endParaRPr lang="en-US" sz="1220" dirty="0"/>
           </a:p>
         </p:txBody>
       </p:sp>
@@ -5786,17 +5858,17 @@
         </p:nvSpPr>
         <p:spPr>
           <a:xfrm>
-            <a:off x="7799832" y="5001768"/>
-            <a:ext cx="3145536" cy="502920"/>
-          </a:xfrm>
-          <a:prstGeom prst="rect">
-            <a:avLst/>
-          </a:prstGeom>
-          <a:noFill/>
-          <a:ln/>
-        </p:spPr>
-        <p:txBody>
-          <a:bodyPr wrap="square" lIns="0" tIns="0" rIns="0" bIns="0" rtlCol="0" anchor="t">
+            <a:off x="7799832" y="4974336"/>
+            <a:ext cx="3145536" cy="576072"/>
+          </a:xfrm>
+          <a:prstGeom prst="rect">
+            <a:avLst/>
+          </a:prstGeom>
+          <a:noFill/>
+          <a:ln/>
+        </p:spPr>
+        <p:txBody>
+          <a:bodyPr wrap="square" lIns="254" tIns="254" rIns="254" bIns="254" rtlCol="0" anchor="t">
             <a:normAutofit/>
           </a:bodyPr>
           <a:lstStyle/>
@@ -5805,7 +5877,7 @@
               <a:buNone/>
             </a:pPr>
             <a:r>
-              <a:rPr lang="en-US" sz="1550" dirty="0">
+              <a:rPr lang="en-US" sz="1320" dirty="0">
                 <a:solidFill>
                   <a:srgbClr val="17364A"/>
                 </a:solidFill>
@@ -5813,9 +5885,9 @@
                 <a:ea typeface="Aptos" pitchFamily="34" charset="-122"/>
                 <a:cs typeface="Aptos" pitchFamily="34" charset="-120"/>
               </a:rPr>
-              <a:t>Use the concept to clarify workflow changes, dependencies, staffing, procurement requirements, training needs, and implementation checkpoints.</a:t>
-            </a:r>
-            <a:endParaRPr lang="en-US" sz="1550" dirty="0"/>
+              <a:t>Use the concept to clarify workflow changes, dependencies, staffing, procurement requirements, training needs, and.</a:t>
+            </a:r>
+            <a:endParaRPr lang="en-US" sz="1320" dirty="0"/>
           </a:p>
         </p:txBody>
       </p:sp>
@@ -6116,49 +6188,58 @@
           <a:ln/>
         </p:spPr>
         <p:txBody>
-          <a:bodyPr wrap="square" lIns="635" tIns="635" rIns="635" bIns="635" rtlCol="0" anchor="t">
+          <a:bodyPr wrap="square" lIns="1016" tIns="1016" rIns="1016" bIns="1016" rtlCol="0" anchor="t">
             <a:normAutofit/>
           </a:bodyPr>
           <a:lstStyle/>
           <a:p>
+            <a:pPr indent="0" marL="0">
+              <a:buNone/>
+            </a:pPr>
             <a:r>
               <a:rPr lang="en-US" sz="2100" dirty="0">
                 <a:solidFill>
-                  <a:srgbClr val="17364A"/>
-                </a:solidFill>
-                <a:latin typeface="Aptos" pitchFamily="34" charset="0"/>
-                <a:ea typeface="Aptos" pitchFamily="34" charset="-122"/>
-                <a:cs typeface="Aptos" pitchFamily="34" charset="-120"/>
-              </a:rPr>
-              <a:t>What AI outputs in your agency could be mistaken for causal evidence?</a:t>
+                  <a:srgbClr val="003A63"/>
+                </a:solidFill>
+                <a:latin typeface="Aptos" pitchFamily="34" charset="0"/>
+                <a:ea typeface="Aptos" pitchFamily="34" charset="-122"/>
+                <a:cs typeface="Aptos" pitchFamily="34" charset="-120"/>
+              </a:rPr>
+              <a:t>• What AI outputs in your agency could be mistaken for causal evidence?</a:t>
             </a:r>
             <a:endParaRPr lang="en-US" sz="2100" dirty="0"/>
           </a:p>
           <a:p>
+            <a:pPr indent="0" marL="0">
+              <a:buNone/>
+            </a:pPr>
             <a:r>
               <a:rPr lang="en-US" sz="2100" dirty="0">
                 <a:solidFill>
-                  <a:srgbClr val="17364A"/>
-                </a:solidFill>
-                <a:latin typeface="Aptos" pitchFamily="34" charset="0"/>
-                <a:ea typeface="Aptos" pitchFamily="34" charset="-122"/>
-                <a:cs typeface="Aptos" pitchFamily="34" charset="-120"/>
-              </a:rPr>
-              <a:t>Which decisions require knowing what intervention will change an outcome?</a:t>
+                  <a:srgbClr val="003A63"/>
+                </a:solidFill>
+                <a:latin typeface="Aptos" pitchFamily="34" charset="0"/>
+                <a:ea typeface="Aptos" pitchFamily="34" charset="-122"/>
+                <a:cs typeface="Aptos" pitchFamily="34" charset="-120"/>
+              </a:rPr>
+              <a:t>• Which decisions require knowing what intervention will change an outcome?</a:t>
             </a:r>
             <a:endParaRPr lang="en-US" sz="2100" dirty="0"/>
           </a:p>
           <a:p>
+            <a:pPr indent="0" marL="0">
+              <a:buNone/>
+            </a:pPr>
             <a:r>
               <a:rPr lang="en-US" sz="2100" dirty="0">
                 <a:solidFill>
-                  <a:srgbClr val="17364A"/>
-                </a:solidFill>
-                <a:latin typeface="Aptos" pitchFamily="34" charset="0"/>
-                <a:ea typeface="Aptos" pitchFamily="34" charset="-122"/>
-                <a:cs typeface="Aptos" pitchFamily="34" charset="-120"/>
-              </a:rPr>
-              <a:t>What confounders are likely in your program area?</a:t>
+                  <a:srgbClr val="003A63"/>
+                </a:solidFill>
+                <a:latin typeface="Aptos" pitchFamily="34" charset="0"/>
+                <a:ea typeface="Aptos" pitchFamily="34" charset="-122"/>
+                <a:cs typeface="Aptos" pitchFamily="34" charset="-120"/>
+              </a:rPr>
+              <a:t>• What confounders are likely in your program area?</a:t>
             </a:r>
             <a:endParaRPr lang="en-US" sz="2100" dirty="0"/>
           </a:p>
@@ -6238,17 +6319,17 @@
         </p:nvSpPr>
         <p:spPr>
           <a:xfrm>
-            <a:off x="7799832" y="1828800"/>
-            <a:ext cx="3145536" cy="685800"/>
-          </a:xfrm>
-          <a:prstGeom prst="rect">
-            <a:avLst/>
-          </a:prstGeom>
-          <a:noFill/>
-          <a:ln/>
-        </p:spPr>
-        <p:txBody>
-          <a:bodyPr wrap="square" lIns="0" tIns="0" rIns="0" bIns="0" rtlCol="0" anchor="t">
+            <a:off x="7799832" y="1801368"/>
+            <a:ext cx="3145536" cy="758952"/>
+          </a:xfrm>
+          <a:prstGeom prst="rect">
+            <a:avLst/>
+          </a:prstGeom>
+          <a:noFill/>
+          <a:ln/>
+        </p:spPr>
+        <p:txBody>
+          <a:bodyPr wrap="square" lIns="254" tIns="254" rIns="254" bIns="254" rtlCol="0" anchor="t">
             <a:normAutofit/>
           </a:bodyPr>
           <a:lstStyle/>
@@ -6257,7 +6338,7 @@
               <a:buNone/>
             </a:pPr>
             <a:r>
-              <a:rPr lang="en-US" sz="1550" dirty="0">
+              <a:rPr lang="en-US" sz="1320" dirty="0">
                 <a:solidFill>
                   <a:srgbClr val="17364A"/>
                 </a:solidFill>
@@ -6267,7 +6348,7 @@
               </a:rPr>
               <a:t>What AI outputs in your agency could be mistaken for causal evidence?</a:t>
             </a:r>
-            <a:endParaRPr lang="en-US" sz="1550" dirty="0"/>
+            <a:endParaRPr lang="en-US" sz="1320" dirty="0"/>
           </a:p>
         </p:txBody>
       </p:sp>
@@ -6355,13 +6436,16 @@
           <a:ln/>
         </p:spPr>
         <p:txBody>
-          <a:bodyPr wrap="square" lIns="254" tIns="254" rIns="254" bIns="254" rtlCol="0" anchor="t">
+          <a:bodyPr wrap="square" lIns="508" tIns="508" rIns="508" bIns="508" rtlCol="0" anchor="t">
             <a:normAutofit/>
           </a:bodyPr>
           <a:lstStyle/>
           <a:p>
-            <a:r>
-              <a:rPr lang="en-US" sz="1380" dirty="0">
+            <a:pPr indent="0" marL="0">
+              <a:buNone/>
+            </a:pPr>
+            <a:r>
+              <a:rPr lang="en-US" sz="1220" dirty="0">
                 <a:solidFill>
                   <a:srgbClr val="17364A"/>
                 </a:solidFill>
@@ -6369,13 +6453,16 @@
                 <a:ea typeface="Aptos" pitchFamily="34" charset="-122"/>
                 <a:cs typeface="Aptos" pitchFamily="34" charset="-120"/>
               </a:rPr>
-              <a:t>What AI outputs in your agency could be mistaken for causal evidence?</a:t>
-            </a:r>
-            <a:endParaRPr lang="en-US" sz="1380" dirty="0"/>
-          </a:p>
-          <a:p>
-            <a:r>
-              <a:rPr lang="en-US" sz="1380" dirty="0">
+              <a:t>What AI outputs in your agency could be mistaken for causal.</a:t>
+            </a:r>
+            <a:endParaRPr lang="en-US" sz="1220" dirty="0"/>
+          </a:p>
+          <a:p>
+            <a:pPr indent="0" marL="0">
+              <a:buNone/>
+            </a:pPr>
+            <a:r>
+              <a:rPr lang="en-US" sz="1220" dirty="0">
                 <a:solidFill>
                   <a:srgbClr val="17364A"/>
                 </a:solidFill>
@@ -6383,13 +6470,16 @@
                 <a:ea typeface="Aptos" pitchFamily="34" charset="-122"/>
                 <a:cs typeface="Aptos" pitchFamily="34" charset="-120"/>
               </a:rPr>
-              <a:t>Which decisions require knowing what intervention will change an outcome?</a:t>
-            </a:r>
-            <a:endParaRPr lang="en-US" sz="1380" dirty="0"/>
-          </a:p>
-          <a:p>
-            <a:r>
-              <a:rPr lang="en-US" sz="1380" dirty="0">
+              <a:t>Which decisions require knowing what intervention will change an.</a:t>
+            </a:r>
+            <a:endParaRPr lang="en-US" sz="1220" dirty="0"/>
+          </a:p>
+          <a:p>
+            <a:pPr indent="0" marL="0">
+              <a:buNone/>
+            </a:pPr>
+            <a:r>
+              <a:rPr lang="en-US" sz="1220" dirty="0">
                 <a:solidFill>
                   <a:srgbClr val="17364A"/>
                 </a:solidFill>
@@ -6399,7 +6489,7 @@
               </a:rPr>
               <a:t>What confounders are likely in your program area?</a:t>
             </a:r>
-            <a:endParaRPr lang="en-US" sz="1380" dirty="0"/>
+            <a:endParaRPr lang="en-US" sz="1220" dirty="0"/>
           </a:p>
         </p:txBody>
       </p:sp>
@@ -6477,17 +6567,17 @@
         </p:nvSpPr>
         <p:spPr>
           <a:xfrm>
-            <a:off x="7799832" y="5001768"/>
-            <a:ext cx="3145536" cy="502920"/>
-          </a:xfrm>
-          <a:prstGeom prst="rect">
-            <a:avLst/>
-          </a:prstGeom>
-          <a:noFill/>
-          <a:ln/>
-        </p:spPr>
-        <p:txBody>
-          <a:bodyPr wrap="square" lIns="0" tIns="0" rIns="0" bIns="0" rtlCol="0" anchor="t">
+            <a:off x="7799832" y="4974336"/>
+            <a:ext cx="3145536" cy="576072"/>
+          </a:xfrm>
+          <a:prstGeom prst="rect">
+            <a:avLst/>
+          </a:prstGeom>
+          <a:noFill/>
+          <a:ln/>
+        </p:spPr>
+        <p:txBody>
+          <a:bodyPr wrap="square" lIns="254" tIns="254" rIns="254" bIns="254" rtlCol="0" anchor="t">
             <a:normAutofit/>
           </a:bodyPr>
           <a:lstStyle/>
@@ -6496,7 +6586,7 @@
               <a:buNone/>
             </a:pPr>
             <a:r>
-              <a:rPr lang="en-US" sz="1550" dirty="0">
+              <a:rPr lang="en-US" sz="1320" dirty="0">
                 <a:solidFill>
                   <a:srgbClr val="17364A"/>
                 </a:solidFill>
@@ -6504,9 +6594,9 @@
                 <a:ea typeface="Aptos" pitchFamily="34" charset="-122"/>
                 <a:cs typeface="Aptos" pitchFamily="34" charset="-120"/>
               </a:rPr>
-              <a:t>Connect the concept to public health purpose, responsible use, required safeguards, documentation, and the next action a department should take.</a:t>
-            </a:r>
-            <a:endParaRPr lang="en-US" sz="1550" dirty="0"/>
+              <a:t>Connect the concept to public health purpose, responsible use, required safeguards, documentation, and the next action a.</a:t>
+            </a:r>
+            <a:endParaRPr lang="en-US" sz="1320" dirty="0"/>
           </a:p>
         </p:txBody>
       </p:sp>
@@ -6807,35 +6897,41 @@
           <a:ln/>
         </p:spPr>
         <p:txBody>
-          <a:bodyPr wrap="square" lIns="635" tIns="635" rIns="635" bIns="635" rtlCol="0" anchor="t">
+          <a:bodyPr wrap="square" lIns="1016" tIns="1016" rIns="1016" bIns="1016" rtlCol="0" anchor="t">
             <a:normAutofit/>
           </a:bodyPr>
           <a:lstStyle/>
           <a:p>
+            <a:pPr indent="0" marL="0">
+              <a:buNone/>
+            </a:pPr>
             <a:r>
               <a:rPr lang="en-US" sz="2100" dirty="0">
                 <a:solidFill>
-                  <a:srgbClr val="17364A"/>
-                </a:solidFill>
-                <a:latin typeface="Aptos" pitchFamily="34" charset="0"/>
-                <a:ea typeface="Aptos" pitchFamily="34" charset="-122"/>
-                <a:cs typeface="Aptos" pitchFamily="34" charset="-120"/>
-              </a:rPr>
-              <a:t>What comparison group could support evaluation?</a:t>
+                  <a:srgbClr val="003A63"/>
+                </a:solidFill>
+                <a:latin typeface="Aptos" pitchFamily="34" charset="0"/>
+                <a:ea typeface="Aptos" pitchFamily="34" charset="-122"/>
+                <a:cs typeface="Aptos" pitchFamily="34" charset="-120"/>
+              </a:rPr>
+              <a:t>• What comparison group could support evaluation?</a:t>
             </a:r>
             <a:endParaRPr lang="en-US" sz="2100" dirty="0"/>
           </a:p>
           <a:p>
+            <a:pPr indent="0" marL="0">
+              <a:buNone/>
+            </a:pPr>
             <a:r>
               <a:rPr lang="en-US" sz="2100" dirty="0">
                 <a:solidFill>
-                  <a:srgbClr val="17364A"/>
-                </a:solidFill>
-                <a:latin typeface="Aptos" pitchFamily="34" charset="0"/>
-                <a:ea typeface="Aptos" pitchFamily="34" charset="-122"/>
-                <a:cs typeface="Aptos" pitchFamily="34" charset="-120"/>
-              </a:rPr>
-              <a:t>Who should review causal claims before public release?</a:t>
+                  <a:srgbClr val="003A63"/>
+                </a:solidFill>
+                <a:latin typeface="Aptos" pitchFamily="34" charset="0"/>
+                <a:ea typeface="Aptos" pitchFamily="34" charset="-122"/>
+                <a:cs typeface="Aptos" pitchFamily="34" charset="-120"/>
+              </a:rPr>
+              <a:t>• Who should review causal claims before public release?</a:t>
             </a:r>
             <a:endParaRPr lang="en-US" sz="2100" dirty="0"/>
           </a:p>
@@ -6915,17 +7011,17 @@
         </p:nvSpPr>
         <p:spPr>
           <a:xfrm>
-            <a:off x="7799832" y="1828800"/>
-            <a:ext cx="3145536" cy="685800"/>
-          </a:xfrm>
-          <a:prstGeom prst="rect">
-            <a:avLst/>
-          </a:prstGeom>
-          <a:noFill/>
-          <a:ln/>
-        </p:spPr>
-        <p:txBody>
-          <a:bodyPr wrap="square" lIns="0" tIns="0" rIns="0" bIns="0" rtlCol="0" anchor="t">
+            <a:off x="7799832" y="1801368"/>
+            <a:ext cx="3145536" cy="758952"/>
+          </a:xfrm>
+          <a:prstGeom prst="rect">
+            <a:avLst/>
+          </a:prstGeom>
+          <a:noFill/>
+          <a:ln/>
+        </p:spPr>
+        <p:txBody>
+          <a:bodyPr wrap="square" lIns="254" tIns="254" rIns="254" bIns="254" rtlCol="0" anchor="t">
             <a:normAutofit/>
           </a:bodyPr>
           <a:lstStyle/>
@@ -6934,7 +7030,7 @@
               <a:buNone/>
             </a:pPr>
             <a:r>
-              <a:rPr lang="en-US" sz="1550" dirty="0">
+              <a:rPr lang="en-US" sz="1320" dirty="0">
                 <a:solidFill>
                   <a:srgbClr val="17364A"/>
                 </a:solidFill>
@@ -6944,7 +7040,7 @@
               </a:rPr>
               <a:t>What comparison group could support evaluation?</a:t>
             </a:r>
-            <a:endParaRPr lang="en-US" sz="1550" dirty="0"/>
+            <a:endParaRPr lang="en-US" sz="1320" dirty="0"/>
           </a:p>
         </p:txBody>
       </p:sp>
@@ -7032,13 +7128,16 @@
           <a:ln/>
         </p:spPr>
         <p:txBody>
-          <a:bodyPr wrap="square" lIns="254" tIns="254" rIns="254" bIns="254" rtlCol="0" anchor="t">
+          <a:bodyPr wrap="square" lIns="508" tIns="508" rIns="508" bIns="508" rtlCol="0" anchor="t">
             <a:normAutofit/>
           </a:bodyPr>
           <a:lstStyle/>
           <a:p>
-            <a:r>
-              <a:rPr lang="en-US" sz="1380" dirty="0">
+            <a:pPr indent="0" marL="0">
+              <a:buNone/>
+            </a:pPr>
+            <a:r>
+              <a:rPr lang="en-US" sz="1220" dirty="0">
                 <a:solidFill>
                   <a:srgbClr val="17364A"/>
                 </a:solidFill>
@@ -7048,11 +7147,14 @@
               </a:rPr>
               <a:t>What comparison group could support evaluation?</a:t>
             </a:r>
-            <a:endParaRPr lang="en-US" sz="1380" dirty="0"/>
-          </a:p>
-          <a:p>
-            <a:r>
-              <a:rPr lang="en-US" sz="1380" dirty="0">
+            <a:endParaRPr lang="en-US" sz="1220" dirty="0"/>
+          </a:p>
+          <a:p>
+            <a:pPr indent="0" marL="0">
+              <a:buNone/>
+            </a:pPr>
+            <a:r>
+              <a:rPr lang="en-US" sz="1220" dirty="0">
                 <a:solidFill>
                   <a:srgbClr val="17364A"/>
                 </a:solidFill>
@@ -7062,7 +7164,7 @@
               </a:rPr>
               <a:t>Who should review causal claims before public release?</a:t>
             </a:r>
-            <a:endParaRPr lang="en-US" sz="1380" dirty="0"/>
+            <a:endParaRPr lang="en-US" sz="1220" dirty="0"/>
           </a:p>
         </p:txBody>
       </p:sp>
@@ -7140,17 +7242,17 @@
         </p:nvSpPr>
         <p:spPr>
           <a:xfrm>
-            <a:off x="7799832" y="5001768"/>
-            <a:ext cx="3145536" cy="502920"/>
-          </a:xfrm>
-          <a:prstGeom prst="rect">
-            <a:avLst/>
-          </a:prstGeom>
-          <a:noFill/>
-          <a:ln/>
-        </p:spPr>
-        <p:txBody>
-          <a:bodyPr wrap="square" lIns="0" tIns="0" rIns="0" bIns="0" rtlCol="0" anchor="t">
+            <a:off x="7799832" y="4974336"/>
+            <a:ext cx="3145536" cy="576072"/>
+          </a:xfrm>
+          <a:prstGeom prst="rect">
+            <a:avLst/>
+          </a:prstGeom>
+          <a:noFill/>
+          <a:ln/>
+        </p:spPr>
+        <p:txBody>
+          <a:bodyPr wrap="square" lIns="254" tIns="254" rIns="254" bIns="254" rtlCol="0" anchor="t">
             <a:normAutofit/>
           </a:bodyPr>
           <a:lstStyle/>
@@ -7159,7 +7261,7 @@
               <a:buNone/>
             </a:pPr>
             <a:r>
-              <a:rPr lang="en-US" sz="1550" dirty="0">
+              <a:rPr lang="en-US" sz="1320" dirty="0">
                 <a:solidFill>
                   <a:srgbClr val="17364A"/>
                 </a:solidFill>
@@ -7167,9 +7269,9 @@
                 <a:ea typeface="Aptos" pitchFamily="34" charset="-122"/>
                 <a:cs typeface="Aptos" pitchFamily="34" charset="-120"/>
               </a:rPr>
-              <a:t>Connect the concept to public health purpose, responsible use, required safeguards, documentation, and the next action a department should take.</a:t>
-            </a:r>
-            <a:endParaRPr lang="en-US" sz="1550" dirty="0"/>
+              <a:t>Connect the concept to public health purpose, responsible use, required safeguards, documentation, and the next action a.</a:t>
+            </a:r>
+            <a:endParaRPr lang="en-US" sz="1320" dirty="0"/>
           </a:p>
         </p:txBody>
       </p:sp>
@@ -7470,35 +7572,41 @@
           <a:ln/>
         </p:spPr>
         <p:txBody>
-          <a:bodyPr wrap="square" lIns="635" tIns="635" rIns="635" bIns="635" rtlCol="0" anchor="t">
+          <a:bodyPr wrap="square" lIns="1016" tIns="1016" rIns="1016" bIns="1016" rtlCol="0" anchor="t">
             <a:normAutofit/>
           </a:bodyPr>
           <a:lstStyle/>
           <a:p>
+            <a:pPr indent="0" marL="0">
+              <a:buNone/>
+            </a:pPr>
             <a:r>
               <a:rPr lang="en-US" sz="2100" dirty="0">
                 <a:solidFill>
-                  <a:srgbClr val="17364A"/>
-                </a:solidFill>
-                <a:latin typeface="Aptos" pitchFamily="34" charset="0"/>
-                <a:ea typeface="Aptos" pitchFamily="34" charset="-122"/>
-                <a:cs typeface="Aptos" pitchFamily="34" charset="-120"/>
-              </a:rPr>
-              <a:t>Create a causal question framing worksheet for an AI-supported decision.</a:t>
+                  <a:srgbClr val="003A63"/>
+                </a:solidFill>
+                <a:latin typeface="Aptos" pitchFamily="34" charset="0"/>
+                <a:ea typeface="Aptos" pitchFamily="34" charset="-122"/>
+                <a:cs typeface="Aptos" pitchFamily="34" charset="-120"/>
+              </a:rPr>
+              <a:t>• Create a causal question framing worksheet for an AI-supported decision.</a:t>
             </a:r>
             <a:endParaRPr lang="en-US" sz="2100" dirty="0"/>
           </a:p>
           <a:p>
+            <a:pPr indent="0" marL="0">
+              <a:buNone/>
+            </a:pPr>
             <a:r>
               <a:rPr lang="en-US" sz="2100" dirty="0">
                 <a:solidFill>
-                  <a:srgbClr val="17364A"/>
-                </a:solidFill>
-                <a:latin typeface="Aptos" pitchFamily="34" charset="0"/>
-                <a:ea typeface="Aptos" pitchFamily="34" charset="-122"/>
-                <a:cs typeface="Aptos" pitchFamily="34" charset="-120"/>
-              </a:rPr>
-              <a:t>Identify the population, intervention or exposure, comparison, outcome, time period, likely.</a:t>
+                  <a:srgbClr val="003A63"/>
+                </a:solidFill>
+                <a:latin typeface="Aptos" pitchFamily="34" charset="0"/>
+                <a:ea typeface="Aptos" pitchFamily="34" charset="-122"/>
+                <a:cs typeface="Aptos" pitchFamily="34" charset="-120"/>
+              </a:rPr>
+              <a:t>• Identify the population, intervention or exposure, comparison, outcome, time period, likely.</a:t>
             </a:r>
             <a:endParaRPr lang="en-US" sz="2100" dirty="0"/>
           </a:p>
@@ -7578,17 +7686,17 @@
         </p:nvSpPr>
         <p:spPr>
           <a:xfrm>
-            <a:off x="7799832" y="1828800"/>
-            <a:ext cx="3145536" cy="685800"/>
-          </a:xfrm>
-          <a:prstGeom prst="rect">
-            <a:avLst/>
-          </a:prstGeom>
-          <a:noFill/>
-          <a:ln/>
-        </p:spPr>
-        <p:txBody>
-          <a:bodyPr wrap="square" lIns="0" tIns="0" rIns="0" bIns="0" rtlCol="0" anchor="t">
+            <a:off x="7799832" y="1801368"/>
+            <a:ext cx="3145536" cy="758952"/>
+          </a:xfrm>
+          <a:prstGeom prst="rect">
+            <a:avLst/>
+          </a:prstGeom>
+          <a:noFill/>
+          <a:ln/>
+        </p:spPr>
+        <p:txBody>
+          <a:bodyPr wrap="square" lIns="254" tIns="254" rIns="254" bIns="254" rtlCol="0" anchor="t">
             <a:normAutofit/>
           </a:bodyPr>
           <a:lstStyle/>
@@ -7597,7 +7705,7 @@
               <a:buNone/>
             </a:pPr>
             <a:r>
-              <a:rPr lang="en-US" sz="1550" dirty="0">
+              <a:rPr lang="en-US" sz="1320" dirty="0">
                 <a:solidFill>
                   <a:srgbClr val="17364A"/>
                 </a:solidFill>
@@ -7607,7 +7715,7 @@
               </a:rPr>
               <a:t>Create a causal question framing worksheet for an AI-supported decision.</a:t>
             </a:r>
-            <a:endParaRPr lang="en-US" sz="1550" dirty="0"/>
+            <a:endParaRPr lang="en-US" sz="1320" dirty="0"/>
           </a:p>
         </p:txBody>
       </p:sp>
@@ -7695,13 +7803,16 @@
           <a:ln/>
         </p:spPr>
         <p:txBody>
-          <a:bodyPr wrap="square" lIns="254" tIns="254" rIns="254" bIns="254" rtlCol="0" anchor="t">
+          <a:bodyPr wrap="square" lIns="508" tIns="508" rIns="508" bIns="508" rtlCol="0" anchor="t">
             <a:normAutofit/>
           </a:bodyPr>
           <a:lstStyle/>
           <a:p>
-            <a:r>
-              <a:rPr lang="en-US" sz="1380" dirty="0">
+            <a:pPr indent="0" marL="0">
+              <a:buNone/>
+            </a:pPr>
+            <a:r>
+              <a:rPr lang="en-US" sz="1220" dirty="0">
                 <a:solidFill>
                   <a:srgbClr val="17364A"/>
                 </a:solidFill>
@@ -7709,13 +7820,16 @@
                 <a:ea typeface="Aptos" pitchFamily="34" charset="-122"/>
                 <a:cs typeface="Aptos" pitchFamily="34" charset="-120"/>
               </a:rPr>
-              <a:t>Create a causal question framing worksheet for an AI-supported decision.</a:t>
-            </a:r>
-            <a:endParaRPr lang="en-US" sz="1380" dirty="0"/>
-          </a:p>
-          <a:p>
-            <a:r>
-              <a:rPr lang="en-US" sz="1380" dirty="0">
+              <a:t>Create a causal question framing worksheet for an AI-supported.</a:t>
+            </a:r>
+            <a:endParaRPr lang="en-US" sz="1220" dirty="0"/>
+          </a:p>
+          <a:p>
+            <a:pPr indent="0" marL="0">
+              <a:buNone/>
+            </a:pPr>
+            <a:r>
+              <a:rPr lang="en-US" sz="1220" dirty="0">
                 <a:solidFill>
                   <a:srgbClr val="17364A"/>
                 </a:solidFill>
@@ -7723,9 +7837,9 @@
                 <a:ea typeface="Aptos" pitchFamily="34" charset="-122"/>
                 <a:cs typeface="Aptos" pitchFamily="34" charset="-120"/>
               </a:rPr>
-              <a:t>Identify the population, intervention or exposure, comparison, outcome, time period, likely.</a:t>
-            </a:r>
-            <a:endParaRPr lang="en-US" sz="1380" dirty="0"/>
+              <a:t>Identify the population, intervention or exposure, comparison,.</a:t>
+            </a:r>
+            <a:endParaRPr lang="en-US" sz="1220" dirty="0"/>
           </a:p>
         </p:txBody>
       </p:sp>
@@ -7803,17 +7917,17 @@
         </p:nvSpPr>
         <p:spPr>
           <a:xfrm>
-            <a:off x="7799832" y="5001768"/>
-            <a:ext cx="3145536" cy="502920"/>
-          </a:xfrm>
-          <a:prstGeom prst="rect">
-            <a:avLst/>
-          </a:prstGeom>
-          <a:noFill/>
-          <a:ln/>
-        </p:spPr>
-        <p:txBody>
-          <a:bodyPr wrap="square" lIns="0" tIns="0" rIns="0" bIns="0" rtlCol="0" anchor="t">
+            <a:off x="7799832" y="4974336"/>
+            <a:ext cx="3145536" cy="576072"/>
+          </a:xfrm>
+          <a:prstGeom prst="rect">
+            <a:avLst/>
+          </a:prstGeom>
+          <a:noFill/>
+          <a:ln/>
+        </p:spPr>
+        <p:txBody>
+          <a:bodyPr wrap="square" lIns="254" tIns="254" rIns="254" bIns="254" rtlCol="0" anchor="t">
             <a:normAutofit/>
           </a:bodyPr>
           <a:lstStyle/>
@@ -7822,7 +7936,7 @@
               <a:buNone/>
             </a:pPr>
             <a:r>
-              <a:rPr lang="en-US" sz="1550" dirty="0">
+              <a:rPr lang="en-US" sz="1320" dirty="0">
                 <a:solidFill>
                   <a:srgbClr val="17364A"/>
                 </a:solidFill>
@@ -7830,9 +7944,9 @@
                 <a:ea typeface="Aptos" pitchFamily="34" charset="-122"/>
                 <a:cs typeface="Aptos" pitchFamily="34" charset="-120"/>
               </a:rPr>
-              <a:t>Use the assignment to test whether you can explain the concept, apply it to a realistic public health situation, and identify what would need review before the work moves forward.</a:t>
-            </a:r>
-            <a:endParaRPr lang="en-US" sz="1550" dirty="0"/>
+              <a:t>Use the assignment to test whether you can explain the concept, apply it to a realistic public health situation, and.</a:t>
+            </a:r>
+            <a:endParaRPr lang="en-US" sz="1320" dirty="0"/>
           </a:p>
         </p:txBody>
       </p:sp>
@@ -8133,49 +8247,58 @@
           <a:ln/>
         </p:spPr>
         <p:txBody>
-          <a:bodyPr wrap="square" lIns="635" tIns="635" rIns="635" bIns="635" rtlCol="0" anchor="t">
+          <a:bodyPr wrap="square" lIns="1016" tIns="1016" rIns="1016" bIns="1016" rtlCol="0" anchor="t">
             <a:normAutofit/>
           </a:bodyPr>
           <a:lstStyle/>
           <a:p>
+            <a:pPr indent="0" marL="0">
+              <a:buNone/>
+            </a:pPr>
             <a:r>
               <a:rPr lang="en-US" sz="2100" dirty="0">
                 <a:solidFill>
-                  <a:srgbClr val="17364A"/>
-                </a:solidFill>
-                <a:latin typeface="Aptos" pitchFamily="34" charset="0"/>
-                <a:ea typeface="Aptos" pitchFamily="34" charset="-122"/>
-                <a:cs typeface="Aptos" pitchFamily="34" charset="-120"/>
-              </a:rPr>
-              <a:t>Causal question framing worksheet</a:t>
+                  <a:srgbClr val="003A63"/>
+                </a:solidFill>
+                <a:latin typeface="Aptos" pitchFamily="34" charset="0"/>
+                <a:ea typeface="Aptos" pitchFamily="34" charset="-122"/>
+                <a:cs typeface="Aptos" pitchFamily="34" charset="-120"/>
+              </a:rPr>
+              <a:t>• Causal question framing worksheet</a:t>
             </a:r>
             <a:endParaRPr lang="en-US" sz="2100" dirty="0"/>
           </a:p>
           <a:p>
+            <a:pPr indent="0" marL="0">
+              <a:buNone/>
+            </a:pPr>
             <a:r>
               <a:rPr lang="en-US" sz="2100" dirty="0">
                 <a:solidFill>
-                  <a:srgbClr val="17364A"/>
-                </a:solidFill>
-                <a:latin typeface="Aptos" pitchFamily="34" charset="0"/>
-                <a:ea typeface="Aptos" pitchFamily="34" charset="-122"/>
-                <a:cs typeface="Aptos" pitchFamily="34" charset="-120"/>
-              </a:rPr>
-              <a:t>List of assumptions and likely confounders</a:t>
+                  <a:srgbClr val="003A63"/>
+                </a:solidFill>
+                <a:latin typeface="Aptos" pitchFamily="34" charset="0"/>
+                <a:ea typeface="Aptos" pitchFamily="34" charset="-122"/>
+                <a:cs typeface="Aptos" pitchFamily="34" charset="-120"/>
+              </a:rPr>
+              <a:t>• List of assumptions and likely confounders</a:t>
             </a:r>
             <a:endParaRPr lang="en-US" sz="2100" dirty="0"/>
           </a:p>
           <a:p>
+            <a:pPr indent="0" marL="0">
+              <a:buNone/>
+            </a:pPr>
             <a:r>
               <a:rPr lang="en-US" sz="2100" dirty="0">
                 <a:solidFill>
-                  <a:srgbClr val="17364A"/>
-                </a:solidFill>
-                <a:latin typeface="Aptos" pitchFamily="34" charset="0"/>
-                <a:ea typeface="Aptos" pitchFamily="34" charset="-122"/>
-                <a:cs typeface="Aptos" pitchFamily="34" charset="-120"/>
-              </a:rPr>
-              <a:t>Recommended evaluation design or expert consultation need</a:t>
+                  <a:srgbClr val="003A63"/>
+                </a:solidFill>
+                <a:latin typeface="Aptos" pitchFamily="34" charset="0"/>
+                <a:ea typeface="Aptos" pitchFamily="34" charset="-122"/>
+                <a:cs typeface="Aptos" pitchFamily="34" charset="-120"/>
+              </a:rPr>
+              <a:t>• Recommended evaluation design or expert consultation need</a:t>
             </a:r>
             <a:endParaRPr lang="en-US" sz="2100" dirty="0"/>
           </a:p>
@@ -8255,17 +8378,17 @@
         </p:nvSpPr>
         <p:spPr>
           <a:xfrm>
-            <a:off x="7799832" y="1828800"/>
-            <a:ext cx="3145536" cy="685800"/>
-          </a:xfrm>
-          <a:prstGeom prst="rect">
-            <a:avLst/>
-          </a:prstGeom>
-          <a:noFill/>
-          <a:ln/>
-        </p:spPr>
-        <p:txBody>
-          <a:bodyPr wrap="square" lIns="0" tIns="0" rIns="0" bIns="0" rtlCol="0" anchor="t">
+            <a:off x="7799832" y="1801368"/>
+            <a:ext cx="3145536" cy="758952"/>
+          </a:xfrm>
+          <a:prstGeom prst="rect">
+            <a:avLst/>
+          </a:prstGeom>
+          <a:noFill/>
+          <a:ln/>
+        </p:spPr>
+        <p:txBody>
+          <a:bodyPr wrap="square" lIns="254" tIns="254" rIns="254" bIns="254" rtlCol="0" anchor="t">
             <a:normAutofit/>
           </a:bodyPr>
           <a:lstStyle/>
@@ -8274,7 +8397,7 @@
               <a:buNone/>
             </a:pPr>
             <a:r>
-              <a:rPr lang="en-US" sz="1550" dirty="0">
+              <a:rPr lang="en-US" sz="1320" dirty="0">
                 <a:solidFill>
                   <a:srgbClr val="17364A"/>
                 </a:solidFill>
@@ -8284,7 +8407,7 @@
               </a:rPr>
               <a:t>Causal question framing worksheet</a:t>
             </a:r>
-            <a:endParaRPr lang="en-US" sz="1550" dirty="0"/>
+            <a:endParaRPr lang="en-US" sz="1320" dirty="0"/>
           </a:p>
         </p:txBody>
       </p:sp>
@@ -8372,13 +8495,16 @@
           <a:ln/>
         </p:spPr>
         <p:txBody>
-          <a:bodyPr wrap="square" lIns="254" tIns="254" rIns="254" bIns="254" rtlCol="0" anchor="t">
+          <a:bodyPr wrap="square" lIns="508" tIns="508" rIns="508" bIns="508" rtlCol="0" anchor="t">
             <a:normAutofit/>
           </a:bodyPr>
           <a:lstStyle/>
           <a:p>
-            <a:r>
-              <a:rPr lang="en-US" sz="1380" dirty="0">
+            <a:pPr indent="0" marL="0">
+              <a:buNone/>
+            </a:pPr>
+            <a:r>
+              <a:rPr lang="en-US" sz="1220" dirty="0">
                 <a:solidFill>
                   <a:srgbClr val="17364A"/>
                 </a:solidFill>
@@ -8388,11 +8514,14 @@
               </a:rPr>
               <a:t>Causal question framing worksheet</a:t>
             </a:r>
-            <a:endParaRPr lang="en-US" sz="1380" dirty="0"/>
-          </a:p>
-          <a:p>
-            <a:r>
-              <a:rPr lang="en-US" sz="1380" dirty="0">
+            <a:endParaRPr lang="en-US" sz="1220" dirty="0"/>
+          </a:p>
+          <a:p>
+            <a:pPr indent="0" marL="0">
+              <a:buNone/>
+            </a:pPr>
+            <a:r>
+              <a:rPr lang="en-US" sz="1220" dirty="0">
                 <a:solidFill>
                   <a:srgbClr val="17364A"/>
                 </a:solidFill>
@@ -8402,11 +8531,14 @@
               </a:rPr>
               <a:t>List of assumptions and likely confounders</a:t>
             </a:r>
-            <a:endParaRPr lang="en-US" sz="1380" dirty="0"/>
-          </a:p>
-          <a:p>
-            <a:r>
-              <a:rPr lang="en-US" sz="1380" dirty="0">
+            <a:endParaRPr lang="en-US" sz="1220" dirty="0"/>
+          </a:p>
+          <a:p>
+            <a:pPr indent="0" marL="0">
+              <a:buNone/>
+            </a:pPr>
+            <a:r>
+              <a:rPr lang="en-US" sz="1220" dirty="0">
                 <a:solidFill>
                   <a:srgbClr val="17364A"/>
                 </a:solidFill>
@@ -8416,7 +8548,7 @@
               </a:rPr>
               <a:t>Recommended evaluation design or expert consultation need</a:t>
             </a:r>
-            <a:endParaRPr lang="en-US" sz="1380" dirty="0"/>
+            <a:endParaRPr lang="en-US" sz="1220" dirty="0"/>
           </a:p>
         </p:txBody>
       </p:sp>
@@ -8494,17 +8626,17 @@
         </p:nvSpPr>
         <p:spPr>
           <a:xfrm>
-            <a:off x="7799832" y="5001768"/>
-            <a:ext cx="3145536" cy="502920"/>
-          </a:xfrm>
-          <a:prstGeom prst="rect">
-            <a:avLst/>
-          </a:prstGeom>
-          <a:noFill/>
-          <a:ln/>
-        </p:spPr>
-        <p:txBody>
-          <a:bodyPr wrap="square" lIns="0" tIns="0" rIns="0" bIns="0" rtlCol="0" anchor="t">
+            <a:off x="7799832" y="4974336"/>
+            <a:ext cx="3145536" cy="576072"/>
+          </a:xfrm>
+          <a:prstGeom prst="rect">
+            <a:avLst/>
+          </a:prstGeom>
+          <a:noFill/>
+          <a:ln/>
+        </p:spPr>
+        <p:txBody>
+          <a:bodyPr wrap="square" lIns="254" tIns="254" rIns="254" bIns="254" rtlCol="0" anchor="t">
             <a:normAutofit/>
           </a:bodyPr>
           <a:lstStyle/>
@@ -8513,7 +8645,7 @@
               <a:buNone/>
             </a:pPr>
             <a:r>
-              <a:rPr lang="en-US" sz="1550" dirty="0">
+              <a:rPr lang="en-US" sz="1320" dirty="0">
                 <a:solidFill>
                   <a:srgbClr val="17364A"/>
                 </a:solidFill>
@@ -8521,9 +8653,9 @@
                 <a:ea typeface="Aptos" pitchFamily="34" charset="-122"/>
                 <a:cs typeface="Aptos" pitchFamily="34" charset="-120"/>
               </a:rPr>
-              <a:t>Connect the concept to public health purpose, responsible use, required safeguards, documentation, and the next action a department should take.</a:t>
-            </a:r>
-            <a:endParaRPr lang="en-US" sz="1550" dirty="0"/>
+              <a:t>Connect the concept to public health purpose, responsible use, required safeguards, documentation, and the next action a.</a:t>
+            </a:r>
+            <a:endParaRPr lang="en-US" sz="1320" dirty="0"/>
           </a:p>
         </p:txBody>
       </p:sp>
@@ -8824,21 +8956,24 @@
           <a:ln/>
         </p:spPr>
         <p:txBody>
-          <a:bodyPr wrap="square" lIns="635" tIns="635" rIns="635" bIns="635" rtlCol="0" anchor="t">
+          <a:bodyPr wrap="square" lIns="1016" tIns="1016" rIns="1016" bIns="1016" rtlCol="0" anchor="t">
             <a:normAutofit/>
           </a:bodyPr>
           <a:lstStyle/>
           <a:p>
+            <a:pPr indent="0" marL="0">
+              <a:buNone/>
+            </a:pPr>
             <a:r>
               <a:rPr lang="en-US" sz="2100" dirty="0">
                 <a:solidFill>
-                  <a:srgbClr val="17364A"/>
-                </a:solidFill>
-                <a:latin typeface="Aptos" pitchFamily="34" charset="0"/>
-                <a:ea typeface="Aptos" pitchFamily="34" charset="-122"/>
-                <a:cs typeface="Aptos" pitchFamily="34" charset="-120"/>
-              </a:rPr>
-              <a:t>Plain-language statement distinguishing prediction from causation</a:t>
+                  <a:srgbClr val="003A63"/>
+                </a:solidFill>
+                <a:latin typeface="Aptos" pitchFamily="34" charset="0"/>
+                <a:ea typeface="Aptos" pitchFamily="34" charset="-122"/>
+                <a:cs typeface="Aptos" pitchFamily="34" charset="-120"/>
+              </a:rPr>
+              <a:t>• Plain-language statement distinguishing prediction from causation</a:t>
             </a:r>
             <a:endParaRPr lang="en-US" sz="2100" dirty="0"/>
           </a:p>
@@ -8918,17 +9053,17 @@
         </p:nvSpPr>
         <p:spPr>
           <a:xfrm>
-            <a:off x="7799832" y="1828800"/>
-            <a:ext cx="3145536" cy="685800"/>
-          </a:xfrm>
-          <a:prstGeom prst="rect">
-            <a:avLst/>
-          </a:prstGeom>
-          <a:noFill/>
-          <a:ln/>
-        </p:spPr>
-        <p:txBody>
-          <a:bodyPr wrap="square" lIns="0" tIns="0" rIns="0" bIns="0" rtlCol="0" anchor="t">
+            <a:off x="7799832" y="1801368"/>
+            <a:ext cx="3145536" cy="758952"/>
+          </a:xfrm>
+          <a:prstGeom prst="rect">
+            <a:avLst/>
+          </a:prstGeom>
+          <a:noFill/>
+          <a:ln/>
+        </p:spPr>
+        <p:txBody>
+          <a:bodyPr wrap="square" lIns="254" tIns="254" rIns="254" bIns="254" rtlCol="0" anchor="t">
             <a:normAutofit/>
           </a:bodyPr>
           <a:lstStyle/>
@@ -8937,7 +9072,7 @@
               <a:buNone/>
             </a:pPr>
             <a:r>
-              <a:rPr lang="en-US" sz="1550" dirty="0">
+              <a:rPr lang="en-US" sz="1320" dirty="0">
                 <a:solidFill>
                   <a:srgbClr val="17364A"/>
                 </a:solidFill>
@@ -8947,7 +9082,7 @@
               </a:rPr>
               <a:t>Plain-language statement distinguishing prediction from causation</a:t>
             </a:r>
-            <a:endParaRPr lang="en-US" sz="1550" dirty="0"/>
+            <a:endParaRPr lang="en-US" sz="1320" dirty="0"/>
           </a:p>
         </p:txBody>
       </p:sp>
@@ -9035,13 +9170,16 @@
           <a:ln/>
         </p:spPr>
         <p:txBody>
-          <a:bodyPr wrap="square" lIns="254" tIns="254" rIns="254" bIns="254" rtlCol="0" anchor="t">
+          <a:bodyPr wrap="square" lIns="508" tIns="508" rIns="508" bIns="508" rtlCol="0" anchor="t">
             <a:normAutofit/>
           </a:bodyPr>
           <a:lstStyle/>
           <a:p>
-            <a:r>
-              <a:rPr lang="en-US" sz="1380" dirty="0">
+            <a:pPr indent="0" marL="0">
+              <a:buNone/>
+            </a:pPr>
+            <a:r>
+              <a:rPr lang="en-US" sz="1220" dirty="0">
                 <a:solidFill>
                   <a:srgbClr val="17364A"/>
                 </a:solidFill>
@@ -9051,7 +9189,7 @@
               </a:rPr>
               <a:t>Plain-language statement distinguishing prediction from causation</a:t>
             </a:r>
-            <a:endParaRPr lang="en-US" sz="1380" dirty="0"/>
+            <a:endParaRPr lang="en-US" sz="1220" dirty="0"/>
           </a:p>
         </p:txBody>
       </p:sp>
@@ -9129,17 +9267,17 @@
         </p:nvSpPr>
         <p:spPr>
           <a:xfrm>
-            <a:off x="7799832" y="5001768"/>
-            <a:ext cx="3145536" cy="502920"/>
-          </a:xfrm>
-          <a:prstGeom prst="rect">
-            <a:avLst/>
-          </a:prstGeom>
-          <a:noFill/>
-          <a:ln/>
-        </p:spPr>
-        <p:txBody>
-          <a:bodyPr wrap="square" lIns="0" tIns="0" rIns="0" bIns="0" rtlCol="0" anchor="t">
+            <a:off x="7799832" y="4974336"/>
+            <a:ext cx="3145536" cy="576072"/>
+          </a:xfrm>
+          <a:prstGeom prst="rect">
+            <a:avLst/>
+          </a:prstGeom>
+          <a:noFill/>
+          <a:ln/>
+        </p:spPr>
+        <p:txBody>
+          <a:bodyPr wrap="square" lIns="254" tIns="254" rIns="254" bIns="254" rtlCol="0" anchor="t">
             <a:normAutofit/>
           </a:bodyPr>
           <a:lstStyle/>
@@ -9148,7 +9286,7 @@
               <a:buNone/>
             </a:pPr>
             <a:r>
-              <a:rPr lang="en-US" sz="1550" dirty="0">
+              <a:rPr lang="en-US" sz="1320" dirty="0">
                 <a:solidFill>
                   <a:srgbClr val="17364A"/>
                 </a:solidFill>
@@ -9156,9 +9294,9 @@
                 <a:ea typeface="Aptos" pitchFamily="34" charset="-122"/>
                 <a:cs typeface="Aptos" pitchFamily="34" charset="-120"/>
               </a:rPr>
-              <a:t>Connect the concept to public health purpose, responsible use, required safeguards, documentation, and the next action a department should take.</a:t>
-            </a:r>
-            <a:endParaRPr lang="en-US" sz="1550" dirty="0"/>
+              <a:t>Connect the concept to public health purpose, responsible use, required safeguards, documentation, and the next action a.</a:t>
+            </a:r>
+            <a:endParaRPr lang="en-US" sz="1320" dirty="0"/>
           </a:p>
         </p:txBody>
       </p:sp>
@@ -9459,49 +9597,58 @@
           <a:ln/>
         </p:spPr>
         <p:txBody>
-          <a:bodyPr wrap="square" lIns="635" tIns="635" rIns="635" bIns="635" rtlCol="0" anchor="t">
+          <a:bodyPr wrap="square" lIns="1016" tIns="1016" rIns="1016" bIns="1016" rtlCol="0" anchor="t">
             <a:normAutofit/>
           </a:bodyPr>
           <a:lstStyle/>
           <a:p>
+            <a:pPr indent="0" marL="0">
+              <a:buNone/>
+            </a:pPr>
             <a:r>
               <a:rPr lang="en-US" sz="2100" dirty="0">
                 <a:solidFill>
-                  <a:srgbClr val="17364A"/>
-                </a:solidFill>
-                <a:latin typeface="Aptos" pitchFamily="34" charset="0"/>
-                <a:ea typeface="Aptos" pitchFamily="34" charset="-122"/>
-                <a:cs typeface="Aptos" pitchFamily="34" charset="-120"/>
-              </a:rPr>
-              <a:t>Causal question framing worksheet</a:t>
+                  <a:srgbClr val="003A63"/>
+                </a:solidFill>
+                <a:latin typeface="Aptos" pitchFamily="34" charset="0"/>
+                <a:ea typeface="Aptos" pitchFamily="34" charset="-122"/>
+                <a:cs typeface="Aptos" pitchFamily="34" charset="-120"/>
+              </a:rPr>
+              <a:t>• Causal question framing worksheet</a:t>
             </a:r>
             <a:endParaRPr lang="en-US" sz="2100" dirty="0"/>
           </a:p>
           <a:p>
+            <a:pPr indent="0" marL="0">
+              <a:buNone/>
+            </a:pPr>
             <a:r>
               <a:rPr lang="en-US" sz="2100" dirty="0">
                 <a:solidFill>
-                  <a:srgbClr val="17364A"/>
-                </a:solidFill>
-                <a:latin typeface="Aptos" pitchFamily="34" charset="0"/>
-                <a:ea typeface="Aptos" pitchFamily="34" charset="-122"/>
-                <a:cs typeface="Aptos" pitchFamily="34" charset="-120"/>
-              </a:rPr>
-              <a:t>List of assumptions and likely confounders</a:t>
+                  <a:srgbClr val="003A63"/>
+                </a:solidFill>
+                <a:latin typeface="Aptos" pitchFamily="34" charset="0"/>
+                <a:ea typeface="Aptos" pitchFamily="34" charset="-122"/>
+                <a:cs typeface="Aptos" pitchFamily="34" charset="-120"/>
+              </a:rPr>
+              <a:t>• List of assumptions and likely confounders</a:t>
             </a:r>
             <a:endParaRPr lang="en-US" sz="2100" dirty="0"/>
           </a:p>
           <a:p>
+            <a:pPr indent="0" marL="0">
+              <a:buNone/>
+            </a:pPr>
             <a:r>
               <a:rPr lang="en-US" sz="2100" dirty="0">
                 <a:solidFill>
-                  <a:srgbClr val="17364A"/>
-                </a:solidFill>
-                <a:latin typeface="Aptos" pitchFamily="34" charset="0"/>
-                <a:ea typeface="Aptos" pitchFamily="34" charset="-122"/>
-                <a:cs typeface="Aptos" pitchFamily="34" charset="-120"/>
-              </a:rPr>
-              <a:t>Recommended evaluation design or expert consultation need</a:t>
+                  <a:srgbClr val="003A63"/>
+                </a:solidFill>
+                <a:latin typeface="Aptos" pitchFamily="34" charset="0"/>
+                <a:ea typeface="Aptos" pitchFamily="34" charset="-122"/>
+                <a:cs typeface="Aptos" pitchFamily="34" charset="-120"/>
+              </a:rPr>
+              <a:t>• Recommended evaluation design or expert consultation need</a:t>
             </a:r>
             <a:endParaRPr lang="en-US" sz="2100" dirty="0"/>
           </a:p>
@@ -9581,17 +9728,17 @@
         </p:nvSpPr>
         <p:spPr>
           <a:xfrm>
-            <a:off x="7799832" y="1828800"/>
-            <a:ext cx="3145536" cy="685800"/>
-          </a:xfrm>
-          <a:prstGeom prst="rect">
-            <a:avLst/>
-          </a:prstGeom>
-          <a:noFill/>
-          <a:ln/>
-        </p:spPr>
-        <p:txBody>
-          <a:bodyPr wrap="square" lIns="0" tIns="0" rIns="0" bIns="0" rtlCol="0" anchor="t">
+            <a:off x="7799832" y="1801368"/>
+            <a:ext cx="3145536" cy="758952"/>
+          </a:xfrm>
+          <a:prstGeom prst="rect">
+            <a:avLst/>
+          </a:prstGeom>
+          <a:noFill/>
+          <a:ln/>
+        </p:spPr>
+        <p:txBody>
+          <a:bodyPr wrap="square" lIns="254" tIns="254" rIns="254" bIns="254" rtlCol="0" anchor="t">
             <a:normAutofit/>
           </a:bodyPr>
           <a:lstStyle/>
@@ -9600,7 +9747,7 @@
               <a:buNone/>
             </a:pPr>
             <a:r>
-              <a:rPr lang="en-US" sz="1550" dirty="0">
+              <a:rPr lang="en-US" sz="1320" dirty="0">
                 <a:solidFill>
                   <a:srgbClr val="17364A"/>
                 </a:solidFill>
@@ -9610,7 +9757,7 @@
               </a:rPr>
               <a:t>Causal question framing worksheet</a:t>
             </a:r>
-            <a:endParaRPr lang="en-US" sz="1550" dirty="0"/>
+            <a:endParaRPr lang="en-US" sz="1320" dirty="0"/>
           </a:p>
         </p:txBody>
       </p:sp>
@@ -9698,13 +9845,16 @@
           <a:ln/>
         </p:spPr>
         <p:txBody>
-          <a:bodyPr wrap="square" lIns="254" tIns="254" rIns="254" bIns="254" rtlCol="0" anchor="t">
+          <a:bodyPr wrap="square" lIns="508" tIns="508" rIns="508" bIns="508" rtlCol="0" anchor="t">
             <a:normAutofit/>
           </a:bodyPr>
           <a:lstStyle/>
           <a:p>
-            <a:r>
-              <a:rPr lang="en-US" sz="1380" dirty="0">
+            <a:pPr indent="0" marL="0">
+              <a:buNone/>
+            </a:pPr>
+            <a:r>
+              <a:rPr lang="en-US" sz="1220" dirty="0">
                 <a:solidFill>
                   <a:srgbClr val="17364A"/>
                 </a:solidFill>
@@ -9714,11 +9864,14 @@
               </a:rPr>
               <a:t>Causal question framing worksheet</a:t>
             </a:r>
-            <a:endParaRPr lang="en-US" sz="1380" dirty="0"/>
-          </a:p>
-          <a:p>
-            <a:r>
-              <a:rPr lang="en-US" sz="1380" dirty="0">
+            <a:endParaRPr lang="en-US" sz="1220" dirty="0"/>
+          </a:p>
+          <a:p>
+            <a:pPr indent="0" marL="0">
+              <a:buNone/>
+            </a:pPr>
+            <a:r>
+              <a:rPr lang="en-US" sz="1220" dirty="0">
                 <a:solidFill>
                   <a:srgbClr val="17364A"/>
                 </a:solidFill>
@@ -9728,11 +9881,14 @@
               </a:rPr>
               <a:t>List of assumptions and likely confounders</a:t>
             </a:r>
-            <a:endParaRPr lang="en-US" sz="1380" dirty="0"/>
-          </a:p>
-          <a:p>
-            <a:r>
-              <a:rPr lang="en-US" sz="1380" dirty="0">
+            <a:endParaRPr lang="en-US" sz="1220" dirty="0"/>
+          </a:p>
+          <a:p>
+            <a:pPr indent="0" marL="0">
+              <a:buNone/>
+            </a:pPr>
+            <a:r>
+              <a:rPr lang="en-US" sz="1220" dirty="0">
                 <a:solidFill>
                   <a:srgbClr val="17364A"/>
                 </a:solidFill>
@@ -9742,7 +9898,7 @@
               </a:rPr>
               <a:t>Recommended evaluation design or expert consultation need</a:t>
             </a:r>
-            <a:endParaRPr lang="en-US" sz="1380" dirty="0"/>
+            <a:endParaRPr lang="en-US" sz="1220" dirty="0"/>
           </a:p>
         </p:txBody>
       </p:sp>
@@ -9820,17 +9976,17 @@
         </p:nvSpPr>
         <p:spPr>
           <a:xfrm>
-            <a:off x="7799832" y="5001768"/>
-            <a:ext cx="3145536" cy="502920"/>
-          </a:xfrm>
-          <a:prstGeom prst="rect">
-            <a:avLst/>
-          </a:prstGeom>
-          <a:noFill/>
-          <a:ln/>
-        </p:spPr>
-        <p:txBody>
-          <a:bodyPr wrap="square" lIns="0" tIns="0" rIns="0" bIns="0" rtlCol="0" anchor="t">
+            <a:off x="7799832" y="4974336"/>
+            <a:ext cx="3145536" cy="576072"/>
+          </a:xfrm>
+          <a:prstGeom prst="rect">
+            <a:avLst/>
+          </a:prstGeom>
+          <a:noFill/>
+          <a:ln/>
+        </p:spPr>
+        <p:txBody>
+          <a:bodyPr wrap="square" lIns="254" tIns="254" rIns="254" bIns="254" rtlCol="0" anchor="t">
             <a:normAutofit/>
           </a:bodyPr>
           <a:lstStyle/>
@@ -9839,7 +9995,7 @@
               <a:buNone/>
             </a:pPr>
             <a:r>
-              <a:rPr lang="en-US" sz="1550" dirty="0">
+              <a:rPr lang="en-US" sz="1320" dirty="0">
                 <a:solidFill>
                   <a:srgbClr val="17364A"/>
                 </a:solidFill>
@@ -9847,9 +10003,9 @@
                 <a:ea typeface="Aptos" pitchFamily="34" charset="-122"/>
                 <a:cs typeface="Aptos" pitchFamily="34" charset="-120"/>
               </a:rPr>
-              <a:t>Use the assignment to test whether you can explain the concept, apply it to a realistic public health situation, and identify what would need review before the work moves forward.</a:t>
-            </a:r>
-            <a:endParaRPr lang="en-US" sz="1550" dirty="0"/>
+              <a:t>Use the assignment to test whether you can explain the concept, apply it to a realistic public health situation, and.</a:t>
+            </a:r>
+            <a:endParaRPr lang="en-US" sz="1320" dirty="0"/>
           </a:p>
         </p:txBody>
       </p:sp>
@@ -10150,49 +10306,58 @@
           <a:ln/>
         </p:spPr>
         <p:txBody>
-          <a:bodyPr wrap="square" lIns="635" tIns="635" rIns="635" bIns="635" rtlCol="0" anchor="t">
+          <a:bodyPr wrap="square" lIns="1016" tIns="1016" rIns="1016" bIns="1016" rtlCol="0" anchor="t">
             <a:normAutofit/>
           </a:bodyPr>
           <a:lstStyle/>
           <a:p>
+            <a:pPr indent="0" marL="0">
+              <a:buNone/>
+            </a:pPr>
             <a:r>
               <a:rPr lang="en-US" sz="2100" dirty="0">
                 <a:solidFill>
-                  <a:srgbClr val="17364A"/>
-                </a:solidFill>
-                <a:latin typeface="Aptos" pitchFamily="34" charset="0"/>
-                <a:ea typeface="Aptos" pitchFamily="34" charset="-122"/>
-                <a:cs typeface="Aptos" pitchFamily="34" charset="-120"/>
-              </a:rPr>
-              <a:t>AI models often predict what is likely to happen, but public health leaders frequently need to know what action.</a:t>
+                  <a:srgbClr val="003A63"/>
+                </a:solidFill>
+                <a:latin typeface="Aptos" pitchFamily="34" charset="0"/>
+                <a:ea typeface="Aptos" pitchFamily="34" charset="-122"/>
+                <a:cs typeface="Aptos" pitchFamily="34" charset="-120"/>
+              </a:rPr>
+              <a:t>• AI models often predict what is likely to happen, but public health leaders frequently need to.</a:t>
             </a:r>
             <a:endParaRPr lang="en-US" sz="2100" dirty="0"/>
           </a:p>
           <a:p>
+            <a:pPr indent="0" marL="0">
+              <a:buNone/>
+            </a:pPr>
             <a:r>
               <a:rPr lang="en-US" sz="2100" dirty="0">
                 <a:solidFill>
-                  <a:srgbClr val="17364A"/>
-                </a:solidFill>
-                <a:latin typeface="Aptos" pitchFamily="34" charset="0"/>
-                <a:ea typeface="Aptos" pitchFamily="34" charset="-122"/>
-                <a:cs typeface="Aptos" pitchFamily="34" charset="-120"/>
-              </a:rPr>
-              <a:t>This module helps learners distinguish prediction from causal inference so AI outputs are not misused as evidence.</a:t>
+                  <a:srgbClr val="003A63"/>
+                </a:solidFill>
+                <a:latin typeface="Aptos" pitchFamily="34" charset="0"/>
+                <a:ea typeface="Aptos" pitchFamily="34" charset="-122"/>
+                <a:cs typeface="Aptos" pitchFamily="34" charset="-120"/>
+              </a:rPr>
+              <a:t>• This module helps learners distinguish prediction from causal inference so AI outputs are not.</a:t>
             </a:r>
             <a:endParaRPr lang="en-US" sz="2100" dirty="0"/>
           </a:p>
           <a:p>
+            <a:pPr indent="0" marL="0">
+              <a:buNone/>
+            </a:pPr>
             <a:r>
               <a:rPr lang="en-US" sz="2100" dirty="0">
                 <a:solidFill>
-                  <a:srgbClr val="17364A"/>
-                </a:solidFill>
-                <a:latin typeface="Aptos" pitchFamily="34" charset="0"/>
-                <a:ea typeface="Aptos" pitchFamily="34" charset="-122"/>
-                <a:cs typeface="Aptos" pitchFamily="34" charset="-120"/>
-              </a:rPr>
-              <a:t>Learners examine confounding, bias, comparison groups, counterfactual reasoning, directed acyclic graphs, and.</a:t>
+                  <a:srgbClr val="003A63"/>
+                </a:solidFill>
+                <a:latin typeface="Aptos" pitchFamily="34" charset="0"/>
+                <a:ea typeface="Aptos" pitchFamily="34" charset="-122"/>
+                <a:cs typeface="Aptos" pitchFamily="34" charset="-120"/>
+              </a:rPr>
+              <a:t>• Learners examine confounding, bias, comparison groups, counterfactual reasoning, directed.</a:t>
             </a:r>
             <a:endParaRPr lang="en-US" sz="2100" dirty="0"/>
           </a:p>
@@ -10272,17 +10437,17 @@
         </p:nvSpPr>
         <p:spPr>
           <a:xfrm>
-            <a:off x="8074152" y="1920240"/>
-            <a:ext cx="2825496" cy="1280160"/>
-          </a:xfrm>
-          <a:prstGeom prst="rect">
-            <a:avLst/>
-          </a:prstGeom>
-          <a:noFill/>
-          <a:ln/>
-        </p:spPr>
-        <p:txBody>
-          <a:bodyPr wrap="square" lIns="0" tIns="0" rIns="0" bIns="0" rtlCol="0" anchor="t">
+            <a:off x="8074152" y="1892808"/>
+            <a:ext cx="2825496" cy="1353312"/>
+          </a:xfrm>
+          <a:prstGeom prst="rect">
+            <a:avLst/>
+          </a:prstGeom>
+          <a:noFill/>
+          <a:ln/>
+        </p:spPr>
+        <p:txBody>
+          <a:bodyPr wrap="square" lIns="254" tIns="254" rIns="254" bIns="254" rtlCol="0" anchor="t">
             <a:normAutofit/>
           </a:bodyPr>
           <a:lstStyle/>
@@ -10291,7 +10456,7 @@
               <a:buNone/>
             </a:pPr>
             <a:r>
-              <a:rPr lang="en-US" sz="1550" dirty="0">
+              <a:rPr lang="en-US" sz="1320" dirty="0">
                 <a:solidFill>
                   <a:srgbClr val="17364A"/>
                 </a:solidFill>
@@ -10299,43 +10464,9 @@
                 <a:ea typeface="Aptos" pitchFamily="34" charset="-122"/>
                 <a:cs typeface="Aptos" pitchFamily="34" charset="-120"/>
               </a:rPr>
-              <a:t>Level: intermediate/practitioner</a:t>
-            </a:r>
-            <a:endParaRPr lang="en-US" sz="1550" dirty="0"/>
-          </a:p>
-          <a:p>
-            <a:pPr indent="0" marL="0">
-              <a:buNone/>
-            </a:pPr>
-            <a:r>
-              <a:rPr lang="en-US" sz="1550" dirty="0">
-                <a:solidFill>
-                  <a:srgbClr val="17364A"/>
-                </a:solidFill>
-                <a:latin typeface="Aptos" pitchFamily="34" charset="0"/>
-                <a:ea typeface="Aptos" pitchFamily="34" charset="-122"/>
-                <a:cs typeface="Aptos" pitchFamily="34" charset="-120"/>
-              </a:rPr>
-              <a:t>Primary track: Analytics and Modeling Track</a:t>
-            </a:r>
-            <a:endParaRPr lang="en-US" sz="1550" dirty="0"/>
-          </a:p>
-          <a:p>
-            <a:pPr indent="0" marL="0">
-              <a:buNone/>
-            </a:pPr>
-            <a:r>
-              <a:rPr lang="en-US" sz="1550" dirty="0">
-                <a:solidFill>
-                  <a:srgbClr val="17364A"/>
-                </a:solidFill>
-                <a:latin typeface="Aptos" pitchFamily="34" charset="0"/>
-                <a:ea typeface="Aptos" pitchFamily="34" charset="-122"/>
-                <a:cs typeface="Aptos" pitchFamily="34" charset="-120"/>
-              </a:rPr>
-              <a:t>Appears in tracks: analytics-modeling, epidemiology, policy, governance-security</a:t>
-            </a:r>
-            <a:endParaRPr lang="en-US" sz="1550" dirty="0"/>
+              <a:t>Level: intermediate/practitioner Primary track: Analytics and Modeling Track Appears in tracks: analytics-modeling,.</a:t>
+            </a:r>
+            <a:endParaRPr lang="en-US" sz="1320" dirty="0"/>
           </a:p>
         </p:txBody>
       </p:sp>
@@ -10423,13 +10554,16 @@
           <a:ln/>
         </p:spPr>
         <p:txBody>
-          <a:bodyPr wrap="square" lIns="254" tIns="254" rIns="254" bIns="254" rtlCol="0" anchor="t">
+          <a:bodyPr wrap="square" lIns="508" tIns="508" rIns="508" bIns="508" rtlCol="0" anchor="t">
             <a:normAutofit/>
           </a:bodyPr>
           <a:lstStyle/>
           <a:p>
-            <a:r>
-              <a:rPr lang="en-US" sz="1380" dirty="0">
+            <a:pPr indent="0" marL="0">
+              <a:buNone/>
+            </a:pPr>
+            <a:r>
+              <a:rPr lang="en-US" sz="1220" dirty="0">
                 <a:solidFill>
                   <a:srgbClr val="17364A"/>
                 </a:solidFill>
@@ -10439,11 +10573,14 @@
               </a:rPr>
               <a:t>Read the module for shared vocabulary and context.</a:t>
             </a:r>
-            <a:endParaRPr lang="en-US" sz="1380" dirty="0"/>
-          </a:p>
-          <a:p>
-            <a:r>
-              <a:rPr lang="en-US" sz="1380" dirty="0">
+            <a:endParaRPr lang="en-US" sz="1220" dirty="0"/>
+          </a:p>
+          <a:p>
+            <a:pPr indent="0" marL="0">
+              <a:buNone/>
+            </a:pPr>
+            <a:r>
+              <a:rPr lang="en-US" sz="1220" dirty="0">
                 <a:solidFill>
                   <a:srgbClr val="17364A"/>
                 </a:solidFill>
@@ -10453,11 +10590,14 @@
               </a:rPr>
               <a:t>Complete the practical exercise to apply the concept.</a:t>
             </a:r>
-            <a:endParaRPr lang="en-US" sz="1380" dirty="0"/>
-          </a:p>
-          <a:p>
-            <a:r>
-              <a:rPr lang="en-US" sz="1380" dirty="0">
+            <a:endParaRPr lang="en-US" sz="1220" dirty="0"/>
+          </a:p>
+          <a:p>
+            <a:pPr indent="0" marL="0">
+              <a:buNone/>
+            </a:pPr>
+            <a:r>
+              <a:rPr lang="en-US" sz="1220" dirty="0">
                 <a:solidFill>
                   <a:srgbClr val="17364A"/>
                 </a:solidFill>
@@ -10467,7 +10607,7 @@
               </a:rPr>
               <a:t>Use the notes and references for deeper review.</a:t>
             </a:r>
-            <a:endParaRPr lang="en-US" sz="1380" dirty="0"/>
+            <a:endParaRPr lang="en-US" sz="1220" dirty="0"/>
           </a:p>
         </p:txBody>
       </p:sp>
@@ -10768,49 +10908,58 @@
           <a:ln/>
         </p:spPr>
         <p:txBody>
-          <a:bodyPr wrap="square" lIns="635" tIns="635" rIns="635" bIns="635" rtlCol="0" anchor="t">
+          <a:bodyPr wrap="square" lIns="1016" tIns="1016" rIns="1016" bIns="1016" rtlCol="0" anchor="t">
             <a:normAutofit/>
           </a:bodyPr>
           <a:lstStyle/>
           <a:p>
+            <a:pPr indent="0" marL="0">
+              <a:buNone/>
+            </a:pPr>
             <a:r>
               <a:rPr lang="en-US" sz="2100" dirty="0">
                 <a:solidFill>
-                  <a:srgbClr val="17364A"/>
-                </a:solidFill>
-                <a:latin typeface="Aptos" pitchFamily="34" charset="0"/>
-                <a:ea typeface="Aptos" pitchFamily="34" charset="-122"/>
-                <a:cs typeface="Aptos" pitchFamily="34" charset="-120"/>
-              </a:rPr>
-              <a:t>1. Which statement best distinguishes prediction from causal inference?</a:t>
+                  <a:srgbClr val="003A63"/>
+                </a:solidFill>
+                <a:latin typeface="Aptos" pitchFamily="34" charset="0"/>
+                <a:ea typeface="Aptos" pitchFamily="34" charset="-122"/>
+                <a:cs typeface="Aptos" pitchFamily="34" charset="-120"/>
+              </a:rPr>
+              <a:t>• 1. Which statement best distinguishes prediction from causal inference?</a:t>
             </a:r>
             <a:endParaRPr lang="en-US" sz="2100" dirty="0"/>
           </a:p>
           <a:p>
+            <a:pPr indent="0" marL="0">
+              <a:buNone/>
+            </a:pPr>
             <a:r>
               <a:rPr lang="en-US" sz="2100" dirty="0">
                 <a:solidFill>
-                  <a:srgbClr val="17364A"/>
-                </a:solidFill>
-                <a:latin typeface="Aptos" pitchFamily="34" charset="0"/>
-                <a:ea typeface="Aptos" pitchFamily="34" charset="-122"/>
-                <a:cs typeface="Aptos" pitchFamily="34" charset="-120"/>
-              </a:rPr>
-              <a:t>2. What is the best reason to assign an accountability owner?</a:t>
+                  <a:srgbClr val="003A63"/>
+                </a:solidFill>
+                <a:latin typeface="Aptos" pitchFamily="34" charset="0"/>
+                <a:ea typeface="Aptos" pitchFamily="34" charset="-122"/>
+                <a:cs typeface="Aptos" pitchFamily="34" charset="-120"/>
+              </a:rPr>
+              <a:t>• 2. What is the best reason to assign an accountability owner?</a:t>
             </a:r>
             <a:endParaRPr lang="en-US" sz="2100" dirty="0"/>
           </a:p>
           <a:p>
+            <a:pPr indent="0" marL="0">
+              <a:buNone/>
+            </a:pPr>
             <a:r>
               <a:rPr lang="en-US" sz="2100" dirty="0">
                 <a:solidFill>
-                  <a:srgbClr val="17364A"/>
-                </a:solidFill>
-                <a:latin typeface="Aptos" pitchFamily="34" charset="0"/>
-                <a:ea typeface="Aptos" pitchFamily="34" charset="-122"/>
-                <a:cs typeface="Aptos" pitchFamily="34" charset="-120"/>
-              </a:rPr>
-              <a:t>3. When should an AI-supported workflow be escalated for review?</a:t>
+                  <a:srgbClr val="003A63"/>
+                </a:solidFill>
+                <a:latin typeface="Aptos" pitchFamily="34" charset="0"/>
+                <a:ea typeface="Aptos" pitchFamily="34" charset="-122"/>
+                <a:cs typeface="Aptos" pitchFamily="34" charset="-120"/>
+              </a:rPr>
+              <a:t>• 3. When should an AI-supported workflow be escalated for review?</a:t>
             </a:r>
             <a:endParaRPr lang="en-US" sz="2100" dirty="0"/>
           </a:p>
@@ -10890,17 +11039,17 @@
         </p:nvSpPr>
         <p:spPr>
           <a:xfrm>
-            <a:off x="7799832" y="1828800"/>
-            <a:ext cx="3145536" cy="685800"/>
-          </a:xfrm>
-          <a:prstGeom prst="rect">
-            <a:avLst/>
-          </a:prstGeom>
-          <a:noFill/>
-          <a:ln/>
-        </p:spPr>
-        <p:txBody>
-          <a:bodyPr wrap="square" lIns="0" tIns="0" rIns="0" bIns="0" rtlCol="0" anchor="t">
+            <a:off x="7799832" y="1801368"/>
+            <a:ext cx="3145536" cy="758952"/>
+          </a:xfrm>
+          <a:prstGeom prst="rect">
+            <a:avLst/>
+          </a:prstGeom>
+          <a:noFill/>
+          <a:ln/>
+        </p:spPr>
+        <p:txBody>
+          <a:bodyPr wrap="square" lIns="254" tIns="254" rIns="254" bIns="254" rtlCol="0" anchor="t">
             <a:normAutofit/>
           </a:bodyPr>
           <a:lstStyle/>
@@ -10909,7 +11058,7 @@
               <a:buNone/>
             </a:pPr>
             <a:r>
-              <a:rPr lang="en-US" sz="1550" dirty="0">
+              <a:rPr lang="en-US" sz="1320" dirty="0">
                 <a:solidFill>
                   <a:srgbClr val="17364A"/>
                 </a:solidFill>
@@ -10919,7 +11068,7 @@
               </a:rPr>
               <a:t>1. Which statement best distinguishes prediction from causal inference?</a:t>
             </a:r>
-            <a:endParaRPr lang="en-US" sz="1550" dirty="0"/>
+            <a:endParaRPr lang="en-US" sz="1320" dirty="0"/>
           </a:p>
         </p:txBody>
       </p:sp>
@@ -11007,13 +11156,16 @@
           <a:ln/>
         </p:spPr>
         <p:txBody>
-          <a:bodyPr wrap="square" lIns="254" tIns="254" rIns="254" bIns="254" rtlCol="0" anchor="t">
+          <a:bodyPr wrap="square" lIns="508" tIns="508" rIns="508" bIns="508" rtlCol="0" anchor="t">
             <a:normAutofit/>
           </a:bodyPr>
           <a:lstStyle/>
           <a:p>
-            <a:r>
-              <a:rPr lang="en-US" sz="1380" dirty="0">
+            <a:pPr indent="0" marL="0">
+              <a:buNone/>
+            </a:pPr>
+            <a:r>
+              <a:rPr lang="en-US" sz="1220" dirty="0">
                 <a:solidFill>
                   <a:srgbClr val="17364A"/>
                 </a:solidFill>
@@ -11023,11 +11175,14 @@
               </a:rPr>
               <a:t>1.</a:t>
             </a:r>
-            <a:endParaRPr lang="en-US" sz="1380" dirty="0"/>
-          </a:p>
-          <a:p>
-            <a:r>
-              <a:rPr lang="en-US" sz="1380" dirty="0">
+            <a:endParaRPr lang="en-US" sz="1220" dirty="0"/>
+          </a:p>
+          <a:p>
+            <a:pPr indent="0" marL="0">
+              <a:buNone/>
+            </a:pPr>
+            <a:r>
+              <a:rPr lang="en-US" sz="1220" dirty="0">
                 <a:solidFill>
                   <a:srgbClr val="17364A"/>
                 </a:solidFill>
@@ -11037,11 +11192,14 @@
               </a:rPr>
               <a:t>Which statement best distinguishes prediction from causal inference?</a:t>
             </a:r>
-            <a:endParaRPr lang="en-US" sz="1380" dirty="0"/>
-          </a:p>
-          <a:p>
-            <a:r>
-              <a:rPr lang="en-US" sz="1380" dirty="0">
+            <a:endParaRPr lang="en-US" sz="1220" dirty="0"/>
+          </a:p>
+          <a:p>
+            <a:pPr indent="0" marL="0">
+              <a:buNone/>
+            </a:pPr>
+            <a:r>
+              <a:rPr lang="en-US" sz="1220" dirty="0">
                 <a:solidFill>
                   <a:srgbClr val="17364A"/>
                 </a:solidFill>
@@ -11051,7 +11209,7 @@
               </a:rPr>
               <a:t>2.</a:t>
             </a:r>
-            <a:endParaRPr lang="en-US" sz="1380" dirty="0"/>
+            <a:endParaRPr lang="en-US" sz="1220" dirty="0"/>
           </a:p>
         </p:txBody>
       </p:sp>
@@ -11129,17 +11287,17 @@
         </p:nvSpPr>
         <p:spPr>
           <a:xfrm>
-            <a:off x="7799832" y="5001768"/>
-            <a:ext cx="3145536" cy="502920"/>
-          </a:xfrm>
-          <a:prstGeom prst="rect">
-            <a:avLst/>
-          </a:prstGeom>
-          <a:noFill/>
-          <a:ln/>
-        </p:spPr>
-        <p:txBody>
-          <a:bodyPr wrap="square" lIns="0" tIns="0" rIns="0" bIns="0" rtlCol="0" anchor="t">
+            <a:off x="7799832" y="4974336"/>
+            <a:ext cx="3145536" cy="576072"/>
+          </a:xfrm>
+          <a:prstGeom prst="rect">
+            <a:avLst/>
+          </a:prstGeom>
+          <a:noFill/>
+          <a:ln/>
+        </p:spPr>
+        <p:txBody>
+          <a:bodyPr wrap="square" lIns="254" tIns="254" rIns="254" bIns="254" rtlCol="0" anchor="t">
             <a:normAutofit/>
           </a:bodyPr>
           <a:lstStyle/>
@@ -11148,7 +11306,7 @@
               <a:buNone/>
             </a:pPr>
             <a:r>
-              <a:rPr lang="en-US" sz="1550" dirty="0">
+              <a:rPr lang="en-US" sz="1320" dirty="0">
                 <a:solidFill>
                   <a:srgbClr val="17364A"/>
                 </a:solidFill>
@@ -11156,9 +11314,9 @@
                 <a:ea typeface="Aptos" pitchFamily="34" charset="-122"/>
                 <a:cs typeface="Aptos" pitchFamily="34" charset="-120"/>
               </a:rPr>
-              <a:t>Use the assignment to test whether you can explain the concept, apply it to a realistic public health situation, and identify what would need review before the work moves forward.</a:t>
-            </a:r>
-            <a:endParaRPr lang="en-US" sz="1550" dirty="0"/>
+              <a:t>Use the assignment to test whether you can explain the concept, apply it to a realistic public health situation, and.</a:t>
+            </a:r>
+            <a:endParaRPr lang="en-US" sz="1320" dirty="0"/>
           </a:p>
         </p:txBody>
       </p:sp>
@@ -11459,49 +11617,58 @@
           <a:ln/>
         </p:spPr>
         <p:txBody>
-          <a:bodyPr wrap="square" lIns="635" tIns="635" rIns="635" bIns="635" rtlCol="0" anchor="t">
+          <a:bodyPr wrap="square" lIns="1016" tIns="1016" rIns="1016" bIns="1016" rtlCol="0" anchor="t">
             <a:normAutofit/>
           </a:bodyPr>
           <a:lstStyle/>
           <a:p>
+            <a:pPr indent="0" marL="0">
+              <a:buNone/>
+            </a:pPr>
             <a:r>
               <a:rPr lang="en-US" sz="2100" dirty="0">
                 <a:solidFill>
-                  <a:srgbClr val="17364A"/>
-                </a:solidFill>
-                <a:latin typeface="Aptos" pitchFamily="34" charset="0"/>
-                <a:ea typeface="Aptos" pitchFamily="34" charset="-122"/>
-                <a:cs typeface="Aptos" pitchFamily="34" charset="-120"/>
-              </a:rPr>
-              <a:t>CDC Public Health Data Strategy and Data Modernization resources:.</a:t>
+                  <a:srgbClr val="003A63"/>
+                </a:solidFill>
+                <a:latin typeface="Aptos" pitchFamily="34" charset="0"/>
+                <a:ea typeface="Aptos" pitchFamily="34" charset="-122"/>
+                <a:cs typeface="Aptos" pitchFamily="34" charset="-120"/>
+              </a:rPr>
+              <a:t>• CDC Public Health Data Strategy and Data Modernization resources:.</a:t>
             </a:r>
             <a:endParaRPr lang="en-US" sz="2100" dirty="0"/>
           </a:p>
           <a:p>
+            <a:pPr indent="0" marL="0">
+              <a:buNone/>
+            </a:pPr>
             <a:r>
               <a:rPr lang="en-US" sz="2100" dirty="0">
                 <a:solidFill>
-                  <a:srgbClr val="17364A"/>
-                </a:solidFill>
-                <a:latin typeface="Aptos" pitchFamily="34" charset="0"/>
-                <a:ea typeface="Aptos" pitchFamily="34" charset="-122"/>
-                <a:cs typeface="Aptos" pitchFamily="34" charset="-120"/>
-              </a:rPr>
-              <a:t>NIST Artificial Intelligence Risk Management Framework and NIST Generative AI Profile:.</a:t>
+                  <a:srgbClr val="003A63"/>
+                </a:solidFill>
+                <a:latin typeface="Aptos" pitchFamily="34" charset="0"/>
+                <a:ea typeface="Aptos" pitchFamily="34" charset="-122"/>
+                <a:cs typeface="Aptos" pitchFamily="34" charset="-120"/>
+              </a:rPr>
+              <a:t>• NIST Artificial Intelligence Risk Management Framework and NIST Generative AI Profile:.</a:t>
             </a:r>
             <a:endParaRPr lang="en-US" sz="2100" dirty="0"/>
           </a:p>
           <a:p>
+            <a:pPr indent="0" marL="0">
+              <a:buNone/>
+            </a:pPr>
             <a:r>
               <a:rPr lang="en-US" sz="2100" dirty="0">
                 <a:solidFill>
-                  <a:srgbClr val="17364A"/>
-                </a:solidFill>
-                <a:latin typeface="Aptos" pitchFamily="34" charset="0"/>
-                <a:ea typeface="Aptos" pitchFamily="34" charset="-122"/>
-                <a:cs typeface="Aptos" pitchFamily="34" charset="-120"/>
-              </a:rPr>
-              <a:t>WHO Ethics and Governance of Artificial Intelligence for Health guidance:.</a:t>
+                  <a:srgbClr val="003A63"/>
+                </a:solidFill>
+                <a:latin typeface="Aptos" pitchFamily="34" charset="0"/>
+                <a:ea typeface="Aptos" pitchFamily="34" charset="-122"/>
+                <a:cs typeface="Aptos" pitchFamily="34" charset="-120"/>
+              </a:rPr>
+              <a:t>• WHO Ethics and Governance of Artificial Intelligence for Health guidance:.</a:t>
             </a:r>
             <a:endParaRPr lang="en-US" sz="2100" dirty="0"/>
           </a:p>
@@ -11581,17 +11748,17 @@
         </p:nvSpPr>
         <p:spPr>
           <a:xfrm>
-            <a:off x="7799832" y="1828800"/>
-            <a:ext cx="3145536" cy="685800"/>
-          </a:xfrm>
-          <a:prstGeom prst="rect">
-            <a:avLst/>
-          </a:prstGeom>
-          <a:noFill/>
-          <a:ln/>
-        </p:spPr>
-        <p:txBody>
-          <a:bodyPr wrap="square" lIns="0" tIns="0" rIns="0" bIns="0" rtlCol="0" anchor="t">
+            <a:off x="7799832" y="1801368"/>
+            <a:ext cx="3145536" cy="758952"/>
+          </a:xfrm>
+          <a:prstGeom prst="rect">
+            <a:avLst/>
+          </a:prstGeom>
+          <a:noFill/>
+          <a:ln/>
+        </p:spPr>
+        <p:txBody>
+          <a:bodyPr wrap="square" lIns="254" tIns="254" rIns="254" bIns="254" rtlCol="0" anchor="t">
             <a:normAutofit/>
           </a:bodyPr>
           <a:lstStyle/>
@@ -11600,7 +11767,7 @@
               <a:buNone/>
             </a:pPr>
             <a:r>
-              <a:rPr lang="en-US" sz="1550" dirty="0">
+              <a:rPr lang="en-US" sz="1320" dirty="0">
                 <a:solidFill>
                   <a:srgbClr val="17364A"/>
                 </a:solidFill>
@@ -11610,7 +11777,7 @@
               </a:rPr>
               <a:t>CDC Public Health Data Strategy and Data Modernization resources:.</a:t>
             </a:r>
-            <a:endParaRPr lang="en-US" sz="1550" dirty="0"/>
+            <a:endParaRPr lang="en-US" sz="1320" dirty="0"/>
           </a:p>
         </p:txBody>
       </p:sp>
@@ -11698,13 +11865,16 @@
           <a:ln/>
         </p:spPr>
         <p:txBody>
-          <a:bodyPr wrap="square" lIns="254" tIns="254" rIns="254" bIns="254" rtlCol="0" anchor="t">
+          <a:bodyPr wrap="square" lIns="508" tIns="508" rIns="508" bIns="508" rtlCol="0" anchor="t">
             <a:normAutofit/>
           </a:bodyPr>
           <a:lstStyle/>
           <a:p>
-            <a:r>
-              <a:rPr lang="en-US" sz="1380" dirty="0">
+            <a:pPr indent="0" marL="0">
+              <a:buNone/>
+            </a:pPr>
+            <a:r>
+              <a:rPr lang="en-US" sz="1220" dirty="0">
                 <a:solidFill>
                   <a:srgbClr val="17364A"/>
                 </a:solidFill>
@@ -11714,11 +11884,14 @@
               </a:rPr>
               <a:t>OWASP Top 10 for Large Language Model Applications:.</a:t>
             </a:r>
-            <a:endParaRPr lang="en-US" sz="1380" dirty="0"/>
-          </a:p>
-          <a:p>
-            <a:r>
-              <a:rPr lang="en-US" sz="1380" dirty="0">
+            <a:endParaRPr lang="en-US" sz="1220" dirty="0"/>
+          </a:p>
+          <a:p>
+            <a:pPr indent="0" marL="0">
+              <a:buNone/>
+            </a:pPr>
+            <a:r>
+              <a:rPr lang="en-US" sz="1220" dirty="0">
                 <a:solidFill>
                   <a:srgbClr val="17364A"/>
                 </a:solidFill>
@@ -11726,9 +11899,9 @@
                 <a:ea typeface="Aptos" pitchFamily="34" charset="-122"/>
                 <a:cs typeface="Aptos" pitchFamily="34" charset="-120"/>
               </a:rPr>
-              <a:t>ONC health IT, interoperability, and information blocking resources:.</a:t>
-            </a:r>
-            <a:endParaRPr lang="en-US" sz="1380" dirty="0"/>
+              <a:t>ONC health IT, interoperability, and information blocking.</a:t>
+            </a:r>
+            <a:endParaRPr lang="en-US" sz="1220" dirty="0"/>
           </a:p>
         </p:txBody>
       </p:sp>
@@ -11806,17 +11979,17 @@
         </p:nvSpPr>
         <p:spPr>
           <a:xfrm>
-            <a:off x="7799832" y="5001768"/>
-            <a:ext cx="3145536" cy="502920"/>
-          </a:xfrm>
-          <a:prstGeom prst="rect">
-            <a:avLst/>
-          </a:prstGeom>
-          <a:noFill/>
-          <a:ln/>
-        </p:spPr>
-        <p:txBody>
-          <a:bodyPr wrap="square" lIns="0" tIns="0" rIns="0" bIns="0" rtlCol="0" anchor="t">
+            <a:off x="7799832" y="4974336"/>
+            <a:ext cx="3145536" cy="576072"/>
+          </a:xfrm>
+          <a:prstGeom prst="rect">
+            <a:avLst/>
+          </a:prstGeom>
+          <a:noFill/>
+          <a:ln/>
+        </p:spPr>
+        <p:txBody>
+          <a:bodyPr wrap="square" lIns="254" tIns="254" rIns="254" bIns="254" rtlCol="0" anchor="t">
             <a:normAutofit/>
           </a:bodyPr>
           <a:lstStyle/>
@@ -11825,7 +11998,7 @@
               <a:buNone/>
             </a:pPr>
             <a:r>
-              <a:rPr lang="en-US" sz="1550" dirty="0">
+              <a:rPr lang="en-US" sz="1320" dirty="0">
                 <a:solidFill>
                   <a:srgbClr val="17364A"/>
                 </a:solidFill>
@@ -11833,9 +12006,9 @@
                 <a:ea typeface="Aptos" pitchFamily="34" charset="-122"/>
                 <a:cs typeface="Aptos" pitchFamily="34" charset="-120"/>
               </a:rPr>
-              <a:t>Connect the concept to public health purpose, responsible use, required safeguards, documentation, and the next action a department should take.</a:t>
-            </a:r>
-            <a:endParaRPr lang="en-US" sz="1550" dirty="0"/>
+              <a:t>Connect the concept to public health purpose, responsible use, required safeguards, documentation, and the next action a.</a:t>
+            </a:r>
+            <a:endParaRPr lang="en-US" sz="1320" dirty="0"/>
           </a:p>
         </p:txBody>
       </p:sp>
@@ -12136,21 +12309,24 @@
           <a:ln/>
         </p:spPr>
         <p:txBody>
-          <a:bodyPr wrap="square" lIns="635" tIns="635" rIns="635" bIns="635" rtlCol="0" anchor="t">
+          <a:bodyPr wrap="square" lIns="1016" tIns="1016" rIns="1016" bIns="1016" rtlCol="0" anchor="t">
             <a:normAutofit/>
           </a:bodyPr>
           <a:lstStyle/>
           <a:p>
+            <a:pPr indent="0" marL="0">
+              <a:buNone/>
+            </a:pPr>
             <a:r>
               <a:rPr lang="en-US" sz="2100" dirty="0">
                 <a:solidFill>
-                  <a:srgbClr val="17364A"/>
-                </a:solidFill>
-                <a:latin typeface="Aptos" pitchFamily="34" charset="0"/>
-                <a:ea typeface="Aptos" pitchFamily="34" charset="-122"/>
-                <a:cs typeface="Aptos" pitchFamily="34" charset="-120"/>
-              </a:rPr>
-              <a:t>Agency policies for privacy, public records, cybersecurity, procurement, civil rights, accessibility,.</a:t>
+                  <a:srgbClr val="003A63"/>
+                </a:solidFill>
+                <a:latin typeface="Aptos" pitchFamily="34" charset="0"/>
+                <a:ea typeface="Aptos" pitchFamily="34" charset="-122"/>
+                <a:cs typeface="Aptos" pitchFamily="34" charset="-120"/>
+              </a:rPr>
+              <a:t>• Agency policies for privacy, public records, cybersecurity, procurement, civil rights,.</a:t>
             </a:r>
             <a:endParaRPr lang="en-US" sz="2100" dirty="0"/>
           </a:p>
@@ -12230,17 +12406,17 @@
         </p:nvSpPr>
         <p:spPr>
           <a:xfrm>
-            <a:off x="7799832" y="1828800"/>
-            <a:ext cx="3145536" cy="685800"/>
-          </a:xfrm>
-          <a:prstGeom prst="rect">
-            <a:avLst/>
-          </a:prstGeom>
-          <a:noFill/>
-          <a:ln/>
-        </p:spPr>
-        <p:txBody>
-          <a:bodyPr wrap="square" lIns="0" tIns="0" rIns="0" bIns="0" rtlCol="0" anchor="t">
+            <a:off x="7799832" y="1801368"/>
+            <a:ext cx="3145536" cy="758952"/>
+          </a:xfrm>
+          <a:prstGeom prst="rect">
+            <a:avLst/>
+          </a:prstGeom>
+          <a:noFill/>
+          <a:ln/>
+        </p:spPr>
+        <p:txBody>
+          <a:bodyPr wrap="square" lIns="254" tIns="254" rIns="254" bIns="254" rtlCol="0" anchor="t">
             <a:normAutofit/>
           </a:bodyPr>
           <a:lstStyle/>
@@ -12249,7 +12425,7 @@
               <a:buNone/>
             </a:pPr>
             <a:r>
-              <a:rPr lang="en-US" sz="1550" dirty="0">
+              <a:rPr lang="en-US" sz="1320" dirty="0">
                 <a:solidFill>
                   <a:srgbClr val="17364A"/>
                 </a:solidFill>
@@ -12259,7 +12435,7 @@
               </a:rPr>
               <a:t>Agency policies for privacy, public records, cybersecurity, procurement, civil rights, accessibility,.</a:t>
             </a:r>
-            <a:endParaRPr lang="en-US" sz="1550" dirty="0"/>
+            <a:endParaRPr lang="en-US" sz="1320" dirty="0"/>
           </a:p>
         </p:txBody>
       </p:sp>
@@ -12347,13 +12523,16 @@
           <a:ln/>
         </p:spPr>
         <p:txBody>
-          <a:bodyPr wrap="square" lIns="254" tIns="254" rIns="254" bIns="254" rtlCol="0" anchor="t">
+          <a:bodyPr wrap="square" lIns="508" tIns="508" rIns="508" bIns="508" rtlCol="0" anchor="t">
             <a:normAutofit/>
           </a:bodyPr>
           <a:lstStyle/>
           <a:p>
-            <a:r>
-              <a:rPr lang="en-US" sz="1380" dirty="0">
+            <a:pPr indent="0" marL="0">
+              <a:buNone/>
+            </a:pPr>
+            <a:r>
+              <a:rPr lang="en-US" sz="1220" dirty="0">
                 <a:solidFill>
                   <a:srgbClr val="17364A"/>
                 </a:solidFill>
@@ -12361,9 +12540,9 @@
                 <a:ea typeface="Aptos" pitchFamily="34" charset="-122"/>
                 <a:cs typeface="Aptos" pitchFamily="34" charset="-120"/>
               </a:rPr>
-              <a:t>Agency policies for privacy, public records, cybersecurity, procurement, civil rights,.</a:t>
-            </a:r>
-            <a:endParaRPr lang="en-US" sz="1380" dirty="0"/>
+              <a:t>Agency policies for privacy, public records, cybersecurity,.</a:t>
+            </a:r>
+            <a:endParaRPr lang="en-US" sz="1220" dirty="0"/>
           </a:p>
         </p:txBody>
       </p:sp>
@@ -12441,17 +12620,17 @@
         </p:nvSpPr>
         <p:spPr>
           <a:xfrm>
-            <a:off x="7799832" y="5001768"/>
-            <a:ext cx="3145536" cy="502920"/>
-          </a:xfrm>
-          <a:prstGeom prst="rect">
-            <a:avLst/>
-          </a:prstGeom>
-          <a:noFill/>
-          <a:ln/>
-        </p:spPr>
-        <p:txBody>
-          <a:bodyPr wrap="square" lIns="0" tIns="0" rIns="0" bIns="0" rtlCol="0" anchor="t">
+            <a:off x="7799832" y="4974336"/>
+            <a:ext cx="3145536" cy="576072"/>
+          </a:xfrm>
+          <a:prstGeom prst="rect">
+            <a:avLst/>
+          </a:prstGeom>
+          <a:noFill/>
+          <a:ln/>
+        </p:spPr>
+        <p:txBody>
+          <a:bodyPr wrap="square" lIns="254" tIns="254" rIns="254" bIns="254" rtlCol="0" anchor="t">
             <a:normAutofit/>
           </a:bodyPr>
           <a:lstStyle/>
@@ -12460,7 +12639,7 @@
               <a:buNone/>
             </a:pPr>
             <a:r>
-              <a:rPr lang="en-US" sz="1550" dirty="0">
+              <a:rPr lang="en-US" sz="1320" dirty="0">
                 <a:solidFill>
                   <a:srgbClr val="17364A"/>
                 </a:solidFill>
@@ -12468,9 +12647,9 @@
                 <a:ea typeface="Aptos" pitchFamily="34" charset="-122"/>
                 <a:cs typeface="Aptos" pitchFamily="34" charset="-120"/>
               </a:rPr>
-              <a:t>Connect the concept to public health purpose, responsible use, required safeguards, documentation, and the next action a department should take.</a:t>
-            </a:r>
-            <a:endParaRPr lang="en-US" sz="1550" dirty="0"/>
+              <a:t>Connect the concept to public health purpose, responsible use, required safeguards, documentation, and the next action a.</a:t>
+            </a:r>
+            <a:endParaRPr lang="en-US" sz="1320" dirty="0"/>
           </a:p>
         </p:txBody>
       </p:sp>
@@ -12771,63 +12950,75 @@
           <a:ln/>
         </p:spPr>
         <p:txBody>
-          <a:bodyPr wrap="square" lIns="635" tIns="635" rIns="635" bIns="635" rtlCol="0" anchor="t">
+          <a:bodyPr wrap="square" lIns="1016" tIns="1016" rIns="1016" bIns="1016" rtlCol="0" anchor="t">
             <a:normAutofit/>
           </a:bodyPr>
           <a:lstStyle/>
           <a:p>
+            <a:pPr indent="0" marL="0">
+              <a:buNone/>
+            </a:pPr>
             <a:r>
               <a:rPr lang="en-US" sz="1900" dirty="0">
                 <a:solidFill>
-                  <a:srgbClr val="17364A"/>
-                </a:solidFill>
-                <a:latin typeface="Aptos" pitchFamily="34" charset="0"/>
-                <a:ea typeface="Aptos" pitchFamily="34" charset="-122"/>
-                <a:cs typeface="Aptos" pitchFamily="34" charset="-120"/>
-              </a:rPr>
-              <a:t>Play 11: Build and Deploy AI Solutions - This lesson informs Play 11 by helping learners connect the lesson.</a:t>
+                  <a:srgbClr val="003A63"/>
+                </a:solidFill>
+                <a:latin typeface="Aptos" pitchFamily="34" charset="0"/>
+                <a:ea typeface="Aptos" pitchFamily="34" charset="-122"/>
+                <a:cs typeface="Aptos" pitchFamily="34" charset="-120"/>
+              </a:rPr>
+              <a:t>• Play 11: Build and Deploy AI Solutions - This lesson informs Play 11 by helping learners.</a:t>
             </a:r>
             <a:endParaRPr lang="en-US" sz="1900" dirty="0"/>
           </a:p>
           <a:p>
+            <a:pPr indent="0" marL="0">
+              <a:buNone/>
+            </a:pPr>
             <a:r>
               <a:rPr lang="en-US" sz="1900" dirty="0">
                 <a:solidFill>
-                  <a:srgbClr val="17364A"/>
-                </a:solidFill>
-                <a:latin typeface="Aptos" pitchFamily="34" charset="0"/>
-                <a:ea typeface="Aptos" pitchFamily="34" charset="-122"/>
-                <a:cs typeface="Aptos" pitchFamily="34" charset="-120"/>
-              </a:rPr>
-              <a:t>Play 7: Prioritize Use Cases - This lesson informs Play 7 by helping learners connect the lesson topic to.</a:t>
+                  <a:srgbClr val="003A63"/>
+                </a:solidFill>
+                <a:latin typeface="Aptos" pitchFamily="34" charset="0"/>
+                <a:ea typeface="Aptos" pitchFamily="34" charset="-122"/>
+                <a:cs typeface="Aptos" pitchFamily="34" charset="-120"/>
+              </a:rPr>
+              <a:t>• Play 7: Prioritize Use Cases - This lesson informs Play 7 by helping learners connect the.</a:t>
             </a:r>
             <a:endParaRPr lang="en-US" sz="1900" dirty="0"/>
           </a:p>
           <a:p>
+            <a:pPr indent="0" marL="0">
+              <a:buNone/>
+            </a:pPr>
             <a:r>
               <a:rPr lang="en-US" sz="1900" dirty="0">
                 <a:solidFill>
-                  <a:srgbClr val="17364A"/>
-                </a:solidFill>
-                <a:latin typeface="Aptos" pitchFamily="34" charset="0"/>
-                <a:ea typeface="Aptos" pitchFamily="34" charset="-122"/>
-                <a:cs typeface="Aptos" pitchFamily="34" charset="-120"/>
-              </a:rPr>
-              <a:t>Play 1: Vision &amp; Guardrails - This lesson informs Play 1 by helping learners connect the lesson topic to.</a:t>
+                  <a:srgbClr val="003A63"/>
+                </a:solidFill>
+                <a:latin typeface="Aptos" pitchFamily="34" charset="0"/>
+                <a:ea typeface="Aptos" pitchFamily="34" charset="-122"/>
+                <a:cs typeface="Aptos" pitchFamily="34" charset="-120"/>
+              </a:rPr>
+              <a:t>• Play 1: Vision &amp; Guardrails - This lesson informs Play 1 by helping learners connect the.</a:t>
             </a:r>
             <a:endParaRPr lang="en-US" sz="1900" dirty="0"/>
           </a:p>
           <a:p>
+            <a:pPr indent="0" marL="0">
+              <a:buNone/>
+            </a:pPr>
             <a:r>
               <a:rPr lang="en-US" sz="1900" dirty="0">
                 <a:solidFill>
-                  <a:srgbClr val="17364A"/>
-                </a:solidFill>
-                <a:latin typeface="Aptos" pitchFamily="34" charset="0"/>
-                <a:ea typeface="Aptos" pitchFamily="34" charset="-122"/>
-                <a:cs typeface="Aptos" pitchFamily="34" charset="-120"/>
-              </a:rPr>
-              <a:t>Play 2: Readiness Assessment - This lesson informs Play 2 by helping learners connect the lesson topic to.</a:t>
+                  <a:srgbClr val="003A63"/>
+                </a:solidFill>
+                <a:latin typeface="Aptos" pitchFamily="34" charset="0"/>
+                <a:ea typeface="Aptos" pitchFamily="34" charset="-122"/>
+                <a:cs typeface="Aptos" pitchFamily="34" charset="-120"/>
+              </a:rPr>
+              <a:t>• Play 2: Readiness Assessment - This lesson informs Play 2 by helping learners connect the.</a:t>
             </a:r>
             <a:endParaRPr lang="en-US" sz="1900" dirty="0"/>
           </a:p>
@@ -12907,17 +13098,17 @@
         </p:nvSpPr>
         <p:spPr>
           <a:xfrm>
-            <a:off x="8211312" y="1920240"/>
-            <a:ext cx="2734056" cy="1463040"/>
-          </a:xfrm>
-          <a:prstGeom prst="rect">
-            <a:avLst/>
-          </a:prstGeom>
-          <a:noFill/>
-          <a:ln/>
-        </p:spPr>
-        <p:txBody>
-          <a:bodyPr wrap="square" lIns="0" tIns="0" rIns="0" bIns="0" rtlCol="0" anchor="t">
+            <a:off x="8211312" y="1892808"/>
+            <a:ext cx="2734056" cy="1536192"/>
+          </a:xfrm>
+          <a:prstGeom prst="rect">
+            <a:avLst/>
+          </a:prstGeom>
+          <a:noFill/>
+          <a:ln/>
+        </p:spPr>
+        <p:txBody>
+          <a:bodyPr wrap="square" lIns="254" tIns="254" rIns="254" bIns="254" rtlCol="0" anchor="t">
             <a:normAutofit/>
           </a:bodyPr>
           <a:lstStyle/>
@@ -12926,7 +13117,7 @@
               <a:buNone/>
             </a:pPr>
             <a:r>
-              <a:rPr lang="en-US" sz="1550" dirty="0">
+              <a:rPr lang="en-US" sz="1320" dirty="0">
                 <a:solidFill>
                   <a:srgbClr val="17364A"/>
                 </a:solidFill>
@@ -12934,9 +13125,9 @@
                 <a:ea typeface="Aptos" pitchFamily="34" charset="-122"/>
                 <a:cs typeface="Aptos" pitchFamily="34" charset="-120"/>
               </a:rPr>
-              <a:t>Use the related plays to identify decisions, participants, timing, approvals, and documentation needed for responsible implementation.</a:t>
-            </a:r>
-            <a:endParaRPr lang="en-US" sz="1550" dirty="0"/>
+              <a:t>Use the related plays to identify decisions, participants, timing, approvals, and documentation needed for responsible.</a:t>
+            </a:r>
+            <a:endParaRPr lang="en-US" sz="1320" dirty="0"/>
           </a:p>
         </p:txBody>
       </p:sp>
@@ -13024,13 +13215,16 @@
           <a:ln/>
         </p:spPr>
         <p:txBody>
-          <a:bodyPr wrap="square" lIns="254" tIns="254" rIns="254" bIns="254" rtlCol="0" anchor="t">
+          <a:bodyPr wrap="square" lIns="508" tIns="508" rIns="508" bIns="508" rtlCol="0" anchor="t">
             <a:normAutofit/>
           </a:bodyPr>
           <a:lstStyle/>
           <a:p>
-            <a:r>
-              <a:rPr lang="en-US" sz="1380" dirty="0">
+            <a:pPr indent="0" marL="0">
+              <a:buNone/>
+            </a:pPr>
+            <a:r>
+              <a:rPr lang="en-US" sz="1220" dirty="0">
                 <a:solidFill>
                   <a:srgbClr val="17364A"/>
                 </a:solidFill>
@@ -13040,11 +13234,14 @@
               </a:rPr>
               <a:t>Locate the decision point in the playbook sequence.</a:t>
             </a:r>
-            <a:endParaRPr lang="en-US" sz="1380" dirty="0"/>
-          </a:p>
-          <a:p>
-            <a:r>
-              <a:rPr lang="en-US" sz="1380" dirty="0">
+            <a:endParaRPr lang="en-US" sz="1220" dirty="0"/>
+          </a:p>
+          <a:p>
+            <a:pPr indent="0" marL="0">
+              <a:buNone/>
+            </a:pPr>
+            <a:r>
+              <a:rPr lang="en-US" sz="1220" dirty="0">
                 <a:solidFill>
                   <a:srgbClr val="17364A"/>
                 </a:solidFill>
@@ -13054,11 +13251,14 @@
               </a:rPr>
               <a:t>Identify who should participate in the work.</a:t>
             </a:r>
-            <a:endParaRPr lang="en-US" sz="1380" dirty="0"/>
-          </a:p>
-          <a:p>
-            <a:r>
-              <a:rPr lang="en-US" sz="1380" dirty="0">
+            <a:endParaRPr lang="en-US" sz="1220" dirty="0"/>
+          </a:p>
+          <a:p>
+            <a:pPr indent="0" marL="0">
+              <a:buNone/>
+            </a:pPr>
+            <a:r>
+              <a:rPr lang="en-US" sz="1220" dirty="0">
                 <a:solidFill>
                   <a:srgbClr val="17364A"/>
                 </a:solidFill>
@@ -13068,7 +13268,7 @@
               </a:rPr>
               <a:t>Document the review, approval, or implementation step.</a:t>
             </a:r>
-            <a:endParaRPr lang="en-US" sz="1380" dirty="0"/>
+            <a:endParaRPr lang="en-US" sz="1220" dirty="0"/>
           </a:p>
         </p:txBody>
       </p:sp>
@@ -13369,63 +13569,75 @@
           <a:ln/>
         </p:spPr>
         <p:txBody>
-          <a:bodyPr wrap="square" lIns="635" tIns="635" rIns="635" bIns="635" rtlCol="0" anchor="t">
+          <a:bodyPr wrap="square" lIns="1016" tIns="1016" rIns="1016" bIns="1016" rtlCol="0" anchor="t">
             <a:normAutofit/>
           </a:bodyPr>
           <a:lstStyle/>
           <a:p>
+            <a:pPr indent="0" marL="0">
+              <a:buNone/>
+            </a:pPr>
             <a:r>
               <a:rPr lang="en-US" sz="1850" dirty="0">
                 <a:solidFill>
-                  <a:srgbClr val="17364A"/>
-                </a:solidFill>
-                <a:latin typeface="Aptos" pitchFamily="34" charset="0"/>
-                <a:ea typeface="Aptos" pitchFamily="34" charset="-122"/>
-                <a:cs typeface="Aptos" pitchFamily="34" charset="-120"/>
-              </a:rPr>
-              <a:t>Tool 3: Equity Impact Assessment Checklist (Checklist) - Use this tool to complete or strengthen the.</a:t>
+                  <a:srgbClr val="003A63"/>
+                </a:solidFill>
+                <a:latin typeface="Aptos" pitchFamily="34" charset="0"/>
+                <a:ea typeface="Aptos" pitchFamily="34" charset="-122"/>
+                <a:cs typeface="Aptos" pitchFamily="34" charset="-120"/>
+              </a:rPr>
+              <a:t>• Tool 3: Equity Impact Assessment Checklist (Checklist) - Use this tool to complete or.</a:t>
             </a:r>
             <a:endParaRPr lang="en-US" sz="1850" dirty="0"/>
           </a:p>
           <a:p>
+            <a:pPr indent="0" marL="0">
+              <a:buNone/>
+            </a:pPr>
             <a:r>
               <a:rPr lang="en-US" sz="1850" dirty="0">
                 <a:solidFill>
-                  <a:srgbClr val="17364A"/>
-                </a:solidFill>
-                <a:latin typeface="Aptos" pitchFamily="34" charset="0"/>
-                <a:ea typeface="Aptos" pitchFamily="34" charset="-122"/>
-                <a:cs typeface="Aptos" pitchFamily="34" charset="-120"/>
-              </a:rPr>
-              <a:t>Tool 4: AI Policy Landscape Scan (Worksheet) - Use AI Policy Landscape Scan to translate this lesson into a.</a:t>
+                  <a:srgbClr val="003A63"/>
+                </a:solidFill>
+                <a:latin typeface="Aptos" pitchFamily="34" charset="0"/>
+                <a:ea typeface="Aptos" pitchFamily="34" charset="-122"/>
+                <a:cs typeface="Aptos" pitchFamily="34" charset="-120"/>
+              </a:rPr>
+              <a:t>• Tool 4: AI Policy Landscape Scan (Worksheet) - Use AI Policy Landscape Scan to translate this.</a:t>
             </a:r>
             <a:endParaRPr lang="en-US" sz="1850" dirty="0"/>
           </a:p>
           <a:p>
+            <a:pPr indent="0" marL="0">
+              <a:buNone/>
+            </a:pPr>
             <a:r>
               <a:rPr lang="en-US" sz="1850" dirty="0">
                 <a:solidFill>
-                  <a:srgbClr val="17364A"/>
-                </a:solidFill>
-                <a:latin typeface="Aptos" pitchFamily="34" charset="0"/>
-                <a:ea typeface="Aptos" pitchFamily="34" charset="-122"/>
-                <a:cs typeface="Aptos" pitchFamily="34" charset="-120"/>
-              </a:rPr>
-              <a:t>Tool 5: AI Environmental and Resource Impact Review (Checklist) - Use AI Environmental and Resource Impact.</a:t>
+                  <a:srgbClr val="003A63"/>
+                </a:solidFill>
+                <a:latin typeface="Aptos" pitchFamily="34" charset="0"/>
+                <a:ea typeface="Aptos" pitchFamily="34" charset="-122"/>
+                <a:cs typeface="Aptos" pitchFamily="34" charset="-120"/>
+              </a:rPr>
+              <a:t>• Tool 5: AI Environmental and Resource Impact Review (Checklist) - Use AI Environmental and.</a:t>
             </a:r>
             <a:endParaRPr lang="en-US" sz="1850" dirty="0"/>
           </a:p>
           <a:p>
+            <a:pPr indent="0" marL="0">
+              <a:buNone/>
+            </a:pPr>
             <a:r>
               <a:rPr lang="en-US" sz="1850" dirty="0">
                 <a:solidFill>
-                  <a:srgbClr val="17364A"/>
-                </a:solidFill>
-                <a:latin typeface="Aptos" pitchFamily="34" charset="0"/>
-                <a:ea typeface="Aptos" pitchFamily="34" charset="-122"/>
-                <a:cs typeface="Aptos" pitchFamily="34" charset="-120"/>
-              </a:rPr>
-              <a:t>Tool 6: Human-Centered AI Decision Rule Checklist (Checklist) - Use Human-Centered AI Decision Rule.</a:t>
+                  <a:srgbClr val="003A63"/>
+                </a:solidFill>
+                <a:latin typeface="Aptos" pitchFamily="34" charset="0"/>
+                <a:ea typeface="Aptos" pitchFamily="34" charset="-122"/>
+                <a:cs typeface="Aptos" pitchFamily="34" charset="-120"/>
+              </a:rPr>
+              <a:t>• Tool 6: Human-Centered AI Decision Rule Checklist (Checklist) - Use Human-Centered AI Decision.</a:t>
             </a:r>
             <a:endParaRPr lang="en-US" sz="1850" dirty="0"/>
           </a:p>
@@ -13505,17 +13717,17 @@
         </p:nvSpPr>
         <p:spPr>
           <a:xfrm>
-            <a:off x="8211312" y="1920240"/>
-            <a:ext cx="2734056" cy="1463040"/>
-          </a:xfrm>
-          <a:prstGeom prst="rect">
-            <a:avLst/>
-          </a:prstGeom>
-          <a:noFill/>
-          <a:ln/>
-        </p:spPr>
-        <p:txBody>
-          <a:bodyPr wrap="square" lIns="0" tIns="0" rIns="0" bIns="0" rtlCol="0" anchor="t">
+            <a:off x="8211312" y="1892808"/>
+            <a:ext cx="2734056" cy="1536192"/>
+          </a:xfrm>
+          <a:prstGeom prst="rect">
+            <a:avLst/>
+          </a:prstGeom>
+          <a:noFill/>
+          <a:ln/>
+        </p:spPr>
+        <p:txBody>
+          <a:bodyPr wrap="square" lIns="254" tIns="254" rIns="254" bIns="254" rtlCol="0" anchor="t">
             <a:normAutofit/>
           </a:bodyPr>
           <a:lstStyle/>
@@ -13524,7 +13736,7 @@
               <a:buNone/>
             </a:pPr>
             <a:r>
-              <a:rPr lang="en-US" sz="1550" dirty="0">
+              <a:rPr lang="en-US" sz="1320" dirty="0">
                 <a:solidFill>
                   <a:srgbClr val="17364A"/>
                 </a:solidFill>
@@ -13532,9 +13744,9 @@
                 <a:ea typeface="Aptos" pitchFamily="34" charset="-122"/>
                 <a:cs typeface="Aptos" pitchFamily="34" charset="-120"/>
               </a:rPr>
-              <a:t>Use linked tools when your department needs a structured worksheet, template, checklist, review process, or documentation artifact.</a:t>
-            </a:r>
-            <a:endParaRPr lang="en-US" sz="1550" dirty="0"/>
+              <a:t>Use linked tools when your department needs a structured worksheet, template, checklist, review process, or.</a:t>
+            </a:r>
+            <a:endParaRPr lang="en-US" sz="1320" dirty="0"/>
           </a:p>
         </p:txBody>
       </p:sp>
@@ -13622,13 +13834,16 @@
           <a:ln/>
         </p:spPr>
         <p:txBody>
-          <a:bodyPr wrap="square" lIns="254" tIns="254" rIns="254" bIns="254" rtlCol="0" anchor="t">
+          <a:bodyPr wrap="square" lIns="508" tIns="508" rIns="508" bIns="508" rtlCol="0" anchor="t">
             <a:normAutofit/>
           </a:bodyPr>
           <a:lstStyle/>
           <a:p>
-            <a:r>
-              <a:rPr lang="en-US" sz="1380" dirty="0">
+            <a:pPr indent="0" marL="0">
+              <a:buNone/>
+            </a:pPr>
+            <a:r>
+              <a:rPr lang="en-US" sz="1220" dirty="0">
                 <a:solidFill>
                   <a:srgbClr val="17364A"/>
                 </a:solidFill>
@@ -13638,11 +13853,14 @@
               </a:rPr>
               <a:t>Use a tool when no comparable local process exists.</a:t>
             </a:r>
-            <a:endParaRPr lang="en-US" sz="1380" dirty="0"/>
-          </a:p>
-          <a:p>
-            <a:r>
-              <a:rPr lang="en-US" sz="1380" dirty="0">
+            <a:endParaRPr lang="en-US" sz="1220" dirty="0"/>
+          </a:p>
+          <a:p>
+            <a:pPr indent="0" marL="0">
+              <a:buNone/>
+            </a:pPr>
+            <a:r>
+              <a:rPr lang="en-US" sz="1220" dirty="0">
                 <a:solidFill>
                   <a:srgbClr val="17364A"/>
                 </a:solidFill>
@@ -13650,13 +13868,16 @@
                 <a:ea typeface="Aptos" pitchFamily="34" charset="-122"/>
                 <a:cs typeface="Aptos" pitchFamily="34" charset="-120"/>
               </a:rPr>
-              <a:t>Adapt existing department templates when they already fit the purpose.</a:t>
-            </a:r>
-            <a:endParaRPr lang="en-US" sz="1380" dirty="0"/>
-          </a:p>
-          <a:p>
-            <a:r>
-              <a:rPr lang="en-US" sz="1380" dirty="0">
+              <a:t>Adapt existing department templates when they already fit the.</a:t>
+            </a:r>
+            <a:endParaRPr lang="en-US" sz="1220" dirty="0"/>
+          </a:p>
+          <a:p>
+            <a:pPr indent="0" marL="0">
+              <a:buNone/>
+            </a:pPr>
+            <a:r>
+              <a:rPr lang="en-US" sz="1220" dirty="0">
                 <a:solidFill>
                   <a:srgbClr val="17364A"/>
                 </a:solidFill>
@@ -13666,7 +13887,7 @@
               </a:rPr>
               <a:t>Save the completed artifact as evidence of the decision.</a:t>
             </a:r>
-            <a:endParaRPr lang="en-US" sz="1380" dirty="0"/>
+            <a:endParaRPr lang="en-US" sz="1220" dirty="0"/>
           </a:p>
         </p:txBody>
       </p:sp>
@@ -13967,49 +14188,58 @@
           <a:ln/>
         </p:spPr>
         <p:txBody>
-          <a:bodyPr wrap="square" lIns="635" tIns="635" rIns="635" bIns="635" rtlCol="0" anchor="t">
+          <a:bodyPr wrap="square" lIns="1016" tIns="1016" rIns="1016" bIns="1016" rtlCol="0" anchor="t">
             <a:normAutofit/>
           </a:bodyPr>
           <a:lstStyle/>
           <a:p>
+            <a:pPr indent="0" marL="0">
+              <a:buNone/>
+            </a:pPr>
             <a:r>
               <a:rPr lang="en-US" sz="2100" dirty="0">
                 <a:solidFill>
-                  <a:srgbClr val="17364A"/>
-                </a:solidFill>
-                <a:latin typeface="Aptos" pitchFamily="34" charset="0"/>
-                <a:ea typeface="Aptos" pitchFamily="34" charset="-122"/>
-                <a:cs typeface="Aptos" pitchFamily="34" charset="-120"/>
-              </a:rPr>
-              <a:t>Distinguish prediction from causal inference in public health AI.</a:t>
+                  <a:srgbClr val="003A63"/>
+                </a:solidFill>
+                <a:latin typeface="Aptos" pitchFamily="34" charset="0"/>
+                <a:ea typeface="Aptos" pitchFamily="34" charset="-122"/>
+                <a:cs typeface="Aptos" pitchFamily="34" charset="-120"/>
+              </a:rPr>
+              <a:t>• Distinguish prediction from causal inference in public health AI.</a:t>
             </a:r>
             <a:endParaRPr lang="en-US" sz="2100" dirty="0"/>
           </a:p>
           <a:p>
+            <a:pPr indent="0" marL="0">
+              <a:buNone/>
+            </a:pPr>
             <a:r>
               <a:rPr lang="en-US" sz="2100" dirty="0">
                 <a:solidFill>
-                  <a:srgbClr val="17364A"/>
-                </a:solidFill>
-                <a:latin typeface="Aptos" pitchFamily="34" charset="0"/>
-                <a:ea typeface="Aptos" pitchFamily="34" charset="-122"/>
-                <a:cs typeface="Aptos" pitchFamily="34" charset="-120"/>
-              </a:rPr>
-              <a:t>Explain why correlation and prediction do not establish causation.</a:t>
+                  <a:srgbClr val="003A63"/>
+                </a:solidFill>
+                <a:latin typeface="Aptos" pitchFamily="34" charset="0"/>
+                <a:ea typeface="Aptos" pitchFamily="34" charset="-122"/>
+                <a:cs typeface="Aptos" pitchFamily="34" charset="-120"/>
+              </a:rPr>
+              <a:t>• Explain why correlation and prediction do not establish causation.</a:t>
             </a:r>
             <a:endParaRPr lang="en-US" sz="2100" dirty="0"/>
           </a:p>
           <a:p>
+            <a:pPr indent="0" marL="0">
+              <a:buNone/>
+            </a:pPr>
             <a:r>
               <a:rPr lang="en-US" sz="2100" dirty="0">
                 <a:solidFill>
-                  <a:srgbClr val="17364A"/>
-                </a:solidFill>
-                <a:latin typeface="Aptos" pitchFamily="34" charset="0"/>
-                <a:ea typeface="Aptos" pitchFamily="34" charset="-122"/>
-                <a:cs typeface="Aptos" pitchFamily="34" charset="-120"/>
-              </a:rPr>
-              <a:t>Identify confounding, selection bias, collider bias, and temporal ambiguity in public health data.</a:t>
+                  <a:srgbClr val="003A63"/>
+                </a:solidFill>
+                <a:latin typeface="Aptos" pitchFamily="34" charset="0"/>
+                <a:ea typeface="Aptos" pitchFamily="34" charset="-122"/>
+                <a:cs typeface="Aptos" pitchFamily="34" charset="-120"/>
+              </a:rPr>
+              <a:t>• Identify confounding, selection bias, collider bias, and temporal ambiguity in public health.</a:t>
             </a:r>
             <a:endParaRPr lang="en-US" sz="2100" dirty="0"/>
           </a:p>
@@ -14089,17 +14319,17 @@
         </p:nvSpPr>
         <p:spPr>
           <a:xfrm>
-            <a:off x="7799832" y="1828800"/>
-            <a:ext cx="3145536" cy="685800"/>
-          </a:xfrm>
-          <a:prstGeom prst="rect">
-            <a:avLst/>
-          </a:prstGeom>
-          <a:noFill/>
-          <a:ln/>
-        </p:spPr>
-        <p:txBody>
-          <a:bodyPr wrap="square" lIns="0" tIns="0" rIns="0" bIns="0" rtlCol="0" anchor="t">
+            <a:off x="7799832" y="1801368"/>
+            <a:ext cx="3145536" cy="758952"/>
+          </a:xfrm>
+          <a:prstGeom prst="rect">
+            <a:avLst/>
+          </a:prstGeom>
+          <a:noFill/>
+          <a:ln/>
+        </p:spPr>
+        <p:txBody>
+          <a:bodyPr wrap="square" lIns="254" tIns="254" rIns="254" bIns="254" rtlCol="0" anchor="t">
             <a:normAutofit/>
           </a:bodyPr>
           <a:lstStyle/>
@@ -14108,7 +14338,7 @@
               <a:buNone/>
             </a:pPr>
             <a:r>
-              <a:rPr lang="en-US" sz="1550" dirty="0">
+              <a:rPr lang="en-US" sz="1320" dirty="0">
                 <a:solidFill>
                   <a:srgbClr val="17364A"/>
                 </a:solidFill>
@@ -14118,7 +14348,7 @@
               </a:rPr>
               <a:t>Distinguish prediction from causal inference in public health AI.</a:t>
             </a:r>
-            <a:endParaRPr lang="en-US" sz="1550" dirty="0"/>
+            <a:endParaRPr lang="en-US" sz="1320" dirty="0"/>
           </a:p>
         </p:txBody>
       </p:sp>
@@ -14206,13 +14436,16 @@
           <a:ln/>
         </p:spPr>
         <p:txBody>
-          <a:bodyPr wrap="square" lIns="254" tIns="254" rIns="254" bIns="254" rtlCol="0" anchor="t">
+          <a:bodyPr wrap="square" lIns="508" tIns="508" rIns="508" bIns="508" rtlCol="0" anchor="t">
             <a:normAutofit/>
           </a:bodyPr>
           <a:lstStyle/>
           <a:p>
-            <a:r>
-              <a:rPr lang="en-US" sz="1380" dirty="0">
+            <a:pPr indent="0" marL="0">
+              <a:buNone/>
+            </a:pPr>
+            <a:r>
+              <a:rPr lang="en-US" sz="1220" dirty="0">
                 <a:solidFill>
                   <a:srgbClr val="17364A"/>
                 </a:solidFill>
@@ -14220,13 +14453,16 @@
                 <a:ea typeface="Aptos" pitchFamily="34" charset="-122"/>
                 <a:cs typeface="Aptos" pitchFamily="34" charset="-120"/>
               </a:rPr>
-              <a:t>Recognize when a decision requires causal evidence rather than risk prediction alone.</a:t>
-            </a:r>
-            <a:endParaRPr lang="en-US" sz="1380" dirty="0"/>
-          </a:p>
-          <a:p>
-            <a:r>
-              <a:rPr lang="en-US" sz="1380" dirty="0">
+              <a:t>Recognize when a decision requires causal evidence rather than.</a:t>
+            </a:r>
+            <a:endParaRPr lang="en-US" sz="1220" dirty="0"/>
+          </a:p>
+          <a:p>
+            <a:pPr indent="0" marL="0">
+              <a:buNone/>
+            </a:pPr>
+            <a:r>
+              <a:rPr lang="en-US" sz="1220" dirty="0">
                 <a:solidFill>
                   <a:srgbClr val="17364A"/>
                 </a:solidFill>
@@ -14234,9 +14470,9 @@
                 <a:ea typeface="Aptos" pitchFamily="34" charset="-122"/>
                 <a:cs typeface="Aptos" pitchFamily="34" charset="-120"/>
               </a:rPr>
-              <a:t>Identify appropriate evidence sources for evaluating interventions or policy effects.</a:t>
-            </a:r>
-            <a:endParaRPr lang="en-US" sz="1380" dirty="0"/>
+              <a:t>Identify appropriate evidence sources for evaluating interventions.</a:t>
+            </a:r>
+            <a:endParaRPr lang="en-US" sz="1220" dirty="0"/>
           </a:p>
         </p:txBody>
       </p:sp>
@@ -14314,17 +14550,17 @@
         </p:nvSpPr>
         <p:spPr>
           <a:xfrm>
-            <a:off x="7799832" y="5001768"/>
-            <a:ext cx="3145536" cy="502920"/>
-          </a:xfrm>
-          <a:prstGeom prst="rect">
-            <a:avLst/>
-          </a:prstGeom>
-          <a:noFill/>
-          <a:ln/>
-        </p:spPr>
-        <p:txBody>
-          <a:bodyPr wrap="square" lIns="0" tIns="0" rIns="0" bIns="0" rtlCol="0" anchor="t">
+            <a:off x="7799832" y="4974336"/>
+            <a:ext cx="3145536" cy="576072"/>
+          </a:xfrm>
+          <a:prstGeom prst="rect">
+            <a:avLst/>
+          </a:prstGeom>
+          <a:noFill/>
+          <a:ln/>
+        </p:spPr>
+        <p:txBody>
+          <a:bodyPr wrap="square" lIns="254" tIns="254" rIns="254" bIns="254" rtlCol="0" anchor="t">
             <a:normAutofit/>
           </a:bodyPr>
           <a:lstStyle/>
@@ -14333,7 +14569,7 @@
               <a:buNone/>
             </a:pPr>
             <a:r>
-              <a:rPr lang="en-US" sz="1550" dirty="0">
+              <a:rPr lang="en-US" sz="1320" dirty="0">
                 <a:solidFill>
                   <a:srgbClr val="17364A"/>
                 </a:solidFill>
@@ -14341,9 +14577,9 @@
                 <a:ea typeface="Aptos" pitchFamily="34" charset="-122"/>
                 <a:cs typeface="Aptos" pitchFamily="34" charset="-120"/>
               </a:rPr>
-              <a:t>Use the assignment to test whether you can explain the concept, apply it to a realistic public health situation, and identify what would need review before the work moves forward.</a:t>
-            </a:r>
-            <a:endParaRPr lang="en-US" sz="1550" dirty="0"/>
+              <a:t>Use the assignment to test whether you can explain the concept, apply it to a realistic public health situation, and.</a:t>
+            </a:r>
+            <a:endParaRPr lang="en-US" sz="1320" dirty="0"/>
           </a:p>
         </p:txBody>
       </p:sp>
@@ -14644,21 +14880,24 @@
           <a:ln/>
         </p:spPr>
         <p:txBody>
-          <a:bodyPr wrap="square" lIns="635" tIns="635" rIns="635" bIns="635" rtlCol="0" anchor="t">
+          <a:bodyPr wrap="square" lIns="1016" tIns="1016" rIns="1016" bIns="1016" rtlCol="0" anchor="t">
             <a:normAutofit/>
           </a:bodyPr>
           <a:lstStyle/>
           <a:p>
+            <a:pPr indent="0" marL="0">
+              <a:buNone/>
+            </a:pPr>
             <a:r>
               <a:rPr lang="en-US" sz="2100" dirty="0">
                 <a:solidFill>
-                  <a:srgbClr val="17364A"/>
-                </a:solidFill>
-                <a:latin typeface="Aptos" pitchFamily="34" charset="0"/>
-                <a:ea typeface="Aptos" pitchFamily="34" charset="-122"/>
-                <a:cs typeface="Aptos" pitchFamily="34" charset="-120"/>
-              </a:rPr>
-              <a:t>Create a causal question framing worksheet for an AI-supported decision.</a:t>
+                  <a:srgbClr val="003A63"/>
+                </a:solidFill>
+                <a:latin typeface="Aptos" pitchFamily="34" charset="0"/>
+                <a:ea typeface="Aptos" pitchFamily="34" charset="-122"/>
+                <a:cs typeface="Aptos" pitchFamily="34" charset="-120"/>
+              </a:rPr>
+              <a:t>• Create a causal question framing worksheet for an AI-supported decision.</a:t>
             </a:r>
             <a:endParaRPr lang="en-US" sz="2100" dirty="0"/>
           </a:p>
@@ -14738,17 +14977,17 @@
         </p:nvSpPr>
         <p:spPr>
           <a:xfrm>
-            <a:off x="7799832" y="1828800"/>
-            <a:ext cx="3145536" cy="685800"/>
-          </a:xfrm>
-          <a:prstGeom prst="rect">
-            <a:avLst/>
-          </a:prstGeom>
-          <a:noFill/>
-          <a:ln/>
-        </p:spPr>
-        <p:txBody>
-          <a:bodyPr wrap="square" lIns="0" tIns="0" rIns="0" bIns="0" rtlCol="0" anchor="t">
+            <a:off x="7799832" y="1801368"/>
+            <a:ext cx="3145536" cy="758952"/>
+          </a:xfrm>
+          <a:prstGeom prst="rect">
+            <a:avLst/>
+          </a:prstGeom>
+          <a:noFill/>
+          <a:ln/>
+        </p:spPr>
+        <p:txBody>
+          <a:bodyPr wrap="square" lIns="254" tIns="254" rIns="254" bIns="254" rtlCol="0" anchor="t">
             <a:normAutofit/>
           </a:bodyPr>
           <a:lstStyle/>
@@ -14757,7 +14996,7 @@
               <a:buNone/>
             </a:pPr>
             <a:r>
-              <a:rPr lang="en-US" sz="1550" dirty="0">
+              <a:rPr lang="en-US" sz="1320" dirty="0">
                 <a:solidFill>
                   <a:srgbClr val="17364A"/>
                 </a:solidFill>
@@ -14767,7 +15006,7 @@
               </a:rPr>
               <a:t>Create a causal question framing worksheet for an AI-supported decision.</a:t>
             </a:r>
-            <a:endParaRPr lang="en-US" sz="1550" dirty="0"/>
+            <a:endParaRPr lang="en-US" sz="1320" dirty="0"/>
           </a:p>
         </p:txBody>
       </p:sp>
@@ -14855,13 +15094,16 @@
           <a:ln/>
         </p:spPr>
         <p:txBody>
-          <a:bodyPr wrap="square" lIns="254" tIns="254" rIns="254" bIns="254" rtlCol="0" anchor="t">
+          <a:bodyPr wrap="square" lIns="508" tIns="508" rIns="508" bIns="508" rtlCol="0" anchor="t">
             <a:normAutofit/>
           </a:bodyPr>
           <a:lstStyle/>
           <a:p>
-            <a:r>
-              <a:rPr lang="en-US" sz="1380" dirty="0">
+            <a:pPr indent="0" marL="0">
+              <a:buNone/>
+            </a:pPr>
+            <a:r>
+              <a:rPr lang="en-US" sz="1220" dirty="0">
                 <a:solidFill>
                   <a:srgbClr val="17364A"/>
                 </a:solidFill>
@@ -14869,9 +15111,9 @@
                 <a:ea typeface="Aptos" pitchFamily="34" charset="-122"/>
                 <a:cs typeface="Aptos" pitchFamily="34" charset="-120"/>
               </a:rPr>
-              <a:t>Create a causal question framing worksheet for an AI-supported decision.</a:t>
-            </a:r>
-            <a:endParaRPr lang="en-US" sz="1380" dirty="0"/>
+              <a:t>Create a causal question framing worksheet for an AI-supported.</a:t>
+            </a:r>
+            <a:endParaRPr lang="en-US" sz="1220" dirty="0"/>
           </a:p>
         </p:txBody>
       </p:sp>
@@ -14949,17 +15191,17 @@
         </p:nvSpPr>
         <p:spPr>
           <a:xfrm>
-            <a:off x="7799832" y="5001768"/>
-            <a:ext cx="3145536" cy="502920"/>
-          </a:xfrm>
-          <a:prstGeom prst="rect">
-            <a:avLst/>
-          </a:prstGeom>
-          <a:noFill/>
-          <a:ln/>
-        </p:spPr>
-        <p:txBody>
-          <a:bodyPr wrap="square" lIns="0" tIns="0" rIns="0" bIns="0" rtlCol="0" anchor="t">
+            <a:off x="7799832" y="4974336"/>
+            <a:ext cx="3145536" cy="576072"/>
+          </a:xfrm>
+          <a:prstGeom prst="rect">
+            <a:avLst/>
+          </a:prstGeom>
+          <a:noFill/>
+          <a:ln/>
+        </p:spPr>
+        <p:txBody>
+          <a:bodyPr wrap="square" lIns="254" tIns="254" rIns="254" bIns="254" rtlCol="0" anchor="t">
             <a:normAutofit/>
           </a:bodyPr>
           <a:lstStyle/>
@@ -14968,7 +15210,7 @@
               <a:buNone/>
             </a:pPr>
             <a:r>
-              <a:rPr lang="en-US" sz="1550" dirty="0">
+              <a:rPr lang="en-US" sz="1320" dirty="0">
                 <a:solidFill>
                   <a:srgbClr val="17364A"/>
                 </a:solidFill>
@@ -14976,9 +15218,9 @@
                 <a:ea typeface="Aptos" pitchFamily="34" charset="-122"/>
                 <a:cs typeface="Aptos" pitchFamily="34" charset="-120"/>
               </a:rPr>
-              <a:t>Use the assignment to test whether you can explain the concept, apply it to a realistic public health situation, and identify what would need review before the work moves forward.</a:t>
-            </a:r>
-            <a:endParaRPr lang="en-US" sz="1550" dirty="0"/>
+              <a:t>Use the assignment to test whether you can explain the concept, apply it to a realistic public health situation, and.</a:t>
+            </a:r>
+            <a:endParaRPr lang="en-US" sz="1320" dirty="0"/>
           </a:p>
         </p:txBody>
       </p:sp>
@@ -15279,49 +15521,58 @@
           <a:ln/>
         </p:spPr>
         <p:txBody>
-          <a:bodyPr wrap="square" lIns="635" tIns="635" rIns="635" bIns="635" rtlCol="0" anchor="t">
+          <a:bodyPr wrap="square" lIns="1016" tIns="1016" rIns="1016" bIns="1016" rtlCol="0" anchor="t">
             <a:normAutofit/>
           </a:bodyPr>
           <a:lstStyle/>
           <a:p>
+            <a:pPr indent="0" marL="0">
+              <a:buNone/>
+            </a:pPr>
             <a:r>
               <a:rPr lang="en-US" sz="2100" dirty="0">
                 <a:solidFill>
-                  <a:srgbClr val="17364A"/>
-                </a:solidFill>
-                <a:latin typeface="Aptos" pitchFamily="34" charset="0"/>
-                <a:ea typeface="Aptos" pitchFamily="34" charset="-122"/>
-                <a:cs typeface="Aptos" pitchFamily="34" charset="-120"/>
-              </a:rPr>
-              <a:t>AI models often predict what is likely to happen, but public health leaders frequently need to know.</a:t>
+                  <a:srgbClr val="003A63"/>
+                </a:solidFill>
+                <a:latin typeface="Aptos" pitchFamily="34" charset="0"/>
+                <a:ea typeface="Aptos" pitchFamily="34" charset="-122"/>
+                <a:cs typeface="Aptos" pitchFamily="34" charset="-120"/>
+              </a:rPr>
+              <a:t>• AI models often predict what is likely to happen, but public health leaders frequently need to.</a:t>
             </a:r>
             <a:endParaRPr lang="en-US" sz="2100" dirty="0"/>
           </a:p>
           <a:p>
+            <a:pPr indent="0" marL="0">
+              <a:buNone/>
+            </a:pPr>
             <a:r>
               <a:rPr lang="en-US" sz="2100" dirty="0">
                 <a:solidFill>
-                  <a:srgbClr val="17364A"/>
-                </a:solidFill>
-                <a:latin typeface="Aptos" pitchFamily="34" charset="0"/>
-                <a:ea typeface="Aptos" pitchFamily="34" charset="-122"/>
-                <a:cs typeface="Aptos" pitchFamily="34" charset="-120"/>
-              </a:rPr>
-              <a:t>This module helps learners distinguish prediction from causal inference so AI outputs are not misused.</a:t>
+                  <a:srgbClr val="003A63"/>
+                </a:solidFill>
+                <a:latin typeface="Aptos" pitchFamily="34" charset="0"/>
+                <a:ea typeface="Aptos" pitchFamily="34" charset="-122"/>
+                <a:cs typeface="Aptos" pitchFamily="34" charset="-120"/>
+              </a:rPr>
+              <a:t>• This module helps learners distinguish prediction from causal inference so AI outputs are not.</a:t>
             </a:r>
             <a:endParaRPr lang="en-US" sz="2100" dirty="0"/>
           </a:p>
           <a:p>
+            <a:pPr indent="0" marL="0">
+              <a:buNone/>
+            </a:pPr>
             <a:r>
               <a:rPr lang="en-US" sz="2100" dirty="0">
                 <a:solidFill>
-                  <a:srgbClr val="17364A"/>
-                </a:solidFill>
-                <a:latin typeface="Aptos" pitchFamily="34" charset="0"/>
-                <a:ea typeface="Aptos" pitchFamily="34" charset="-122"/>
-                <a:cs typeface="Aptos" pitchFamily="34" charset="-120"/>
-              </a:rPr>
-              <a:t>Learners examine confounding, bias, comparison groups, counterfactual reasoning, directed acyclic.</a:t>
+                  <a:srgbClr val="003A63"/>
+                </a:solidFill>
+                <a:latin typeface="Aptos" pitchFamily="34" charset="0"/>
+                <a:ea typeface="Aptos" pitchFamily="34" charset="-122"/>
+                <a:cs typeface="Aptos" pitchFamily="34" charset="-120"/>
+              </a:rPr>
+              <a:t>• Learners examine confounding, bias, comparison groups, counterfactual reasoning, directed.</a:t>
             </a:r>
             <a:endParaRPr lang="en-US" sz="2100" dirty="0"/>
           </a:p>
@@ -15401,17 +15652,17 @@
         </p:nvSpPr>
         <p:spPr>
           <a:xfrm>
-            <a:off x="7799832" y="1828800"/>
-            <a:ext cx="3145536" cy="685800"/>
-          </a:xfrm>
-          <a:prstGeom prst="rect">
-            <a:avLst/>
-          </a:prstGeom>
-          <a:noFill/>
-          <a:ln/>
-        </p:spPr>
-        <p:txBody>
-          <a:bodyPr wrap="square" lIns="0" tIns="0" rIns="0" bIns="0" rtlCol="0" anchor="t">
+            <a:off x="7799832" y="1801368"/>
+            <a:ext cx="3145536" cy="758952"/>
+          </a:xfrm>
+          <a:prstGeom prst="rect">
+            <a:avLst/>
+          </a:prstGeom>
+          <a:noFill/>
+          <a:ln/>
+        </p:spPr>
+        <p:txBody>
+          <a:bodyPr wrap="square" lIns="254" tIns="254" rIns="254" bIns="254" rtlCol="0" anchor="t">
             <a:normAutofit/>
           </a:bodyPr>
           <a:lstStyle/>
@@ -15420,7 +15671,7 @@
               <a:buNone/>
             </a:pPr>
             <a:r>
-              <a:rPr lang="en-US" sz="1550" dirty="0">
+              <a:rPr lang="en-US" sz="1320" dirty="0">
                 <a:solidFill>
                   <a:srgbClr val="17364A"/>
                 </a:solidFill>
@@ -15430,7 +15681,7 @@
               </a:rPr>
               <a:t>AI models often predict what is likely to happen, but public health leaders frequently need to know.</a:t>
             </a:r>
-            <a:endParaRPr lang="en-US" sz="1550" dirty="0"/>
+            <a:endParaRPr lang="en-US" sz="1320" dirty="0"/>
           </a:p>
         </p:txBody>
       </p:sp>
@@ -15518,13 +15769,16 @@
           <a:ln/>
         </p:spPr>
         <p:txBody>
-          <a:bodyPr wrap="square" lIns="254" tIns="254" rIns="254" bIns="254" rtlCol="0" anchor="t">
+          <a:bodyPr wrap="square" lIns="508" tIns="508" rIns="508" bIns="508" rtlCol="0" anchor="t">
             <a:normAutofit/>
           </a:bodyPr>
           <a:lstStyle/>
           <a:p>
-            <a:r>
-              <a:rPr lang="en-US" sz="1380" dirty="0">
+            <a:pPr indent="0" marL="0">
+              <a:buNone/>
+            </a:pPr>
+            <a:r>
+              <a:rPr lang="en-US" sz="1220" dirty="0">
                 <a:solidFill>
                   <a:srgbClr val="17364A"/>
                 </a:solidFill>
@@ -15532,13 +15786,16 @@
                 <a:ea typeface="Aptos" pitchFamily="34" charset="-122"/>
                 <a:cs typeface="Aptos" pitchFamily="34" charset="-120"/>
               </a:rPr>
-              <a:t>AI models often predict what is likely to happen, but public health leaders frequently.</a:t>
-            </a:r>
-            <a:endParaRPr lang="en-US" sz="1380" dirty="0"/>
-          </a:p>
-          <a:p>
-            <a:r>
-              <a:rPr lang="en-US" sz="1380" dirty="0">
+              <a:t>AI models often predict what is likely to happen, but public.</a:t>
+            </a:r>
+            <a:endParaRPr lang="en-US" sz="1220" dirty="0"/>
+          </a:p>
+          <a:p>
+            <a:pPr indent="0" marL="0">
+              <a:buNone/>
+            </a:pPr>
+            <a:r>
+              <a:rPr lang="en-US" sz="1220" dirty="0">
                 <a:solidFill>
                   <a:srgbClr val="17364A"/>
                 </a:solidFill>
@@ -15546,13 +15803,16 @@
                 <a:ea typeface="Aptos" pitchFamily="34" charset="-122"/>
                 <a:cs typeface="Aptos" pitchFamily="34" charset="-120"/>
               </a:rPr>
-              <a:t>This module helps learners distinguish prediction from causal inference so AI outputs are.</a:t>
-            </a:r>
-            <a:endParaRPr lang="en-US" sz="1380" dirty="0"/>
-          </a:p>
-          <a:p>
-            <a:r>
-              <a:rPr lang="en-US" sz="1380" dirty="0">
+              <a:t>This module helps learners distinguish prediction from causal.</a:t>
+            </a:r>
+            <a:endParaRPr lang="en-US" sz="1220" dirty="0"/>
+          </a:p>
+          <a:p>
+            <a:pPr indent="0" marL="0">
+              <a:buNone/>
+            </a:pPr>
+            <a:r>
+              <a:rPr lang="en-US" sz="1220" dirty="0">
                 <a:solidFill>
                   <a:srgbClr val="17364A"/>
                 </a:solidFill>
@@ -15560,9 +15820,9 @@
                 <a:ea typeface="Aptos" pitchFamily="34" charset="-122"/>
                 <a:cs typeface="Aptos" pitchFamily="34" charset="-120"/>
               </a:rPr>
-              <a:t>Learners examine confounding, bias, comparison groups, counterfactual reasoning, directed.</a:t>
-            </a:r>
-            <a:endParaRPr lang="en-US" sz="1380" dirty="0"/>
+              <a:t>Learners examine confounding, bias, comparison groups,.</a:t>
+            </a:r>
+            <a:endParaRPr lang="en-US" sz="1220" dirty="0"/>
           </a:p>
         </p:txBody>
       </p:sp>
@@ -15640,17 +15900,17 @@
         </p:nvSpPr>
         <p:spPr>
           <a:xfrm>
-            <a:off x="7799832" y="5001768"/>
-            <a:ext cx="3145536" cy="502920"/>
-          </a:xfrm>
-          <a:prstGeom prst="rect">
-            <a:avLst/>
-          </a:prstGeom>
-          <a:noFill/>
-          <a:ln/>
-        </p:spPr>
-        <p:txBody>
-          <a:bodyPr wrap="square" lIns="0" tIns="0" rIns="0" bIns="0" rtlCol="0" anchor="t">
+            <a:off x="7799832" y="4974336"/>
+            <a:ext cx="3145536" cy="576072"/>
+          </a:xfrm>
+          <a:prstGeom prst="rect">
+            <a:avLst/>
+          </a:prstGeom>
+          <a:noFill/>
+          <a:ln/>
+        </p:spPr>
+        <p:txBody>
+          <a:bodyPr wrap="square" lIns="254" tIns="254" rIns="254" bIns="254" rtlCol="0" anchor="t">
             <a:normAutofit/>
           </a:bodyPr>
           <a:lstStyle/>
@@ -15659,7 +15919,7 @@
               <a:buNone/>
             </a:pPr>
             <a:r>
-              <a:rPr lang="en-US" sz="1550" dirty="0">
+              <a:rPr lang="en-US" sz="1320" dirty="0">
                 <a:solidFill>
                   <a:srgbClr val="17364A"/>
                 </a:solidFill>
@@ -15667,9 +15927,9 @@
                 <a:ea typeface="Aptos" pitchFamily="34" charset="-122"/>
                 <a:cs typeface="Aptos" pitchFamily="34" charset="-120"/>
               </a:rPr>
-              <a:t>Connect the concept to public health purpose, responsible use, required safeguards, documentation, and the next action a department should take.</a:t>
-            </a:r>
-            <a:endParaRPr lang="en-US" sz="1550" dirty="0"/>
+              <a:t>Connect the concept to public health purpose, responsible use, required safeguards, documentation, and the next action a.</a:t>
+            </a:r>
+            <a:endParaRPr lang="en-US" sz="1320" dirty="0"/>
           </a:p>
         </p:txBody>
       </p:sp>
@@ -15970,49 +16230,58 @@
           <a:ln/>
         </p:spPr>
         <p:txBody>
-          <a:bodyPr wrap="square" lIns="635" tIns="635" rIns="635" bIns="635" rtlCol="0" anchor="t">
+          <a:bodyPr wrap="square" lIns="1016" tIns="1016" rIns="1016" bIns="1016" rtlCol="0" anchor="t">
             <a:normAutofit/>
           </a:bodyPr>
           <a:lstStyle/>
           <a:p>
+            <a:pPr indent="0" marL="0">
+              <a:buNone/>
+            </a:pPr>
             <a:r>
               <a:rPr lang="en-US" sz="2100" dirty="0">
                 <a:solidFill>
-                  <a:srgbClr val="17364A"/>
-                </a:solidFill>
-                <a:latin typeface="Aptos" pitchFamily="34" charset="0"/>
-                <a:ea typeface="Aptos" pitchFamily="34" charset="-122"/>
-                <a:cs typeface="Aptos" pitchFamily="34" charset="-120"/>
-              </a:rPr>
-              <a:t>Prediction: An estimate of what is likely to happen based on observed patterns.</a:t>
+                  <a:srgbClr val="003A63"/>
+                </a:solidFill>
+                <a:latin typeface="Aptos" pitchFamily="34" charset="0"/>
+                <a:ea typeface="Aptos" pitchFamily="34" charset="-122"/>
+                <a:cs typeface="Aptos" pitchFamily="34" charset="-120"/>
+              </a:rPr>
+              <a:t>• Prediction: An estimate of what is likely to happen based on observed patterns.</a:t>
             </a:r>
             <a:endParaRPr lang="en-US" sz="2100" dirty="0"/>
           </a:p>
           <a:p>
+            <a:pPr indent="0" marL="0">
+              <a:buNone/>
+            </a:pPr>
             <a:r>
               <a:rPr lang="en-US" sz="2100" dirty="0">
                 <a:solidFill>
-                  <a:srgbClr val="17364A"/>
-                </a:solidFill>
-                <a:latin typeface="Aptos" pitchFamily="34" charset="0"/>
-                <a:ea typeface="Aptos" pitchFamily="34" charset="-122"/>
-                <a:cs typeface="Aptos" pitchFamily="34" charset="-120"/>
-              </a:rPr>
-              <a:t>Causal inference: The process of estimating whether and how an exposure, policy, program, or.</a:t>
+                  <a:srgbClr val="003A63"/>
+                </a:solidFill>
+                <a:latin typeface="Aptos" pitchFamily="34" charset="0"/>
+                <a:ea typeface="Aptos" pitchFamily="34" charset="-122"/>
+                <a:cs typeface="Aptos" pitchFamily="34" charset="-120"/>
+              </a:rPr>
+              <a:t>• Causal inference: The process of estimating whether and how an exposure, policy, program, or.</a:t>
             </a:r>
             <a:endParaRPr lang="en-US" sz="2100" dirty="0"/>
           </a:p>
           <a:p>
+            <a:pPr indent="0" marL="0">
+              <a:buNone/>
+            </a:pPr>
             <a:r>
               <a:rPr lang="en-US" sz="2100" dirty="0">
                 <a:solidFill>
-                  <a:srgbClr val="17364A"/>
-                </a:solidFill>
-                <a:latin typeface="Aptos" pitchFamily="34" charset="0"/>
-                <a:ea typeface="Aptos" pitchFamily="34" charset="-122"/>
-                <a:cs typeface="Aptos" pitchFamily="34" charset="-120"/>
-              </a:rPr>
-              <a:t>Confounding: A distortion that occurs when another factor is related to both the exposure and the.</a:t>
+                  <a:srgbClr val="003A63"/>
+                </a:solidFill>
+                <a:latin typeface="Aptos" pitchFamily="34" charset="0"/>
+                <a:ea typeface="Aptos" pitchFamily="34" charset="-122"/>
+                <a:cs typeface="Aptos" pitchFamily="34" charset="-120"/>
+              </a:rPr>
+              <a:t>• Confounding: A distortion that occurs when another factor is related to both the exposure and.</a:t>
             </a:r>
             <a:endParaRPr lang="en-US" sz="2100" dirty="0"/>
           </a:p>
@@ -16092,17 +16361,17 @@
         </p:nvSpPr>
         <p:spPr>
           <a:xfrm>
-            <a:off x="7799832" y="1828800"/>
-            <a:ext cx="3145536" cy="685800"/>
-          </a:xfrm>
-          <a:prstGeom prst="rect">
-            <a:avLst/>
-          </a:prstGeom>
-          <a:noFill/>
-          <a:ln/>
-        </p:spPr>
-        <p:txBody>
-          <a:bodyPr wrap="square" lIns="0" tIns="0" rIns="0" bIns="0" rtlCol="0" anchor="t">
+            <a:off x="7799832" y="1801368"/>
+            <a:ext cx="3145536" cy="758952"/>
+          </a:xfrm>
+          <a:prstGeom prst="rect">
+            <a:avLst/>
+          </a:prstGeom>
+          <a:noFill/>
+          <a:ln/>
+        </p:spPr>
+        <p:txBody>
+          <a:bodyPr wrap="square" lIns="254" tIns="254" rIns="254" bIns="254" rtlCol="0" anchor="t">
             <a:normAutofit/>
           </a:bodyPr>
           <a:lstStyle/>
@@ -16111,7 +16380,7 @@
               <a:buNone/>
             </a:pPr>
             <a:r>
-              <a:rPr lang="en-US" sz="1550" dirty="0">
+              <a:rPr lang="en-US" sz="1320" dirty="0">
                 <a:solidFill>
                   <a:srgbClr val="17364A"/>
                 </a:solidFill>
@@ -16121,7 +16390,7 @@
               </a:rPr>
               <a:t>Prediction: An estimate of what is likely to happen based on observed patterns.</a:t>
             </a:r>
-            <a:endParaRPr lang="en-US" sz="1550" dirty="0"/>
+            <a:endParaRPr lang="en-US" sz="1320" dirty="0"/>
           </a:p>
         </p:txBody>
       </p:sp>
@@ -16209,13 +16478,16 @@
           <a:ln/>
         </p:spPr>
         <p:txBody>
-          <a:bodyPr wrap="square" lIns="254" tIns="254" rIns="254" bIns="254" rtlCol="0" anchor="t">
+          <a:bodyPr wrap="square" lIns="508" tIns="508" rIns="508" bIns="508" rtlCol="0" anchor="t">
             <a:normAutofit/>
           </a:bodyPr>
           <a:lstStyle/>
           <a:p>
-            <a:r>
-              <a:rPr lang="en-US" sz="1380" dirty="0">
+            <a:pPr indent="0" marL="0">
+              <a:buNone/>
+            </a:pPr>
+            <a:r>
+              <a:rPr lang="en-US" sz="1220" dirty="0">
                 <a:solidFill>
                   <a:srgbClr val="17364A"/>
                 </a:solidFill>
@@ -16223,13 +16495,16 @@
                 <a:ea typeface="Aptos" pitchFamily="34" charset="-122"/>
                 <a:cs typeface="Aptos" pitchFamily="34" charset="-120"/>
               </a:rPr>
-              <a:t>Causal inference: The process of estimating whether and how an exposure, policy, program,.</a:t>
-            </a:r>
-            <a:endParaRPr lang="en-US" sz="1380" dirty="0"/>
-          </a:p>
-          <a:p>
-            <a:r>
-              <a:rPr lang="en-US" sz="1380" dirty="0">
+              <a:t>Causal inference: The process of estimating whether and how an.</a:t>
+            </a:r>
+            <a:endParaRPr lang="en-US" sz="1220" dirty="0"/>
+          </a:p>
+          <a:p>
+            <a:pPr indent="0" marL="0">
+              <a:buNone/>
+            </a:pPr>
+            <a:r>
+              <a:rPr lang="en-US" sz="1220" dirty="0">
                 <a:solidFill>
                   <a:srgbClr val="17364A"/>
                 </a:solidFill>
@@ -16237,13 +16512,16 @@
                 <a:ea typeface="Aptos" pitchFamily="34" charset="-122"/>
                 <a:cs typeface="Aptos" pitchFamily="34" charset="-120"/>
               </a:rPr>
-              <a:t>Confounding: A distortion that occurs when another factor is related to both the exposure.</a:t>
-            </a:r>
-            <a:endParaRPr lang="en-US" sz="1380" dirty="0"/>
-          </a:p>
-          <a:p>
-            <a:r>
-              <a:rPr lang="en-US" sz="1380" dirty="0">
+              <a:t>Confounding: A distortion that occurs when another factor is.</a:t>
+            </a:r>
+            <a:endParaRPr lang="en-US" sz="1220" dirty="0"/>
+          </a:p>
+          <a:p>
+            <a:pPr indent="0" marL="0">
+              <a:buNone/>
+            </a:pPr>
+            <a:r>
+              <a:rPr lang="en-US" sz="1220" dirty="0">
                 <a:solidFill>
                   <a:srgbClr val="17364A"/>
                 </a:solidFill>
@@ -16251,9 +16529,9 @@
                 <a:ea typeface="Aptos" pitchFamily="34" charset="-122"/>
                 <a:cs typeface="Aptos" pitchFamily="34" charset="-120"/>
               </a:rPr>
-              <a:t>Counterfactual: The outcome that would have occurred under a different condition or.</a:t>
-            </a:r>
-            <a:endParaRPr lang="en-US" sz="1380" dirty="0"/>
+              <a:t>Counterfactual: The outcome that would have occurred under a.</a:t>
+            </a:r>
+            <a:endParaRPr lang="en-US" sz="1220" dirty="0"/>
           </a:p>
         </p:txBody>
       </p:sp>
@@ -16331,17 +16609,17 @@
         </p:nvSpPr>
         <p:spPr>
           <a:xfrm>
-            <a:off x="7799832" y="5001768"/>
-            <a:ext cx="3145536" cy="502920"/>
-          </a:xfrm>
-          <a:prstGeom prst="rect">
-            <a:avLst/>
-          </a:prstGeom>
-          <a:noFill/>
-          <a:ln/>
-        </p:spPr>
-        <p:txBody>
-          <a:bodyPr wrap="square" lIns="0" tIns="0" rIns="0" bIns="0" rtlCol="0" anchor="t">
+            <a:off x="7799832" y="4974336"/>
+            <a:ext cx="3145536" cy="576072"/>
+          </a:xfrm>
+          <a:prstGeom prst="rect">
+            <a:avLst/>
+          </a:prstGeom>
+          <a:noFill/>
+          <a:ln/>
+        </p:spPr>
+        <p:txBody>
+          <a:bodyPr wrap="square" lIns="254" tIns="254" rIns="254" bIns="254" rtlCol="0" anchor="t">
             <a:normAutofit/>
           </a:bodyPr>
           <a:lstStyle/>
@@ -16350,7 +16628,7 @@
               <a:buNone/>
             </a:pPr>
             <a:r>
-              <a:rPr lang="en-US" sz="1550" dirty="0">
+              <a:rPr lang="en-US" sz="1320" dirty="0">
                 <a:solidFill>
                   <a:srgbClr val="17364A"/>
                 </a:solidFill>
@@ -16358,9 +16636,9 @@
                 <a:ea typeface="Aptos" pitchFamily="34" charset="-122"/>
                 <a:cs typeface="Aptos" pitchFamily="34" charset="-120"/>
               </a:rPr>
-              <a:t>Connect the concept to public health purpose, responsible use, required safeguards, documentation, and the next action a department should take.</a:t>
-            </a:r>
-            <a:endParaRPr lang="en-US" sz="1550" dirty="0"/>
+              <a:t>Connect the concept to public health purpose, responsible use, required safeguards, documentation, and the next action a.</a:t>
+            </a:r>
+            <a:endParaRPr lang="en-US" sz="1320" dirty="0"/>
           </a:p>
         </p:txBody>
       </p:sp>
@@ -16661,49 +16939,58 @@
           <a:ln/>
         </p:spPr>
         <p:txBody>
-          <a:bodyPr wrap="square" lIns="635" tIns="635" rIns="635" bIns="635" rtlCol="0" anchor="t">
+          <a:bodyPr wrap="square" lIns="1016" tIns="1016" rIns="1016" bIns="1016" rtlCol="0" anchor="t">
             <a:normAutofit/>
           </a:bodyPr>
           <a:lstStyle/>
           <a:p>
+            <a:pPr indent="0" marL="0">
+              <a:buNone/>
+            </a:pPr>
             <a:r>
               <a:rPr lang="en-US" sz="2100" dirty="0">
                 <a:solidFill>
-                  <a:srgbClr val="17364A"/>
-                </a:solidFill>
-                <a:latin typeface="Aptos" pitchFamily="34" charset="0"/>
-                <a:ea typeface="Aptos" pitchFamily="34" charset="-122"/>
-                <a:cs typeface="Aptos" pitchFamily="34" charset="-120"/>
-              </a:rPr>
-              <a:t>AI can make weak evidence appear stronger than it is.</a:t>
+                  <a:srgbClr val="003A63"/>
+                </a:solidFill>
+                <a:latin typeface="Aptos" pitchFamily="34" charset="0"/>
+                <a:ea typeface="Aptos" pitchFamily="34" charset="-122"/>
+                <a:cs typeface="Aptos" pitchFamily="34" charset="-120"/>
+              </a:rPr>
+              <a:t>• AI can make weak evidence appear stronger than it is.</a:t>
             </a:r>
             <a:endParaRPr lang="en-US" sz="2100" dirty="0"/>
           </a:p>
           <a:p>
+            <a:pPr indent="0" marL="0">
+              <a:buNone/>
+            </a:pPr>
             <a:r>
               <a:rPr lang="en-US" sz="2100" dirty="0">
                 <a:solidFill>
-                  <a:srgbClr val="17364A"/>
-                </a:solidFill>
-                <a:latin typeface="Aptos" pitchFamily="34" charset="0"/>
-                <a:ea typeface="Aptos" pitchFamily="34" charset="-122"/>
-                <a:cs typeface="Aptos" pitchFamily="34" charset="-120"/>
-              </a:rPr>
-              <a:t>A model may predict which communities have higher hospitalization risk, but that does not prove which.</a:t>
+                  <a:srgbClr val="003A63"/>
+                </a:solidFill>
+                <a:latin typeface="Aptos" pitchFamily="34" charset="0"/>
+                <a:ea typeface="Aptos" pitchFamily="34" charset="-122"/>
+                <a:cs typeface="Aptos" pitchFamily="34" charset="-120"/>
+              </a:rPr>
+              <a:t>• A model may predict which communities have higher hospitalization risk, but that does not.</a:t>
             </a:r>
             <a:endParaRPr lang="en-US" sz="2100" dirty="0"/>
           </a:p>
           <a:p>
+            <a:pPr indent="0" marL="0">
+              <a:buNone/>
+            </a:pPr>
             <a:r>
               <a:rPr lang="en-US" sz="2100" dirty="0">
                 <a:solidFill>
-                  <a:srgbClr val="17364A"/>
-                </a:solidFill>
-                <a:latin typeface="Aptos" pitchFamily="34" charset="0"/>
-                <a:ea typeface="Aptos" pitchFamily="34" charset="-122"/>
-                <a:cs typeface="Aptos" pitchFamily="34" charset="-120"/>
-              </a:rPr>
-              <a:t>A model may find that people who receive a service have better outcomes, but that pattern may reflect.</a:t>
+                  <a:srgbClr val="003A63"/>
+                </a:solidFill>
+                <a:latin typeface="Aptos" pitchFamily="34" charset="0"/>
+                <a:ea typeface="Aptos" pitchFamily="34" charset="-122"/>
+                <a:cs typeface="Aptos" pitchFamily="34" charset="-120"/>
+              </a:rPr>
+              <a:t>• A model may find that people who receive a service have better outcomes, but that pattern may.</a:t>
             </a:r>
             <a:endParaRPr lang="en-US" sz="2100" dirty="0"/>
           </a:p>
@@ -16783,17 +17070,17 @@
         </p:nvSpPr>
         <p:spPr>
           <a:xfrm>
-            <a:off x="7799832" y="1828800"/>
-            <a:ext cx="3145536" cy="685800"/>
-          </a:xfrm>
-          <a:prstGeom prst="rect">
-            <a:avLst/>
-          </a:prstGeom>
-          <a:noFill/>
-          <a:ln/>
-        </p:spPr>
-        <p:txBody>
-          <a:bodyPr wrap="square" lIns="0" tIns="0" rIns="0" bIns="0" rtlCol="0" anchor="t">
+            <a:off x="7799832" y="1801368"/>
+            <a:ext cx="3145536" cy="758952"/>
+          </a:xfrm>
+          <a:prstGeom prst="rect">
+            <a:avLst/>
+          </a:prstGeom>
+          <a:noFill/>
+          <a:ln/>
+        </p:spPr>
+        <p:txBody>
+          <a:bodyPr wrap="square" lIns="254" tIns="254" rIns="254" bIns="254" rtlCol="0" anchor="t">
             <a:normAutofit/>
           </a:bodyPr>
           <a:lstStyle/>
@@ -16802,7 +17089,7 @@
               <a:buNone/>
             </a:pPr>
             <a:r>
-              <a:rPr lang="en-US" sz="1550" dirty="0">
+              <a:rPr lang="en-US" sz="1320" dirty="0">
                 <a:solidFill>
                   <a:srgbClr val="17364A"/>
                 </a:solidFill>
@@ -16812,7 +17099,7 @@
               </a:rPr>
               <a:t>AI can make weak evidence appear stronger than it is.</a:t>
             </a:r>
-            <a:endParaRPr lang="en-US" sz="1550" dirty="0"/>
+            <a:endParaRPr lang="en-US" sz="1320" dirty="0"/>
           </a:p>
         </p:txBody>
       </p:sp>
@@ -16900,13 +17187,16 @@
           <a:ln/>
         </p:spPr>
         <p:txBody>
-          <a:bodyPr wrap="square" lIns="254" tIns="254" rIns="254" bIns="254" rtlCol="0" anchor="t">
+          <a:bodyPr wrap="square" lIns="508" tIns="508" rIns="508" bIns="508" rtlCol="0" anchor="t">
             <a:normAutofit/>
           </a:bodyPr>
           <a:lstStyle/>
           <a:p>
-            <a:r>
-              <a:rPr lang="en-US" sz="1380" dirty="0">
+            <a:pPr indent="0" marL="0">
+              <a:buNone/>
+            </a:pPr>
+            <a:r>
+              <a:rPr lang="en-US" sz="1220" dirty="0">
                 <a:solidFill>
                   <a:srgbClr val="17364A"/>
                 </a:solidFill>
@@ -16914,13 +17204,16 @@
                 <a:ea typeface="Aptos" pitchFamily="34" charset="-122"/>
                 <a:cs typeface="Aptos" pitchFamily="34" charset="-120"/>
               </a:rPr>
-              <a:t>A model may predict which communities have higher hospitalization risk, but that does not.</a:t>
-            </a:r>
-            <a:endParaRPr lang="en-US" sz="1380" dirty="0"/>
-          </a:p>
-          <a:p>
-            <a:r>
-              <a:rPr lang="en-US" sz="1380" dirty="0">
+              <a:t>A model may predict which communities have higher hospitalization.</a:t>
+            </a:r>
+            <a:endParaRPr lang="en-US" sz="1220" dirty="0"/>
+          </a:p>
+          <a:p>
+            <a:pPr indent="0" marL="0">
+              <a:buNone/>
+            </a:pPr>
+            <a:r>
+              <a:rPr lang="en-US" sz="1220" dirty="0">
                 <a:solidFill>
                   <a:srgbClr val="17364A"/>
                 </a:solidFill>
@@ -16928,13 +17221,16 @@
                 <a:ea typeface="Aptos" pitchFamily="34" charset="-122"/>
                 <a:cs typeface="Aptos" pitchFamily="34" charset="-120"/>
               </a:rPr>
-              <a:t>A model may find that people who receive a service have better outcomes, but that pattern.</a:t>
-            </a:r>
-            <a:endParaRPr lang="en-US" sz="1380" dirty="0"/>
-          </a:p>
-          <a:p>
-            <a:r>
-              <a:rPr lang="en-US" sz="1380" dirty="0">
+              <a:t>A model may find that people who receive a service have better.</a:t>
+            </a:r>
+            <a:endParaRPr lang="en-US" sz="1220" dirty="0"/>
+          </a:p>
+          <a:p>
+            <a:pPr indent="0" marL="0">
+              <a:buNone/>
+            </a:pPr>
+            <a:r>
+              <a:rPr lang="en-US" sz="1220" dirty="0">
                 <a:solidFill>
                   <a:srgbClr val="17364A"/>
                 </a:solidFill>
@@ -16942,9 +17238,9 @@
                 <a:ea typeface="Aptos" pitchFamily="34" charset="-122"/>
                 <a:cs typeface="Aptos" pitchFamily="34" charset="-120"/>
               </a:rPr>
-              <a:t>Public health decisions often involve resource allocation, program design, policy.</a:t>
-            </a:r>
-            <a:endParaRPr lang="en-US" sz="1380" dirty="0"/>
+              <a:t>Public health decisions often involve resource allocation, program.</a:t>
+            </a:r>
+            <a:endParaRPr lang="en-US" sz="1220" dirty="0"/>
           </a:p>
         </p:txBody>
       </p:sp>
@@ -17022,17 +17318,17 @@
         </p:nvSpPr>
         <p:spPr>
           <a:xfrm>
-            <a:off x="7799832" y="5001768"/>
-            <a:ext cx="3145536" cy="502920"/>
-          </a:xfrm>
-          <a:prstGeom prst="rect">
-            <a:avLst/>
-          </a:prstGeom>
-          <a:noFill/>
-          <a:ln/>
-        </p:spPr>
-        <p:txBody>
-          <a:bodyPr wrap="square" lIns="0" tIns="0" rIns="0" bIns="0" rtlCol="0" anchor="t">
+            <a:off x="7799832" y="4974336"/>
+            <a:ext cx="3145536" cy="576072"/>
+          </a:xfrm>
+          <a:prstGeom prst="rect">
+            <a:avLst/>
+          </a:prstGeom>
+          <a:noFill/>
+          <a:ln/>
+        </p:spPr>
+        <p:txBody>
+          <a:bodyPr wrap="square" lIns="254" tIns="254" rIns="254" bIns="254" rtlCol="0" anchor="t">
             <a:normAutofit/>
           </a:bodyPr>
           <a:lstStyle/>
@@ -17041,7 +17337,7 @@
               <a:buNone/>
             </a:pPr>
             <a:r>
-              <a:rPr lang="en-US" sz="1550" dirty="0">
+              <a:rPr lang="en-US" sz="1320" dirty="0">
                 <a:solidFill>
                   <a:srgbClr val="17364A"/>
                 </a:solidFill>
@@ -17049,9 +17345,9 @@
                 <a:ea typeface="Aptos" pitchFamily="34" charset="-122"/>
                 <a:cs typeface="Aptos" pitchFamily="34" charset="-120"/>
               </a:rPr>
-              <a:t>Connect the concept to public health purpose, responsible use, required safeguards, documentation, and the next action a department should take.</a:t>
-            </a:r>
-            <a:endParaRPr lang="en-US" sz="1550" dirty="0"/>
+              <a:t>Connect the concept to public health purpose, responsible use, required safeguards, documentation, and the next action a.</a:t>
+            </a:r>
+            <a:endParaRPr lang="en-US" sz="1320" dirty="0"/>
           </a:p>
         </p:txBody>
       </p:sp>

--- a/downloads/presentations/modules/anl-340.pptx
+++ b/downloads/presentations/modules/anl-340.pptx
@@ -3418,11 +3418,11 @@
         <p:spPr>
           <a:xfrm>
             <a:off x="7635240" y="1325880"/>
-            <a:ext cx="3474720" cy="1325880"/>
+            <a:ext cx="3474720" cy="1255471"/>
           </a:xfrm>
           <a:prstGeom prst="roundRect">
             <a:avLst>
-              <a:gd name="adj" fmla="val 8276"/>
+              <a:gd name="adj" fmla="val 8740"/>
             </a:avLst>
           </a:prstGeom>
           <a:solidFill>
@@ -3484,7 +3484,7 @@
         <p:spPr>
           <a:xfrm>
             <a:off x="7799832" y="1801368"/>
-            <a:ext cx="3145536" cy="758952"/>
+            <a:ext cx="3145536" cy="688543"/>
           </a:xfrm>
           <a:prstGeom prst="rect">
             <a:avLst/>
@@ -3524,12 +3524,12 @@
         </p:nvSpPr>
         <p:spPr>
           <a:xfrm>
-            <a:off x="7635240" y="2788920"/>
-            <a:ext cx="3474720" cy="1536192"/>
+            <a:off x="7635240" y="2718511"/>
+            <a:ext cx="3474720" cy="1328623"/>
           </a:xfrm>
           <a:prstGeom prst="roundRect">
             <a:avLst>
-              <a:gd name="adj" fmla="val 7143"/>
+              <a:gd name="adj" fmla="val 8259"/>
             </a:avLst>
           </a:prstGeom>
           <a:solidFill>
@@ -3551,7 +3551,7 @@
         </p:nvSpPr>
         <p:spPr>
           <a:xfrm>
-            <a:off x="7799832" y="2935224"/>
+            <a:off x="7799832" y="2864815"/>
             <a:ext cx="3145536" cy="256032"/>
           </a:xfrm>
           <a:prstGeom prst="rect">
@@ -3590,8 +3590,8 @@
         </p:nvSpPr>
         <p:spPr>
           <a:xfrm>
-            <a:off x="7818120" y="3300984"/>
-            <a:ext cx="3090672" cy="877824"/>
+            <a:off x="7818120" y="3230575"/>
+            <a:ext cx="3090672" cy="670255"/>
           </a:xfrm>
           <a:prstGeom prst="rect">
             <a:avLst/>
@@ -3665,12 +3665,12 @@
         </p:nvSpPr>
         <p:spPr>
           <a:xfrm>
-            <a:off x="7635240" y="4498848"/>
-            <a:ext cx="3474720" cy="1143000"/>
+            <a:off x="7635240" y="4184294"/>
+            <a:ext cx="3474720" cy="1466698"/>
           </a:xfrm>
           <a:prstGeom prst="roundRect">
             <a:avLst>
-              <a:gd name="adj" fmla="val 9600"/>
+              <a:gd name="adj" fmla="val 7481"/>
             </a:avLst>
           </a:prstGeom>
           <a:solidFill>
@@ -3692,7 +3692,7 @@
         </p:nvSpPr>
         <p:spPr>
           <a:xfrm>
-            <a:off x="7799832" y="4645152"/>
+            <a:off x="7799832" y="4330598"/>
             <a:ext cx="3145536" cy="256032"/>
           </a:xfrm>
           <a:prstGeom prst="rect">
@@ -3731,8 +3731,8 @@
         </p:nvSpPr>
         <p:spPr>
           <a:xfrm>
-            <a:off x="7799832" y="4974336"/>
-            <a:ext cx="3145536" cy="576072"/>
+            <a:off x="7799832" y="4659782"/>
+            <a:ext cx="3145536" cy="899770"/>
           </a:xfrm>
           <a:prstGeom prst="rect">
             <a:avLst/>
@@ -3758,7 +3758,7 @@
                 <a:ea typeface="Aptos" pitchFamily="34" charset="-122"/>
                 <a:cs typeface="Aptos" pitchFamily="34" charset="-120"/>
               </a:rPr>
-              <a:t>Connect the concept to public health purpose, responsible use, required safeguards, documentation, and the next action a.</a:t>
+              <a:t>Connect the concept to public health purpose, responsible use, required safeguards, documentation, and the next action a department should take.</a:t>
             </a:r>
             <a:endParaRPr lang="en-US" sz="1320" dirty="0"/>
           </a:p>
@@ -4127,11 +4127,11 @@
         <p:spPr>
           <a:xfrm>
             <a:off x="7635240" y="1325880"/>
-            <a:ext cx="3474720" cy="1325880"/>
+            <a:ext cx="3474720" cy="1207008"/>
           </a:xfrm>
           <a:prstGeom prst="roundRect">
             <a:avLst>
-              <a:gd name="adj" fmla="val 8276"/>
+              <a:gd name="adj" fmla="val 9091"/>
             </a:avLst>
           </a:prstGeom>
           <a:solidFill>
@@ -4193,7 +4193,7 @@
         <p:spPr>
           <a:xfrm>
             <a:off x="7799832" y="1801368"/>
-            <a:ext cx="3145536" cy="758952"/>
+            <a:ext cx="3145536" cy="640080"/>
           </a:xfrm>
           <a:prstGeom prst="rect">
             <a:avLst/>
@@ -4233,12 +4233,12 @@
         </p:nvSpPr>
         <p:spPr>
           <a:xfrm>
-            <a:off x="7635240" y="2788920"/>
-            <a:ext cx="3474720" cy="1536192"/>
+            <a:off x="7635240" y="2670048"/>
+            <a:ext cx="3474720" cy="1377086"/>
           </a:xfrm>
           <a:prstGeom prst="roundRect">
             <a:avLst>
-              <a:gd name="adj" fmla="val 7143"/>
+              <a:gd name="adj" fmla="val 7968"/>
             </a:avLst>
           </a:prstGeom>
           <a:solidFill>
@@ -4260,7 +4260,7 @@
         </p:nvSpPr>
         <p:spPr>
           <a:xfrm>
-            <a:off x="7799832" y="2935224"/>
+            <a:off x="7799832" y="2816352"/>
             <a:ext cx="3145536" cy="256032"/>
           </a:xfrm>
           <a:prstGeom prst="rect">
@@ -4299,8 +4299,8 @@
         </p:nvSpPr>
         <p:spPr>
           <a:xfrm>
-            <a:off x="7818120" y="3300984"/>
-            <a:ext cx="3090672" cy="877824"/>
+            <a:off x="7818120" y="3182112"/>
+            <a:ext cx="3090672" cy="718718"/>
           </a:xfrm>
           <a:prstGeom prst="rect">
             <a:avLst/>
@@ -4374,12 +4374,12 @@
         </p:nvSpPr>
         <p:spPr>
           <a:xfrm>
-            <a:off x="7635240" y="4498848"/>
-            <a:ext cx="3474720" cy="1143000"/>
+            <a:off x="7635240" y="4184294"/>
+            <a:ext cx="3474720" cy="1466698"/>
           </a:xfrm>
           <a:prstGeom prst="roundRect">
             <a:avLst>
-              <a:gd name="adj" fmla="val 9600"/>
+              <a:gd name="adj" fmla="val 7481"/>
             </a:avLst>
           </a:prstGeom>
           <a:solidFill>
@@ -4401,7 +4401,7 @@
         </p:nvSpPr>
         <p:spPr>
           <a:xfrm>
-            <a:off x="7799832" y="4645152"/>
+            <a:off x="7799832" y="4330598"/>
             <a:ext cx="3145536" cy="256032"/>
           </a:xfrm>
           <a:prstGeom prst="rect">
@@ -4440,8 +4440,8 @@
         </p:nvSpPr>
         <p:spPr>
           <a:xfrm>
-            <a:off x="7799832" y="4974336"/>
-            <a:ext cx="3145536" cy="576072"/>
+            <a:off x="7799832" y="4659782"/>
+            <a:ext cx="3145536" cy="899770"/>
           </a:xfrm>
           <a:prstGeom prst="rect">
             <a:avLst/>
@@ -4467,7 +4467,7 @@
                 <a:ea typeface="Aptos" pitchFamily="34" charset="-122"/>
                 <a:cs typeface="Aptos" pitchFamily="34" charset="-120"/>
               </a:rPr>
-              <a:t>Connect the concept to public health purpose, responsible use, required safeguards, documentation, and the next action a.</a:t>
+              <a:t>Connect the concept to public health purpose, responsible use, required safeguards, documentation, and the next action a department should take.</a:t>
             </a:r>
             <a:endParaRPr lang="en-US" sz="1320" dirty="0"/>
           </a:p>
@@ -4836,11 +4836,11 @@
         <p:spPr>
           <a:xfrm>
             <a:off x="7635240" y="1325880"/>
-            <a:ext cx="3474720" cy="1325880"/>
+            <a:ext cx="3474720" cy="1207008"/>
           </a:xfrm>
           <a:prstGeom prst="roundRect">
             <a:avLst>
-              <a:gd name="adj" fmla="val 8276"/>
+              <a:gd name="adj" fmla="val 9091"/>
             </a:avLst>
           </a:prstGeom>
           <a:solidFill>
@@ -4902,7 +4902,7 @@
         <p:spPr>
           <a:xfrm>
             <a:off x="7799832" y="1801368"/>
-            <a:ext cx="3145536" cy="758952"/>
+            <a:ext cx="3145536" cy="640080"/>
           </a:xfrm>
           <a:prstGeom prst="rect">
             <a:avLst/>
@@ -4942,7 +4942,7 @@
         </p:nvSpPr>
         <p:spPr>
           <a:xfrm>
-            <a:off x="7635240" y="2788920"/>
+            <a:off x="7635240" y="2670048"/>
             <a:ext cx="3474720" cy="1536192"/>
           </a:xfrm>
           <a:prstGeom prst="roundRect">
@@ -4969,8 +4969,8 @@
         </p:nvSpPr>
         <p:spPr>
           <a:xfrm>
-            <a:off x="7799832" y="2935224"/>
-            <a:ext cx="3145536" cy="256032"/>
+            <a:off x="7799832" y="2798064"/>
+            <a:ext cx="3145536" cy="237744"/>
           </a:xfrm>
           <a:prstGeom prst="rect">
             <a:avLst/>
@@ -4986,7 +4986,7 @@
               <a:buNone/>
             </a:pPr>
             <a:r>
-              <a:rPr lang="en-US" sz="1300" b="1" dirty="0">
+              <a:rPr lang="en-US" sz="1250" b="1" dirty="0">
                 <a:solidFill>
                   <a:srgbClr val="0068B7"/>
                 </a:solidFill>
@@ -4994,101 +4994,317 @@
                 <a:ea typeface="Aptos" pitchFamily="34" charset="-122"/>
                 <a:cs typeface="Aptos" pitchFamily="34" charset="-120"/>
               </a:rPr>
-              <a:t>Concept checkpoints</a:t>
-            </a:r>
-            <a:endParaRPr lang="en-US" sz="1300" dirty="0"/>
-          </a:p>
-        </p:txBody>
-      </p:sp>
-      <p:sp>
-        <p:nvSpPr>
-          <p:cNvPr id="15" name="Text 13"/>
-          <p:cNvSpPr/>
-          <p:nvPr/>
-        </p:nvSpPr>
-        <p:spPr>
-          <a:xfrm>
-            <a:off x="7818120" y="3300984"/>
-            <a:ext cx="3090672" cy="877824"/>
-          </a:xfrm>
-          <a:prstGeom prst="rect">
-            <a:avLst/>
-          </a:prstGeom>
-          <a:noFill/>
-          <a:ln/>
-        </p:spPr>
-        <p:txBody>
-          <a:bodyPr wrap="square" lIns="508" tIns="508" rIns="508" bIns="508" rtlCol="0" anchor="t">
+              <a:t>Risk control loop</a:t>
+            </a:r>
+            <a:endParaRPr lang="en-US" sz="1250" dirty="0"/>
+          </a:p>
+        </p:txBody>
+      </p:sp>
+      <p:sp>
+        <p:nvSpPr>
+          <p:cNvPr id="15" name="Shape 13"/>
+          <p:cNvSpPr/>
+          <p:nvPr/>
+        </p:nvSpPr>
+        <p:spPr>
+          <a:xfrm>
+            <a:off x="8763000" y="3351276"/>
+            <a:ext cx="164592" cy="0"/>
+          </a:xfrm>
+          <a:prstGeom prst="line">
+            <a:avLst/>
+          </a:prstGeom>
+          <a:noFill/>
+          <a:ln w="15240">
+            <a:solidFill>
+              <a:srgbClr val="8ABBD8"/>
+            </a:solidFill>
+            <a:prstDash val="solid"/>
+          </a:ln>
+        </p:spPr>
+      </p:sp>
+      <p:sp>
+        <p:nvSpPr>
+          <p:cNvPr id="16" name="Shape 14"/>
+          <p:cNvSpPr/>
+          <p:nvPr/>
+        </p:nvSpPr>
+        <p:spPr>
+          <a:xfrm>
+            <a:off x="7872984" y="3200400"/>
+            <a:ext cx="890016" cy="301752"/>
+          </a:xfrm>
+          <a:prstGeom prst="roundRect">
+            <a:avLst>
+              <a:gd name="adj" fmla="val 24242"/>
+            </a:avLst>
+          </a:prstGeom>
+          <a:solidFill>
+            <a:srgbClr val="0068B7"/>
+          </a:solidFill>
+          <a:ln w="12700">
+            <a:solidFill>
+              <a:srgbClr val="0068B7"/>
+            </a:solidFill>
+            <a:prstDash val="solid"/>
+          </a:ln>
+        </p:spPr>
+      </p:sp>
+      <p:sp>
+        <p:nvSpPr>
+          <p:cNvPr id="17" name="Text 15"/>
+          <p:cNvSpPr/>
+          <p:nvPr/>
+        </p:nvSpPr>
+        <p:spPr>
+          <a:xfrm>
+            <a:off x="7909560" y="3273552"/>
+            <a:ext cx="816864" cy="146304"/>
+          </a:xfrm>
+          <a:prstGeom prst="rect">
+            <a:avLst/>
+          </a:prstGeom>
+          <a:noFill/>
+          <a:ln/>
+        </p:spPr>
+        <p:txBody>
+          <a:bodyPr wrap="square" lIns="0" tIns="0" rIns="0" bIns="0" rtlCol="0" anchor="ctr">
             <a:normAutofit/>
           </a:bodyPr>
           <a:lstStyle/>
           <a:p>
-            <a:pPr indent="0" marL="0">
-              <a:buNone/>
-            </a:pPr>
-            <a:r>
-              <a:rPr lang="en-US" sz="1220" dirty="0">
-                <a:solidFill>
-                  <a:srgbClr val="17364A"/>
-                </a:solidFill>
-                <a:latin typeface="Aptos" pitchFamily="34" charset="0"/>
-                <a:ea typeface="Aptos" pitchFamily="34" charset="-122"/>
-                <a:cs typeface="Aptos" pitchFamily="34" charset="-120"/>
-              </a:rPr>
-              <a:t>A dashboard or AI report may state that a program reduced disease,.</a:t>
-            </a:r>
-            <a:endParaRPr lang="en-US" sz="1220" dirty="0"/>
-          </a:p>
-          <a:p>
-            <a:pPr indent="0" marL="0">
-              <a:buNone/>
-            </a:pPr>
-            <a:r>
-              <a:rPr lang="en-US" sz="1220" dirty="0">
-                <a:solidFill>
-                  <a:srgbClr val="17364A"/>
-                </a:solidFill>
-                <a:latin typeface="Aptos" pitchFamily="34" charset="0"/>
-                <a:ea typeface="Aptos" pitchFamily="34" charset="-122"/>
-                <a:cs typeface="Aptos" pitchFamily="34" charset="-120"/>
-              </a:rPr>
-              <a:t>A guardrail is to require causal language review before results.</a:t>
-            </a:r>
-            <a:endParaRPr lang="en-US" sz="1220" dirty="0"/>
-          </a:p>
-          <a:p>
-            <a:pPr indent="0" marL="0">
-              <a:buNone/>
-            </a:pPr>
-            <a:r>
-              <a:rPr lang="en-US" sz="1220" dirty="0">
-                <a:solidFill>
-                  <a:srgbClr val="17364A"/>
-                </a:solidFill>
-                <a:latin typeface="Aptos" pitchFamily="34" charset="0"/>
-                <a:ea typeface="Aptos" pitchFamily="34" charset="-122"/>
-                <a:cs typeface="Aptos" pitchFamily="34" charset="-120"/>
-              </a:rPr>
-              <a:t>Another risk is inequitable inference.</a:t>
-            </a:r>
-            <a:endParaRPr lang="en-US" sz="1220" dirty="0"/>
-          </a:p>
-        </p:txBody>
-      </p:sp>
-      <p:sp>
-        <p:nvSpPr>
-          <p:cNvPr id="16" name="Shape 14"/>
-          <p:cNvSpPr/>
-          <p:nvPr/>
-        </p:nvSpPr>
-        <p:spPr>
-          <a:xfrm>
-            <a:off x="7635240" y="4498848"/>
-            <a:ext cx="3474720" cy="1143000"/>
+            <a:pPr algn="ctr" indent="0" marL="0">
+              <a:buNone/>
+            </a:pPr>
+            <a:r>
+              <a:rPr lang="en-US" sz="880" b="1" dirty="0">
+                <a:solidFill>
+                  <a:srgbClr val="FFFFFF"/>
+                </a:solidFill>
+                <a:latin typeface="Aptos" pitchFamily="34" charset="0"/>
+                <a:ea typeface="Aptos" pitchFamily="34" charset="-122"/>
+                <a:cs typeface="Aptos" pitchFamily="34" charset="-120"/>
+              </a:rPr>
+              <a:t>Identify</a:t>
+            </a:r>
+            <a:endParaRPr lang="en-US" sz="880" dirty="0"/>
+          </a:p>
+        </p:txBody>
+      </p:sp>
+      <p:sp>
+        <p:nvSpPr>
+          <p:cNvPr id="18" name="Shape 16"/>
+          <p:cNvSpPr/>
+          <p:nvPr/>
+        </p:nvSpPr>
+        <p:spPr>
+          <a:xfrm>
+            <a:off x="9817608" y="3351276"/>
+            <a:ext cx="164592" cy="0"/>
+          </a:xfrm>
+          <a:prstGeom prst="line">
+            <a:avLst/>
+          </a:prstGeom>
+          <a:noFill/>
+          <a:ln w="15240">
+            <a:solidFill>
+              <a:srgbClr val="8ABBD8"/>
+            </a:solidFill>
+            <a:prstDash val="solid"/>
+          </a:ln>
+        </p:spPr>
+      </p:sp>
+      <p:sp>
+        <p:nvSpPr>
+          <p:cNvPr id="19" name="Shape 17"/>
+          <p:cNvSpPr/>
+          <p:nvPr/>
+        </p:nvSpPr>
+        <p:spPr>
+          <a:xfrm>
+            <a:off x="8927592" y="3200400"/>
+            <a:ext cx="890016" cy="301752"/>
           </a:xfrm>
           <a:prstGeom prst="roundRect">
             <a:avLst>
-              <a:gd name="adj" fmla="val 9600"/>
+              <a:gd name="adj" fmla="val 24242"/>
+            </a:avLst>
+          </a:prstGeom>
+          <a:solidFill>
+            <a:srgbClr val="2F8A28"/>
+          </a:solidFill>
+          <a:ln w="12700">
+            <a:solidFill>
+              <a:srgbClr val="2F8A28"/>
+            </a:solidFill>
+            <a:prstDash val="solid"/>
+          </a:ln>
+        </p:spPr>
+      </p:sp>
+      <p:sp>
+        <p:nvSpPr>
+          <p:cNvPr id="20" name="Text 18"/>
+          <p:cNvSpPr/>
+          <p:nvPr/>
+        </p:nvSpPr>
+        <p:spPr>
+          <a:xfrm>
+            <a:off x="8964168" y="3273552"/>
+            <a:ext cx="816864" cy="146304"/>
+          </a:xfrm>
+          <a:prstGeom prst="rect">
+            <a:avLst/>
+          </a:prstGeom>
+          <a:noFill/>
+          <a:ln/>
+        </p:spPr>
+        <p:txBody>
+          <a:bodyPr wrap="square" lIns="0" tIns="0" rIns="0" bIns="0" rtlCol="0" anchor="ctr">
+            <a:normAutofit/>
+          </a:bodyPr>
+          <a:lstStyle/>
+          <a:p>
+            <a:pPr algn="ctr" indent="0" marL="0">
+              <a:buNone/>
+            </a:pPr>
+            <a:r>
+              <a:rPr lang="en-US" sz="880" b="1" dirty="0">
+                <a:solidFill>
+                  <a:srgbClr val="FFFFFF"/>
+                </a:solidFill>
+                <a:latin typeface="Aptos" pitchFamily="34" charset="0"/>
+                <a:ea typeface="Aptos" pitchFamily="34" charset="-122"/>
+                <a:cs typeface="Aptos" pitchFamily="34" charset="-120"/>
+              </a:rPr>
+              <a:t>Control</a:t>
+            </a:r>
+            <a:endParaRPr lang="en-US" sz="880" dirty="0"/>
+          </a:p>
+        </p:txBody>
+      </p:sp>
+      <p:sp>
+        <p:nvSpPr>
+          <p:cNvPr id="21" name="Shape 19"/>
+          <p:cNvSpPr/>
+          <p:nvPr/>
+        </p:nvSpPr>
+        <p:spPr>
+          <a:xfrm>
+            <a:off x="9982200" y="3200400"/>
+            <a:ext cx="890016" cy="301752"/>
+          </a:xfrm>
+          <a:prstGeom prst="roundRect">
+            <a:avLst>
+              <a:gd name="adj" fmla="val 24242"/>
+            </a:avLst>
+          </a:prstGeom>
+          <a:solidFill>
+            <a:srgbClr val="6A4CA3"/>
+          </a:solidFill>
+          <a:ln w="12700">
+            <a:solidFill>
+              <a:srgbClr val="6A4CA3"/>
+            </a:solidFill>
+            <a:prstDash val="solid"/>
+          </a:ln>
+        </p:spPr>
+      </p:sp>
+      <p:sp>
+        <p:nvSpPr>
+          <p:cNvPr id="22" name="Text 20"/>
+          <p:cNvSpPr/>
+          <p:nvPr/>
+        </p:nvSpPr>
+        <p:spPr>
+          <a:xfrm>
+            <a:off x="10018776" y="3273552"/>
+            <a:ext cx="816864" cy="146304"/>
+          </a:xfrm>
+          <a:prstGeom prst="rect">
+            <a:avLst/>
+          </a:prstGeom>
+          <a:noFill/>
+          <a:ln/>
+        </p:spPr>
+        <p:txBody>
+          <a:bodyPr wrap="square" lIns="0" tIns="0" rIns="0" bIns="0" rtlCol="0" anchor="ctr">
+            <a:normAutofit/>
+          </a:bodyPr>
+          <a:lstStyle/>
+          <a:p>
+            <a:pPr algn="ctr" indent="0" marL="0">
+              <a:buNone/>
+            </a:pPr>
+            <a:r>
+              <a:rPr lang="en-US" sz="880" b="1" dirty="0">
+                <a:solidFill>
+                  <a:srgbClr val="FFFFFF"/>
+                </a:solidFill>
+                <a:latin typeface="Aptos" pitchFamily="34" charset="0"/>
+                <a:ea typeface="Aptos" pitchFamily="34" charset="-122"/>
+                <a:cs typeface="Aptos" pitchFamily="34" charset="-120"/>
+              </a:rPr>
+              <a:t>Monitor</a:t>
+            </a:r>
+            <a:endParaRPr lang="en-US" sz="880" dirty="0"/>
+          </a:p>
+        </p:txBody>
+      </p:sp>
+      <p:sp>
+        <p:nvSpPr>
+          <p:cNvPr id="23" name="Text 21"/>
+          <p:cNvSpPr/>
+          <p:nvPr/>
+        </p:nvSpPr>
+        <p:spPr>
+          <a:xfrm>
+            <a:off x="7854696" y="3694176"/>
+            <a:ext cx="3035808" cy="365760"/>
+          </a:xfrm>
+          <a:prstGeom prst="rect">
+            <a:avLst/>
+          </a:prstGeom>
+          <a:noFill/>
+          <a:ln/>
+        </p:spPr>
+        <p:txBody>
+          <a:bodyPr wrap="square" lIns="254" tIns="254" rIns="254" bIns="254" rtlCol="0" anchor="t">
+            <a:normAutofit/>
+          </a:bodyPr>
+          <a:lstStyle/>
+          <a:p>
+            <a:pPr indent="0" marL="0">
+              <a:buNone/>
+            </a:pPr>
+            <a:r>
+              <a:rPr lang="en-US" sz="1120" dirty="0">
+                <a:solidFill>
+                  <a:srgbClr val="17364A"/>
+                </a:solidFill>
+                <a:latin typeface="Aptos" pitchFamily="34" charset="0"/>
+                <a:ea typeface="Aptos" pitchFamily="34" charset="-122"/>
+                <a:cs typeface="Aptos" pitchFamily="34" charset="-120"/>
+              </a:rPr>
+              <a:t>Responsible use depends on finding risks early, applying safeguards, and watching for drift or harm over time.</a:t>
+            </a:r>
+            <a:endParaRPr lang="en-US" sz="1120" dirty="0"/>
+          </a:p>
+        </p:txBody>
+      </p:sp>
+      <p:sp>
+        <p:nvSpPr>
+          <p:cNvPr id="24" name="Shape 22"/>
+          <p:cNvSpPr/>
+          <p:nvPr/>
+        </p:nvSpPr>
+        <p:spPr>
+          <a:xfrm>
+            <a:off x="7635240" y="4343400"/>
+            <a:ext cx="3474720" cy="1255471"/>
+          </a:xfrm>
+          <a:prstGeom prst="roundRect">
+            <a:avLst>
+              <a:gd name="adj" fmla="val 8740"/>
             </a:avLst>
           </a:prstGeom>
           <a:solidFill>
@@ -5104,13 +5320,13 @@
       </p:sp>
       <p:sp>
         <p:nvSpPr>
-          <p:cNvPr id="17" name="Text 15"/>
-          <p:cNvSpPr/>
-          <p:nvPr/>
-        </p:nvSpPr>
-        <p:spPr>
-          <a:xfrm>
-            <a:off x="7799832" y="4645152"/>
+          <p:cNvPr id="25" name="Text 23"/>
+          <p:cNvSpPr/>
+          <p:nvPr/>
+        </p:nvSpPr>
+        <p:spPr>
+          <a:xfrm>
+            <a:off x="7799832" y="4489704"/>
             <a:ext cx="3145536" cy="256032"/>
           </a:xfrm>
           <a:prstGeom prst="rect">
@@ -5143,14 +5359,14 @@
       </p:sp>
       <p:sp>
         <p:nvSpPr>
-          <p:cNvPr id="18" name="Text 16"/>
-          <p:cNvSpPr/>
-          <p:nvPr/>
-        </p:nvSpPr>
-        <p:spPr>
-          <a:xfrm>
-            <a:off x="7799832" y="4974336"/>
-            <a:ext cx="3145536" cy="576072"/>
+          <p:cNvPr id="26" name="Text 24"/>
+          <p:cNvSpPr/>
+          <p:nvPr/>
+        </p:nvSpPr>
+        <p:spPr>
+          <a:xfrm>
+            <a:off x="7799832" y="4818888"/>
+            <a:ext cx="3145536" cy="688543"/>
           </a:xfrm>
           <a:prstGeom prst="rect">
             <a:avLst/>
@@ -5176,7 +5392,7 @@
                 <a:ea typeface="Aptos" pitchFamily="34" charset="-122"/>
                 <a:cs typeface="Aptos" pitchFamily="34" charset="-120"/>
               </a:rPr>
-              <a:t>Identify what could go wrong, who could be affected, what safeguards are needed, and what evidence should be reviewed.</a:t>
+              <a:t>Identify what could go wrong, who could be affected, what safeguards are needed, and what evidence should be reviewed before use.</a:t>
             </a:r>
             <a:endParaRPr lang="en-US" sz="1320" dirty="0"/>
           </a:p>
@@ -5545,11 +5761,11 @@
         <p:spPr>
           <a:xfrm>
             <a:off x="7635240" y="1325880"/>
-            <a:ext cx="3474720" cy="1325880"/>
+            <a:ext cx="3474720" cy="1255471"/>
           </a:xfrm>
           <a:prstGeom prst="roundRect">
             <a:avLst>
-              <a:gd name="adj" fmla="val 8276"/>
+              <a:gd name="adj" fmla="val 8740"/>
             </a:avLst>
           </a:prstGeom>
           <a:solidFill>
@@ -5611,7 +5827,7 @@
         <p:spPr>
           <a:xfrm>
             <a:off x="7799832" y="1801368"/>
-            <a:ext cx="3145536" cy="758952"/>
+            <a:ext cx="3145536" cy="688543"/>
           </a:xfrm>
           <a:prstGeom prst="rect">
             <a:avLst/>
@@ -5651,12 +5867,12 @@
         </p:nvSpPr>
         <p:spPr>
           <a:xfrm>
-            <a:off x="7635240" y="2788920"/>
-            <a:ext cx="3474720" cy="1536192"/>
+            <a:off x="7635240" y="2718511"/>
+            <a:ext cx="3474720" cy="1328623"/>
           </a:xfrm>
           <a:prstGeom prst="roundRect">
             <a:avLst>
-              <a:gd name="adj" fmla="val 7143"/>
+              <a:gd name="adj" fmla="val 8259"/>
             </a:avLst>
           </a:prstGeom>
           <a:solidFill>
@@ -5678,8 +5894,8 @@
         </p:nvSpPr>
         <p:spPr>
           <a:xfrm>
-            <a:off x="7799832" y="2935224"/>
-            <a:ext cx="3145536" cy="256032"/>
+            <a:off x="7799832" y="2846527"/>
+            <a:ext cx="3145536" cy="237744"/>
           </a:xfrm>
           <a:prstGeom prst="rect">
             <a:avLst/>
@@ -5695,7 +5911,7 @@
               <a:buNone/>
             </a:pPr>
             <a:r>
-              <a:rPr lang="en-US" sz="1300" b="1" dirty="0">
+              <a:rPr lang="en-US" sz="1250" b="1" dirty="0">
                 <a:solidFill>
                   <a:srgbClr val="0068B7"/>
                 </a:solidFill>
@@ -5703,101 +5919,317 @@
                 <a:ea typeface="Aptos" pitchFamily="34" charset="-122"/>
                 <a:cs typeface="Aptos" pitchFamily="34" charset="-120"/>
               </a:rPr>
-              <a:t>Concept checkpoints</a:t>
-            </a:r>
-            <a:endParaRPr lang="en-US" sz="1300" dirty="0"/>
-          </a:p>
-        </p:txBody>
-      </p:sp>
-      <p:sp>
-        <p:nvSpPr>
-          <p:cNvPr id="15" name="Text 13"/>
-          <p:cNvSpPr/>
-          <p:nvPr/>
-        </p:nvSpPr>
-        <p:spPr>
-          <a:xfrm>
-            <a:off x="7818120" y="3300984"/>
-            <a:ext cx="3090672" cy="877824"/>
-          </a:xfrm>
-          <a:prstGeom prst="rect">
-            <a:avLst/>
-          </a:prstGeom>
-          <a:noFill/>
-          <a:ln/>
-        </p:spPr>
-        <p:txBody>
-          <a:bodyPr wrap="square" lIns="508" tIns="508" rIns="508" bIns="508" rtlCol="0" anchor="t">
+              <a:t>Implementation path</a:t>
+            </a:r>
+            <a:endParaRPr lang="en-US" sz="1250" dirty="0"/>
+          </a:p>
+        </p:txBody>
+      </p:sp>
+      <p:sp>
+        <p:nvSpPr>
+          <p:cNvPr id="15" name="Shape 13"/>
+          <p:cNvSpPr/>
+          <p:nvPr/>
+        </p:nvSpPr>
+        <p:spPr>
+          <a:xfrm>
+            <a:off x="8763000" y="3399739"/>
+            <a:ext cx="164592" cy="0"/>
+          </a:xfrm>
+          <a:prstGeom prst="line">
+            <a:avLst/>
+          </a:prstGeom>
+          <a:noFill/>
+          <a:ln w="15240">
+            <a:solidFill>
+              <a:srgbClr val="8ABBD8"/>
+            </a:solidFill>
+            <a:prstDash val="solid"/>
+          </a:ln>
+        </p:spPr>
+      </p:sp>
+      <p:sp>
+        <p:nvSpPr>
+          <p:cNvPr id="16" name="Shape 14"/>
+          <p:cNvSpPr/>
+          <p:nvPr/>
+        </p:nvSpPr>
+        <p:spPr>
+          <a:xfrm>
+            <a:off x="7872984" y="3248863"/>
+            <a:ext cx="890016" cy="301752"/>
+          </a:xfrm>
+          <a:prstGeom prst="roundRect">
+            <a:avLst>
+              <a:gd name="adj" fmla="val 24242"/>
+            </a:avLst>
+          </a:prstGeom>
+          <a:solidFill>
+            <a:srgbClr val="0068B7"/>
+          </a:solidFill>
+          <a:ln w="12700">
+            <a:solidFill>
+              <a:srgbClr val="0068B7"/>
+            </a:solidFill>
+            <a:prstDash val="solid"/>
+          </a:ln>
+        </p:spPr>
+      </p:sp>
+      <p:sp>
+        <p:nvSpPr>
+          <p:cNvPr id="17" name="Text 15"/>
+          <p:cNvSpPr/>
+          <p:nvPr/>
+        </p:nvSpPr>
+        <p:spPr>
+          <a:xfrm>
+            <a:off x="7909560" y="3322015"/>
+            <a:ext cx="816864" cy="146304"/>
+          </a:xfrm>
+          <a:prstGeom prst="rect">
+            <a:avLst/>
+          </a:prstGeom>
+          <a:noFill/>
+          <a:ln/>
+        </p:spPr>
+        <p:txBody>
+          <a:bodyPr wrap="square" lIns="0" tIns="0" rIns="0" bIns="0" rtlCol="0" anchor="ctr">
             <a:normAutofit/>
           </a:bodyPr>
           <a:lstStyle/>
           <a:p>
-            <a:pPr indent="0" marL="0">
-              <a:buNone/>
-            </a:pPr>
-            <a:r>
-              <a:rPr lang="en-US" sz="1220" dirty="0">
-                <a:solidFill>
-                  <a:srgbClr val="17364A"/>
-                </a:solidFill>
-                <a:latin typeface="Aptos" pitchFamily="34" charset="0"/>
-                <a:ea typeface="Aptos" pitchFamily="34" charset="-122"/>
-                <a:cs typeface="Aptos" pitchFamily="34" charset="-120"/>
-              </a:rPr>
-              <a:t>Predictive models can identify risk, but causal inference is.</a:t>
-            </a:r>
-            <a:endParaRPr lang="en-US" sz="1220" dirty="0"/>
-          </a:p>
-          <a:p>
-            <a:pPr indent="0" marL="0">
-              <a:buNone/>
-            </a:pPr>
-            <a:r>
-              <a:rPr lang="en-US" sz="1220" dirty="0">
-                <a:solidFill>
-                  <a:srgbClr val="17364A"/>
-                </a:solidFill>
-                <a:latin typeface="Aptos" pitchFamily="34" charset="0"/>
-                <a:ea typeface="Aptos" pitchFamily="34" charset="-122"/>
-                <a:cs typeface="Aptos" pitchFamily="34" charset="-120"/>
-              </a:rPr>
-              <a:t>Generative AI may help draft evaluation questions or summarize.</a:t>
-            </a:r>
-            <a:endParaRPr lang="en-US" sz="1220" dirty="0"/>
-          </a:p>
-          <a:p>
-            <a:pPr indent="0" marL="0">
-              <a:buNone/>
-            </a:pPr>
-            <a:r>
-              <a:rPr lang="en-US" sz="1220" dirty="0">
-                <a:solidFill>
-                  <a:srgbClr val="17364A"/>
-                </a:solidFill>
-                <a:latin typeface="Aptos" pitchFamily="34" charset="0"/>
-                <a:ea typeface="Aptos" pitchFamily="34" charset="-122"/>
-                <a:cs typeface="Aptos" pitchFamily="34" charset="-120"/>
-              </a:rPr>
-              <a:t>AI-supported decision-making should label outputs clearly as.</a:t>
-            </a:r>
-            <a:endParaRPr lang="en-US" sz="1220" dirty="0"/>
-          </a:p>
-        </p:txBody>
-      </p:sp>
-      <p:sp>
-        <p:nvSpPr>
-          <p:cNvPr id="16" name="Shape 14"/>
-          <p:cNvSpPr/>
-          <p:nvPr/>
-        </p:nvSpPr>
-        <p:spPr>
-          <a:xfrm>
-            <a:off x="7635240" y="4498848"/>
-            <a:ext cx="3474720" cy="1143000"/>
+            <a:pPr algn="ctr" indent="0" marL="0">
+              <a:buNone/>
+            </a:pPr>
+            <a:r>
+              <a:rPr lang="en-US" sz="880" b="1" dirty="0">
+                <a:solidFill>
+                  <a:srgbClr val="FFFFFF"/>
+                </a:solidFill>
+                <a:latin typeface="Aptos" pitchFamily="34" charset="0"/>
+                <a:ea typeface="Aptos" pitchFamily="34" charset="-122"/>
+                <a:cs typeface="Aptos" pitchFamily="34" charset="-120"/>
+              </a:rPr>
+              <a:t>Need</a:t>
+            </a:r>
+            <a:endParaRPr lang="en-US" sz="880" dirty="0"/>
+          </a:p>
+        </p:txBody>
+      </p:sp>
+      <p:sp>
+        <p:nvSpPr>
+          <p:cNvPr id="18" name="Shape 16"/>
+          <p:cNvSpPr/>
+          <p:nvPr/>
+        </p:nvSpPr>
+        <p:spPr>
+          <a:xfrm>
+            <a:off x="9817608" y="3399739"/>
+            <a:ext cx="164592" cy="0"/>
+          </a:xfrm>
+          <a:prstGeom prst="line">
+            <a:avLst/>
+          </a:prstGeom>
+          <a:noFill/>
+          <a:ln w="15240">
+            <a:solidFill>
+              <a:srgbClr val="8ABBD8"/>
+            </a:solidFill>
+            <a:prstDash val="solid"/>
+          </a:ln>
+        </p:spPr>
+      </p:sp>
+      <p:sp>
+        <p:nvSpPr>
+          <p:cNvPr id="19" name="Shape 17"/>
+          <p:cNvSpPr/>
+          <p:nvPr/>
+        </p:nvSpPr>
+        <p:spPr>
+          <a:xfrm>
+            <a:off x="8927592" y="3248863"/>
+            <a:ext cx="890016" cy="301752"/>
           </a:xfrm>
           <a:prstGeom prst="roundRect">
             <a:avLst>
-              <a:gd name="adj" fmla="val 9600"/>
+              <a:gd name="adj" fmla="val 24242"/>
+            </a:avLst>
+          </a:prstGeom>
+          <a:solidFill>
+            <a:srgbClr val="2F8A28"/>
+          </a:solidFill>
+          <a:ln w="12700">
+            <a:solidFill>
+              <a:srgbClr val="2F8A28"/>
+            </a:solidFill>
+            <a:prstDash val="solid"/>
+          </a:ln>
+        </p:spPr>
+      </p:sp>
+      <p:sp>
+        <p:nvSpPr>
+          <p:cNvPr id="20" name="Text 18"/>
+          <p:cNvSpPr/>
+          <p:nvPr/>
+        </p:nvSpPr>
+        <p:spPr>
+          <a:xfrm>
+            <a:off x="8964168" y="3322015"/>
+            <a:ext cx="816864" cy="146304"/>
+          </a:xfrm>
+          <a:prstGeom prst="rect">
+            <a:avLst/>
+          </a:prstGeom>
+          <a:noFill/>
+          <a:ln/>
+        </p:spPr>
+        <p:txBody>
+          <a:bodyPr wrap="square" lIns="0" tIns="0" rIns="0" bIns="0" rtlCol="0" anchor="ctr">
+            <a:normAutofit/>
+          </a:bodyPr>
+          <a:lstStyle/>
+          <a:p>
+            <a:pPr algn="ctr" indent="0" marL="0">
+              <a:buNone/>
+            </a:pPr>
+            <a:r>
+              <a:rPr lang="en-US" sz="880" b="1" dirty="0">
+                <a:solidFill>
+                  <a:srgbClr val="FFFFFF"/>
+                </a:solidFill>
+                <a:latin typeface="Aptos" pitchFamily="34" charset="0"/>
+                <a:ea typeface="Aptos" pitchFamily="34" charset="-122"/>
+                <a:cs typeface="Aptos" pitchFamily="34" charset="-120"/>
+              </a:rPr>
+              <a:t>Build</a:t>
+            </a:r>
+            <a:endParaRPr lang="en-US" sz="880" dirty="0"/>
+          </a:p>
+        </p:txBody>
+      </p:sp>
+      <p:sp>
+        <p:nvSpPr>
+          <p:cNvPr id="21" name="Shape 19"/>
+          <p:cNvSpPr/>
+          <p:nvPr/>
+        </p:nvSpPr>
+        <p:spPr>
+          <a:xfrm>
+            <a:off x="9982200" y="3248863"/>
+            <a:ext cx="890016" cy="301752"/>
+          </a:xfrm>
+          <a:prstGeom prst="roundRect">
+            <a:avLst>
+              <a:gd name="adj" fmla="val 24242"/>
+            </a:avLst>
+          </a:prstGeom>
+          <a:solidFill>
+            <a:srgbClr val="6A4CA3"/>
+          </a:solidFill>
+          <a:ln w="12700">
+            <a:solidFill>
+              <a:srgbClr val="6A4CA3"/>
+            </a:solidFill>
+            <a:prstDash val="solid"/>
+          </a:ln>
+        </p:spPr>
+      </p:sp>
+      <p:sp>
+        <p:nvSpPr>
+          <p:cNvPr id="22" name="Text 20"/>
+          <p:cNvSpPr/>
+          <p:nvPr/>
+        </p:nvSpPr>
+        <p:spPr>
+          <a:xfrm>
+            <a:off x="10018776" y="3322015"/>
+            <a:ext cx="816864" cy="146304"/>
+          </a:xfrm>
+          <a:prstGeom prst="rect">
+            <a:avLst/>
+          </a:prstGeom>
+          <a:noFill/>
+          <a:ln/>
+        </p:spPr>
+        <p:txBody>
+          <a:bodyPr wrap="square" lIns="0" tIns="0" rIns="0" bIns="0" rtlCol="0" anchor="ctr">
+            <a:normAutofit/>
+          </a:bodyPr>
+          <a:lstStyle/>
+          <a:p>
+            <a:pPr algn="ctr" indent="0" marL="0">
+              <a:buNone/>
+            </a:pPr>
+            <a:r>
+              <a:rPr lang="en-US" sz="880" b="1" dirty="0">
+                <a:solidFill>
+                  <a:srgbClr val="FFFFFF"/>
+                </a:solidFill>
+                <a:latin typeface="Aptos" pitchFamily="34" charset="0"/>
+                <a:ea typeface="Aptos" pitchFamily="34" charset="-122"/>
+                <a:cs typeface="Aptos" pitchFamily="34" charset="-120"/>
+              </a:rPr>
+              <a:t>Adopt</a:t>
+            </a:r>
+            <a:endParaRPr lang="en-US" sz="880" dirty="0"/>
+          </a:p>
+        </p:txBody>
+      </p:sp>
+      <p:sp>
+        <p:nvSpPr>
+          <p:cNvPr id="23" name="Text 21"/>
+          <p:cNvSpPr/>
+          <p:nvPr/>
+        </p:nvSpPr>
+        <p:spPr>
+          <a:xfrm>
+            <a:off x="7854696" y="3742639"/>
+            <a:ext cx="3035808" cy="158191"/>
+          </a:xfrm>
+          <a:prstGeom prst="rect">
+            <a:avLst/>
+          </a:prstGeom>
+          <a:noFill/>
+          <a:ln/>
+        </p:spPr>
+        <p:txBody>
+          <a:bodyPr wrap="square" lIns="254" tIns="254" rIns="254" bIns="254" rtlCol="0" anchor="t">
+            <a:normAutofit/>
+          </a:bodyPr>
+          <a:lstStyle/>
+          <a:p>
+            <a:pPr indent="0" marL="0">
+              <a:buNone/>
+            </a:pPr>
+            <a:r>
+              <a:rPr lang="en-US" sz="1120" dirty="0">
+                <a:solidFill>
+                  <a:srgbClr val="17364A"/>
+                </a:solidFill>
+                <a:latin typeface="Aptos" pitchFamily="34" charset="0"/>
+                <a:ea typeface="Aptos" pitchFamily="34" charset="-122"/>
+                <a:cs typeface="Aptos" pitchFamily="34" charset="-120"/>
+              </a:rPr>
+              <a:t>Implementation work should make dependencies, approvals, training, and sustainment visible before launch.</a:t>
+            </a:r>
+            <a:endParaRPr lang="en-US" sz="1120" dirty="0"/>
+          </a:p>
+        </p:txBody>
+      </p:sp>
+      <p:sp>
+        <p:nvSpPr>
+          <p:cNvPr id="24" name="Shape 22"/>
+          <p:cNvSpPr/>
+          <p:nvPr/>
+        </p:nvSpPr>
+        <p:spPr>
+          <a:xfrm>
+            <a:off x="7635240" y="4184294"/>
+            <a:ext cx="3474720" cy="1466698"/>
+          </a:xfrm>
+          <a:prstGeom prst="roundRect">
+            <a:avLst>
+              <a:gd name="adj" fmla="val 7481"/>
             </a:avLst>
           </a:prstGeom>
           <a:solidFill>
@@ -5813,13 +6245,13 @@
       </p:sp>
       <p:sp>
         <p:nvSpPr>
-          <p:cNvPr id="17" name="Text 15"/>
-          <p:cNvSpPr/>
-          <p:nvPr/>
-        </p:nvSpPr>
-        <p:spPr>
-          <a:xfrm>
-            <a:off x="7799832" y="4645152"/>
+          <p:cNvPr id="25" name="Text 23"/>
+          <p:cNvSpPr/>
+          <p:nvPr/>
+        </p:nvSpPr>
+        <p:spPr>
+          <a:xfrm>
+            <a:off x="7799832" y="4330598"/>
             <a:ext cx="3145536" cy="256032"/>
           </a:xfrm>
           <a:prstGeom prst="rect">
@@ -5852,14 +6284,14 @@
       </p:sp>
       <p:sp>
         <p:nvSpPr>
-          <p:cNvPr id="18" name="Text 16"/>
-          <p:cNvSpPr/>
-          <p:nvPr/>
-        </p:nvSpPr>
-        <p:spPr>
-          <a:xfrm>
-            <a:off x="7799832" y="4974336"/>
-            <a:ext cx="3145536" cy="576072"/>
+          <p:cNvPr id="26" name="Text 24"/>
+          <p:cNvSpPr/>
+          <p:nvPr/>
+        </p:nvSpPr>
+        <p:spPr>
+          <a:xfrm>
+            <a:off x="7799832" y="4659782"/>
+            <a:ext cx="3145536" cy="899770"/>
           </a:xfrm>
           <a:prstGeom prst="rect">
             <a:avLst/>
@@ -5885,7 +6317,7 @@
                 <a:ea typeface="Aptos" pitchFamily="34" charset="-122"/>
                 <a:cs typeface="Aptos" pitchFamily="34" charset="-120"/>
               </a:rPr>
-              <a:t>Use the concept to clarify workflow changes, dependencies, staffing, procurement requirements, training needs, and.</a:t>
+              <a:t>Use the concept to clarify workflow changes, dependencies, staffing, procurement requirements, training needs, and implementation checkpoints.</a:t>
             </a:r>
             <a:endParaRPr lang="en-US" sz="1320" dirty="0"/>
           </a:p>
@@ -6254,11 +6686,11 @@
         <p:spPr>
           <a:xfrm>
             <a:off x="7635240" y="1325880"/>
-            <a:ext cx="3474720" cy="1325880"/>
+            <a:ext cx="3474720" cy="1207008"/>
           </a:xfrm>
           <a:prstGeom prst="roundRect">
             <a:avLst>
-              <a:gd name="adj" fmla="val 8276"/>
+              <a:gd name="adj" fmla="val 9091"/>
             </a:avLst>
           </a:prstGeom>
           <a:solidFill>
@@ -6320,7 +6752,7 @@
         <p:spPr>
           <a:xfrm>
             <a:off x="7799832" y="1801368"/>
-            <a:ext cx="3145536" cy="758952"/>
+            <a:ext cx="3145536" cy="640080"/>
           </a:xfrm>
           <a:prstGeom prst="rect">
             <a:avLst/>
@@ -6360,12 +6792,12 @@
         </p:nvSpPr>
         <p:spPr>
           <a:xfrm>
-            <a:off x="7635240" y="2788920"/>
-            <a:ext cx="3474720" cy="1536192"/>
+            <a:off x="7635240" y="2670048"/>
+            <a:ext cx="3474720" cy="1377086"/>
           </a:xfrm>
           <a:prstGeom prst="roundRect">
             <a:avLst>
-              <a:gd name="adj" fmla="val 7143"/>
+              <a:gd name="adj" fmla="val 7968"/>
             </a:avLst>
           </a:prstGeom>
           <a:solidFill>
@@ -6387,7 +6819,7 @@
         </p:nvSpPr>
         <p:spPr>
           <a:xfrm>
-            <a:off x="7799832" y="2935224"/>
+            <a:off x="7799832" y="2816352"/>
             <a:ext cx="3145536" cy="256032"/>
           </a:xfrm>
           <a:prstGeom prst="rect">
@@ -6426,8 +6858,8 @@
         </p:nvSpPr>
         <p:spPr>
           <a:xfrm>
-            <a:off x="7818120" y="3300984"/>
-            <a:ext cx="3090672" cy="877824"/>
+            <a:off x="7818120" y="3182112"/>
+            <a:ext cx="3090672" cy="718718"/>
           </a:xfrm>
           <a:prstGeom prst="rect">
             <a:avLst/>
@@ -6501,12 +6933,12 @@
         </p:nvSpPr>
         <p:spPr>
           <a:xfrm>
-            <a:off x="7635240" y="4498848"/>
-            <a:ext cx="3474720" cy="1143000"/>
+            <a:off x="7635240" y="4184294"/>
+            <a:ext cx="3474720" cy="1466698"/>
           </a:xfrm>
           <a:prstGeom prst="roundRect">
             <a:avLst>
-              <a:gd name="adj" fmla="val 9600"/>
+              <a:gd name="adj" fmla="val 7481"/>
             </a:avLst>
           </a:prstGeom>
           <a:solidFill>
@@ -6528,7 +6960,7 @@
         </p:nvSpPr>
         <p:spPr>
           <a:xfrm>
-            <a:off x="7799832" y="4645152"/>
+            <a:off x="7799832" y="4330598"/>
             <a:ext cx="3145536" cy="256032"/>
           </a:xfrm>
           <a:prstGeom prst="rect">
@@ -6567,8 +6999,8 @@
         </p:nvSpPr>
         <p:spPr>
           <a:xfrm>
-            <a:off x="7799832" y="4974336"/>
-            <a:ext cx="3145536" cy="576072"/>
+            <a:off x="7799832" y="4659782"/>
+            <a:ext cx="3145536" cy="899770"/>
           </a:xfrm>
           <a:prstGeom prst="rect">
             <a:avLst/>
@@ -6594,7 +7026,7 @@
                 <a:ea typeface="Aptos" pitchFamily="34" charset="-122"/>
                 <a:cs typeface="Aptos" pitchFamily="34" charset="-120"/>
               </a:rPr>
-              <a:t>Connect the concept to public health purpose, responsible use, required safeguards, documentation, and the next action a.</a:t>
+              <a:t>Connect the concept to public health purpose, responsible use, required safeguards, documentation, and the next action a department should take.</a:t>
             </a:r>
             <a:endParaRPr lang="en-US" sz="1320" dirty="0"/>
           </a:p>
@@ -6946,11 +7378,11 @@
         <p:spPr>
           <a:xfrm>
             <a:off x="7635240" y="1325880"/>
-            <a:ext cx="3474720" cy="1325880"/>
+            <a:ext cx="3474720" cy="1207008"/>
           </a:xfrm>
           <a:prstGeom prst="roundRect">
             <a:avLst>
-              <a:gd name="adj" fmla="val 8276"/>
+              <a:gd name="adj" fmla="val 9091"/>
             </a:avLst>
           </a:prstGeom>
           <a:solidFill>
@@ -7012,7 +7444,7 @@
         <p:spPr>
           <a:xfrm>
             <a:off x="7799832" y="1801368"/>
-            <a:ext cx="3145536" cy="758952"/>
+            <a:ext cx="3145536" cy="640080"/>
           </a:xfrm>
           <a:prstGeom prst="rect">
             <a:avLst/>
@@ -7052,12 +7484,12 @@
         </p:nvSpPr>
         <p:spPr>
           <a:xfrm>
-            <a:off x="7635240" y="2788920"/>
-            <a:ext cx="3474720" cy="1536192"/>
+            <a:off x="7635240" y="2670048"/>
+            <a:ext cx="3474720" cy="1377086"/>
           </a:xfrm>
           <a:prstGeom prst="roundRect">
             <a:avLst>
-              <a:gd name="adj" fmla="val 7143"/>
+              <a:gd name="adj" fmla="val 7968"/>
             </a:avLst>
           </a:prstGeom>
           <a:solidFill>
@@ -7079,7 +7511,7 @@
         </p:nvSpPr>
         <p:spPr>
           <a:xfrm>
-            <a:off x="7799832" y="2935224"/>
+            <a:off x="7799832" y="2816352"/>
             <a:ext cx="3145536" cy="256032"/>
           </a:xfrm>
           <a:prstGeom prst="rect">
@@ -7118,8 +7550,8 @@
         </p:nvSpPr>
         <p:spPr>
           <a:xfrm>
-            <a:off x="7818120" y="3300984"/>
-            <a:ext cx="3090672" cy="877824"/>
+            <a:off x="7818120" y="3182112"/>
+            <a:ext cx="3090672" cy="718718"/>
           </a:xfrm>
           <a:prstGeom prst="rect">
             <a:avLst/>
@@ -7176,12 +7608,12 @@
         </p:nvSpPr>
         <p:spPr>
           <a:xfrm>
-            <a:off x="7635240" y="4498848"/>
-            <a:ext cx="3474720" cy="1143000"/>
+            <a:off x="7635240" y="4184294"/>
+            <a:ext cx="3474720" cy="1466698"/>
           </a:xfrm>
           <a:prstGeom prst="roundRect">
             <a:avLst>
-              <a:gd name="adj" fmla="val 9600"/>
+              <a:gd name="adj" fmla="val 7481"/>
             </a:avLst>
           </a:prstGeom>
           <a:solidFill>
@@ -7203,7 +7635,7 @@
         </p:nvSpPr>
         <p:spPr>
           <a:xfrm>
-            <a:off x="7799832" y="4645152"/>
+            <a:off x="7799832" y="4330598"/>
             <a:ext cx="3145536" cy="256032"/>
           </a:xfrm>
           <a:prstGeom prst="rect">
@@ -7242,8 +7674,8 @@
         </p:nvSpPr>
         <p:spPr>
           <a:xfrm>
-            <a:off x="7799832" y="4974336"/>
-            <a:ext cx="3145536" cy="576072"/>
+            <a:off x="7799832" y="4659782"/>
+            <a:ext cx="3145536" cy="899770"/>
           </a:xfrm>
           <a:prstGeom prst="rect">
             <a:avLst/>
@@ -7269,7 +7701,7 @@
                 <a:ea typeface="Aptos" pitchFamily="34" charset="-122"/>
                 <a:cs typeface="Aptos" pitchFamily="34" charset="-120"/>
               </a:rPr>
-              <a:t>Connect the concept to public health purpose, responsible use, required safeguards, documentation, and the next action a.</a:t>
+              <a:t>Connect the concept to public health purpose, responsible use, required safeguards, documentation, and the next action a department should take.</a:t>
             </a:r>
             <a:endParaRPr lang="en-US" sz="1320" dirty="0"/>
           </a:p>
@@ -7621,11 +8053,11 @@
         <p:spPr>
           <a:xfrm>
             <a:off x="7635240" y="1325880"/>
-            <a:ext cx="3474720" cy="1325880"/>
+            <a:ext cx="3474720" cy="1207008"/>
           </a:xfrm>
           <a:prstGeom prst="roundRect">
             <a:avLst>
-              <a:gd name="adj" fmla="val 8276"/>
+              <a:gd name="adj" fmla="val 9091"/>
             </a:avLst>
           </a:prstGeom>
           <a:solidFill>
@@ -7687,7 +8119,7 @@
         <p:spPr>
           <a:xfrm>
             <a:off x="7799832" y="1801368"/>
-            <a:ext cx="3145536" cy="758952"/>
+            <a:ext cx="3145536" cy="640080"/>
           </a:xfrm>
           <a:prstGeom prst="rect">
             <a:avLst/>
@@ -7727,12 +8159,12 @@
         </p:nvSpPr>
         <p:spPr>
           <a:xfrm>
-            <a:off x="7635240" y="2788920"/>
-            <a:ext cx="3474720" cy="1536192"/>
+            <a:off x="7635240" y="2670048"/>
+            <a:ext cx="3474720" cy="1377086"/>
           </a:xfrm>
           <a:prstGeom prst="roundRect">
             <a:avLst>
-              <a:gd name="adj" fmla="val 7143"/>
+              <a:gd name="adj" fmla="val 7968"/>
             </a:avLst>
           </a:prstGeom>
           <a:solidFill>
@@ -7754,7 +8186,7 @@
         </p:nvSpPr>
         <p:spPr>
           <a:xfrm>
-            <a:off x="7799832" y="2935224"/>
+            <a:off x="7799832" y="2816352"/>
             <a:ext cx="3145536" cy="256032"/>
           </a:xfrm>
           <a:prstGeom prst="rect">
@@ -7793,8 +8225,8 @@
         </p:nvSpPr>
         <p:spPr>
           <a:xfrm>
-            <a:off x="7818120" y="3300984"/>
-            <a:ext cx="3090672" cy="877824"/>
+            <a:off x="7818120" y="3182112"/>
+            <a:ext cx="3090672" cy="718718"/>
           </a:xfrm>
           <a:prstGeom prst="rect">
             <a:avLst/>
@@ -7851,12 +8283,12 @@
         </p:nvSpPr>
         <p:spPr>
           <a:xfrm>
-            <a:off x="7635240" y="4498848"/>
-            <a:ext cx="3474720" cy="1143000"/>
+            <a:off x="7635240" y="4184294"/>
+            <a:ext cx="3474720" cy="1466698"/>
           </a:xfrm>
           <a:prstGeom prst="roundRect">
             <a:avLst>
-              <a:gd name="adj" fmla="val 9600"/>
+              <a:gd name="adj" fmla="val 7481"/>
             </a:avLst>
           </a:prstGeom>
           <a:solidFill>
@@ -7878,7 +8310,7 @@
         </p:nvSpPr>
         <p:spPr>
           <a:xfrm>
-            <a:off x="7799832" y="4645152"/>
+            <a:off x="7799832" y="4330598"/>
             <a:ext cx="3145536" cy="256032"/>
           </a:xfrm>
           <a:prstGeom prst="rect">
@@ -7917,8 +8349,8 @@
         </p:nvSpPr>
         <p:spPr>
           <a:xfrm>
-            <a:off x="7799832" y="4974336"/>
-            <a:ext cx="3145536" cy="576072"/>
+            <a:off x="7799832" y="4659782"/>
+            <a:ext cx="3145536" cy="899770"/>
           </a:xfrm>
           <a:prstGeom prst="rect">
             <a:avLst/>
@@ -7944,7 +8376,7 @@
                 <a:ea typeface="Aptos" pitchFamily="34" charset="-122"/>
                 <a:cs typeface="Aptos" pitchFamily="34" charset="-120"/>
               </a:rPr>
-              <a:t>Use the assignment to test whether you can explain the concept, apply it to a realistic public health situation, and.</a:t>
+              <a:t>Use the assignment to test whether you can explain the concept, apply it to a realistic public health situation, and identify what would need review before the work moves forward.</a:t>
             </a:r>
             <a:endParaRPr lang="en-US" sz="1320" dirty="0"/>
           </a:p>
@@ -8313,11 +8745,11 @@
         <p:spPr>
           <a:xfrm>
             <a:off x="7635240" y="1325880"/>
-            <a:ext cx="3474720" cy="1325880"/>
+            <a:ext cx="3474720" cy="1207008"/>
           </a:xfrm>
           <a:prstGeom prst="roundRect">
             <a:avLst>
-              <a:gd name="adj" fmla="val 8276"/>
+              <a:gd name="adj" fmla="val 9091"/>
             </a:avLst>
           </a:prstGeom>
           <a:solidFill>
@@ -8379,7 +8811,7 @@
         <p:spPr>
           <a:xfrm>
             <a:off x="7799832" y="1801368"/>
-            <a:ext cx="3145536" cy="758952"/>
+            <a:ext cx="3145536" cy="640080"/>
           </a:xfrm>
           <a:prstGeom prst="rect">
             <a:avLst/>
@@ -8419,12 +8851,12 @@
         </p:nvSpPr>
         <p:spPr>
           <a:xfrm>
-            <a:off x="7635240" y="2788920"/>
-            <a:ext cx="3474720" cy="1536192"/>
+            <a:off x="7635240" y="2670048"/>
+            <a:ext cx="3474720" cy="1377086"/>
           </a:xfrm>
           <a:prstGeom prst="roundRect">
             <a:avLst>
-              <a:gd name="adj" fmla="val 7143"/>
+              <a:gd name="adj" fmla="val 7968"/>
             </a:avLst>
           </a:prstGeom>
           <a:solidFill>
@@ -8446,7 +8878,7 @@
         </p:nvSpPr>
         <p:spPr>
           <a:xfrm>
-            <a:off x="7799832" y="2935224"/>
+            <a:off x="7799832" y="2816352"/>
             <a:ext cx="3145536" cy="256032"/>
           </a:xfrm>
           <a:prstGeom prst="rect">
@@ -8485,8 +8917,8 @@
         </p:nvSpPr>
         <p:spPr>
           <a:xfrm>
-            <a:off x="7818120" y="3300984"/>
-            <a:ext cx="3090672" cy="877824"/>
+            <a:off x="7818120" y="3182112"/>
+            <a:ext cx="3090672" cy="718718"/>
           </a:xfrm>
           <a:prstGeom prst="rect">
             <a:avLst/>
@@ -8560,12 +8992,12 @@
         </p:nvSpPr>
         <p:spPr>
           <a:xfrm>
-            <a:off x="7635240" y="4498848"/>
-            <a:ext cx="3474720" cy="1143000"/>
+            <a:off x="7635240" y="4184294"/>
+            <a:ext cx="3474720" cy="1466698"/>
           </a:xfrm>
           <a:prstGeom prst="roundRect">
             <a:avLst>
-              <a:gd name="adj" fmla="val 9600"/>
+              <a:gd name="adj" fmla="val 7481"/>
             </a:avLst>
           </a:prstGeom>
           <a:solidFill>
@@ -8587,7 +9019,7 @@
         </p:nvSpPr>
         <p:spPr>
           <a:xfrm>
-            <a:off x="7799832" y="4645152"/>
+            <a:off x="7799832" y="4330598"/>
             <a:ext cx="3145536" cy="256032"/>
           </a:xfrm>
           <a:prstGeom prst="rect">
@@ -8626,8 +9058,8 @@
         </p:nvSpPr>
         <p:spPr>
           <a:xfrm>
-            <a:off x="7799832" y="4974336"/>
-            <a:ext cx="3145536" cy="576072"/>
+            <a:off x="7799832" y="4659782"/>
+            <a:ext cx="3145536" cy="899770"/>
           </a:xfrm>
           <a:prstGeom prst="rect">
             <a:avLst/>
@@ -8653,7 +9085,7 @@
                 <a:ea typeface="Aptos" pitchFamily="34" charset="-122"/>
                 <a:cs typeface="Aptos" pitchFamily="34" charset="-120"/>
               </a:rPr>
-              <a:t>Connect the concept to public health purpose, responsible use, required safeguards, documentation, and the next action a.</a:t>
+              <a:t>Connect the concept to public health purpose, responsible use, required safeguards, documentation, and the next action a department should take.</a:t>
             </a:r>
             <a:endParaRPr lang="en-US" sz="1320" dirty="0"/>
           </a:p>
@@ -8988,11 +9420,11 @@
         <p:spPr>
           <a:xfrm>
             <a:off x="7635240" y="1325880"/>
-            <a:ext cx="3474720" cy="1325880"/>
+            <a:ext cx="3474720" cy="1207008"/>
           </a:xfrm>
           <a:prstGeom prst="roundRect">
             <a:avLst>
-              <a:gd name="adj" fmla="val 8276"/>
+              <a:gd name="adj" fmla="val 9091"/>
             </a:avLst>
           </a:prstGeom>
           <a:solidFill>
@@ -9054,7 +9486,7 @@
         <p:spPr>
           <a:xfrm>
             <a:off x="7799832" y="1801368"/>
-            <a:ext cx="3145536" cy="758952"/>
+            <a:ext cx="3145536" cy="640080"/>
           </a:xfrm>
           <a:prstGeom prst="rect">
             <a:avLst/>
@@ -9094,12 +9526,12 @@
         </p:nvSpPr>
         <p:spPr>
           <a:xfrm>
-            <a:off x="7635240" y="2788920"/>
-            <a:ext cx="3474720" cy="1536192"/>
+            <a:off x="7635240" y="2670048"/>
+            <a:ext cx="3474720" cy="1377086"/>
           </a:xfrm>
           <a:prstGeom prst="roundRect">
             <a:avLst>
-              <a:gd name="adj" fmla="val 7143"/>
+              <a:gd name="adj" fmla="val 7968"/>
             </a:avLst>
           </a:prstGeom>
           <a:solidFill>
@@ -9121,7 +9553,7 @@
         </p:nvSpPr>
         <p:spPr>
           <a:xfrm>
-            <a:off x="7799832" y="2935224"/>
+            <a:off x="7799832" y="2816352"/>
             <a:ext cx="3145536" cy="256032"/>
           </a:xfrm>
           <a:prstGeom prst="rect">
@@ -9160,8 +9592,8 @@
         </p:nvSpPr>
         <p:spPr>
           <a:xfrm>
-            <a:off x="7818120" y="3300984"/>
-            <a:ext cx="3090672" cy="877824"/>
+            <a:off x="7818120" y="3182112"/>
+            <a:ext cx="3090672" cy="718718"/>
           </a:xfrm>
           <a:prstGeom prst="rect">
             <a:avLst/>
@@ -9201,12 +9633,12 @@
         </p:nvSpPr>
         <p:spPr>
           <a:xfrm>
-            <a:off x="7635240" y="4498848"/>
-            <a:ext cx="3474720" cy="1143000"/>
+            <a:off x="7635240" y="4184294"/>
+            <a:ext cx="3474720" cy="1466698"/>
           </a:xfrm>
           <a:prstGeom prst="roundRect">
             <a:avLst>
-              <a:gd name="adj" fmla="val 9600"/>
+              <a:gd name="adj" fmla="val 7481"/>
             </a:avLst>
           </a:prstGeom>
           <a:solidFill>
@@ -9228,7 +9660,7 @@
         </p:nvSpPr>
         <p:spPr>
           <a:xfrm>
-            <a:off x="7799832" y="4645152"/>
+            <a:off x="7799832" y="4330598"/>
             <a:ext cx="3145536" cy="256032"/>
           </a:xfrm>
           <a:prstGeom prst="rect">
@@ -9267,8 +9699,8 @@
         </p:nvSpPr>
         <p:spPr>
           <a:xfrm>
-            <a:off x="7799832" y="4974336"/>
-            <a:ext cx="3145536" cy="576072"/>
+            <a:off x="7799832" y="4659782"/>
+            <a:ext cx="3145536" cy="899770"/>
           </a:xfrm>
           <a:prstGeom prst="rect">
             <a:avLst/>
@@ -9294,7 +9726,7 @@
                 <a:ea typeface="Aptos" pitchFamily="34" charset="-122"/>
                 <a:cs typeface="Aptos" pitchFamily="34" charset="-120"/>
               </a:rPr>
-              <a:t>Connect the concept to public health purpose, responsible use, required safeguards, documentation, and the next action a.</a:t>
+              <a:t>Connect the concept to public health purpose, responsible use, required safeguards, documentation, and the next action a department should take.</a:t>
             </a:r>
             <a:endParaRPr lang="en-US" sz="1320" dirty="0"/>
           </a:p>
@@ -9663,11 +10095,11 @@
         <p:spPr>
           <a:xfrm>
             <a:off x="7635240" y="1325880"/>
-            <a:ext cx="3474720" cy="1325880"/>
+            <a:ext cx="3474720" cy="1207008"/>
           </a:xfrm>
           <a:prstGeom prst="roundRect">
             <a:avLst>
-              <a:gd name="adj" fmla="val 8276"/>
+              <a:gd name="adj" fmla="val 9091"/>
             </a:avLst>
           </a:prstGeom>
           <a:solidFill>
@@ -9729,7 +10161,7 @@
         <p:spPr>
           <a:xfrm>
             <a:off x="7799832" y="1801368"/>
-            <a:ext cx="3145536" cy="758952"/>
+            <a:ext cx="3145536" cy="640080"/>
           </a:xfrm>
           <a:prstGeom prst="rect">
             <a:avLst/>
@@ -9769,12 +10201,12 @@
         </p:nvSpPr>
         <p:spPr>
           <a:xfrm>
-            <a:off x="7635240" y="2788920"/>
-            <a:ext cx="3474720" cy="1536192"/>
+            <a:off x="7635240" y="2670048"/>
+            <a:ext cx="3474720" cy="1377086"/>
           </a:xfrm>
           <a:prstGeom prst="roundRect">
             <a:avLst>
-              <a:gd name="adj" fmla="val 7143"/>
+              <a:gd name="adj" fmla="val 7968"/>
             </a:avLst>
           </a:prstGeom>
           <a:solidFill>
@@ -9796,7 +10228,7 @@
         </p:nvSpPr>
         <p:spPr>
           <a:xfrm>
-            <a:off x="7799832" y="2935224"/>
+            <a:off x="7799832" y="2816352"/>
             <a:ext cx="3145536" cy="256032"/>
           </a:xfrm>
           <a:prstGeom prst="rect">
@@ -9835,8 +10267,8 @@
         </p:nvSpPr>
         <p:spPr>
           <a:xfrm>
-            <a:off x="7818120" y="3300984"/>
-            <a:ext cx="3090672" cy="877824"/>
+            <a:off x="7818120" y="3182112"/>
+            <a:ext cx="3090672" cy="718718"/>
           </a:xfrm>
           <a:prstGeom prst="rect">
             <a:avLst/>
@@ -9910,12 +10342,12 @@
         </p:nvSpPr>
         <p:spPr>
           <a:xfrm>
-            <a:off x="7635240" y="4498848"/>
-            <a:ext cx="3474720" cy="1143000"/>
+            <a:off x="7635240" y="4184294"/>
+            <a:ext cx="3474720" cy="1466698"/>
           </a:xfrm>
           <a:prstGeom prst="roundRect">
             <a:avLst>
-              <a:gd name="adj" fmla="val 9600"/>
+              <a:gd name="adj" fmla="val 7481"/>
             </a:avLst>
           </a:prstGeom>
           <a:solidFill>
@@ -9937,7 +10369,7 @@
         </p:nvSpPr>
         <p:spPr>
           <a:xfrm>
-            <a:off x="7799832" y="4645152"/>
+            <a:off x="7799832" y="4330598"/>
             <a:ext cx="3145536" cy="256032"/>
           </a:xfrm>
           <a:prstGeom prst="rect">
@@ -9976,8 +10408,8 @@
         </p:nvSpPr>
         <p:spPr>
           <a:xfrm>
-            <a:off x="7799832" y="4974336"/>
-            <a:ext cx="3145536" cy="576072"/>
+            <a:off x="7799832" y="4659782"/>
+            <a:ext cx="3145536" cy="899770"/>
           </a:xfrm>
           <a:prstGeom prst="rect">
             <a:avLst/>
@@ -10003,7 +10435,7 @@
                 <a:ea typeface="Aptos" pitchFamily="34" charset="-122"/>
                 <a:cs typeface="Aptos" pitchFamily="34" charset="-120"/>
               </a:rPr>
-              <a:t>Use the assignment to test whether you can explain the concept, apply it to a realistic public health situation, and.</a:t>
+              <a:t>Use the assignment to test whether you can explain the concept, apply it to a realistic public health situation, and identify what would need review before the work moves forward.</a:t>
             </a:r>
             <a:endParaRPr lang="en-US" sz="1320" dirty="0"/>
           </a:p>
@@ -10464,7 +10896,7 @@
                 <a:ea typeface="Aptos" pitchFamily="34" charset="-122"/>
                 <a:cs typeface="Aptos" pitchFamily="34" charset="-120"/>
               </a:rPr>
-              <a:t>Level: intermediate/practitioner Primary track: Analytics and Modeling Track Appears in tracks: analytics-modeling,.</a:t>
+              <a:t>Level: intermediate/practitioner Primary track: Analytics and Modeling Track Appears in tracks: analytics-modeling, epidemiology, policy, governance-security</a:t>
             </a:r>
             <a:endParaRPr lang="en-US" sz="1320" dirty="0"/>
           </a:p>
@@ -10974,11 +11406,11 @@
         <p:spPr>
           <a:xfrm>
             <a:off x="7635240" y="1325880"/>
-            <a:ext cx="3474720" cy="1325880"/>
+            <a:ext cx="3474720" cy="1207008"/>
           </a:xfrm>
           <a:prstGeom prst="roundRect">
             <a:avLst>
-              <a:gd name="adj" fmla="val 8276"/>
+              <a:gd name="adj" fmla="val 9091"/>
             </a:avLst>
           </a:prstGeom>
           <a:solidFill>
@@ -11040,7 +11472,7 @@
         <p:spPr>
           <a:xfrm>
             <a:off x="7799832" y="1801368"/>
-            <a:ext cx="3145536" cy="758952"/>
+            <a:ext cx="3145536" cy="640080"/>
           </a:xfrm>
           <a:prstGeom prst="rect">
             <a:avLst/>
@@ -11080,12 +11512,12 @@
         </p:nvSpPr>
         <p:spPr>
           <a:xfrm>
-            <a:off x="7635240" y="2788920"/>
-            <a:ext cx="3474720" cy="1536192"/>
+            <a:off x="7635240" y="2670048"/>
+            <a:ext cx="3474720" cy="1377086"/>
           </a:xfrm>
           <a:prstGeom prst="roundRect">
             <a:avLst>
-              <a:gd name="adj" fmla="val 7143"/>
+              <a:gd name="adj" fmla="val 7968"/>
             </a:avLst>
           </a:prstGeom>
           <a:solidFill>
@@ -11107,7 +11539,7 @@
         </p:nvSpPr>
         <p:spPr>
           <a:xfrm>
-            <a:off x="7799832" y="2935224"/>
+            <a:off x="7799832" y="2816352"/>
             <a:ext cx="3145536" cy="256032"/>
           </a:xfrm>
           <a:prstGeom prst="rect">
@@ -11146,8 +11578,8 @@
         </p:nvSpPr>
         <p:spPr>
           <a:xfrm>
-            <a:off x="7818120" y="3300984"/>
-            <a:ext cx="3090672" cy="877824"/>
+            <a:off x="7818120" y="3182112"/>
+            <a:ext cx="3090672" cy="718718"/>
           </a:xfrm>
           <a:prstGeom prst="rect">
             <a:avLst/>
@@ -11221,12 +11653,12 @@
         </p:nvSpPr>
         <p:spPr>
           <a:xfrm>
-            <a:off x="7635240" y="4498848"/>
-            <a:ext cx="3474720" cy="1143000"/>
+            <a:off x="7635240" y="4184294"/>
+            <a:ext cx="3474720" cy="1466698"/>
           </a:xfrm>
           <a:prstGeom prst="roundRect">
             <a:avLst>
-              <a:gd name="adj" fmla="val 9600"/>
+              <a:gd name="adj" fmla="val 7481"/>
             </a:avLst>
           </a:prstGeom>
           <a:solidFill>
@@ -11248,7 +11680,7 @@
         </p:nvSpPr>
         <p:spPr>
           <a:xfrm>
-            <a:off x="7799832" y="4645152"/>
+            <a:off x="7799832" y="4330598"/>
             <a:ext cx="3145536" cy="256032"/>
           </a:xfrm>
           <a:prstGeom prst="rect">
@@ -11287,8 +11719,8 @@
         </p:nvSpPr>
         <p:spPr>
           <a:xfrm>
-            <a:off x="7799832" y="4974336"/>
-            <a:ext cx="3145536" cy="576072"/>
+            <a:off x="7799832" y="4659782"/>
+            <a:ext cx="3145536" cy="899770"/>
           </a:xfrm>
           <a:prstGeom prst="rect">
             <a:avLst/>
@@ -11314,7 +11746,7 @@
                 <a:ea typeface="Aptos" pitchFamily="34" charset="-122"/>
                 <a:cs typeface="Aptos" pitchFamily="34" charset="-120"/>
               </a:rPr>
-              <a:t>Use the assignment to test whether you can explain the concept, apply it to a realistic public health situation, and.</a:t>
+              <a:t>Use the assignment to test whether you can explain the concept, apply it to a realistic public health situation, and identify what would need review before the work moves forward.</a:t>
             </a:r>
             <a:endParaRPr lang="en-US" sz="1320" dirty="0"/>
           </a:p>
@@ -11683,11 +12115,11 @@
         <p:spPr>
           <a:xfrm>
             <a:off x="7635240" y="1325880"/>
-            <a:ext cx="3474720" cy="1325880"/>
+            <a:ext cx="3474720" cy="1207008"/>
           </a:xfrm>
           <a:prstGeom prst="roundRect">
             <a:avLst>
-              <a:gd name="adj" fmla="val 8276"/>
+              <a:gd name="adj" fmla="val 9091"/>
             </a:avLst>
           </a:prstGeom>
           <a:solidFill>
@@ -11749,7 +12181,7 @@
         <p:spPr>
           <a:xfrm>
             <a:off x="7799832" y="1801368"/>
-            <a:ext cx="3145536" cy="758952"/>
+            <a:ext cx="3145536" cy="640080"/>
           </a:xfrm>
           <a:prstGeom prst="rect">
             <a:avLst/>
@@ -11789,12 +12221,12 @@
         </p:nvSpPr>
         <p:spPr>
           <a:xfrm>
-            <a:off x="7635240" y="2788920"/>
-            <a:ext cx="3474720" cy="1536192"/>
+            <a:off x="7635240" y="2670048"/>
+            <a:ext cx="3474720" cy="1377086"/>
           </a:xfrm>
           <a:prstGeom prst="roundRect">
             <a:avLst>
-              <a:gd name="adj" fmla="val 7143"/>
+              <a:gd name="adj" fmla="val 7968"/>
             </a:avLst>
           </a:prstGeom>
           <a:solidFill>
@@ -11816,7 +12248,7 @@
         </p:nvSpPr>
         <p:spPr>
           <a:xfrm>
-            <a:off x="7799832" y="2935224"/>
+            <a:off x="7799832" y="2816352"/>
             <a:ext cx="3145536" cy="256032"/>
           </a:xfrm>
           <a:prstGeom prst="rect">
@@ -11855,8 +12287,8 @@
         </p:nvSpPr>
         <p:spPr>
           <a:xfrm>
-            <a:off x="7818120" y="3300984"/>
-            <a:ext cx="3090672" cy="877824"/>
+            <a:off x="7818120" y="3182112"/>
+            <a:ext cx="3090672" cy="718718"/>
           </a:xfrm>
           <a:prstGeom prst="rect">
             <a:avLst/>
@@ -11913,12 +12345,12 @@
         </p:nvSpPr>
         <p:spPr>
           <a:xfrm>
-            <a:off x="7635240" y="4498848"/>
-            <a:ext cx="3474720" cy="1143000"/>
+            <a:off x="7635240" y="4184294"/>
+            <a:ext cx="3474720" cy="1466698"/>
           </a:xfrm>
           <a:prstGeom prst="roundRect">
             <a:avLst>
-              <a:gd name="adj" fmla="val 9600"/>
+              <a:gd name="adj" fmla="val 7481"/>
             </a:avLst>
           </a:prstGeom>
           <a:solidFill>
@@ -11940,7 +12372,7 @@
         </p:nvSpPr>
         <p:spPr>
           <a:xfrm>
-            <a:off x="7799832" y="4645152"/>
+            <a:off x="7799832" y="4330598"/>
             <a:ext cx="3145536" cy="256032"/>
           </a:xfrm>
           <a:prstGeom prst="rect">
@@ -11979,8 +12411,8 @@
         </p:nvSpPr>
         <p:spPr>
           <a:xfrm>
-            <a:off x="7799832" y="4974336"/>
-            <a:ext cx="3145536" cy="576072"/>
+            <a:off x="7799832" y="4659782"/>
+            <a:ext cx="3145536" cy="899770"/>
           </a:xfrm>
           <a:prstGeom prst="rect">
             <a:avLst/>
@@ -12006,7 +12438,7 @@
                 <a:ea typeface="Aptos" pitchFamily="34" charset="-122"/>
                 <a:cs typeface="Aptos" pitchFamily="34" charset="-120"/>
               </a:rPr>
-              <a:t>Connect the concept to public health purpose, responsible use, required safeguards, documentation, and the next action a.</a:t>
+              <a:t>Connect the concept to public health purpose, responsible use, required safeguards, documentation, and the next action a department should take.</a:t>
             </a:r>
             <a:endParaRPr lang="en-US" sz="1320" dirty="0"/>
           </a:p>
@@ -12341,11 +12773,11 @@
         <p:spPr>
           <a:xfrm>
             <a:off x="7635240" y="1325880"/>
-            <a:ext cx="3474720" cy="1325880"/>
+            <a:ext cx="3474720" cy="1255471"/>
           </a:xfrm>
           <a:prstGeom prst="roundRect">
             <a:avLst>
-              <a:gd name="adj" fmla="val 8276"/>
+              <a:gd name="adj" fmla="val 8740"/>
             </a:avLst>
           </a:prstGeom>
           <a:solidFill>
@@ -12407,7 +12839,7 @@
         <p:spPr>
           <a:xfrm>
             <a:off x="7799832" y="1801368"/>
-            <a:ext cx="3145536" cy="758952"/>
+            <a:ext cx="3145536" cy="688543"/>
           </a:xfrm>
           <a:prstGeom prst="rect">
             <a:avLst/>
@@ -12447,12 +12879,12 @@
         </p:nvSpPr>
         <p:spPr>
           <a:xfrm>
-            <a:off x="7635240" y="2788920"/>
-            <a:ext cx="3474720" cy="1536192"/>
+            <a:off x="7635240" y="2718511"/>
+            <a:ext cx="3474720" cy="1328623"/>
           </a:xfrm>
           <a:prstGeom prst="roundRect">
             <a:avLst>
-              <a:gd name="adj" fmla="val 7143"/>
+              <a:gd name="adj" fmla="val 8259"/>
             </a:avLst>
           </a:prstGeom>
           <a:solidFill>
@@ -12474,7 +12906,7 @@
         </p:nvSpPr>
         <p:spPr>
           <a:xfrm>
-            <a:off x="7799832" y="2935224"/>
+            <a:off x="7799832" y="2864815"/>
             <a:ext cx="3145536" cy="256032"/>
           </a:xfrm>
           <a:prstGeom prst="rect">
@@ -12513,8 +12945,8 @@
         </p:nvSpPr>
         <p:spPr>
           <a:xfrm>
-            <a:off x="7818120" y="3300984"/>
-            <a:ext cx="3090672" cy="877824"/>
+            <a:off x="7818120" y="3230575"/>
+            <a:ext cx="3090672" cy="670255"/>
           </a:xfrm>
           <a:prstGeom prst="rect">
             <a:avLst/>
@@ -12554,12 +12986,12 @@
         </p:nvSpPr>
         <p:spPr>
           <a:xfrm>
-            <a:off x="7635240" y="4498848"/>
-            <a:ext cx="3474720" cy="1143000"/>
+            <a:off x="7635240" y="4184294"/>
+            <a:ext cx="3474720" cy="1466698"/>
           </a:xfrm>
           <a:prstGeom prst="roundRect">
             <a:avLst>
-              <a:gd name="adj" fmla="val 9600"/>
+              <a:gd name="adj" fmla="val 7481"/>
             </a:avLst>
           </a:prstGeom>
           <a:solidFill>
@@ -12581,7 +13013,7 @@
         </p:nvSpPr>
         <p:spPr>
           <a:xfrm>
-            <a:off x="7799832" y="4645152"/>
+            <a:off x="7799832" y="4330598"/>
             <a:ext cx="3145536" cy="256032"/>
           </a:xfrm>
           <a:prstGeom prst="rect">
@@ -12620,8 +13052,8 @@
         </p:nvSpPr>
         <p:spPr>
           <a:xfrm>
-            <a:off x="7799832" y="4974336"/>
-            <a:ext cx="3145536" cy="576072"/>
+            <a:off x="7799832" y="4659782"/>
+            <a:ext cx="3145536" cy="899770"/>
           </a:xfrm>
           <a:prstGeom prst="rect">
             <a:avLst/>
@@ -12647,7 +13079,7 @@
                 <a:ea typeface="Aptos" pitchFamily="34" charset="-122"/>
                 <a:cs typeface="Aptos" pitchFamily="34" charset="-120"/>
               </a:rPr>
-              <a:t>Connect the concept to public health purpose, responsible use, required safeguards, documentation, and the next action a.</a:t>
+              <a:t>Connect the concept to public health purpose, responsible use, required safeguards, documentation, and the next action a department should take.</a:t>
             </a:r>
             <a:endParaRPr lang="en-US" sz="1320" dirty="0"/>
           </a:p>
@@ -13125,7 +13557,7 @@
                 <a:ea typeface="Aptos" pitchFamily="34" charset="-122"/>
                 <a:cs typeface="Aptos" pitchFamily="34" charset="-120"/>
               </a:rPr>
-              <a:t>Use the related plays to identify decisions, participants, timing, approvals, and documentation needed for responsible.</a:t>
+              <a:t>Use the related plays to identify decisions, participants, timing, approvals, and documentation needed for responsible implementation.</a:t>
             </a:r>
             <a:endParaRPr lang="en-US" sz="1320" dirty="0"/>
           </a:p>
@@ -13744,7 +14176,7 @@
                 <a:ea typeface="Aptos" pitchFamily="34" charset="-122"/>
                 <a:cs typeface="Aptos" pitchFamily="34" charset="-120"/>
               </a:rPr>
-              <a:t>Use linked tools when your department needs a structured worksheet, template, checklist, review process, or.</a:t>
+              <a:t>Use linked tools when your department needs a structured worksheet, template, checklist, review process, or documentation artifact.</a:t>
             </a:r>
             <a:endParaRPr lang="en-US" sz="1320" dirty="0"/>
           </a:p>
@@ -14254,11 +14686,11 @@
         <p:spPr>
           <a:xfrm>
             <a:off x="7635240" y="1325880"/>
-            <a:ext cx="3474720" cy="1325880"/>
+            <a:ext cx="3474720" cy="1207008"/>
           </a:xfrm>
           <a:prstGeom prst="roundRect">
             <a:avLst>
-              <a:gd name="adj" fmla="val 8276"/>
+              <a:gd name="adj" fmla="val 9091"/>
             </a:avLst>
           </a:prstGeom>
           <a:solidFill>
@@ -14320,7 +14752,7 @@
         <p:spPr>
           <a:xfrm>
             <a:off x="7799832" y="1801368"/>
-            <a:ext cx="3145536" cy="758952"/>
+            <a:ext cx="3145536" cy="640080"/>
           </a:xfrm>
           <a:prstGeom prst="rect">
             <a:avLst/>
@@ -14360,12 +14792,12 @@
         </p:nvSpPr>
         <p:spPr>
           <a:xfrm>
-            <a:off x="7635240" y="2788920"/>
-            <a:ext cx="3474720" cy="1536192"/>
+            <a:off x="7635240" y="2670048"/>
+            <a:ext cx="3474720" cy="1377086"/>
           </a:xfrm>
           <a:prstGeom prst="roundRect">
             <a:avLst>
-              <a:gd name="adj" fmla="val 7143"/>
+              <a:gd name="adj" fmla="val 7968"/>
             </a:avLst>
           </a:prstGeom>
           <a:solidFill>
@@ -14387,7 +14819,7 @@
         </p:nvSpPr>
         <p:spPr>
           <a:xfrm>
-            <a:off x="7799832" y="2935224"/>
+            <a:off x="7799832" y="2816352"/>
             <a:ext cx="3145536" cy="256032"/>
           </a:xfrm>
           <a:prstGeom prst="rect">
@@ -14426,8 +14858,8 @@
         </p:nvSpPr>
         <p:spPr>
           <a:xfrm>
-            <a:off x="7818120" y="3300984"/>
-            <a:ext cx="3090672" cy="877824"/>
+            <a:off x="7818120" y="3182112"/>
+            <a:ext cx="3090672" cy="718718"/>
           </a:xfrm>
           <a:prstGeom prst="rect">
             <a:avLst/>
@@ -14484,12 +14916,12 @@
         </p:nvSpPr>
         <p:spPr>
           <a:xfrm>
-            <a:off x="7635240" y="4498848"/>
-            <a:ext cx="3474720" cy="1143000"/>
+            <a:off x="7635240" y="4184294"/>
+            <a:ext cx="3474720" cy="1466698"/>
           </a:xfrm>
           <a:prstGeom prst="roundRect">
             <a:avLst>
-              <a:gd name="adj" fmla="val 9600"/>
+              <a:gd name="adj" fmla="val 7481"/>
             </a:avLst>
           </a:prstGeom>
           <a:solidFill>
@@ -14511,7 +14943,7 @@
         </p:nvSpPr>
         <p:spPr>
           <a:xfrm>
-            <a:off x="7799832" y="4645152"/>
+            <a:off x="7799832" y="4330598"/>
             <a:ext cx="3145536" cy="256032"/>
           </a:xfrm>
           <a:prstGeom prst="rect">
@@ -14550,8 +14982,8 @@
         </p:nvSpPr>
         <p:spPr>
           <a:xfrm>
-            <a:off x="7799832" y="4974336"/>
-            <a:ext cx="3145536" cy="576072"/>
+            <a:off x="7799832" y="4659782"/>
+            <a:ext cx="3145536" cy="899770"/>
           </a:xfrm>
           <a:prstGeom prst="rect">
             <a:avLst/>
@@ -14577,7 +15009,7 @@
                 <a:ea typeface="Aptos" pitchFamily="34" charset="-122"/>
                 <a:cs typeface="Aptos" pitchFamily="34" charset="-120"/>
               </a:rPr>
-              <a:t>Use the assignment to test whether you can explain the concept, apply it to a realistic public health situation, and.</a:t>
+              <a:t>Use the assignment to test whether you can explain the concept, apply it to a realistic public health situation, and identify what would need review before the work moves forward.</a:t>
             </a:r>
             <a:endParaRPr lang="en-US" sz="1320" dirty="0"/>
           </a:p>
@@ -14912,11 +15344,11 @@
         <p:spPr>
           <a:xfrm>
             <a:off x="7635240" y="1325880"/>
-            <a:ext cx="3474720" cy="1325880"/>
+            <a:ext cx="3474720" cy="1207008"/>
           </a:xfrm>
           <a:prstGeom prst="roundRect">
             <a:avLst>
-              <a:gd name="adj" fmla="val 8276"/>
+              <a:gd name="adj" fmla="val 9091"/>
             </a:avLst>
           </a:prstGeom>
           <a:solidFill>
@@ -14978,7 +15410,7 @@
         <p:spPr>
           <a:xfrm>
             <a:off x="7799832" y="1801368"/>
-            <a:ext cx="3145536" cy="758952"/>
+            <a:ext cx="3145536" cy="640080"/>
           </a:xfrm>
           <a:prstGeom prst="rect">
             <a:avLst/>
@@ -15018,12 +15450,12 @@
         </p:nvSpPr>
         <p:spPr>
           <a:xfrm>
-            <a:off x="7635240" y="2788920"/>
-            <a:ext cx="3474720" cy="1536192"/>
+            <a:off x="7635240" y="2670048"/>
+            <a:ext cx="3474720" cy="1377086"/>
           </a:xfrm>
           <a:prstGeom prst="roundRect">
             <a:avLst>
-              <a:gd name="adj" fmla="val 7143"/>
+              <a:gd name="adj" fmla="val 7968"/>
             </a:avLst>
           </a:prstGeom>
           <a:solidFill>
@@ -15045,7 +15477,7 @@
         </p:nvSpPr>
         <p:spPr>
           <a:xfrm>
-            <a:off x="7799832" y="2935224"/>
+            <a:off x="7799832" y="2816352"/>
             <a:ext cx="3145536" cy="256032"/>
           </a:xfrm>
           <a:prstGeom prst="rect">
@@ -15084,8 +15516,8 @@
         </p:nvSpPr>
         <p:spPr>
           <a:xfrm>
-            <a:off x="7818120" y="3300984"/>
-            <a:ext cx="3090672" cy="877824"/>
+            <a:off x="7818120" y="3182112"/>
+            <a:ext cx="3090672" cy="718718"/>
           </a:xfrm>
           <a:prstGeom prst="rect">
             <a:avLst/>
@@ -15125,12 +15557,12 @@
         </p:nvSpPr>
         <p:spPr>
           <a:xfrm>
-            <a:off x="7635240" y="4498848"/>
-            <a:ext cx="3474720" cy="1143000"/>
+            <a:off x="7635240" y="4184294"/>
+            <a:ext cx="3474720" cy="1466698"/>
           </a:xfrm>
           <a:prstGeom prst="roundRect">
             <a:avLst>
-              <a:gd name="adj" fmla="val 9600"/>
+              <a:gd name="adj" fmla="val 7481"/>
             </a:avLst>
           </a:prstGeom>
           <a:solidFill>
@@ -15152,7 +15584,7 @@
         </p:nvSpPr>
         <p:spPr>
           <a:xfrm>
-            <a:off x="7799832" y="4645152"/>
+            <a:off x="7799832" y="4330598"/>
             <a:ext cx="3145536" cy="256032"/>
           </a:xfrm>
           <a:prstGeom prst="rect">
@@ -15191,8 +15623,8 @@
         </p:nvSpPr>
         <p:spPr>
           <a:xfrm>
-            <a:off x="7799832" y="4974336"/>
-            <a:ext cx="3145536" cy="576072"/>
+            <a:off x="7799832" y="4659782"/>
+            <a:ext cx="3145536" cy="899770"/>
           </a:xfrm>
           <a:prstGeom prst="rect">
             <a:avLst/>
@@ -15218,7 +15650,7 @@
                 <a:ea typeface="Aptos" pitchFamily="34" charset="-122"/>
                 <a:cs typeface="Aptos" pitchFamily="34" charset="-120"/>
               </a:rPr>
-              <a:t>Use the assignment to test whether you can explain the concept, apply it to a realistic public health situation, and.</a:t>
+              <a:t>Use the assignment to test whether you can explain the concept, apply it to a realistic public health situation, and identify what would need review before the work moves forward.</a:t>
             </a:r>
             <a:endParaRPr lang="en-US" sz="1320" dirty="0"/>
           </a:p>
@@ -15587,11 +16019,11 @@
         <p:spPr>
           <a:xfrm>
             <a:off x="7635240" y="1325880"/>
-            <a:ext cx="3474720" cy="1325880"/>
+            <a:ext cx="3474720" cy="1255471"/>
           </a:xfrm>
           <a:prstGeom prst="roundRect">
             <a:avLst>
-              <a:gd name="adj" fmla="val 8276"/>
+              <a:gd name="adj" fmla="val 8740"/>
             </a:avLst>
           </a:prstGeom>
           <a:solidFill>
@@ -15653,7 +16085,7 @@
         <p:spPr>
           <a:xfrm>
             <a:off x="7799832" y="1801368"/>
-            <a:ext cx="3145536" cy="758952"/>
+            <a:ext cx="3145536" cy="688543"/>
           </a:xfrm>
           <a:prstGeom prst="rect">
             <a:avLst/>
@@ -15693,12 +16125,12 @@
         </p:nvSpPr>
         <p:spPr>
           <a:xfrm>
-            <a:off x="7635240" y="2788920"/>
-            <a:ext cx="3474720" cy="1536192"/>
+            <a:off x="7635240" y="2718511"/>
+            <a:ext cx="3474720" cy="1328623"/>
           </a:xfrm>
           <a:prstGeom prst="roundRect">
             <a:avLst>
-              <a:gd name="adj" fmla="val 7143"/>
+              <a:gd name="adj" fmla="val 8259"/>
             </a:avLst>
           </a:prstGeom>
           <a:solidFill>
@@ -15720,7 +16152,7 @@
         </p:nvSpPr>
         <p:spPr>
           <a:xfrm>
-            <a:off x="7799832" y="2935224"/>
+            <a:off x="7799832" y="2864815"/>
             <a:ext cx="3145536" cy="256032"/>
           </a:xfrm>
           <a:prstGeom prst="rect">
@@ -15759,8 +16191,8 @@
         </p:nvSpPr>
         <p:spPr>
           <a:xfrm>
-            <a:off x="7818120" y="3300984"/>
-            <a:ext cx="3090672" cy="877824"/>
+            <a:off x="7818120" y="3230575"/>
+            <a:ext cx="3090672" cy="670255"/>
           </a:xfrm>
           <a:prstGeom prst="rect">
             <a:avLst/>
@@ -15834,12 +16266,12 @@
         </p:nvSpPr>
         <p:spPr>
           <a:xfrm>
-            <a:off x="7635240" y="4498848"/>
-            <a:ext cx="3474720" cy="1143000"/>
+            <a:off x="7635240" y="4184294"/>
+            <a:ext cx="3474720" cy="1466698"/>
           </a:xfrm>
           <a:prstGeom prst="roundRect">
             <a:avLst>
-              <a:gd name="adj" fmla="val 9600"/>
+              <a:gd name="adj" fmla="val 7481"/>
             </a:avLst>
           </a:prstGeom>
           <a:solidFill>
@@ -15861,7 +16293,7 @@
         </p:nvSpPr>
         <p:spPr>
           <a:xfrm>
-            <a:off x="7799832" y="4645152"/>
+            <a:off x="7799832" y="4330598"/>
             <a:ext cx="3145536" cy="256032"/>
           </a:xfrm>
           <a:prstGeom prst="rect">
@@ -15900,8 +16332,8 @@
         </p:nvSpPr>
         <p:spPr>
           <a:xfrm>
-            <a:off x="7799832" y="4974336"/>
-            <a:ext cx="3145536" cy="576072"/>
+            <a:off x="7799832" y="4659782"/>
+            <a:ext cx="3145536" cy="899770"/>
           </a:xfrm>
           <a:prstGeom prst="rect">
             <a:avLst/>
@@ -15927,7 +16359,7 @@
                 <a:ea typeface="Aptos" pitchFamily="34" charset="-122"/>
                 <a:cs typeface="Aptos" pitchFamily="34" charset="-120"/>
               </a:rPr>
-              <a:t>Connect the concept to public health purpose, responsible use, required safeguards, documentation, and the next action a.</a:t>
+              <a:t>Connect the concept to public health purpose, responsible use, required safeguards, documentation, and the next action a department should take.</a:t>
             </a:r>
             <a:endParaRPr lang="en-US" sz="1320" dirty="0"/>
           </a:p>
@@ -16296,11 +16728,11 @@
         <p:spPr>
           <a:xfrm>
             <a:off x="7635240" y="1325880"/>
-            <a:ext cx="3474720" cy="1325880"/>
+            <a:ext cx="3474720" cy="1207008"/>
           </a:xfrm>
           <a:prstGeom prst="roundRect">
             <a:avLst>
-              <a:gd name="adj" fmla="val 8276"/>
+              <a:gd name="adj" fmla="val 9091"/>
             </a:avLst>
           </a:prstGeom>
           <a:solidFill>
@@ -16362,7 +16794,7 @@
         <p:spPr>
           <a:xfrm>
             <a:off x="7799832" y="1801368"/>
-            <a:ext cx="3145536" cy="758952"/>
+            <a:ext cx="3145536" cy="640080"/>
           </a:xfrm>
           <a:prstGeom prst="rect">
             <a:avLst/>
@@ -16402,12 +16834,12 @@
         </p:nvSpPr>
         <p:spPr>
           <a:xfrm>
-            <a:off x="7635240" y="2788920"/>
-            <a:ext cx="3474720" cy="1536192"/>
+            <a:off x="7635240" y="2670048"/>
+            <a:ext cx="3474720" cy="1377086"/>
           </a:xfrm>
           <a:prstGeom prst="roundRect">
             <a:avLst>
-              <a:gd name="adj" fmla="val 7143"/>
+              <a:gd name="adj" fmla="val 7968"/>
             </a:avLst>
           </a:prstGeom>
           <a:solidFill>
@@ -16429,7 +16861,7 @@
         </p:nvSpPr>
         <p:spPr>
           <a:xfrm>
-            <a:off x="7799832" y="2935224"/>
+            <a:off x="7799832" y="2816352"/>
             <a:ext cx="3145536" cy="256032"/>
           </a:xfrm>
           <a:prstGeom prst="rect">
@@ -16468,8 +16900,8 @@
         </p:nvSpPr>
         <p:spPr>
           <a:xfrm>
-            <a:off x="7818120" y="3300984"/>
-            <a:ext cx="3090672" cy="877824"/>
+            <a:off x="7818120" y="3182112"/>
+            <a:ext cx="3090672" cy="718718"/>
           </a:xfrm>
           <a:prstGeom prst="rect">
             <a:avLst/>
@@ -16543,12 +16975,12 @@
         </p:nvSpPr>
         <p:spPr>
           <a:xfrm>
-            <a:off x="7635240" y="4498848"/>
-            <a:ext cx="3474720" cy="1143000"/>
+            <a:off x="7635240" y="4184294"/>
+            <a:ext cx="3474720" cy="1466698"/>
           </a:xfrm>
           <a:prstGeom prst="roundRect">
             <a:avLst>
-              <a:gd name="adj" fmla="val 9600"/>
+              <a:gd name="adj" fmla="val 7481"/>
             </a:avLst>
           </a:prstGeom>
           <a:solidFill>
@@ -16570,7 +17002,7 @@
         </p:nvSpPr>
         <p:spPr>
           <a:xfrm>
-            <a:off x="7799832" y="4645152"/>
+            <a:off x="7799832" y="4330598"/>
             <a:ext cx="3145536" cy="256032"/>
           </a:xfrm>
           <a:prstGeom prst="rect">
@@ -16609,8 +17041,8 @@
         </p:nvSpPr>
         <p:spPr>
           <a:xfrm>
-            <a:off x="7799832" y="4974336"/>
-            <a:ext cx="3145536" cy="576072"/>
+            <a:off x="7799832" y="4659782"/>
+            <a:ext cx="3145536" cy="899770"/>
           </a:xfrm>
           <a:prstGeom prst="rect">
             <a:avLst/>
@@ -16636,7 +17068,7 @@
                 <a:ea typeface="Aptos" pitchFamily="34" charset="-122"/>
                 <a:cs typeface="Aptos" pitchFamily="34" charset="-120"/>
               </a:rPr>
-              <a:t>Connect the concept to public health purpose, responsible use, required safeguards, documentation, and the next action a.</a:t>
+              <a:t>Connect the concept to public health purpose, responsible use, required safeguards, documentation, and the next action a department should take.</a:t>
             </a:r>
             <a:endParaRPr lang="en-US" sz="1320" dirty="0"/>
           </a:p>
@@ -17005,11 +17437,11 @@
         <p:spPr>
           <a:xfrm>
             <a:off x="7635240" y="1325880"/>
-            <a:ext cx="3474720" cy="1325880"/>
+            <a:ext cx="3474720" cy="1207008"/>
           </a:xfrm>
           <a:prstGeom prst="roundRect">
             <a:avLst>
-              <a:gd name="adj" fmla="val 8276"/>
+              <a:gd name="adj" fmla="val 9091"/>
             </a:avLst>
           </a:prstGeom>
           <a:solidFill>
@@ -17071,7 +17503,7 @@
         <p:spPr>
           <a:xfrm>
             <a:off x="7799832" y="1801368"/>
-            <a:ext cx="3145536" cy="758952"/>
+            <a:ext cx="3145536" cy="640080"/>
           </a:xfrm>
           <a:prstGeom prst="rect">
             <a:avLst/>
@@ -17111,12 +17543,12 @@
         </p:nvSpPr>
         <p:spPr>
           <a:xfrm>
-            <a:off x="7635240" y="2788920"/>
-            <a:ext cx="3474720" cy="1536192"/>
+            <a:off x="7635240" y="2670048"/>
+            <a:ext cx="3474720" cy="1377086"/>
           </a:xfrm>
           <a:prstGeom prst="roundRect">
             <a:avLst>
-              <a:gd name="adj" fmla="val 7143"/>
+              <a:gd name="adj" fmla="val 7968"/>
             </a:avLst>
           </a:prstGeom>
           <a:solidFill>
@@ -17138,7 +17570,7 @@
         </p:nvSpPr>
         <p:spPr>
           <a:xfrm>
-            <a:off x="7799832" y="2935224"/>
+            <a:off x="7799832" y="2816352"/>
             <a:ext cx="3145536" cy="256032"/>
           </a:xfrm>
           <a:prstGeom prst="rect">
@@ -17177,8 +17609,8 @@
         </p:nvSpPr>
         <p:spPr>
           <a:xfrm>
-            <a:off x="7818120" y="3300984"/>
-            <a:ext cx="3090672" cy="877824"/>
+            <a:off x="7818120" y="3182112"/>
+            <a:ext cx="3090672" cy="718718"/>
           </a:xfrm>
           <a:prstGeom prst="rect">
             <a:avLst/>
@@ -17252,12 +17684,12 @@
         </p:nvSpPr>
         <p:spPr>
           <a:xfrm>
-            <a:off x="7635240" y="4498848"/>
-            <a:ext cx="3474720" cy="1143000"/>
+            <a:off x="7635240" y="4184294"/>
+            <a:ext cx="3474720" cy="1466698"/>
           </a:xfrm>
           <a:prstGeom prst="roundRect">
             <a:avLst>
-              <a:gd name="adj" fmla="val 9600"/>
+              <a:gd name="adj" fmla="val 7481"/>
             </a:avLst>
           </a:prstGeom>
           <a:solidFill>
@@ -17279,7 +17711,7 @@
         </p:nvSpPr>
         <p:spPr>
           <a:xfrm>
-            <a:off x="7799832" y="4645152"/>
+            <a:off x="7799832" y="4330598"/>
             <a:ext cx="3145536" cy="256032"/>
           </a:xfrm>
           <a:prstGeom prst="rect">
@@ -17318,8 +17750,8 @@
         </p:nvSpPr>
         <p:spPr>
           <a:xfrm>
-            <a:off x="7799832" y="4974336"/>
-            <a:ext cx="3145536" cy="576072"/>
+            <a:off x="7799832" y="4659782"/>
+            <a:ext cx="3145536" cy="899770"/>
           </a:xfrm>
           <a:prstGeom prst="rect">
             <a:avLst/>
@@ -17345,7 +17777,7 @@
                 <a:ea typeface="Aptos" pitchFamily="34" charset="-122"/>
                 <a:cs typeface="Aptos" pitchFamily="34" charset="-120"/>
               </a:rPr>
-              <a:t>Connect the concept to public health purpose, responsible use, required safeguards, documentation, and the next action a.</a:t>
+              <a:t>Connect the concept to public health purpose, responsible use, required safeguards, documentation, and the next action a department should take.</a:t>
             </a:r>
             <a:endParaRPr lang="en-US" sz="1320" dirty="0"/>
           </a:p>

--- a/downloads/presentations/modules/anl-340.pptx
+++ b/downloads/presentations/modules/anl-340.pptx
@@ -3342,8 +3342,8 @@
         </p:nvSpPr>
         <p:spPr>
           <a:xfrm>
-            <a:off x="868680" y="1508760"/>
-            <a:ext cx="6309360" cy="4160520"/>
+            <a:off x="822960" y="1463040"/>
+            <a:ext cx="6565392" cy="4343400"/>
           </a:xfrm>
           <a:prstGeom prst="rect">
             <a:avLst/>
@@ -3361,7 +3361,7 @@
               <a:buNone/>
             </a:pPr>
             <a:r>
-              <a:rPr lang="en-US" sz="2100" dirty="0">
+              <a:rPr lang="en-US" sz="1920" dirty="0">
                 <a:solidFill>
                   <a:srgbClr val="003A63"/>
                 </a:solidFill>
@@ -3369,16 +3369,16 @@
                 <a:ea typeface="Aptos" pitchFamily="34" charset="-122"/>
                 <a:cs typeface="Aptos" pitchFamily="34" charset="-120"/>
               </a:rPr>
-              <a:t>• A local health department uses an AI model to predict which neighborhoods are likely to.</a:t>
-            </a:r>
-            <a:endParaRPr lang="en-US" sz="2100" dirty="0"/>
-          </a:p>
-          <a:p>
-            <a:pPr indent="0" marL="0">
-              <a:buNone/>
-            </a:pPr>
-            <a:r>
-              <a:rPr lang="en-US" sz="2100" dirty="0">
+              <a:t>• A local health department uses an AI model to predict which neighborhoods.</a:t>
+            </a:r>
+            <a:endParaRPr lang="en-US" sz="1920" dirty="0"/>
+          </a:p>
+          <a:p>
+            <a:pPr indent="0" marL="0">
+              <a:buNone/>
+            </a:pPr>
+            <a:r>
+              <a:rPr lang="en-US" sz="1920" dirty="0">
                 <a:solidFill>
                   <a:srgbClr val="003A63"/>
                 </a:solidFill>
@@ -3386,16 +3386,16 @@
                 <a:ea typeface="Aptos" pitchFamily="34" charset="-122"/>
                 <a:cs typeface="Aptos" pitchFamily="34" charset="-120"/>
               </a:rPr>
-              <a:t>• The model may help target outreach, but it does not prove why coverage is low or which outreach.</a:t>
-            </a:r>
-            <a:endParaRPr lang="en-US" sz="2100" dirty="0"/>
-          </a:p>
-          <a:p>
-            <a:pPr indent="0" marL="0">
-              <a:buNone/>
-            </a:pPr>
-            <a:r>
-              <a:rPr lang="en-US" sz="2100" dirty="0">
+              <a:t>• The model may help target outreach, but it does not prove why coverage is.</a:t>
+            </a:r>
+            <a:endParaRPr lang="en-US" sz="1920" dirty="0"/>
+          </a:p>
+          <a:p>
+            <a:pPr indent="0" marL="0">
+              <a:buNone/>
+            </a:pPr>
+            <a:r>
+              <a:rPr lang="en-US" sz="1920" dirty="0">
                 <a:solidFill>
                   <a:srgbClr val="003A63"/>
                 </a:solidFill>
@@ -3403,9 +3403,9 @@
                 <a:ea typeface="Aptos" pitchFamily="34" charset="-122"/>
                 <a:cs typeface="Aptos" pitchFamily="34" charset="-120"/>
               </a:rPr>
-              <a:t>• If leaders want to know whether mobile clinics, reminder messages, school partnerships, or.</a:t>
-            </a:r>
-            <a:endParaRPr lang="en-US" sz="2100" dirty="0"/>
+              <a:t>• If leaders want to know whether mobile clinics, reminder messages, school.</a:t>
+            </a:r>
+            <a:endParaRPr lang="en-US" sz="1920" dirty="0"/>
           </a:p>
         </p:txBody>
       </p:sp>
@@ -3417,12 +3417,12 @@
         </p:nvSpPr>
         <p:spPr>
           <a:xfrm>
-            <a:off x="7635240" y="1325880"/>
-            <a:ext cx="3474720" cy="1255471"/>
+            <a:off x="7543800" y="1325880"/>
+            <a:ext cx="3611880" cy="1261872"/>
           </a:xfrm>
           <a:prstGeom prst="roundRect">
             <a:avLst>
-              <a:gd name="adj" fmla="val 8740"/>
+              <a:gd name="adj" fmla="val 8696"/>
             </a:avLst>
           </a:prstGeom>
           <a:solidFill>
@@ -3444,8 +3444,8 @@
         </p:nvSpPr>
         <p:spPr>
           <a:xfrm>
-            <a:off x="7799832" y="1472184"/>
-            <a:ext cx="3145536" cy="256032"/>
+            <a:off x="7708392" y="1453896"/>
+            <a:ext cx="3282696" cy="228600"/>
           </a:xfrm>
           <a:prstGeom prst="rect">
             <a:avLst/>
@@ -3461,7 +3461,7 @@
               <a:buNone/>
             </a:pPr>
             <a:r>
-              <a:rPr lang="en-US" sz="1300" b="1" dirty="0">
+              <a:rPr lang="en-US" sz="1220" b="1" dirty="0">
                 <a:solidFill>
                   <a:srgbClr val="0068B7"/>
                 </a:solidFill>
@@ -3471,7 +3471,7 @@
               </a:rPr>
               <a:t>Core concept</a:t>
             </a:r>
-            <a:endParaRPr lang="en-US" sz="1300" dirty="0"/>
+            <a:endParaRPr lang="en-US" sz="1220" dirty="0"/>
           </a:p>
         </p:txBody>
       </p:sp>
@@ -3483,8 +3483,8 @@
         </p:nvSpPr>
         <p:spPr>
           <a:xfrm>
-            <a:off x="7799832" y="1801368"/>
-            <a:ext cx="3145536" cy="688543"/>
+            <a:off x="7708392" y="1764792"/>
+            <a:ext cx="3282696" cy="749808"/>
           </a:xfrm>
           <a:prstGeom prst="rect">
             <a:avLst/>
@@ -3502,7 +3502,7 @@
               <a:buNone/>
             </a:pPr>
             <a:r>
-              <a:rPr lang="en-US" sz="1320" dirty="0">
+              <a:rPr lang="en-US" sz="1220" dirty="0">
                 <a:solidFill>
                   <a:srgbClr val="17364A"/>
                 </a:solidFill>
@@ -3510,9 +3510,9 @@
                 <a:ea typeface="Aptos" pitchFamily="34" charset="-122"/>
                 <a:cs typeface="Aptos" pitchFamily="34" charset="-120"/>
               </a:rPr>
-              <a:t>A local health department uses an AI model to predict which neighborhoods are likely to experience low.</a:t>
-            </a:r>
-            <a:endParaRPr lang="en-US" sz="1320" dirty="0"/>
+              <a:t>A local health department uses an AI model to predict which neighborhoods are.</a:t>
+            </a:r>
+            <a:endParaRPr lang="en-US" sz="1220" dirty="0"/>
           </a:p>
         </p:txBody>
       </p:sp>
@@ -3524,12 +3524,12 @@
         </p:nvSpPr>
         <p:spPr>
           <a:xfrm>
-            <a:off x="7635240" y="2718511"/>
-            <a:ext cx="3474720" cy="1328623"/>
+            <a:off x="7543800" y="2724912"/>
+            <a:ext cx="3611880" cy="1527048"/>
           </a:xfrm>
           <a:prstGeom prst="roundRect">
             <a:avLst>
-              <a:gd name="adj" fmla="val 8259"/>
+              <a:gd name="adj" fmla="val 7186"/>
             </a:avLst>
           </a:prstGeom>
           <a:solidFill>
@@ -3551,8 +3551,8 @@
         </p:nvSpPr>
         <p:spPr>
           <a:xfrm>
-            <a:off x="7799832" y="2864815"/>
-            <a:ext cx="3145536" cy="256032"/>
+            <a:off x="7708392" y="2852928"/>
+            <a:ext cx="3282696" cy="228600"/>
           </a:xfrm>
           <a:prstGeom prst="rect">
             <a:avLst/>
@@ -3568,7 +3568,7 @@
               <a:buNone/>
             </a:pPr>
             <a:r>
-              <a:rPr lang="en-US" sz="1300" b="1" dirty="0">
+              <a:rPr lang="en-US" sz="1220" b="1" dirty="0">
                 <a:solidFill>
                   <a:srgbClr val="0068B7"/>
                 </a:solidFill>
@@ -3578,7 +3578,7 @@
               </a:rPr>
               <a:t>Concept checkpoints</a:t>
             </a:r>
-            <a:endParaRPr lang="en-US" sz="1300" dirty="0"/>
+            <a:endParaRPr lang="en-US" sz="1220" dirty="0"/>
           </a:p>
         </p:txBody>
       </p:sp>
@@ -3590,8 +3590,8 @@
         </p:nvSpPr>
         <p:spPr>
           <a:xfrm>
-            <a:off x="7818120" y="3230575"/>
-            <a:ext cx="3090672" cy="670255"/>
+            <a:off x="7726680" y="3182112"/>
+            <a:ext cx="3227832" cy="960120"/>
           </a:xfrm>
           <a:prstGeom prst="rect">
             <a:avLst/>
@@ -3609,7 +3609,7 @@
               <a:buNone/>
             </a:pPr>
             <a:r>
-              <a:rPr lang="en-US" sz="1220" dirty="0">
+              <a:rPr lang="en-US" sz="1140" dirty="0">
                 <a:solidFill>
                   <a:srgbClr val="17364A"/>
                 </a:solidFill>
@@ -3617,16 +3617,16 @@
                 <a:ea typeface="Aptos" pitchFamily="34" charset="-122"/>
                 <a:cs typeface="Aptos" pitchFamily="34" charset="-120"/>
               </a:rPr>
-              <a:t>A local health department uses an AI model to predict which.</a:t>
-            </a:r>
-            <a:endParaRPr lang="en-US" sz="1220" dirty="0"/>
-          </a:p>
-          <a:p>
-            <a:pPr indent="0" marL="0">
-              <a:buNone/>
-            </a:pPr>
-            <a:r>
-              <a:rPr lang="en-US" sz="1220" dirty="0">
+              <a:t>A local health department uses an AI model to.</a:t>
+            </a:r>
+            <a:endParaRPr lang="en-US" sz="1140" dirty="0"/>
+          </a:p>
+          <a:p>
+            <a:pPr indent="0" marL="0">
+              <a:buNone/>
+            </a:pPr>
+            <a:r>
+              <a:rPr lang="en-US" sz="1140" dirty="0">
                 <a:solidFill>
                   <a:srgbClr val="17364A"/>
                 </a:solidFill>
@@ -3634,16 +3634,16 @@
                 <a:ea typeface="Aptos" pitchFamily="34" charset="-122"/>
                 <a:cs typeface="Aptos" pitchFamily="34" charset="-120"/>
               </a:rPr>
-              <a:t>The model may help target outreach, but it does not prove why.</a:t>
-            </a:r>
-            <a:endParaRPr lang="en-US" sz="1220" dirty="0"/>
-          </a:p>
-          <a:p>
-            <a:pPr indent="0" marL="0">
-              <a:buNone/>
-            </a:pPr>
-            <a:r>
-              <a:rPr lang="en-US" sz="1220" dirty="0">
+              <a:t>The model may help target outreach, but it does.</a:t>
+            </a:r>
+            <a:endParaRPr lang="en-US" sz="1140" dirty="0"/>
+          </a:p>
+          <a:p>
+            <a:pPr indent="0" marL="0">
+              <a:buNone/>
+            </a:pPr>
+            <a:r>
+              <a:rPr lang="en-US" sz="1140" dirty="0">
                 <a:solidFill>
                   <a:srgbClr val="17364A"/>
                 </a:solidFill>
@@ -3651,9 +3651,9 @@
                 <a:ea typeface="Aptos" pitchFamily="34" charset="-122"/>
                 <a:cs typeface="Aptos" pitchFamily="34" charset="-120"/>
               </a:rPr>
-              <a:t>If leaders want to know whether mobile clinics, reminder messages,.</a:t>
-            </a:r>
-            <a:endParaRPr lang="en-US" sz="1220" dirty="0"/>
+              <a:t>If leaders want to know whether mobile clinics,.</a:t>
+            </a:r>
+            <a:endParaRPr lang="en-US" sz="1140" dirty="0"/>
           </a:p>
         </p:txBody>
       </p:sp>
@@ -3665,12 +3665,12 @@
         </p:nvSpPr>
         <p:spPr>
           <a:xfrm>
-            <a:off x="7635240" y="4184294"/>
-            <a:ext cx="3474720" cy="1466698"/>
+            <a:off x="7543800" y="4389120"/>
+            <a:ext cx="3611880" cy="1261872"/>
           </a:xfrm>
           <a:prstGeom prst="roundRect">
             <a:avLst>
-              <a:gd name="adj" fmla="val 7481"/>
+              <a:gd name="adj" fmla="val 8696"/>
             </a:avLst>
           </a:prstGeom>
           <a:solidFill>
@@ -3692,8 +3692,8 @@
         </p:nvSpPr>
         <p:spPr>
           <a:xfrm>
-            <a:off x="7799832" y="4330598"/>
-            <a:ext cx="3145536" cy="256032"/>
+            <a:off x="7708392" y="4517136"/>
+            <a:ext cx="3282696" cy="228600"/>
           </a:xfrm>
           <a:prstGeom prst="rect">
             <a:avLst/>
@@ -3709,7 +3709,7 @@
               <a:buNone/>
             </a:pPr>
             <a:r>
-              <a:rPr lang="en-US" sz="1300" b="1" dirty="0">
+              <a:rPr lang="en-US" sz="1220" b="1" dirty="0">
                 <a:solidFill>
                   <a:srgbClr val="0068B7"/>
                 </a:solidFill>
@@ -3719,7 +3719,7 @@
               </a:rPr>
               <a:t>Apply it</a:t>
             </a:r>
-            <a:endParaRPr lang="en-US" sz="1300" dirty="0"/>
+            <a:endParaRPr lang="en-US" sz="1220" dirty="0"/>
           </a:p>
         </p:txBody>
       </p:sp>
@@ -3731,8 +3731,8 @@
         </p:nvSpPr>
         <p:spPr>
           <a:xfrm>
-            <a:off x="7799832" y="4659782"/>
-            <a:ext cx="3145536" cy="899770"/>
+            <a:off x="7708392" y="4828032"/>
+            <a:ext cx="3282696" cy="749808"/>
           </a:xfrm>
           <a:prstGeom prst="rect">
             <a:avLst/>
@@ -3750,7 +3750,7 @@
               <a:buNone/>
             </a:pPr>
             <a:r>
-              <a:rPr lang="en-US" sz="1320" dirty="0">
+              <a:rPr lang="en-US" sz="1220" dirty="0">
                 <a:solidFill>
                   <a:srgbClr val="17364A"/>
                 </a:solidFill>
@@ -3758,9 +3758,9 @@
                 <a:ea typeface="Aptos" pitchFamily="34" charset="-122"/>
                 <a:cs typeface="Aptos" pitchFamily="34" charset="-120"/>
               </a:rPr>
-              <a:t>Connect the concept to public health purpose, responsible use, required safeguards, documentation, and the next action a department should take.</a:t>
-            </a:r>
-            <a:endParaRPr lang="en-US" sz="1320" dirty="0"/>
+              <a:t>Connect the concept to public health purpose, responsible use, required.</a:t>
+            </a:r>
+            <a:endParaRPr lang="en-US" sz="1220" dirty="0"/>
           </a:p>
         </p:txBody>
       </p:sp>
@@ -4051,8 +4051,8 @@
         </p:nvSpPr>
         <p:spPr>
           <a:xfrm>
-            <a:off x="868680" y="1508760"/>
-            <a:ext cx="6309360" cy="4160520"/>
+            <a:off x="822960" y="1463040"/>
+            <a:ext cx="6565392" cy="4343400"/>
           </a:xfrm>
           <a:prstGeom prst="rect">
             <a:avLst/>
@@ -4070,7 +4070,7 @@
               <a:buNone/>
             </a:pPr>
             <a:r>
-              <a:rPr lang="en-US" sz="2100" dirty="0">
+              <a:rPr lang="en-US" sz="1920" dirty="0">
                 <a:solidFill>
                   <a:srgbClr val="003A63"/>
                 </a:solidFill>
@@ -4080,14 +4080,14 @@
               </a:rPr>
               <a:t>• Causal inference begins with a clearly framed question.</a:t>
             </a:r>
-            <a:endParaRPr lang="en-US" sz="2100" dirty="0"/>
-          </a:p>
-          <a:p>
-            <a:pPr indent="0" marL="0">
-              <a:buNone/>
-            </a:pPr>
-            <a:r>
-              <a:rPr lang="en-US" sz="2100" dirty="0">
+            <a:endParaRPr lang="en-US" sz="1920" dirty="0"/>
+          </a:p>
+          <a:p>
+            <a:pPr indent="0" marL="0">
+              <a:buNone/>
+            </a:pPr>
+            <a:r>
+              <a:rPr lang="en-US" sz="1920" dirty="0">
                 <a:solidFill>
                   <a:srgbClr val="003A63"/>
                 </a:solidFill>
@@ -4095,16 +4095,16 @@
                 <a:ea typeface="Aptos" pitchFamily="34" charset="-122"/>
                 <a:cs typeface="Aptos" pitchFamily="34" charset="-120"/>
               </a:rPr>
-              <a:t>• A useful structure is: among which population, what is the intervention or exposure, what is.</a:t>
-            </a:r>
-            <a:endParaRPr lang="en-US" sz="2100" dirty="0"/>
-          </a:p>
-          <a:p>
-            <a:pPr indent="0" marL="0">
-              <a:buNone/>
-            </a:pPr>
-            <a:r>
-              <a:rPr lang="en-US" sz="2100" dirty="0">
+              <a:t>• A useful structure is: among which population, what is the intervention or.</a:t>
+            </a:r>
+            <a:endParaRPr lang="en-US" sz="1920" dirty="0"/>
+          </a:p>
+          <a:p>
+            <a:pPr indent="0" marL="0">
+              <a:buNone/>
+            </a:pPr>
+            <a:r>
+              <a:rPr lang="en-US" sz="1920" dirty="0">
                 <a:solidFill>
                   <a:srgbClr val="003A63"/>
                 </a:solidFill>
@@ -4112,9 +4112,9 @@
                 <a:ea typeface="Aptos" pitchFamily="34" charset="-122"/>
                 <a:cs typeface="Aptos" pitchFamily="34" charset="-120"/>
               </a:rPr>
-              <a:t>• Without this structure, teams may ask a model to answer a question that the available data.</a:t>
-            </a:r>
-            <a:endParaRPr lang="en-US" sz="2100" dirty="0"/>
+              <a:t>• Without this structure, teams may ask a model to answer a question that the.</a:t>
+            </a:r>
+            <a:endParaRPr lang="en-US" sz="1920" dirty="0"/>
           </a:p>
         </p:txBody>
       </p:sp>
@@ -4126,12 +4126,12 @@
         </p:nvSpPr>
         <p:spPr>
           <a:xfrm>
-            <a:off x="7635240" y="1325880"/>
-            <a:ext cx="3474720" cy="1207008"/>
+            <a:off x="7543800" y="1325880"/>
+            <a:ext cx="3611880" cy="1261872"/>
           </a:xfrm>
           <a:prstGeom prst="roundRect">
             <a:avLst>
-              <a:gd name="adj" fmla="val 9091"/>
+              <a:gd name="adj" fmla="val 8696"/>
             </a:avLst>
           </a:prstGeom>
           <a:solidFill>
@@ -4153,8 +4153,8 @@
         </p:nvSpPr>
         <p:spPr>
           <a:xfrm>
-            <a:off x="7799832" y="1472184"/>
-            <a:ext cx="3145536" cy="256032"/>
+            <a:off x="7708392" y="1453896"/>
+            <a:ext cx="3282696" cy="228600"/>
           </a:xfrm>
           <a:prstGeom prst="rect">
             <a:avLst/>
@@ -4170,7 +4170,7 @@
               <a:buNone/>
             </a:pPr>
             <a:r>
-              <a:rPr lang="en-US" sz="1300" b="1" dirty="0">
+              <a:rPr lang="en-US" sz="1220" b="1" dirty="0">
                 <a:solidFill>
                   <a:srgbClr val="0068B7"/>
                 </a:solidFill>
@@ -4180,7 +4180,7 @@
               </a:rPr>
               <a:t>Core concept</a:t>
             </a:r>
-            <a:endParaRPr lang="en-US" sz="1300" dirty="0"/>
+            <a:endParaRPr lang="en-US" sz="1220" dirty="0"/>
           </a:p>
         </p:txBody>
       </p:sp>
@@ -4192,8 +4192,8 @@
         </p:nvSpPr>
         <p:spPr>
           <a:xfrm>
-            <a:off x="7799832" y="1801368"/>
-            <a:ext cx="3145536" cy="640080"/>
+            <a:off x="7708392" y="1764792"/>
+            <a:ext cx="3282696" cy="749808"/>
           </a:xfrm>
           <a:prstGeom prst="rect">
             <a:avLst/>
@@ -4211,7 +4211,7 @@
               <a:buNone/>
             </a:pPr>
             <a:r>
-              <a:rPr lang="en-US" sz="1320" dirty="0">
+              <a:rPr lang="en-US" sz="1220" dirty="0">
                 <a:solidFill>
                   <a:srgbClr val="17364A"/>
                 </a:solidFill>
@@ -4221,7 +4221,7 @@
               </a:rPr>
               <a:t>Causal inference begins with a clearly framed question.</a:t>
             </a:r>
-            <a:endParaRPr lang="en-US" sz="1320" dirty="0"/>
+            <a:endParaRPr lang="en-US" sz="1220" dirty="0"/>
           </a:p>
         </p:txBody>
       </p:sp>
@@ -4233,12 +4233,12 @@
         </p:nvSpPr>
         <p:spPr>
           <a:xfrm>
-            <a:off x="7635240" y="2670048"/>
-            <a:ext cx="3474720" cy="1377086"/>
+            <a:off x="7543800" y="2724912"/>
+            <a:ext cx="3611880" cy="1527048"/>
           </a:xfrm>
           <a:prstGeom prst="roundRect">
             <a:avLst>
-              <a:gd name="adj" fmla="val 7968"/>
+              <a:gd name="adj" fmla="val 7186"/>
             </a:avLst>
           </a:prstGeom>
           <a:solidFill>
@@ -4260,8 +4260,8 @@
         </p:nvSpPr>
         <p:spPr>
           <a:xfrm>
-            <a:off x="7799832" y="2816352"/>
-            <a:ext cx="3145536" cy="256032"/>
+            <a:off x="7708392" y="2852928"/>
+            <a:ext cx="3282696" cy="228600"/>
           </a:xfrm>
           <a:prstGeom prst="rect">
             <a:avLst/>
@@ -4277,7 +4277,7 @@
               <a:buNone/>
             </a:pPr>
             <a:r>
-              <a:rPr lang="en-US" sz="1300" b="1" dirty="0">
+              <a:rPr lang="en-US" sz="1220" b="1" dirty="0">
                 <a:solidFill>
                   <a:srgbClr val="0068B7"/>
                 </a:solidFill>
@@ -4287,7 +4287,7 @@
               </a:rPr>
               <a:t>Concept checkpoints</a:t>
             </a:r>
-            <a:endParaRPr lang="en-US" sz="1300" dirty="0"/>
+            <a:endParaRPr lang="en-US" sz="1220" dirty="0"/>
           </a:p>
         </p:txBody>
       </p:sp>
@@ -4299,8 +4299,8 @@
         </p:nvSpPr>
         <p:spPr>
           <a:xfrm>
-            <a:off x="7818120" y="3182112"/>
-            <a:ext cx="3090672" cy="718718"/>
+            <a:off x="7726680" y="3182112"/>
+            <a:ext cx="3227832" cy="960120"/>
           </a:xfrm>
           <a:prstGeom prst="rect">
             <a:avLst/>
@@ -4318,7 +4318,7 @@
               <a:buNone/>
             </a:pPr>
             <a:r>
-              <a:rPr lang="en-US" sz="1220" dirty="0">
+              <a:rPr lang="en-US" sz="1140" dirty="0">
                 <a:solidFill>
                   <a:srgbClr val="17364A"/>
                 </a:solidFill>
@@ -4326,16 +4326,16 @@
                 <a:ea typeface="Aptos" pitchFamily="34" charset="-122"/>
                 <a:cs typeface="Aptos" pitchFamily="34" charset="-120"/>
               </a:rPr>
-              <a:t>A useful structure is: among which population, what is the.</a:t>
-            </a:r>
-            <a:endParaRPr lang="en-US" sz="1220" dirty="0"/>
-          </a:p>
-          <a:p>
-            <a:pPr indent="0" marL="0">
-              <a:buNone/>
-            </a:pPr>
-            <a:r>
-              <a:rPr lang="en-US" sz="1220" dirty="0">
+              <a:t>A useful structure is: among which population,.</a:t>
+            </a:r>
+            <a:endParaRPr lang="en-US" sz="1140" dirty="0"/>
+          </a:p>
+          <a:p>
+            <a:pPr indent="0" marL="0">
+              <a:buNone/>
+            </a:pPr>
+            <a:r>
+              <a:rPr lang="en-US" sz="1140" dirty="0">
                 <a:solidFill>
                   <a:srgbClr val="17364A"/>
                 </a:solidFill>
@@ -4343,16 +4343,16 @@
                 <a:ea typeface="Aptos" pitchFamily="34" charset="-122"/>
                 <a:cs typeface="Aptos" pitchFamily="34" charset="-120"/>
               </a:rPr>
-              <a:t>Without this structure, teams may ask a model to answer a question.</a:t>
-            </a:r>
-            <a:endParaRPr lang="en-US" sz="1220" dirty="0"/>
-          </a:p>
-          <a:p>
-            <a:pPr indent="0" marL="0">
-              <a:buNone/>
-            </a:pPr>
-            <a:r>
-              <a:rPr lang="en-US" sz="1220" dirty="0">
+              <a:t>Without this structure, teams may ask a model to.</a:t>
+            </a:r>
+            <a:endParaRPr lang="en-US" sz="1140" dirty="0"/>
+          </a:p>
+          <a:p>
+            <a:pPr indent="0" marL="0">
+              <a:buNone/>
+            </a:pPr>
+            <a:r>
+              <a:rPr lang="en-US" sz="1140" dirty="0">
                 <a:solidFill>
                   <a:srgbClr val="17364A"/>
                 </a:solidFill>
@@ -4362,7 +4362,7 @@
               </a:rPr>
               <a:t>Confounding is one of the most important threats.</a:t>
             </a:r>
-            <a:endParaRPr lang="en-US" sz="1220" dirty="0"/>
+            <a:endParaRPr lang="en-US" sz="1140" dirty="0"/>
           </a:p>
         </p:txBody>
       </p:sp>
@@ -4374,12 +4374,12 @@
         </p:nvSpPr>
         <p:spPr>
           <a:xfrm>
-            <a:off x="7635240" y="4184294"/>
-            <a:ext cx="3474720" cy="1466698"/>
+            <a:off x="7543800" y="4389120"/>
+            <a:ext cx="3611880" cy="1261872"/>
           </a:xfrm>
           <a:prstGeom prst="roundRect">
             <a:avLst>
-              <a:gd name="adj" fmla="val 7481"/>
+              <a:gd name="adj" fmla="val 8696"/>
             </a:avLst>
           </a:prstGeom>
           <a:solidFill>
@@ -4401,8 +4401,8 @@
         </p:nvSpPr>
         <p:spPr>
           <a:xfrm>
-            <a:off x="7799832" y="4330598"/>
-            <a:ext cx="3145536" cy="256032"/>
+            <a:off x="7708392" y="4517136"/>
+            <a:ext cx="3282696" cy="228600"/>
           </a:xfrm>
           <a:prstGeom prst="rect">
             <a:avLst/>
@@ -4418,7 +4418,7 @@
               <a:buNone/>
             </a:pPr>
             <a:r>
-              <a:rPr lang="en-US" sz="1300" b="1" dirty="0">
+              <a:rPr lang="en-US" sz="1220" b="1" dirty="0">
                 <a:solidFill>
                   <a:srgbClr val="0068B7"/>
                 </a:solidFill>
@@ -4428,7 +4428,7 @@
               </a:rPr>
               <a:t>Apply it</a:t>
             </a:r>
-            <a:endParaRPr lang="en-US" sz="1300" dirty="0"/>
+            <a:endParaRPr lang="en-US" sz="1220" dirty="0"/>
           </a:p>
         </p:txBody>
       </p:sp>
@@ -4440,8 +4440,8 @@
         </p:nvSpPr>
         <p:spPr>
           <a:xfrm>
-            <a:off x="7799832" y="4659782"/>
-            <a:ext cx="3145536" cy="899770"/>
+            <a:off x="7708392" y="4828032"/>
+            <a:ext cx="3282696" cy="749808"/>
           </a:xfrm>
           <a:prstGeom prst="rect">
             <a:avLst/>
@@ -4459,7 +4459,7 @@
               <a:buNone/>
             </a:pPr>
             <a:r>
-              <a:rPr lang="en-US" sz="1320" dirty="0">
+              <a:rPr lang="en-US" sz="1220" dirty="0">
                 <a:solidFill>
                   <a:srgbClr val="17364A"/>
                 </a:solidFill>
@@ -4467,9 +4467,9 @@
                 <a:ea typeface="Aptos" pitchFamily="34" charset="-122"/>
                 <a:cs typeface="Aptos" pitchFamily="34" charset="-120"/>
               </a:rPr>
-              <a:t>Connect the concept to public health purpose, responsible use, required safeguards, documentation, and the next action a department should take.</a:t>
-            </a:r>
-            <a:endParaRPr lang="en-US" sz="1320" dirty="0"/>
+              <a:t>Connect the concept to public health purpose, responsible use, required.</a:t>
+            </a:r>
+            <a:endParaRPr lang="en-US" sz="1220" dirty="0"/>
           </a:p>
         </p:txBody>
       </p:sp>
@@ -4760,8 +4760,8 @@
         </p:nvSpPr>
         <p:spPr>
           <a:xfrm>
-            <a:off x="868680" y="1508760"/>
-            <a:ext cx="6309360" cy="4160520"/>
+            <a:off x="822960" y="1463040"/>
+            <a:ext cx="6565392" cy="4343400"/>
           </a:xfrm>
           <a:prstGeom prst="rect">
             <a:avLst/>
@@ -4779,7 +4779,7 @@
               <a:buNone/>
             </a:pPr>
             <a:r>
-              <a:rPr lang="en-US" sz="2100" dirty="0">
+              <a:rPr lang="en-US" sz="1920" dirty="0">
                 <a:solidFill>
                   <a:srgbClr val="003A63"/>
                 </a:solidFill>
@@ -4789,14 +4789,14 @@
               </a:rPr>
               <a:t>• The main failure mode is causal overreach.</a:t>
             </a:r>
-            <a:endParaRPr lang="en-US" sz="2100" dirty="0"/>
-          </a:p>
-          <a:p>
-            <a:pPr indent="0" marL="0">
-              <a:buNone/>
-            </a:pPr>
-            <a:r>
-              <a:rPr lang="en-US" sz="2100" dirty="0">
+            <a:endParaRPr lang="en-US" sz="1920" dirty="0"/>
+          </a:p>
+          <a:p>
+            <a:pPr indent="0" marL="0">
+              <a:buNone/>
+            </a:pPr>
+            <a:r>
+              <a:rPr lang="en-US" sz="1920" dirty="0">
                 <a:solidFill>
                   <a:srgbClr val="003A63"/>
                 </a:solidFill>
@@ -4804,16 +4804,16 @@
                 <a:ea typeface="Aptos" pitchFamily="34" charset="-122"/>
                 <a:cs typeface="Aptos" pitchFamily="34" charset="-120"/>
               </a:rPr>
-              <a:t>• A dashboard or AI report may state that a program reduced disease, improved access, or changed.</a:t>
-            </a:r>
-            <a:endParaRPr lang="en-US" sz="2100" dirty="0"/>
-          </a:p>
-          <a:p>
-            <a:pPr indent="0" marL="0">
-              <a:buNone/>
-            </a:pPr>
-            <a:r>
-              <a:rPr lang="en-US" sz="2100" dirty="0">
+              <a:t>• A dashboard or AI report may state that a program reduced disease, improved.</a:t>
+            </a:r>
+            <a:endParaRPr lang="en-US" sz="1920" dirty="0"/>
+          </a:p>
+          <a:p>
+            <a:pPr indent="0" marL="0">
+              <a:buNone/>
+            </a:pPr>
+            <a:r>
+              <a:rPr lang="en-US" sz="1920" dirty="0">
                 <a:solidFill>
                   <a:srgbClr val="003A63"/>
                 </a:solidFill>
@@ -4821,9 +4821,9 @@
                 <a:ea typeface="Aptos" pitchFamily="34" charset="-122"/>
                 <a:cs typeface="Aptos" pitchFamily="34" charset="-120"/>
               </a:rPr>
-              <a:t>• A guardrail is to require causal language review before results are used in reports, funding.</a:t>
-            </a:r>
-            <a:endParaRPr lang="en-US" sz="2100" dirty="0"/>
+              <a:t>• A guardrail is to require causal language review before results are used in.</a:t>
+            </a:r>
+            <a:endParaRPr lang="en-US" sz="1920" dirty="0"/>
           </a:p>
         </p:txBody>
       </p:sp>
@@ -4835,12 +4835,12 @@
         </p:nvSpPr>
         <p:spPr>
           <a:xfrm>
-            <a:off x="7635240" y="1325880"/>
-            <a:ext cx="3474720" cy="1207008"/>
+            <a:off x="7543800" y="1325880"/>
+            <a:ext cx="3611880" cy="1261872"/>
           </a:xfrm>
           <a:prstGeom prst="roundRect">
             <a:avLst>
-              <a:gd name="adj" fmla="val 9091"/>
+              <a:gd name="adj" fmla="val 8696"/>
             </a:avLst>
           </a:prstGeom>
           <a:solidFill>
@@ -4862,8 +4862,8 @@
         </p:nvSpPr>
         <p:spPr>
           <a:xfrm>
-            <a:off x="7799832" y="1472184"/>
-            <a:ext cx="3145536" cy="256032"/>
+            <a:off x="7708392" y="1453896"/>
+            <a:ext cx="3282696" cy="228600"/>
           </a:xfrm>
           <a:prstGeom prst="rect">
             <a:avLst/>
@@ -4879,7 +4879,7 @@
               <a:buNone/>
             </a:pPr>
             <a:r>
-              <a:rPr lang="en-US" sz="1300" b="1" dirty="0">
+              <a:rPr lang="en-US" sz="1220" b="1" dirty="0">
                 <a:solidFill>
                   <a:srgbClr val="0068B7"/>
                 </a:solidFill>
@@ -4889,7 +4889,7 @@
               </a:rPr>
               <a:t>Risk check</a:t>
             </a:r>
-            <a:endParaRPr lang="en-US" sz="1300" dirty="0"/>
+            <a:endParaRPr lang="en-US" sz="1220" dirty="0"/>
           </a:p>
         </p:txBody>
       </p:sp>
@@ -4901,8 +4901,8 @@
         </p:nvSpPr>
         <p:spPr>
           <a:xfrm>
-            <a:off x="7799832" y="1801368"/>
-            <a:ext cx="3145536" cy="640080"/>
+            <a:off x="7708392" y="1764792"/>
+            <a:ext cx="3282696" cy="749808"/>
           </a:xfrm>
           <a:prstGeom prst="rect">
             <a:avLst/>
@@ -4920,7 +4920,7 @@
               <a:buNone/>
             </a:pPr>
             <a:r>
-              <a:rPr lang="en-US" sz="1320" dirty="0">
+              <a:rPr lang="en-US" sz="1220" dirty="0">
                 <a:solidFill>
                   <a:srgbClr val="17364A"/>
                 </a:solidFill>
@@ -4930,7 +4930,7 @@
               </a:rPr>
               <a:t>The main failure mode is causal overreach.</a:t>
             </a:r>
-            <a:endParaRPr lang="en-US" sz="1320" dirty="0"/>
+            <a:endParaRPr lang="en-US" sz="1220" dirty="0"/>
           </a:p>
         </p:txBody>
       </p:sp>
@@ -4942,12 +4942,12 @@
         </p:nvSpPr>
         <p:spPr>
           <a:xfrm>
-            <a:off x="7635240" y="2670048"/>
-            <a:ext cx="3474720" cy="1536192"/>
+            <a:off x="7543800" y="2724912"/>
+            <a:ext cx="3611880" cy="1527048"/>
           </a:xfrm>
           <a:prstGeom prst="roundRect">
             <a:avLst>
-              <a:gd name="adj" fmla="val 7143"/>
+              <a:gd name="adj" fmla="val 7186"/>
             </a:avLst>
           </a:prstGeom>
           <a:solidFill>
@@ -4969,24 +4969,26 @@
         </p:nvSpPr>
         <p:spPr>
           <a:xfrm>
-            <a:off x="7799832" y="2798064"/>
-            <a:ext cx="3145536" cy="237744"/>
-          </a:xfrm>
-          <a:prstGeom prst="rect">
-            <a:avLst/>
-          </a:prstGeom>
-          <a:noFill/>
-          <a:ln/>
-        </p:spPr>
-        <p:txBody>
-          <a:bodyPr wrap="square" lIns="0" tIns="0" rIns="0" bIns="0" rtlCol="0" anchor="ctr"/>
-          <a:lstStyle/>
-          <a:p>
-            <a:pPr indent="0" marL="0">
-              <a:buNone/>
-            </a:pPr>
-            <a:r>
-              <a:rPr lang="en-US" sz="1250" b="1" dirty="0">
+            <a:off x="7708392" y="2852928"/>
+            <a:ext cx="3282696" cy="219456"/>
+          </a:xfrm>
+          <a:prstGeom prst="rect">
+            <a:avLst/>
+          </a:prstGeom>
+          <a:noFill/>
+          <a:ln/>
+        </p:spPr>
+        <p:txBody>
+          <a:bodyPr wrap="square" lIns="0" tIns="0" rIns="0" bIns="0" rtlCol="0" anchor="ctr">
+            <a:normAutofit/>
+          </a:bodyPr>
+          <a:lstStyle/>
+          <a:p>
+            <a:pPr indent="0" marL="0">
+              <a:buNone/>
+            </a:pPr>
+            <a:r>
+              <a:rPr lang="en-US" sz="1160" b="1" dirty="0">
                 <a:solidFill>
                   <a:srgbClr val="0068B7"/>
                 </a:solidFill>
@@ -4996,7 +4998,7 @@
               </a:rPr>
               <a:t>Risk control loop</a:t>
             </a:r>
-            <a:endParaRPr lang="en-US" sz="1250" dirty="0"/>
+            <a:endParaRPr lang="en-US" sz="1160" dirty="0"/>
           </a:p>
         </p:txBody>
       </p:sp>
@@ -5008,7 +5010,7 @@
         </p:nvSpPr>
         <p:spPr>
           <a:xfrm>
-            <a:off x="8763000" y="3351276"/>
+            <a:off x="8717280" y="3406140"/>
             <a:ext cx="164592" cy="0"/>
           </a:xfrm>
           <a:prstGeom prst="line">
@@ -5031,8 +5033,8 @@
         </p:nvSpPr>
         <p:spPr>
           <a:xfrm>
-            <a:off x="7872984" y="3200400"/>
-            <a:ext cx="890016" cy="301752"/>
+            <a:off x="7781544" y="3255264"/>
+            <a:ext cx="935736" cy="301752"/>
           </a:xfrm>
           <a:prstGeom prst="roundRect">
             <a:avLst>
@@ -5058,8 +5060,8 @@
         </p:nvSpPr>
         <p:spPr>
           <a:xfrm>
-            <a:off x="7909560" y="3273552"/>
-            <a:ext cx="816864" cy="146304"/>
+            <a:off x="7818120" y="3328416"/>
+            <a:ext cx="862584" cy="146304"/>
           </a:xfrm>
           <a:prstGeom prst="rect">
             <a:avLst/>
@@ -5099,7 +5101,7 @@
         </p:nvSpPr>
         <p:spPr>
           <a:xfrm>
-            <a:off x="9817608" y="3351276"/>
+            <a:off x="9817608" y="3406140"/>
             <a:ext cx="164592" cy="0"/>
           </a:xfrm>
           <a:prstGeom prst="line">
@@ -5122,8 +5124,8 @@
         </p:nvSpPr>
         <p:spPr>
           <a:xfrm>
-            <a:off x="8927592" y="3200400"/>
-            <a:ext cx="890016" cy="301752"/>
+            <a:off x="8881872" y="3255264"/>
+            <a:ext cx="935736" cy="301752"/>
           </a:xfrm>
           <a:prstGeom prst="roundRect">
             <a:avLst>
@@ -5149,8 +5151,8 @@
         </p:nvSpPr>
         <p:spPr>
           <a:xfrm>
-            <a:off x="8964168" y="3273552"/>
-            <a:ext cx="816864" cy="146304"/>
+            <a:off x="8918448" y="3328416"/>
+            <a:ext cx="862584" cy="146304"/>
           </a:xfrm>
           <a:prstGeom prst="rect">
             <a:avLst/>
@@ -5190,8 +5192,8 @@
         </p:nvSpPr>
         <p:spPr>
           <a:xfrm>
-            <a:off x="9982200" y="3200400"/>
-            <a:ext cx="890016" cy="301752"/>
+            <a:off x="9982200" y="3255264"/>
+            <a:ext cx="935736" cy="301752"/>
           </a:xfrm>
           <a:prstGeom prst="roundRect">
             <a:avLst>
@@ -5217,8 +5219,8 @@
         </p:nvSpPr>
         <p:spPr>
           <a:xfrm>
-            <a:off x="10018776" y="3273552"/>
-            <a:ext cx="816864" cy="146304"/>
+            <a:off x="10018776" y="3328416"/>
+            <a:ext cx="862584" cy="146304"/>
           </a:xfrm>
           <a:prstGeom prst="rect">
             <a:avLst/>
@@ -5258,8 +5260,8 @@
         </p:nvSpPr>
         <p:spPr>
           <a:xfrm>
-            <a:off x="7854696" y="3694176"/>
-            <a:ext cx="3035808" cy="365760"/>
+            <a:off x="7763256" y="3749040"/>
+            <a:ext cx="3172968" cy="356616"/>
           </a:xfrm>
           <a:prstGeom prst="rect">
             <a:avLst/>
@@ -5277,7 +5279,7 @@
               <a:buNone/>
             </a:pPr>
             <a:r>
-              <a:rPr lang="en-US" sz="1120" dirty="0">
+              <a:rPr lang="en-US" sz="1040" dirty="0">
                 <a:solidFill>
                   <a:srgbClr val="17364A"/>
                 </a:solidFill>
@@ -5285,9 +5287,9 @@
                 <a:ea typeface="Aptos" pitchFamily="34" charset="-122"/>
                 <a:cs typeface="Aptos" pitchFamily="34" charset="-120"/>
               </a:rPr>
-              <a:t>Responsible use depends on finding risks early, applying safeguards, and watching for drift or harm over time.</a:t>
-            </a:r>
-            <a:endParaRPr lang="en-US" sz="1120" dirty="0"/>
+              <a:t>Responsible use depends on finding risks early, applying safeguards,.</a:t>
+            </a:r>
+            <a:endParaRPr lang="en-US" sz="1040" dirty="0"/>
           </a:p>
         </p:txBody>
       </p:sp>
@@ -5299,12 +5301,12 @@
         </p:nvSpPr>
         <p:spPr>
           <a:xfrm>
-            <a:off x="7635240" y="4343400"/>
-            <a:ext cx="3474720" cy="1255471"/>
+            <a:off x="7543800" y="4389120"/>
+            <a:ext cx="3611880" cy="1261872"/>
           </a:xfrm>
           <a:prstGeom prst="roundRect">
             <a:avLst>
-              <a:gd name="adj" fmla="val 8740"/>
+              <a:gd name="adj" fmla="val 8696"/>
             </a:avLst>
           </a:prstGeom>
           <a:solidFill>
@@ -5326,8 +5328,8 @@
         </p:nvSpPr>
         <p:spPr>
           <a:xfrm>
-            <a:off x="7799832" y="4489704"/>
-            <a:ext cx="3145536" cy="256032"/>
+            <a:off x="7708392" y="4517136"/>
+            <a:ext cx="3282696" cy="228600"/>
           </a:xfrm>
           <a:prstGeom prst="rect">
             <a:avLst/>
@@ -5343,7 +5345,7 @@
               <a:buNone/>
             </a:pPr>
             <a:r>
-              <a:rPr lang="en-US" sz="1300" b="1" dirty="0">
+              <a:rPr lang="en-US" sz="1220" b="1" dirty="0">
                 <a:solidFill>
                   <a:srgbClr val="0068B7"/>
                 </a:solidFill>
@@ -5353,7 +5355,7 @@
               </a:rPr>
               <a:t>Safeguard to plan</a:t>
             </a:r>
-            <a:endParaRPr lang="en-US" sz="1300" dirty="0"/>
+            <a:endParaRPr lang="en-US" sz="1220" dirty="0"/>
           </a:p>
         </p:txBody>
       </p:sp>
@@ -5365,8 +5367,8 @@
         </p:nvSpPr>
         <p:spPr>
           <a:xfrm>
-            <a:off x="7799832" y="4818888"/>
-            <a:ext cx="3145536" cy="688543"/>
+            <a:off x="7708392" y="4828032"/>
+            <a:ext cx="3282696" cy="749808"/>
           </a:xfrm>
           <a:prstGeom prst="rect">
             <a:avLst/>
@@ -5384,7 +5386,7 @@
               <a:buNone/>
             </a:pPr>
             <a:r>
-              <a:rPr lang="en-US" sz="1320" dirty="0">
+              <a:rPr lang="en-US" sz="1220" dirty="0">
                 <a:solidFill>
                   <a:srgbClr val="17364A"/>
                 </a:solidFill>
@@ -5392,9 +5394,9 @@
                 <a:ea typeface="Aptos" pitchFamily="34" charset="-122"/>
                 <a:cs typeface="Aptos" pitchFamily="34" charset="-120"/>
               </a:rPr>
-              <a:t>Identify what could go wrong, who could be affected, what safeguards are needed, and what evidence should be reviewed before use.</a:t>
-            </a:r>
-            <a:endParaRPr lang="en-US" sz="1320" dirty="0"/>
+              <a:t>Identify what could go wrong, who could be affected, what safeguards are needed,.</a:t>
+            </a:r>
+            <a:endParaRPr lang="en-US" sz="1220" dirty="0"/>
           </a:p>
         </p:txBody>
       </p:sp>
@@ -5685,8 +5687,8 @@
         </p:nvSpPr>
         <p:spPr>
           <a:xfrm>
-            <a:off x="868680" y="1508760"/>
-            <a:ext cx="6309360" cy="4160520"/>
+            <a:off x="822960" y="1463040"/>
+            <a:ext cx="6565392" cy="4343400"/>
           </a:xfrm>
           <a:prstGeom prst="rect">
             <a:avLst/>
@@ -5704,7 +5706,7 @@
               <a:buNone/>
             </a:pPr>
             <a:r>
-              <a:rPr lang="en-US" sz="2100" dirty="0">
+              <a:rPr lang="en-US" sz="1920" dirty="0">
                 <a:solidFill>
                   <a:srgbClr val="003A63"/>
                 </a:solidFill>
@@ -5712,16 +5714,16 @@
                 <a:ea typeface="Aptos" pitchFamily="34" charset="-122"/>
                 <a:cs typeface="Aptos" pitchFamily="34" charset="-120"/>
               </a:rPr>
-              <a:t>• Predictive models can identify risk, but causal inference is needed to decide what action is.</a:t>
-            </a:r>
-            <a:endParaRPr lang="en-US" sz="2100" dirty="0"/>
-          </a:p>
-          <a:p>
-            <a:pPr indent="0" marL="0">
-              <a:buNone/>
-            </a:pPr>
-            <a:r>
-              <a:rPr lang="en-US" sz="2100" dirty="0">
+              <a:t>• Predictive models can identify risk, but causal inference is needed to.</a:t>
+            </a:r>
+            <a:endParaRPr lang="en-US" sz="1920" dirty="0"/>
+          </a:p>
+          <a:p>
+            <a:pPr indent="0" marL="0">
+              <a:buNone/>
+            </a:pPr>
+            <a:r>
+              <a:rPr lang="en-US" sz="1920" dirty="0">
                 <a:solidFill>
                   <a:srgbClr val="003A63"/>
                 </a:solidFill>
@@ -5729,16 +5731,16 @@
                 <a:ea typeface="Aptos" pitchFamily="34" charset="-122"/>
                 <a:cs typeface="Aptos" pitchFamily="34" charset="-120"/>
               </a:rPr>
-              <a:t>• Generative AI may help draft evaluation questions or summarize literature, but humans must.</a:t>
-            </a:r>
-            <a:endParaRPr lang="en-US" sz="2100" dirty="0"/>
-          </a:p>
-          <a:p>
-            <a:pPr indent="0" marL="0">
-              <a:buNone/>
-            </a:pPr>
-            <a:r>
-              <a:rPr lang="en-US" sz="2100" dirty="0">
+              <a:t>• Generative AI may help draft evaluation questions or summarize literature,.</a:t>
+            </a:r>
+            <a:endParaRPr lang="en-US" sz="1920" dirty="0"/>
+          </a:p>
+          <a:p>
+            <a:pPr indent="0" marL="0">
+              <a:buNone/>
+            </a:pPr>
+            <a:r>
+              <a:rPr lang="en-US" sz="1920" dirty="0">
                 <a:solidFill>
                   <a:srgbClr val="003A63"/>
                 </a:solidFill>
@@ -5746,9 +5748,9 @@
                 <a:ea typeface="Aptos" pitchFamily="34" charset="-122"/>
                 <a:cs typeface="Aptos" pitchFamily="34" charset="-120"/>
               </a:rPr>
-              <a:t>• AI-supported decision-making should label outputs clearly as prediction, association, causal.</a:t>
-            </a:r>
-            <a:endParaRPr lang="en-US" sz="2100" dirty="0"/>
+              <a:t>• AI-supported decision-making should label outputs clearly as prediction,.</a:t>
+            </a:r>
+            <a:endParaRPr lang="en-US" sz="1920" dirty="0"/>
           </a:p>
         </p:txBody>
       </p:sp>
@@ -5760,12 +5762,12 @@
         </p:nvSpPr>
         <p:spPr>
           <a:xfrm>
-            <a:off x="7635240" y="1325880"/>
-            <a:ext cx="3474720" cy="1255471"/>
+            <a:off x="7543800" y="1325880"/>
+            <a:ext cx="3611880" cy="1261872"/>
           </a:xfrm>
           <a:prstGeom prst="roundRect">
             <a:avLst>
-              <a:gd name="adj" fmla="val 8740"/>
+              <a:gd name="adj" fmla="val 8696"/>
             </a:avLst>
           </a:prstGeom>
           <a:solidFill>
@@ -5787,8 +5789,8 @@
         </p:nvSpPr>
         <p:spPr>
           <a:xfrm>
-            <a:off x="7799832" y="1472184"/>
-            <a:ext cx="3145536" cy="256032"/>
+            <a:off x="7708392" y="1453896"/>
+            <a:ext cx="3282696" cy="228600"/>
           </a:xfrm>
           <a:prstGeom prst="rect">
             <a:avLst/>
@@ -5804,7 +5806,7 @@
               <a:buNone/>
             </a:pPr>
             <a:r>
-              <a:rPr lang="en-US" sz="1300" b="1" dirty="0">
+              <a:rPr lang="en-US" sz="1220" b="1" dirty="0">
                 <a:solidFill>
                   <a:srgbClr val="0068B7"/>
                 </a:solidFill>
@@ -5814,7 +5816,7 @@
               </a:rPr>
               <a:t>Implementation cue</a:t>
             </a:r>
-            <a:endParaRPr lang="en-US" sz="1300" dirty="0"/>
+            <a:endParaRPr lang="en-US" sz="1220" dirty="0"/>
           </a:p>
         </p:txBody>
       </p:sp>
@@ -5826,8 +5828,8 @@
         </p:nvSpPr>
         <p:spPr>
           <a:xfrm>
-            <a:off x="7799832" y="1801368"/>
-            <a:ext cx="3145536" cy="688543"/>
+            <a:off x="7708392" y="1764792"/>
+            <a:ext cx="3282696" cy="749808"/>
           </a:xfrm>
           <a:prstGeom prst="rect">
             <a:avLst/>
@@ -5845,7 +5847,7 @@
               <a:buNone/>
             </a:pPr>
             <a:r>
-              <a:rPr lang="en-US" sz="1320" dirty="0">
+              <a:rPr lang="en-US" sz="1220" dirty="0">
                 <a:solidFill>
                   <a:srgbClr val="17364A"/>
                 </a:solidFill>
@@ -5853,9 +5855,9 @@
                 <a:ea typeface="Aptos" pitchFamily="34" charset="-122"/>
                 <a:cs typeface="Aptos" pitchFamily="34" charset="-120"/>
               </a:rPr>
-              <a:t>Predictive models can identify risk, but causal inference is needed to decide what action is likely to.</a:t>
-            </a:r>
-            <a:endParaRPr lang="en-US" sz="1320" dirty="0"/>
+              <a:t>Predictive models can identify risk, but causal inference is needed to decide.</a:t>
+            </a:r>
+            <a:endParaRPr lang="en-US" sz="1220" dirty="0"/>
           </a:p>
         </p:txBody>
       </p:sp>
@@ -5867,12 +5869,12 @@
         </p:nvSpPr>
         <p:spPr>
           <a:xfrm>
-            <a:off x="7635240" y="2718511"/>
-            <a:ext cx="3474720" cy="1328623"/>
+            <a:off x="7543800" y="2724912"/>
+            <a:ext cx="3611880" cy="1527048"/>
           </a:xfrm>
           <a:prstGeom prst="roundRect">
             <a:avLst>
-              <a:gd name="adj" fmla="val 8259"/>
+              <a:gd name="adj" fmla="val 7186"/>
             </a:avLst>
           </a:prstGeom>
           <a:solidFill>
@@ -5894,24 +5896,26 @@
         </p:nvSpPr>
         <p:spPr>
           <a:xfrm>
-            <a:off x="7799832" y="2846527"/>
-            <a:ext cx="3145536" cy="237744"/>
-          </a:xfrm>
-          <a:prstGeom prst="rect">
-            <a:avLst/>
-          </a:prstGeom>
-          <a:noFill/>
-          <a:ln/>
-        </p:spPr>
-        <p:txBody>
-          <a:bodyPr wrap="square" lIns="0" tIns="0" rIns="0" bIns="0" rtlCol="0" anchor="ctr"/>
-          <a:lstStyle/>
-          <a:p>
-            <a:pPr indent="0" marL="0">
-              <a:buNone/>
-            </a:pPr>
-            <a:r>
-              <a:rPr lang="en-US" sz="1250" b="1" dirty="0">
+            <a:off x="7708392" y="2852928"/>
+            <a:ext cx="3282696" cy="219456"/>
+          </a:xfrm>
+          <a:prstGeom prst="rect">
+            <a:avLst/>
+          </a:prstGeom>
+          <a:noFill/>
+          <a:ln/>
+        </p:spPr>
+        <p:txBody>
+          <a:bodyPr wrap="square" lIns="0" tIns="0" rIns="0" bIns="0" rtlCol="0" anchor="ctr">
+            <a:normAutofit/>
+          </a:bodyPr>
+          <a:lstStyle/>
+          <a:p>
+            <a:pPr indent="0" marL="0">
+              <a:buNone/>
+            </a:pPr>
+            <a:r>
+              <a:rPr lang="en-US" sz="1160" b="1" dirty="0">
                 <a:solidFill>
                   <a:srgbClr val="0068B7"/>
                 </a:solidFill>
@@ -5921,7 +5925,7 @@
               </a:rPr>
               <a:t>Implementation path</a:t>
             </a:r>
-            <a:endParaRPr lang="en-US" sz="1250" dirty="0"/>
+            <a:endParaRPr lang="en-US" sz="1160" dirty="0"/>
           </a:p>
         </p:txBody>
       </p:sp>
@@ -5933,7 +5937,7 @@
         </p:nvSpPr>
         <p:spPr>
           <a:xfrm>
-            <a:off x="8763000" y="3399739"/>
+            <a:off x="8717280" y="3406140"/>
             <a:ext cx="164592" cy="0"/>
           </a:xfrm>
           <a:prstGeom prst="line">
@@ -5956,8 +5960,8 @@
         </p:nvSpPr>
         <p:spPr>
           <a:xfrm>
-            <a:off x="7872984" y="3248863"/>
-            <a:ext cx="890016" cy="301752"/>
+            <a:off x="7781544" y="3255264"/>
+            <a:ext cx="935736" cy="301752"/>
           </a:xfrm>
           <a:prstGeom prst="roundRect">
             <a:avLst>
@@ -5983,8 +5987,8 @@
         </p:nvSpPr>
         <p:spPr>
           <a:xfrm>
-            <a:off x="7909560" y="3322015"/>
-            <a:ext cx="816864" cy="146304"/>
+            <a:off x="7818120" y="3328416"/>
+            <a:ext cx="862584" cy="146304"/>
           </a:xfrm>
           <a:prstGeom prst="rect">
             <a:avLst/>
@@ -6024,7 +6028,7 @@
         </p:nvSpPr>
         <p:spPr>
           <a:xfrm>
-            <a:off x="9817608" y="3399739"/>
+            <a:off x="9817608" y="3406140"/>
             <a:ext cx="164592" cy="0"/>
           </a:xfrm>
           <a:prstGeom prst="line">
@@ -6047,8 +6051,8 @@
         </p:nvSpPr>
         <p:spPr>
           <a:xfrm>
-            <a:off x="8927592" y="3248863"/>
-            <a:ext cx="890016" cy="301752"/>
+            <a:off x="8881872" y="3255264"/>
+            <a:ext cx="935736" cy="301752"/>
           </a:xfrm>
           <a:prstGeom prst="roundRect">
             <a:avLst>
@@ -6074,8 +6078,8 @@
         </p:nvSpPr>
         <p:spPr>
           <a:xfrm>
-            <a:off x="8964168" y="3322015"/>
-            <a:ext cx="816864" cy="146304"/>
+            <a:off x="8918448" y="3328416"/>
+            <a:ext cx="862584" cy="146304"/>
           </a:xfrm>
           <a:prstGeom prst="rect">
             <a:avLst/>
@@ -6115,8 +6119,8 @@
         </p:nvSpPr>
         <p:spPr>
           <a:xfrm>
-            <a:off x="9982200" y="3248863"/>
-            <a:ext cx="890016" cy="301752"/>
+            <a:off x="9982200" y="3255264"/>
+            <a:ext cx="935736" cy="301752"/>
           </a:xfrm>
           <a:prstGeom prst="roundRect">
             <a:avLst>
@@ -6142,8 +6146,8 @@
         </p:nvSpPr>
         <p:spPr>
           <a:xfrm>
-            <a:off x="10018776" y="3322015"/>
-            <a:ext cx="816864" cy="146304"/>
+            <a:off x="10018776" y="3328416"/>
+            <a:ext cx="862584" cy="146304"/>
           </a:xfrm>
           <a:prstGeom prst="rect">
             <a:avLst/>
@@ -6183,8 +6187,8 @@
         </p:nvSpPr>
         <p:spPr>
           <a:xfrm>
-            <a:off x="7854696" y="3742639"/>
-            <a:ext cx="3035808" cy="158191"/>
+            <a:off x="7763256" y="3749040"/>
+            <a:ext cx="3172968" cy="356616"/>
           </a:xfrm>
           <a:prstGeom prst="rect">
             <a:avLst/>
@@ -6202,7 +6206,7 @@
               <a:buNone/>
             </a:pPr>
             <a:r>
-              <a:rPr lang="en-US" sz="1120" dirty="0">
+              <a:rPr lang="en-US" sz="1040" dirty="0">
                 <a:solidFill>
                   <a:srgbClr val="17364A"/>
                 </a:solidFill>
@@ -6210,9 +6214,9 @@
                 <a:ea typeface="Aptos" pitchFamily="34" charset="-122"/>
                 <a:cs typeface="Aptos" pitchFamily="34" charset="-120"/>
               </a:rPr>
-              <a:t>Implementation work should make dependencies, approvals, training, and sustainment visible before launch.</a:t>
-            </a:r>
-            <a:endParaRPr lang="en-US" sz="1120" dirty="0"/>
+              <a:t>Implementation work should make dependencies, approvals, training, and.</a:t>
+            </a:r>
+            <a:endParaRPr lang="en-US" sz="1040" dirty="0"/>
           </a:p>
         </p:txBody>
       </p:sp>
@@ -6224,12 +6228,12 @@
         </p:nvSpPr>
         <p:spPr>
           <a:xfrm>
-            <a:off x="7635240" y="4184294"/>
-            <a:ext cx="3474720" cy="1466698"/>
+            <a:off x="7543800" y="4389120"/>
+            <a:ext cx="3611880" cy="1261872"/>
           </a:xfrm>
           <a:prstGeom prst="roundRect">
             <a:avLst>
-              <a:gd name="adj" fmla="val 7481"/>
+              <a:gd name="adj" fmla="val 8696"/>
             </a:avLst>
           </a:prstGeom>
           <a:solidFill>
@@ -6251,8 +6255,8 @@
         </p:nvSpPr>
         <p:spPr>
           <a:xfrm>
-            <a:off x="7799832" y="4330598"/>
-            <a:ext cx="3145536" cy="256032"/>
+            <a:off x="7708392" y="4517136"/>
+            <a:ext cx="3282696" cy="228600"/>
           </a:xfrm>
           <a:prstGeom prst="rect">
             <a:avLst/>
@@ -6268,7 +6272,7 @@
               <a:buNone/>
             </a:pPr>
             <a:r>
-              <a:rPr lang="en-US" sz="1300" b="1" dirty="0">
+              <a:rPr lang="en-US" sz="1220" b="1" dirty="0">
                 <a:solidFill>
                   <a:srgbClr val="0068B7"/>
                 </a:solidFill>
@@ -6278,7 +6282,7 @@
               </a:rPr>
               <a:t>Next action</a:t>
             </a:r>
-            <a:endParaRPr lang="en-US" sz="1300" dirty="0"/>
+            <a:endParaRPr lang="en-US" sz="1220" dirty="0"/>
           </a:p>
         </p:txBody>
       </p:sp>
@@ -6290,8 +6294,8 @@
         </p:nvSpPr>
         <p:spPr>
           <a:xfrm>
-            <a:off x="7799832" y="4659782"/>
-            <a:ext cx="3145536" cy="899770"/>
+            <a:off x="7708392" y="4828032"/>
+            <a:ext cx="3282696" cy="749808"/>
           </a:xfrm>
           <a:prstGeom prst="rect">
             <a:avLst/>
@@ -6309,7 +6313,7 @@
               <a:buNone/>
             </a:pPr>
             <a:r>
-              <a:rPr lang="en-US" sz="1320" dirty="0">
+              <a:rPr lang="en-US" sz="1220" dirty="0">
                 <a:solidFill>
                   <a:srgbClr val="17364A"/>
                 </a:solidFill>
@@ -6317,9 +6321,9 @@
                 <a:ea typeface="Aptos" pitchFamily="34" charset="-122"/>
                 <a:cs typeface="Aptos" pitchFamily="34" charset="-120"/>
               </a:rPr>
-              <a:t>Use the concept to clarify workflow changes, dependencies, staffing, procurement requirements, training needs, and implementation checkpoints.</a:t>
-            </a:r>
-            <a:endParaRPr lang="en-US" sz="1320" dirty="0"/>
+              <a:t>Use the concept to clarify workflow changes, dependencies, staffing, procurement.</a:t>
+            </a:r>
+            <a:endParaRPr lang="en-US" sz="1220" dirty="0"/>
           </a:p>
         </p:txBody>
       </p:sp>
@@ -6610,8 +6614,8 @@
         </p:nvSpPr>
         <p:spPr>
           <a:xfrm>
-            <a:off x="868680" y="1508760"/>
-            <a:ext cx="6309360" cy="4160520"/>
+            <a:off x="822960" y="1463040"/>
+            <a:ext cx="6565392" cy="4343400"/>
           </a:xfrm>
           <a:prstGeom prst="rect">
             <a:avLst/>
@@ -6629,7 +6633,7 @@
               <a:buNone/>
             </a:pPr>
             <a:r>
-              <a:rPr lang="en-US" sz="2100" dirty="0">
+              <a:rPr lang="en-US" sz="1920" dirty="0">
                 <a:solidFill>
                   <a:srgbClr val="003A63"/>
                 </a:solidFill>
@@ -6639,14 +6643,14 @@
               </a:rPr>
               <a:t>• What AI outputs in your agency could be mistaken for causal evidence?</a:t>
             </a:r>
-            <a:endParaRPr lang="en-US" sz="2100" dirty="0"/>
-          </a:p>
-          <a:p>
-            <a:pPr indent="0" marL="0">
-              <a:buNone/>
-            </a:pPr>
-            <a:r>
-              <a:rPr lang="en-US" sz="2100" dirty="0">
+            <a:endParaRPr lang="en-US" sz="1920" dirty="0"/>
+          </a:p>
+          <a:p>
+            <a:pPr indent="0" marL="0">
+              <a:buNone/>
+            </a:pPr>
+            <a:r>
+              <a:rPr lang="en-US" sz="1920" dirty="0">
                 <a:solidFill>
                   <a:srgbClr val="003A63"/>
                 </a:solidFill>
@@ -6656,14 +6660,14 @@
               </a:rPr>
               <a:t>• Which decisions require knowing what intervention will change an outcome?</a:t>
             </a:r>
-            <a:endParaRPr lang="en-US" sz="2100" dirty="0"/>
-          </a:p>
-          <a:p>
-            <a:pPr indent="0" marL="0">
-              <a:buNone/>
-            </a:pPr>
-            <a:r>
-              <a:rPr lang="en-US" sz="2100" dirty="0">
+            <a:endParaRPr lang="en-US" sz="1920" dirty="0"/>
+          </a:p>
+          <a:p>
+            <a:pPr indent="0" marL="0">
+              <a:buNone/>
+            </a:pPr>
+            <a:r>
+              <a:rPr lang="en-US" sz="1920" dirty="0">
                 <a:solidFill>
                   <a:srgbClr val="003A63"/>
                 </a:solidFill>
@@ -6673,7 +6677,7 @@
               </a:rPr>
               <a:t>• What confounders are likely in your program area?</a:t>
             </a:r>
-            <a:endParaRPr lang="en-US" sz="2100" dirty="0"/>
+            <a:endParaRPr lang="en-US" sz="1920" dirty="0"/>
           </a:p>
         </p:txBody>
       </p:sp>
@@ -6685,12 +6689,12 @@
         </p:nvSpPr>
         <p:spPr>
           <a:xfrm>
-            <a:off x="7635240" y="1325880"/>
-            <a:ext cx="3474720" cy="1207008"/>
+            <a:off x="7543800" y="1325880"/>
+            <a:ext cx="3611880" cy="1261872"/>
           </a:xfrm>
           <a:prstGeom prst="roundRect">
             <a:avLst>
-              <a:gd name="adj" fmla="val 9091"/>
+              <a:gd name="adj" fmla="val 8696"/>
             </a:avLst>
           </a:prstGeom>
           <a:solidFill>
@@ -6712,8 +6716,8 @@
         </p:nvSpPr>
         <p:spPr>
           <a:xfrm>
-            <a:off x="7799832" y="1472184"/>
-            <a:ext cx="3145536" cy="256032"/>
+            <a:off x="7708392" y="1453896"/>
+            <a:ext cx="3282696" cy="228600"/>
           </a:xfrm>
           <a:prstGeom prst="rect">
             <a:avLst/>
@@ -6729,7 +6733,7 @@
               <a:buNone/>
             </a:pPr>
             <a:r>
-              <a:rPr lang="en-US" sz="1300" b="1" dirty="0">
+              <a:rPr lang="en-US" sz="1220" b="1" dirty="0">
                 <a:solidFill>
                   <a:srgbClr val="0068B7"/>
                 </a:solidFill>
@@ -6739,7 +6743,7 @@
               </a:rPr>
               <a:t>Core concept</a:t>
             </a:r>
-            <a:endParaRPr lang="en-US" sz="1300" dirty="0"/>
+            <a:endParaRPr lang="en-US" sz="1220" dirty="0"/>
           </a:p>
         </p:txBody>
       </p:sp>
@@ -6751,8 +6755,8 @@
         </p:nvSpPr>
         <p:spPr>
           <a:xfrm>
-            <a:off x="7799832" y="1801368"/>
-            <a:ext cx="3145536" cy="640080"/>
+            <a:off x="7708392" y="1764792"/>
+            <a:ext cx="3282696" cy="749808"/>
           </a:xfrm>
           <a:prstGeom prst="rect">
             <a:avLst/>
@@ -6770,7 +6774,7 @@
               <a:buNone/>
             </a:pPr>
             <a:r>
-              <a:rPr lang="en-US" sz="1320" dirty="0">
+              <a:rPr lang="en-US" sz="1220" dirty="0">
                 <a:solidFill>
                   <a:srgbClr val="17364A"/>
                 </a:solidFill>
@@ -6780,7 +6784,7 @@
               </a:rPr>
               <a:t>What AI outputs in your agency could be mistaken for causal evidence?</a:t>
             </a:r>
-            <a:endParaRPr lang="en-US" sz="1320" dirty="0"/>
+            <a:endParaRPr lang="en-US" sz="1220" dirty="0"/>
           </a:p>
         </p:txBody>
       </p:sp>
@@ -6792,12 +6796,12 @@
         </p:nvSpPr>
         <p:spPr>
           <a:xfrm>
-            <a:off x="7635240" y="2670048"/>
-            <a:ext cx="3474720" cy="1377086"/>
+            <a:off x="7543800" y="2724912"/>
+            <a:ext cx="3611880" cy="1527048"/>
           </a:xfrm>
           <a:prstGeom prst="roundRect">
             <a:avLst>
-              <a:gd name="adj" fmla="val 7968"/>
+              <a:gd name="adj" fmla="val 7186"/>
             </a:avLst>
           </a:prstGeom>
           <a:solidFill>
@@ -6819,8 +6823,8 @@
         </p:nvSpPr>
         <p:spPr>
           <a:xfrm>
-            <a:off x="7799832" y="2816352"/>
-            <a:ext cx="3145536" cy="256032"/>
+            <a:off x="7708392" y="2852928"/>
+            <a:ext cx="3282696" cy="228600"/>
           </a:xfrm>
           <a:prstGeom prst="rect">
             <a:avLst/>
@@ -6836,7 +6840,7 @@
               <a:buNone/>
             </a:pPr>
             <a:r>
-              <a:rPr lang="en-US" sz="1300" b="1" dirty="0">
+              <a:rPr lang="en-US" sz="1220" b="1" dirty="0">
                 <a:solidFill>
                   <a:srgbClr val="0068B7"/>
                 </a:solidFill>
@@ -6846,7 +6850,7 @@
               </a:rPr>
               <a:t>Concept checkpoints</a:t>
             </a:r>
-            <a:endParaRPr lang="en-US" sz="1300" dirty="0"/>
+            <a:endParaRPr lang="en-US" sz="1220" dirty="0"/>
           </a:p>
         </p:txBody>
       </p:sp>
@@ -6858,8 +6862,8 @@
         </p:nvSpPr>
         <p:spPr>
           <a:xfrm>
-            <a:off x="7818120" y="3182112"/>
-            <a:ext cx="3090672" cy="718718"/>
+            <a:off x="7726680" y="3182112"/>
+            <a:ext cx="3227832" cy="960120"/>
           </a:xfrm>
           <a:prstGeom prst="rect">
             <a:avLst/>
@@ -6877,7 +6881,7 @@
               <a:buNone/>
             </a:pPr>
             <a:r>
-              <a:rPr lang="en-US" sz="1220" dirty="0">
+              <a:rPr lang="en-US" sz="1140" dirty="0">
                 <a:solidFill>
                   <a:srgbClr val="17364A"/>
                 </a:solidFill>
@@ -6885,16 +6889,16 @@
                 <a:ea typeface="Aptos" pitchFamily="34" charset="-122"/>
                 <a:cs typeface="Aptos" pitchFamily="34" charset="-120"/>
               </a:rPr>
-              <a:t>What AI outputs in your agency could be mistaken for causal.</a:t>
-            </a:r>
-            <a:endParaRPr lang="en-US" sz="1220" dirty="0"/>
-          </a:p>
-          <a:p>
-            <a:pPr indent="0" marL="0">
-              <a:buNone/>
-            </a:pPr>
-            <a:r>
-              <a:rPr lang="en-US" sz="1220" dirty="0">
+              <a:t>What AI outputs in your agency could be mistaken.</a:t>
+            </a:r>
+            <a:endParaRPr lang="en-US" sz="1140" dirty="0"/>
+          </a:p>
+          <a:p>
+            <a:pPr indent="0" marL="0">
+              <a:buNone/>
+            </a:pPr>
+            <a:r>
+              <a:rPr lang="en-US" sz="1140" dirty="0">
                 <a:solidFill>
                   <a:srgbClr val="17364A"/>
                 </a:solidFill>
@@ -6902,16 +6906,16 @@
                 <a:ea typeface="Aptos" pitchFamily="34" charset="-122"/>
                 <a:cs typeface="Aptos" pitchFamily="34" charset="-120"/>
               </a:rPr>
-              <a:t>Which decisions require knowing what intervention will change an.</a:t>
-            </a:r>
-            <a:endParaRPr lang="en-US" sz="1220" dirty="0"/>
-          </a:p>
-          <a:p>
-            <a:pPr indent="0" marL="0">
-              <a:buNone/>
-            </a:pPr>
-            <a:r>
-              <a:rPr lang="en-US" sz="1220" dirty="0">
+              <a:t>Which decisions require knowing what intervention.</a:t>
+            </a:r>
+            <a:endParaRPr lang="en-US" sz="1140" dirty="0"/>
+          </a:p>
+          <a:p>
+            <a:pPr indent="0" marL="0">
+              <a:buNone/>
+            </a:pPr>
+            <a:r>
+              <a:rPr lang="en-US" sz="1140" dirty="0">
                 <a:solidFill>
                   <a:srgbClr val="17364A"/>
                 </a:solidFill>
@@ -6921,7 +6925,7 @@
               </a:rPr>
               <a:t>What confounders are likely in your program area?</a:t>
             </a:r>
-            <a:endParaRPr lang="en-US" sz="1220" dirty="0"/>
+            <a:endParaRPr lang="en-US" sz="1140" dirty="0"/>
           </a:p>
         </p:txBody>
       </p:sp>
@@ -6933,12 +6937,12 @@
         </p:nvSpPr>
         <p:spPr>
           <a:xfrm>
-            <a:off x="7635240" y="4184294"/>
-            <a:ext cx="3474720" cy="1466698"/>
+            <a:off x="7543800" y="4389120"/>
+            <a:ext cx="3611880" cy="1261872"/>
           </a:xfrm>
           <a:prstGeom prst="roundRect">
             <a:avLst>
-              <a:gd name="adj" fmla="val 7481"/>
+              <a:gd name="adj" fmla="val 8696"/>
             </a:avLst>
           </a:prstGeom>
           <a:solidFill>
@@ -6960,8 +6964,8 @@
         </p:nvSpPr>
         <p:spPr>
           <a:xfrm>
-            <a:off x="7799832" y="4330598"/>
-            <a:ext cx="3145536" cy="256032"/>
+            <a:off x="7708392" y="4517136"/>
+            <a:ext cx="3282696" cy="228600"/>
           </a:xfrm>
           <a:prstGeom prst="rect">
             <a:avLst/>
@@ -6977,7 +6981,7 @@
               <a:buNone/>
             </a:pPr>
             <a:r>
-              <a:rPr lang="en-US" sz="1300" b="1" dirty="0">
+              <a:rPr lang="en-US" sz="1220" b="1" dirty="0">
                 <a:solidFill>
                   <a:srgbClr val="0068B7"/>
                 </a:solidFill>
@@ -6987,7 +6991,7 @@
               </a:rPr>
               <a:t>Apply it</a:t>
             </a:r>
-            <a:endParaRPr lang="en-US" sz="1300" dirty="0"/>
+            <a:endParaRPr lang="en-US" sz="1220" dirty="0"/>
           </a:p>
         </p:txBody>
       </p:sp>
@@ -6999,8 +7003,8 @@
         </p:nvSpPr>
         <p:spPr>
           <a:xfrm>
-            <a:off x="7799832" y="4659782"/>
-            <a:ext cx="3145536" cy="899770"/>
+            <a:off x="7708392" y="4828032"/>
+            <a:ext cx="3282696" cy="749808"/>
           </a:xfrm>
           <a:prstGeom prst="rect">
             <a:avLst/>
@@ -7018,7 +7022,7 @@
               <a:buNone/>
             </a:pPr>
             <a:r>
-              <a:rPr lang="en-US" sz="1320" dirty="0">
+              <a:rPr lang="en-US" sz="1220" dirty="0">
                 <a:solidFill>
                   <a:srgbClr val="17364A"/>
                 </a:solidFill>
@@ -7026,9 +7030,9 @@
                 <a:ea typeface="Aptos" pitchFamily="34" charset="-122"/>
                 <a:cs typeface="Aptos" pitchFamily="34" charset="-120"/>
               </a:rPr>
-              <a:t>Connect the concept to public health purpose, responsible use, required safeguards, documentation, and the next action a department should take.</a:t>
-            </a:r>
-            <a:endParaRPr lang="en-US" sz="1320" dirty="0"/>
+              <a:t>Connect the concept to public health purpose, responsible use, required.</a:t>
+            </a:r>
+            <a:endParaRPr lang="en-US" sz="1220" dirty="0"/>
           </a:p>
         </p:txBody>
       </p:sp>
@@ -7319,8 +7323,8 @@
         </p:nvSpPr>
         <p:spPr>
           <a:xfrm>
-            <a:off x="868680" y="1508760"/>
-            <a:ext cx="6309360" cy="4160520"/>
+            <a:off x="822960" y="1463040"/>
+            <a:ext cx="6565392" cy="4343400"/>
           </a:xfrm>
           <a:prstGeom prst="rect">
             <a:avLst/>
@@ -7338,7 +7342,7 @@
               <a:buNone/>
             </a:pPr>
             <a:r>
-              <a:rPr lang="en-US" sz="2100" dirty="0">
+              <a:rPr lang="en-US" sz="1920" dirty="0">
                 <a:solidFill>
                   <a:srgbClr val="003A63"/>
                 </a:solidFill>
@@ -7348,14 +7352,14 @@
               </a:rPr>
               <a:t>• What comparison group could support evaluation?</a:t>
             </a:r>
-            <a:endParaRPr lang="en-US" sz="2100" dirty="0"/>
-          </a:p>
-          <a:p>
-            <a:pPr indent="0" marL="0">
-              <a:buNone/>
-            </a:pPr>
-            <a:r>
-              <a:rPr lang="en-US" sz="2100" dirty="0">
+            <a:endParaRPr lang="en-US" sz="1920" dirty="0"/>
+          </a:p>
+          <a:p>
+            <a:pPr indent="0" marL="0">
+              <a:buNone/>
+            </a:pPr>
+            <a:r>
+              <a:rPr lang="en-US" sz="1920" dirty="0">
                 <a:solidFill>
                   <a:srgbClr val="003A63"/>
                 </a:solidFill>
@@ -7365,7 +7369,7 @@
               </a:rPr>
               <a:t>• Who should review causal claims before public release?</a:t>
             </a:r>
-            <a:endParaRPr lang="en-US" sz="2100" dirty="0"/>
+            <a:endParaRPr lang="en-US" sz="1920" dirty="0"/>
           </a:p>
         </p:txBody>
       </p:sp>
@@ -7377,12 +7381,12 @@
         </p:nvSpPr>
         <p:spPr>
           <a:xfrm>
-            <a:off x="7635240" y="1325880"/>
-            <a:ext cx="3474720" cy="1207008"/>
+            <a:off x="7543800" y="1325880"/>
+            <a:ext cx="3611880" cy="1261872"/>
           </a:xfrm>
           <a:prstGeom prst="roundRect">
             <a:avLst>
-              <a:gd name="adj" fmla="val 9091"/>
+              <a:gd name="adj" fmla="val 8696"/>
             </a:avLst>
           </a:prstGeom>
           <a:solidFill>
@@ -7404,8 +7408,8 @@
         </p:nvSpPr>
         <p:spPr>
           <a:xfrm>
-            <a:off x="7799832" y="1472184"/>
-            <a:ext cx="3145536" cy="256032"/>
+            <a:off x="7708392" y="1453896"/>
+            <a:ext cx="3282696" cy="228600"/>
           </a:xfrm>
           <a:prstGeom prst="rect">
             <a:avLst/>
@@ -7421,7 +7425,7 @@
               <a:buNone/>
             </a:pPr>
             <a:r>
-              <a:rPr lang="en-US" sz="1300" b="1" dirty="0">
+              <a:rPr lang="en-US" sz="1220" b="1" dirty="0">
                 <a:solidFill>
                   <a:srgbClr val="0068B7"/>
                 </a:solidFill>
@@ -7431,7 +7435,7 @@
               </a:rPr>
               <a:t>Core concept</a:t>
             </a:r>
-            <a:endParaRPr lang="en-US" sz="1300" dirty="0"/>
+            <a:endParaRPr lang="en-US" sz="1220" dirty="0"/>
           </a:p>
         </p:txBody>
       </p:sp>
@@ -7443,8 +7447,8 @@
         </p:nvSpPr>
         <p:spPr>
           <a:xfrm>
-            <a:off x="7799832" y="1801368"/>
-            <a:ext cx="3145536" cy="640080"/>
+            <a:off x="7708392" y="1764792"/>
+            <a:ext cx="3282696" cy="749808"/>
           </a:xfrm>
           <a:prstGeom prst="rect">
             <a:avLst/>
@@ -7462,7 +7466,7 @@
               <a:buNone/>
             </a:pPr>
             <a:r>
-              <a:rPr lang="en-US" sz="1320" dirty="0">
+              <a:rPr lang="en-US" sz="1220" dirty="0">
                 <a:solidFill>
                   <a:srgbClr val="17364A"/>
                 </a:solidFill>
@@ -7472,7 +7476,7 @@
               </a:rPr>
               <a:t>What comparison group could support evaluation?</a:t>
             </a:r>
-            <a:endParaRPr lang="en-US" sz="1320" dirty="0"/>
+            <a:endParaRPr lang="en-US" sz="1220" dirty="0"/>
           </a:p>
         </p:txBody>
       </p:sp>
@@ -7484,12 +7488,12 @@
         </p:nvSpPr>
         <p:spPr>
           <a:xfrm>
-            <a:off x="7635240" y="2670048"/>
-            <a:ext cx="3474720" cy="1377086"/>
+            <a:off x="7543800" y="2724912"/>
+            <a:ext cx="3611880" cy="1527048"/>
           </a:xfrm>
           <a:prstGeom prst="roundRect">
             <a:avLst>
-              <a:gd name="adj" fmla="val 7968"/>
+              <a:gd name="adj" fmla="val 7186"/>
             </a:avLst>
           </a:prstGeom>
           <a:solidFill>
@@ -7511,8 +7515,8 @@
         </p:nvSpPr>
         <p:spPr>
           <a:xfrm>
-            <a:off x="7799832" y="2816352"/>
-            <a:ext cx="3145536" cy="256032"/>
+            <a:off x="7708392" y="2852928"/>
+            <a:ext cx="3282696" cy="228600"/>
           </a:xfrm>
           <a:prstGeom prst="rect">
             <a:avLst/>
@@ -7528,7 +7532,7 @@
               <a:buNone/>
             </a:pPr>
             <a:r>
-              <a:rPr lang="en-US" sz="1300" b="1" dirty="0">
+              <a:rPr lang="en-US" sz="1220" b="1" dirty="0">
                 <a:solidFill>
                   <a:srgbClr val="0068B7"/>
                 </a:solidFill>
@@ -7538,7 +7542,7 @@
               </a:rPr>
               <a:t>Concept checkpoints</a:t>
             </a:r>
-            <a:endParaRPr lang="en-US" sz="1300" dirty="0"/>
+            <a:endParaRPr lang="en-US" sz="1220" dirty="0"/>
           </a:p>
         </p:txBody>
       </p:sp>
@@ -7550,8 +7554,8 @@
         </p:nvSpPr>
         <p:spPr>
           <a:xfrm>
-            <a:off x="7818120" y="3182112"/>
-            <a:ext cx="3090672" cy="718718"/>
+            <a:off x="7726680" y="3182112"/>
+            <a:ext cx="3227832" cy="960120"/>
           </a:xfrm>
           <a:prstGeom prst="rect">
             <a:avLst/>
@@ -7569,7 +7573,7 @@
               <a:buNone/>
             </a:pPr>
             <a:r>
-              <a:rPr lang="en-US" sz="1220" dirty="0">
+              <a:rPr lang="en-US" sz="1140" dirty="0">
                 <a:solidFill>
                   <a:srgbClr val="17364A"/>
                 </a:solidFill>
@@ -7579,14 +7583,14 @@
               </a:rPr>
               <a:t>What comparison group could support evaluation?</a:t>
             </a:r>
-            <a:endParaRPr lang="en-US" sz="1220" dirty="0"/>
-          </a:p>
-          <a:p>
-            <a:pPr indent="0" marL="0">
-              <a:buNone/>
-            </a:pPr>
-            <a:r>
-              <a:rPr lang="en-US" sz="1220" dirty="0">
+            <a:endParaRPr lang="en-US" sz="1140" dirty="0"/>
+          </a:p>
+          <a:p>
+            <a:pPr indent="0" marL="0">
+              <a:buNone/>
+            </a:pPr>
+            <a:r>
+              <a:rPr lang="en-US" sz="1140" dirty="0">
                 <a:solidFill>
                   <a:srgbClr val="17364A"/>
                 </a:solidFill>
@@ -7594,9 +7598,9 @@
                 <a:ea typeface="Aptos" pitchFamily="34" charset="-122"/>
                 <a:cs typeface="Aptos" pitchFamily="34" charset="-120"/>
               </a:rPr>
-              <a:t>Who should review causal claims before public release?</a:t>
-            </a:r>
-            <a:endParaRPr lang="en-US" sz="1220" dirty="0"/>
+              <a:t>Who should review causal claims before public.</a:t>
+            </a:r>
+            <a:endParaRPr lang="en-US" sz="1140" dirty="0"/>
           </a:p>
         </p:txBody>
       </p:sp>
@@ -7608,12 +7612,12 @@
         </p:nvSpPr>
         <p:spPr>
           <a:xfrm>
-            <a:off x="7635240" y="4184294"/>
-            <a:ext cx="3474720" cy="1466698"/>
+            <a:off x="7543800" y="4389120"/>
+            <a:ext cx="3611880" cy="1261872"/>
           </a:xfrm>
           <a:prstGeom prst="roundRect">
             <a:avLst>
-              <a:gd name="adj" fmla="val 7481"/>
+              <a:gd name="adj" fmla="val 8696"/>
             </a:avLst>
           </a:prstGeom>
           <a:solidFill>
@@ -7635,8 +7639,8 @@
         </p:nvSpPr>
         <p:spPr>
           <a:xfrm>
-            <a:off x="7799832" y="4330598"/>
-            <a:ext cx="3145536" cy="256032"/>
+            <a:off x="7708392" y="4517136"/>
+            <a:ext cx="3282696" cy="228600"/>
           </a:xfrm>
           <a:prstGeom prst="rect">
             <a:avLst/>
@@ -7652,7 +7656,7 @@
               <a:buNone/>
             </a:pPr>
             <a:r>
-              <a:rPr lang="en-US" sz="1300" b="1" dirty="0">
+              <a:rPr lang="en-US" sz="1220" b="1" dirty="0">
                 <a:solidFill>
                   <a:srgbClr val="0068B7"/>
                 </a:solidFill>
@@ -7662,7 +7666,7 @@
               </a:rPr>
               <a:t>Apply it</a:t>
             </a:r>
-            <a:endParaRPr lang="en-US" sz="1300" dirty="0"/>
+            <a:endParaRPr lang="en-US" sz="1220" dirty="0"/>
           </a:p>
         </p:txBody>
       </p:sp>
@@ -7674,8 +7678,8 @@
         </p:nvSpPr>
         <p:spPr>
           <a:xfrm>
-            <a:off x="7799832" y="4659782"/>
-            <a:ext cx="3145536" cy="899770"/>
+            <a:off x="7708392" y="4828032"/>
+            <a:ext cx="3282696" cy="749808"/>
           </a:xfrm>
           <a:prstGeom prst="rect">
             <a:avLst/>
@@ -7693,7 +7697,7 @@
               <a:buNone/>
             </a:pPr>
             <a:r>
-              <a:rPr lang="en-US" sz="1320" dirty="0">
+              <a:rPr lang="en-US" sz="1220" dirty="0">
                 <a:solidFill>
                   <a:srgbClr val="17364A"/>
                 </a:solidFill>
@@ -7701,9 +7705,9 @@
                 <a:ea typeface="Aptos" pitchFamily="34" charset="-122"/>
                 <a:cs typeface="Aptos" pitchFamily="34" charset="-120"/>
               </a:rPr>
-              <a:t>Connect the concept to public health purpose, responsible use, required safeguards, documentation, and the next action a department should take.</a:t>
-            </a:r>
-            <a:endParaRPr lang="en-US" sz="1320" dirty="0"/>
+              <a:t>Connect the concept to public health purpose, responsible use, required.</a:t>
+            </a:r>
+            <a:endParaRPr lang="en-US" sz="1220" dirty="0"/>
           </a:p>
         </p:txBody>
       </p:sp>
@@ -7994,8 +7998,8 @@
         </p:nvSpPr>
         <p:spPr>
           <a:xfrm>
-            <a:off x="868680" y="1508760"/>
-            <a:ext cx="6309360" cy="4160520"/>
+            <a:off x="822960" y="1463040"/>
+            <a:ext cx="6565392" cy="4343400"/>
           </a:xfrm>
           <a:prstGeom prst="rect">
             <a:avLst/>
@@ -8013,7 +8017,7 @@
               <a:buNone/>
             </a:pPr>
             <a:r>
-              <a:rPr lang="en-US" sz="2100" dirty="0">
+              <a:rPr lang="en-US" sz="1920" dirty="0">
                 <a:solidFill>
                   <a:srgbClr val="003A63"/>
                 </a:solidFill>
@@ -8023,14 +8027,14 @@
               </a:rPr>
               <a:t>• Create a causal question framing worksheet for an AI-supported decision.</a:t>
             </a:r>
-            <a:endParaRPr lang="en-US" sz="2100" dirty="0"/>
-          </a:p>
-          <a:p>
-            <a:pPr indent="0" marL="0">
-              <a:buNone/>
-            </a:pPr>
-            <a:r>
-              <a:rPr lang="en-US" sz="2100" dirty="0">
+            <a:endParaRPr lang="en-US" sz="1920" dirty="0"/>
+          </a:p>
+          <a:p>
+            <a:pPr indent="0" marL="0">
+              <a:buNone/>
+            </a:pPr>
+            <a:r>
+              <a:rPr lang="en-US" sz="1920" dirty="0">
                 <a:solidFill>
                   <a:srgbClr val="003A63"/>
                 </a:solidFill>
@@ -8038,9 +8042,9 @@
                 <a:ea typeface="Aptos" pitchFamily="34" charset="-122"/>
                 <a:cs typeface="Aptos" pitchFamily="34" charset="-120"/>
               </a:rPr>
-              <a:t>• Identify the population, intervention or exposure, comparison, outcome, time period, likely.</a:t>
-            </a:r>
-            <a:endParaRPr lang="en-US" sz="2100" dirty="0"/>
+              <a:t>• Identify the population, intervention or exposure, comparison, outcome, time.</a:t>
+            </a:r>
+            <a:endParaRPr lang="en-US" sz="1920" dirty="0"/>
           </a:p>
         </p:txBody>
       </p:sp>
@@ -8052,12 +8056,12 @@
         </p:nvSpPr>
         <p:spPr>
           <a:xfrm>
-            <a:off x="7635240" y="1325880"/>
-            <a:ext cx="3474720" cy="1207008"/>
+            <a:off x="7543800" y="1325880"/>
+            <a:ext cx="3611880" cy="1261872"/>
           </a:xfrm>
           <a:prstGeom prst="roundRect">
             <a:avLst>
-              <a:gd name="adj" fmla="val 9091"/>
+              <a:gd name="adj" fmla="val 8696"/>
             </a:avLst>
           </a:prstGeom>
           <a:solidFill>
@@ -8079,8 +8083,8 @@
         </p:nvSpPr>
         <p:spPr>
           <a:xfrm>
-            <a:off x="7799832" y="1472184"/>
-            <a:ext cx="3145536" cy="256032"/>
+            <a:off x="7708392" y="1453896"/>
+            <a:ext cx="3282696" cy="228600"/>
           </a:xfrm>
           <a:prstGeom prst="rect">
             <a:avLst/>
@@ -8096,7 +8100,7 @@
               <a:buNone/>
             </a:pPr>
             <a:r>
-              <a:rPr lang="en-US" sz="1300" b="1" dirty="0">
+              <a:rPr lang="en-US" sz="1220" b="1" dirty="0">
                 <a:solidFill>
                   <a:srgbClr val="0068B7"/>
                 </a:solidFill>
@@ -8106,7 +8110,7 @@
               </a:rPr>
               <a:t>Practice focus</a:t>
             </a:r>
-            <a:endParaRPr lang="en-US" sz="1300" dirty="0"/>
+            <a:endParaRPr lang="en-US" sz="1220" dirty="0"/>
           </a:p>
         </p:txBody>
       </p:sp>
@@ -8118,8 +8122,8 @@
         </p:nvSpPr>
         <p:spPr>
           <a:xfrm>
-            <a:off x="7799832" y="1801368"/>
-            <a:ext cx="3145536" cy="640080"/>
+            <a:off x="7708392" y="1764792"/>
+            <a:ext cx="3282696" cy="749808"/>
           </a:xfrm>
           <a:prstGeom prst="rect">
             <a:avLst/>
@@ -8137,7 +8141,7 @@
               <a:buNone/>
             </a:pPr>
             <a:r>
-              <a:rPr lang="en-US" sz="1320" dirty="0">
+              <a:rPr lang="en-US" sz="1220" dirty="0">
                 <a:solidFill>
                   <a:srgbClr val="17364A"/>
                 </a:solidFill>
@@ -8147,7 +8151,7 @@
               </a:rPr>
               <a:t>Create a causal question framing worksheet for an AI-supported decision.</a:t>
             </a:r>
-            <a:endParaRPr lang="en-US" sz="1320" dirty="0"/>
+            <a:endParaRPr lang="en-US" sz="1220" dirty="0"/>
           </a:p>
         </p:txBody>
       </p:sp>
@@ -8159,12 +8163,12 @@
         </p:nvSpPr>
         <p:spPr>
           <a:xfrm>
-            <a:off x="7635240" y="2670048"/>
-            <a:ext cx="3474720" cy="1377086"/>
+            <a:off x="7543800" y="2724912"/>
+            <a:ext cx="3611880" cy="1527048"/>
           </a:xfrm>
           <a:prstGeom prst="roundRect">
             <a:avLst>
-              <a:gd name="adj" fmla="val 7968"/>
+              <a:gd name="adj" fmla="val 7186"/>
             </a:avLst>
           </a:prstGeom>
           <a:solidFill>
@@ -8186,8 +8190,8 @@
         </p:nvSpPr>
         <p:spPr>
           <a:xfrm>
-            <a:off x="7799832" y="2816352"/>
-            <a:ext cx="3145536" cy="256032"/>
+            <a:off x="7708392" y="2852928"/>
+            <a:ext cx="3282696" cy="228600"/>
           </a:xfrm>
           <a:prstGeom prst="rect">
             <a:avLst/>
@@ -8203,7 +8207,7 @@
               <a:buNone/>
             </a:pPr>
             <a:r>
-              <a:rPr lang="en-US" sz="1300" b="1" dirty="0">
+              <a:rPr lang="en-US" sz="1220" b="1" dirty="0">
                 <a:solidFill>
                   <a:srgbClr val="0068B7"/>
                 </a:solidFill>
@@ -8213,7 +8217,7 @@
               </a:rPr>
               <a:t>Concept checkpoints</a:t>
             </a:r>
-            <a:endParaRPr lang="en-US" sz="1300" dirty="0"/>
+            <a:endParaRPr lang="en-US" sz="1220" dirty="0"/>
           </a:p>
         </p:txBody>
       </p:sp>
@@ -8225,8 +8229,8 @@
         </p:nvSpPr>
         <p:spPr>
           <a:xfrm>
-            <a:off x="7818120" y="3182112"/>
-            <a:ext cx="3090672" cy="718718"/>
+            <a:off x="7726680" y="3182112"/>
+            <a:ext cx="3227832" cy="960120"/>
           </a:xfrm>
           <a:prstGeom prst="rect">
             <a:avLst/>
@@ -8244,7 +8248,7 @@
               <a:buNone/>
             </a:pPr>
             <a:r>
-              <a:rPr lang="en-US" sz="1220" dirty="0">
+              <a:rPr lang="en-US" sz="1140" dirty="0">
                 <a:solidFill>
                   <a:srgbClr val="17364A"/>
                 </a:solidFill>
@@ -8252,16 +8256,16 @@
                 <a:ea typeface="Aptos" pitchFamily="34" charset="-122"/>
                 <a:cs typeface="Aptos" pitchFamily="34" charset="-120"/>
               </a:rPr>
-              <a:t>Create a causal question framing worksheet for an AI-supported.</a:t>
-            </a:r>
-            <a:endParaRPr lang="en-US" sz="1220" dirty="0"/>
-          </a:p>
-          <a:p>
-            <a:pPr indent="0" marL="0">
-              <a:buNone/>
-            </a:pPr>
-            <a:r>
-              <a:rPr lang="en-US" sz="1220" dirty="0">
+              <a:t>Create a causal question framing worksheet for an.</a:t>
+            </a:r>
+            <a:endParaRPr lang="en-US" sz="1140" dirty="0"/>
+          </a:p>
+          <a:p>
+            <a:pPr indent="0" marL="0">
+              <a:buNone/>
+            </a:pPr>
+            <a:r>
+              <a:rPr lang="en-US" sz="1140" dirty="0">
                 <a:solidFill>
                   <a:srgbClr val="17364A"/>
                 </a:solidFill>
@@ -8269,9 +8273,9 @@
                 <a:ea typeface="Aptos" pitchFamily="34" charset="-122"/>
                 <a:cs typeface="Aptos" pitchFamily="34" charset="-120"/>
               </a:rPr>
-              <a:t>Identify the population, intervention or exposure, comparison,.</a:t>
-            </a:r>
-            <a:endParaRPr lang="en-US" sz="1220" dirty="0"/>
+              <a:t>Identify the population, intervention or exposure,.</a:t>
+            </a:r>
+            <a:endParaRPr lang="en-US" sz="1140" dirty="0"/>
           </a:p>
         </p:txBody>
       </p:sp>
@@ -8283,12 +8287,12 @@
         </p:nvSpPr>
         <p:spPr>
           <a:xfrm>
-            <a:off x="7635240" y="4184294"/>
-            <a:ext cx="3474720" cy="1466698"/>
+            <a:off x="7543800" y="4389120"/>
+            <a:ext cx="3611880" cy="1261872"/>
           </a:xfrm>
           <a:prstGeom prst="roundRect">
             <a:avLst>
-              <a:gd name="adj" fmla="val 7481"/>
+              <a:gd name="adj" fmla="val 8696"/>
             </a:avLst>
           </a:prstGeom>
           <a:solidFill>
@@ -8310,8 +8314,8 @@
         </p:nvSpPr>
         <p:spPr>
           <a:xfrm>
-            <a:off x="7799832" y="4330598"/>
-            <a:ext cx="3145536" cy="256032"/>
+            <a:off x="7708392" y="4517136"/>
+            <a:ext cx="3282696" cy="228600"/>
           </a:xfrm>
           <a:prstGeom prst="rect">
             <a:avLst/>
@@ -8327,7 +8331,7 @@
               <a:buNone/>
             </a:pPr>
             <a:r>
-              <a:rPr lang="en-US" sz="1300" b="1" dirty="0">
+              <a:rPr lang="en-US" sz="1220" b="1" dirty="0">
                 <a:solidFill>
                   <a:srgbClr val="0068B7"/>
                 </a:solidFill>
@@ -8337,7 +8341,7 @@
               </a:rPr>
               <a:t>What to produce</a:t>
             </a:r>
-            <a:endParaRPr lang="en-US" sz="1300" dirty="0"/>
+            <a:endParaRPr lang="en-US" sz="1220" dirty="0"/>
           </a:p>
         </p:txBody>
       </p:sp>
@@ -8349,8 +8353,8 @@
         </p:nvSpPr>
         <p:spPr>
           <a:xfrm>
-            <a:off x="7799832" y="4659782"/>
-            <a:ext cx="3145536" cy="899770"/>
+            <a:off x="7708392" y="4828032"/>
+            <a:ext cx="3282696" cy="749808"/>
           </a:xfrm>
           <a:prstGeom prst="rect">
             <a:avLst/>
@@ -8368,7 +8372,7 @@
               <a:buNone/>
             </a:pPr>
             <a:r>
-              <a:rPr lang="en-US" sz="1320" dirty="0">
+              <a:rPr lang="en-US" sz="1220" dirty="0">
                 <a:solidFill>
                   <a:srgbClr val="17364A"/>
                 </a:solidFill>
@@ -8376,9 +8380,9 @@
                 <a:ea typeface="Aptos" pitchFamily="34" charset="-122"/>
                 <a:cs typeface="Aptos" pitchFamily="34" charset="-120"/>
               </a:rPr>
-              <a:t>Use the assignment to test whether you can explain the concept, apply it to a realistic public health situation, and identify what would need review before the work moves forward.</a:t>
-            </a:r>
-            <a:endParaRPr lang="en-US" sz="1320" dirty="0"/>
+              <a:t>Use the assignment to test whether you can explain the concept, apply it to a.</a:t>
+            </a:r>
+            <a:endParaRPr lang="en-US" sz="1220" dirty="0"/>
           </a:p>
         </p:txBody>
       </p:sp>
@@ -8669,8 +8673,8 @@
         </p:nvSpPr>
         <p:spPr>
           <a:xfrm>
-            <a:off x="868680" y="1508760"/>
-            <a:ext cx="6309360" cy="4160520"/>
+            <a:off x="822960" y="1463040"/>
+            <a:ext cx="6565392" cy="4343400"/>
           </a:xfrm>
           <a:prstGeom prst="rect">
             <a:avLst/>
@@ -8688,7 +8692,7 @@
               <a:buNone/>
             </a:pPr>
             <a:r>
-              <a:rPr lang="en-US" sz="2100" dirty="0">
+              <a:rPr lang="en-US" sz="1920" dirty="0">
                 <a:solidFill>
                   <a:srgbClr val="003A63"/>
                 </a:solidFill>
@@ -8698,14 +8702,14 @@
               </a:rPr>
               <a:t>• Causal question framing worksheet</a:t>
             </a:r>
-            <a:endParaRPr lang="en-US" sz="2100" dirty="0"/>
-          </a:p>
-          <a:p>
-            <a:pPr indent="0" marL="0">
-              <a:buNone/>
-            </a:pPr>
-            <a:r>
-              <a:rPr lang="en-US" sz="2100" dirty="0">
+            <a:endParaRPr lang="en-US" sz="1920" dirty="0"/>
+          </a:p>
+          <a:p>
+            <a:pPr indent="0" marL="0">
+              <a:buNone/>
+            </a:pPr>
+            <a:r>
+              <a:rPr lang="en-US" sz="1920" dirty="0">
                 <a:solidFill>
                   <a:srgbClr val="003A63"/>
                 </a:solidFill>
@@ -8715,14 +8719,14 @@
               </a:rPr>
               <a:t>• List of assumptions and likely confounders</a:t>
             </a:r>
-            <a:endParaRPr lang="en-US" sz="2100" dirty="0"/>
-          </a:p>
-          <a:p>
-            <a:pPr indent="0" marL="0">
-              <a:buNone/>
-            </a:pPr>
-            <a:r>
-              <a:rPr lang="en-US" sz="2100" dirty="0">
+            <a:endParaRPr lang="en-US" sz="1920" dirty="0"/>
+          </a:p>
+          <a:p>
+            <a:pPr indent="0" marL="0">
+              <a:buNone/>
+            </a:pPr>
+            <a:r>
+              <a:rPr lang="en-US" sz="1920" dirty="0">
                 <a:solidFill>
                   <a:srgbClr val="003A63"/>
                 </a:solidFill>
@@ -8732,7 +8736,7 @@
               </a:rPr>
               <a:t>• Recommended evaluation design or expert consultation need</a:t>
             </a:r>
-            <a:endParaRPr lang="en-US" sz="2100" dirty="0"/>
+            <a:endParaRPr lang="en-US" sz="1920" dirty="0"/>
           </a:p>
         </p:txBody>
       </p:sp>
@@ -8744,12 +8748,12 @@
         </p:nvSpPr>
         <p:spPr>
           <a:xfrm>
-            <a:off x="7635240" y="1325880"/>
-            <a:ext cx="3474720" cy="1207008"/>
+            <a:off x="7543800" y="1325880"/>
+            <a:ext cx="3611880" cy="1261872"/>
           </a:xfrm>
           <a:prstGeom prst="roundRect">
             <a:avLst>
-              <a:gd name="adj" fmla="val 9091"/>
+              <a:gd name="adj" fmla="val 8696"/>
             </a:avLst>
           </a:prstGeom>
           <a:solidFill>
@@ -8771,8 +8775,8 @@
         </p:nvSpPr>
         <p:spPr>
           <a:xfrm>
-            <a:off x="7799832" y="1472184"/>
-            <a:ext cx="3145536" cy="256032"/>
+            <a:off x="7708392" y="1453896"/>
+            <a:ext cx="3282696" cy="228600"/>
           </a:xfrm>
           <a:prstGeom prst="rect">
             <a:avLst/>
@@ -8788,7 +8792,7 @@
               <a:buNone/>
             </a:pPr>
             <a:r>
-              <a:rPr lang="en-US" sz="1300" b="1" dirty="0">
+              <a:rPr lang="en-US" sz="1220" b="1" dirty="0">
                 <a:solidFill>
                   <a:srgbClr val="0068B7"/>
                 </a:solidFill>
@@ -8798,7 +8802,7 @@
               </a:rPr>
               <a:t>Core concept</a:t>
             </a:r>
-            <a:endParaRPr lang="en-US" sz="1300" dirty="0"/>
+            <a:endParaRPr lang="en-US" sz="1220" dirty="0"/>
           </a:p>
         </p:txBody>
       </p:sp>
@@ -8810,8 +8814,8 @@
         </p:nvSpPr>
         <p:spPr>
           <a:xfrm>
-            <a:off x="7799832" y="1801368"/>
-            <a:ext cx="3145536" cy="640080"/>
+            <a:off x="7708392" y="1764792"/>
+            <a:ext cx="3282696" cy="749808"/>
           </a:xfrm>
           <a:prstGeom prst="rect">
             <a:avLst/>
@@ -8829,7 +8833,7 @@
               <a:buNone/>
             </a:pPr>
             <a:r>
-              <a:rPr lang="en-US" sz="1320" dirty="0">
+              <a:rPr lang="en-US" sz="1220" dirty="0">
                 <a:solidFill>
                   <a:srgbClr val="17364A"/>
                 </a:solidFill>
@@ -8839,7 +8843,7 @@
               </a:rPr>
               <a:t>Causal question framing worksheet</a:t>
             </a:r>
-            <a:endParaRPr lang="en-US" sz="1320" dirty="0"/>
+            <a:endParaRPr lang="en-US" sz="1220" dirty="0"/>
           </a:p>
         </p:txBody>
       </p:sp>
@@ -8851,12 +8855,12 @@
         </p:nvSpPr>
         <p:spPr>
           <a:xfrm>
-            <a:off x="7635240" y="2670048"/>
-            <a:ext cx="3474720" cy="1377086"/>
+            <a:off x="7543800" y="2724912"/>
+            <a:ext cx="3611880" cy="1527048"/>
           </a:xfrm>
           <a:prstGeom prst="roundRect">
             <a:avLst>
-              <a:gd name="adj" fmla="val 7968"/>
+              <a:gd name="adj" fmla="val 7186"/>
             </a:avLst>
           </a:prstGeom>
           <a:solidFill>
@@ -8878,8 +8882,8 @@
         </p:nvSpPr>
         <p:spPr>
           <a:xfrm>
-            <a:off x="7799832" y="2816352"/>
-            <a:ext cx="3145536" cy="256032"/>
+            <a:off x="7708392" y="2852928"/>
+            <a:ext cx="3282696" cy="228600"/>
           </a:xfrm>
           <a:prstGeom prst="rect">
             <a:avLst/>
@@ -8895,7 +8899,7 @@
               <a:buNone/>
             </a:pPr>
             <a:r>
-              <a:rPr lang="en-US" sz="1300" b="1" dirty="0">
+              <a:rPr lang="en-US" sz="1220" b="1" dirty="0">
                 <a:solidFill>
                   <a:srgbClr val="0068B7"/>
                 </a:solidFill>
@@ -8905,7 +8909,7 @@
               </a:rPr>
               <a:t>Concept checkpoints</a:t>
             </a:r>
-            <a:endParaRPr lang="en-US" sz="1300" dirty="0"/>
+            <a:endParaRPr lang="en-US" sz="1220" dirty="0"/>
           </a:p>
         </p:txBody>
       </p:sp>
@@ -8917,8 +8921,8 @@
         </p:nvSpPr>
         <p:spPr>
           <a:xfrm>
-            <a:off x="7818120" y="3182112"/>
-            <a:ext cx="3090672" cy="718718"/>
+            <a:off x="7726680" y="3182112"/>
+            <a:ext cx="3227832" cy="960120"/>
           </a:xfrm>
           <a:prstGeom prst="rect">
             <a:avLst/>
@@ -8936,7 +8940,7 @@
               <a:buNone/>
             </a:pPr>
             <a:r>
-              <a:rPr lang="en-US" sz="1220" dirty="0">
+              <a:rPr lang="en-US" sz="1140" dirty="0">
                 <a:solidFill>
                   <a:srgbClr val="17364A"/>
                 </a:solidFill>
@@ -8946,14 +8950,14 @@
               </a:rPr>
               <a:t>Causal question framing worksheet</a:t>
             </a:r>
-            <a:endParaRPr lang="en-US" sz="1220" dirty="0"/>
-          </a:p>
-          <a:p>
-            <a:pPr indent="0" marL="0">
-              <a:buNone/>
-            </a:pPr>
-            <a:r>
-              <a:rPr lang="en-US" sz="1220" dirty="0">
+            <a:endParaRPr lang="en-US" sz="1140" dirty="0"/>
+          </a:p>
+          <a:p>
+            <a:pPr indent="0" marL="0">
+              <a:buNone/>
+            </a:pPr>
+            <a:r>
+              <a:rPr lang="en-US" sz="1140" dirty="0">
                 <a:solidFill>
                   <a:srgbClr val="17364A"/>
                 </a:solidFill>
@@ -8963,14 +8967,14 @@
               </a:rPr>
               <a:t>List of assumptions and likely confounders</a:t>
             </a:r>
-            <a:endParaRPr lang="en-US" sz="1220" dirty="0"/>
-          </a:p>
-          <a:p>
-            <a:pPr indent="0" marL="0">
-              <a:buNone/>
-            </a:pPr>
-            <a:r>
-              <a:rPr lang="en-US" sz="1220" dirty="0">
+            <a:endParaRPr lang="en-US" sz="1140" dirty="0"/>
+          </a:p>
+          <a:p>
+            <a:pPr indent="0" marL="0">
+              <a:buNone/>
+            </a:pPr>
+            <a:r>
+              <a:rPr lang="en-US" sz="1140" dirty="0">
                 <a:solidFill>
                   <a:srgbClr val="17364A"/>
                 </a:solidFill>
@@ -8978,9 +8982,9 @@
                 <a:ea typeface="Aptos" pitchFamily="34" charset="-122"/>
                 <a:cs typeface="Aptos" pitchFamily="34" charset="-120"/>
               </a:rPr>
-              <a:t>Recommended evaluation design or expert consultation need</a:t>
-            </a:r>
-            <a:endParaRPr lang="en-US" sz="1220" dirty="0"/>
+              <a:t>Recommended evaluation design or expert.</a:t>
+            </a:r>
+            <a:endParaRPr lang="en-US" sz="1140" dirty="0"/>
           </a:p>
         </p:txBody>
       </p:sp>
@@ -8992,12 +8996,12 @@
         </p:nvSpPr>
         <p:spPr>
           <a:xfrm>
-            <a:off x="7635240" y="4184294"/>
-            <a:ext cx="3474720" cy="1466698"/>
+            <a:off x="7543800" y="4389120"/>
+            <a:ext cx="3611880" cy="1261872"/>
           </a:xfrm>
           <a:prstGeom prst="roundRect">
             <a:avLst>
-              <a:gd name="adj" fmla="val 7481"/>
+              <a:gd name="adj" fmla="val 8696"/>
             </a:avLst>
           </a:prstGeom>
           <a:solidFill>
@@ -9019,8 +9023,8 @@
         </p:nvSpPr>
         <p:spPr>
           <a:xfrm>
-            <a:off x="7799832" y="4330598"/>
-            <a:ext cx="3145536" cy="256032"/>
+            <a:off x="7708392" y="4517136"/>
+            <a:ext cx="3282696" cy="228600"/>
           </a:xfrm>
           <a:prstGeom prst="rect">
             <a:avLst/>
@@ -9036,7 +9040,7 @@
               <a:buNone/>
             </a:pPr>
             <a:r>
-              <a:rPr lang="en-US" sz="1300" b="1" dirty="0">
+              <a:rPr lang="en-US" sz="1220" b="1" dirty="0">
                 <a:solidFill>
                   <a:srgbClr val="0068B7"/>
                 </a:solidFill>
@@ -9046,7 +9050,7 @@
               </a:rPr>
               <a:t>Apply it</a:t>
             </a:r>
-            <a:endParaRPr lang="en-US" sz="1300" dirty="0"/>
+            <a:endParaRPr lang="en-US" sz="1220" dirty="0"/>
           </a:p>
         </p:txBody>
       </p:sp>
@@ -9058,8 +9062,8 @@
         </p:nvSpPr>
         <p:spPr>
           <a:xfrm>
-            <a:off x="7799832" y="4659782"/>
-            <a:ext cx="3145536" cy="899770"/>
+            <a:off x="7708392" y="4828032"/>
+            <a:ext cx="3282696" cy="749808"/>
           </a:xfrm>
           <a:prstGeom prst="rect">
             <a:avLst/>
@@ -9077,7 +9081,7 @@
               <a:buNone/>
             </a:pPr>
             <a:r>
-              <a:rPr lang="en-US" sz="1320" dirty="0">
+              <a:rPr lang="en-US" sz="1220" dirty="0">
                 <a:solidFill>
                   <a:srgbClr val="17364A"/>
                 </a:solidFill>
@@ -9085,9 +9089,9 @@
                 <a:ea typeface="Aptos" pitchFamily="34" charset="-122"/>
                 <a:cs typeface="Aptos" pitchFamily="34" charset="-120"/>
               </a:rPr>
-              <a:t>Connect the concept to public health purpose, responsible use, required safeguards, documentation, and the next action a department should take.</a:t>
-            </a:r>
-            <a:endParaRPr lang="en-US" sz="1320" dirty="0"/>
+              <a:t>Connect the concept to public health purpose, responsible use, required.</a:t>
+            </a:r>
+            <a:endParaRPr lang="en-US" sz="1220" dirty="0"/>
           </a:p>
         </p:txBody>
       </p:sp>
@@ -9378,8 +9382,8 @@
         </p:nvSpPr>
         <p:spPr>
           <a:xfrm>
-            <a:off x="868680" y="1508760"/>
-            <a:ext cx="6309360" cy="4160520"/>
+            <a:off x="822960" y="1463040"/>
+            <a:ext cx="6565392" cy="4343400"/>
           </a:xfrm>
           <a:prstGeom prst="rect">
             <a:avLst/>
@@ -9397,7 +9401,7 @@
               <a:buNone/>
             </a:pPr>
             <a:r>
-              <a:rPr lang="en-US" sz="2100" dirty="0">
+              <a:rPr lang="en-US" sz="1920" dirty="0">
                 <a:solidFill>
                   <a:srgbClr val="003A63"/>
                 </a:solidFill>
@@ -9407,7 +9411,7 @@
               </a:rPr>
               <a:t>• Plain-language statement distinguishing prediction from causation</a:t>
             </a:r>
-            <a:endParaRPr lang="en-US" sz="2100" dirty="0"/>
+            <a:endParaRPr lang="en-US" sz="1920" dirty="0"/>
           </a:p>
         </p:txBody>
       </p:sp>
@@ -9419,12 +9423,12 @@
         </p:nvSpPr>
         <p:spPr>
           <a:xfrm>
-            <a:off x="7635240" y="1325880"/>
-            <a:ext cx="3474720" cy="1207008"/>
+            <a:off x="7543800" y="1325880"/>
+            <a:ext cx="3611880" cy="1261872"/>
           </a:xfrm>
           <a:prstGeom prst="roundRect">
             <a:avLst>
-              <a:gd name="adj" fmla="val 9091"/>
+              <a:gd name="adj" fmla="val 8696"/>
             </a:avLst>
           </a:prstGeom>
           <a:solidFill>
@@ -9446,8 +9450,8 @@
         </p:nvSpPr>
         <p:spPr>
           <a:xfrm>
-            <a:off x="7799832" y="1472184"/>
-            <a:ext cx="3145536" cy="256032"/>
+            <a:off x="7708392" y="1453896"/>
+            <a:ext cx="3282696" cy="228600"/>
           </a:xfrm>
           <a:prstGeom prst="rect">
             <a:avLst/>
@@ -9463,7 +9467,7 @@
               <a:buNone/>
             </a:pPr>
             <a:r>
-              <a:rPr lang="en-US" sz="1300" b="1" dirty="0">
+              <a:rPr lang="en-US" sz="1220" b="1" dirty="0">
                 <a:solidFill>
                   <a:srgbClr val="0068B7"/>
                 </a:solidFill>
@@ -9473,7 +9477,7 @@
               </a:rPr>
               <a:t>Core concept</a:t>
             </a:r>
-            <a:endParaRPr lang="en-US" sz="1300" dirty="0"/>
+            <a:endParaRPr lang="en-US" sz="1220" dirty="0"/>
           </a:p>
         </p:txBody>
       </p:sp>
@@ -9485,8 +9489,8 @@
         </p:nvSpPr>
         <p:spPr>
           <a:xfrm>
-            <a:off x="7799832" y="1801368"/>
-            <a:ext cx="3145536" cy="640080"/>
+            <a:off x="7708392" y="1764792"/>
+            <a:ext cx="3282696" cy="749808"/>
           </a:xfrm>
           <a:prstGeom prst="rect">
             <a:avLst/>
@@ -9504,7 +9508,7 @@
               <a:buNone/>
             </a:pPr>
             <a:r>
-              <a:rPr lang="en-US" sz="1320" dirty="0">
+              <a:rPr lang="en-US" sz="1220" dirty="0">
                 <a:solidFill>
                   <a:srgbClr val="17364A"/>
                 </a:solidFill>
@@ -9514,7 +9518,7 @@
               </a:rPr>
               <a:t>Plain-language statement distinguishing prediction from causation</a:t>
             </a:r>
-            <a:endParaRPr lang="en-US" sz="1320" dirty="0"/>
+            <a:endParaRPr lang="en-US" sz="1220" dirty="0"/>
           </a:p>
         </p:txBody>
       </p:sp>
@@ -9526,12 +9530,12 @@
         </p:nvSpPr>
         <p:spPr>
           <a:xfrm>
-            <a:off x="7635240" y="2670048"/>
-            <a:ext cx="3474720" cy="1377086"/>
+            <a:off x="7543800" y="2724912"/>
+            <a:ext cx="3611880" cy="1527048"/>
           </a:xfrm>
           <a:prstGeom prst="roundRect">
             <a:avLst>
-              <a:gd name="adj" fmla="val 7968"/>
+              <a:gd name="adj" fmla="val 7186"/>
             </a:avLst>
           </a:prstGeom>
           <a:solidFill>
@@ -9553,8 +9557,8 @@
         </p:nvSpPr>
         <p:spPr>
           <a:xfrm>
-            <a:off x="7799832" y="2816352"/>
-            <a:ext cx="3145536" cy="256032"/>
+            <a:off x="7708392" y="2852928"/>
+            <a:ext cx="3282696" cy="228600"/>
           </a:xfrm>
           <a:prstGeom prst="rect">
             <a:avLst/>
@@ -9570,7 +9574,7 @@
               <a:buNone/>
             </a:pPr>
             <a:r>
-              <a:rPr lang="en-US" sz="1300" b="1" dirty="0">
+              <a:rPr lang="en-US" sz="1220" b="1" dirty="0">
                 <a:solidFill>
                   <a:srgbClr val="0068B7"/>
                 </a:solidFill>
@@ -9580,7 +9584,7 @@
               </a:rPr>
               <a:t>Concept checkpoints</a:t>
             </a:r>
-            <a:endParaRPr lang="en-US" sz="1300" dirty="0"/>
+            <a:endParaRPr lang="en-US" sz="1220" dirty="0"/>
           </a:p>
         </p:txBody>
       </p:sp>
@@ -9592,8 +9596,8 @@
         </p:nvSpPr>
         <p:spPr>
           <a:xfrm>
-            <a:off x="7818120" y="3182112"/>
-            <a:ext cx="3090672" cy="718718"/>
+            <a:off x="7726680" y="3182112"/>
+            <a:ext cx="3227832" cy="960120"/>
           </a:xfrm>
           <a:prstGeom prst="rect">
             <a:avLst/>
@@ -9611,7 +9615,7 @@
               <a:buNone/>
             </a:pPr>
             <a:r>
-              <a:rPr lang="en-US" sz="1220" dirty="0">
+              <a:rPr lang="en-US" sz="1140" dirty="0">
                 <a:solidFill>
                   <a:srgbClr val="17364A"/>
                 </a:solidFill>
@@ -9619,9 +9623,9 @@
                 <a:ea typeface="Aptos" pitchFamily="34" charset="-122"/>
                 <a:cs typeface="Aptos" pitchFamily="34" charset="-120"/>
               </a:rPr>
-              <a:t>Plain-language statement distinguishing prediction from causation</a:t>
-            </a:r>
-            <a:endParaRPr lang="en-US" sz="1220" dirty="0"/>
+              <a:t>Plain-language statement distinguishing prediction.</a:t>
+            </a:r>
+            <a:endParaRPr lang="en-US" sz="1140" dirty="0"/>
           </a:p>
         </p:txBody>
       </p:sp>
@@ -9633,12 +9637,12 @@
         </p:nvSpPr>
         <p:spPr>
           <a:xfrm>
-            <a:off x="7635240" y="4184294"/>
-            <a:ext cx="3474720" cy="1466698"/>
+            <a:off x="7543800" y="4389120"/>
+            <a:ext cx="3611880" cy="1261872"/>
           </a:xfrm>
           <a:prstGeom prst="roundRect">
             <a:avLst>
-              <a:gd name="adj" fmla="val 7481"/>
+              <a:gd name="adj" fmla="val 8696"/>
             </a:avLst>
           </a:prstGeom>
           <a:solidFill>
@@ -9660,8 +9664,8 @@
         </p:nvSpPr>
         <p:spPr>
           <a:xfrm>
-            <a:off x="7799832" y="4330598"/>
-            <a:ext cx="3145536" cy="256032"/>
+            <a:off x="7708392" y="4517136"/>
+            <a:ext cx="3282696" cy="228600"/>
           </a:xfrm>
           <a:prstGeom prst="rect">
             <a:avLst/>
@@ -9677,7 +9681,7 @@
               <a:buNone/>
             </a:pPr>
             <a:r>
-              <a:rPr lang="en-US" sz="1300" b="1" dirty="0">
+              <a:rPr lang="en-US" sz="1220" b="1" dirty="0">
                 <a:solidFill>
                   <a:srgbClr val="0068B7"/>
                 </a:solidFill>
@@ -9687,7 +9691,7 @@
               </a:rPr>
               <a:t>Apply it</a:t>
             </a:r>
-            <a:endParaRPr lang="en-US" sz="1300" dirty="0"/>
+            <a:endParaRPr lang="en-US" sz="1220" dirty="0"/>
           </a:p>
         </p:txBody>
       </p:sp>
@@ -9699,8 +9703,8 @@
         </p:nvSpPr>
         <p:spPr>
           <a:xfrm>
-            <a:off x="7799832" y="4659782"/>
-            <a:ext cx="3145536" cy="899770"/>
+            <a:off x="7708392" y="4828032"/>
+            <a:ext cx="3282696" cy="749808"/>
           </a:xfrm>
           <a:prstGeom prst="rect">
             <a:avLst/>
@@ -9718,7 +9722,7 @@
               <a:buNone/>
             </a:pPr>
             <a:r>
-              <a:rPr lang="en-US" sz="1320" dirty="0">
+              <a:rPr lang="en-US" sz="1220" dirty="0">
                 <a:solidFill>
                   <a:srgbClr val="17364A"/>
                 </a:solidFill>
@@ -9726,9 +9730,9 @@
                 <a:ea typeface="Aptos" pitchFamily="34" charset="-122"/>
                 <a:cs typeface="Aptos" pitchFamily="34" charset="-120"/>
               </a:rPr>
-              <a:t>Connect the concept to public health purpose, responsible use, required safeguards, documentation, and the next action a department should take.</a:t>
-            </a:r>
-            <a:endParaRPr lang="en-US" sz="1320" dirty="0"/>
+              <a:t>Connect the concept to public health purpose, responsible use, required.</a:t>
+            </a:r>
+            <a:endParaRPr lang="en-US" sz="1220" dirty="0"/>
           </a:p>
         </p:txBody>
       </p:sp>
@@ -10019,8 +10023,8 @@
         </p:nvSpPr>
         <p:spPr>
           <a:xfrm>
-            <a:off x="868680" y="1508760"/>
-            <a:ext cx="6309360" cy="4160520"/>
+            <a:off x="822960" y="1463040"/>
+            <a:ext cx="6565392" cy="4343400"/>
           </a:xfrm>
           <a:prstGeom prst="rect">
             <a:avLst/>
@@ -10038,7 +10042,7 @@
               <a:buNone/>
             </a:pPr>
             <a:r>
-              <a:rPr lang="en-US" sz="2100" dirty="0">
+              <a:rPr lang="en-US" sz="1920" dirty="0">
                 <a:solidFill>
                   <a:srgbClr val="003A63"/>
                 </a:solidFill>
@@ -10048,14 +10052,14 @@
               </a:rPr>
               <a:t>• Causal question framing worksheet</a:t>
             </a:r>
-            <a:endParaRPr lang="en-US" sz="2100" dirty="0"/>
-          </a:p>
-          <a:p>
-            <a:pPr indent="0" marL="0">
-              <a:buNone/>
-            </a:pPr>
-            <a:r>
-              <a:rPr lang="en-US" sz="2100" dirty="0">
+            <a:endParaRPr lang="en-US" sz="1920" dirty="0"/>
+          </a:p>
+          <a:p>
+            <a:pPr indent="0" marL="0">
+              <a:buNone/>
+            </a:pPr>
+            <a:r>
+              <a:rPr lang="en-US" sz="1920" dirty="0">
                 <a:solidFill>
                   <a:srgbClr val="003A63"/>
                 </a:solidFill>
@@ -10065,14 +10069,14 @@
               </a:rPr>
               <a:t>• List of assumptions and likely confounders</a:t>
             </a:r>
-            <a:endParaRPr lang="en-US" sz="2100" dirty="0"/>
-          </a:p>
-          <a:p>
-            <a:pPr indent="0" marL="0">
-              <a:buNone/>
-            </a:pPr>
-            <a:r>
-              <a:rPr lang="en-US" sz="2100" dirty="0">
+            <a:endParaRPr lang="en-US" sz="1920" dirty="0"/>
+          </a:p>
+          <a:p>
+            <a:pPr indent="0" marL="0">
+              <a:buNone/>
+            </a:pPr>
+            <a:r>
+              <a:rPr lang="en-US" sz="1920" dirty="0">
                 <a:solidFill>
                   <a:srgbClr val="003A63"/>
                 </a:solidFill>
@@ -10082,7 +10086,7 @@
               </a:rPr>
               <a:t>• Recommended evaluation design or expert consultation need</a:t>
             </a:r>
-            <a:endParaRPr lang="en-US" sz="2100" dirty="0"/>
+            <a:endParaRPr lang="en-US" sz="1920" dirty="0"/>
           </a:p>
         </p:txBody>
       </p:sp>
@@ -10094,12 +10098,12 @@
         </p:nvSpPr>
         <p:spPr>
           <a:xfrm>
-            <a:off x="7635240" y="1325880"/>
-            <a:ext cx="3474720" cy="1207008"/>
+            <a:off x="7543800" y="1325880"/>
+            <a:ext cx="3611880" cy="1261872"/>
           </a:xfrm>
           <a:prstGeom prst="roundRect">
             <a:avLst>
-              <a:gd name="adj" fmla="val 9091"/>
+              <a:gd name="adj" fmla="val 8696"/>
             </a:avLst>
           </a:prstGeom>
           <a:solidFill>
@@ -10121,8 +10125,8 @@
         </p:nvSpPr>
         <p:spPr>
           <a:xfrm>
-            <a:off x="7799832" y="1472184"/>
-            <a:ext cx="3145536" cy="256032"/>
+            <a:off x="7708392" y="1453896"/>
+            <a:ext cx="3282696" cy="228600"/>
           </a:xfrm>
           <a:prstGeom prst="rect">
             <a:avLst/>
@@ -10138,7 +10142,7 @@
               <a:buNone/>
             </a:pPr>
             <a:r>
-              <a:rPr lang="en-US" sz="1300" b="1" dirty="0">
+              <a:rPr lang="en-US" sz="1220" b="1" dirty="0">
                 <a:solidFill>
                   <a:srgbClr val="0068B7"/>
                 </a:solidFill>
@@ -10148,7 +10152,7 @@
               </a:rPr>
               <a:t>Practice focus</a:t>
             </a:r>
-            <a:endParaRPr lang="en-US" sz="1300" dirty="0"/>
+            <a:endParaRPr lang="en-US" sz="1220" dirty="0"/>
           </a:p>
         </p:txBody>
       </p:sp>
@@ -10160,8 +10164,8 @@
         </p:nvSpPr>
         <p:spPr>
           <a:xfrm>
-            <a:off x="7799832" y="1801368"/>
-            <a:ext cx="3145536" cy="640080"/>
+            <a:off x="7708392" y="1764792"/>
+            <a:ext cx="3282696" cy="749808"/>
           </a:xfrm>
           <a:prstGeom prst="rect">
             <a:avLst/>
@@ -10179,7 +10183,7 @@
               <a:buNone/>
             </a:pPr>
             <a:r>
-              <a:rPr lang="en-US" sz="1320" dirty="0">
+              <a:rPr lang="en-US" sz="1220" dirty="0">
                 <a:solidFill>
                   <a:srgbClr val="17364A"/>
                 </a:solidFill>
@@ -10189,7 +10193,7 @@
               </a:rPr>
               <a:t>Causal question framing worksheet</a:t>
             </a:r>
-            <a:endParaRPr lang="en-US" sz="1320" dirty="0"/>
+            <a:endParaRPr lang="en-US" sz="1220" dirty="0"/>
           </a:p>
         </p:txBody>
       </p:sp>
@@ -10201,12 +10205,12 @@
         </p:nvSpPr>
         <p:spPr>
           <a:xfrm>
-            <a:off x="7635240" y="2670048"/>
-            <a:ext cx="3474720" cy="1377086"/>
+            <a:off x="7543800" y="2724912"/>
+            <a:ext cx="3611880" cy="1527048"/>
           </a:xfrm>
           <a:prstGeom prst="roundRect">
             <a:avLst>
-              <a:gd name="adj" fmla="val 7968"/>
+              <a:gd name="adj" fmla="val 7186"/>
             </a:avLst>
           </a:prstGeom>
           <a:solidFill>
@@ -10228,8 +10232,8 @@
         </p:nvSpPr>
         <p:spPr>
           <a:xfrm>
-            <a:off x="7799832" y="2816352"/>
-            <a:ext cx="3145536" cy="256032"/>
+            <a:off x="7708392" y="2852928"/>
+            <a:ext cx="3282696" cy="228600"/>
           </a:xfrm>
           <a:prstGeom prst="rect">
             <a:avLst/>
@@ -10245,7 +10249,7 @@
               <a:buNone/>
             </a:pPr>
             <a:r>
-              <a:rPr lang="en-US" sz="1300" b="1" dirty="0">
+              <a:rPr lang="en-US" sz="1220" b="1" dirty="0">
                 <a:solidFill>
                   <a:srgbClr val="0068B7"/>
                 </a:solidFill>
@@ -10255,7 +10259,7 @@
               </a:rPr>
               <a:t>Concept checkpoints</a:t>
             </a:r>
-            <a:endParaRPr lang="en-US" sz="1300" dirty="0"/>
+            <a:endParaRPr lang="en-US" sz="1220" dirty="0"/>
           </a:p>
         </p:txBody>
       </p:sp>
@@ -10267,8 +10271,8 @@
         </p:nvSpPr>
         <p:spPr>
           <a:xfrm>
-            <a:off x="7818120" y="3182112"/>
-            <a:ext cx="3090672" cy="718718"/>
+            <a:off x="7726680" y="3182112"/>
+            <a:ext cx="3227832" cy="960120"/>
           </a:xfrm>
           <a:prstGeom prst="rect">
             <a:avLst/>
@@ -10286,7 +10290,7 @@
               <a:buNone/>
             </a:pPr>
             <a:r>
-              <a:rPr lang="en-US" sz="1220" dirty="0">
+              <a:rPr lang="en-US" sz="1140" dirty="0">
                 <a:solidFill>
                   <a:srgbClr val="17364A"/>
                 </a:solidFill>
@@ -10296,14 +10300,14 @@
               </a:rPr>
               <a:t>Causal question framing worksheet</a:t>
             </a:r>
-            <a:endParaRPr lang="en-US" sz="1220" dirty="0"/>
-          </a:p>
-          <a:p>
-            <a:pPr indent="0" marL="0">
-              <a:buNone/>
-            </a:pPr>
-            <a:r>
-              <a:rPr lang="en-US" sz="1220" dirty="0">
+            <a:endParaRPr lang="en-US" sz="1140" dirty="0"/>
+          </a:p>
+          <a:p>
+            <a:pPr indent="0" marL="0">
+              <a:buNone/>
+            </a:pPr>
+            <a:r>
+              <a:rPr lang="en-US" sz="1140" dirty="0">
                 <a:solidFill>
                   <a:srgbClr val="17364A"/>
                 </a:solidFill>
@@ -10313,14 +10317,14 @@
               </a:rPr>
               <a:t>List of assumptions and likely confounders</a:t>
             </a:r>
-            <a:endParaRPr lang="en-US" sz="1220" dirty="0"/>
-          </a:p>
-          <a:p>
-            <a:pPr indent="0" marL="0">
-              <a:buNone/>
-            </a:pPr>
-            <a:r>
-              <a:rPr lang="en-US" sz="1220" dirty="0">
+            <a:endParaRPr lang="en-US" sz="1140" dirty="0"/>
+          </a:p>
+          <a:p>
+            <a:pPr indent="0" marL="0">
+              <a:buNone/>
+            </a:pPr>
+            <a:r>
+              <a:rPr lang="en-US" sz="1140" dirty="0">
                 <a:solidFill>
                   <a:srgbClr val="17364A"/>
                 </a:solidFill>
@@ -10328,9 +10332,9 @@
                 <a:ea typeface="Aptos" pitchFamily="34" charset="-122"/>
                 <a:cs typeface="Aptos" pitchFamily="34" charset="-120"/>
               </a:rPr>
-              <a:t>Recommended evaluation design or expert consultation need</a:t>
-            </a:r>
-            <a:endParaRPr lang="en-US" sz="1220" dirty="0"/>
+              <a:t>Recommended evaluation design or expert.</a:t>
+            </a:r>
+            <a:endParaRPr lang="en-US" sz="1140" dirty="0"/>
           </a:p>
         </p:txBody>
       </p:sp>
@@ -10342,12 +10346,12 @@
         </p:nvSpPr>
         <p:spPr>
           <a:xfrm>
-            <a:off x="7635240" y="4184294"/>
-            <a:ext cx="3474720" cy="1466698"/>
+            <a:off x="7543800" y="4389120"/>
+            <a:ext cx="3611880" cy="1261872"/>
           </a:xfrm>
           <a:prstGeom prst="roundRect">
             <a:avLst>
-              <a:gd name="adj" fmla="val 7481"/>
+              <a:gd name="adj" fmla="val 8696"/>
             </a:avLst>
           </a:prstGeom>
           <a:solidFill>
@@ -10369,8 +10373,8 @@
         </p:nvSpPr>
         <p:spPr>
           <a:xfrm>
-            <a:off x="7799832" y="4330598"/>
-            <a:ext cx="3145536" cy="256032"/>
+            <a:off x="7708392" y="4517136"/>
+            <a:ext cx="3282696" cy="228600"/>
           </a:xfrm>
           <a:prstGeom prst="rect">
             <a:avLst/>
@@ -10386,7 +10390,7 @@
               <a:buNone/>
             </a:pPr>
             <a:r>
-              <a:rPr lang="en-US" sz="1300" b="1" dirty="0">
+              <a:rPr lang="en-US" sz="1220" b="1" dirty="0">
                 <a:solidFill>
                   <a:srgbClr val="0068B7"/>
                 </a:solidFill>
@@ -10396,7 +10400,7 @@
               </a:rPr>
               <a:t>What to produce</a:t>
             </a:r>
-            <a:endParaRPr lang="en-US" sz="1300" dirty="0"/>
+            <a:endParaRPr lang="en-US" sz="1220" dirty="0"/>
           </a:p>
         </p:txBody>
       </p:sp>
@@ -10408,8 +10412,8 @@
         </p:nvSpPr>
         <p:spPr>
           <a:xfrm>
-            <a:off x="7799832" y="4659782"/>
-            <a:ext cx="3145536" cy="899770"/>
+            <a:off x="7708392" y="4828032"/>
+            <a:ext cx="3282696" cy="749808"/>
           </a:xfrm>
           <a:prstGeom prst="rect">
             <a:avLst/>
@@ -10427,7 +10431,7 @@
               <a:buNone/>
             </a:pPr>
             <a:r>
-              <a:rPr lang="en-US" sz="1320" dirty="0">
+              <a:rPr lang="en-US" sz="1220" dirty="0">
                 <a:solidFill>
                   <a:srgbClr val="17364A"/>
                 </a:solidFill>
@@ -10435,9 +10439,9 @@
                 <a:ea typeface="Aptos" pitchFamily="34" charset="-122"/>
                 <a:cs typeface="Aptos" pitchFamily="34" charset="-120"/>
               </a:rPr>
-              <a:t>Use the assignment to test whether you can explain the concept, apply it to a realistic public health situation, and identify what would need review before the work moves forward.</a:t>
-            </a:r>
-            <a:endParaRPr lang="en-US" sz="1320" dirty="0"/>
+              <a:t>Use the assignment to test whether you can explain the concept, apply it to a.</a:t>
+            </a:r>
+            <a:endParaRPr lang="en-US" sz="1220" dirty="0"/>
           </a:p>
         </p:txBody>
       </p:sp>
@@ -10755,7 +10759,7 @@
                 <a:ea typeface="Aptos" pitchFamily="34" charset="-122"/>
                 <a:cs typeface="Aptos" pitchFamily="34" charset="-120"/>
               </a:rPr>
-              <a:t>• AI models often predict what is likely to happen, but public health leaders frequently need to.</a:t>
+              <a:t>• AI models often predict what is likely to happen, but public health leaders.</a:t>
             </a:r>
             <a:endParaRPr lang="en-US" sz="2100" dirty="0"/>
           </a:p>
@@ -10772,7 +10776,7 @@
                 <a:ea typeface="Aptos" pitchFamily="34" charset="-122"/>
                 <a:cs typeface="Aptos" pitchFamily="34" charset="-120"/>
               </a:rPr>
-              <a:t>• This module helps learners distinguish prediction from causal inference so AI outputs are not.</a:t>
+              <a:t>• This module helps learners distinguish prediction from causal inference so.</a:t>
             </a:r>
             <a:endParaRPr lang="en-US" sz="2100" dirty="0"/>
           </a:p>
@@ -10789,7 +10793,7 @@
                 <a:ea typeface="Aptos" pitchFamily="34" charset="-122"/>
                 <a:cs typeface="Aptos" pitchFamily="34" charset="-120"/>
               </a:rPr>
-              <a:t>• Learners examine confounding, bias, comparison groups, counterfactual reasoning, directed.</a:t>
+              <a:t>• Learners examine confounding, bias, comparison groups, counterfactual.</a:t>
             </a:r>
             <a:endParaRPr lang="en-US" sz="2100" dirty="0"/>
           </a:p>
@@ -10830,8 +10834,8 @@
         </p:nvSpPr>
         <p:spPr>
           <a:xfrm>
-            <a:off x="8074152" y="1563624"/>
-            <a:ext cx="2825496" cy="256032"/>
+            <a:off x="8074152" y="1545336"/>
+            <a:ext cx="2825496" cy="228600"/>
           </a:xfrm>
           <a:prstGeom prst="rect">
             <a:avLst/>
@@ -10847,7 +10851,7 @@
               <a:buNone/>
             </a:pPr>
             <a:r>
-              <a:rPr lang="en-US" sz="1300" b="1" dirty="0">
+              <a:rPr lang="en-US" sz="1220" b="1" dirty="0">
                 <a:solidFill>
                   <a:srgbClr val="0068B7"/>
                 </a:solidFill>
@@ -10857,7 +10861,7 @@
               </a:rPr>
               <a:t>Module details</a:t>
             </a:r>
-            <a:endParaRPr lang="en-US" sz="1300" dirty="0"/>
+            <a:endParaRPr lang="en-US" sz="1220" dirty="0"/>
           </a:p>
         </p:txBody>
       </p:sp>
@@ -10869,8 +10873,8 @@
         </p:nvSpPr>
         <p:spPr>
           <a:xfrm>
-            <a:off x="8074152" y="1892808"/>
-            <a:ext cx="2825496" cy="1353312"/>
+            <a:off x="8074152" y="1856232"/>
+            <a:ext cx="2825496" cy="1408176"/>
           </a:xfrm>
           <a:prstGeom prst="rect">
             <a:avLst/>
@@ -10888,7 +10892,7 @@
               <a:buNone/>
             </a:pPr>
             <a:r>
-              <a:rPr lang="en-US" sz="1320" dirty="0">
+              <a:rPr lang="en-US" sz="1220" dirty="0">
                 <a:solidFill>
                   <a:srgbClr val="17364A"/>
                 </a:solidFill>
@@ -10896,9 +10900,9 @@
                 <a:ea typeface="Aptos" pitchFamily="34" charset="-122"/>
                 <a:cs typeface="Aptos" pitchFamily="34" charset="-120"/>
               </a:rPr>
-              <a:t>Level: intermediate/practitioner Primary track: Analytics and Modeling Track Appears in tracks: analytics-modeling, epidemiology, policy, governance-security</a:t>
-            </a:r>
-            <a:endParaRPr lang="en-US" sz="1320" dirty="0"/>
+              <a:t>Level: intermediate/practitioner Primary track: Analytics and Modeling Track.</a:t>
+            </a:r>
+            <a:endParaRPr lang="en-US" sz="1220" dirty="0"/>
           </a:p>
         </p:txBody>
       </p:sp>
@@ -10937,8 +10941,8 @@
         </p:nvSpPr>
         <p:spPr>
           <a:xfrm>
-            <a:off x="8074152" y="3822192"/>
-            <a:ext cx="2825496" cy="256032"/>
+            <a:off x="8074152" y="3803904"/>
+            <a:ext cx="2825496" cy="228600"/>
           </a:xfrm>
           <a:prstGeom prst="rect">
             <a:avLst/>
@@ -10954,7 +10958,7 @@
               <a:buNone/>
             </a:pPr>
             <a:r>
-              <a:rPr lang="en-US" sz="1300" b="1" dirty="0">
+              <a:rPr lang="en-US" sz="1220" b="1" dirty="0">
                 <a:solidFill>
                   <a:srgbClr val="0068B7"/>
                 </a:solidFill>
@@ -10964,7 +10968,7 @@
               </a:rPr>
               <a:t>Learning sequence</a:t>
             </a:r>
-            <a:endParaRPr lang="en-US" sz="1300" dirty="0"/>
+            <a:endParaRPr lang="en-US" sz="1220" dirty="0"/>
           </a:p>
         </p:txBody>
       </p:sp>
@@ -10976,8 +10980,8 @@
         </p:nvSpPr>
         <p:spPr>
           <a:xfrm>
-            <a:off x="8092440" y="4187952"/>
-            <a:ext cx="2770632" cy="1033272"/>
+            <a:off x="8092440" y="4133088"/>
+            <a:ext cx="2770632" cy="1124712"/>
           </a:xfrm>
           <a:prstGeom prst="rect">
             <a:avLst/>
@@ -10995,7 +10999,7 @@
               <a:buNone/>
             </a:pPr>
             <a:r>
-              <a:rPr lang="en-US" sz="1220" dirty="0">
+              <a:rPr lang="en-US" sz="1140" dirty="0">
                 <a:solidFill>
                   <a:srgbClr val="17364A"/>
                 </a:solidFill>
@@ -11005,14 +11009,14 @@
               </a:rPr>
               <a:t>Read the module for shared vocabulary and context.</a:t>
             </a:r>
-            <a:endParaRPr lang="en-US" sz="1220" dirty="0"/>
-          </a:p>
-          <a:p>
-            <a:pPr indent="0" marL="0">
-              <a:buNone/>
-            </a:pPr>
-            <a:r>
-              <a:rPr lang="en-US" sz="1220" dirty="0">
+            <a:endParaRPr lang="en-US" sz="1140" dirty="0"/>
+          </a:p>
+          <a:p>
+            <a:pPr indent="0" marL="0">
+              <a:buNone/>
+            </a:pPr>
+            <a:r>
+              <a:rPr lang="en-US" sz="1140" dirty="0">
                 <a:solidFill>
                   <a:srgbClr val="17364A"/>
                 </a:solidFill>
@@ -11020,16 +11024,16 @@
                 <a:ea typeface="Aptos" pitchFamily="34" charset="-122"/>
                 <a:cs typeface="Aptos" pitchFamily="34" charset="-120"/>
               </a:rPr>
-              <a:t>Complete the practical exercise to apply the concept.</a:t>
-            </a:r>
-            <a:endParaRPr lang="en-US" sz="1220" dirty="0"/>
-          </a:p>
-          <a:p>
-            <a:pPr indent="0" marL="0">
-              <a:buNone/>
-            </a:pPr>
-            <a:r>
-              <a:rPr lang="en-US" sz="1220" dirty="0">
+              <a:t>Complete the practical exercise to apply the.</a:t>
+            </a:r>
+            <a:endParaRPr lang="en-US" sz="1140" dirty="0"/>
+          </a:p>
+          <a:p>
+            <a:pPr indent="0" marL="0">
+              <a:buNone/>
+            </a:pPr>
+            <a:r>
+              <a:rPr lang="en-US" sz="1140" dirty="0">
                 <a:solidFill>
                   <a:srgbClr val="17364A"/>
                 </a:solidFill>
@@ -11039,7 +11043,7 @@
               </a:rPr>
               <a:t>Use the notes and references for deeper review.</a:t>
             </a:r>
-            <a:endParaRPr lang="en-US" sz="1220" dirty="0"/>
+            <a:endParaRPr lang="en-US" sz="1140" dirty="0"/>
           </a:p>
         </p:txBody>
       </p:sp>
@@ -11330,8 +11334,8 @@
         </p:nvSpPr>
         <p:spPr>
           <a:xfrm>
-            <a:off x="868680" y="1508760"/>
-            <a:ext cx="6309360" cy="4160520"/>
+            <a:off x="822960" y="1463040"/>
+            <a:ext cx="6565392" cy="4343400"/>
           </a:xfrm>
           <a:prstGeom prst="rect">
             <a:avLst/>
@@ -11349,7 +11353,7 @@
               <a:buNone/>
             </a:pPr>
             <a:r>
-              <a:rPr lang="en-US" sz="2100" dirty="0">
+              <a:rPr lang="en-US" sz="1920" dirty="0">
                 <a:solidFill>
                   <a:srgbClr val="003A63"/>
                 </a:solidFill>
@@ -11359,14 +11363,14 @@
               </a:rPr>
               <a:t>• 1. Which statement best distinguishes prediction from causal inference?</a:t>
             </a:r>
-            <a:endParaRPr lang="en-US" sz="2100" dirty="0"/>
-          </a:p>
-          <a:p>
-            <a:pPr indent="0" marL="0">
-              <a:buNone/>
-            </a:pPr>
-            <a:r>
-              <a:rPr lang="en-US" sz="2100" dirty="0">
+            <a:endParaRPr lang="en-US" sz="1920" dirty="0"/>
+          </a:p>
+          <a:p>
+            <a:pPr indent="0" marL="0">
+              <a:buNone/>
+            </a:pPr>
+            <a:r>
+              <a:rPr lang="en-US" sz="1920" dirty="0">
                 <a:solidFill>
                   <a:srgbClr val="003A63"/>
                 </a:solidFill>
@@ -11376,14 +11380,14 @@
               </a:rPr>
               <a:t>• 2. What is the best reason to assign an accountability owner?</a:t>
             </a:r>
-            <a:endParaRPr lang="en-US" sz="2100" dirty="0"/>
-          </a:p>
-          <a:p>
-            <a:pPr indent="0" marL="0">
-              <a:buNone/>
-            </a:pPr>
-            <a:r>
-              <a:rPr lang="en-US" sz="2100" dirty="0">
+            <a:endParaRPr lang="en-US" sz="1920" dirty="0"/>
+          </a:p>
+          <a:p>
+            <a:pPr indent="0" marL="0">
+              <a:buNone/>
+            </a:pPr>
+            <a:r>
+              <a:rPr lang="en-US" sz="1920" dirty="0">
                 <a:solidFill>
                   <a:srgbClr val="003A63"/>
                 </a:solidFill>
@@ -11393,7 +11397,7 @@
               </a:rPr>
               <a:t>• 3. When should an AI-supported workflow be escalated for review?</a:t>
             </a:r>
-            <a:endParaRPr lang="en-US" sz="2100" dirty="0"/>
+            <a:endParaRPr lang="en-US" sz="1920" dirty="0"/>
           </a:p>
         </p:txBody>
       </p:sp>
@@ -11405,12 +11409,12 @@
         </p:nvSpPr>
         <p:spPr>
           <a:xfrm>
-            <a:off x="7635240" y="1325880"/>
-            <a:ext cx="3474720" cy="1207008"/>
+            <a:off x="7543800" y="1325880"/>
+            <a:ext cx="3611880" cy="1261872"/>
           </a:xfrm>
           <a:prstGeom prst="roundRect">
             <a:avLst>
-              <a:gd name="adj" fmla="val 9091"/>
+              <a:gd name="adj" fmla="val 8696"/>
             </a:avLst>
           </a:prstGeom>
           <a:solidFill>
@@ -11432,8 +11436,8 @@
         </p:nvSpPr>
         <p:spPr>
           <a:xfrm>
-            <a:off x="7799832" y="1472184"/>
-            <a:ext cx="3145536" cy="256032"/>
+            <a:off x="7708392" y="1453896"/>
+            <a:ext cx="3282696" cy="228600"/>
           </a:xfrm>
           <a:prstGeom prst="rect">
             <a:avLst/>
@@ -11449,7 +11453,7 @@
               <a:buNone/>
             </a:pPr>
             <a:r>
-              <a:rPr lang="en-US" sz="1300" b="1" dirty="0">
+              <a:rPr lang="en-US" sz="1220" b="1" dirty="0">
                 <a:solidFill>
                   <a:srgbClr val="0068B7"/>
                 </a:solidFill>
@@ -11459,7 +11463,7 @@
               </a:rPr>
               <a:t>Practice focus</a:t>
             </a:r>
-            <a:endParaRPr lang="en-US" sz="1300" dirty="0"/>
+            <a:endParaRPr lang="en-US" sz="1220" dirty="0"/>
           </a:p>
         </p:txBody>
       </p:sp>
@@ -11471,8 +11475,8 @@
         </p:nvSpPr>
         <p:spPr>
           <a:xfrm>
-            <a:off x="7799832" y="1801368"/>
-            <a:ext cx="3145536" cy="640080"/>
+            <a:off x="7708392" y="1764792"/>
+            <a:ext cx="3282696" cy="749808"/>
           </a:xfrm>
           <a:prstGeom prst="rect">
             <a:avLst/>
@@ -11490,7 +11494,7 @@
               <a:buNone/>
             </a:pPr>
             <a:r>
-              <a:rPr lang="en-US" sz="1320" dirty="0">
+              <a:rPr lang="en-US" sz="1220" dirty="0">
                 <a:solidFill>
                   <a:srgbClr val="17364A"/>
                 </a:solidFill>
@@ -11500,7 +11504,7 @@
               </a:rPr>
               <a:t>1. Which statement best distinguishes prediction from causal inference?</a:t>
             </a:r>
-            <a:endParaRPr lang="en-US" sz="1320" dirty="0"/>
+            <a:endParaRPr lang="en-US" sz="1220" dirty="0"/>
           </a:p>
         </p:txBody>
       </p:sp>
@@ -11512,12 +11516,12 @@
         </p:nvSpPr>
         <p:spPr>
           <a:xfrm>
-            <a:off x="7635240" y="2670048"/>
-            <a:ext cx="3474720" cy="1377086"/>
+            <a:off x="7543800" y="2724912"/>
+            <a:ext cx="3611880" cy="1527048"/>
           </a:xfrm>
           <a:prstGeom prst="roundRect">
             <a:avLst>
-              <a:gd name="adj" fmla="val 7968"/>
+              <a:gd name="adj" fmla="val 7186"/>
             </a:avLst>
           </a:prstGeom>
           <a:solidFill>
@@ -11539,8 +11543,8 @@
         </p:nvSpPr>
         <p:spPr>
           <a:xfrm>
-            <a:off x="7799832" y="2816352"/>
-            <a:ext cx="3145536" cy="256032"/>
+            <a:off x="7708392" y="2852928"/>
+            <a:ext cx="3282696" cy="228600"/>
           </a:xfrm>
           <a:prstGeom prst="rect">
             <a:avLst/>
@@ -11556,7 +11560,7 @@
               <a:buNone/>
             </a:pPr>
             <a:r>
-              <a:rPr lang="en-US" sz="1300" b="1" dirty="0">
+              <a:rPr lang="en-US" sz="1220" b="1" dirty="0">
                 <a:solidFill>
                   <a:srgbClr val="0068B7"/>
                 </a:solidFill>
@@ -11566,7 +11570,7 @@
               </a:rPr>
               <a:t>Concept checkpoints</a:t>
             </a:r>
-            <a:endParaRPr lang="en-US" sz="1300" dirty="0"/>
+            <a:endParaRPr lang="en-US" sz="1220" dirty="0"/>
           </a:p>
         </p:txBody>
       </p:sp>
@@ -11578,8 +11582,8 @@
         </p:nvSpPr>
         <p:spPr>
           <a:xfrm>
-            <a:off x="7818120" y="3182112"/>
-            <a:ext cx="3090672" cy="718718"/>
+            <a:off x="7726680" y="3182112"/>
+            <a:ext cx="3227832" cy="960120"/>
           </a:xfrm>
           <a:prstGeom prst="rect">
             <a:avLst/>
@@ -11597,7 +11601,7 @@
               <a:buNone/>
             </a:pPr>
             <a:r>
-              <a:rPr lang="en-US" sz="1220" dirty="0">
+              <a:rPr lang="en-US" sz="1140" dirty="0">
                 <a:solidFill>
                   <a:srgbClr val="17364A"/>
                 </a:solidFill>
@@ -11607,14 +11611,14 @@
               </a:rPr>
               <a:t>1.</a:t>
             </a:r>
-            <a:endParaRPr lang="en-US" sz="1220" dirty="0"/>
-          </a:p>
-          <a:p>
-            <a:pPr indent="0" marL="0">
-              <a:buNone/>
-            </a:pPr>
-            <a:r>
-              <a:rPr lang="en-US" sz="1220" dirty="0">
+            <a:endParaRPr lang="en-US" sz="1140" dirty="0"/>
+          </a:p>
+          <a:p>
+            <a:pPr indent="0" marL="0">
+              <a:buNone/>
+            </a:pPr>
+            <a:r>
+              <a:rPr lang="en-US" sz="1140" dirty="0">
                 <a:solidFill>
                   <a:srgbClr val="17364A"/>
                 </a:solidFill>
@@ -11622,16 +11626,16 @@
                 <a:ea typeface="Aptos" pitchFamily="34" charset="-122"/>
                 <a:cs typeface="Aptos" pitchFamily="34" charset="-120"/>
               </a:rPr>
-              <a:t>Which statement best distinguishes prediction from causal inference?</a:t>
-            </a:r>
-            <a:endParaRPr lang="en-US" sz="1220" dirty="0"/>
-          </a:p>
-          <a:p>
-            <a:pPr indent="0" marL="0">
-              <a:buNone/>
-            </a:pPr>
-            <a:r>
-              <a:rPr lang="en-US" sz="1220" dirty="0">
+              <a:t>Which statement best distinguishes prediction from.</a:t>
+            </a:r>
+            <a:endParaRPr lang="en-US" sz="1140" dirty="0"/>
+          </a:p>
+          <a:p>
+            <a:pPr indent="0" marL="0">
+              <a:buNone/>
+            </a:pPr>
+            <a:r>
+              <a:rPr lang="en-US" sz="1140" dirty="0">
                 <a:solidFill>
                   <a:srgbClr val="17364A"/>
                 </a:solidFill>
@@ -11641,7 +11645,7 @@
               </a:rPr>
               <a:t>2.</a:t>
             </a:r>
-            <a:endParaRPr lang="en-US" sz="1220" dirty="0"/>
+            <a:endParaRPr lang="en-US" sz="1140" dirty="0"/>
           </a:p>
         </p:txBody>
       </p:sp>
@@ -11653,12 +11657,12 @@
         </p:nvSpPr>
         <p:spPr>
           <a:xfrm>
-            <a:off x="7635240" y="4184294"/>
-            <a:ext cx="3474720" cy="1466698"/>
+            <a:off x="7543800" y="4389120"/>
+            <a:ext cx="3611880" cy="1261872"/>
           </a:xfrm>
           <a:prstGeom prst="roundRect">
             <a:avLst>
-              <a:gd name="adj" fmla="val 7481"/>
+              <a:gd name="adj" fmla="val 8696"/>
             </a:avLst>
           </a:prstGeom>
           <a:solidFill>
@@ -11680,8 +11684,8 @@
         </p:nvSpPr>
         <p:spPr>
           <a:xfrm>
-            <a:off x="7799832" y="4330598"/>
-            <a:ext cx="3145536" cy="256032"/>
+            <a:off x="7708392" y="4517136"/>
+            <a:ext cx="3282696" cy="228600"/>
           </a:xfrm>
           <a:prstGeom prst="rect">
             <a:avLst/>
@@ -11697,7 +11701,7 @@
               <a:buNone/>
             </a:pPr>
             <a:r>
-              <a:rPr lang="en-US" sz="1300" b="1" dirty="0">
+              <a:rPr lang="en-US" sz="1220" b="1" dirty="0">
                 <a:solidFill>
                   <a:srgbClr val="0068B7"/>
                 </a:solidFill>
@@ -11707,7 +11711,7 @@
               </a:rPr>
               <a:t>What to produce</a:t>
             </a:r>
-            <a:endParaRPr lang="en-US" sz="1300" dirty="0"/>
+            <a:endParaRPr lang="en-US" sz="1220" dirty="0"/>
           </a:p>
         </p:txBody>
       </p:sp>
@@ -11719,8 +11723,8 @@
         </p:nvSpPr>
         <p:spPr>
           <a:xfrm>
-            <a:off x="7799832" y="4659782"/>
-            <a:ext cx="3145536" cy="899770"/>
+            <a:off x="7708392" y="4828032"/>
+            <a:ext cx="3282696" cy="749808"/>
           </a:xfrm>
           <a:prstGeom prst="rect">
             <a:avLst/>
@@ -11738,7 +11742,7 @@
               <a:buNone/>
             </a:pPr>
             <a:r>
-              <a:rPr lang="en-US" sz="1320" dirty="0">
+              <a:rPr lang="en-US" sz="1220" dirty="0">
                 <a:solidFill>
                   <a:srgbClr val="17364A"/>
                 </a:solidFill>
@@ -11746,9 +11750,9 @@
                 <a:ea typeface="Aptos" pitchFamily="34" charset="-122"/>
                 <a:cs typeface="Aptos" pitchFamily="34" charset="-120"/>
               </a:rPr>
-              <a:t>Use the assignment to test whether you can explain the concept, apply it to a realistic public health situation, and identify what would need review before the work moves forward.</a:t>
-            </a:r>
-            <a:endParaRPr lang="en-US" sz="1320" dirty="0"/>
+              <a:t>Use the assignment to test whether you can explain the concept, apply it to a.</a:t>
+            </a:r>
+            <a:endParaRPr lang="en-US" sz="1220" dirty="0"/>
           </a:p>
         </p:txBody>
       </p:sp>
@@ -12039,8 +12043,8 @@
         </p:nvSpPr>
         <p:spPr>
           <a:xfrm>
-            <a:off x="868680" y="1508760"/>
-            <a:ext cx="6309360" cy="4160520"/>
+            <a:off x="822960" y="1463040"/>
+            <a:ext cx="6565392" cy="4343400"/>
           </a:xfrm>
           <a:prstGeom prst="rect">
             <a:avLst/>
@@ -12058,7 +12062,7 @@
               <a:buNone/>
             </a:pPr>
             <a:r>
-              <a:rPr lang="en-US" sz="2100" dirty="0">
+              <a:rPr lang="en-US" sz="1920" dirty="0">
                 <a:solidFill>
                   <a:srgbClr val="003A63"/>
                 </a:solidFill>
@@ -12068,14 +12072,14 @@
               </a:rPr>
               <a:t>• CDC Public Health Data Strategy and Data Modernization resources:.</a:t>
             </a:r>
-            <a:endParaRPr lang="en-US" sz="2100" dirty="0"/>
-          </a:p>
-          <a:p>
-            <a:pPr indent="0" marL="0">
-              <a:buNone/>
-            </a:pPr>
-            <a:r>
-              <a:rPr lang="en-US" sz="2100" dirty="0">
+            <a:endParaRPr lang="en-US" sz="1920" dirty="0"/>
+          </a:p>
+          <a:p>
+            <a:pPr indent="0" marL="0">
+              <a:buNone/>
+            </a:pPr>
+            <a:r>
+              <a:rPr lang="en-US" sz="1920" dirty="0">
                 <a:solidFill>
                   <a:srgbClr val="003A63"/>
                 </a:solidFill>
@@ -12083,16 +12087,16 @@
                 <a:ea typeface="Aptos" pitchFamily="34" charset="-122"/>
                 <a:cs typeface="Aptos" pitchFamily="34" charset="-120"/>
               </a:rPr>
-              <a:t>• NIST Artificial Intelligence Risk Management Framework and NIST Generative AI Profile:.</a:t>
-            </a:r>
-            <a:endParaRPr lang="en-US" sz="2100" dirty="0"/>
-          </a:p>
-          <a:p>
-            <a:pPr indent="0" marL="0">
-              <a:buNone/>
-            </a:pPr>
-            <a:r>
-              <a:rPr lang="en-US" sz="2100" dirty="0">
+              <a:t>• NIST Artificial Intelligence Risk Management Framework and NIST Generative.</a:t>
+            </a:r>
+            <a:endParaRPr lang="en-US" sz="1920" dirty="0"/>
+          </a:p>
+          <a:p>
+            <a:pPr indent="0" marL="0">
+              <a:buNone/>
+            </a:pPr>
+            <a:r>
+              <a:rPr lang="en-US" sz="1920" dirty="0">
                 <a:solidFill>
                   <a:srgbClr val="003A63"/>
                 </a:solidFill>
@@ -12102,7 +12106,7 @@
               </a:rPr>
               <a:t>• WHO Ethics and Governance of Artificial Intelligence for Health guidance:.</a:t>
             </a:r>
-            <a:endParaRPr lang="en-US" sz="2100" dirty="0"/>
+            <a:endParaRPr lang="en-US" sz="1920" dirty="0"/>
           </a:p>
         </p:txBody>
       </p:sp>
@@ -12114,12 +12118,12 @@
         </p:nvSpPr>
         <p:spPr>
           <a:xfrm>
-            <a:off x="7635240" y="1325880"/>
-            <a:ext cx="3474720" cy="1207008"/>
+            <a:off x="7543800" y="1325880"/>
+            <a:ext cx="3611880" cy="1261872"/>
           </a:xfrm>
           <a:prstGeom prst="roundRect">
             <a:avLst>
-              <a:gd name="adj" fmla="val 9091"/>
+              <a:gd name="adj" fmla="val 8696"/>
             </a:avLst>
           </a:prstGeom>
           <a:solidFill>
@@ -12141,8 +12145,8 @@
         </p:nvSpPr>
         <p:spPr>
           <a:xfrm>
-            <a:off x="7799832" y="1472184"/>
-            <a:ext cx="3145536" cy="256032"/>
+            <a:off x="7708392" y="1453896"/>
+            <a:ext cx="3282696" cy="228600"/>
           </a:xfrm>
           <a:prstGeom prst="rect">
             <a:avLst/>
@@ -12158,7 +12162,7 @@
               <a:buNone/>
             </a:pPr>
             <a:r>
-              <a:rPr lang="en-US" sz="1300" b="1" dirty="0">
+              <a:rPr lang="en-US" sz="1220" b="1" dirty="0">
                 <a:solidFill>
                   <a:srgbClr val="0068B7"/>
                 </a:solidFill>
@@ -12168,7 +12172,7 @@
               </a:rPr>
               <a:t>Core concept</a:t>
             </a:r>
-            <a:endParaRPr lang="en-US" sz="1300" dirty="0"/>
+            <a:endParaRPr lang="en-US" sz="1220" dirty="0"/>
           </a:p>
         </p:txBody>
       </p:sp>
@@ -12180,8 +12184,8 @@
         </p:nvSpPr>
         <p:spPr>
           <a:xfrm>
-            <a:off x="7799832" y="1801368"/>
-            <a:ext cx="3145536" cy="640080"/>
+            <a:off x="7708392" y="1764792"/>
+            <a:ext cx="3282696" cy="749808"/>
           </a:xfrm>
           <a:prstGeom prst="rect">
             <a:avLst/>
@@ -12199,7 +12203,7 @@
               <a:buNone/>
             </a:pPr>
             <a:r>
-              <a:rPr lang="en-US" sz="1320" dirty="0">
+              <a:rPr lang="en-US" sz="1220" dirty="0">
                 <a:solidFill>
                   <a:srgbClr val="17364A"/>
                 </a:solidFill>
@@ -12209,7 +12213,7 @@
               </a:rPr>
               <a:t>CDC Public Health Data Strategy and Data Modernization resources:.</a:t>
             </a:r>
-            <a:endParaRPr lang="en-US" sz="1320" dirty="0"/>
+            <a:endParaRPr lang="en-US" sz="1220" dirty="0"/>
           </a:p>
         </p:txBody>
       </p:sp>
@@ -12221,12 +12225,12 @@
         </p:nvSpPr>
         <p:spPr>
           <a:xfrm>
-            <a:off x="7635240" y="2670048"/>
-            <a:ext cx="3474720" cy="1377086"/>
+            <a:off x="7543800" y="2724912"/>
+            <a:ext cx="3611880" cy="1527048"/>
           </a:xfrm>
           <a:prstGeom prst="roundRect">
             <a:avLst>
-              <a:gd name="adj" fmla="val 7968"/>
+              <a:gd name="adj" fmla="val 7186"/>
             </a:avLst>
           </a:prstGeom>
           <a:solidFill>
@@ -12248,8 +12252,8 @@
         </p:nvSpPr>
         <p:spPr>
           <a:xfrm>
-            <a:off x="7799832" y="2816352"/>
-            <a:ext cx="3145536" cy="256032"/>
+            <a:off x="7708392" y="2852928"/>
+            <a:ext cx="3282696" cy="228600"/>
           </a:xfrm>
           <a:prstGeom prst="rect">
             <a:avLst/>
@@ -12265,7 +12269,7 @@
               <a:buNone/>
             </a:pPr>
             <a:r>
-              <a:rPr lang="en-US" sz="1300" b="1" dirty="0">
+              <a:rPr lang="en-US" sz="1220" b="1" dirty="0">
                 <a:solidFill>
                   <a:srgbClr val="0068B7"/>
                 </a:solidFill>
@@ -12275,7 +12279,7 @@
               </a:rPr>
               <a:t>Concept checkpoints</a:t>
             </a:r>
-            <a:endParaRPr lang="en-US" sz="1300" dirty="0"/>
+            <a:endParaRPr lang="en-US" sz="1220" dirty="0"/>
           </a:p>
         </p:txBody>
       </p:sp>
@@ -12287,8 +12291,8 @@
         </p:nvSpPr>
         <p:spPr>
           <a:xfrm>
-            <a:off x="7818120" y="3182112"/>
-            <a:ext cx="3090672" cy="718718"/>
+            <a:off x="7726680" y="3182112"/>
+            <a:ext cx="3227832" cy="960120"/>
           </a:xfrm>
           <a:prstGeom prst="rect">
             <a:avLst/>
@@ -12306,7 +12310,7 @@
               <a:buNone/>
             </a:pPr>
             <a:r>
-              <a:rPr lang="en-US" sz="1220" dirty="0">
+              <a:rPr lang="en-US" sz="1140" dirty="0">
                 <a:solidFill>
                   <a:srgbClr val="17364A"/>
                 </a:solidFill>
@@ -12316,14 +12320,14 @@
               </a:rPr>
               <a:t>OWASP Top 10 for Large Language Model Applications:.</a:t>
             </a:r>
-            <a:endParaRPr lang="en-US" sz="1220" dirty="0"/>
-          </a:p>
-          <a:p>
-            <a:pPr indent="0" marL="0">
-              <a:buNone/>
-            </a:pPr>
-            <a:r>
-              <a:rPr lang="en-US" sz="1220" dirty="0">
+            <a:endParaRPr lang="en-US" sz="1140" dirty="0"/>
+          </a:p>
+          <a:p>
+            <a:pPr indent="0" marL="0">
+              <a:buNone/>
+            </a:pPr>
+            <a:r>
+              <a:rPr lang="en-US" sz="1140" dirty="0">
                 <a:solidFill>
                   <a:srgbClr val="17364A"/>
                 </a:solidFill>
@@ -12331,9 +12335,9 @@
                 <a:ea typeface="Aptos" pitchFamily="34" charset="-122"/>
                 <a:cs typeface="Aptos" pitchFamily="34" charset="-120"/>
               </a:rPr>
-              <a:t>ONC health IT, interoperability, and information blocking.</a:t>
-            </a:r>
-            <a:endParaRPr lang="en-US" sz="1220" dirty="0"/>
+              <a:t>ONC health IT, interoperability, and information.</a:t>
+            </a:r>
+            <a:endParaRPr lang="en-US" sz="1140" dirty="0"/>
           </a:p>
         </p:txBody>
       </p:sp>
@@ -12345,12 +12349,12 @@
         </p:nvSpPr>
         <p:spPr>
           <a:xfrm>
-            <a:off x="7635240" y="4184294"/>
-            <a:ext cx="3474720" cy="1466698"/>
+            <a:off x="7543800" y="4389120"/>
+            <a:ext cx="3611880" cy="1261872"/>
           </a:xfrm>
           <a:prstGeom prst="roundRect">
             <a:avLst>
-              <a:gd name="adj" fmla="val 7481"/>
+              <a:gd name="adj" fmla="val 8696"/>
             </a:avLst>
           </a:prstGeom>
           <a:solidFill>
@@ -12372,8 +12376,8 @@
         </p:nvSpPr>
         <p:spPr>
           <a:xfrm>
-            <a:off x="7799832" y="4330598"/>
-            <a:ext cx="3145536" cy="256032"/>
+            <a:off x="7708392" y="4517136"/>
+            <a:ext cx="3282696" cy="228600"/>
           </a:xfrm>
           <a:prstGeom prst="rect">
             <a:avLst/>
@@ -12389,7 +12393,7 @@
               <a:buNone/>
             </a:pPr>
             <a:r>
-              <a:rPr lang="en-US" sz="1300" b="1" dirty="0">
+              <a:rPr lang="en-US" sz="1220" b="1" dirty="0">
                 <a:solidFill>
                   <a:srgbClr val="0068B7"/>
                 </a:solidFill>
@@ -12399,7 +12403,7 @@
               </a:rPr>
               <a:t>Apply it</a:t>
             </a:r>
-            <a:endParaRPr lang="en-US" sz="1300" dirty="0"/>
+            <a:endParaRPr lang="en-US" sz="1220" dirty="0"/>
           </a:p>
         </p:txBody>
       </p:sp>
@@ -12411,8 +12415,8 @@
         </p:nvSpPr>
         <p:spPr>
           <a:xfrm>
-            <a:off x="7799832" y="4659782"/>
-            <a:ext cx="3145536" cy="899770"/>
+            <a:off x="7708392" y="4828032"/>
+            <a:ext cx="3282696" cy="749808"/>
           </a:xfrm>
           <a:prstGeom prst="rect">
             <a:avLst/>
@@ -12430,7 +12434,7 @@
               <a:buNone/>
             </a:pPr>
             <a:r>
-              <a:rPr lang="en-US" sz="1320" dirty="0">
+              <a:rPr lang="en-US" sz="1220" dirty="0">
                 <a:solidFill>
                   <a:srgbClr val="17364A"/>
                 </a:solidFill>
@@ -12438,9 +12442,9 @@
                 <a:ea typeface="Aptos" pitchFamily="34" charset="-122"/>
                 <a:cs typeface="Aptos" pitchFamily="34" charset="-120"/>
               </a:rPr>
-              <a:t>Connect the concept to public health purpose, responsible use, required safeguards, documentation, and the next action a department should take.</a:t>
-            </a:r>
-            <a:endParaRPr lang="en-US" sz="1320" dirty="0"/>
+              <a:t>Connect the concept to public health purpose, responsible use, required.</a:t>
+            </a:r>
+            <a:endParaRPr lang="en-US" sz="1220" dirty="0"/>
           </a:p>
         </p:txBody>
       </p:sp>
@@ -12731,8 +12735,8 @@
         </p:nvSpPr>
         <p:spPr>
           <a:xfrm>
-            <a:off x="868680" y="1508760"/>
-            <a:ext cx="6309360" cy="4160520"/>
+            <a:off x="822960" y="1463040"/>
+            <a:ext cx="6565392" cy="4343400"/>
           </a:xfrm>
           <a:prstGeom prst="rect">
             <a:avLst/>
@@ -12750,7 +12754,7 @@
               <a:buNone/>
             </a:pPr>
             <a:r>
-              <a:rPr lang="en-US" sz="2100" dirty="0">
+              <a:rPr lang="en-US" sz="1920" dirty="0">
                 <a:solidFill>
                   <a:srgbClr val="003A63"/>
                 </a:solidFill>
@@ -12758,9 +12762,9 @@
                 <a:ea typeface="Aptos" pitchFamily="34" charset="-122"/>
                 <a:cs typeface="Aptos" pitchFamily="34" charset="-120"/>
               </a:rPr>
-              <a:t>• Agency policies for privacy, public records, cybersecurity, procurement, civil rights,.</a:t>
-            </a:r>
-            <a:endParaRPr lang="en-US" sz="2100" dirty="0"/>
+              <a:t>• Agency policies for privacy, public records, cybersecurity, procurement,.</a:t>
+            </a:r>
+            <a:endParaRPr lang="en-US" sz="1920" dirty="0"/>
           </a:p>
         </p:txBody>
       </p:sp>
@@ -12772,12 +12776,12 @@
         </p:nvSpPr>
         <p:spPr>
           <a:xfrm>
-            <a:off x="7635240" y="1325880"/>
-            <a:ext cx="3474720" cy="1255471"/>
+            <a:off x="7543800" y="1325880"/>
+            <a:ext cx="3611880" cy="1261872"/>
           </a:xfrm>
           <a:prstGeom prst="roundRect">
             <a:avLst>
-              <a:gd name="adj" fmla="val 8740"/>
+              <a:gd name="adj" fmla="val 8696"/>
             </a:avLst>
           </a:prstGeom>
           <a:solidFill>
@@ -12799,8 +12803,8 @@
         </p:nvSpPr>
         <p:spPr>
           <a:xfrm>
-            <a:off x="7799832" y="1472184"/>
-            <a:ext cx="3145536" cy="256032"/>
+            <a:off x="7708392" y="1453896"/>
+            <a:ext cx="3282696" cy="228600"/>
           </a:xfrm>
           <a:prstGeom prst="rect">
             <a:avLst/>
@@ -12816,7 +12820,7 @@
               <a:buNone/>
             </a:pPr>
             <a:r>
-              <a:rPr lang="en-US" sz="1300" b="1" dirty="0">
+              <a:rPr lang="en-US" sz="1220" b="1" dirty="0">
                 <a:solidFill>
                   <a:srgbClr val="0068B7"/>
                 </a:solidFill>
@@ -12826,7 +12830,7 @@
               </a:rPr>
               <a:t>Core concept</a:t>
             </a:r>
-            <a:endParaRPr lang="en-US" sz="1300" dirty="0"/>
+            <a:endParaRPr lang="en-US" sz="1220" dirty="0"/>
           </a:p>
         </p:txBody>
       </p:sp>
@@ -12838,8 +12842,8 @@
         </p:nvSpPr>
         <p:spPr>
           <a:xfrm>
-            <a:off x="7799832" y="1801368"/>
-            <a:ext cx="3145536" cy="688543"/>
+            <a:off x="7708392" y="1764792"/>
+            <a:ext cx="3282696" cy="749808"/>
           </a:xfrm>
           <a:prstGeom prst="rect">
             <a:avLst/>
@@ -12857,7 +12861,7 @@
               <a:buNone/>
             </a:pPr>
             <a:r>
-              <a:rPr lang="en-US" sz="1320" dirty="0">
+              <a:rPr lang="en-US" sz="1220" dirty="0">
                 <a:solidFill>
                   <a:srgbClr val="17364A"/>
                 </a:solidFill>
@@ -12865,9 +12869,9 @@
                 <a:ea typeface="Aptos" pitchFamily="34" charset="-122"/>
                 <a:cs typeface="Aptos" pitchFamily="34" charset="-120"/>
               </a:rPr>
-              <a:t>Agency policies for privacy, public records, cybersecurity, procurement, civil rights, accessibility,.</a:t>
-            </a:r>
-            <a:endParaRPr lang="en-US" sz="1320" dirty="0"/>
+              <a:t>Agency policies for privacy, public records, cybersecurity, procurement, civil.</a:t>
+            </a:r>
+            <a:endParaRPr lang="en-US" sz="1220" dirty="0"/>
           </a:p>
         </p:txBody>
       </p:sp>
@@ -12879,12 +12883,12 @@
         </p:nvSpPr>
         <p:spPr>
           <a:xfrm>
-            <a:off x="7635240" y="2718511"/>
-            <a:ext cx="3474720" cy="1328623"/>
+            <a:off x="7543800" y="2724912"/>
+            <a:ext cx="3611880" cy="1527048"/>
           </a:xfrm>
           <a:prstGeom prst="roundRect">
             <a:avLst>
-              <a:gd name="adj" fmla="val 8259"/>
+              <a:gd name="adj" fmla="val 7186"/>
             </a:avLst>
           </a:prstGeom>
           <a:solidFill>
@@ -12906,8 +12910,8 @@
         </p:nvSpPr>
         <p:spPr>
           <a:xfrm>
-            <a:off x="7799832" y="2864815"/>
-            <a:ext cx="3145536" cy="256032"/>
+            <a:off x="7708392" y="2852928"/>
+            <a:ext cx="3282696" cy="228600"/>
           </a:xfrm>
           <a:prstGeom prst="rect">
             <a:avLst/>
@@ -12923,7 +12927,7 @@
               <a:buNone/>
             </a:pPr>
             <a:r>
-              <a:rPr lang="en-US" sz="1300" b="1" dirty="0">
+              <a:rPr lang="en-US" sz="1220" b="1" dirty="0">
                 <a:solidFill>
                   <a:srgbClr val="0068B7"/>
                 </a:solidFill>
@@ -12933,7 +12937,7 @@
               </a:rPr>
               <a:t>Concept checkpoints</a:t>
             </a:r>
-            <a:endParaRPr lang="en-US" sz="1300" dirty="0"/>
+            <a:endParaRPr lang="en-US" sz="1220" dirty="0"/>
           </a:p>
         </p:txBody>
       </p:sp>
@@ -12945,8 +12949,8 @@
         </p:nvSpPr>
         <p:spPr>
           <a:xfrm>
-            <a:off x="7818120" y="3230575"/>
-            <a:ext cx="3090672" cy="670255"/>
+            <a:off x="7726680" y="3182112"/>
+            <a:ext cx="3227832" cy="960120"/>
           </a:xfrm>
           <a:prstGeom prst="rect">
             <a:avLst/>
@@ -12964,7 +12968,7 @@
               <a:buNone/>
             </a:pPr>
             <a:r>
-              <a:rPr lang="en-US" sz="1220" dirty="0">
+              <a:rPr lang="en-US" sz="1140" dirty="0">
                 <a:solidFill>
                   <a:srgbClr val="17364A"/>
                 </a:solidFill>
@@ -12972,9 +12976,9 @@
                 <a:ea typeface="Aptos" pitchFamily="34" charset="-122"/>
                 <a:cs typeface="Aptos" pitchFamily="34" charset="-120"/>
               </a:rPr>
-              <a:t>Agency policies for privacy, public records, cybersecurity,.</a:t>
-            </a:r>
-            <a:endParaRPr lang="en-US" sz="1220" dirty="0"/>
+              <a:t>Agency policies for privacy, public records,.</a:t>
+            </a:r>
+            <a:endParaRPr lang="en-US" sz="1140" dirty="0"/>
           </a:p>
         </p:txBody>
       </p:sp>
@@ -12986,12 +12990,12 @@
         </p:nvSpPr>
         <p:spPr>
           <a:xfrm>
-            <a:off x="7635240" y="4184294"/>
-            <a:ext cx="3474720" cy="1466698"/>
+            <a:off x="7543800" y="4389120"/>
+            <a:ext cx="3611880" cy="1261872"/>
           </a:xfrm>
           <a:prstGeom prst="roundRect">
             <a:avLst>
-              <a:gd name="adj" fmla="val 7481"/>
+              <a:gd name="adj" fmla="val 8696"/>
             </a:avLst>
           </a:prstGeom>
           <a:solidFill>
@@ -13013,8 +13017,8 @@
         </p:nvSpPr>
         <p:spPr>
           <a:xfrm>
-            <a:off x="7799832" y="4330598"/>
-            <a:ext cx="3145536" cy="256032"/>
+            <a:off x="7708392" y="4517136"/>
+            <a:ext cx="3282696" cy="228600"/>
           </a:xfrm>
           <a:prstGeom prst="rect">
             <a:avLst/>
@@ -13030,7 +13034,7 @@
               <a:buNone/>
             </a:pPr>
             <a:r>
-              <a:rPr lang="en-US" sz="1300" b="1" dirty="0">
+              <a:rPr lang="en-US" sz="1220" b="1" dirty="0">
                 <a:solidFill>
                   <a:srgbClr val="0068B7"/>
                 </a:solidFill>
@@ -13040,7 +13044,7 @@
               </a:rPr>
               <a:t>Apply it</a:t>
             </a:r>
-            <a:endParaRPr lang="en-US" sz="1300" dirty="0"/>
+            <a:endParaRPr lang="en-US" sz="1220" dirty="0"/>
           </a:p>
         </p:txBody>
       </p:sp>
@@ -13052,8 +13056,8 @@
         </p:nvSpPr>
         <p:spPr>
           <a:xfrm>
-            <a:off x="7799832" y="4659782"/>
-            <a:ext cx="3145536" cy="899770"/>
+            <a:off x="7708392" y="4828032"/>
+            <a:ext cx="3282696" cy="749808"/>
           </a:xfrm>
           <a:prstGeom prst="rect">
             <a:avLst/>
@@ -13071,7 +13075,7 @@
               <a:buNone/>
             </a:pPr>
             <a:r>
-              <a:rPr lang="en-US" sz="1320" dirty="0">
+              <a:rPr lang="en-US" sz="1220" dirty="0">
                 <a:solidFill>
                   <a:srgbClr val="17364A"/>
                 </a:solidFill>
@@ -13079,9 +13083,9 @@
                 <a:ea typeface="Aptos" pitchFamily="34" charset="-122"/>
                 <a:cs typeface="Aptos" pitchFamily="34" charset="-120"/>
               </a:rPr>
-              <a:t>Connect the concept to public health purpose, responsible use, required safeguards, documentation, and the next action a department should take.</a:t>
-            </a:r>
-            <a:endParaRPr lang="en-US" sz="1320" dirty="0"/>
+              <a:t>Connect the concept to public health purpose, responsible use, required.</a:t>
+            </a:r>
+            <a:endParaRPr lang="en-US" sz="1220" dirty="0"/>
           </a:p>
         </p:txBody>
       </p:sp>
@@ -13399,7 +13403,7 @@
                 <a:ea typeface="Aptos" pitchFamily="34" charset="-122"/>
                 <a:cs typeface="Aptos" pitchFamily="34" charset="-120"/>
               </a:rPr>
-              <a:t>• Play 11: Build and Deploy AI Solutions - This lesson informs Play 11 by helping learners.</a:t>
+              <a:t>• Play 11: Build and Deploy AI Solutions - This lesson informs Play 11 by.</a:t>
             </a:r>
             <a:endParaRPr lang="en-US" sz="1900" dirty="0"/>
           </a:p>
@@ -13416,7 +13420,7 @@
                 <a:ea typeface="Aptos" pitchFamily="34" charset="-122"/>
                 <a:cs typeface="Aptos" pitchFamily="34" charset="-120"/>
               </a:rPr>
-              <a:t>• Play 7: Prioritize Use Cases - This lesson informs Play 7 by helping learners connect the.</a:t>
+              <a:t>• Play 7: Prioritize Use Cases - This lesson informs Play 7 by helping.</a:t>
             </a:r>
             <a:endParaRPr lang="en-US" sz="1900" dirty="0"/>
           </a:p>
@@ -13433,7 +13437,7 @@
                 <a:ea typeface="Aptos" pitchFamily="34" charset="-122"/>
                 <a:cs typeface="Aptos" pitchFamily="34" charset="-120"/>
               </a:rPr>
-              <a:t>• Play 1: Vision &amp; Guardrails - This lesson informs Play 1 by helping learners connect the.</a:t>
+              <a:t>• Play 1: Vision &amp; Guardrails - This lesson informs Play 1 by helping learners.</a:t>
             </a:r>
             <a:endParaRPr lang="en-US" sz="1900" dirty="0"/>
           </a:p>
@@ -13450,7 +13454,7 @@
                 <a:ea typeface="Aptos" pitchFamily="34" charset="-122"/>
                 <a:cs typeface="Aptos" pitchFamily="34" charset="-120"/>
               </a:rPr>
-              <a:t>• Play 2: Readiness Assessment - This lesson informs Play 2 by helping learners connect the.</a:t>
+              <a:t>• Play 2: Readiness Assessment - This lesson informs Play 2 by helping.</a:t>
             </a:r>
             <a:endParaRPr lang="en-US" sz="1900" dirty="0"/>
           </a:p>
@@ -13491,8 +13495,8 @@
         </p:nvSpPr>
         <p:spPr>
           <a:xfrm>
-            <a:off x="8211312" y="1563624"/>
-            <a:ext cx="2734056" cy="256032"/>
+            <a:off x="8211312" y="1545336"/>
+            <a:ext cx="2734056" cy="228600"/>
           </a:xfrm>
           <a:prstGeom prst="rect">
             <a:avLst/>
@@ -13508,7 +13512,7 @@
               <a:buNone/>
             </a:pPr>
             <a:r>
-              <a:rPr lang="en-US" sz="1300" b="1" dirty="0">
+              <a:rPr lang="en-US" sz="1220" b="1" dirty="0">
                 <a:solidFill>
                   <a:srgbClr val="0068B7"/>
                 </a:solidFill>
@@ -13518,7 +13522,7 @@
               </a:rPr>
               <a:t>Apply the lesson</a:t>
             </a:r>
-            <a:endParaRPr lang="en-US" sz="1300" dirty="0"/>
+            <a:endParaRPr lang="en-US" sz="1220" dirty="0"/>
           </a:p>
         </p:txBody>
       </p:sp>
@@ -13530,8 +13534,8 @@
         </p:nvSpPr>
         <p:spPr>
           <a:xfrm>
-            <a:off x="8211312" y="1892808"/>
-            <a:ext cx="2734056" cy="1536192"/>
+            <a:off x="8211312" y="1856232"/>
+            <a:ext cx="2734056" cy="1591056"/>
           </a:xfrm>
           <a:prstGeom prst="rect">
             <a:avLst/>
@@ -13549,7 +13553,7 @@
               <a:buNone/>
             </a:pPr>
             <a:r>
-              <a:rPr lang="en-US" sz="1320" dirty="0">
+              <a:rPr lang="en-US" sz="1220" dirty="0">
                 <a:solidFill>
                   <a:srgbClr val="17364A"/>
                 </a:solidFill>
@@ -13557,9 +13561,9 @@
                 <a:ea typeface="Aptos" pitchFamily="34" charset="-122"/>
                 <a:cs typeface="Aptos" pitchFamily="34" charset="-120"/>
               </a:rPr>
-              <a:t>Use the related plays to identify decisions, participants, timing, approvals, and documentation needed for responsible implementation.</a:t>
-            </a:r>
-            <a:endParaRPr lang="en-US" sz="1320" dirty="0"/>
+              <a:t>Use the related plays to identify decisions, participants, timing, approvals,.</a:t>
+            </a:r>
+            <a:endParaRPr lang="en-US" sz="1220" dirty="0"/>
           </a:p>
         </p:txBody>
       </p:sp>
@@ -13598,8 +13602,8 @@
         </p:nvSpPr>
         <p:spPr>
           <a:xfrm>
-            <a:off x="8211312" y="3941064"/>
-            <a:ext cx="2734056" cy="256032"/>
+            <a:off x="8211312" y="3922776"/>
+            <a:ext cx="2734056" cy="228600"/>
           </a:xfrm>
           <a:prstGeom prst="rect">
             <a:avLst/>
@@ -13615,7 +13619,7 @@
               <a:buNone/>
             </a:pPr>
             <a:r>
-              <a:rPr lang="en-US" sz="1300" b="1" dirty="0">
+              <a:rPr lang="en-US" sz="1220" b="1" dirty="0">
                 <a:solidFill>
                   <a:srgbClr val="0068B7"/>
                 </a:solidFill>
@@ -13625,7 +13629,7 @@
               </a:rPr>
               <a:t>Use the play links to</a:t>
             </a:r>
-            <a:endParaRPr lang="en-US" sz="1300" dirty="0"/>
+            <a:endParaRPr lang="en-US" sz="1220" dirty="0"/>
           </a:p>
         </p:txBody>
       </p:sp>
@@ -13637,8 +13641,8 @@
         </p:nvSpPr>
         <p:spPr>
           <a:xfrm>
-            <a:off x="8229600" y="4306824"/>
-            <a:ext cx="2679192" cy="941832"/>
+            <a:off x="8229600" y="4251960"/>
+            <a:ext cx="2679192" cy="1033272"/>
           </a:xfrm>
           <a:prstGeom prst="rect">
             <a:avLst/>
@@ -13656,7 +13660,7 @@
               <a:buNone/>
             </a:pPr>
             <a:r>
-              <a:rPr lang="en-US" sz="1220" dirty="0">
+              <a:rPr lang="en-US" sz="1140" dirty="0">
                 <a:solidFill>
                   <a:srgbClr val="17364A"/>
                 </a:solidFill>
@@ -13666,14 +13670,14 @@
               </a:rPr>
               <a:t>Locate the decision point in the playbook sequence.</a:t>
             </a:r>
-            <a:endParaRPr lang="en-US" sz="1220" dirty="0"/>
-          </a:p>
-          <a:p>
-            <a:pPr indent="0" marL="0">
-              <a:buNone/>
-            </a:pPr>
-            <a:r>
-              <a:rPr lang="en-US" sz="1220" dirty="0">
+            <a:endParaRPr lang="en-US" sz="1140" dirty="0"/>
+          </a:p>
+          <a:p>
+            <a:pPr indent="0" marL="0">
+              <a:buNone/>
+            </a:pPr>
+            <a:r>
+              <a:rPr lang="en-US" sz="1140" dirty="0">
                 <a:solidFill>
                   <a:srgbClr val="17364A"/>
                 </a:solidFill>
@@ -13683,14 +13687,14 @@
               </a:rPr>
               <a:t>Identify who should participate in the work.</a:t>
             </a:r>
-            <a:endParaRPr lang="en-US" sz="1220" dirty="0"/>
-          </a:p>
-          <a:p>
-            <a:pPr indent="0" marL="0">
-              <a:buNone/>
-            </a:pPr>
-            <a:r>
-              <a:rPr lang="en-US" sz="1220" dirty="0">
+            <a:endParaRPr lang="en-US" sz="1140" dirty="0"/>
+          </a:p>
+          <a:p>
+            <a:pPr indent="0" marL="0">
+              <a:buNone/>
+            </a:pPr>
+            <a:r>
+              <a:rPr lang="en-US" sz="1140" dirty="0">
                 <a:solidFill>
                   <a:srgbClr val="17364A"/>
                 </a:solidFill>
@@ -13698,9 +13702,9 @@
                 <a:ea typeface="Aptos" pitchFamily="34" charset="-122"/>
                 <a:cs typeface="Aptos" pitchFamily="34" charset="-120"/>
               </a:rPr>
-              <a:t>Document the review, approval, or implementation step.</a:t>
-            </a:r>
-            <a:endParaRPr lang="en-US" sz="1220" dirty="0"/>
+              <a:t>Document the review, approval, or implementation.</a:t>
+            </a:r>
+            <a:endParaRPr lang="en-US" sz="1140" dirty="0"/>
           </a:p>
         </p:txBody>
       </p:sp>
@@ -14018,7 +14022,7 @@
                 <a:ea typeface="Aptos" pitchFamily="34" charset="-122"/>
                 <a:cs typeface="Aptos" pitchFamily="34" charset="-120"/>
               </a:rPr>
-              <a:t>• Tool 3: Equity Impact Assessment Checklist (Checklist) - Use this tool to complete or.</a:t>
+              <a:t>• Tool 3: Equity Impact Assessment Checklist (Checklist) - Use this tool to.</a:t>
             </a:r>
             <a:endParaRPr lang="en-US" sz="1850" dirty="0"/>
           </a:p>
@@ -14035,7 +14039,7 @@
                 <a:ea typeface="Aptos" pitchFamily="34" charset="-122"/>
                 <a:cs typeface="Aptos" pitchFamily="34" charset="-120"/>
               </a:rPr>
-              <a:t>• Tool 4: AI Policy Landscape Scan (Worksheet) - Use AI Policy Landscape Scan to translate this.</a:t>
+              <a:t>• Tool 4: AI Policy Landscape Scan (Worksheet) - Use AI Policy Landscape Scan.</a:t>
             </a:r>
             <a:endParaRPr lang="en-US" sz="1850" dirty="0"/>
           </a:p>
@@ -14052,7 +14056,7 @@
                 <a:ea typeface="Aptos" pitchFamily="34" charset="-122"/>
                 <a:cs typeface="Aptos" pitchFamily="34" charset="-120"/>
               </a:rPr>
-              <a:t>• Tool 5: AI Environmental and Resource Impact Review (Checklist) - Use AI Environmental and.</a:t>
+              <a:t>• Tool 5: AI Environmental and Resource Impact Review (Checklist) - Use AI.</a:t>
             </a:r>
             <a:endParaRPr lang="en-US" sz="1850" dirty="0"/>
           </a:p>
@@ -14069,7 +14073,7 @@
                 <a:ea typeface="Aptos" pitchFamily="34" charset="-122"/>
                 <a:cs typeface="Aptos" pitchFamily="34" charset="-120"/>
               </a:rPr>
-              <a:t>• Tool 6: Human-Centered AI Decision Rule Checklist (Checklist) - Use Human-Centered AI Decision.</a:t>
+              <a:t>• Tool 6: Human-Centered AI Decision Rule Checklist (Checklist) - Use.</a:t>
             </a:r>
             <a:endParaRPr lang="en-US" sz="1850" dirty="0"/>
           </a:p>
@@ -14110,8 +14114,8 @@
         </p:nvSpPr>
         <p:spPr>
           <a:xfrm>
-            <a:off x="8211312" y="1563624"/>
-            <a:ext cx="2734056" cy="256032"/>
+            <a:off x="8211312" y="1545336"/>
+            <a:ext cx="2734056" cy="228600"/>
           </a:xfrm>
           <a:prstGeom prst="rect">
             <a:avLst/>
@@ -14127,7 +14131,7 @@
               <a:buNone/>
             </a:pPr>
             <a:r>
-              <a:rPr lang="en-US" sz="1300" b="1" dirty="0">
+              <a:rPr lang="en-US" sz="1220" b="1" dirty="0">
                 <a:solidFill>
                   <a:srgbClr val="0068B7"/>
                 </a:solidFill>
@@ -14137,7 +14141,7 @@
               </a:rPr>
               <a:t>Use the tools</a:t>
             </a:r>
-            <a:endParaRPr lang="en-US" sz="1300" dirty="0"/>
+            <a:endParaRPr lang="en-US" sz="1220" dirty="0"/>
           </a:p>
         </p:txBody>
       </p:sp>
@@ -14149,8 +14153,8 @@
         </p:nvSpPr>
         <p:spPr>
           <a:xfrm>
-            <a:off x="8211312" y="1892808"/>
-            <a:ext cx="2734056" cy="1536192"/>
+            <a:off x="8211312" y="1856232"/>
+            <a:ext cx="2734056" cy="1591056"/>
           </a:xfrm>
           <a:prstGeom prst="rect">
             <a:avLst/>
@@ -14168,7 +14172,7 @@
               <a:buNone/>
             </a:pPr>
             <a:r>
-              <a:rPr lang="en-US" sz="1320" dirty="0">
+              <a:rPr lang="en-US" sz="1220" dirty="0">
                 <a:solidFill>
                   <a:srgbClr val="17364A"/>
                 </a:solidFill>
@@ -14176,9 +14180,9 @@
                 <a:ea typeface="Aptos" pitchFamily="34" charset="-122"/>
                 <a:cs typeface="Aptos" pitchFamily="34" charset="-120"/>
               </a:rPr>
-              <a:t>Use linked tools when your department needs a structured worksheet, template, checklist, review process, or documentation artifact.</a:t>
-            </a:r>
-            <a:endParaRPr lang="en-US" sz="1320" dirty="0"/>
+              <a:t>Use linked tools when your department needs a structured worksheet, template,.</a:t>
+            </a:r>
+            <a:endParaRPr lang="en-US" sz="1220" dirty="0"/>
           </a:p>
         </p:txBody>
       </p:sp>
@@ -14217,8 +14221,8 @@
         </p:nvSpPr>
         <p:spPr>
           <a:xfrm>
-            <a:off x="8211312" y="3941064"/>
-            <a:ext cx="2734056" cy="256032"/>
+            <a:off x="8211312" y="3922776"/>
+            <a:ext cx="2734056" cy="228600"/>
           </a:xfrm>
           <a:prstGeom prst="rect">
             <a:avLst/>
@@ -14234,7 +14238,7 @@
               <a:buNone/>
             </a:pPr>
             <a:r>
-              <a:rPr lang="en-US" sz="1300" b="1" dirty="0">
+              <a:rPr lang="en-US" sz="1220" b="1" dirty="0">
                 <a:solidFill>
                   <a:srgbClr val="0068B7"/>
                 </a:solidFill>
@@ -14244,7 +14248,7 @@
               </a:rPr>
               <a:t>Tool selection cues</a:t>
             </a:r>
-            <a:endParaRPr lang="en-US" sz="1300" dirty="0"/>
+            <a:endParaRPr lang="en-US" sz="1220" dirty="0"/>
           </a:p>
         </p:txBody>
       </p:sp>
@@ -14256,8 +14260,8 @@
         </p:nvSpPr>
         <p:spPr>
           <a:xfrm>
-            <a:off x="8229600" y="4306824"/>
-            <a:ext cx="2679192" cy="941832"/>
+            <a:off x="8229600" y="4251960"/>
+            <a:ext cx="2679192" cy="1033272"/>
           </a:xfrm>
           <a:prstGeom prst="rect">
             <a:avLst/>
@@ -14275,7 +14279,7 @@
               <a:buNone/>
             </a:pPr>
             <a:r>
-              <a:rPr lang="en-US" sz="1220" dirty="0">
+              <a:rPr lang="en-US" sz="1140" dirty="0">
                 <a:solidFill>
                   <a:srgbClr val="17364A"/>
                 </a:solidFill>
@@ -14285,14 +14289,14 @@
               </a:rPr>
               <a:t>Use a tool when no comparable local process exists.</a:t>
             </a:r>
-            <a:endParaRPr lang="en-US" sz="1220" dirty="0"/>
-          </a:p>
-          <a:p>
-            <a:pPr indent="0" marL="0">
-              <a:buNone/>
-            </a:pPr>
-            <a:r>
-              <a:rPr lang="en-US" sz="1220" dirty="0">
+            <a:endParaRPr lang="en-US" sz="1140" dirty="0"/>
+          </a:p>
+          <a:p>
+            <a:pPr indent="0" marL="0">
+              <a:buNone/>
+            </a:pPr>
+            <a:r>
+              <a:rPr lang="en-US" sz="1140" dirty="0">
                 <a:solidFill>
                   <a:srgbClr val="17364A"/>
                 </a:solidFill>
@@ -14300,16 +14304,16 @@
                 <a:ea typeface="Aptos" pitchFamily="34" charset="-122"/>
                 <a:cs typeface="Aptos" pitchFamily="34" charset="-120"/>
               </a:rPr>
-              <a:t>Adapt existing department templates when they already fit the.</a:t>
-            </a:r>
-            <a:endParaRPr lang="en-US" sz="1220" dirty="0"/>
-          </a:p>
-          <a:p>
-            <a:pPr indent="0" marL="0">
-              <a:buNone/>
-            </a:pPr>
-            <a:r>
-              <a:rPr lang="en-US" sz="1220" dirty="0">
+              <a:t>Adapt existing department templates when they.</a:t>
+            </a:r>
+            <a:endParaRPr lang="en-US" sz="1140" dirty="0"/>
+          </a:p>
+          <a:p>
+            <a:pPr indent="0" marL="0">
+              <a:buNone/>
+            </a:pPr>
+            <a:r>
+              <a:rPr lang="en-US" sz="1140" dirty="0">
                 <a:solidFill>
                   <a:srgbClr val="17364A"/>
                 </a:solidFill>
@@ -14317,9 +14321,9 @@
                 <a:ea typeface="Aptos" pitchFamily="34" charset="-122"/>
                 <a:cs typeface="Aptos" pitchFamily="34" charset="-120"/>
               </a:rPr>
-              <a:t>Save the completed artifact as evidence of the decision.</a:t>
-            </a:r>
-            <a:endParaRPr lang="en-US" sz="1220" dirty="0"/>
+              <a:t>Save the completed artifact as evidence of the.</a:t>
+            </a:r>
+            <a:endParaRPr lang="en-US" sz="1140" dirty="0"/>
           </a:p>
         </p:txBody>
       </p:sp>
@@ -14610,8 +14614,8 @@
         </p:nvSpPr>
         <p:spPr>
           <a:xfrm>
-            <a:off x="868680" y="1508760"/>
-            <a:ext cx="6309360" cy="4160520"/>
+            <a:off x="822960" y="1463040"/>
+            <a:ext cx="6565392" cy="4343400"/>
           </a:xfrm>
           <a:prstGeom prst="rect">
             <a:avLst/>
@@ -14629,7 +14633,7 @@
               <a:buNone/>
             </a:pPr>
             <a:r>
-              <a:rPr lang="en-US" sz="2100" dirty="0">
+              <a:rPr lang="en-US" sz="1920" dirty="0">
                 <a:solidFill>
                   <a:srgbClr val="003A63"/>
                 </a:solidFill>
@@ -14639,14 +14643,14 @@
               </a:rPr>
               <a:t>• Distinguish prediction from causal inference in public health AI.</a:t>
             </a:r>
-            <a:endParaRPr lang="en-US" sz="2100" dirty="0"/>
-          </a:p>
-          <a:p>
-            <a:pPr indent="0" marL="0">
-              <a:buNone/>
-            </a:pPr>
-            <a:r>
-              <a:rPr lang="en-US" sz="2100" dirty="0">
+            <a:endParaRPr lang="en-US" sz="1920" dirty="0"/>
+          </a:p>
+          <a:p>
+            <a:pPr indent="0" marL="0">
+              <a:buNone/>
+            </a:pPr>
+            <a:r>
+              <a:rPr lang="en-US" sz="1920" dirty="0">
                 <a:solidFill>
                   <a:srgbClr val="003A63"/>
                 </a:solidFill>
@@ -14656,14 +14660,14 @@
               </a:rPr>
               <a:t>• Explain why correlation and prediction do not establish causation.</a:t>
             </a:r>
-            <a:endParaRPr lang="en-US" sz="2100" dirty="0"/>
-          </a:p>
-          <a:p>
-            <a:pPr indent="0" marL="0">
-              <a:buNone/>
-            </a:pPr>
-            <a:r>
-              <a:rPr lang="en-US" sz="2100" dirty="0">
+            <a:endParaRPr lang="en-US" sz="1920" dirty="0"/>
+          </a:p>
+          <a:p>
+            <a:pPr indent="0" marL="0">
+              <a:buNone/>
+            </a:pPr>
+            <a:r>
+              <a:rPr lang="en-US" sz="1920" dirty="0">
                 <a:solidFill>
                   <a:srgbClr val="003A63"/>
                 </a:solidFill>
@@ -14671,9 +14675,9 @@
                 <a:ea typeface="Aptos" pitchFamily="34" charset="-122"/>
                 <a:cs typeface="Aptos" pitchFamily="34" charset="-120"/>
               </a:rPr>
-              <a:t>• Identify confounding, selection bias, collider bias, and temporal ambiguity in public health.</a:t>
-            </a:r>
-            <a:endParaRPr lang="en-US" sz="2100" dirty="0"/>
+              <a:t>• Identify confounding, selection bias, collider bias, and temporal ambiguity.</a:t>
+            </a:r>
+            <a:endParaRPr lang="en-US" sz="1920" dirty="0"/>
           </a:p>
         </p:txBody>
       </p:sp>
@@ -14685,12 +14689,12 @@
         </p:nvSpPr>
         <p:spPr>
           <a:xfrm>
-            <a:off x="7635240" y="1325880"/>
-            <a:ext cx="3474720" cy="1207008"/>
+            <a:off x="7543800" y="1325880"/>
+            <a:ext cx="3611880" cy="1261872"/>
           </a:xfrm>
           <a:prstGeom prst="roundRect">
             <a:avLst>
-              <a:gd name="adj" fmla="val 9091"/>
+              <a:gd name="adj" fmla="val 8696"/>
             </a:avLst>
           </a:prstGeom>
           <a:solidFill>
@@ -14712,8 +14716,8 @@
         </p:nvSpPr>
         <p:spPr>
           <a:xfrm>
-            <a:off x="7799832" y="1472184"/>
-            <a:ext cx="3145536" cy="256032"/>
+            <a:off x="7708392" y="1453896"/>
+            <a:ext cx="3282696" cy="228600"/>
           </a:xfrm>
           <a:prstGeom prst="rect">
             <a:avLst/>
@@ -14729,7 +14733,7 @@
               <a:buNone/>
             </a:pPr>
             <a:r>
-              <a:rPr lang="en-US" sz="1300" b="1" dirty="0">
+              <a:rPr lang="en-US" sz="1220" b="1" dirty="0">
                 <a:solidFill>
                   <a:srgbClr val="0068B7"/>
                 </a:solidFill>
@@ -14739,7 +14743,7 @@
               </a:rPr>
               <a:t>Practice focus</a:t>
             </a:r>
-            <a:endParaRPr lang="en-US" sz="1300" dirty="0"/>
+            <a:endParaRPr lang="en-US" sz="1220" dirty="0"/>
           </a:p>
         </p:txBody>
       </p:sp>
@@ -14751,8 +14755,8 @@
         </p:nvSpPr>
         <p:spPr>
           <a:xfrm>
-            <a:off x="7799832" y="1801368"/>
-            <a:ext cx="3145536" cy="640080"/>
+            <a:off x="7708392" y="1764792"/>
+            <a:ext cx="3282696" cy="749808"/>
           </a:xfrm>
           <a:prstGeom prst="rect">
             <a:avLst/>
@@ -14770,7 +14774,7 @@
               <a:buNone/>
             </a:pPr>
             <a:r>
-              <a:rPr lang="en-US" sz="1320" dirty="0">
+              <a:rPr lang="en-US" sz="1220" dirty="0">
                 <a:solidFill>
                   <a:srgbClr val="17364A"/>
                 </a:solidFill>
@@ -14780,7 +14784,7 @@
               </a:rPr>
               <a:t>Distinguish prediction from causal inference in public health AI.</a:t>
             </a:r>
-            <a:endParaRPr lang="en-US" sz="1320" dirty="0"/>
+            <a:endParaRPr lang="en-US" sz="1220" dirty="0"/>
           </a:p>
         </p:txBody>
       </p:sp>
@@ -14792,12 +14796,12 @@
         </p:nvSpPr>
         <p:spPr>
           <a:xfrm>
-            <a:off x="7635240" y="2670048"/>
-            <a:ext cx="3474720" cy="1377086"/>
+            <a:off x="7543800" y="2724912"/>
+            <a:ext cx="3611880" cy="1527048"/>
           </a:xfrm>
           <a:prstGeom prst="roundRect">
             <a:avLst>
-              <a:gd name="adj" fmla="val 7968"/>
+              <a:gd name="adj" fmla="val 7186"/>
             </a:avLst>
           </a:prstGeom>
           <a:solidFill>
@@ -14819,8 +14823,8 @@
         </p:nvSpPr>
         <p:spPr>
           <a:xfrm>
-            <a:off x="7799832" y="2816352"/>
-            <a:ext cx="3145536" cy="256032"/>
+            <a:off x="7708392" y="2852928"/>
+            <a:ext cx="3282696" cy="228600"/>
           </a:xfrm>
           <a:prstGeom prst="rect">
             <a:avLst/>
@@ -14836,7 +14840,7 @@
               <a:buNone/>
             </a:pPr>
             <a:r>
-              <a:rPr lang="en-US" sz="1300" b="1" dirty="0">
+              <a:rPr lang="en-US" sz="1220" b="1" dirty="0">
                 <a:solidFill>
                   <a:srgbClr val="0068B7"/>
                 </a:solidFill>
@@ -14846,7 +14850,7 @@
               </a:rPr>
               <a:t>Concept checkpoints</a:t>
             </a:r>
-            <a:endParaRPr lang="en-US" sz="1300" dirty="0"/>
+            <a:endParaRPr lang="en-US" sz="1220" dirty="0"/>
           </a:p>
         </p:txBody>
       </p:sp>
@@ -14858,8 +14862,8 @@
         </p:nvSpPr>
         <p:spPr>
           <a:xfrm>
-            <a:off x="7818120" y="3182112"/>
-            <a:ext cx="3090672" cy="718718"/>
+            <a:off x="7726680" y="3182112"/>
+            <a:ext cx="3227832" cy="960120"/>
           </a:xfrm>
           <a:prstGeom prst="rect">
             <a:avLst/>
@@ -14877,7 +14881,7 @@
               <a:buNone/>
             </a:pPr>
             <a:r>
-              <a:rPr lang="en-US" sz="1220" dirty="0">
+              <a:rPr lang="en-US" sz="1140" dirty="0">
                 <a:solidFill>
                   <a:srgbClr val="17364A"/>
                 </a:solidFill>
@@ -14885,16 +14889,16 @@
                 <a:ea typeface="Aptos" pitchFamily="34" charset="-122"/>
                 <a:cs typeface="Aptos" pitchFamily="34" charset="-120"/>
               </a:rPr>
-              <a:t>Recognize when a decision requires causal evidence rather than.</a:t>
-            </a:r>
-            <a:endParaRPr lang="en-US" sz="1220" dirty="0"/>
-          </a:p>
-          <a:p>
-            <a:pPr indent="0" marL="0">
-              <a:buNone/>
-            </a:pPr>
-            <a:r>
-              <a:rPr lang="en-US" sz="1220" dirty="0">
+              <a:t>Recognize when a decision requires causal evidence.</a:t>
+            </a:r>
+            <a:endParaRPr lang="en-US" sz="1140" dirty="0"/>
+          </a:p>
+          <a:p>
+            <a:pPr indent="0" marL="0">
+              <a:buNone/>
+            </a:pPr>
+            <a:r>
+              <a:rPr lang="en-US" sz="1140" dirty="0">
                 <a:solidFill>
                   <a:srgbClr val="17364A"/>
                 </a:solidFill>
@@ -14902,9 +14906,9 @@
                 <a:ea typeface="Aptos" pitchFamily="34" charset="-122"/>
                 <a:cs typeface="Aptos" pitchFamily="34" charset="-120"/>
               </a:rPr>
-              <a:t>Identify appropriate evidence sources for evaluating interventions.</a:t>
-            </a:r>
-            <a:endParaRPr lang="en-US" sz="1220" dirty="0"/>
+              <a:t>Identify appropriate evidence sources for.</a:t>
+            </a:r>
+            <a:endParaRPr lang="en-US" sz="1140" dirty="0"/>
           </a:p>
         </p:txBody>
       </p:sp>
@@ -14916,12 +14920,12 @@
         </p:nvSpPr>
         <p:spPr>
           <a:xfrm>
-            <a:off x="7635240" y="4184294"/>
-            <a:ext cx="3474720" cy="1466698"/>
+            <a:off x="7543800" y="4389120"/>
+            <a:ext cx="3611880" cy="1261872"/>
           </a:xfrm>
           <a:prstGeom prst="roundRect">
             <a:avLst>
-              <a:gd name="adj" fmla="val 7481"/>
+              <a:gd name="adj" fmla="val 8696"/>
             </a:avLst>
           </a:prstGeom>
           <a:solidFill>
@@ -14943,8 +14947,8 @@
         </p:nvSpPr>
         <p:spPr>
           <a:xfrm>
-            <a:off x="7799832" y="4330598"/>
-            <a:ext cx="3145536" cy="256032"/>
+            <a:off x="7708392" y="4517136"/>
+            <a:ext cx="3282696" cy="228600"/>
           </a:xfrm>
           <a:prstGeom prst="rect">
             <a:avLst/>
@@ -14960,7 +14964,7 @@
               <a:buNone/>
             </a:pPr>
             <a:r>
-              <a:rPr lang="en-US" sz="1300" b="1" dirty="0">
+              <a:rPr lang="en-US" sz="1220" b="1" dirty="0">
                 <a:solidFill>
                   <a:srgbClr val="0068B7"/>
                 </a:solidFill>
@@ -14970,7 +14974,7 @@
               </a:rPr>
               <a:t>What to produce</a:t>
             </a:r>
-            <a:endParaRPr lang="en-US" sz="1300" dirty="0"/>
+            <a:endParaRPr lang="en-US" sz="1220" dirty="0"/>
           </a:p>
         </p:txBody>
       </p:sp>
@@ -14982,8 +14986,8 @@
         </p:nvSpPr>
         <p:spPr>
           <a:xfrm>
-            <a:off x="7799832" y="4659782"/>
-            <a:ext cx="3145536" cy="899770"/>
+            <a:off x="7708392" y="4828032"/>
+            <a:ext cx="3282696" cy="749808"/>
           </a:xfrm>
           <a:prstGeom prst="rect">
             <a:avLst/>
@@ -15001,7 +15005,7 @@
               <a:buNone/>
             </a:pPr>
             <a:r>
-              <a:rPr lang="en-US" sz="1320" dirty="0">
+              <a:rPr lang="en-US" sz="1220" dirty="0">
                 <a:solidFill>
                   <a:srgbClr val="17364A"/>
                 </a:solidFill>
@@ -15009,9 +15013,9 @@
                 <a:ea typeface="Aptos" pitchFamily="34" charset="-122"/>
                 <a:cs typeface="Aptos" pitchFamily="34" charset="-120"/>
               </a:rPr>
-              <a:t>Use the assignment to test whether you can explain the concept, apply it to a realistic public health situation, and identify what would need review before the work moves forward.</a:t>
-            </a:r>
-            <a:endParaRPr lang="en-US" sz="1320" dirty="0"/>
+              <a:t>Use the assignment to test whether you can explain the concept, apply it to a.</a:t>
+            </a:r>
+            <a:endParaRPr lang="en-US" sz="1220" dirty="0"/>
           </a:p>
         </p:txBody>
       </p:sp>
@@ -15302,8 +15306,8 @@
         </p:nvSpPr>
         <p:spPr>
           <a:xfrm>
-            <a:off x="868680" y="1508760"/>
-            <a:ext cx="6309360" cy="4160520"/>
+            <a:off x="822960" y="1463040"/>
+            <a:ext cx="6565392" cy="4343400"/>
           </a:xfrm>
           <a:prstGeom prst="rect">
             <a:avLst/>
@@ -15321,7 +15325,7 @@
               <a:buNone/>
             </a:pPr>
             <a:r>
-              <a:rPr lang="en-US" sz="2100" dirty="0">
+              <a:rPr lang="en-US" sz="1920" dirty="0">
                 <a:solidFill>
                   <a:srgbClr val="003A63"/>
                 </a:solidFill>
@@ -15331,7 +15335,7 @@
               </a:rPr>
               <a:t>• Create a causal question framing worksheet for an AI-supported decision.</a:t>
             </a:r>
-            <a:endParaRPr lang="en-US" sz="2100" dirty="0"/>
+            <a:endParaRPr lang="en-US" sz="1920" dirty="0"/>
           </a:p>
         </p:txBody>
       </p:sp>
@@ -15343,12 +15347,12 @@
         </p:nvSpPr>
         <p:spPr>
           <a:xfrm>
-            <a:off x="7635240" y="1325880"/>
-            <a:ext cx="3474720" cy="1207008"/>
+            <a:off x="7543800" y="1325880"/>
+            <a:ext cx="3611880" cy="1261872"/>
           </a:xfrm>
           <a:prstGeom prst="roundRect">
             <a:avLst>
-              <a:gd name="adj" fmla="val 9091"/>
+              <a:gd name="adj" fmla="val 8696"/>
             </a:avLst>
           </a:prstGeom>
           <a:solidFill>
@@ -15370,8 +15374,8 @@
         </p:nvSpPr>
         <p:spPr>
           <a:xfrm>
-            <a:off x="7799832" y="1472184"/>
-            <a:ext cx="3145536" cy="256032"/>
+            <a:off x="7708392" y="1453896"/>
+            <a:ext cx="3282696" cy="228600"/>
           </a:xfrm>
           <a:prstGeom prst="rect">
             <a:avLst/>
@@ -15387,7 +15391,7 @@
               <a:buNone/>
             </a:pPr>
             <a:r>
-              <a:rPr lang="en-US" sz="1300" b="1" dirty="0">
+              <a:rPr lang="en-US" sz="1220" b="1" dirty="0">
                 <a:solidFill>
                   <a:srgbClr val="0068B7"/>
                 </a:solidFill>
@@ -15397,7 +15401,7 @@
               </a:rPr>
               <a:t>Practice focus</a:t>
             </a:r>
-            <a:endParaRPr lang="en-US" sz="1300" dirty="0"/>
+            <a:endParaRPr lang="en-US" sz="1220" dirty="0"/>
           </a:p>
         </p:txBody>
       </p:sp>
@@ -15409,8 +15413,8 @@
         </p:nvSpPr>
         <p:spPr>
           <a:xfrm>
-            <a:off x="7799832" y="1801368"/>
-            <a:ext cx="3145536" cy="640080"/>
+            <a:off x="7708392" y="1764792"/>
+            <a:ext cx="3282696" cy="749808"/>
           </a:xfrm>
           <a:prstGeom prst="rect">
             <a:avLst/>
@@ -15428,7 +15432,7 @@
               <a:buNone/>
             </a:pPr>
             <a:r>
-              <a:rPr lang="en-US" sz="1320" dirty="0">
+              <a:rPr lang="en-US" sz="1220" dirty="0">
                 <a:solidFill>
                   <a:srgbClr val="17364A"/>
                 </a:solidFill>
@@ -15438,7 +15442,7 @@
               </a:rPr>
               <a:t>Create a causal question framing worksheet for an AI-supported decision.</a:t>
             </a:r>
-            <a:endParaRPr lang="en-US" sz="1320" dirty="0"/>
+            <a:endParaRPr lang="en-US" sz="1220" dirty="0"/>
           </a:p>
         </p:txBody>
       </p:sp>
@@ -15450,12 +15454,12 @@
         </p:nvSpPr>
         <p:spPr>
           <a:xfrm>
-            <a:off x="7635240" y="2670048"/>
-            <a:ext cx="3474720" cy="1377086"/>
+            <a:off x="7543800" y="2724912"/>
+            <a:ext cx="3611880" cy="1527048"/>
           </a:xfrm>
           <a:prstGeom prst="roundRect">
             <a:avLst>
-              <a:gd name="adj" fmla="val 7968"/>
+              <a:gd name="adj" fmla="val 7186"/>
             </a:avLst>
           </a:prstGeom>
           <a:solidFill>
@@ -15477,8 +15481,8 @@
         </p:nvSpPr>
         <p:spPr>
           <a:xfrm>
-            <a:off x="7799832" y="2816352"/>
-            <a:ext cx="3145536" cy="256032"/>
+            <a:off x="7708392" y="2852928"/>
+            <a:ext cx="3282696" cy="228600"/>
           </a:xfrm>
           <a:prstGeom prst="rect">
             <a:avLst/>
@@ -15494,7 +15498,7 @@
               <a:buNone/>
             </a:pPr>
             <a:r>
-              <a:rPr lang="en-US" sz="1300" b="1" dirty="0">
+              <a:rPr lang="en-US" sz="1220" b="1" dirty="0">
                 <a:solidFill>
                   <a:srgbClr val="0068B7"/>
                 </a:solidFill>
@@ -15504,7 +15508,7 @@
               </a:rPr>
               <a:t>Concept checkpoints</a:t>
             </a:r>
-            <a:endParaRPr lang="en-US" sz="1300" dirty="0"/>
+            <a:endParaRPr lang="en-US" sz="1220" dirty="0"/>
           </a:p>
         </p:txBody>
       </p:sp>
@@ -15516,8 +15520,8 @@
         </p:nvSpPr>
         <p:spPr>
           <a:xfrm>
-            <a:off x="7818120" y="3182112"/>
-            <a:ext cx="3090672" cy="718718"/>
+            <a:off x="7726680" y="3182112"/>
+            <a:ext cx="3227832" cy="960120"/>
           </a:xfrm>
           <a:prstGeom prst="rect">
             <a:avLst/>
@@ -15535,7 +15539,7 @@
               <a:buNone/>
             </a:pPr>
             <a:r>
-              <a:rPr lang="en-US" sz="1220" dirty="0">
+              <a:rPr lang="en-US" sz="1140" dirty="0">
                 <a:solidFill>
                   <a:srgbClr val="17364A"/>
                 </a:solidFill>
@@ -15543,9 +15547,9 @@
                 <a:ea typeface="Aptos" pitchFamily="34" charset="-122"/>
                 <a:cs typeface="Aptos" pitchFamily="34" charset="-120"/>
               </a:rPr>
-              <a:t>Create a causal question framing worksheet for an AI-supported.</a:t>
-            </a:r>
-            <a:endParaRPr lang="en-US" sz="1220" dirty="0"/>
+              <a:t>Create a causal question framing worksheet for an.</a:t>
+            </a:r>
+            <a:endParaRPr lang="en-US" sz="1140" dirty="0"/>
           </a:p>
         </p:txBody>
       </p:sp>
@@ -15557,12 +15561,12 @@
         </p:nvSpPr>
         <p:spPr>
           <a:xfrm>
-            <a:off x="7635240" y="4184294"/>
-            <a:ext cx="3474720" cy="1466698"/>
+            <a:off x="7543800" y="4389120"/>
+            <a:ext cx="3611880" cy="1261872"/>
           </a:xfrm>
           <a:prstGeom prst="roundRect">
             <a:avLst>
-              <a:gd name="adj" fmla="val 7481"/>
+              <a:gd name="adj" fmla="val 8696"/>
             </a:avLst>
           </a:prstGeom>
           <a:solidFill>
@@ -15584,8 +15588,8 @@
         </p:nvSpPr>
         <p:spPr>
           <a:xfrm>
-            <a:off x="7799832" y="4330598"/>
-            <a:ext cx="3145536" cy="256032"/>
+            <a:off x="7708392" y="4517136"/>
+            <a:ext cx="3282696" cy="228600"/>
           </a:xfrm>
           <a:prstGeom prst="rect">
             <a:avLst/>
@@ -15601,7 +15605,7 @@
               <a:buNone/>
             </a:pPr>
             <a:r>
-              <a:rPr lang="en-US" sz="1300" b="1" dirty="0">
+              <a:rPr lang="en-US" sz="1220" b="1" dirty="0">
                 <a:solidFill>
                   <a:srgbClr val="0068B7"/>
                 </a:solidFill>
@@ -15611,7 +15615,7 @@
               </a:rPr>
               <a:t>What to produce</a:t>
             </a:r>
-            <a:endParaRPr lang="en-US" sz="1300" dirty="0"/>
+            <a:endParaRPr lang="en-US" sz="1220" dirty="0"/>
           </a:p>
         </p:txBody>
       </p:sp>
@@ -15623,8 +15627,8 @@
         </p:nvSpPr>
         <p:spPr>
           <a:xfrm>
-            <a:off x="7799832" y="4659782"/>
-            <a:ext cx="3145536" cy="899770"/>
+            <a:off x="7708392" y="4828032"/>
+            <a:ext cx="3282696" cy="749808"/>
           </a:xfrm>
           <a:prstGeom prst="rect">
             <a:avLst/>
@@ -15642,7 +15646,7 @@
               <a:buNone/>
             </a:pPr>
             <a:r>
-              <a:rPr lang="en-US" sz="1320" dirty="0">
+              <a:rPr lang="en-US" sz="1220" dirty="0">
                 <a:solidFill>
                   <a:srgbClr val="17364A"/>
                 </a:solidFill>
@@ -15650,9 +15654,9 @@
                 <a:ea typeface="Aptos" pitchFamily="34" charset="-122"/>
                 <a:cs typeface="Aptos" pitchFamily="34" charset="-120"/>
               </a:rPr>
-              <a:t>Use the assignment to test whether you can explain the concept, apply it to a realistic public health situation, and identify what would need review before the work moves forward.</a:t>
-            </a:r>
-            <a:endParaRPr lang="en-US" sz="1320" dirty="0"/>
+              <a:t>Use the assignment to test whether you can explain the concept, apply it to a.</a:t>
+            </a:r>
+            <a:endParaRPr lang="en-US" sz="1220" dirty="0"/>
           </a:p>
         </p:txBody>
       </p:sp>
@@ -15943,8 +15947,8 @@
         </p:nvSpPr>
         <p:spPr>
           <a:xfrm>
-            <a:off x="868680" y="1508760"/>
-            <a:ext cx="6309360" cy="4160520"/>
+            <a:off x="822960" y="1463040"/>
+            <a:ext cx="6565392" cy="4343400"/>
           </a:xfrm>
           <a:prstGeom prst="rect">
             <a:avLst/>
@@ -15962,7 +15966,7 @@
               <a:buNone/>
             </a:pPr>
             <a:r>
-              <a:rPr lang="en-US" sz="2100" dirty="0">
+              <a:rPr lang="en-US" sz="1920" dirty="0">
                 <a:solidFill>
                   <a:srgbClr val="003A63"/>
                 </a:solidFill>
@@ -15970,16 +15974,16 @@
                 <a:ea typeface="Aptos" pitchFamily="34" charset="-122"/>
                 <a:cs typeface="Aptos" pitchFamily="34" charset="-120"/>
               </a:rPr>
-              <a:t>• AI models often predict what is likely to happen, but public health leaders frequently need to.</a:t>
-            </a:r>
-            <a:endParaRPr lang="en-US" sz="2100" dirty="0"/>
-          </a:p>
-          <a:p>
-            <a:pPr indent="0" marL="0">
-              <a:buNone/>
-            </a:pPr>
-            <a:r>
-              <a:rPr lang="en-US" sz="2100" dirty="0">
+              <a:t>• AI models often predict what is likely to happen, but public health leaders.</a:t>
+            </a:r>
+            <a:endParaRPr lang="en-US" sz="1920" dirty="0"/>
+          </a:p>
+          <a:p>
+            <a:pPr indent="0" marL="0">
+              <a:buNone/>
+            </a:pPr>
+            <a:r>
+              <a:rPr lang="en-US" sz="1920" dirty="0">
                 <a:solidFill>
                   <a:srgbClr val="003A63"/>
                 </a:solidFill>
@@ -15987,16 +15991,16 @@
                 <a:ea typeface="Aptos" pitchFamily="34" charset="-122"/>
                 <a:cs typeface="Aptos" pitchFamily="34" charset="-120"/>
               </a:rPr>
-              <a:t>• This module helps learners distinguish prediction from causal inference so AI outputs are not.</a:t>
-            </a:r>
-            <a:endParaRPr lang="en-US" sz="2100" dirty="0"/>
-          </a:p>
-          <a:p>
-            <a:pPr indent="0" marL="0">
-              <a:buNone/>
-            </a:pPr>
-            <a:r>
-              <a:rPr lang="en-US" sz="2100" dirty="0">
+              <a:t>• This module helps learners distinguish prediction from causal inference so.</a:t>
+            </a:r>
+            <a:endParaRPr lang="en-US" sz="1920" dirty="0"/>
+          </a:p>
+          <a:p>
+            <a:pPr indent="0" marL="0">
+              <a:buNone/>
+            </a:pPr>
+            <a:r>
+              <a:rPr lang="en-US" sz="1920" dirty="0">
                 <a:solidFill>
                   <a:srgbClr val="003A63"/>
                 </a:solidFill>
@@ -16004,9 +16008,9 @@
                 <a:ea typeface="Aptos" pitchFamily="34" charset="-122"/>
                 <a:cs typeface="Aptos" pitchFamily="34" charset="-120"/>
               </a:rPr>
-              <a:t>• Learners examine confounding, bias, comparison groups, counterfactual reasoning, directed.</a:t>
-            </a:r>
-            <a:endParaRPr lang="en-US" sz="2100" dirty="0"/>
+              <a:t>• Learners examine confounding, bias, comparison groups, counterfactual.</a:t>
+            </a:r>
+            <a:endParaRPr lang="en-US" sz="1920" dirty="0"/>
           </a:p>
         </p:txBody>
       </p:sp>
@@ -16018,12 +16022,12 @@
         </p:nvSpPr>
         <p:spPr>
           <a:xfrm>
-            <a:off x="7635240" y="1325880"/>
-            <a:ext cx="3474720" cy="1255471"/>
+            <a:off x="7543800" y="1325880"/>
+            <a:ext cx="3611880" cy="1261872"/>
           </a:xfrm>
           <a:prstGeom prst="roundRect">
             <a:avLst>
-              <a:gd name="adj" fmla="val 8740"/>
+              <a:gd name="adj" fmla="val 8696"/>
             </a:avLst>
           </a:prstGeom>
           <a:solidFill>
@@ -16045,8 +16049,8 @@
         </p:nvSpPr>
         <p:spPr>
           <a:xfrm>
-            <a:off x="7799832" y="1472184"/>
-            <a:ext cx="3145536" cy="256032"/>
+            <a:off x="7708392" y="1453896"/>
+            <a:ext cx="3282696" cy="228600"/>
           </a:xfrm>
           <a:prstGeom prst="rect">
             <a:avLst/>
@@ -16062,7 +16066,7 @@
               <a:buNone/>
             </a:pPr>
             <a:r>
-              <a:rPr lang="en-US" sz="1300" b="1" dirty="0">
+              <a:rPr lang="en-US" sz="1220" b="1" dirty="0">
                 <a:solidFill>
                   <a:srgbClr val="0068B7"/>
                 </a:solidFill>
@@ -16072,7 +16076,7 @@
               </a:rPr>
               <a:t>Core concept</a:t>
             </a:r>
-            <a:endParaRPr lang="en-US" sz="1300" dirty="0"/>
+            <a:endParaRPr lang="en-US" sz="1220" dirty="0"/>
           </a:p>
         </p:txBody>
       </p:sp>
@@ -16084,8 +16088,8 @@
         </p:nvSpPr>
         <p:spPr>
           <a:xfrm>
-            <a:off x="7799832" y="1801368"/>
-            <a:ext cx="3145536" cy="688543"/>
+            <a:off x="7708392" y="1764792"/>
+            <a:ext cx="3282696" cy="749808"/>
           </a:xfrm>
           <a:prstGeom prst="rect">
             <a:avLst/>
@@ -16103,7 +16107,7 @@
               <a:buNone/>
             </a:pPr>
             <a:r>
-              <a:rPr lang="en-US" sz="1320" dirty="0">
+              <a:rPr lang="en-US" sz="1220" dirty="0">
                 <a:solidFill>
                   <a:srgbClr val="17364A"/>
                 </a:solidFill>
@@ -16111,9 +16115,9 @@
                 <a:ea typeface="Aptos" pitchFamily="34" charset="-122"/>
                 <a:cs typeface="Aptos" pitchFamily="34" charset="-120"/>
               </a:rPr>
-              <a:t>AI models often predict what is likely to happen, but public health leaders frequently need to know.</a:t>
-            </a:r>
-            <a:endParaRPr lang="en-US" sz="1320" dirty="0"/>
+              <a:t>AI models often predict what is likely to happen, but public health leaders.</a:t>
+            </a:r>
+            <a:endParaRPr lang="en-US" sz="1220" dirty="0"/>
           </a:p>
         </p:txBody>
       </p:sp>
@@ -16125,12 +16129,12 @@
         </p:nvSpPr>
         <p:spPr>
           <a:xfrm>
-            <a:off x="7635240" y="2718511"/>
-            <a:ext cx="3474720" cy="1328623"/>
+            <a:off x="7543800" y="2724912"/>
+            <a:ext cx="3611880" cy="1527048"/>
           </a:xfrm>
           <a:prstGeom prst="roundRect">
             <a:avLst>
-              <a:gd name="adj" fmla="val 8259"/>
+              <a:gd name="adj" fmla="val 7186"/>
             </a:avLst>
           </a:prstGeom>
           <a:solidFill>
@@ -16152,8 +16156,8 @@
         </p:nvSpPr>
         <p:spPr>
           <a:xfrm>
-            <a:off x="7799832" y="2864815"/>
-            <a:ext cx="3145536" cy="256032"/>
+            <a:off x="7708392" y="2852928"/>
+            <a:ext cx="3282696" cy="228600"/>
           </a:xfrm>
           <a:prstGeom prst="rect">
             <a:avLst/>
@@ -16169,7 +16173,7 @@
               <a:buNone/>
             </a:pPr>
             <a:r>
-              <a:rPr lang="en-US" sz="1300" b="1" dirty="0">
+              <a:rPr lang="en-US" sz="1220" b="1" dirty="0">
                 <a:solidFill>
                   <a:srgbClr val="0068B7"/>
                 </a:solidFill>
@@ -16179,7 +16183,7 @@
               </a:rPr>
               <a:t>Concept checkpoints</a:t>
             </a:r>
-            <a:endParaRPr lang="en-US" sz="1300" dirty="0"/>
+            <a:endParaRPr lang="en-US" sz="1220" dirty="0"/>
           </a:p>
         </p:txBody>
       </p:sp>
@@ -16191,8 +16195,8 @@
         </p:nvSpPr>
         <p:spPr>
           <a:xfrm>
-            <a:off x="7818120" y="3230575"/>
-            <a:ext cx="3090672" cy="670255"/>
+            <a:off x="7726680" y="3182112"/>
+            <a:ext cx="3227832" cy="960120"/>
           </a:xfrm>
           <a:prstGeom prst="rect">
             <a:avLst/>
@@ -16210,7 +16214,7 @@
               <a:buNone/>
             </a:pPr>
             <a:r>
-              <a:rPr lang="en-US" sz="1220" dirty="0">
+              <a:rPr lang="en-US" sz="1140" dirty="0">
                 <a:solidFill>
                   <a:srgbClr val="17364A"/>
                 </a:solidFill>
@@ -16218,16 +16222,16 @@
                 <a:ea typeface="Aptos" pitchFamily="34" charset="-122"/>
                 <a:cs typeface="Aptos" pitchFamily="34" charset="-120"/>
               </a:rPr>
-              <a:t>AI models often predict what is likely to happen, but public.</a:t>
-            </a:r>
-            <a:endParaRPr lang="en-US" sz="1220" dirty="0"/>
-          </a:p>
-          <a:p>
-            <a:pPr indent="0" marL="0">
-              <a:buNone/>
-            </a:pPr>
-            <a:r>
-              <a:rPr lang="en-US" sz="1220" dirty="0">
+              <a:t>AI models often predict what is likely to happen,.</a:t>
+            </a:r>
+            <a:endParaRPr lang="en-US" sz="1140" dirty="0"/>
+          </a:p>
+          <a:p>
+            <a:pPr indent="0" marL="0">
+              <a:buNone/>
+            </a:pPr>
+            <a:r>
+              <a:rPr lang="en-US" sz="1140" dirty="0">
                 <a:solidFill>
                   <a:srgbClr val="17364A"/>
                 </a:solidFill>
@@ -16235,16 +16239,16 @@
                 <a:ea typeface="Aptos" pitchFamily="34" charset="-122"/>
                 <a:cs typeface="Aptos" pitchFamily="34" charset="-120"/>
               </a:rPr>
-              <a:t>This module helps learners distinguish prediction from causal.</a:t>
-            </a:r>
-            <a:endParaRPr lang="en-US" sz="1220" dirty="0"/>
-          </a:p>
-          <a:p>
-            <a:pPr indent="0" marL="0">
-              <a:buNone/>
-            </a:pPr>
-            <a:r>
-              <a:rPr lang="en-US" sz="1220" dirty="0">
+              <a:t>This module helps learners distinguish prediction.</a:t>
+            </a:r>
+            <a:endParaRPr lang="en-US" sz="1140" dirty="0"/>
+          </a:p>
+          <a:p>
+            <a:pPr indent="0" marL="0">
+              <a:buNone/>
+            </a:pPr>
+            <a:r>
+              <a:rPr lang="en-US" sz="1140" dirty="0">
                 <a:solidFill>
                   <a:srgbClr val="17364A"/>
                 </a:solidFill>
@@ -16252,9 +16256,9 @@
                 <a:ea typeface="Aptos" pitchFamily="34" charset="-122"/>
                 <a:cs typeface="Aptos" pitchFamily="34" charset="-120"/>
               </a:rPr>
-              <a:t>Learners examine confounding, bias, comparison groups,.</a:t>
-            </a:r>
-            <a:endParaRPr lang="en-US" sz="1220" dirty="0"/>
+              <a:t>Learners examine confounding, bias, comparison.</a:t>
+            </a:r>
+            <a:endParaRPr lang="en-US" sz="1140" dirty="0"/>
           </a:p>
         </p:txBody>
       </p:sp>
@@ -16266,12 +16270,12 @@
         </p:nvSpPr>
         <p:spPr>
           <a:xfrm>
-            <a:off x="7635240" y="4184294"/>
-            <a:ext cx="3474720" cy="1466698"/>
+            <a:off x="7543800" y="4389120"/>
+            <a:ext cx="3611880" cy="1261872"/>
           </a:xfrm>
           <a:prstGeom prst="roundRect">
             <a:avLst>
-              <a:gd name="adj" fmla="val 7481"/>
+              <a:gd name="adj" fmla="val 8696"/>
             </a:avLst>
           </a:prstGeom>
           <a:solidFill>
@@ -16293,8 +16297,8 @@
         </p:nvSpPr>
         <p:spPr>
           <a:xfrm>
-            <a:off x="7799832" y="4330598"/>
-            <a:ext cx="3145536" cy="256032"/>
+            <a:off x="7708392" y="4517136"/>
+            <a:ext cx="3282696" cy="228600"/>
           </a:xfrm>
           <a:prstGeom prst="rect">
             <a:avLst/>
@@ -16310,7 +16314,7 @@
               <a:buNone/>
             </a:pPr>
             <a:r>
-              <a:rPr lang="en-US" sz="1300" b="1" dirty="0">
+              <a:rPr lang="en-US" sz="1220" b="1" dirty="0">
                 <a:solidFill>
                   <a:srgbClr val="0068B7"/>
                 </a:solidFill>
@@ -16320,7 +16324,7 @@
               </a:rPr>
               <a:t>Apply it</a:t>
             </a:r>
-            <a:endParaRPr lang="en-US" sz="1300" dirty="0"/>
+            <a:endParaRPr lang="en-US" sz="1220" dirty="0"/>
           </a:p>
         </p:txBody>
       </p:sp>
@@ -16332,8 +16336,8 @@
         </p:nvSpPr>
         <p:spPr>
           <a:xfrm>
-            <a:off x="7799832" y="4659782"/>
-            <a:ext cx="3145536" cy="899770"/>
+            <a:off x="7708392" y="4828032"/>
+            <a:ext cx="3282696" cy="749808"/>
           </a:xfrm>
           <a:prstGeom prst="rect">
             <a:avLst/>
@@ -16351,7 +16355,7 @@
               <a:buNone/>
             </a:pPr>
             <a:r>
-              <a:rPr lang="en-US" sz="1320" dirty="0">
+              <a:rPr lang="en-US" sz="1220" dirty="0">
                 <a:solidFill>
                   <a:srgbClr val="17364A"/>
                 </a:solidFill>
@@ -16359,9 +16363,9 @@
                 <a:ea typeface="Aptos" pitchFamily="34" charset="-122"/>
                 <a:cs typeface="Aptos" pitchFamily="34" charset="-120"/>
               </a:rPr>
-              <a:t>Connect the concept to public health purpose, responsible use, required safeguards, documentation, and the next action a department should take.</a:t>
-            </a:r>
-            <a:endParaRPr lang="en-US" sz="1320" dirty="0"/>
+              <a:t>Connect the concept to public health purpose, responsible use, required.</a:t>
+            </a:r>
+            <a:endParaRPr lang="en-US" sz="1220" dirty="0"/>
           </a:p>
         </p:txBody>
       </p:sp>
@@ -16652,8 +16656,8 @@
         </p:nvSpPr>
         <p:spPr>
           <a:xfrm>
-            <a:off x="868680" y="1508760"/>
-            <a:ext cx="6309360" cy="4160520"/>
+            <a:off x="822960" y="1463040"/>
+            <a:ext cx="6565392" cy="4343400"/>
           </a:xfrm>
           <a:prstGeom prst="rect">
             <a:avLst/>
@@ -16671,7 +16675,7 @@
               <a:buNone/>
             </a:pPr>
             <a:r>
-              <a:rPr lang="en-US" sz="2100" dirty="0">
+              <a:rPr lang="en-US" sz="1920" dirty="0">
                 <a:solidFill>
                   <a:srgbClr val="003A63"/>
                 </a:solidFill>
@@ -16679,16 +16683,16 @@
                 <a:ea typeface="Aptos" pitchFamily="34" charset="-122"/>
                 <a:cs typeface="Aptos" pitchFamily="34" charset="-120"/>
               </a:rPr>
-              <a:t>• Prediction: An estimate of what is likely to happen based on observed patterns.</a:t>
-            </a:r>
-            <a:endParaRPr lang="en-US" sz="2100" dirty="0"/>
-          </a:p>
-          <a:p>
-            <a:pPr indent="0" marL="0">
-              <a:buNone/>
-            </a:pPr>
-            <a:r>
-              <a:rPr lang="en-US" sz="2100" dirty="0">
+              <a:t>• Prediction: An estimate of what is likely to happen based on observed.</a:t>
+            </a:r>
+            <a:endParaRPr lang="en-US" sz="1920" dirty="0"/>
+          </a:p>
+          <a:p>
+            <a:pPr indent="0" marL="0">
+              <a:buNone/>
+            </a:pPr>
+            <a:r>
+              <a:rPr lang="en-US" sz="1920" dirty="0">
                 <a:solidFill>
                   <a:srgbClr val="003A63"/>
                 </a:solidFill>
@@ -16696,16 +16700,16 @@
                 <a:ea typeface="Aptos" pitchFamily="34" charset="-122"/>
                 <a:cs typeface="Aptos" pitchFamily="34" charset="-120"/>
               </a:rPr>
-              <a:t>• Causal inference: The process of estimating whether and how an exposure, policy, program, or.</a:t>
-            </a:r>
-            <a:endParaRPr lang="en-US" sz="2100" dirty="0"/>
-          </a:p>
-          <a:p>
-            <a:pPr indent="0" marL="0">
-              <a:buNone/>
-            </a:pPr>
-            <a:r>
-              <a:rPr lang="en-US" sz="2100" dirty="0">
+              <a:t>• Causal inference: The process of estimating whether and how an exposure,.</a:t>
+            </a:r>
+            <a:endParaRPr lang="en-US" sz="1920" dirty="0"/>
+          </a:p>
+          <a:p>
+            <a:pPr indent="0" marL="0">
+              <a:buNone/>
+            </a:pPr>
+            <a:r>
+              <a:rPr lang="en-US" sz="1920" dirty="0">
                 <a:solidFill>
                   <a:srgbClr val="003A63"/>
                 </a:solidFill>
@@ -16713,9 +16717,9 @@
                 <a:ea typeface="Aptos" pitchFamily="34" charset="-122"/>
                 <a:cs typeface="Aptos" pitchFamily="34" charset="-120"/>
               </a:rPr>
-              <a:t>• Confounding: A distortion that occurs when another factor is related to both the exposure and.</a:t>
-            </a:r>
-            <a:endParaRPr lang="en-US" sz="2100" dirty="0"/>
+              <a:t>• Confounding: A distortion that occurs when another factor is related to both.</a:t>
+            </a:r>
+            <a:endParaRPr lang="en-US" sz="1920" dirty="0"/>
           </a:p>
         </p:txBody>
       </p:sp>
@@ -16727,12 +16731,12 @@
         </p:nvSpPr>
         <p:spPr>
           <a:xfrm>
-            <a:off x="7635240" y="1325880"/>
-            <a:ext cx="3474720" cy="1207008"/>
+            <a:off x="7543800" y="1325880"/>
+            <a:ext cx="3611880" cy="1261872"/>
           </a:xfrm>
           <a:prstGeom prst="roundRect">
             <a:avLst>
-              <a:gd name="adj" fmla="val 9091"/>
+              <a:gd name="adj" fmla="val 8696"/>
             </a:avLst>
           </a:prstGeom>
           <a:solidFill>
@@ -16754,8 +16758,8 @@
         </p:nvSpPr>
         <p:spPr>
           <a:xfrm>
-            <a:off x="7799832" y="1472184"/>
-            <a:ext cx="3145536" cy="256032"/>
+            <a:off x="7708392" y="1453896"/>
+            <a:ext cx="3282696" cy="228600"/>
           </a:xfrm>
           <a:prstGeom prst="rect">
             <a:avLst/>
@@ -16771,7 +16775,7 @@
               <a:buNone/>
             </a:pPr>
             <a:r>
-              <a:rPr lang="en-US" sz="1300" b="1" dirty="0">
+              <a:rPr lang="en-US" sz="1220" b="1" dirty="0">
                 <a:solidFill>
                   <a:srgbClr val="0068B7"/>
                 </a:solidFill>
@@ -16781,7 +16785,7 @@
               </a:rPr>
               <a:t>Core concept</a:t>
             </a:r>
-            <a:endParaRPr lang="en-US" sz="1300" dirty="0"/>
+            <a:endParaRPr lang="en-US" sz="1220" dirty="0"/>
           </a:p>
         </p:txBody>
       </p:sp>
@@ -16793,8 +16797,8 @@
         </p:nvSpPr>
         <p:spPr>
           <a:xfrm>
-            <a:off x="7799832" y="1801368"/>
-            <a:ext cx="3145536" cy="640080"/>
+            <a:off x="7708392" y="1764792"/>
+            <a:ext cx="3282696" cy="749808"/>
           </a:xfrm>
           <a:prstGeom prst="rect">
             <a:avLst/>
@@ -16812,7 +16816,7 @@
               <a:buNone/>
             </a:pPr>
             <a:r>
-              <a:rPr lang="en-US" sz="1320" dirty="0">
+              <a:rPr lang="en-US" sz="1220" dirty="0">
                 <a:solidFill>
                   <a:srgbClr val="17364A"/>
                 </a:solidFill>
@@ -16822,7 +16826,7 @@
               </a:rPr>
               <a:t>Prediction: An estimate of what is likely to happen based on observed patterns.</a:t>
             </a:r>
-            <a:endParaRPr lang="en-US" sz="1320" dirty="0"/>
+            <a:endParaRPr lang="en-US" sz="1220" dirty="0"/>
           </a:p>
         </p:txBody>
       </p:sp>
@@ -16834,12 +16838,12 @@
         </p:nvSpPr>
         <p:spPr>
           <a:xfrm>
-            <a:off x="7635240" y="2670048"/>
-            <a:ext cx="3474720" cy="1377086"/>
+            <a:off x="7543800" y="2724912"/>
+            <a:ext cx="3611880" cy="1527048"/>
           </a:xfrm>
           <a:prstGeom prst="roundRect">
             <a:avLst>
-              <a:gd name="adj" fmla="val 7968"/>
+              <a:gd name="adj" fmla="val 7186"/>
             </a:avLst>
           </a:prstGeom>
           <a:solidFill>
@@ -16861,8 +16865,8 @@
         </p:nvSpPr>
         <p:spPr>
           <a:xfrm>
-            <a:off x="7799832" y="2816352"/>
-            <a:ext cx="3145536" cy="256032"/>
+            <a:off x="7708392" y="2852928"/>
+            <a:ext cx="3282696" cy="228600"/>
           </a:xfrm>
           <a:prstGeom prst="rect">
             <a:avLst/>
@@ -16878,7 +16882,7 @@
               <a:buNone/>
             </a:pPr>
             <a:r>
-              <a:rPr lang="en-US" sz="1300" b="1" dirty="0">
+              <a:rPr lang="en-US" sz="1220" b="1" dirty="0">
                 <a:solidFill>
                   <a:srgbClr val="0068B7"/>
                 </a:solidFill>
@@ -16888,7 +16892,7 @@
               </a:rPr>
               <a:t>Concept checkpoints</a:t>
             </a:r>
-            <a:endParaRPr lang="en-US" sz="1300" dirty="0"/>
+            <a:endParaRPr lang="en-US" sz="1220" dirty="0"/>
           </a:p>
         </p:txBody>
       </p:sp>
@@ -16900,8 +16904,8 @@
         </p:nvSpPr>
         <p:spPr>
           <a:xfrm>
-            <a:off x="7818120" y="3182112"/>
-            <a:ext cx="3090672" cy="718718"/>
+            <a:off x="7726680" y="3182112"/>
+            <a:ext cx="3227832" cy="960120"/>
           </a:xfrm>
           <a:prstGeom prst="rect">
             <a:avLst/>
@@ -16919,7 +16923,7 @@
               <a:buNone/>
             </a:pPr>
             <a:r>
-              <a:rPr lang="en-US" sz="1220" dirty="0">
+              <a:rPr lang="en-US" sz="1140" dirty="0">
                 <a:solidFill>
                   <a:srgbClr val="17364A"/>
                 </a:solidFill>
@@ -16927,16 +16931,16 @@
                 <a:ea typeface="Aptos" pitchFamily="34" charset="-122"/>
                 <a:cs typeface="Aptos" pitchFamily="34" charset="-120"/>
               </a:rPr>
-              <a:t>Causal inference: The process of estimating whether and how an.</a:t>
-            </a:r>
-            <a:endParaRPr lang="en-US" sz="1220" dirty="0"/>
-          </a:p>
-          <a:p>
-            <a:pPr indent="0" marL="0">
-              <a:buNone/>
-            </a:pPr>
-            <a:r>
-              <a:rPr lang="en-US" sz="1220" dirty="0">
+              <a:t>Causal inference: The process of estimating.</a:t>
+            </a:r>
+            <a:endParaRPr lang="en-US" sz="1140" dirty="0"/>
+          </a:p>
+          <a:p>
+            <a:pPr indent="0" marL="0">
+              <a:buNone/>
+            </a:pPr>
+            <a:r>
+              <a:rPr lang="en-US" sz="1140" dirty="0">
                 <a:solidFill>
                   <a:srgbClr val="17364A"/>
                 </a:solidFill>
@@ -16944,16 +16948,16 @@
                 <a:ea typeface="Aptos" pitchFamily="34" charset="-122"/>
                 <a:cs typeface="Aptos" pitchFamily="34" charset="-120"/>
               </a:rPr>
-              <a:t>Confounding: A distortion that occurs when another factor is.</a:t>
-            </a:r>
-            <a:endParaRPr lang="en-US" sz="1220" dirty="0"/>
-          </a:p>
-          <a:p>
-            <a:pPr indent="0" marL="0">
-              <a:buNone/>
-            </a:pPr>
-            <a:r>
-              <a:rPr lang="en-US" sz="1220" dirty="0">
+              <a:t>Confounding: A distortion that occurs when another.</a:t>
+            </a:r>
+            <a:endParaRPr lang="en-US" sz="1140" dirty="0"/>
+          </a:p>
+          <a:p>
+            <a:pPr indent="0" marL="0">
+              <a:buNone/>
+            </a:pPr>
+            <a:r>
+              <a:rPr lang="en-US" sz="1140" dirty="0">
                 <a:solidFill>
                   <a:srgbClr val="17364A"/>
                 </a:solidFill>
@@ -16961,9 +16965,9 @@
                 <a:ea typeface="Aptos" pitchFamily="34" charset="-122"/>
                 <a:cs typeface="Aptos" pitchFamily="34" charset="-120"/>
               </a:rPr>
-              <a:t>Counterfactual: The outcome that would have occurred under a.</a:t>
-            </a:r>
-            <a:endParaRPr lang="en-US" sz="1220" dirty="0"/>
+              <a:t>Counterfactual: The outcome that would have.</a:t>
+            </a:r>
+            <a:endParaRPr lang="en-US" sz="1140" dirty="0"/>
           </a:p>
         </p:txBody>
       </p:sp>
@@ -16975,12 +16979,12 @@
         </p:nvSpPr>
         <p:spPr>
           <a:xfrm>
-            <a:off x="7635240" y="4184294"/>
-            <a:ext cx="3474720" cy="1466698"/>
+            <a:off x="7543800" y="4389120"/>
+            <a:ext cx="3611880" cy="1261872"/>
           </a:xfrm>
           <a:prstGeom prst="roundRect">
             <a:avLst>
-              <a:gd name="adj" fmla="val 7481"/>
+              <a:gd name="adj" fmla="val 8696"/>
             </a:avLst>
           </a:prstGeom>
           <a:solidFill>
@@ -17002,8 +17006,8 @@
         </p:nvSpPr>
         <p:spPr>
           <a:xfrm>
-            <a:off x="7799832" y="4330598"/>
-            <a:ext cx="3145536" cy="256032"/>
+            <a:off x="7708392" y="4517136"/>
+            <a:ext cx="3282696" cy="228600"/>
           </a:xfrm>
           <a:prstGeom prst="rect">
             <a:avLst/>
@@ -17019,7 +17023,7 @@
               <a:buNone/>
             </a:pPr>
             <a:r>
-              <a:rPr lang="en-US" sz="1300" b="1" dirty="0">
+              <a:rPr lang="en-US" sz="1220" b="1" dirty="0">
                 <a:solidFill>
                   <a:srgbClr val="0068B7"/>
                 </a:solidFill>
@@ -17029,7 +17033,7 @@
               </a:rPr>
               <a:t>Apply it</a:t>
             </a:r>
-            <a:endParaRPr lang="en-US" sz="1300" dirty="0"/>
+            <a:endParaRPr lang="en-US" sz="1220" dirty="0"/>
           </a:p>
         </p:txBody>
       </p:sp>
@@ -17041,8 +17045,8 @@
         </p:nvSpPr>
         <p:spPr>
           <a:xfrm>
-            <a:off x="7799832" y="4659782"/>
-            <a:ext cx="3145536" cy="899770"/>
+            <a:off x="7708392" y="4828032"/>
+            <a:ext cx="3282696" cy="749808"/>
           </a:xfrm>
           <a:prstGeom prst="rect">
             <a:avLst/>
@@ -17060,7 +17064,7 @@
               <a:buNone/>
             </a:pPr>
             <a:r>
-              <a:rPr lang="en-US" sz="1320" dirty="0">
+              <a:rPr lang="en-US" sz="1220" dirty="0">
                 <a:solidFill>
                   <a:srgbClr val="17364A"/>
                 </a:solidFill>
@@ -17068,9 +17072,9 @@
                 <a:ea typeface="Aptos" pitchFamily="34" charset="-122"/>
                 <a:cs typeface="Aptos" pitchFamily="34" charset="-120"/>
               </a:rPr>
-              <a:t>Connect the concept to public health purpose, responsible use, required safeguards, documentation, and the next action a department should take.</a:t>
-            </a:r>
-            <a:endParaRPr lang="en-US" sz="1320" dirty="0"/>
+              <a:t>Connect the concept to public health purpose, responsible use, required.</a:t>
+            </a:r>
+            <a:endParaRPr lang="en-US" sz="1220" dirty="0"/>
           </a:p>
         </p:txBody>
       </p:sp>
@@ -17361,8 +17365,8 @@
         </p:nvSpPr>
         <p:spPr>
           <a:xfrm>
-            <a:off x="868680" y="1508760"/>
-            <a:ext cx="6309360" cy="4160520"/>
+            <a:off x="822960" y="1463040"/>
+            <a:ext cx="6565392" cy="4343400"/>
           </a:xfrm>
           <a:prstGeom prst="rect">
             <a:avLst/>
@@ -17380,7 +17384,7 @@
               <a:buNone/>
             </a:pPr>
             <a:r>
-              <a:rPr lang="en-US" sz="2100" dirty="0">
+              <a:rPr lang="en-US" sz="1920" dirty="0">
                 <a:solidFill>
                   <a:srgbClr val="003A63"/>
                 </a:solidFill>
@@ -17390,14 +17394,14 @@
               </a:rPr>
               <a:t>• AI can make weak evidence appear stronger than it is.</a:t>
             </a:r>
-            <a:endParaRPr lang="en-US" sz="2100" dirty="0"/>
-          </a:p>
-          <a:p>
-            <a:pPr indent="0" marL="0">
-              <a:buNone/>
-            </a:pPr>
-            <a:r>
-              <a:rPr lang="en-US" sz="2100" dirty="0">
+            <a:endParaRPr lang="en-US" sz="1920" dirty="0"/>
+          </a:p>
+          <a:p>
+            <a:pPr indent="0" marL="0">
+              <a:buNone/>
+            </a:pPr>
+            <a:r>
+              <a:rPr lang="en-US" sz="1920" dirty="0">
                 <a:solidFill>
                   <a:srgbClr val="003A63"/>
                 </a:solidFill>
@@ -17405,16 +17409,16 @@
                 <a:ea typeface="Aptos" pitchFamily="34" charset="-122"/>
                 <a:cs typeface="Aptos" pitchFamily="34" charset="-120"/>
               </a:rPr>
-              <a:t>• A model may predict which communities have higher hospitalization risk, but that does not.</a:t>
-            </a:r>
-            <a:endParaRPr lang="en-US" sz="2100" dirty="0"/>
-          </a:p>
-          <a:p>
-            <a:pPr indent="0" marL="0">
-              <a:buNone/>
-            </a:pPr>
-            <a:r>
-              <a:rPr lang="en-US" sz="2100" dirty="0">
+              <a:t>• A model may predict which communities have higher hospitalization risk, but.</a:t>
+            </a:r>
+            <a:endParaRPr lang="en-US" sz="1920" dirty="0"/>
+          </a:p>
+          <a:p>
+            <a:pPr indent="0" marL="0">
+              <a:buNone/>
+            </a:pPr>
+            <a:r>
+              <a:rPr lang="en-US" sz="1920" dirty="0">
                 <a:solidFill>
                   <a:srgbClr val="003A63"/>
                 </a:solidFill>
@@ -17422,9 +17426,9 @@
                 <a:ea typeface="Aptos" pitchFamily="34" charset="-122"/>
                 <a:cs typeface="Aptos" pitchFamily="34" charset="-120"/>
               </a:rPr>
-              <a:t>• A model may find that people who receive a service have better outcomes, but that pattern may.</a:t>
-            </a:r>
-            <a:endParaRPr lang="en-US" sz="2100" dirty="0"/>
+              <a:t>• A model may find that people who receive a service have better outcomes, but.</a:t>
+            </a:r>
+            <a:endParaRPr lang="en-US" sz="1920" dirty="0"/>
           </a:p>
         </p:txBody>
       </p:sp>
@@ -17436,12 +17440,12 @@
         </p:nvSpPr>
         <p:spPr>
           <a:xfrm>
-            <a:off x="7635240" y="1325880"/>
-            <a:ext cx="3474720" cy="1207008"/>
+            <a:off x="7543800" y="1325880"/>
+            <a:ext cx="3611880" cy="1261872"/>
           </a:xfrm>
           <a:prstGeom prst="roundRect">
             <a:avLst>
-              <a:gd name="adj" fmla="val 9091"/>
+              <a:gd name="adj" fmla="val 8696"/>
             </a:avLst>
           </a:prstGeom>
           <a:solidFill>
@@ -17463,8 +17467,8 @@
         </p:nvSpPr>
         <p:spPr>
           <a:xfrm>
-            <a:off x="7799832" y="1472184"/>
-            <a:ext cx="3145536" cy="256032"/>
+            <a:off x="7708392" y="1453896"/>
+            <a:ext cx="3282696" cy="228600"/>
           </a:xfrm>
           <a:prstGeom prst="rect">
             <a:avLst/>
@@ -17480,7 +17484,7 @@
               <a:buNone/>
             </a:pPr>
             <a:r>
-              <a:rPr lang="en-US" sz="1300" b="1" dirty="0">
+              <a:rPr lang="en-US" sz="1220" b="1" dirty="0">
                 <a:solidFill>
                   <a:srgbClr val="0068B7"/>
                 </a:solidFill>
@@ -17490,7 +17494,7 @@
               </a:rPr>
               <a:t>Core concept</a:t>
             </a:r>
-            <a:endParaRPr lang="en-US" sz="1300" dirty="0"/>
+            <a:endParaRPr lang="en-US" sz="1220" dirty="0"/>
           </a:p>
         </p:txBody>
       </p:sp>
@@ -17502,8 +17506,8 @@
         </p:nvSpPr>
         <p:spPr>
           <a:xfrm>
-            <a:off x="7799832" y="1801368"/>
-            <a:ext cx="3145536" cy="640080"/>
+            <a:off x="7708392" y="1764792"/>
+            <a:ext cx="3282696" cy="749808"/>
           </a:xfrm>
           <a:prstGeom prst="rect">
             <a:avLst/>
@@ -17521,7 +17525,7 @@
               <a:buNone/>
             </a:pPr>
             <a:r>
-              <a:rPr lang="en-US" sz="1320" dirty="0">
+              <a:rPr lang="en-US" sz="1220" dirty="0">
                 <a:solidFill>
                   <a:srgbClr val="17364A"/>
                 </a:solidFill>
@@ -17531,7 +17535,7 @@
               </a:rPr>
               <a:t>AI can make weak evidence appear stronger than it is.</a:t>
             </a:r>
-            <a:endParaRPr lang="en-US" sz="1320" dirty="0"/>
+            <a:endParaRPr lang="en-US" sz="1220" dirty="0"/>
           </a:p>
         </p:txBody>
       </p:sp>
@@ -17543,12 +17547,12 @@
         </p:nvSpPr>
         <p:spPr>
           <a:xfrm>
-            <a:off x="7635240" y="2670048"/>
-            <a:ext cx="3474720" cy="1377086"/>
+            <a:off x="7543800" y="2724912"/>
+            <a:ext cx="3611880" cy="1527048"/>
           </a:xfrm>
           <a:prstGeom prst="roundRect">
             <a:avLst>
-              <a:gd name="adj" fmla="val 7968"/>
+              <a:gd name="adj" fmla="val 7186"/>
             </a:avLst>
           </a:prstGeom>
           <a:solidFill>
@@ -17570,8 +17574,8 @@
         </p:nvSpPr>
         <p:spPr>
           <a:xfrm>
-            <a:off x="7799832" y="2816352"/>
-            <a:ext cx="3145536" cy="256032"/>
+            <a:off x="7708392" y="2852928"/>
+            <a:ext cx="3282696" cy="228600"/>
           </a:xfrm>
           <a:prstGeom prst="rect">
             <a:avLst/>
@@ -17587,7 +17591,7 @@
               <a:buNone/>
             </a:pPr>
             <a:r>
-              <a:rPr lang="en-US" sz="1300" b="1" dirty="0">
+              <a:rPr lang="en-US" sz="1220" b="1" dirty="0">
                 <a:solidFill>
                   <a:srgbClr val="0068B7"/>
                 </a:solidFill>
@@ -17597,7 +17601,7 @@
               </a:rPr>
               <a:t>Concept checkpoints</a:t>
             </a:r>
-            <a:endParaRPr lang="en-US" sz="1300" dirty="0"/>
+            <a:endParaRPr lang="en-US" sz="1220" dirty="0"/>
           </a:p>
         </p:txBody>
       </p:sp>
@@ -17609,8 +17613,8 @@
         </p:nvSpPr>
         <p:spPr>
           <a:xfrm>
-            <a:off x="7818120" y="3182112"/>
-            <a:ext cx="3090672" cy="718718"/>
+            <a:off x="7726680" y="3182112"/>
+            <a:ext cx="3227832" cy="960120"/>
           </a:xfrm>
           <a:prstGeom prst="rect">
             <a:avLst/>
@@ -17628,7 +17632,7 @@
               <a:buNone/>
             </a:pPr>
             <a:r>
-              <a:rPr lang="en-US" sz="1220" dirty="0">
+              <a:rPr lang="en-US" sz="1140" dirty="0">
                 <a:solidFill>
                   <a:srgbClr val="17364A"/>
                 </a:solidFill>
@@ -17636,16 +17640,16 @@
                 <a:ea typeface="Aptos" pitchFamily="34" charset="-122"/>
                 <a:cs typeface="Aptos" pitchFamily="34" charset="-120"/>
               </a:rPr>
-              <a:t>A model may predict which communities have higher hospitalization.</a:t>
-            </a:r>
-            <a:endParaRPr lang="en-US" sz="1220" dirty="0"/>
-          </a:p>
-          <a:p>
-            <a:pPr indent="0" marL="0">
-              <a:buNone/>
-            </a:pPr>
-            <a:r>
-              <a:rPr lang="en-US" sz="1220" dirty="0">
+              <a:t>A model may predict which communities have higher.</a:t>
+            </a:r>
+            <a:endParaRPr lang="en-US" sz="1140" dirty="0"/>
+          </a:p>
+          <a:p>
+            <a:pPr indent="0" marL="0">
+              <a:buNone/>
+            </a:pPr>
+            <a:r>
+              <a:rPr lang="en-US" sz="1140" dirty="0">
                 <a:solidFill>
                   <a:srgbClr val="17364A"/>
                 </a:solidFill>
@@ -17653,16 +17657,16 @@
                 <a:ea typeface="Aptos" pitchFamily="34" charset="-122"/>
                 <a:cs typeface="Aptos" pitchFamily="34" charset="-120"/>
               </a:rPr>
-              <a:t>A model may find that people who receive a service have better.</a:t>
-            </a:r>
-            <a:endParaRPr lang="en-US" sz="1220" dirty="0"/>
-          </a:p>
-          <a:p>
-            <a:pPr indent="0" marL="0">
-              <a:buNone/>
-            </a:pPr>
-            <a:r>
-              <a:rPr lang="en-US" sz="1220" dirty="0">
+              <a:t>A model may find that people who receive a service.</a:t>
+            </a:r>
+            <a:endParaRPr lang="en-US" sz="1140" dirty="0"/>
+          </a:p>
+          <a:p>
+            <a:pPr indent="0" marL="0">
+              <a:buNone/>
+            </a:pPr>
+            <a:r>
+              <a:rPr lang="en-US" sz="1140" dirty="0">
                 <a:solidFill>
                   <a:srgbClr val="17364A"/>
                 </a:solidFill>
@@ -17670,9 +17674,9 @@
                 <a:ea typeface="Aptos" pitchFamily="34" charset="-122"/>
                 <a:cs typeface="Aptos" pitchFamily="34" charset="-120"/>
               </a:rPr>
-              <a:t>Public health decisions often involve resource allocation, program.</a:t>
-            </a:r>
-            <a:endParaRPr lang="en-US" sz="1220" dirty="0"/>
+              <a:t>Public health decisions often involve resource.</a:t>
+            </a:r>
+            <a:endParaRPr lang="en-US" sz="1140" dirty="0"/>
           </a:p>
         </p:txBody>
       </p:sp>
@@ -17684,12 +17688,12 @@
         </p:nvSpPr>
         <p:spPr>
           <a:xfrm>
-            <a:off x="7635240" y="4184294"/>
-            <a:ext cx="3474720" cy="1466698"/>
+            <a:off x="7543800" y="4389120"/>
+            <a:ext cx="3611880" cy="1261872"/>
           </a:xfrm>
           <a:prstGeom prst="roundRect">
             <a:avLst>
-              <a:gd name="adj" fmla="val 7481"/>
+              <a:gd name="adj" fmla="val 8696"/>
             </a:avLst>
           </a:prstGeom>
           <a:solidFill>
@@ -17711,8 +17715,8 @@
         </p:nvSpPr>
         <p:spPr>
           <a:xfrm>
-            <a:off x="7799832" y="4330598"/>
-            <a:ext cx="3145536" cy="256032"/>
+            <a:off x="7708392" y="4517136"/>
+            <a:ext cx="3282696" cy="228600"/>
           </a:xfrm>
           <a:prstGeom prst="rect">
             <a:avLst/>
@@ -17728,7 +17732,7 @@
               <a:buNone/>
             </a:pPr>
             <a:r>
-              <a:rPr lang="en-US" sz="1300" b="1" dirty="0">
+              <a:rPr lang="en-US" sz="1220" b="1" dirty="0">
                 <a:solidFill>
                   <a:srgbClr val="0068B7"/>
                 </a:solidFill>
@@ -17738,7 +17742,7 @@
               </a:rPr>
               <a:t>Apply it</a:t>
             </a:r>
-            <a:endParaRPr lang="en-US" sz="1300" dirty="0"/>
+            <a:endParaRPr lang="en-US" sz="1220" dirty="0"/>
           </a:p>
         </p:txBody>
       </p:sp>
@@ -17750,8 +17754,8 @@
         </p:nvSpPr>
         <p:spPr>
           <a:xfrm>
-            <a:off x="7799832" y="4659782"/>
-            <a:ext cx="3145536" cy="899770"/>
+            <a:off x="7708392" y="4828032"/>
+            <a:ext cx="3282696" cy="749808"/>
           </a:xfrm>
           <a:prstGeom prst="rect">
             <a:avLst/>
@@ -17769,7 +17773,7 @@
               <a:buNone/>
             </a:pPr>
             <a:r>
-              <a:rPr lang="en-US" sz="1320" dirty="0">
+              <a:rPr lang="en-US" sz="1220" dirty="0">
                 <a:solidFill>
                   <a:srgbClr val="17364A"/>
                 </a:solidFill>
@@ -17777,9 +17781,9 @@
                 <a:ea typeface="Aptos" pitchFamily="34" charset="-122"/>
                 <a:cs typeface="Aptos" pitchFamily="34" charset="-120"/>
               </a:rPr>
-              <a:t>Connect the concept to public health purpose, responsible use, required safeguards, documentation, and the next action a department should take.</a:t>
-            </a:r>
-            <a:endParaRPr lang="en-US" sz="1320" dirty="0"/>
+              <a:t>Connect the concept to public health purpose, responsible use, required.</a:t>
+            </a:r>
+            <a:endParaRPr lang="en-US" sz="1220" dirty="0"/>
           </a:p>
         </p:txBody>
       </p:sp>

--- a/downloads/presentations/modules/anl-340.pptx
+++ b/downloads/presentations/modules/anl-340.pptx
@@ -11361,7 +11361,7 @@
                 <a:ea typeface="Aptos" pitchFamily="34" charset="-122"/>
                 <a:cs typeface="Aptos" pitchFamily="34" charset="-120"/>
               </a:rPr>
-              <a:t>• 1. Which statement best distinguishes prediction from causal inference?</a:t>
+              <a:t>1. Which statement best distinguishes prediction from causal inference?</a:t>
             </a:r>
             <a:endParaRPr lang="en-US" sz="1920" dirty="0"/>
           </a:p>
@@ -11378,7 +11378,7 @@
                 <a:ea typeface="Aptos" pitchFamily="34" charset="-122"/>
                 <a:cs typeface="Aptos" pitchFamily="34" charset="-120"/>
               </a:rPr>
-              <a:t>• 2. What is the best reason to assign an accountability owner?</a:t>
+              <a:t>2. What is the best reason to assign an accountability owner?</a:t>
             </a:r>
             <a:endParaRPr lang="en-US" sz="1920" dirty="0"/>
           </a:p>
@@ -11395,7 +11395,7 @@
                 <a:ea typeface="Aptos" pitchFamily="34" charset="-122"/>
                 <a:cs typeface="Aptos" pitchFamily="34" charset="-120"/>
               </a:rPr>
-              <a:t>• 3. When should an AI-supported workflow be escalated for review?</a:t>
+              <a:t>3. When should an AI-supported workflow be escalated for review?</a:t>
             </a:r>
             <a:endParaRPr lang="en-US" sz="1920" dirty="0"/>
           </a:p>
@@ -11502,7 +11502,7 @@
                 <a:ea typeface="Aptos" pitchFamily="34" charset="-122"/>
                 <a:cs typeface="Aptos" pitchFamily="34" charset="-120"/>
               </a:rPr>
-              <a:t>1. Which statement best distinguishes prediction from causal inference?</a:t>
+              <a:t>Which statement best distinguishes prediction from causal inference?</a:t>
             </a:r>
             <a:endParaRPr lang="en-US" sz="1220" dirty="0"/>
           </a:p>
@@ -11609,41 +11609,7 @@
                 <a:ea typeface="Aptos" pitchFamily="34" charset="-122"/>
                 <a:cs typeface="Aptos" pitchFamily="34" charset="-120"/>
               </a:rPr>
-              <a:t>1.</a:t>
-            </a:r>
-            <a:endParaRPr lang="en-US" sz="1140" dirty="0"/>
-          </a:p>
-          <a:p>
-            <a:pPr indent="0" marL="0">
-              <a:buNone/>
-            </a:pPr>
-            <a:r>
-              <a:rPr lang="en-US" sz="1140" dirty="0">
-                <a:solidFill>
-                  <a:srgbClr val="17364A"/>
-                </a:solidFill>
-                <a:latin typeface="Aptos" pitchFamily="34" charset="0"/>
-                <a:ea typeface="Aptos" pitchFamily="34" charset="-122"/>
-                <a:cs typeface="Aptos" pitchFamily="34" charset="-120"/>
-              </a:rPr>
               <a:t>Which statement best distinguishes prediction from.</a:t>
-            </a:r>
-            <a:endParaRPr lang="en-US" sz="1140" dirty="0"/>
-          </a:p>
-          <a:p>
-            <a:pPr indent="0" marL="0">
-              <a:buNone/>
-            </a:pPr>
-            <a:r>
-              <a:rPr lang="en-US" sz="1140" dirty="0">
-                <a:solidFill>
-                  <a:srgbClr val="17364A"/>
-                </a:solidFill>
-                <a:latin typeface="Aptos" pitchFamily="34" charset="0"/>
-                <a:ea typeface="Aptos" pitchFamily="34" charset="-122"/>
-                <a:cs typeface="Aptos" pitchFamily="34" charset="-120"/>
-              </a:rPr>
-              <a:t>2.</a:t>
             </a:r>
             <a:endParaRPr lang="en-US" sz="1140" dirty="0"/>
           </a:p>
